--- a/out/登録の流れ_書類準備まで.pptx
+++ b/out/登録の流れ_書類準備まで.pptx
@@ -13,6 +13,11 @@
     <p:sldId id="258" r:id="rId12"/>
     <p:sldId id="259" r:id="rId13"/>
     <p:sldId id="260" r:id="rId14"/>
+    <p:sldId id="261" r:id="rId15"/>
+    <p:sldId id="262" r:id="rId16"/>
+    <p:sldId id="263" r:id="rId17"/>
+    <p:sldId id="264" r:id="rId18"/>
+    <p:sldId id="265" r:id="rId19"/>
   </p:sldIdLst>
   <p:sldSz cx="12192000" cy="6858000"/>
   <p:notesSz cx="6858000" cy="9144000"/>
@@ -3863,6 +3868,676 @@
 </p:sld>
 </file>
 
+<file path=ppt/slides/slide10.xml><?xml version="1.0" encoding="utf-8"?>
+<p:sld xmlns:a="http://schemas.openxmlformats.org/drawingml/2006/main" xmlns:p="http://schemas.openxmlformats.org/presentationml/2006/main" xmlns:r="http://schemas.openxmlformats.org/officeDocument/2006/relationships">
+  <p:cSld>
+    <p:spTree>
+      <p:nvGrpSpPr>
+        <p:cNvPr id="1" name=""/>
+        <p:cNvGrpSpPr/>
+        <p:nvPr/>
+      </p:nvGrpSpPr>
+      <p:grpSpPr/>
+      <p:sp>
+        <p:nvSpPr>
+          <p:cNvPr id="2" name="Rounded Rectangle 1"/>
+          <p:cNvSpPr/>
+          <p:nvPr/>
+        </p:nvSpPr>
+        <p:spPr>
+          <a:xfrm>
+            <a:off x="411480" y="777240"/>
+            <a:ext cx="502920" cy="384048"/>
+          </a:xfrm>
+          <a:prstGeom prst="roundRect">
+            <a:avLst>
+              <a:gd name="adj" fmla="val 8000"/>
+            </a:avLst>
+          </a:prstGeom>
+          <a:solidFill>
+            <a:srgbClr val="4FB6BE"/>
+          </a:solidFill>
+          <a:ln>
+            <a:noFill/>
+          </a:ln>
+          <a:effectLst/>
+        </p:spPr>
+        <p:style>
+          <a:lnRef idx="1">
+            <a:schemeClr val="accent1"/>
+          </a:lnRef>
+          <a:fillRef idx="3">
+            <a:schemeClr val="accent1"/>
+          </a:fillRef>
+          <a:effectRef idx="2">
+            <a:schemeClr val="accent1"/>
+          </a:effectRef>
+          <a:fontRef idx="minor">
+            <a:schemeClr val="lt1"/>
+          </a:fontRef>
+        </p:style>
+        <p:txBody>
+          <a:bodyPr rtlCol="0" anchor="ctr"/>
+          <a:lstStyle/>
+          <a:p>
+            <a:pPr algn="ctr"/>
+          </a:p>
+        </p:txBody>
+      </p:sp>
+      <p:sp>
+        <p:nvSpPr>
+          <p:cNvPr id="3" name="TextBox 2"/>
+          <p:cNvSpPr txBox="1"/>
+          <p:nvPr/>
+        </p:nvSpPr>
+        <p:spPr>
+          <a:xfrm>
+            <a:off x="411480" y="777240"/>
+            <a:ext cx="502920" cy="384048"/>
+          </a:xfrm>
+          <a:prstGeom prst="rect">
+            <a:avLst/>
+          </a:prstGeom>
+          <a:noFill/>
+        </p:spPr>
+        <p:txBody>
+          <a:bodyPr wrap="square" lIns="45720" rIns="45720" tIns="22860" bIns="22860" anchor="ctr">
+            <a:spAutoFit/>
+          </a:bodyPr>
+          <a:lstStyle/>
+          <a:p>
+            <a:pPr algn="ctr"/>
+            <a:r>
+              <a:rPr sz="1200" b="1">
+                <a:solidFill>
+                  <a:srgbClr val="FFFFFF"/>
+                </a:solidFill>
+                <a:latin typeface="Yu Gothic"/>
+              </a:rPr>
+              <a:t>④-4</a:t>
+            </a:r>
+          </a:p>
+        </p:txBody>
+      </p:sp>
+      <p:sp>
+        <p:nvSpPr>
+          <p:cNvPr id="4" name="TextBox 3"/>
+          <p:cNvSpPr txBox="1"/>
+          <p:nvPr/>
+        </p:nvSpPr>
+        <p:spPr>
+          <a:xfrm>
+            <a:off x="1078992" y="777240"/>
+            <a:ext cx="10607040" cy="384048"/>
+          </a:xfrm>
+          <a:prstGeom prst="rect">
+            <a:avLst/>
+          </a:prstGeom>
+          <a:noFill/>
+        </p:spPr>
+        <p:txBody>
+          <a:bodyPr wrap="square" lIns="45720" rIns="45720" tIns="22860" bIns="22860" anchor="ctr">
+            <a:spAutoFit/>
+          </a:bodyPr>
+          <a:lstStyle/>
+          <a:p>
+            <a:pPr algn="l"/>
+            <a:r>
+              <a:rPr sz="2000" b="1">
+                <a:solidFill>
+                  <a:srgbClr val="333333"/>
+                </a:solidFill>
+                <a:latin typeface="Yu Gothic"/>
+              </a:rPr>
+              <a:t>開始する</a:t>
+            </a:r>
+          </a:p>
+        </p:txBody>
+      </p:sp>
+      <p:pic>
+        <p:nvPicPr>
+          <p:cNvPr id="5" name="Picture 4" descr="4.jpg"/>
+          <p:cNvPicPr>
+            <a:picLocks noChangeAspect="1"/>
+          </p:cNvPicPr>
+          <p:nvPr/>
+        </p:nvPicPr>
+        <p:blipFill>
+          <a:blip r:embed="rId2"/>
+          <a:stretch>
+            <a:fillRect/>
+          </a:stretch>
+        </p:blipFill>
+        <p:spPr>
+          <a:xfrm>
+            <a:off x="1097280" y="1280160"/>
+            <a:ext cx="2323759" cy="5029200"/>
+          </a:xfrm>
+          <a:prstGeom prst="rect">
+            <a:avLst/>
+          </a:prstGeom>
+          <a:ln w="12700">
+            <a:solidFill>
+              <a:srgbClr val="BBBBBB"/>
+            </a:solidFill>
+          </a:ln>
+        </p:spPr>
+      </p:pic>
+      <p:sp>
+        <p:nvSpPr>
+          <p:cNvPr id="6" name="Rounded Rectangle 5"/>
+          <p:cNvSpPr/>
+          <p:nvPr/>
+        </p:nvSpPr>
+        <p:spPr>
+          <a:xfrm>
+            <a:off x="1097280" y="1802164"/>
+            <a:ext cx="2323759" cy="533229"/>
+          </a:xfrm>
+          <a:prstGeom prst="roundRect">
+            <a:avLst>
+              <a:gd name="adj" fmla="val 12000"/>
+            </a:avLst>
+          </a:prstGeom>
+          <a:noFill/>
+          <a:ln w="38100">
+            <a:solidFill>
+              <a:srgbClr val="4CAF6A"/>
+            </a:solidFill>
+          </a:ln>
+          <a:effectLst/>
+        </p:spPr>
+        <p:style>
+          <a:lnRef idx="1">
+            <a:schemeClr val="accent1"/>
+          </a:lnRef>
+          <a:fillRef idx="3">
+            <a:schemeClr val="accent1"/>
+          </a:fillRef>
+          <a:effectRef idx="2">
+            <a:schemeClr val="accent1"/>
+          </a:effectRef>
+          <a:fontRef idx="minor">
+            <a:schemeClr val="lt1"/>
+          </a:fontRef>
+        </p:style>
+        <p:txBody>
+          <a:bodyPr rtlCol="0" anchor="ctr"/>
+          <a:lstStyle/>
+          <a:p>
+            <a:pPr algn="ctr"/>
+          </a:p>
+        </p:txBody>
+      </p:sp>
+      <p:cxnSp>
+        <p:nvCxnSpPr>
+          <p:cNvPr id="7" name="Connector 6"/>
+          <p:cNvCxnSpPr/>
+          <p:nvPr/>
+        </p:nvCxnSpPr>
+        <p:spPr>
+          <a:xfrm>
+            <a:off x="3421039" y="2068778"/>
+            <a:ext cx="1288121" cy="0"/>
+          </a:xfrm>
+          <a:prstGeom prst="line">
+            <a:avLst/>
+          </a:prstGeom>
+          <a:ln w="22225">
+            <a:solidFill>
+              <a:srgbClr val="4CAF6A"/>
+            </a:solidFill>
+          </a:ln>
+        </p:spPr>
+        <p:style>
+          <a:lnRef idx="2">
+            <a:schemeClr val="accent1"/>
+          </a:lnRef>
+          <a:fillRef idx="0">
+            <a:schemeClr val="accent1"/>
+          </a:fillRef>
+          <a:effectRef idx="1">
+            <a:schemeClr val="accent1"/>
+          </a:effectRef>
+          <a:fontRef idx="minor">
+            <a:schemeClr val="tx1"/>
+          </a:fontRef>
+        </p:style>
+      </p:cxnSp>
+      <p:sp>
+        <p:nvSpPr>
+          <p:cNvPr id="8" name="Oval 7"/>
+          <p:cNvSpPr/>
+          <p:nvPr/>
+        </p:nvSpPr>
+        <p:spPr>
+          <a:xfrm>
+            <a:off x="4745736" y="1876754"/>
+            <a:ext cx="384048" cy="384048"/>
+          </a:xfrm>
+          <a:prstGeom prst="ellipse">
+            <a:avLst/>
+          </a:prstGeom>
+          <a:solidFill>
+            <a:srgbClr val="4CAF6A"/>
+          </a:solidFill>
+          <a:ln w="19050">
+            <a:solidFill>
+              <a:srgbClr val="FFFFFF"/>
+            </a:solidFill>
+          </a:ln>
+          <a:effectLst/>
+        </p:spPr>
+        <p:style>
+          <a:lnRef idx="1">
+            <a:schemeClr val="accent1"/>
+          </a:lnRef>
+          <a:fillRef idx="3">
+            <a:schemeClr val="accent1"/>
+          </a:fillRef>
+          <a:effectRef idx="2">
+            <a:schemeClr val="accent1"/>
+          </a:effectRef>
+          <a:fontRef idx="minor">
+            <a:schemeClr val="lt1"/>
+          </a:fontRef>
+        </p:style>
+        <p:txBody>
+          <a:bodyPr rtlCol="0" anchor="ctr" lIns="0" rIns="0" tIns="0" bIns="0"/>
+          <a:lstStyle/>
+          <a:p>
+            <a:pPr algn="ctr"/>
+            <a:r>
+              <a:rPr sz="1400" b="1">
+                <a:solidFill>
+                  <a:srgbClr val="FFFFFF"/>
+                </a:solidFill>
+                <a:latin typeface="Yu Gothic"/>
+              </a:rPr>
+              <a:t>1</a:t>
+            </a:r>
+          </a:p>
+        </p:txBody>
+      </p:sp>
+      <p:sp>
+        <p:nvSpPr>
+          <p:cNvPr id="9" name="TextBox 8"/>
+          <p:cNvSpPr txBox="1"/>
+          <p:nvPr/>
+        </p:nvSpPr>
+        <p:spPr>
+          <a:xfrm>
+            <a:off x="5303520" y="1794458"/>
+            <a:ext cx="6583680" cy="411480"/>
+          </a:xfrm>
+          <a:prstGeom prst="rect">
+            <a:avLst/>
+          </a:prstGeom>
+          <a:noFill/>
+        </p:spPr>
+        <p:txBody>
+          <a:bodyPr wrap="square" lIns="45720" rIns="45720" tIns="22860" bIns="22860" anchor="ctr">
+            <a:spAutoFit/>
+          </a:bodyPr>
+          <a:lstStyle/>
+          <a:p>
+            <a:pPr algn="l"/>
+            <a:r>
+              <a:rPr sz="2000" b="1">
+                <a:solidFill>
+                  <a:srgbClr val="333333"/>
+                </a:solidFill>
+                <a:latin typeface="Yu Gothic"/>
+              </a:rPr>
+              <a:t>Complete</a:t>
+            </a:r>
+          </a:p>
+        </p:txBody>
+      </p:sp>
+      <p:sp>
+        <p:nvSpPr>
+          <p:cNvPr id="10" name="TextBox 9"/>
+          <p:cNvSpPr txBox="1"/>
+          <p:nvPr/>
+        </p:nvSpPr>
+        <p:spPr>
+          <a:xfrm>
+            <a:off x="5303520" y="2178506"/>
+            <a:ext cx="6583680" cy="365760"/>
+          </a:xfrm>
+          <a:prstGeom prst="rect">
+            <a:avLst/>
+          </a:prstGeom>
+          <a:noFill/>
+        </p:spPr>
+        <p:txBody>
+          <a:bodyPr wrap="square" lIns="45720" rIns="45720" tIns="22860" bIns="22860" anchor="t">
+            <a:spAutoFit/>
+          </a:bodyPr>
+          <a:lstStyle/>
+          <a:p>
+            <a:pPr algn="l"/>
+            <a:r>
+              <a:rPr sz="1400" b="0">
+                <a:solidFill>
+                  <a:srgbClr val="666666"/>
+                </a:solidFill>
+                <a:latin typeface="Yu Gothic"/>
+              </a:rPr>
+              <a:t>完了している項目</a:t>
+            </a:r>
+          </a:p>
+        </p:txBody>
+      </p:sp>
+      <p:sp>
+        <p:nvSpPr>
+          <p:cNvPr id="11" name="Rounded Rectangle 10"/>
+          <p:cNvSpPr/>
+          <p:nvPr/>
+        </p:nvSpPr>
+        <p:spPr>
+          <a:xfrm>
+            <a:off x="1097280" y="2346619"/>
+            <a:ext cx="2323759" cy="870006"/>
+          </a:xfrm>
+          <a:prstGeom prst="roundRect">
+            <a:avLst>
+              <a:gd name="adj" fmla="val 12000"/>
+            </a:avLst>
+          </a:prstGeom>
+          <a:noFill/>
+          <a:ln w="38100">
+            <a:solidFill>
+              <a:srgbClr val="F29A3C"/>
+            </a:solidFill>
+          </a:ln>
+          <a:effectLst/>
+        </p:spPr>
+        <p:style>
+          <a:lnRef idx="1">
+            <a:schemeClr val="accent1"/>
+          </a:lnRef>
+          <a:fillRef idx="3">
+            <a:schemeClr val="accent1"/>
+          </a:fillRef>
+          <a:effectRef idx="2">
+            <a:schemeClr val="accent1"/>
+          </a:effectRef>
+          <a:fontRef idx="minor">
+            <a:schemeClr val="lt1"/>
+          </a:fontRef>
+        </p:style>
+        <p:txBody>
+          <a:bodyPr rtlCol="0" anchor="ctr"/>
+          <a:lstStyle/>
+          <a:p>
+            <a:pPr algn="ctr"/>
+          </a:p>
+        </p:txBody>
+      </p:sp>
+      <p:cxnSp>
+        <p:nvCxnSpPr>
+          <p:cNvPr id="12" name="Connector 11"/>
+          <p:cNvCxnSpPr/>
+          <p:nvPr/>
+        </p:nvCxnSpPr>
+        <p:spPr>
+          <a:xfrm>
+            <a:off x="3421039" y="2781623"/>
+            <a:ext cx="1288121" cy="110115"/>
+          </a:xfrm>
+          <a:prstGeom prst="line">
+            <a:avLst/>
+          </a:prstGeom>
+          <a:ln w="22225">
+            <a:solidFill>
+              <a:srgbClr val="F29A3C"/>
+            </a:solidFill>
+          </a:ln>
+        </p:spPr>
+        <p:style>
+          <a:lnRef idx="2">
+            <a:schemeClr val="accent1"/>
+          </a:lnRef>
+          <a:fillRef idx="0">
+            <a:schemeClr val="accent1"/>
+          </a:fillRef>
+          <a:effectRef idx="1">
+            <a:schemeClr val="accent1"/>
+          </a:effectRef>
+          <a:fontRef idx="minor">
+            <a:schemeClr val="tx1"/>
+          </a:fontRef>
+        </p:style>
+      </p:cxnSp>
+      <p:sp>
+        <p:nvSpPr>
+          <p:cNvPr id="13" name="Oval 12"/>
+          <p:cNvSpPr/>
+          <p:nvPr/>
+        </p:nvSpPr>
+        <p:spPr>
+          <a:xfrm>
+            <a:off x="4745736" y="2699714"/>
+            <a:ext cx="384048" cy="384048"/>
+          </a:xfrm>
+          <a:prstGeom prst="ellipse">
+            <a:avLst/>
+          </a:prstGeom>
+          <a:solidFill>
+            <a:srgbClr val="F29A3C"/>
+          </a:solidFill>
+          <a:ln w="19050">
+            <a:solidFill>
+              <a:srgbClr val="FFFFFF"/>
+            </a:solidFill>
+          </a:ln>
+          <a:effectLst/>
+        </p:spPr>
+        <p:style>
+          <a:lnRef idx="1">
+            <a:schemeClr val="accent1"/>
+          </a:lnRef>
+          <a:fillRef idx="3">
+            <a:schemeClr val="accent1"/>
+          </a:fillRef>
+          <a:effectRef idx="2">
+            <a:schemeClr val="accent1"/>
+          </a:effectRef>
+          <a:fontRef idx="minor">
+            <a:schemeClr val="lt1"/>
+          </a:fontRef>
+        </p:style>
+        <p:txBody>
+          <a:bodyPr rtlCol="0" anchor="ctr" lIns="0" rIns="0" tIns="0" bIns="0"/>
+          <a:lstStyle/>
+          <a:p>
+            <a:pPr algn="ctr"/>
+            <a:r>
+              <a:rPr sz="1400" b="1">
+                <a:solidFill>
+                  <a:srgbClr val="FFFFFF"/>
+                </a:solidFill>
+                <a:latin typeface="Yu Gothic"/>
+              </a:rPr>
+              <a:t>2</a:t>
+            </a:r>
+          </a:p>
+        </p:txBody>
+      </p:sp>
+      <p:sp>
+        <p:nvSpPr>
+          <p:cNvPr id="14" name="TextBox 13"/>
+          <p:cNvSpPr txBox="1"/>
+          <p:nvPr/>
+        </p:nvSpPr>
+        <p:spPr>
+          <a:xfrm>
+            <a:off x="5303520" y="2617418"/>
+            <a:ext cx="6583680" cy="411480"/>
+          </a:xfrm>
+          <a:prstGeom prst="rect">
+            <a:avLst/>
+          </a:prstGeom>
+          <a:noFill/>
+        </p:spPr>
+        <p:txBody>
+          <a:bodyPr wrap="square" lIns="45720" rIns="45720" tIns="22860" bIns="22860" anchor="ctr">
+            <a:spAutoFit/>
+          </a:bodyPr>
+          <a:lstStyle/>
+          <a:p>
+            <a:pPr algn="l"/>
+            <a:r>
+              <a:rPr sz="2000" b="1">
+                <a:solidFill>
+                  <a:srgbClr val="333333"/>
+                </a:solidFill>
+                <a:latin typeface="Yu Gothic"/>
+              </a:rPr>
+              <a:t>Pending</a:t>
+            </a:r>
+          </a:p>
+        </p:txBody>
+      </p:sp>
+      <p:sp>
+        <p:nvSpPr>
+          <p:cNvPr id="15" name="TextBox 14"/>
+          <p:cNvSpPr txBox="1"/>
+          <p:nvPr/>
+        </p:nvSpPr>
+        <p:spPr>
+          <a:xfrm>
+            <a:off x="5303520" y="3001466"/>
+            <a:ext cx="6583680" cy="365760"/>
+          </a:xfrm>
+          <a:prstGeom prst="rect">
+            <a:avLst/>
+          </a:prstGeom>
+          <a:noFill/>
+        </p:spPr>
+        <p:txBody>
+          <a:bodyPr wrap="square" lIns="45720" rIns="45720" tIns="22860" bIns="22860" anchor="t">
+            <a:spAutoFit/>
+          </a:bodyPr>
+          <a:lstStyle/>
+          <a:p>
+            <a:pPr algn="l"/>
+            <a:r>
+              <a:rPr sz="1400" b="0">
+                <a:solidFill>
+                  <a:srgbClr val="666666"/>
+                </a:solidFill>
+                <a:latin typeface="Yu Gothic"/>
+              </a:rPr>
+              <a:t>アプリの指示に従って進める</a:t>
+            </a:r>
+          </a:p>
+        </p:txBody>
+      </p:sp>
+      <p:sp>
+        <p:nvSpPr>
+          <p:cNvPr id="16" name="Rounded Rectangle 15"/>
+          <p:cNvSpPr/>
+          <p:nvPr/>
+        </p:nvSpPr>
+        <p:spPr>
+          <a:xfrm>
+            <a:off x="4663440" y="4663440"/>
+            <a:ext cx="6949440" cy="822960"/>
+          </a:xfrm>
+          <a:prstGeom prst="roundRect">
+            <a:avLst>
+              <a:gd name="adj" fmla="val 8000"/>
+            </a:avLst>
+          </a:prstGeom>
+          <a:solidFill>
+            <a:srgbClr val="FFF6E0"/>
+          </a:solidFill>
+          <a:ln w="19050">
+            <a:solidFill>
+              <a:srgbClr val="F29A3C"/>
+            </a:solidFill>
+          </a:ln>
+          <a:effectLst/>
+        </p:spPr>
+        <p:style>
+          <a:lnRef idx="1">
+            <a:schemeClr val="accent1"/>
+          </a:lnRef>
+          <a:fillRef idx="3">
+            <a:schemeClr val="accent1"/>
+          </a:fillRef>
+          <a:effectRef idx="2">
+            <a:schemeClr val="accent1"/>
+          </a:effectRef>
+          <a:fontRef idx="minor">
+            <a:schemeClr val="lt1"/>
+          </a:fontRef>
+        </p:style>
+        <p:txBody>
+          <a:bodyPr rtlCol="0" anchor="ctr"/>
+          <a:lstStyle/>
+          <a:p>
+            <a:pPr algn="ctr"/>
+          </a:p>
+        </p:txBody>
+      </p:sp>
+      <p:sp>
+        <p:nvSpPr>
+          <p:cNvPr id="17" name="TextBox 16"/>
+          <p:cNvSpPr txBox="1"/>
+          <p:nvPr/>
+        </p:nvSpPr>
+        <p:spPr>
+          <a:xfrm>
+            <a:off x="4800600" y="4663440"/>
+            <a:ext cx="6675120" cy="822960"/>
+          </a:xfrm>
+          <a:prstGeom prst="rect">
+            <a:avLst/>
+          </a:prstGeom>
+          <a:noFill/>
+        </p:spPr>
+        <p:txBody>
+          <a:bodyPr wrap="square" lIns="45720" rIns="45720" tIns="22860" bIns="22860" anchor="ctr">
+            <a:spAutoFit/>
+          </a:bodyPr>
+          <a:lstStyle/>
+          <a:p>
+            <a:pPr algn="l"/>
+            <a:r>
+              <a:rPr sz="1400" b="1">
+                <a:solidFill>
+                  <a:srgbClr val="333333"/>
+                </a:solidFill>
+                <a:latin typeface="Yu Gothic"/>
+              </a:rPr>
+              <a:t>全部 Complete になるまで進める</a:t>
+            </a:r>
+          </a:p>
+          <a:p>
+            <a:pPr algn="l"/>
+            <a:r>
+              <a:rPr sz="1400" b="1">
+                <a:solidFill>
+                  <a:srgbClr val="333333"/>
+                </a:solidFill>
+                <a:latin typeface="Yu Gothic"/>
+              </a:rPr>
+              <a:t>（免許証の確認は24時間以内にメールが届く）</a:t>
+            </a:r>
+          </a:p>
+        </p:txBody>
+      </p:sp>
+    </p:spTree>
+  </p:cSld>
+  <p:clrMapOvr>
+    <a:masterClrMapping/>
+  </p:clrMapOvr>
+</p:sld>
+</file>
+
 <file path=ppt/slides/slide2.xml><?xml version="1.0" encoding="utf-8"?>
 <p:sld xmlns:a="http://schemas.openxmlformats.org/drawingml/2006/main" xmlns:p="http://schemas.openxmlformats.org/presentationml/2006/main" xmlns:r="http://schemas.openxmlformats.org/officeDocument/2006/relationships">
   <p:cSld>
@@ -4112,7 +4787,7 @@
                 </a:solidFill>
                 <a:latin typeface="Yu Gothic"/>
               </a:rPr>
-              <a:t>今回</a:t>
+              <a:t>作成済</a:t>
             </a:r>
           </a:p>
         </p:txBody>
@@ -4275,7 +4950,7 @@
                 </a:solidFill>
                 <a:latin typeface="Yu Gothic"/>
               </a:rPr>
-              <a:t>今回</a:t>
+              <a:t>作成済</a:t>
             </a:r>
           </a:p>
         </p:txBody>
@@ -4495,7 +5170,7 @@
             </a:avLst>
           </a:prstGeom>
           <a:solidFill>
-            <a:srgbClr val="EEEEEE"/>
+            <a:srgbClr val="4FB6BE"/>
           </a:solidFill>
           <a:ln>
             <a:noFill/>
@@ -4550,7 +5225,7 @@
             <a:r>
               <a:rPr sz="1700" b="1">
                 <a:solidFill>
-                  <a:srgbClr val="666666"/>
+                  <a:srgbClr val="FFFFFF"/>
                 </a:solidFill>
                 <a:latin typeface="Yu Gothic"/>
               </a:rPr>
@@ -4562,7 +5237,7 @@
             <a:r>
               <a:rPr sz="1700" b="1">
                 <a:solidFill>
-                  <a:srgbClr val="666666"/>
+                  <a:srgbClr val="FFFFFF"/>
                 </a:solidFill>
                 <a:latin typeface="Yu Gothic"/>
               </a:rPr>
@@ -4597,11 +5272,11 @@
             <a:r>
               <a:rPr sz="1300" b="1">
                 <a:solidFill>
-                  <a:srgbClr val="666666"/>
-                </a:solidFill>
-                <a:latin typeface="Yu Gothic"/>
-              </a:rPr>
-              <a:t>作成中</a:t>
+                  <a:srgbClr val="4FB6BE"/>
+                </a:solidFill>
+                <a:latin typeface="Yu Gothic"/>
+              </a:rPr>
+              <a:t>途中まで</a:t>
             </a:r>
           </a:p>
         </p:txBody>
@@ -9951,6 +10626,2961 @@
                 <a:latin typeface="Yu Gothic"/>
               </a:rPr>
               <a:t>外国籍の方も免許証記載の名前</a:t>
+            </a:r>
+          </a:p>
+        </p:txBody>
+      </p:sp>
+    </p:spTree>
+  </p:cSld>
+  <p:clrMapOvr>
+    <a:masterClrMapping/>
+  </p:clrMapOvr>
+</p:sld>
+</file>
+
+<file path=ppt/slides/slide6.xml><?xml version="1.0" encoding="utf-8"?>
+<p:sld xmlns:a="http://schemas.openxmlformats.org/drawingml/2006/main" xmlns:p="http://schemas.openxmlformats.org/presentationml/2006/main" xmlns:r="http://schemas.openxmlformats.org/officeDocument/2006/relationships">
+  <p:cSld>
+    <p:spTree>
+      <p:nvGrpSpPr>
+        <p:cNvPr id="1" name=""/>
+        <p:cNvGrpSpPr/>
+        <p:nvPr/>
+      </p:nvGrpSpPr>
+      <p:grpSpPr/>
+      <p:sp>
+        <p:nvSpPr>
+          <p:cNvPr id="2" name="Rounded Rectangle 1"/>
+          <p:cNvSpPr/>
+          <p:nvPr/>
+        </p:nvSpPr>
+        <p:spPr>
+          <a:xfrm>
+            <a:off x="411480" y="777240"/>
+            <a:ext cx="502920" cy="384048"/>
+          </a:xfrm>
+          <a:prstGeom prst="roundRect">
+            <a:avLst>
+              <a:gd name="adj" fmla="val 8000"/>
+            </a:avLst>
+          </a:prstGeom>
+          <a:solidFill>
+            <a:srgbClr val="4FB6BE"/>
+          </a:solidFill>
+          <a:ln>
+            <a:noFill/>
+          </a:ln>
+          <a:effectLst/>
+        </p:spPr>
+        <p:style>
+          <a:lnRef idx="1">
+            <a:schemeClr val="accent1"/>
+          </a:lnRef>
+          <a:fillRef idx="3">
+            <a:schemeClr val="accent1"/>
+          </a:fillRef>
+          <a:effectRef idx="2">
+            <a:schemeClr val="accent1"/>
+          </a:effectRef>
+          <a:fontRef idx="minor">
+            <a:schemeClr val="lt1"/>
+          </a:fontRef>
+        </p:style>
+        <p:txBody>
+          <a:bodyPr rtlCol="0" anchor="ctr"/>
+          <a:lstStyle/>
+          <a:p>
+            <a:pPr algn="ctr"/>
+          </a:p>
+        </p:txBody>
+      </p:sp>
+      <p:sp>
+        <p:nvSpPr>
+          <p:cNvPr id="3" name="TextBox 2"/>
+          <p:cNvSpPr txBox="1"/>
+          <p:nvPr/>
+        </p:nvSpPr>
+        <p:spPr>
+          <a:xfrm>
+            <a:off x="411480" y="777240"/>
+            <a:ext cx="502920" cy="384048"/>
+          </a:xfrm>
+          <a:prstGeom prst="rect">
+            <a:avLst/>
+          </a:prstGeom>
+          <a:noFill/>
+        </p:spPr>
+        <p:txBody>
+          <a:bodyPr wrap="square" lIns="45720" rIns="45720" tIns="22860" bIns="22860" anchor="ctr">
+            <a:spAutoFit/>
+          </a:bodyPr>
+          <a:lstStyle/>
+          <a:p>
+            <a:pPr algn="ctr"/>
+            <a:r>
+              <a:rPr sz="1200" b="1">
+                <a:solidFill>
+                  <a:srgbClr val="FFFFFF"/>
+                </a:solidFill>
+                <a:latin typeface="Yu Gothic"/>
+              </a:rPr>
+              <a:t>④</a:t>
+            </a:r>
+          </a:p>
+        </p:txBody>
+      </p:sp>
+      <p:sp>
+        <p:nvSpPr>
+          <p:cNvPr id="4" name="TextBox 3"/>
+          <p:cNvSpPr txBox="1"/>
+          <p:nvPr/>
+        </p:nvSpPr>
+        <p:spPr>
+          <a:xfrm>
+            <a:off x="1078992" y="777240"/>
+            <a:ext cx="10607040" cy="384048"/>
+          </a:xfrm>
+          <a:prstGeom prst="rect">
+            <a:avLst/>
+          </a:prstGeom>
+          <a:noFill/>
+        </p:spPr>
+        <p:txBody>
+          <a:bodyPr wrap="square" lIns="45720" rIns="45720" tIns="22860" bIns="22860" anchor="ctr">
+            <a:spAutoFit/>
+          </a:bodyPr>
+          <a:lstStyle/>
+          <a:p>
+            <a:pPr algn="l"/>
+            <a:r>
+              <a:rPr sz="2000" b="1">
+                <a:solidFill>
+                  <a:srgbClr val="333333"/>
+                </a:solidFill>
+                <a:latin typeface="Yu Gothic"/>
+              </a:rPr>
+              <a:t>Amazon登録（途中まで）</a:t>
+            </a:r>
+          </a:p>
+        </p:txBody>
+      </p:sp>
+      <p:sp>
+        <p:nvSpPr>
+          <p:cNvPr id="5" name="Rounded Rectangle 4"/>
+          <p:cNvSpPr/>
+          <p:nvPr/>
+        </p:nvSpPr>
+        <p:spPr>
+          <a:xfrm>
+            <a:off x="548640" y="1280160"/>
+            <a:ext cx="11064240" cy="548640"/>
+          </a:xfrm>
+          <a:prstGeom prst="roundRect">
+            <a:avLst>
+              <a:gd name="adj" fmla="val 8000"/>
+            </a:avLst>
+          </a:prstGeom>
+          <a:solidFill>
+            <a:srgbClr val="E3F4F6"/>
+          </a:solidFill>
+          <a:ln w="12700">
+            <a:solidFill>
+              <a:srgbClr val="4FB6BE"/>
+            </a:solidFill>
+          </a:ln>
+          <a:effectLst/>
+        </p:spPr>
+        <p:style>
+          <a:lnRef idx="1">
+            <a:schemeClr val="accent1"/>
+          </a:lnRef>
+          <a:fillRef idx="3">
+            <a:schemeClr val="accent1"/>
+          </a:fillRef>
+          <a:effectRef idx="2">
+            <a:schemeClr val="accent1"/>
+          </a:effectRef>
+          <a:fontRef idx="minor">
+            <a:schemeClr val="lt1"/>
+          </a:fontRef>
+        </p:style>
+        <p:txBody>
+          <a:bodyPr rtlCol="0" anchor="ctr"/>
+          <a:lstStyle/>
+          <a:p>
+            <a:pPr algn="ctr"/>
+          </a:p>
+        </p:txBody>
+      </p:sp>
+      <p:sp>
+        <p:nvSpPr>
+          <p:cNvPr id="6" name="TextBox 5"/>
+          <p:cNvSpPr txBox="1"/>
+          <p:nvPr/>
+        </p:nvSpPr>
+        <p:spPr>
+          <a:xfrm>
+            <a:off x="548640" y="1280160"/>
+            <a:ext cx="11064240" cy="548640"/>
+          </a:xfrm>
+          <a:prstGeom prst="rect">
+            <a:avLst/>
+          </a:prstGeom>
+          <a:noFill/>
+        </p:spPr>
+        <p:txBody>
+          <a:bodyPr wrap="square" lIns="45720" rIns="45720" tIns="22860" bIns="22860" anchor="ctr">
+            <a:spAutoFit/>
+          </a:bodyPr>
+          <a:lstStyle/>
+          <a:p>
+            <a:pPr algn="ctr"/>
+            <a:r>
+              <a:rPr sz="1600" b="1">
+                <a:solidFill>
+                  <a:srgbClr val="333333"/>
+                </a:solidFill>
+                <a:latin typeface="Yu Gothic"/>
+              </a:rPr>
+              <a:t>必要書類がそろったら　招待メールを送る　→　メールのURLをタップ</a:t>
+            </a:r>
+          </a:p>
+        </p:txBody>
+      </p:sp>
+      <p:pic>
+        <p:nvPicPr>
+          <p:cNvPr id="7" name="Picture 6" descr="1.jpg"/>
+          <p:cNvPicPr>
+            <a:picLocks noChangeAspect="1"/>
+          </p:cNvPicPr>
+          <p:nvPr/>
+        </p:nvPicPr>
+        <p:blipFill>
+          <a:blip r:embed="rId2"/>
+          <a:stretch>
+            <a:fillRect/>
+          </a:stretch>
+        </p:blipFill>
+        <p:spPr>
+          <a:xfrm>
+            <a:off x="777240" y="2011680"/>
+            <a:ext cx="1668882" cy="3611880"/>
+          </a:xfrm>
+          <a:prstGeom prst="rect">
+            <a:avLst/>
+          </a:prstGeom>
+          <a:ln w="12700">
+            <a:solidFill>
+              <a:srgbClr val="BBBBBB"/>
+            </a:solidFill>
+          </a:ln>
+        </p:spPr>
+      </p:pic>
+      <p:sp>
+        <p:nvSpPr>
+          <p:cNvPr id="8" name="Oval 7"/>
+          <p:cNvSpPr/>
+          <p:nvPr/>
+        </p:nvSpPr>
+        <p:spPr>
+          <a:xfrm>
+            <a:off x="630936" y="1865376"/>
+            <a:ext cx="384048" cy="384048"/>
+          </a:xfrm>
+          <a:prstGeom prst="ellipse">
+            <a:avLst/>
+          </a:prstGeom>
+          <a:solidFill>
+            <a:srgbClr val="4FB6BE"/>
+          </a:solidFill>
+          <a:ln w="19050">
+            <a:solidFill>
+              <a:srgbClr val="FFFFFF"/>
+            </a:solidFill>
+          </a:ln>
+          <a:effectLst/>
+        </p:spPr>
+        <p:style>
+          <a:lnRef idx="1">
+            <a:schemeClr val="accent1"/>
+          </a:lnRef>
+          <a:fillRef idx="3">
+            <a:schemeClr val="accent1"/>
+          </a:fillRef>
+          <a:effectRef idx="2">
+            <a:schemeClr val="accent1"/>
+          </a:effectRef>
+          <a:fontRef idx="minor">
+            <a:schemeClr val="lt1"/>
+          </a:fontRef>
+        </p:style>
+        <p:txBody>
+          <a:bodyPr rtlCol="0" anchor="ctr" lIns="0" rIns="0" tIns="0" bIns="0"/>
+          <a:lstStyle/>
+          <a:p>
+            <a:pPr algn="ctr"/>
+            <a:r>
+              <a:rPr sz="1400" b="1">
+                <a:solidFill>
+                  <a:srgbClr val="FFFFFF"/>
+                </a:solidFill>
+                <a:latin typeface="Yu Gothic"/>
+              </a:rPr>
+              <a:t>1</a:t>
+            </a:r>
+          </a:p>
+        </p:txBody>
+      </p:sp>
+      <p:sp>
+        <p:nvSpPr>
+          <p:cNvPr id="9" name="TextBox 8"/>
+          <p:cNvSpPr txBox="1"/>
+          <p:nvPr/>
+        </p:nvSpPr>
+        <p:spPr>
+          <a:xfrm>
+            <a:off x="502920" y="5715000"/>
+            <a:ext cx="2834640" cy="411480"/>
+          </a:xfrm>
+          <a:prstGeom prst="rect">
+            <a:avLst/>
+          </a:prstGeom>
+          <a:noFill/>
+        </p:spPr>
+        <p:txBody>
+          <a:bodyPr wrap="square" lIns="45720" rIns="45720" tIns="22860" bIns="22860" anchor="t">
+            <a:spAutoFit/>
+          </a:bodyPr>
+          <a:lstStyle/>
+          <a:p>
+            <a:pPr algn="ctr"/>
+            <a:r>
+              <a:rPr sz="1600" b="1">
+                <a:solidFill>
+                  <a:srgbClr val="333333"/>
+                </a:solidFill>
+                <a:latin typeface="Yu Gothic"/>
+              </a:rPr>
+              <a:t>アカウント作成</a:t>
+            </a:r>
+          </a:p>
+        </p:txBody>
+      </p:sp>
+      <p:sp>
+        <p:nvSpPr>
+          <p:cNvPr id="10" name="TextBox 9"/>
+          <p:cNvSpPr txBox="1"/>
+          <p:nvPr/>
+        </p:nvSpPr>
+        <p:spPr>
+          <a:xfrm>
+            <a:off x="2560320" y="3566160"/>
+            <a:ext cx="640080" cy="548640"/>
+          </a:xfrm>
+          <a:prstGeom prst="rect">
+            <a:avLst/>
+          </a:prstGeom>
+          <a:noFill/>
+        </p:spPr>
+        <p:txBody>
+          <a:bodyPr wrap="square" lIns="45720" rIns="45720" tIns="22860" bIns="22860" anchor="t">
+            <a:spAutoFit/>
+          </a:bodyPr>
+          <a:lstStyle/>
+          <a:p>
+            <a:pPr algn="ctr"/>
+            <a:r>
+              <a:rPr sz="2000" b="1">
+                <a:solidFill>
+                  <a:srgbClr val="666666"/>
+                </a:solidFill>
+                <a:latin typeface="Yu Gothic"/>
+              </a:rPr>
+              <a:t>▶</a:t>
+            </a:r>
+          </a:p>
+        </p:txBody>
+      </p:sp>
+      <p:pic>
+        <p:nvPicPr>
+          <p:cNvPr id="11" name="Picture 10" descr="2.jpg"/>
+          <p:cNvPicPr>
+            <a:picLocks noChangeAspect="1"/>
+          </p:cNvPicPr>
+          <p:nvPr/>
+        </p:nvPicPr>
+        <p:blipFill>
+          <a:blip r:embed="rId3"/>
+          <a:stretch>
+            <a:fillRect/>
+          </a:stretch>
+        </p:blipFill>
+        <p:spPr>
+          <a:xfrm>
+            <a:off x="3611880" y="2011680"/>
+            <a:ext cx="1668882" cy="3611880"/>
+          </a:xfrm>
+          <a:prstGeom prst="rect">
+            <a:avLst/>
+          </a:prstGeom>
+          <a:ln w="12700">
+            <a:solidFill>
+              <a:srgbClr val="BBBBBB"/>
+            </a:solidFill>
+          </a:ln>
+        </p:spPr>
+      </p:pic>
+      <p:sp>
+        <p:nvSpPr>
+          <p:cNvPr id="12" name="Oval 11"/>
+          <p:cNvSpPr/>
+          <p:nvPr/>
+        </p:nvSpPr>
+        <p:spPr>
+          <a:xfrm>
+            <a:off x="3465576" y="1865376"/>
+            <a:ext cx="384048" cy="384048"/>
+          </a:xfrm>
+          <a:prstGeom prst="ellipse">
+            <a:avLst/>
+          </a:prstGeom>
+          <a:solidFill>
+            <a:srgbClr val="4FB6BE"/>
+          </a:solidFill>
+          <a:ln w="19050">
+            <a:solidFill>
+              <a:srgbClr val="FFFFFF"/>
+            </a:solidFill>
+          </a:ln>
+          <a:effectLst/>
+        </p:spPr>
+        <p:style>
+          <a:lnRef idx="1">
+            <a:schemeClr val="accent1"/>
+          </a:lnRef>
+          <a:fillRef idx="3">
+            <a:schemeClr val="accent1"/>
+          </a:fillRef>
+          <a:effectRef idx="2">
+            <a:schemeClr val="accent1"/>
+          </a:effectRef>
+          <a:fontRef idx="minor">
+            <a:schemeClr val="lt1"/>
+          </a:fontRef>
+        </p:style>
+        <p:txBody>
+          <a:bodyPr rtlCol="0" anchor="ctr" lIns="0" rIns="0" tIns="0" bIns="0"/>
+          <a:lstStyle/>
+          <a:p>
+            <a:pPr algn="ctr"/>
+            <a:r>
+              <a:rPr sz="1400" b="1">
+                <a:solidFill>
+                  <a:srgbClr val="FFFFFF"/>
+                </a:solidFill>
+                <a:latin typeface="Yu Gothic"/>
+              </a:rPr>
+              <a:t>2</a:t>
+            </a:r>
+          </a:p>
+        </p:txBody>
+      </p:sp>
+      <p:sp>
+        <p:nvSpPr>
+          <p:cNvPr id="13" name="TextBox 12"/>
+          <p:cNvSpPr txBox="1"/>
+          <p:nvPr/>
+        </p:nvSpPr>
+        <p:spPr>
+          <a:xfrm>
+            <a:off x="3337560" y="5715000"/>
+            <a:ext cx="2834640" cy="411480"/>
+          </a:xfrm>
+          <a:prstGeom prst="rect">
+            <a:avLst/>
+          </a:prstGeom>
+          <a:noFill/>
+        </p:spPr>
+        <p:txBody>
+          <a:bodyPr wrap="square" lIns="45720" rIns="45720" tIns="22860" bIns="22860" anchor="t">
+            <a:spAutoFit/>
+          </a:bodyPr>
+          <a:lstStyle/>
+          <a:p>
+            <a:pPr algn="ctr"/>
+            <a:r>
+              <a:rPr sz="1600" b="1">
+                <a:solidFill>
+                  <a:srgbClr val="333333"/>
+                </a:solidFill>
+                <a:latin typeface="Yu Gothic"/>
+              </a:rPr>
+              <a:t>アプリを開く</a:t>
+            </a:r>
+          </a:p>
+        </p:txBody>
+      </p:sp>
+      <p:sp>
+        <p:nvSpPr>
+          <p:cNvPr id="14" name="TextBox 13"/>
+          <p:cNvSpPr txBox="1"/>
+          <p:nvPr/>
+        </p:nvSpPr>
+        <p:spPr>
+          <a:xfrm>
+            <a:off x="5394960" y="3566160"/>
+            <a:ext cx="640080" cy="548640"/>
+          </a:xfrm>
+          <a:prstGeom prst="rect">
+            <a:avLst/>
+          </a:prstGeom>
+          <a:noFill/>
+        </p:spPr>
+        <p:txBody>
+          <a:bodyPr wrap="square" lIns="45720" rIns="45720" tIns="22860" bIns="22860" anchor="t">
+            <a:spAutoFit/>
+          </a:bodyPr>
+          <a:lstStyle/>
+          <a:p>
+            <a:pPr algn="ctr"/>
+            <a:r>
+              <a:rPr sz="2000" b="1">
+                <a:solidFill>
+                  <a:srgbClr val="666666"/>
+                </a:solidFill>
+                <a:latin typeface="Yu Gothic"/>
+              </a:rPr>
+              <a:t>▶</a:t>
+            </a:r>
+          </a:p>
+        </p:txBody>
+      </p:sp>
+      <p:pic>
+        <p:nvPicPr>
+          <p:cNvPr id="15" name="Picture 14" descr="3.jpg"/>
+          <p:cNvPicPr>
+            <a:picLocks noChangeAspect="1"/>
+          </p:cNvPicPr>
+          <p:nvPr/>
+        </p:nvPicPr>
+        <p:blipFill>
+          <a:blip r:embed="rId4"/>
+          <a:stretch>
+            <a:fillRect/>
+          </a:stretch>
+        </p:blipFill>
+        <p:spPr>
+          <a:xfrm>
+            <a:off x="6446520" y="2011680"/>
+            <a:ext cx="1668882" cy="3611880"/>
+          </a:xfrm>
+          <a:prstGeom prst="rect">
+            <a:avLst/>
+          </a:prstGeom>
+          <a:ln w="12700">
+            <a:solidFill>
+              <a:srgbClr val="BBBBBB"/>
+            </a:solidFill>
+          </a:ln>
+        </p:spPr>
+      </p:pic>
+      <p:sp>
+        <p:nvSpPr>
+          <p:cNvPr id="16" name="Oval 15"/>
+          <p:cNvSpPr/>
+          <p:nvPr/>
+        </p:nvSpPr>
+        <p:spPr>
+          <a:xfrm>
+            <a:off x="6300216" y="1865376"/>
+            <a:ext cx="384048" cy="384048"/>
+          </a:xfrm>
+          <a:prstGeom prst="ellipse">
+            <a:avLst/>
+          </a:prstGeom>
+          <a:solidFill>
+            <a:srgbClr val="4FB6BE"/>
+          </a:solidFill>
+          <a:ln w="19050">
+            <a:solidFill>
+              <a:srgbClr val="FFFFFF"/>
+            </a:solidFill>
+          </a:ln>
+          <a:effectLst/>
+        </p:spPr>
+        <p:style>
+          <a:lnRef idx="1">
+            <a:schemeClr val="accent1"/>
+          </a:lnRef>
+          <a:fillRef idx="3">
+            <a:schemeClr val="accent1"/>
+          </a:fillRef>
+          <a:effectRef idx="2">
+            <a:schemeClr val="accent1"/>
+          </a:effectRef>
+          <a:fontRef idx="minor">
+            <a:schemeClr val="lt1"/>
+          </a:fontRef>
+        </p:style>
+        <p:txBody>
+          <a:bodyPr rtlCol="0" anchor="ctr" lIns="0" rIns="0" tIns="0" bIns="0"/>
+          <a:lstStyle/>
+          <a:p>
+            <a:pPr algn="ctr"/>
+            <a:r>
+              <a:rPr sz="1400" b="1">
+                <a:solidFill>
+                  <a:srgbClr val="FFFFFF"/>
+                </a:solidFill>
+                <a:latin typeface="Yu Gothic"/>
+              </a:rPr>
+              <a:t>3</a:t>
+            </a:r>
+          </a:p>
+        </p:txBody>
+      </p:sp>
+      <p:sp>
+        <p:nvSpPr>
+          <p:cNvPr id="17" name="TextBox 16"/>
+          <p:cNvSpPr txBox="1"/>
+          <p:nvPr/>
+        </p:nvSpPr>
+        <p:spPr>
+          <a:xfrm>
+            <a:off x="6172200" y="5715000"/>
+            <a:ext cx="2834640" cy="411480"/>
+          </a:xfrm>
+          <a:prstGeom prst="rect">
+            <a:avLst/>
+          </a:prstGeom>
+          <a:noFill/>
+        </p:spPr>
+        <p:txBody>
+          <a:bodyPr wrap="square" lIns="45720" rIns="45720" tIns="22860" bIns="22860" anchor="t">
+            <a:spAutoFit/>
+          </a:bodyPr>
+          <a:lstStyle/>
+          <a:p>
+            <a:pPr algn="ctr"/>
+            <a:r>
+              <a:rPr sz="1600" b="1">
+                <a:solidFill>
+                  <a:srgbClr val="333333"/>
+                </a:solidFill>
+                <a:latin typeface="Yu Gothic"/>
+              </a:rPr>
+              <a:t>サインイン</a:t>
+            </a:r>
+          </a:p>
+        </p:txBody>
+      </p:sp>
+      <p:sp>
+        <p:nvSpPr>
+          <p:cNvPr id="18" name="TextBox 17"/>
+          <p:cNvSpPr txBox="1"/>
+          <p:nvPr/>
+        </p:nvSpPr>
+        <p:spPr>
+          <a:xfrm>
+            <a:off x="8229600" y="3566160"/>
+            <a:ext cx="640080" cy="548640"/>
+          </a:xfrm>
+          <a:prstGeom prst="rect">
+            <a:avLst/>
+          </a:prstGeom>
+          <a:noFill/>
+        </p:spPr>
+        <p:txBody>
+          <a:bodyPr wrap="square" lIns="45720" rIns="45720" tIns="22860" bIns="22860" anchor="t">
+            <a:spAutoFit/>
+          </a:bodyPr>
+          <a:lstStyle/>
+          <a:p>
+            <a:pPr algn="ctr"/>
+            <a:r>
+              <a:rPr sz="2000" b="1">
+                <a:solidFill>
+                  <a:srgbClr val="666666"/>
+                </a:solidFill>
+                <a:latin typeface="Yu Gothic"/>
+              </a:rPr>
+              <a:t>▶</a:t>
+            </a:r>
+          </a:p>
+        </p:txBody>
+      </p:sp>
+      <p:pic>
+        <p:nvPicPr>
+          <p:cNvPr id="19" name="Picture 18" descr="4.jpg"/>
+          <p:cNvPicPr>
+            <a:picLocks noChangeAspect="1"/>
+          </p:cNvPicPr>
+          <p:nvPr/>
+        </p:nvPicPr>
+        <p:blipFill>
+          <a:blip r:embed="rId5"/>
+          <a:stretch>
+            <a:fillRect/>
+          </a:stretch>
+        </p:blipFill>
+        <p:spPr>
+          <a:xfrm>
+            <a:off x="9281160" y="2011680"/>
+            <a:ext cx="1668882" cy="3611880"/>
+          </a:xfrm>
+          <a:prstGeom prst="rect">
+            <a:avLst/>
+          </a:prstGeom>
+          <a:ln w="12700">
+            <a:solidFill>
+              <a:srgbClr val="BBBBBB"/>
+            </a:solidFill>
+          </a:ln>
+        </p:spPr>
+      </p:pic>
+      <p:sp>
+        <p:nvSpPr>
+          <p:cNvPr id="20" name="Oval 19"/>
+          <p:cNvSpPr/>
+          <p:nvPr/>
+        </p:nvSpPr>
+        <p:spPr>
+          <a:xfrm>
+            <a:off x="9134856" y="1865376"/>
+            <a:ext cx="384048" cy="384048"/>
+          </a:xfrm>
+          <a:prstGeom prst="ellipse">
+            <a:avLst/>
+          </a:prstGeom>
+          <a:solidFill>
+            <a:srgbClr val="4FB6BE"/>
+          </a:solidFill>
+          <a:ln w="19050">
+            <a:solidFill>
+              <a:srgbClr val="FFFFFF"/>
+            </a:solidFill>
+          </a:ln>
+          <a:effectLst/>
+        </p:spPr>
+        <p:style>
+          <a:lnRef idx="1">
+            <a:schemeClr val="accent1"/>
+          </a:lnRef>
+          <a:fillRef idx="3">
+            <a:schemeClr val="accent1"/>
+          </a:fillRef>
+          <a:effectRef idx="2">
+            <a:schemeClr val="accent1"/>
+          </a:effectRef>
+          <a:fontRef idx="minor">
+            <a:schemeClr val="lt1"/>
+          </a:fontRef>
+        </p:style>
+        <p:txBody>
+          <a:bodyPr rtlCol="0" anchor="ctr" lIns="0" rIns="0" tIns="0" bIns="0"/>
+          <a:lstStyle/>
+          <a:p>
+            <a:pPr algn="ctr"/>
+            <a:r>
+              <a:rPr sz="1400" b="1">
+                <a:solidFill>
+                  <a:srgbClr val="FFFFFF"/>
+                </a:solidFill>
+                <a:latin typeface="Yu Gothic"/>
+              </a:rPr>
+              <a:t>4</a:t>
+            </a:r>
+          </a:p>
+        </p:txBody>
+      </p:sp>
+      <p:sp>
+        <p:nvSpPr>
+          <p:cNvPr id="21" name="TextBox 20"/>
+          <p:cNvSpPr txBox="1"/>
+          <p:nvPr/>
+        </p:nvSpPr>
+        <p:spPr>
+          <a:xfrm>
+            <a:off x="9006840" y="5715000"/>
+            <a:ext cx="2834640" cy="411480"/>
+          </a:xfrm>
+          <a:prstGeom prst="rect">
+            <a:avLst/>
+          </a:prstGeom>
+          <a:noFill/>
+        </p:spPr>
+        <p:txBody>
+          <a:bodyPr wrap="square" lIns="45720" rIns="45720" tIns="22860" bIns="22860" anchor="t">
+            <a:spAutoFit/>
+          </a:bodyPr>
+          <a:lstStyle/>
+          <a:p>
+            <a:pPr algn="ctr"/>
+            <a:r>
+              <a:rPr sz="1600" b="1">
+                <a:solidFill>
+                  <a:srgbClr val="333333"/>
+                </a:solidFill>
+                <a:latin typeface="Yu Gothic"/>
+              </a:rPr>
+              <a:t>項目をクリア</a:t>
+            </a:r>
+          </a:p>
+        </p:txBody>
+      </p:sp>
+    </p:spTree>
+  </p:cSld>
+  <p:clrMapOvr>
+    <a:masterClrMapping/>
+  </p:clrMapOvr>
+</p:sld>
+</file>
+
+<file path=ppt/slides/slide7.xml><?xml version="1.0" encoding="utf-8"?>
+<p:sld xmlns:a="http://schemas.openxmlformats.org/drawingml/2006/main" xmlns:p="http://schemas.openxmlformats.org/presentationml/2006/main" xmlns:r="http://schemas.openxmlformats.org/officeDocument/2006/relationships">
+  <p:cSld>
+    <p:spTree>
+      <p:nvGrpSpPr>
+        <p:cNvPr id="1" name=""/>
+        <p:cNvGrpSpPr/>
+        <p:nvPr/>
+      </p:nvGrpSpPr>
+      <p:grpSpPr/>
+      <p:sp>
+        <p:nvSpPr>
+          <p:cNvPr id="2" name="Rounded Rectangle 1"/>
+          <p:cNvSpPr/>
+          <p:nvPr/>
+        </p:nvSpPr>
+        <p:spPr>
+          <a:xfrm>
+            <a:off x="411480" y="777240"/>
+            <a:ext cx="502920" cy="384048"/>
+          </a:xfrm>
+          <a:prstGeom prst="roundRect">
+            <a:avLst>
+              <a:gd name="adj" fmla="val 8000"/>
+            </a:avLst>
+          </a:prstGeom>
+          <a:solidFill>
+            <a:srgbClr val="4FB6BE"/>
+          </a:solidFill>
+          <a:ln>
+            <a:noFill/>
+          </a:ln>
+          <a:effectLst/>
+        </p:spPr>
+        <p:style>
+          <a:lnRef idx="1">
+            <a:schemeClr val="accent1"/>
+          </a:lnRef>
+          <a:fillRef idx="3">
+            <a:schemeClr val="accent1"/>
+          </a:fillRef>
+          <a:effectRef idx="2">
+            <a:schemeClr val="accent1"/>
+          </a:effectRef>
+          <a:fontRef idx="minor">
+            <a:schemeClr val="lt1"/>
+          </a:fontRef>
+        </p:style>
+        <p:txBody>
+          <a:bodyPr rtlCol="0" anchor="ctr"/>
+          <a:lstStyle/>
+          <a:p>
+            <a:pPr algn="ctr"/>
+          </a:p>
+        </p:txBody>
+      </p:sp>
+      <p:sp>
+        <p:nvSpPr>
+          <p:cNvPr id="3" name="TextBox 2"/>
+          <p:cNvSpPr txBox="1"/>
+          <p:nvPr/>
+        </p:nvSpPr>
+        <p:spPr>
+          <a:xfrm>
+            <a:off x="411480" y="777240"/>
+            <a:ext cx="502920" cy="384048"/>
+          </a:xfrm>
+          <a:prstGeom prst="rect">
+            <a:avLst/>
+          </a:prstGeom>
+          <a:noFill/>
+        </p:spPr>
+        <p:txBody>
+          <a:bodyPr wrap="square" lIns="45720" rIns="45720" tIns="22860" bIns="22860" anchor="ctr">
+            <a:spAutoFit/>
+          </a:bodyPr>
+          <a:lstStyle/>
+          <a:p>
+            <a:pPr algn="ctr"/>
+            <a:r>
+              <a:rPr sz="1200" b="1">
+                <a:solidFill>
+                  <a:srgbClr val="FFFFFF"/>
+                </a:solidFill>
+                <a:latin typeface="Yu Gothic"/>
+              </a:rPr>
+              <a:t>④-1</a:t>
+            </a:r>
+          </a:p>
+        </p:txBody>
+      </p:sp>
+      <p:sp>
+        <p:nvSpPr>
+          <p:cNvPr id="4" name="TextBox 3"/>
+          <p:cNvSpPr txBox="1"/>
+          <p:nvPr/>
+        </p:nvSpPr>
+        <p:spPr>
+          <a:xfrm>
+            <a:off x="1078992" y="777240"/>
+            <a:ext cx="10607040" cy="384048"/>
+          </a:xfrm>
+          <a:prstGeom prst="rect">
+            <a:avLst/>
+          </a:prstGeom>
+          <a:noFill/>
+        </p:spPr>
+        <p:txBody>
+          <a:bodyPr wrap="square" lIns="45720" rIns="45720" tIns="22860" bIns="22860" anchor="ctr">
+            <a:spAutoFit/>
+          </a:bodyPr>
+          <a:lstStyle/>
+          <a:p>
+            <a:pPr algn="l"/>
+            <a:r>
+              <a:rPr sz="2000" b="1">
+                <a:solidFill>
+                  <a:srgbClr val="333333"/>
+                </a:solidFill>
+                <a:latin typeface="Yu Gothic"/>
+              </a:rPr>
+              <a:t>アカウント作成</a:t>
+            </a:r>
+          </a:p>
+        </p:txBody>
+      </p:sp>
+      <p:sp>
+        <p:nvSpPr>
+          <p:cNvPr id="5" name="Rounded Rectangle 4"/>
+          <p:cNvSpPr/>
+          <p:nvPr/>
+        </p:nvSpPr>
+        <p:spPr>
+          <a:xfrm>
+            <a:off x="4663440" y="1280160"/>
+            <a:ext cx="6949440" cy="502920"/>
+          </a:xfrm>
+          <a:prstGeom prst="roundRect">
+            <a:avLst>
+              <a:gd name="adj" fmla="val 8000"/>
+            </a:avLst>
+          </a:prstGeom>
+          <a:solidFill>
+            <a:srgbClr val="E3F4F6"/>
+          </a:solidFill>
+          <a:ln w="12700">
+            <a:solidFill>
+              <a:srgbClr val="4FB6BE"/>
+            </a:solidFill>
+          </a:ln>
+          <a:effectLst/>
+        </p:spPr>
+        <p:style>
+          <a:lnRef idx="1">
+            <a:schemeClr val="accent1"/>
+          </a:lnRef>
+          <a:fillRef idx="3">
+            <a:schemeClr val="accent1"/>
+          </a:fillRef>
+          <a:effectRef idx="2">
+            <a:schemeClr val="accent1"/>
+          </a:effectRef>
+          <a:fontRef idx="minor">
+            <a:schemeClr val="lt1"/>
+          </a:fontRef>
+        </p:style>
+        <p:txBody>
+          <a:bodyPr rtlCol="0" anchor="ctr"/>
+          <a:lstStyle/>
+          <a:p>
+            <a:pPr algn="ctr"/>
+          </a:p>
+        </p:txBody>
+      </p:sp>
+      <p:sp>
+        <p:nvSpPr>
+          <p:cNvPr id="6" name="TextBox 5"/>
+          <p:cNvSpPr txBox="1"/>
+          <p:nvPr/>
+        </p:nvSpPr>
+        <p:spPr>
+          <a:xfrm>
+            <a:off x="4800600" y="1280160"/>
+            <a:ext cx="6766560" cy="502920"/>
+          </a:xfrm>
+          <a:prstGeom prst="rect">
+            <a:avLst/>
+          </a:prstGeom>
+          <a:noFill/>
+        </p:spPr>
+        <p:txBody>
+          <a:bodyPr wrap="square" lIns="45720" rIns="45720" tIns="22860" bIns="22860" anchor="ctr">
+            <a:spAutoFit/>
+          </a:bodyPr>
+          <a:lstStyle/>
+          <a:p>
+            <a:pPr algn="l"/>
+            <a:r>
+              <a:rPr sz="1500" b="1">
+                <a:solidFill>
+                  <a:srgbClr val="333333"/>
+                </a:solidFill>
+                <a:latin typeface="Yu Gothic"/>
+              </a:rPr>
+              <a:t>招待メールのURLをタップすると、この画面</a:t>
+            </a:r>
+          </a:p>
+        </p:txBody>
+      </p:sp>
+      <p:pic>
+        <p:nvPicPr>
+          <p:cNvPr id="7" name="Picture 6" descr="1.jpg"/>
+          <p:cNvPicPr>
+            <a:picLocks noChangeAspect="1"/>
+          </p:cNvPicPr>
+          <p:nvPr/>
+        </p:nvPicPr>
+        <p:blipFill>
+          <a:blip r:embed="rId2"/>
+          <a:stretch>
+            <a:fillRect/>
+          </a:stretch>
+        </p:blipFill>
+        <p:spPr>
+          <a:xfrm>
+            <a:off x="1097280" y="1280160"/>
+            <a:ext cx="2323759" cy="5029200"/>
+          </a:xfrm>
+          <a:prstGeom prst="rect">
+            <a:avLst/>
+          </a:prstGeom>
+          <a:ln w="12700">
+            <a:solidFill>
+              <a:srgbClr val="BBBBBB"/>
+            </a:solidFill>
+          </a:ln>
+        </p:spPr>
+      </p:pic>
+      <p:sp>
+        <p:nvSpPr>
+          <p:cNvPr id="8" name="Rounded Rectangle 7"/>
+          <p:cNvSpPr/>
+          <p:nvPr/>
+        </p:nvSpPr>
+        <p:spPr>
+          <a:xfrm>
+            <a:off x="1276894" y="2585170"/>
+            <a:ext cx="1964531" cy="241356"/>
+          </a:xfrm>
+          <a:prstGeom prst="roundRect">
+            <a:avLst>
+              <a:gd name="adj" fmla="val 12000"/>
+            </a:avLst>
+          </a:prstGeom>
+          <a:noFill/>
+          <a:ln w="38100">
+            <a:solidFill>
+              <a:srgbClr val="D32F2F"/>
+            </a:solidFill>
+          </a:ln>
+          <a:effectLst/>
+        </p:spPr>
+        <p:style>
+          <a:lnRef idx="1">
+            <a:schemeClr val="accent1"/>
+          </a:lnRef>
+          <a:fillRef idx="3">
+            <a:schemeClr val="accent1"/>
+          </a:fillRef>
+          <a:effectRef idx="2">
+            <a:schemeClr val="accent1"/>
+          </a:effectRef>
+          <a:fontRef idx="minor">
+            <a:schemeClr val="lt1"/>
+          </a:fontRef>
+        </p:style>
+        <p:txBody>
+          <a:bodyPr rtlCol="0" anchor="ctr"/>
+          <a:lstStyle/>
+          <a:p>
+            <a:pPr algn="ctr"/>
+          </a:p>
+        </p:txBody>
+      </p:sp>
+      <p:cxnSp>
+        <p:nvCxnSpPr>
+          <p:cNvPr id="9" name="Connector 8"/>
+          <p:cNvCxnSpPr/>
+          <p:nvPr/>
+        </p:nvCxnSpPr>
+        <p:spPr>
+          <a:xfrm>
+            <a:off x="3241425" y="2705848"/>
+            <a:ext cx="1467735" cy="0"/>
+          </a:xfrm>
+          <a:prstGeom prst="line">
+            <a:avLst/>
+          </a:prstGeom>
+          <a:ln w="22225">
+            <a:solidFill>
+              <a:srgbClr val="D32F2F"/>
+            </a:solidFill>
+          </a:ln>
+        </p:spPr>
+        <p:style>
+          <a:lnRef idx="2">
+            <a:schemeClr val="accent1"/>
+          </a:lnRef>
+          <a:fillRef idx="0">
+            <a:schemeClr val="accent1"/>
+          </a:fillRef>
+          <a:effectRef idx="1">
+            <a:schemeClr val="accent1"/>
+          </a:effectRef>
+          <a:fontRef idx="minor">
+            <a:schemeClr val="tx1"/>
+          </a:fontRef>
+        </p:style>
+      </p:cxnSp>
+      <p:sp>
+        <p:nvSpPr>
+          <p:cNvPr id="10" name="Oval 9"/>
+          <p:cNvSpPr/>
+          <p:nvPr/>
+        </p:nvSpPr>
+        <p:spPr>
+          <a:xfrm>
+            <a:off x="4745736" y="2513824"/>
+            <a:ext cx="384048" cy="384048"/>
+          </a:xfrm>
+          <a:prstGeom prst="ellipse">
+            <a:avLst/>
+          </a:prstGeom>
+          <a:solidFill>
+            <a:srgbClr val="D32F2F"/>
+          </a:solidFill>
+          <a:ln w="19050">
+            <a:solidFill>
+              <a:srgbClr val="FFFFFF"/>
+            </a:solidFill>
+          </a:ln>
+          <a:effectLst/>
+        </p:spPr>
+        <p:style>
+          <a:lnRef idx="1">
+            <a:schemeClr val="accent1"/>
+          </a:lnRef>
+          <a:fillRef idx="3">
+            <a:schemeClr val="accent1"/>
+          </a:fillRef>
+          <a:effectRef idx="2">
+            <a:schemeClr val="accent1"/>
+          </a:effectRef>
+          <a:fontRef idx="minor">
+            <a:schemeClr val="lt1"/>
+          </a:fontRef>
+        </p:style>
+        <p:txBody>
+          <a:bodyPr rtlCol="0" anchor="ctr" lIns="0" rIns="0" tIns="0" bIns="0"/>
+          <a:lstStyle/>
+          <a:p>
+            <a:pPr algn="ctr"/>
+            <a:r>
+              <a:rPr sz="1400" b="1">
+                <a:solidFill>
+                  <a:srgbClr val="FFFFFF"/>
+                </a:solidFill>
+                <a:latin typeface="Yu Gothic"/>
+              </a:rPr>
+              <a:t>1</a:t>
+            </a:r>
+          </a:p>
+        </p:txBody>
+      </p:sp>
+      <p:sp>
+        <p:nvSpPr>
+          <p:cNvPr id="11" name="TextBox 10"/>
+          <p:cNvSpPr txBox="1"/>
+          <p:nvPr/>
+        </p:nvSpPr>
+        <p:spPr>
+          <a:xfrm>
+            <a:off x="5303520" y="2431528"/>
+            <a:ext cx="6583680" cy="411480"/>
+          </a:xfrm>
+          <a:prstGeom prst="rect">
+            <a:avLst/>
+          </a:prstGeom>
+          <a:noFill/>
+        </p:spPr>
+        <p:txBody>
+          <a:bodyPr wrap="square" lIns="45720" rIns="45720" tIns="22860" bIns="22860" anchor="ctr">
+            <a:spAutoFit/>
+          </a:bodyPr>
+          <a:lstStyle/>
+          <a:p>
+            <a:pPr algn="l"/>
+            <a:r>
+              <a:rPr sz="2000" b="1">
+                <a:solidFill>
+                  <a:srgbClr val="333333"/>
+                </a:solidFill>
+                <a:latin typeface="Yu Gothic"/>
+              </a:rPr>
+              <a:t>名前を入力</a:t>
+            </a:r>
+          </a:p>
+        </p:txBody>
+      </p:sp>
+      <p:sp>
+        <p:nvSpPr>
+          <p:cNvPr id="12" name="Rounded Rectangle 11"/>
+          <p:cNvSpPr/>
+          <p:nvPr/>
+        </p:nvSpPr>
+        <p:spPr>
+          <a:xfrm>
+            <a:off x="1276894" y="3511306"/>
+            <a:ext cx="1964531" cy="241356"/>
+          </a:xfrm>
+          <a:prstGeom prst="roundRect">
+            <a:avLst>
+              <a:gd name="adj" fmla="val 12000"/>
+            </a:avLst>
+          </a:prstGeom>
+          <a:noFill/>
+          <a:ln w="38100">
+            <a:solidFill>
+              <a:srgbClr val="D32F2F"/>
+            </a:solidFill>
+          </a:ln>
+          <a:effectLst/>
+        </p:spPr>
+        <p:style>
+          <a:lnRef idx="1">
+            <a:schemeClr val="accent1"/>
+          </a:lnRef>
+          <a:fillRef idx="3">
+            <a:schemeClr val="accent1"/>
+          </a:fillRef>
+          <a:effectRef idx="2">
+            <a:schemeClr val="accent1"/>
+          </a:effectRef>
+          <a:fontRef idx="minor">
+            <a:schemeClr val="lt1"/>
+          </a:fontRef>
+        </p:style>
+        <p:txBody>
+          <a:bodyPr rtlCol="0" anchor="ctr"/>
+          <a:lstStyle/>
+          <a:p>
+            <a:pPr algn="ctr"/>
+          </a:p>
+        </p:txBody>
+      </p:sp>
+      <p:cxnSp>
+        <p:nvCxnSpPr>
+          <p:cNvPr id="13" name="Connector 12"/>
+          <p:cNvCxnSpPr/>
+          <p:nvPr/>
+        </p:nvCxnSpPr>
+        <p:spPr>
+          <a:xfrm>
+            <a:off x="3241425" y="3631984"/>
+            <a:ext cx="1467735" cy="0"/>
+          </a:xfrm>
+          <a:prstGeom prst="line">
+            <a:avLst/>
+          </a:prstGeom>
+          <a:ln w="22225">
+            <a:solidFill>
+              <a:srgbClr val="D32F2F"/>
+            </a:solidFill>
+          </a:ln>
+        </p:spPr>
+        <p:style>
+          <a:lnRef idx="2">
+            <a:schemeClr val="accent1"/>
+          </a:lnRef>
+          <a:fillRef idx="0">
+            <a:schemeClr val="accent1"/>
+          </a:fillRef>
+          <a:effectRef idx="1">
+            <a:schemeClr val="accent1"/>
+          </a:effectRef>
+          <a:fontRef idx="minor">
+            <a:schemeClr val="tx1"/>
+          </a:fontRef>
+        </p:style>
+      </p:cxnSp>
+      <p:sp>
+        <p:nvSpPr>
+          <p:cNvPr id="14" name="Oval 13"/>
+          <p:cNvSpPr/>
+          <p:nvPr/>
+        </p:nvSpPr>
+        <p:spPr>
+          <a:xfrm>
+            <a:off x="4745736" y="3439960"/>
+            <a:ext cx="384048" cy="384048"/>
+          </a:xfrm>
+          <a:prstGeom prst="ellipse">
+            <a:avLst/>
+          </a:prstGeom>
+          <a:solidFill>
+            <a:srgbClr val="D32F2F"/>
+          </a:solidFill>
+          <a:ln w="19050">
+            <a:solidFill>
+              <a:srgbClr val="FFFFFF"/>
+            </a:solidFill>
+          </a:ln>
+          <a:effectLst/>
+        </p:spPr>
+        <p:style>
+          <a:lnRef idx="1">
+            <a:schemeClr val="accent1"/>
+          </a:lnRef>
+          <a:fillRef idx="3">
+            <a:schemeClr val="accent1"/>
+          </a:fillRef>
+          <a:effectRef idx="2">
+            <a:schemeClr val="accent1"/>
+          </a:effectRef>
+          <a:fontRef idx="minor">
+            <a:schemeClr val="lt1"/>
+          </a:fontRef>
+        </p:style>
+        <p:txBody>
+          <a:bodyPr rtlCol="0" anchor="ctr" lIns="0" rIns="0" tIns="0" bIns="0"/>
+          <a:lstStyle/>
+          <a:p>
+            <a:pPr algn="ctr"/>
+            <a:r>
+              <a:rPr sz="1400" b="1">
+                <a:solidFill>
+                  <a:srgbClr val="FFFFFF"/>
+                </a:solidFill>
+                <a:latin typeface="Yu Gothic"/>
+              </a:rPr>
+              <a:t>2</a:t>
+            </a:r>
+          </a:p>
+        </p:txBody>
+      </p:sp>
+      <p:sp>
+        <p:nvSpPr>
+          <p:cNvPr id="15" name="TextBox 14"/>
+          <p:cNvSpPr txBox="1"/>
+          <p:nvPr/>
+        </p:nvSpPr>
+        <p:spPr>
+          <a:xfrm>
+            <a:off x="5303520" y="3357664"/>
+            <a:ext cx="6583680" cy="411480"/>
+          </a:xfrm>
+          <a:prstGeom prst="rect">
+            <a:avLst/>
+          </a:prstGeom>
+          <a:noFill/>
+        </p:spPr>
+        <p:txBody>
+          <a:bodyPr wrap="square" lIns="45720" rIns="45720" tIns="22860" bIns="22860" anchor="ctr">
+            <a:spAutoFit/>
+          </a:bodyPr>
+          <a:lstStyle/>
+          <a:p>
+            <a:pPr algn="l"/>
+            <a:r>
+              <a:rPr sz="2000" b="1">
+                <a:solidFill>
+                  <a:srgbClr val="333333"/>
+                </a:solidFill>
+                <a:latin typeface="Yu Gothic"/>
+              </a:rPr>
+              <a:t>パスワードを決める</a:t>
+            </a:r>
+          </a:p>
+        </p:txBody>
+      </p:sp>
+      <p:sp>
+        <p:nvSpPr>
+          <p:cNvPr id="16" name="TextBox 15"/>
+          <p:cNvSpPr txBox="1"/>
+          <p:nvPr/>
+        </p:nvSpPr>
+        <p:spPr>
+          <a:xfrm>
+            <a:off x="5303520" y="3741712"/>
+            <a:ext cx="6583680" cy="365760"/>
+          </a:xfrm>
+          <a:prstGeom prst="rect">
+            <a:avLst/>
+          </a:prstGeom>
+          <a:noFill/>
+        </p:spPr>
+        <p:txBody>
+          <a:bodyPr wrap="square" lIns="45720" rIns="45720" tIns="22860" bIns="22860" anchor="t">
+            <a:spAutoFit/>
+          </a:bodyPr>
+          <a:lstStyle/>
+          <a:p>
+            <a:pPr algn="l"/>
+            <a:r>
+              <a:rPr sz="1400" b="0">
+                <a:solidFill>
+                  <a:srgbClr val="666666"/>
+                </a:solidFill>
+                <a:latin typeface="Yu Gothic"/>
+              </a:rPr>
+              <a:t>6文字以上</a:t>
+            </a:r>
+          </a:p>
+        </p:txBody>
+      </p:sp>
+      <p:sp>
+        <p:nvSpPr>
+          <p:cNvPr id="17" name="Rounded Rectangle 16"/>
+          <p:cNvSpPr/>
+          <p:nvPr/>
+        </p:nvSpPr>
+        <p:spPr>
+          <a:xfrm>
+            <a:off x="1276894" y="4330796"/>
+            <a:ext cx="1964531" cy="241356"/>
+          </a:xfrm>
+          <a:prstGeom prst="roundRect">
+            <a:avLst>
+              <a:gd name="adj" fmla="val 12000"/>
+            </a:avLst>
+          </a:prstGeom>
+          <a:noFill/>
+          <a:ln w="38100">
+            <a:solidFill>
+              <a:srgbClr val="D32F2F"/>
+            </a:solidFill>
+          </a:ln>
+          <a:effectLst/>
+        </p:spPr>
+        <p:style>
+          <a:lnRef idx="1">
+            <a:schemeClr val="accent1"/>
+          </a:lnRef>
+          <a:fillRef idx="3">
+            <a:schemeClr val="accent1"/>
+          </a:fillRef>
+          <a:effectRef idx="2">
+            <a:schemeClr val="accent1"/>
+          </a:effectRef>
+          <a:fontRef idx="minor">
+            <a:schemeClr val="lt1"/>
+          </a:fontRef>
+        </p:style>
+        <p:txBody>
+          <a:bodyPr rtlCol="0" anchor="ctr"/>
+          <a:lstStyle/>
+          <a:p>
+            <a:pPr algn="ctr"/>
+          </a:p>
+        </p:txBody>
+      </p:sp>
+      <p:cxnSp>
+        <p:nvCxnSpPr>
+          <p:cNvPr id="18" name="Connector 17"/>
+          <p:cNvCxnSpPr/>
+          <p:nvPr/>
+        </p:nvCxnSpPr>
+        <p:spPr>
+          <a:xfrm>
+            <a:off x="3241425" y="4451474"/>
+            <a:ext cx="1467735" cy="3470"/>
+          </a:xfrm>
+          <a:prstGeom prst="line">
+            <a:avLst/>
+          </a:prstGeom>
+          <a:ln w="22225">
+            <a:solidFill>
+              <a:srgbClr val="D32F2F"/>
+            </a:solidFill>
+          </a:ln>
+        </p:spPr>
+        <p:style>
+          <a:lnRef idx="2">
+            <a:schemeClr val="accent1"/>
+          </a:lnRef>
+          <a:fillRef idx="0">
+            <a:schemeClr val="accent1"/>
+          </a:fillRef>
+          <a:effectRef idx="1">
+            <a:schemeClr val="accent1"/>
+          </a:effectRef>
+          <a:fontRef idx="minor">
+            <a:schemeClr val="tx1"/>
+          </a:fontRef>
+        </p:style>
+      </p:cxnSp>
+      <p:sp>
+        <p:nvSpPr>
+          <p:cNvPr id="19" name="Oval 18"/>
+          <p:cNvSpPr/>
+          <p:nvPr/>
+        </p:nvSpPr>
+        <p:spPr>
+          <a:xfrm>
+            <a:off x="4745736" y="4262920"/>
+            <a:ext cx="384048" cy="384048"/>
+          </a:xfrm>
+          <a:prstGeom prst="ellipse">
+            <a:avLst/>
+          </a:prstGeom>
+          <a:solidFill>
+            <a:srgbClr val="D32F2F"/>
+          </a:solidFill>
+          <a:ln w="19050">
+            <a:solidFill>
+              <a:srgbClr val="FFFFFF"/>
+            </a:solidFill>
+          </a:ln>
+          <a:effectLst/>
+        </p:spPr>
+        <p:style>
+          <a:lnRef idx="1">
+            <a:schemeClr val="accent1"/>
+          </a:lnRef>
+          <a:fillRef idx="3">
+            <a:schemeClr val="accent1"/>
+          </a:fillRef>
+          <a:effectRef idx="2">
+            <a:schemeClr val="accent1"/>
+          </a:effectRef>
+          <a:fontRef idx="minor">
+            <a:schemeClr val="lt1"/>
+          </a:fontRef>
+        </p:style>
+        <p:txBody>
+          <a:bodyPr rtlCol="0" anchor="ctr" lIns="0" rIns="0" tIns="0" bIns="0"/>
+          <a:lstStyle/>
+          <a:p>
+            <a:pPr algn="ctr"/>
+            <a:r>
+              <a:rPr sz="1400" b="1">
+                <a:solidFill>
+                  <a:srgbClr val="FFFFFF"/>
+                </a:solidFill>
+                <a:latin typeface="Yu Gothic"/>
+              </a:rPr>
+              <a:t>3</a:t>
+            </a:r>
+          </a:p>
+        </p:txBody>
+      </p:sp>
+      <p:sp>
+        <p:nvSpPr>
+          <p:cNvPr id="20" name="TextBox 19"/>
+          <p:cNvSpPr txBox="1"/>
+          <p:nvPr/>
+        </p:nvSpPr>
+        <p:spPr>
+          <a:xfrm>
+            <a:off x="5303520" y="4180624"/>
+            <a:ext cx="6583680" cy="411480"/>
+          </a:xfrm>
+          <a:prstGeom prst="rect">
+            <a:avLst/>
+          </a:prstGeom>
+          <a:noFill/>
+        </p:spPr>
+        <p:txBody>
+          <a:bodyPr wrap="square" lIns="45720" rIns="45720" tIns="22860" bIns="22860" anchor="ctr">
+            <a:spAutoFit/>
+          </a:bodyPr>
+          <a:lstStyle/>
+          <a:p>
+            <a:pPr algn="l"/>
+            <a:r>
+              <a:rPr sz="2000" b="1">
+                <a:solidFill>
+                  <a:srgbClr val="333333"/>
+                </a:solidFill>
+                <a:latin typeface="Yu Gothic"/>
+              </a:rPr>
+              <a:t>「Create your Amazon account」</a:t>
+            </a:r>
+          </a:p>
+        </p:txBody>
+      </p:sp>
+      <p:sp>
+        <p:nvSpPr>
+          <p:cNvPr id="21" name="TextBox 20"/>
+          <p:cNvSpPr txBox="1"/>
+          <p:nvPr/>
+        </p:nvSpPr>
+        <p:spPr>
+          <a:xfrm>
+            <a:off x="5303520" y="4564672"/>
+            <a:ext cx="6583680" cy="365760"/>
+          </a:xfrm>
+          <a:prstGeom prst="rect">
+            <a:avLst/>
+          </a:prstGeom>
+          <a:noFill/>
+        </p:spPr>
+        <p:txBody>
+          <a:bodyPr wrap="square" lIns="45720" rIns="45720" tIns="22860" bIns="22860" anchor="t">
+            <a:spAutoFit/>
+          </a:bodyPr>
+          <a:lstStyle/>
+          <a:p>
+            <a:pPr algn="l"/>
+            <a:r>
+              <a:rPr sz="1400" b="0">
+                <a:solidFill>
+                  <a:srgbClr val="666666"/>
+                </a:solidFill>
+                <a:latin typeface="Yu Gothic"/>
+              </a:rPr>
+              <a:t>をタップ</a:t>
+            </a:r>
+          </a:p>
+        </p:txBody>
+      </p:sp>
+      <p:sp>
+        <p:nvSpPr>
+          <p:cNvPr id="22" name="Rounded Rectangle 21"/>
+          <p:cNvSpPr/>
+          <p:nvPr/>
+        </p:nvSpPr>
+        <p:spPr>
+          <a:xfrm>
+            <a:off x="4663440" y="5577840"/>
+            <a:ext cx="6949440" cy="640080"/>
+          </a:xfrm>
+          <a:prstGeom prst="roundRect">
+            <a:avLst>
+              <a:gd name="adj" fmla="val 8000"/>
+            </a:avLst>
+          </a:prstGeom>
+          <a:solidFill>
+            <a:srgbClr val="FFF6E0"/>
+          </a:solidFill>
+          <a:ln w="19050">
+            <a:solidFill>
+              <a:srgbClr val="F29A3C"/>
+            </a:solidFill>
+          </a:ln>
+          <a:effectLst/>
+        </p:spPr>
+        <p:style>
+          <a:lnRef idx="1">
+            <a:schemeClr val="accent1"/>
+          </a:lnRef>
+          <a:fillRef idx="3">
+            <a:schemeClr val="accent1"/>
+          </a:fillRef>
+          <a:effectRef idx="2">
+            <a:schemeClr val="accent1"/>
+          </a:effectRef>
+          <a:fontRef idx="minor">
+            <a:schemeClr val="lt1"/>
+          </a:fontRef>
+        </p:style>
+        <p:txBody>
+          <a:bodyPr rtlCol="0" anchor="ctr"/>
+          <a:lstStyle/>
+          <a:p>
+            <a:pPr algn="ctr"/>
+          </a:p>
+        </p:txBody>
+      </p:sp>
+      <p:sp>
+        <p:nvSpPr>
+          <p:cNvPr id="23" name="TextBox 22"/>
+          <p:cNvSpPr txBox="1"/>
+          <p:nvPr/>
+        </p:nvSpPr>
+        <p:spPr>
+          <a:xfrm>
+            <a:off x="4800600" y="5577840"/>
+            <a:ext cx="6675120" cy="640080"/>
+          </a:xfrm>
+          <a:prstGeom prst="rect">
+            <a:avLst/>
+          </a:prstGeom>
+          <a:noFill/>
+        </p:spPr>
+        <p:txBody>
+          <a:bodyPr wrap="square" lIns="45720" rIns="45720" tIns="22860" bIns="22860" anchor="ctr">
+            <a:spAutoFit/>
+          </a:bodyPr>
+          <a:lstStyle/>
+          <a:p>
+            <a:pPr algn="l"/>
+            <a:r>
+              <a:rPr sz="1600" b="1">
+                <a:solidFill>
+                  <a:srgbClr val="333333"/>
+                </a:solidFill>
+                <a:latin typeface="Yu Gothic"/>
+              </a:rPr>
+              <a:t>⚠ パスワードは忘れない！この後も使います</a:t>
+            </a:r>
+          </a:p>
+        </p:txBody>
+      </p:sp>
+    </p:spTree>
+  </p:cSld>
+  <p:clrMapOvr>
+    <a:masterClrMapping/>
+  </p:clrMapOvr>
+</p:sld>
+</file>
+
+<file path=ppt/slides/slide8.xml><?xml version="1.0" encoding="utf-8"?>
+<p:sld xmlns:a="http://schemas.openxmlformats.org/drawingml/2006/main" xmlns:p="http://schemas.openxmlformats.org/presentationml/2006/main" xmlns:r="http://schemas.openxmlformats.org/officeDocument/2006/relationships">
+  <p:cSld>
+    <p:spTree>
+      <p:nvGrpSpPr>
+        <p:cNvPr id="1" name=""/>
+        <p:cNvGrpSpPr/>
+        <p:nvPr/>
+      </p:nvGrpSpPr>
+      <p:grpSpPr/>
+      <p:sp>
+        <p:nvSpPr>
+          <p:cNvPr id="2" name="Rounded Rectangle 1"/>
+          <p:cNvSpPr/>
+          <p:nvPr/>
+        </p:nvSpPr>
+        <p:spPr>
+          <a:xfrm>
+            <a:off x="411480" y="777240"/>
+            <a:ext cx="502920" cy="384048"/>
+          </a:xfrm>
+          <a:prstGeom prst="roundRect">
+            <a:avLst>
+              <a:gd name="adj" fmla="val 8000"/>
+            </a:avLst>
+          </a:prstGeom>
+          <a:solidFill>
+            <a:srgbClr val="4FB6BE"/>
+          </a:solidFill>
+          <a:ln>
+            <a:noFill/>
+          </a:ln>
+          <a:effectLst/>
+        </p:spPr>
+        <p:style>
+          <a:lnRef idx="1">
+            <a:schemeClr val="accent1"/>
+          </a:lnRef>
+          <a:fillRef idx="3">
+            <a:schemeClr val="accent1"/>
+          </a:fillRef>
+          <a:effectRef idx="2">
+            <a:schemeClr val="accent1"/>
+          </a:effectRef>
+          <a:fontRef idx="minor">
+            <a:schemeClr val="lt1"/>
+          </a:fontRef>
+        </p:style>
+        <p:txBody>
+          <a:bodyPr rtlCol="0" anchor="ctr"/>
+          <a:lstStyle/>
+          <a:p>
+            <a:pPr algn="ctr"/>
+          </a:p>
+        </p:txBody>
+      </p:sp>
+      <p:sp>
+        <p:nvSpPr>
+          <p:cNvPr id="3" name="TextBox 2"/>
+          <p:cNvSpPr txBox="1"/>
+          <p:nvPr/>
+        </p:nvSpPr>
+        <p:spPr>
+          <a:xfrm>
+            <a:off x="411480" y="777240"/>
+            <a:ext cx="502920" cy="384048"/>
+          </a:xfrm>
+          <a:prstGeom prst="rect">
+            <a:avLst/>
+          </a:prstGeom>
+          <a:noFill/>
+        </p:spPr>
+        <p:txBody>
+          <a:bodyPr wrap="square" lIns="45720" rIns="45720" tIns="22860" bIns="22860" anchor="ctr">
+            <a:spAutoFit/>
+          </a:bodyPr>
+          <a:lstStyle/>
+          <a:p>
+            <a:pPr algn="ctr"/>
+            <a:r>
+              <a:rPr sz="1200" b="1">
+                <a:solidFill>
+                  <a:srgbClr val="FFFFFF"/>
+                </a:solidFill>
+                <a:latin typeface="Yu Gothic"/>
+              </a:rPr>
+              <a:t>④-2</a:t>
+            </a:r>
+          </a:p>
+        </p:txBody>
+      </p:sp>
+      <p:sp>
+        <p:nvSpPr>
+          <p:cNvPr id="4" name="TextBox 3"/>
+          <p:cNvSpPr txBox="1"/>
+          <p:nvPr/>
+        </p:nvSpPr>
+        <p:spPr>
+          <a:xfrm>
+            <a:off x="1078992" y="777240"/>
+            <a:ext cx="10607040" cy="384048"/>
+          </a:xfrm>
+          <a:prstGeom prst="rect">
+            <a:avLst/>
+          </a:prstGeom>
+          <a:noFill/>
+        </p:spPr>
+        <p:txBody>
+          <a:bodyPr wrap="square" lIns="45720" rIns="45720" tIns="22860" bIns="22860" anchor="ctr">
+            <a:spAutoFit/>
+          </a:bodyPr>
+          <a:lstStyle/>
+          <a:p>
+            <a:pPr algn="l"/>
+            <a:r>
+              <a:rPr sz="2000" b="1">
+                <a:solidFill>
+                  <a:srgbClr val="333333"/>
+                </a:solidFill>
+                <a:latin typeface="Yu Gothic"/>
+              </a:rPr>
+              <a:t>アプリを取得して開く</a:t>
+            </a:r>
+          </a:p>
+        </p:txBody>
+      </p:sp>
+      <p:pic>
+        <p:nvPicPr>
+          <p:cNvPr id="5" name="Picture 4" descr="2.jpg"/>
+          <p:cNvPicPr>
+            <a:picLocks noChangeAspect="1"/>
+          </p:cNvPicPr>
+          <p:nvPr/>
+        </p:nvPicPr>
+        <p:blipFill>
+          <a:blip r:embed="rId2"/>
+          <a:stretch>
+            <a:fillRect/>
+          </a:stretch>
+        </p:blipFill>
+        <p:spPr>
+          <a:xfrm>
+            <a:off x="1097280" y="1280160"/>
+            <a:ext cx="2323759" cy="5029200"/>
+          </a:xfrm>
+          <a:prstGeom prst="rect">
+            <a:avLst/>
+          </a:prstGeom>
+          <a:ln w="12700">
+            <a:solidFill>
+              <a:srgbClr val="BBBBBB"/>
+            </a:solidFill>
+          </a:ln>
+        </p:spPr>
+      </p:pic>
+      <p:sp>
+        <p:nvSpPr>
+          <p:cNvPr id="6" name="Rounded Rectangle 5"/>
+          <p:cNvSpPr/>
+          <p:nvPr/>
+        </p:nvSpPr>
+        <p:spPr>
+          <a:xfrm>
+            <a:off x="1187087" y="5447772"/>
+            <a:ext cx="2144145" cy="266614"/>
+          </a:xfrm>
+          <a:prstGeom prst="roundRect">
+            <a:avLst>
+              <a:gd name="adj" fmla="val 12000"/>
+            </a:avLst>
+          </a:prstGeom>
+          <a:noFill/>
+          <a:ln w="38100">
+            <a:solidFill>
+              <a:srgbClr val="D32F2F"/>
+            </a:solidFill>
+          </a:ln>
+          <a:effectLst/>
+        </p:spPr>
+        <p:style>
+          <a:lnRef idx="1">
+            <a:schemeClr val="accent1"/>
+          </a:lnRef>
+          <a:fillRef idx="3">
+            <a:schemeClr val="accent1"/>
+          </a:fillRef>
+          <a:effectRef idx="2">
+            <a:schemeClr val="accent1"/>
+          </a:effectRef>
+          <a:fontRef idx="minor">
+            <a:schemeClr val="lt1"/>
+          </a:fontRef>
+        </p:style>
+        <p:txBody>
+          <a:bodyPr rtlCol="0" anchor="ctr"/>
+          <a:lstStyle/>
+          <a:p>
+            <a:pPr algn="ctr"/>
+          </a:p>
+        </p:txBody>
+      </p:sp>
+      <p:cxnSp>
+        <p:nvCxnSpPr>
+          <p:cNvPr id="7" name="Connector 6"/>
+          <p:cNvCxnSpPr/>
+          <p:nvPr/>
+        </p:nvCxnSpPr>
+        <p:spPr>
+          <a:xfrm>
+            <a:off x="3331232" y="5581080"/>
+            <a:ext cx="1377928" cy="0"/>
+          </a:xfrm>
+          <a:prstGeom prst="line">
+            <a:avLst/>
+          </a:prstGeom>
+          <a:ln w="22225">
+            <a:solidFill>
+              <a:srgbClr val="D32F2F"/>
+            </a:solidFill>
+          </a:ln>
+        </p:spPr>
+        <p:style>
+          <a:lnRef idx="2">
+            <a:schemeClr val="accent1"/>
+          </a:lnRef>
+          <a:fillRef idx="0">
+            <a:schemeClr val="accent1"/>
+          </a:fillRef>
+          <a:effectRef idx="1">
+            <a:schemeClr val="accent1"/>
+          </a:effectRef>
+          <a:fontRef idx="minor">
+            <a:schemeClr val="tx1"/>
+          </a:fontRef>
+        </p:style>
+      </p:cxnSp>
+      <p:sp>
+        <p:nvSpPr>
+          <p:cNvPr id="8" name="Oval 7"/>
+          <p:cNvSpPr/>
+          <p:nvPr/>
+        </p:nvSpPr>
+        <p:spPr>
+          <a:xfrm>
+            <a:off x="4745736" y="5389056"/>
+            <a:ext cx="384048" cy="384048"/>
+          </a:xfrm>
+          <a:prstGeom prst="ellipse">
+            <a:avLst/>
+          </a:prstGeom>
+          <a:solidFill>
+            <a:srgbClr val="D32F2F"/>
+          </a:solidFill>
+          <a:ln w="19050">
+            <a:solidFill>
+              <a:srgbClr val="FFFFFF"/>
+            </a:solidFill>
+          </a:ln>
+          <a:effectLst/>
+        </p:spPr>
+        <p:style>
+          <a:lnRef idx="1">
+            <a:schemeClr val="accent1"/>
+          </a:lnRef>
+          <a:fillRef idx="3">
+            <a:schemeClr val="accent1"/>
+          </a:fillRef>
+          <a:effectRef idx="2">
+            <a:schemeClr val="accent1"/>
+          </a:effectRef>
+          <a:fontRef idx="minor">
+            <a:schemeClr val="lt1"/>
+          </a:fontRef>
+        </p:style>
+        <p:txBody>
+          <a:bodyPr rtlCol="0" anchor="ctr" lIns="0" rIns="0" tIns="0" bIns="0"/>
+          <a:lstStyle/>
+          <a:p>
+            <a:pPr algn="ctr"/>
+            <a:r>
+              <a:rPr sz="1400" b="1">
+                <a:solidFill>
+                  <a:srgbClr val="FFFFFF"/>
+                </a:solidFill>
+                <a:latin typeface="Yu Gothic"/>
+              </a:rPr>
+              <a:t>1</a:t>
+            </a:r>
+          </a:p>
+        </p:txBody>
+      </p:sp>
+      <p:sp>
+        <p:nvSpPr>
+          <p:cNvPr id="9" name="TextBox 8"/>
+          <p:cNvSpPr txBox="1"/>
+          <p:nvPr/>
+        </p:nvSpPr>
+        <p:spPr>
+          <a:xfrm>
+            <a:off x="5303520" y="5306760"/>
+            <a:ext cx="6583680" cy="411480"/>
+          </a:xfrm>
+          <a:prstGeom prst="rect">
+            <a:avLst/>
+          </a:prstGeom>
+          <a:noFill/>
+        </p:spPr>
+        <p:txBody>
+          <a:bodyPr wrap="square" lIns="45720" rIns="45720" tIns="22860" bIns="22860" anchor="ctr">
+            <a:spAutoFit/>
+          </a:bodyPr>
+          <a:lstStyle/>
+          <a:p>
+            <a:pPr algn="l"/>
+            <a:r>
+              <a:rPr sz="2000" b="1">
+                <a:solidFill>
+                  <a:srgbClr val="333333"/>
+                </a:solidFill>
+                <a:latin typeface="Yu Gothic"/>
+              </a:rPr>
+              <a:t>「Amazonでサインイン」</a:t>
+            </a:r>
+          </a:p>
+        </p:txBody>
+      </p:sp>
+      <p:sp>
+        <p:nvSpPr>
+          <p:cNvPr id="10" name="TextBox 9"/>
+          <p:cNvSpPr txBox="1"/>
+          <p:nvPr/>
+        </p:nvSpPr>
+        <p:spPr>
+          <a:xfrm>
+            <a:off x="5303520" y="5690808"/>
+            <a:ext cx="6583680" cy="365760"/>
+          </a:xfrm>
+          <a:prstGeom prst="rect">
+            <a:avLst/>
+          </a:prstGeom>
+          <a:noFill/>
+        </p:spPr>
+        <p:txBody>
+          <a:bodyPr wrap="square" lIns="45720" rIns="45720" tIns="22860" bIns="22860" anchor="t">
+            <a:spAutoFit/>
+          </a:bodyPr>
+          <a:lstStyle/>
+          <a:p>
+            <a:pPr algn="l"/>
+            <a:r>
+              <a:rPr sz="1400" b="0">
+                <a:solidFill>
+                  <a:srgbClr val="666666"/>
+                </a:solidFill>
+                <a:latin typeface="Yu Gothic"/>
+              </a:rPr>
+              <a:t>をタップ</a:t>
+            </a:r>
+          </a:p>
+        </p:txBody>
+      </p:sp>
+      <p:sp>
+        <p:nvSpPr>
+          <p:cNvPr id="11" name="Rounded Rectangle 10"/>
+          <p:cNvSpPr/>
+          <p:nvPr/>
+        </p:nvSpPr>
+        <p:spPr>
+          <a:xfrm>
+            <a:off x="4663440" y="1828800"/>
+            <a:ext cx="6949440" cy="1188720"/>
+          </a:xfrm>
+          <a:prstGeom prst="roundRect">
+            <a:avLst>
+              <a:gd name="adj" fmla="val 8000"/>
+            </a:avLst>
+          </a:prstGeom>
+          <a:solidFill>
+            <a:srgbClr val="E8F1FB"/>
+          </a:solidFill>
+          <a:ln w="12700">
+            <a:solidFill>
+              <a:srgbClr val="126EC9"/>
+            </a:solidFill>
+          </a:ln>
+          <a:effectLst/>
+        </p:spPr>
+        <p:style>
+          <a:lnRef idx="1">
+            <a:schemeClr val="accent1"/>
+          </a:lnRef>
+          <a:fillRef idx="3">
+            <a:schemeClr val="accent1"/>
+          </a:fillRef>
+          <a:effectRef idx="2">
+            <a:schemeClr val="accent1"/>
+          </a:effectRef>
+          <a:fontRef idx="minor">
+            <a:schemeClr val="lt1"/>
+          </a:fontRef>
+        </p:style>
+        <p:txBody>
+          <a:bodyPr rtlCol="0" anchor="ctr"/>
+          <a:lstStyle/>
+          <a:p>
+            <a:pPr algn="ctr"/>
+          </a:p>
+        </p:txBody>
+      </p:sp>
+      <p:sp>
+        <p:nvSpPr>
+          <p:cNvPr id="12" name="TextBox 11"/>
+          <p:cNvSpPr txBox="1"/>
+          <p:nvPr/>
+        </p:nvSpPr>
+        <p:spPr>
+          <a:xfrm>
+            <a:off x="4846320" y="1828800"/>
+            <a:ext cx="6675120" cy="1188720"/>
+          </a:xfrm>
+          <a:prstGeom prst="rect">
+            <a:avLst/>
+          </a:prstGeom>
+          <a:noFill/>
+        </p:spPr>
+        <p:txBody>
+          <a:bodyPr wrap="square" lIns="45720" rIns="45720" tIns="22860" bIns="22860" anchor="ctr">
+            <a:spAutoFit/>
+          </a:bodyPr>
+          <a:lstStyle/>
+          <a:p>
+            <a:pPr algn="l"/>
+            <a:r>
+              <a:rPr sz="1700" b="1">
+                <a:solidFill>
+                  <a:srgbClr val="333333"/>
+                </a:solidFill>
+                <a:latin typeface="Yu Gothic"/>
+              </a:rPr>
+              <a:t>アカウント作成のあとにアプリを取得</a:t>
+            </a:r>
+          </a:p>
+          <a:p>
+            <a:pPr algn="l"/>
+            <a:r>
+              <a:rPr sz="1700" b="1">
+                <a:solidFill>
+                  <a:srgbClr val="333333"/>
+                </a:solidFill>
+                <a:latin typeface="Yu Gothic"/>
+              </a:rPr>
+              <a:t>アプリを開くと、この画面</a:t>
+            </a:r>
+          </a:p>
+        </p:txBody>
+      </p:sp>
+    </p:spTree>
+  </p:cSld>
+  <p:clrMapOvr>
+    <a:masterClrMapping/>
+  </p:clrMapOvr>
+</p:sld>
+</file>
+
+<file path=ppt/slides/slide9.xml><?xml version="1.0" encoding="utf-8"?>
+<p:sld xmlns:a="http://schemas.openxmlformats.org/drawingml/2006/main" xmlns:p="http://schemas.openxmlformats.org/presentationml/2006/main" xmlns:r="http://schemas.openxmlformats.org/officeDocument/2006/relationships">
+  <p:cSld>
+    <p:spTree>
+      <p:nvGrpSpPr>
+        <p:cNvPr id="1" name=""/>
+        <p:cNvGrpSpPr/>
+        <p:nvPr/>
+      </p:nvGrpSpPr>
+      <p:grpSpPr/>
+      <p:sp>
+        <p:nvSpPr>
+          <p:cNvPr id="2" name="Rounded Rectangle 1"/>
+          <p:cNvSpPr/>
+          <p:nvPr/>
+        </p:nvSpPr>
+        <p:spPr>
+          <a:xfrm>
+            <a:off x="411480" y="777240"/>
+            <a:ext cx="502920" cy="384048"/>
+          </a:xfrm>
+          <a:prstGeom prst="roundRect">
+            <a:avLst>
+              <a:gd name="adj" fmla="val 8000"/>
+            </a:avLst>
+          </a:prstGeom>
+          <a:solidFill>
+            <a:srgbClr val="4FB6BE"/>
+          </a:solidFill>
+          <a:ln>
+            <a:noFill/>
+          </a:ln>
+          <a:effectLst/>
+        </p:spPr>
+        <p:style>
+          <a:lnRef idx="1">
+            <a:schemeClr val="accent1"/>
+          </a:lnRef>
+          <a:fillRef idx="3">
+            <a:schemeClr val="accent1"/>
+          </a:fillRef>
+          <a:effectRef idx="2">
+            <a:schemeClr val="accent1"/>
+          </a:effectRef>
+          <a:fontRef idx="minor">
+            <a:schemeClr val="lt1"/>
+          </a:fontRef>
+        </p:style>
+        <p:txBody>
+          <a:bodyPr rtlCol="0" anchor="ctr"/>
+          <a:lstStyle/>
+          <a:p>
+            <a:pPr algn="ctr"/>
+          </a:p>
+        </p:txBody>
+      </p:sp>
+      <p:sp>
+        <p:nvSpPr>
+          <p:cNvPr id="3" name="TextBox 2"/>
+          <p:cNvSpPr txBox="1"/>
+          <p:nvPr/>
+        </p:nvSpPr>
+        <p:spPr>
+          <a:xfrm>
+            <a:off x="411480" y="777240"/>
+            <a:ext cx="502920" cy="384048"/>
+          </a:xfrm>
+          <a:prstGeom prst="rect">
+            <a:avLst/>
+          </a:prstGeom>
+          <a:noFill/>
+        </p:spPr>
+        <p:txBody>
+          <a:bodyPr wrap="square" lIns="45720" rIns="45720" tIns="22860" bIns="22860" anchor="ctr">
+            <a:spAutoFit/>
+          </a:bodyPr>
+          <a:lstStyle/>
+          <a:p>
+            <a:pPr algn="ctr"/>
+            <a:r>
+              <a:rPr sz="1200" b="1">
+                <a:solidFill>
+                  <a:srgbClr val="FFFFFF"/>
+                </a:solidFill>
+                <a:latin typeface="Yu Gothic"/>
+              </a:rPr>
+              <a:t>④-3</a:t>
+            </a:r>
+          </a:p>
+        </p:txBody>
+      </p:sp>
+      <p:sp>
+        <p:nvSpPr>
+          <p:cNvPr id="4" name="TextBox 3"/>
+          <p:cNvSpPr txBox="1"/>
+          <p:nvPr/>
+        </p:nvSpPr>
+        <p:spPr>
+          <a:xfrm>
+            <a:off x="1078992" y="777240"/>
+            <a:ext cx="10607040" cy="384048"/>
+          </a:xfrm>
+          <a:prstGeom prst="rect">
+            <a:avLst/>
+          </a:prstGeom>
+          <a:noFill/>
+        </p:spPr>
+        <p:txBody>
+          <a:bodyPr wrap="square" lIns="45720" rIns="45720" tIns="22860" bIns="22860" anchor="ctr">
+            <a:spAutoFit/>
+          </a:bodyPr>
+          <a:lstStyle/>
+          <a:p>
+            <a:pPr algn="l"/>
+            <a:r>
+              <a:rPr sz="2000" b="1">
+                <a:solidFill>
+                  <a:srgbClr val="333333"/>
+                </a:solidFill>
+                <a:latin typeface="Yu Gothic"/>
+              </a:rPr>
+              <a:t>サインイン</a:t>
+            </a:r>
+          </a:p>
+        </p:txBody>
+      </p:sp>
+      <p:pic>
+        <p:nvPicPr>
+          <p:cNvPr id="5" name="Picture 4" descr="3.jpg"/>
+          <p:cNvPicPr>
+            <a:picLocks noChangeAspect="1"/>
+          </p:cNvPicPr>
+          <p:nvPr/>
+        </p:nvPicPr>
+        <p:blipFill>
+          <a:blip r:embed="rId2"/>
+          <a:stretch>
+            <a:fillRect/>
+          </a:stretch>
+        </p:blipFill>
+        <p:spPr>
+          <a:xfrm>
+            <a:off x="1097280" y="1280160"/>
+            <a:ext cx="2323759" cy="5029200"/>
+          </a:xfrm>
+          <a:prstGeom prst="rect">
+            <a:avLst/>
+          </a:prstGeom>
+          <a:ln w="12700">
+            <a:solidFill>
+              <a:srgbClr val="BBBBBB"/>
+            </a:solidFill>
+          </a:ln>
+        </p:spPr>
+      </p:pic>
+      <p:sp>
+        <p:nvSpPr>
+          <p:cNvPr id="6" name="Rounded Rectangle 5"/>
+          <p:cNvSpPr/>
+          <p:nvPr/>
+        </p:nvSpPr>
+        <p:spPr>
+          <a:xfrm>
+            <a:off x="1198313" y="4277473"/>
+            <a:ext cx="2121693" cy="269421"/>
+          </a:xfrm>
+          <a:prstGeom prst="roundRect">
+            <a:avLst>
+              <a:gd name="adj" fmla="val 12000"/>
+            </a:avLst>
+          </a:prstGeom>
+          <a:noFill/>
+          <a:ln w="38100">
+            <a:solidFill>
+              <a:srgbClr val="D32F2F"/>
+            </a:solidFill>
+          </a:ln>
+          <a:effectLst/>
+        </p:spPr>
+        <p:style>
+          <a:lnRef idx="1">
+            <a:schemeClr val="accent1"/>
+          </a:lnRef>
+          <a:fillRef idx="3">
+            <a:schemeClr val="accent1"/>
+          </a:fillRef>
+          <a:effectRef idx="2">
+            <a:schemeClr val="accent1"/>
+          </a:effectRef>
+          <a:fontRef idx="minor">
+            <a:schemeClr val="lt1"/>
+          </a:fontRef>
+        </p:style>
+        <p:txBody>
+          <a:bodyPr rtlCol="0" anchor="ctr"/>
+          <a:lstStyle/>
+          <a:p>
+            <a:pPr algn="ctr"/>
+          </a:p>
+        </p:txBody>
+      </p:sp>
+      <p:cxnSp>
+        <p:nvCxnSpPr>
+          <p:cNvPr id="7" name="Connector 6"/>
+          <p:cNvCxnSpPr/>
+          <p:nvPr/>
+        </p:nvCxnSpPr>
+        <p:spPr>
+          <a:xfrm flipV="1">
+            <a:off x="3320006" y="4114799"/>
+            <a:ext cx="1389154" cy="297385"/>
+          </a:xfrm>
+          <a:prstGeom prst="line">
+            <a:avLst/>
+          </a:prstGeom>
+          <a:ln w="22225">
+            <a:solidFill>
+              <a:srgbClr val="D32F2F"/>
+            </a:solidFill>
+          </a:ln>
+        </p:spPr>
+        <p:style>
+          <a:lnRef idx="2">
+            <a:schemeClr val="accent1"/>
+          </a:lnRef>
+          <a:fillRef idx="0">
+            <a:schemeClr val="accent1"/>
+          </a:fillRef>
+          <a:effectRef idx="1">
+            <a:schemeClr val="accent1"/>
+          </a:effectRef>
+          <a:fontRef idx="minor">
+            <a:schemeClr val="tx1"/>
+          </a:fontRef>
+        </p:style>
+      </p:cxnSp>
+      <p:sp>
+        <p:nvSpPr>
+          <p:cNvPr id="8" name="Oval 7"/>
+          <p:cNvSpPr/>
+          <p:nvPr/>
+        </p:nvSpPr>
+        <p:spPr>
+          <a:xfrm>
+            <a:off x="4745736" y="3922775"/>
+            <a:ext cx="384048" cy="384048"/>
+          </a:xfrm>
+          <a:prstGeom prst="ellipse">
+            <a:avLst/>
+          </a:prstGeom>
+          <a:solidFill>
+            <a:srgbClr val="D32F2F"/>
+          </a:solidFill>
+          <a:ln w="19050">
+            <a:solidFill>
+              <a:srgbClr val="FFFFFF"/>
+            </a:solidFill>
+          </a:ln>
+          <a:effectLst/>
+        </p:spPr>
+        <p:style>
+          <a:lnRef idx="1">
+            <a:schemeClr val="accent1"/>
+          </a:lnRef>
+          <a:fillRef idx="3">
+            <a:schemeClr val="accent1"/>
+          </a:fillRef>
+          <a:effectRef idx="2">
+            <a:schemeClr val="accent1"/>
+          </a:effectRef>
+          <a:fontRef idx="minor">
+            <a:schemeClr val="lt1"/>
+          </a:fontRef>
+        </p:style>
+        <p:txBody>
+          <a:bodyPr rtlCol="0" anchor="ctr" lIns="0" rIns="0" tIns="0" bIns="0"/>
+          <a:lstStyle/>
+          <a:p>
+            <a:pPr algn="ctr"/>
+            <a:r>
+              <a:rPr sz="1400" b="1">
+                <a:solidFill>
+                  <a:srgbClr val="FFFFFF"/>
+                </a:solidFill>
+                <a:latin typeface="Yu Gothic"/>
+              </a:rPr>
+              <a:t>1</a:t>
+            </a:r>
+          </a:p>
+        </p:txBody>
+      </p:sp>
+      <p:sp>
+        <p:nvSpPr>
+          <p:cNvPr id="9" name="TextBox 8"/>
+          <p:cNvSpPr txBox="1"/>
+          <p:nvPr/>
+        </p:nvSpPr>
+        <p:spPr>
+          <a:xfrm>
+            <a:off x="5303520" y="3840479"/>
+            <a:ext cx="6583680" cy="411480"/>
+          </a:xfrm>
+          <a:prstGeom prst="rect">
+            <a:avLst/>
+          </a:prstGeom>
+          <a:noFill/>
+        </p:spPr>
+        <p:txBody>
+          <a:bodyPr wrap="square" lIns="45720" rIns="45720" tIns="22860" bIns="22860" anchor="ctr">
+            <a:spAutoFit/>
+          </a:bodyPr>
+          <a:lstStyle/>
+          <a:p>
+            <a:pPr algn="l"/>
+            <a:r>
+              <a:rPr sz="2000" b="1">
+                <a:solidFill>
+                  <a:srgbClr val="333333"/>
+                </a:solidFill>
+                <a:latin typeface="Yu Gothic"/>
+              </a:rPr>
+              <a:t>メールアドレス</a:t>
+            </a:r>
+          </a:p>
+        </p:txBody>
+      </p:sp>
+      <p:sp>
+        <p:nvSpPr>
+          <p:cNvPr id="10" name="TextBox 9"/>
+          <p:cNvSpPr txBox="1"/>
+          <p:nvPr/>
+        </p:nvSpPr>
+        <p:spPr>
+          <a:xfrm>
+            <a:off x="5303520" y="4224527"/>
+            <a:ext cx="6583680" cy="365760"/>
+          </a:xfrm>
+          <a:prstGeom prst="rect">
+            <a:avLst/>
+          </a:prstGeom>
+          <a:noFill/>
+        </p:spPr>
+        <p:txBody>
+          <a:bodyPr wrap="square" lIns="45720" rIns="45720" tIns="22860" bIns="22860" anchor="t">
+            <a:spAutoFit/>
+          </a:bodyPr>
+          <a:lstStyle/>
+          <a:p>
+            <a:pPr algn="l"/>
+            <a:r>
+              <a:rPr sz="1400" b="0">
+                <a:solidFill>
+                  <a:srgbClr val="666666"/>
+                </a:solidFill>
+                <a:latin typeface="Yu Gothic"/>
+              </a:rPr>
+              <a:t>招待メールのアドレス</a:t>
+            </a:r>
+          </a:p>
+        </p:txBody>
+      </p:sp>
+      <p:sp>
+        <p:nvSpPr>
+          <p:cNvPr id="11" name="Rounded Rectangle 10"/>
+          <p:cNvSpPr/>
+          <p:nvPr/>
+        </p:nvSpPr>
+        <p:spPr>
+          <a:xfrm>
+            <a:off x="1198313" y="4594604"/>
+            <a:ext cx="2121693" cy="266614"/>
+          </a:xfrm>
+          <a:prstGeom prst="roundRect">
+            <a:avLst>
+              <a:gd name="adj" fmla="val 12000"/>
+            </a:avLst>
+          </a:prstGeom>
+          <a:noFill/>
+          <a:ln w="38100">
+            <a:solidFill>
+              <a:srgbClr val="D32F2F"/>
+            </a:solidFill>
+          </a:ln>
+          <a:effectLst/>
+        </p:spPr>
+        <p:style>
+          <a:lnRef idx="1">
+            <a:schemeClr val="accent1"/>
+          </a:lnRef>
+          <a:fillRef idx="3">
+            <a:schemeClr val="accent1"/>
+          </a:fillRef>
+          <a:effectRef idx="2">
+            <a:schemeClr val="accent1"/>
+          </a:effectRef>
+          <a:fontRef idx="minor">
+            <a:schemeClr val="lt1"/>
+          </a:fontRef>
+        </p:style>
+        <p:txBody>
+          <a:bodyPr rtlCol="0" anchor="ctr"/>
+          <a:lstStyle/>
+          <a:p>
+            <a:pPr algn="ctr"/>
+          </a:p>
+        </p:txBody>
+      </p:sp>
+      <p:cxnSp>
+        <p:nvCxnSpPr>
+          <p:cNvPr id="12" name="Connector 11"/>
+          <p:cNvCxnSpPr/>
+          <p:nvPr/>
+        </p:nvCxnSpPr>
+        <p:spPr>
+          <a:xfrm>
+            <a:off x="3320006" y="4727912"/>
+            <a:ext cx="1389154" cy="209847"/>
+          </a:xfrm>
+          <a:prstGeom prst="line">
+            <a:avLst/>
+          </a:prstGeom>
+          <a:ln w="22225">
+            <a:solidFill>
+              <a:srgbClr val="D32F2F"/>
+            </a:solidFill>
+          </a:ln>
+        </p:spPr>
+        <p:style>
+          <a:lnRef idx="2">
+            <a:schemeClr val="accent1"/>
+          </a:lnRef>
+          <a:fillRef idx="0">
+            <a:schemeClr val="accent1"/>
+          </a:fillRef>
+          <a:effectRef idx="1">
+            <a:schemeClr val="accent1"/>
+          </a:effectRef>
+          <a:fontRef idx="minor">
+            <a:schemeClr val="tx1"/>
+          </a:fontRef>
+        </p:style>
+      </p:cxnSp>
+      <p:sp>
+        <p:nvSpPr>
+          <p:cNvPr id="13" name="Oval 12"/>
+          <p:cNvSpPr/>
+          <p:nvPr/>
+        </p:nvSpPr>
+        <p:spPr>
+          <a:xfrm>
+            <a:off x="4745736" y="4745736"/>
+            <a:ext cx="384048" cy="384048"/>
+          </a:xfrm>
+          <a:prstGeom prst="ellipse">
+            <a:avLst/>
+          </a:prstGeom>
+          <a:solidFill>
+            <a:srgbClr val="D32F2F"/>
+          </a:solidFill>
+          <a:ln w="19050">
+            <a:solidFill>
+              <a:srgbClr val="FFFFFF"/>
+            </a:solidFill>
+          </a:ln>
+          <a:effectLst/>
+        </p:spPr>
+        <p:style>
+          <a:lnRef idx="1">
+            <a:schemeClr val="accent1"/>
+          </a:lnRef>
+          <a:fillRef idx="3">
+            <a:schemeClr val="accent1"/>
+          </a:fillRef>
+          <a:effectRef idx="2">
+            <a:schemeClr val="accent1"/>
+          </a:effectRef>
+          <a:fontRef idx="minor">
+            <a:schemeClr val="lt1"/>
+          </a:fontRef>
+        </p:style>
+        <p:txBody>
+          <a:bodyPr rtlCol="0" anchor="ctr" lIns="0" rIns="0" tIns="0" bIns="0"/>
+          <a:lstStyle/>
+          <a:p>
+            <a:pPr algn="ctr"/>
+            <a:r>
+              <a:rPr sz="1400" b="1">
+                <a:solidFill>
+                  <a:srgbClr val="FFFFFF"/>
+                </a:solidFill>
+                <a:latin typeface="Yu Gothic"/>
+              </a:rPr>
+              <a:t>2</a:t>
+            </a:r>
+          </a:p>
+        </p:txBody>
+      </p:sp>
+      <p:sp>
+        <p:nvSpPr>
+          <p:cNvPr id="14" name="TextBox 13"/>
+          <p:cNvSpPr txBox="1"/>
+          <p:nvPr/>
+        </p:nvSpPr>
+        <p:spPr>
+          <a:xfrm>
+            <a:off x="5303520" y="4663440"/>
+            <a:ext cx="6583680" cy="411480"/>
+          </a:xfrm>
+          <a:prstGeom prst="rect">
+            <a:avLst/>
+          </a:prstGeom>
+          <a:noFill/>
+        </p:spPr>
+        <p:txBody>
+          <a:bodyPr wrap="square" lIns="45720" rIns="45720" tIns="22860" bIns="22860" anchor="ctr">
+            <a:spAutoFit/>
+          </a:bodyPr>
+          <a:lstStyle/>
+          <a:p>
+            <a:pPr algn="l"/>
+            <a:r>
+              <a:rPr sz="2000" b="1">
+                <a:solidFill>
+                  <a:srgbClr val="333333"/>
+                </a:solidFill>
+                <a:latin typeface="Yu Gothic"/>
+              </a:rPr>
+              <a:t>パスワード</a:t>
+            </a:r>
+          </a:p>
+        </p:txBody>
+      </p:sp>
+      <p:sp>
+        <p:nvSpPr>
+          <p:cNvPr id="15" name="TextBox 14"/>
+          <p:cNvSpPr txBox="1"/>
+          <p:nvPr/>
+        </p:nvSpPr>
+        <p:spPr>
+          <a:xfrm>
+            <a:off x="5303520" y="5047488"/>
+            <a:ext cx="6583680" cy="365760"/>
+          </a:xfrm>
+          <a:prstGeom prst="rect">
+            <a:avLst/>
+          </a:prstGeom>
+          <a:noFill/>
+        </p:spPr>
+        <p:txBody>
+          <a:bodyPr wrap="square" lIns="45720" rIns="45720" tIns="22860" bIns="22860" anchor="t">
+            <a:spAutoFit/>
+          </a:bodyPr>
+          <a:lstStyle/>
+          <a:p>
+            <a:pPr algn="l"/>
+            <a:r>
+              <a:rPr sz="1400" b="0">
+                <a:solidFill>
+                  <a:srgbClr val="666666"/>
+                </a:solidFill>
+                <a:latin typeface="Yu Gothic"/>
+              </a:rPr>
+              <a:t>④-1で決めたパスワード</a:t>
+            </a:r>
+          </a:p>
+        </p:txBody>
+      </p:sp>
+      <p:sp>
+        <p:nvSpPr>
+          <p:cNvPr id="16" name="Rounded Rectangle 15"/>
+          <p:cNvSpPr/>
+          <p:nvPr/>
+        </p:nvSpPr>
+        <p:spPr>
+          <a:xfrm>
+            <a:off x="1209538" y="5332707"/>
+            <a:ext cx="2099241" cy="269421"/>
+          </a:xfrm>
+          <a:prstGeom prst="roundRect">
+            <a:avLst>
+              <a:gd name="adj" fmla="val 12000"/>
+            </a:avLst>
+          </a:prstGeom>
+          <a:noFill/>
+          <a:ln w="38100">
+            <a:solidFill>
+              <a:srgbClr val="D32F2F"/>
+            </a:solidFill>
+          </a:ln>
+          <a:effectLst/>
+        </p:spPr>
+        <p:style>
+          <a:lnRef idx="1">
+            <a:schemeClr val="accent1"/>
+          </a:lnRef>
+          <a:fillRef idx="3">
+            <a:schemeClr val="accent1"/>
+          </a:fillRef>
+          <a:effectRef idx="2">
+            <a:schemeClr val="accent1"/>
+          </a:effectRef>
+          <a:fontRef idx="minor">
+            <a:schemeClr val="lt1"/>
+          </a:fontRef>
+        </p:style>
+        <p:txBody>
+          <a:bodyPr rtlCol="0" anchor="ctr"/>
+          <a:lstStyle/>
+          <a:p>
+            <a:pPr algn="ctr"/>
+          </a:p>
+        </p:txBody>
+      </p:sp>
+      <p:cxnSp>
+        <p:nvCxnSpPr>
+          <p:cNvPr id="17" name="Connector 16"/>
+          <p:cNvCxnSpPr/>
+          <p:nvPr/>
+        </p:nvCxnSpPr>
+        <p:spPr>
+          <a:xfrm>
+            <a:off x="3308780" y="5467418"/>
+            <a:ext cx="1400380" cy="293302"/>
+          </a:xfrm>
+          <a:prstGeom prst="line">
+            <a:avLst/>
+          </a:prstGeom>
+          <a:ln w="22225">
+            <a:solidFill>
+              <a:srgbClr val="D32F2F"/>
+            </a:solidFill>
+          </a:ln>
+        </p:spPr>
+        <p:style>
+          <a:lnRef idx="2">
+            <a:schemeClr val="accent1"/>
+          </a:lnRef>
+          <a:fillRef idx="0">
+            <a:schemeClr val="accent1"/>
+          </a:fillRef>
+          <a:effectRef idx="1">
+            <a:schemeClr val="accent1"/>
+          </a:effectRef>
+          <a:fontRef idx="minor">
+            <a:schemeClr val="tx1"/>
+          </a:fontRef>
+        </p:style>
+      </p:cxnSp>
+      <p:sp>
+        <p:nvSpPr>
+          <p:cNvPr id="18" name="Oval 17"/>
+          <p:cNvSpPr/>
+          <p:nvPr/>
+        </p:nvSpPr>
+        <p:spPr>
+          <a:xfrm>
+            <a:off x="4745736" y="5568696"/>
+            <a:ext cx="384048" cy="384048"/>
+          </a:xfrm>
+          <a:prstGeom prst="ellipse">
+            <a:avLst/>
+          </a:prstGeom>
+          <a:solidFill>
+            <a:srgbClr val="D32F2F"/>
+          </a:solidFill>
+          <a:ln w="19050">
+            <a:solidFill>
+              <a:srgbClr val="FFFFFF"/>
+            </a:solidFill>
+          </a:ln>
+          <a:effectLst/>
+        </p:spPr>
+        <p:style>
+          <a:lnRef idx="1">
+            <a:schemeClr val="accent1"/>
+          </a:lnRef>
+          <a:fillRef idx="3">
+            <a:schemeClr val="accent1"/>
+          </a:fillRef>
+          <a:effectRef idx="2">
+            <a:schemeClr val="accent1"/>
+          </a:effectRef>
+          <a:fontRef idx="minor">
+            <a:schemeClr val="lt1"/>
+          </a:fontRef>
+        </p:style>
+        <p:txBody>
+          <a:bodyPr rtlCol="0" anchor="ctr" lIns="0" rIns="0" tIns="0" bIns="0"/>
+          <a:lstStyle/>
+          <a:p>
+            <a:pPr algn="ctr"/>
+            <a:r>
+              <a:rPr sz="1400" b="1">
+                <a:solidFill>
+                  <a:srgbClr val="FFFFFF"/>
+                </a:solidFill>
+                <a:latin typeface="Yu Gothic"/>
+              </a:rPr>
+              <a:t>3</a:t>
+            </a:r>
+          </a:p>
+        </p:txBody>
+      </p:sp>
+      <p:sp>
+        <p:nvSpPr>
+          <p:cNvPr id="19" name="TextBox 18"/>
+          <p:cNvSpPr txBox="1"/>
+          <p:nvPr/>
+        </p:nvSpPr>
+        <p:spPr>
+          <a:xfrm>
+            <a:off x="5303520" y="5486400"/>
+            <a:ext cx="6583680" cy="411480"/>
+          </a:xfrm>
+          <a:prstGeom prst="rect">
+            <a:avLst/>
+          </a:prstGeom>
+          <a:noFill/>
+        </p:spPr>
+        <p:txBody>
+          <a:bodyPr wrap="square" lIns="45720" rIns="45720" tIns="22860" bIns="22860" anchor="ctr">
+            <a:spAutoFit/>
+          </a:bodyPr>
+          <a:lstStyle/>
+          <a:p>
+            <a:pPr algn="l"/>
+            <a:r>
+              <a:rPr sz="2000" b="1">
+                <a:solidFill>
+                  <a:srgbClr val="333333"/>
+                </a:solidFill>
+                <a:latin typeface="Yu Gothic"/>
+              </a:rPr>
+              <a:t>「サインイン」</a:t>
+            </a:r>
+          </a:p>
+        </p:txBody>
+      </p:sp>
+      <p:sp>
+        <p:nvSpPr>
+          <p:cNvPr id="20" name="TextBox 19"/>
+          <p:cNvSpPr txBox="1"/>
+          <p:nvPr/>
+        </p:nvSpPr>
+        <p:spPr>
+          <a:xfrm>
+            <a:off x="5303520" y="5870448"/>
+            <a:ext cx="6583680" cy="365760"/>
+          </a:xfrm>
+          <a:prstGeom prst="rect">
+            <a:avLst/>
+          </a:prstGeom>
+          <a:noFill/>
+        </p:spPr>
+        <p:txBody>
+          <a:bodyPr wrap="square" lIns="45720" rIns="45720" tIns="22860" bIns="22860" anchor="t">
+            <a:spAutoFit/>
+          </a:bodyPr>
+          <a:lstStyle/>
+          <a:p>
+            <a:pPr algn="l"/>
+            <a:r>
+              <a:rPr sz="1400" b="0">
+                <a:solidFill>
+                  <a:srgbClr val="666666"/>
+                </a:solidFill>
+                <a:latin typeface="Yu Gothic"/>
+              </a:rPr>
+              <a:t>をタップ</a:t>
             </a:r>
           </a:p>
         </p:txBody>

--- a/out/登録の流れ_書類準備まで.pptx
+++ b/out/登録の流れ_書類準備まで.pptx
@@ -4443,8 +4443,8 @@
         </p:nvSpPr>
         <p:spPr>
           <a:xfrm>
-            <a:off x="4663440" y="4663440"/>
-            <a:ext cx="6949440" cy="822960"/>
+            <a:off x="4663440" y="4480560"/>
+            <a:ext cx="6949440" cy="1371600"/>
           </a:xfrm>
           <a:prstGeom prst="roundRect">
             <a:avLst>
@@ -4491,8 +4491,8 @@
         </p:nvSpPr>
         <p:spPr>
           <a:xfrm>
-            <a:off x="4800600" y="4663440"/>
-            <a:ext cx="6675120" cy="822960"/>
+            <a:off x="4800600" y="4480560"/>
+            <a:ext cx="6675120" cy="1371600"/>
           </a:xfrm>
           <a:prstGeom prst="rect">
             <a:avLst/>
@@ -4526,6 +4526,18 @@
                 <a:latin typeface="Yu Gothic"/>
               </a:rPr>
               <a:t>（免許証の確認は24時間以内にメールが届く）</a:t>
+            </a:r>
+          </a:p>
+          <a:p>
+            <a:pPr algn="l"/>
+            <a:r>
+              <a:rPr sz="1400" b="1">
+                <a:solidFill>
+                  <a:srgbClr val="333333"/>
+                </a:solidFill>
+                <a:latin typeface="Yu Gothic"/>
+              </a:rPr>
+              <a:t>免許証アップロードまで終わったら Teams で @登録チーム に連絡</a:t>
             </a:r>
           </a:p>
         </p:txBody>
@@ -4672,8 +4684,8 @@
         </p:nvSpPr>
         <p:spPr>
           <a:xfrm>
-            <a:off x="502920" y="2286000"/>
-            <a:ext cx="2011680" cy="1737360"/>
+            <a:off x="457200" y="1920240"/>
+            <a:ext cx="1417320" cy="1737360"/>
           </a:xfrm>
           <a:prstGeom prst="roundRect">
             <a:avLst>
@@ -4718,8 +4730,8 @@
         </p:nvSpPr>
         <p:spPr>
           <a:xfrm>
-            <a:off x="502920" y="2286000"/>
-            <a:ext cx="2011680" cy="1737360"/>
+            <a:off x="457200" y="1920240"/>
+            <a:ext cx="1417320" cy="1737360"/>
           </a:xfrm>
           <a:prstGeom prst="rect">
             <a:avLst/>
@@ -4734,7 +4746,7 @@
           <a:p>
             <a:pPr algn="ctr"/>
             <a:r>
-              <a:rPr sz="1700" b="1">
+              <a:rPr sz="1500" b="1">
                 <a:solidFill>
                   <a:srgbClr val="FFFFFF"/>
                 </a:solidFill>
@@ -4746,13 +4758,25 @@
           <a:p>
             <a:pPr algn="ctr"/>
             <a:r>
-              <a:rPr sz="1700" b="1">
+              <a:rPr sz="1500" b="1">
                 <a:solidFill>
                   <a:srgbClr val="FFFFFF"/>
                 </a:solidFill>
                 <a:latin typeface="Yu Gothic"/>
               </a:rPr>
-              <a:t>書類をそろえる</a:t>
+              <a:t>書類を</a:t>
+            </a:r>
+          </a:p>
+          <a:p>
+            <a:pPr algn="ctr"/>
+            <a:r>
+              <a:rPr sz="1500" b="1">
+                <a:solidFill>
+                  <a:srgbClr val="FFFFFF"/>
+                </a:solidFill>
+                <a:latin typeface="Yu Gothic"/>
+              </a:rPr>
+              <a:t>そろえる</a:t>
             </a:r>
           </a:p>
         </p:txBody>
@@ -4765,8 +4789,8 @@
         </p:nvSpPr>
         <p:spPr>
           <a:xfrm>
-            <a:off x="502920" y="4114800"/>
-            <a:ext cx="2011680" cy="365760"/>
+            <a:off x="457200" y="3749039"/>
+            <a:ext cx="1417320" cy="365760"/>
           </a:xfrm>
           <a:prstGeom prst="rect">
             <a:avLst/>
@@ -4781,7 +4805,7 @@
           <a:p>
             <a:pPr algn="ctr"/>
             <a:r>
-              <a:rPr sz="1300" b="1">
+              <a:rPr sz="1200" b="1">
                 <a:solidFill>
                   <a:srgbClr val="4FB6BE"/>
                 </a:solidFill>
@@ -4800,8 +4824,8 @@
         </p:nvSpPr>
         <p:spPr>
           <a:xfrm>
-            <a:off x="2496312" y="2880360"/>
-            <a:ext cx="320040" cy="548640"/>
+            <a:off x="1828800" y="2560320"/>
+            <a:ext cx="274320" cy="457200"/>
           </a:xfrm>
           <a:prstGeom prst="rect">
             <a:avLst/>
@@ -4816,7 +4840,7 @@
           <a:p>
             <a:pPr algn="ctr"/>
             <a:r>
-              <a:rPr sz="1400" b="1">
+              <a:rPr sz="1200" b="1">
                 <a:solidFill>
                   <a:srgbClr val="666666"/>
                 </a:solidFill>
@@ -4835,8 +4859,8 @@
         </p:nvSpPr>
         <p:spPr>
           <a:xfrm>
-            <a:off x="2788920" y="2286000"/>
-            <a:ext cx="2011680" cy="1737360"/>
+            <a:off x="2084832" y="1920240"/>
+            <a:ext cx="1417320" cy="1737360"/>
           </a:xfrm>
           <a:prstGeom prst="roundRect">
             <a:avLst>
@@ -4881,8 +4905,8 @@
         </p:nvSpPr>
         <p:spPr>
           <a:xfrm>
-            <a:off x="2788920" y="2286000"/>
-            <a:ext cx="2011680" cy="1737360"/>
+            <a:off x="2084832" y="1920240"/>
+            <a:ext cx="1417320" cy="1737360"/>
           </a:xfrm>
           <a:prstGeom prst="rect">
             <a:avLst/>
@@ -4897,7 +4921,7 @@
           <a:p>
             <a:pPr algn="ctr"/>
             <a:r>
-              <a:rPr sz="1700" b="1">
+              <a:rPr sz="1500" b="1">
                 <a:solidFill>
                   <a:srgbClr val="FFFFFF"/>
                 </a:solidFill>
@@ -4909,13 +4933,25 @@
           <a:p>
             <a:pPr algn="ctr"/>
             <a:r>
-              <a:rPr sz="1700" b="1">
+              <a:rPr sz="1500" b="1">
                 <a:solidFill>
                   <a:srgbClr val="FFFFFF"/>
                 </a:solidFill>
                 <a:latin typeface="Yu Gothic"/>
               </a:rPr>
-              <a:t>クラウドサイン</a:t>
+              <a:t>クラウド</a:t>
+            </a:r>
+          </a:p>
+          <a:p>
+            <a:pPr algn="ctr"/>
+            <a:r>
+              <a:rPr sz="1500" b="1">
+                <a:solidFill>
+                  <a:srgbClr val="FFFFFF"/>
+                </a:solidFill>
+                <a:latin typeface="Yu Gothic"/>
+              </a:rPr>
+              <a:t>サイン</a:t>
             </a:r>
           </a:p>
         </p:txBody>
@@ -4928,8 +4964,8 @@
         </p:nvSpPr>
         <p:spPr>
           <a:xfrm>
-            <a:off x="2788920" y="4114800"/>
-            <a:ext cx="2011680" cy="365760"/>
+            <a:off x="2084832" y="3749039"/>
+            <a:ext cx="1417320" cy="365760"/>
           </a:xfrm>
           <a:prstGeom prst="rect">
             <a:avLst/>
@@ -4944,7 +4980,7 @@
           <a:p>
             <a:pPr algn="ctr"/>
             <a:r>
-              <a:rPr sz="1300" b="1">
+              <a:rPr sz="1200" b="1">
                 <a:solidFill>
                   <a:srgbClr val="4FB6BE"/>
                 </a:solidFill>
@@ -4963,8 +4999,8 @@
         </p:nvSpPr>
         <p:spPr>
           <a:xfrm>
-            <a:off x="4782312" y="2880360"/>
-            <a:ext cx="320040" cy="548640"/>
+            <a:off x="3456432" y="2560320"/>
+            <a:ext cx="274320" cy="457200"/>
           </a:xfrm>
           <a:prstGeom prst="rect">
             <a:avLst/>
@@ -4979,7 +5015,7 @@
           <a:p>
             <a:pPr algn="ctr"/>
             <a:r>
-              <a:rPr sz="1400" b="1">
+              <a:rPr sz="1200" b="1">
                 <a:solidFill>
                   <a:srgbClr val="666666"/>
                 </a:solidFill>
@@ -4998,8 +5034,8 @@
         </p:nvSpPr>
         <p:spPr>
           <a:xfrm>
-            <a:off x="5074920" y="2286000"/>
-            <a:ext cx="2011680" cy="1737360"/>
+            <a:off x="3712464" y="1920240"/>
+            <a:ext cx="1417320" cy="1737360"/>
           </a:xfrm>
           <a:prstGeom prst="roundRect">
             <a:avLst>
@@ -5044,8 +5080,8 @@
         </p:nvSpPr>
         <p:spPr>
           <a:xfrm>
-            <a:off x="5074920" y="2286000"/>
-            <a:ext cx="2011680" cy="1737360"/>
+            <a:off x="3712464" y="1920240"/>
+            <a:ext cx="1417320" cy="1737360"/>
           </a:xfrm>
           <a:prstGeom prst="rect">
             <a:avLst/>
@@ -5060,7 +5096,7 @@
           <a:p>
             <a:pPr algn="ctr"/>
             <a:r>
-              <a:rPr sz="1700" b="1">
+              <a:rPr sz="1500" b="1">
                 <a:solidFill>
                   <a:srgbClr val="666666"/>
                 </a:solidFill>
@@ -5072,13 +5108,25 @@
           <a:p>
             <a:pPr algn="ctr"/>
             <a:r>
-              <a:rPr sz="1700" b="1">
+              <a:rPr sz="1500" b="1">
                 <a:solidFill>
                   <a:srgbClr val="666666"/>
                 </a:solidFill>
                 <a:latin typeface="Yu Gothic"/>
               </a:rPr>
-              <a:t>フォルダへ格納</a:t>
+              <a:t>フォルダへ</a:t>
+            </a:r>
+          </a:p>
+          <a:p>
+            <a:pPr algn="ctr"/>
+            <a:r>
+              <a:rPr sz="1500" b="1">
+                <a:solidFill>
+                  <a:srgbClr val="666666"/>
+                </a:solidFill>
+                <a:latin typeface="Yu Gothic"/>
+              </a:rPr>
+              <a:t>格納</a:t>
             </a:r>
           </a:p>
         </p:txBody>
@@ -5091,8 +5139,8 @@
         </p:nvSpPr>
         <p:spPr>
           <a:xfrm>
-            <a:off x="5074920" y="4114800"/>
-            <a:ext cx="2011680" cy="365760"/>
+            <a:off x="3712464" y="3749039"/>
+            <a:ext cx="1417320" cy="365760"/>
           </a:xfrm>
           <a:prstGeom prst="rect">
             <a:avLst/>
@@ -5107,7 +5155,7 @@
           <a:p>
             <a:pPr algn="ctr"/>
             <a:r>
-              <a:rPr sz="1300" b="1">
+              <a:rPr sz="1200" b="1">
                 <a:solidFill>
                   <a:srgbClr val="666666"/>
                 </a:solidFill>
@@ -5126,8 +5174,8 @@
         </p:nvSpPr>
         <p:spPr>
           <a:xfrm>
-            <a:off x="7068312" y="2880360"/>
-            <a:ext cx="320040" cy="548640"/>
+            <a:off x="5084064" y="2560320"/>
+            <a:ext cx="274320" cy="457200"/>
           </a:xfrm>
           <a:prstGeom prst="rect">
             <a:avLst/>
@@ -5142,7 +5190,7 @@
           <a:p>
             <a:pPr algn="ctr"/>
             <a:r>
-              <a:rPr sz="1400" b="1">
+              <a:rPr sz="1200" b="1">
                 <a:solidFill>
                   <a:srgbClr val="666666"/>
                 </a:solidFill>
@@ -5161,8 +5209,8 @@
         </p:nvSpPr>
         <p:spPr>
           <a:xfrm>
-            <a:off x="7360920" y="2286000"/>
-            <a:ext cx="2011680" cy="1737360"/>
+            <a:off x="5340096" y="1920240"/>
+            <a:ext cx="1417320" cy="1737360"/>
           </a:xfrm>
           <a:prstGeom prst="roundRect">
             <a:avLst>
@@ -5207,8 +5255,8 @@
         </p:nvSpPr>
         <p:spPr>
           <a:xfrm>
-            <a:off x="7360920" y="2286000"/>
-            <a:ext cx="2011680" cy="1737360"/>
+            <a:off x="5340096" y="1920240"/>
+            <a:ext cx="1417320" cy="1737360"/>
           </a:xfrm>
           <a:prstGeom prst="rect">
             <a:avLst/>
@@ -5223,7 +5271,7 @@
           <a:p>
             <a:pPr algn="ctr"/>
             <a:r>
-              <a:rPr sz="1700" b="1">
+              <a:rPr sz="1500" b="1">
                 <a:solidFill>
                   <a:srgbClr val="FFFFFF"/>
                 </a:solidFill>
@@ -5235,13 +5283,25 @@
           <a:p>
             <a:pPr algn="ctr"/>
             <a:r>
-              <a:rPr sz="1700" b="1">
+              <a:rPr sz="1500" b="1">
                 <a:solidFill>
                   <a:srgbClr val="FFFFFF"/>
                 </a:solidFill>
                 <a:latin typeface="Yu Gothic"/>
               </a:rPr>
-              <a:t>Amazon登録</a:t>
+              <a:t>Amazon</a:t>
+            </a:r>
+          </a:p>
+          <a:p>
+            <a:pPr algn="ctr"/>
+            <a:r>
+              <a:rPr sz="1500" b="1">
+                <a:solidFill>
+                  <a:srgbClr val="FFFFFF"/>
+                </a:solidFill>
+                <a:latin typeface="Yu Gothic"/>
+              </a:rPr>
+              <a:t>登録</a:t>
             </a:r>
           </a:p>
         </p:txBody>
@@ -5254,8 +5314,8 @@
         </p:nvSpPr>
         <p:spPr>
           <a:xfrm>
-            <a:off x="7360920" y="4114800"/>
-            <a:ext cx="2011680" cy="365760"/>
+            <a:off x="5340096" y="3749039"/>
+            <a:ext cx="1417320" cy="365760"/>
           </a:xfrm>
           <a:prstGeom prst="rect">
             <a:avLst/>
@@ -5270,7 +5330,7 @@
           <a:p>
             <a:pPr algn="ctr"/>
             <a:r>
-              <a:rPr sz="1300" b="1">
+              <a:rPr sz="1200" b="1">
                 <a:solidFill>
                   <a:srgbClr val="4FB6BE"/>
                 </a:solidFill>
@@ -5289,8 +5349,8 @@
         </p:nvSpPr>
         <p:spPr>
           <a:xfrm>
-            <a:off x="9354312" y="2880360"/>
-            <a:ext cx="320040" cy="548640"/>
+            <a:off x="6711696" y="2560320"/>
+            <a:ext cx="274320" cy="457200"/>
           </a:xfrm>
           <a:prstGeom prst="rect">
             <a:avLst/>
@@ -5305,7 +5365,7 @@
           <a:p>
             <a:pPr algn="ctr"/>
             <a:r>
-              <a:rPr sz="1400" b="1">
+              <a:rPr sz="1200" b="1">
                 <a:solidFill>
                   <a:srgbClr val="666666"/>
                 </a:solidFill>
@@ -5324,8 +5384,8 @@
         </p:nvSpPr>
         <p:spPr>
           <a:xfrm>
-            <a:off x="9646920" y="2286000"/>
-            <a:ext cx="2011680" cy="1737360"/>
+            <a:off x="6967728" y="1920240"/>
+            <a:ext cx="1417320" cy="1737360"/>
           </a:xfrm>
           <a:prstGeom prst="roundRect">
             <a:avLst>
@@ -5370,8 +5430,8 @@
         </p:nvSpPr>
         <p:spPr>
           <a:xfrm>
-            <a:off x="9646920" y="2286000"/>
-            <a:ext cx="2011680" cy="1737360"/>
+            <a:off x="6967728" y="1920240"/>
+            <a:ext cx="1417320" cy="1737360"/>
           </a:xfrm>
           <a:prstGeom prst="rect">
             <a:avLst/>
@@ -5386,7 +5446,7 @@
           <a:p>
             <a:pPr algn="ctr"/>
             <a:r>
-              <a:rPr sz="1700" b="1">
+              <a:rPr sz="1500" b="1">
                 <a:solidFill>
                   <a:srgbClr val="666666"/>
                 </a:solidFill>
@@ -5398,12 +5458,362 @@
           <a:p>
             <a:pPr algn="ctr"/>
             <a:r>
-              <a:rPr sz="1700" b="1">
+              <a:rPr sz="1500" b="1">
                 <a:solidFill>
                   <a:srgbClr val="666666"/>
                 </a:solidFill>
                 <a:latin typeface="Yu Gothic"/>
               </a:rPr>
+              <a:t>Disprz</a:t>
+            </a:r>
+          </a:p>
+          <a:p>
+            <a:pPr algn="ctr"/>
+            <a:r>
+              <a:rPr sz="1500" b="1">
+                <a:solidFill>
+                  <a:srgbClr val="666666"/>
+                </a:solidFill>
+                <a:latin typeface="Yu Gothic"/>
+              </a:rPr>
+              <a:t>視聴</a:t>
+            </a:r>
+          </a:p>
+        </p:txBody>
+      </p:sp>
+      <p:sp>
+        <p:nvSpPr>
+          <p:cNvPr id="23" name="TextBox 22"/>
+          <p:cNvSpPr txBox="1"/>
+          <p:nvPr/>
+        </p:nvSpPr>
+        <p:spPr>
+          <a:xfrm>
+            <a:off x="6967728" y="3749039"/>
+            <a:ext cx="1417320" cy="365760"/>
+          </a:xfrm>
+          <a:prstGeom prst="rect">
+            <a:avLst/>
+          </a:prstGeom>
+          <a:noFill/>
+        </p:spPr>
+        <p:txBody>
+          <a:bodyPr wrap="square" lIns="45720" rIns="45720" tIns="22860" bIns="22860" anchor="t">
+            <a:spAutoFit/>
+          </a:bodyPr>
+          <a:lstStyle/>
+          <a:p>
+            <a:pPr algn="ctr"/>
+            <a:r>
+              <a:rPr sz="1200" b="1">
+                <a:solidFill>
+                  <a:srgbClr val="666666"/>
+                </a:solidFill>
+                <a:latin typeface="Yu Gothic"/>
+              </a:rPr>
+              <a:t>作成中</a:t>
+            </a:r>
+          </a:p>
+        </p:txBody>
+      </p:sp>
+      <p:sp>
+        <p:nvSpPr>
+          <p:cNvPr id="24" name="TextBox 23"/>
+          <p:cNvSpPr txBox="1"/>
+          <p:nvPr/>
+        </p:nvSpPr>
+        <p:spPr>
+          <a:xfrm>
+            <a:off x="8339328" y="2560320"/>
+            <a:ext cx="274320" cy="457200"/>
+          </a:xfrm>
+          <a:prstGeom prst="rect">
+            <a:avLst/>
+          </a:prstGeom>
+          <a:noFill/>
+        </p:spPr>
+        <p:txBody>
+          <a:bodyPr wrap="square" lIns="45720" rIns="45720" tIns="22860" bIns="22860" anchor="t">
+            <a:spAutoFit/>
+          </a:bodyPr>
+          <a:lstStyle/>
+          <a:p>
+            <a:pPr algn="ctr"/>
+            <a:r>
+              <a:rPr sz="1200" b="1">
+                <a:solidFill>
+                  <a:srgbClr val="666666"/>
+                </a:solidFill>
+                <a:latin typeface="Yu Gothic"/>
+              </a:rPr>
+              <a:t>▶</a:t>
+            </a:r>
+          </a:p>
+        </p:txBody>
+      </p:sp>
+      <p:sp>
+        <p:nvSpPr>
+          <p:cNvPr id="25" name="Rounded Rectangle 24"/>
+          <p:cNvSpPr/>
+          <p:nvPr/>
+        </p:nvSpPr>
+        <p:spPr>
+          <a:xfrm>
+            <a:off x="8595360" y="1920240"/>
+            <a:ext cx="1417320" cy="1737360"/>
+          </a:xfrm>
+          <a:prstGeom prst="roundRect">
+            <a:avLst>
+              <a:gd name="adj" fmla="val 10000"/>
+            </a:avLst>
+          </a:prstGeom>
+          <a:solidFill>
+            <a:srgbClr val="EEEEEE"/>
+          </a:solidFill>
+          <a:ln>
+            <a:noFill/>
+          </a:ln>
+          <a:effectLst/>
+        </p:spPr>
+        <p:style>
+          <a:lnRef idx="1">
+            <a:schemeClr val="accent1"/>
+          </a:lnRef>
+          <a:fillRef idx="3">
+            <a:schemeClr val="accent1"/>
+          </a:fillRef>
+          <a:effectRef idx="2">
+            <a:schemeClr val="accent1"/>
+          </a:effectRef>
+          <a:fontRef idx="minor">
+            <a:schemeClr val="lt1"/>
+          </a:fontRef>
+        </p:style>
+        <p:txBody>
+          <a:bodyPr rtlCol="0" anchor="ctr"/>
+          <a:lstStyle/>
+          <a:p>
+            <a:pPr algn="ctr"/>
+          </a:p>
+        </p:txBody>
+      </p:sp>
+      <p:sp>
+        <p:nvSpPr>
+          <p:cNvPr id="26" name="TextBox 25"/>
+          <p:cNvSpPr txBox="1"/>
+          <p:nvPr/>
+        </p:nvSpPr>
+        <p:spPr>
+          <a:xfrm>
+            <a:off x="8595360" y="1920240"/>
+            <a:ext cx="1417320" cy="1737360"/>
+          </a:xfrm>
+          <a:prstGeom prst="rect">
+            <a:avLst/>
+          </a:prstGeom>
+          <a:noFill/>
+        </p:spPr>
+        <p:txBody>
+          <a:bodyPr wrap="square" lIns="45720" rIns="45720" tIns="22860" bIns="22860" anchor="ctr">
+            <a:spAutoFit/>
+          </a:bodyPr>
+          <a:lstStyle/>
+          <a:p>
+            <a:pPr algn="ctr"/>
+            <a:r>
+              <a:rPr sz="1500" b="1">
+                <a:solidFill>
+                  <a:srgbClr val="666666"/>
+                </a:solidFill>
+                <a:latin typeface="Yu Gothic"/>
+              </a:rPr>
+              <a:t>⑥</a:t>
+            </a:r>
+          </a:p>
+          <a:p>
+            <a:pPr algn="ctr"/>
+            <a:r>
+              <a:rPr sz="1500" b="1">
+                <a:solidFill>
+                  <a:srgbClr val="666666"/>
+                </a:solidFill>
+                <a:latin typeface="Yu Gothic"/>
+              </a:rPr>
+              <a:t>身元調査</a:t>
+            </a:r>
+          </a:p>
+          <a:p>
+            <a:pPr algn="ctr"/>
+            <a:r>
+              <a:rPr sz="1500" b="1">
+                <a:solidFill>
+                  <a:srgbClr val="666666"/>
+                </a:solidFill>
+                <a:latin typeface="Yu Gothic"/>
+              </a:rPr>
+              <a:t>(BGC)</a:t>
+            </a:r>
+          </a:p>
+        </p:txBody>
+      </p:sp>
+      <p:sp>
+        <p:nvSpPr>
+          <p:cNvPr id="27" name="TextBox 26"/>
+          <p:cNvSpPr txBox="1"/>
+          <p:nvPr/>
+        </p:nvSpPr>
+        <p:spPr>
+          <a:xfrm>
+            <a:off x="8595360" y="3749039"/>
+            <a:ext cx="1417320" cy="365760"/>
+          </a:xfrm>
+          <a:prstGeom prst="rect">
+            <a:avLst/>
+          </a:prstGeom>
+          <a:noFill/>
+        </p:spPr>
+        <p:txBody>
+          <a:bodyPr wrap="square" lIns="45720" rIns="45720" tIns="22860" bIns="22860" anchor="t">
+            <a:spAutoFit/>
+          </a:bodyPr>
+          <a:lstStyle/>
+          <a:p>
+            <a:pPr algn="ctr"/>
+            <a:r>
+              <a:rPr sz="1200" b="1">
+                <a:solidFill>
+                  <a:srgbClr val="666666"/>
+                </a:solidFill>
+                <a:latin typeface="Yu Gothic"/>
+              </a:rPr>
+              <a:t>作成中</a:t>
+            </a:r>
+          </a:p>
+        </p:txBody>
+      </p:sp>
+      <p:sp>
+        <p:nvSpPr>
+          <p:cNvPr id="28" name="TextBox 27"/>
+          <p:cNvSpPr txBox="1"/>
+          <p:nvPr/>
+        </p:nvSpPr>
+        <p:spPr>
+          <a:xfrm>
+            <a:off x="9966960" y="2560320"/>
+            <a:ext cx="274320" cy="457200"/>
+          </a:xfrm>
+          <a:prstGeom prst="rect">
+            <a:avLst/>
+          </a:prstGeom>
+          <a:noFill/>
+        </p:spPr>
+        <p:txBody>
+          <a:bodyPr wrap="square" lIns="45720" rIns="45720" tIns="22860" bIns="22860" anchor="t">
+            <a:spAutoFit/>
+          </a:bodyPr>
+          <a:lstStyle/>
+          <a:p>
+            <a:pPr algn="ctr"/>
+            <a:r>
+              <a:rPr sz="1200" b="1">
+                <a:solidFill>
+                  <a:srgbClr val="666666"/>
+                </a:solidFill>
+                <a:latin typeface="Yu Gothic"/>
+              </a:rPr>
+              <a:t>▶</a:t>
+            </a:r>
+          </a:p>
+        </p:txBody>
+      </p:sp>
+      <p:sp>
+        <p:nvSpPr>
+          <p:cNvPr id="29" name="Rounded Rectangle 28"/>
+          <p:cNvSpPr/>
+          <p:nvPr/>
+        </p:nvSpPr>
+        <p:spPr>
+          <a:xfrm>
+            <a:off x="10222992" y="1920240"/>
+            <a:ext cx="1417320" cy="1737360"/>
+          </a:xfrm>
+          <a:prstGeom prst="roundRect">
+            <a:avLst>
+              <a:gd name="adj" fmla="val 10000"/>
+            </a:avLst>
+          </a:prstGeom>
+          <a:solidFill>
+            <a:srgbClr val="EEEEEE"/>
+          </a:solidFill>
+          <a:ln>
+            <a:noFill/>
+          </a:ln>
+          <a:effectLst/>
+        </p:spPr>
+        <p:style>
+          <a:lnRef idx="1">
+            <a:schemeClr val="accent1"/>
+          </a:lnRef>
+          <a:fillRef idx="3">
+            <a:schemeClr val="accent1"/>
+          </a:fillRef>
+          <a:effectRef idx="2">
+            <a:schemeClr val="accent1"/>
+          </a:effectRef>
+          <a:fontRef idx="minor">
+            <a:schemeClr val="lt1"/>
+          </a:fontRef>
+        </p:style>
+        <p:txBody>
+          <a:bodyPr rtlCol="0" anchor="ctr"/>
+          <a:lstStyle/>
+          <a:p>
+            <a:pPr algn="ctr"/>
+          </a:p>
+        </p:txBody>
+      </p:sp>
+      <p:sp>
+        <p:nvSpPr>
+          <p:cNvPr id="30" name="TextBox 29"/>
+          <p:cNvSpPr txBox="1"/>
+          <p:nvPr/>
+        </p:nvSpPr>
+        <p:spPr>
+          <a:xfrm>
+            <a:off x="10222992" y="1920240"/>
+            <a:ext cx="1417320" cy="1737360"/>
+          </a:xfrm>
+          <a:prstGeom prst="rect">
+            <a:avLst/>
+          </a:prstGeom>
+          <a:noFill/>
+        </p:spPr>
+        <p:txBody>
+          <a:bodyPr wrap="square" lIns="45720" rIns="45720" tIns="22860" bIns="22860" anchor="ctr">
+            <a:spAutoFit/>
+          </a:bodyPr>
+          <a:lstStyle/>
+          <a:p>
+            <a:pPr algn="ctr"/>
+            <a:r>
+              <a:rPr sz="1500" b="1">
+                <a:solidFill>
+                  <a:srgbClr val="666666"/>
+                </a:solidFill>
+                <a:latin typeface="Yu Gothic"/>
+              </a:rPr>
+              <a:t>⑦</a:t>
+            </a:r>
+          </a:p>
+          <a:p>
+            <a:pPr algn="ctr"/>
+            <a:r>
+              <a:rPr sz="1500" b="1">
+                <a:solidFill>
+                  <a:srgbClr val="666666"/>
+                </a:solidFill>
+                <a:latin typeface="Yu Gothic"/>
+              </a:rPr>
               <a:t>登録完了</a:t>
             </a:r>
           </a:p>
@@ -5411,14 +5821,14 @@
       </p:sp>
       <p:sp>
         <p:nvSpPr>
-          <p:cNvPr id="23" name="TextBox 22"/>
-          <p:cNvSpPr txBox="1"/>
-          <p:nvPr/>
-        </p:nvSpPr>
-        <p:spPr>
-          <a:xfrm>
-            <a:off x="9646920" y="4114800"/>
-            <a:ext cx="2011680" cy="365760"/>
+          <p:cNvPr id="31" name="TextBox 30"/>
+          <p:cNvSpPr txBox="1"/>
+          <p:nvPr/>
+        </p:nvSpPr>
+        <p:spPr>
+          <a:xfrm>
+            <a:off x="10222992" y="3749039"/>
+            <a:ext cx="1417320" cy="365760"/>
           </a:xfrm>
           <a:prstGeom prst="rect">
             <a:avLst/>
@@ -5433,13 +5843,96 @@
           <a:p>
             <a:pPr algn="ctr"/>
             <a:r>
-              <a:rPr sz="1300" b="1">
+              <a:rPr sz="1200" b="1">
                 <a:solidFill>
                   <a:srgbClr val="666666"/>
                 </a:solidFill>
                 <a:latin typeface="Yu Gothic"/>
               </a:rPr>
               <a:t>作成中</a:t>
+            </a:r>
+          </a:p>
+        </p:txBody>
+      </p:sp>
+      <p:sp>
+        <p:nvSpPr>
+          <p:cNvPr id="32" name="Rounded Rectangle 31"/>
+          <p:cNvSpPr/>
+          <p:nvPr/>
+        </p:nvSpPr>
+        <p:spPr>
+          <a:xfrm>
+            <a:off x="457200" y="4663440"/>
+            <a:ext cx="11247120" cy="731520"/>
+          </a:xfrm>
+          <a:prstGeom prst="roundRect">
+            <a:avLst>
+              <a:gd name="adj" fmla="val 8000"/>
+            </a:avLst>
+          </a:prstGeom>
+          <a:solidFill>
+            <a:srgbClr val="E3F4F6"/>
+          </a:solidFill>
+          <a:ln w="19050">
+            <a:solidFill>
+              <a:srgbClr val="4FB6BE"/>
+            </a:solidFill>
+          </a:ln>
+          <a:effectLst/>
+        </p:spPr>
+        <p:style>
+          <a:lnRef idx="1">
+            <a:schemeClr val="accent1"/>
+          </a:lnRef>
+          <a:fillRef idx="3">
+            <a:schemeClr val="accent1"/>
+          </a:fillRef>
+          <a:effectRef idx="2">
+            <a:schemeClr val="accent1"/>
+          </a:effectRef>
+          <a:fontRef idx="minor">
+            <a:schemeClr val="lt1"/>
+          </a:fontRef>
+        </p:style>
+        <p:txBody>
+          <a:bodyPr rtlCol="0" anchor="ctr"/>
+          <a:lstStyle/>
+          <a:p>
+            <a:pPr algn="ctr"/>
+          </a:p>
+        </p:txBody>
+      </p:sp>
+      <p:sp>
+        <p:nvSpPr>
+          <p:cNvPr id="33" name="TextBox 32"/>
+          <p:cNvSpPr txBox="1"/>
+          <p:nvPr/>
+        </p:nvSpPr>
+        <p:spPr>
+          <a:xfrm>
+            <a:off x="457200" y="4663440"/>
+            <a:ext cx="11247120" cy="731520"/>
+          </a:xfrm>
+          <a:prstGeom prst="rect">
+            <a:avLst/>
+          </a:prstGeom>
+          <a:noFill/>
+        </p:spPr>
+        <p:txBody>
+          <a:bodyPr wrap="square" lIns="45720" rIns="45720" tIns="22860" bIns="22860" anchor="ctr">
+            <a:spAutoFit/>
+          </a:bodyPr>
+          <a:lstStyle/>
+          <a:p>
+            <a:pPr algn="ctr"/>
+            <a:r>
+              <a:rPr sz="1800" b="1">
+                <a:solidFill>
+                  <a:srgbClr val="333333"/>
+                </a:solidFill>
+                <a:latin typeface="Yu Gothic"/>
+              </a:rPr>
+              <a:t>各ステップが終わったら、必ず Teams で @登録チーム に連絡</a:t>
             </a:r>
           </a:p>
         </p:txBody>
@@ -5573,7 +6066,7 @@
                 </a:solidFill>
                 <a:latin typeface="Yu Gothic"/>
               </a:rPr>
-              <a:t>書類をそろえる</a:t>
+              <a:t>書類をそろえる（新必要書類チェック表）</a:t>
             </a:r>
           </a:p>
         </p:txBody>
@@ -5586,8 +6079,159 @@
         </p:nvSpPr>
         <p:spPr>
           <a:xfrm>
-            <a:off x="548640" y="1280160"/>
-            <a:ext cx="822960" cy="411480"/>
+            <a:off x="411480" y="1280160"/>
+            <a:ext cx="5577840" cy="347472"/>
+          </a:xfrm>
+          <a:prstGeom prst="rect">
+            <a:avLst/>
+          </a:prstGeom>
+          <a:solidFill>
+            <a:srgbClr val="F7F7F7"/>
+          </a:solidFill>
+          <a:ln w="6350">
+            <a:solidFill>
+              <a:srgbClr val="DDDDDD"/>
+            </a:solidFill>
+          </a:ln>
+          <a:effectLst/>
+        </p:spPr>
+        <p:style>
+          <a:lnRef idx="1">
+            <a:schemeClr val="accent1"/>
+          </a:lnRef>
+          <a:fillRef idx="3">
+            <a:schemeClr val="accent1"/>
+          </a:fillRef>
+          <a:effectRef idx="2">
+            <a:schemeClr val="accent1"/>
+          </a:effectRef>
+          <a:fontRef idx="minor">
+            <a:schemeClr val="lt1"/>
+          </a:fontRef>
+        </p:style>
+        <p:txBody>
+          <a:bodyPr rtlCol="0" anchor="ctr"/>
+          <a:lstStyle/>
+          <a:p>
+            <a:pPr algn="ctr"/>
+          </a:p>
+        </p:txBody>
+      </p:sp>
+      <p:sp>
+        <p:nvSpPr>
+          <p:cNvPr id="6" name="TextBox 5"/>
+          <p:cNvSpPr txBox="1"/>
+          <p:nvPr/>
+        </p:nvSpPr>
+        <p:spPr>
+          <a:xfrm>
+            <a:off x="411480" y="1280160"/>
+            <a:ext cx="685800" cy="347472"/>
+          </a:xfrm>
+          <a:prstGeom prst="rect">
+            <a:avLst/>
+          </a:prstGeom>
+          <a:noFill/>
+        </p:spPr>
+        <p:txBody>
+          <a:bodyPr wrap="square" lIns="45720" rIns="45720" tIns="22860" bIns="22860" anchor="ctr">
+            <a:spAutoFit/>
+          </a:bodyPr>
+          <a:lstStyle/>
+          <a:p>
+            <a:pPr algn="ctr"/>
+            <a:r>
+              <a:rPr sz="1200" b="1">
+                <a:solidFill>
+                  <a:srgbClr val="4FB6BE"/>
+                </a:solidFill>
+                <a:latin typeface="Yu Gothic"/>
+              </a:rPr>
+              <a:t>00</a:t>
+            </a:r>
+          </a:p>
+        </p:txBody>
+      </p:sp>
+      <p:sp>
+        <p:nvSpPr>
+          <p:cNvPr id="7" name="TextBox 6"/>
+          <p:cNvSpPr txBox="1"/>
+          <p:nvPr/>
+        </p:nvSpPr>
+        <p:spPr>
+          <a:xfrm>
+            <a:off x="1097280" y="1280160"/>
+            <a:ext cx="3794759" cy="347472"/>
+          </a:xfrm>
+          <a:prstGeom prst="rect">
+            <a:avLst/>
+          </a:prstGeom>
+          <a:noFill/>
+        </p:spPr>
+        <p:txBody>
+          <a:bodyPr wrap="square" lIns="45720" rIns="45720" tIns="22860" bIns="22860" anchor="ctr">
+            <a:spAutoFit/>
+          </a:bodyPr>
+          <a:lstStyle/>
+          <a:p>
+            <a:pPr algn="l"/>
+            <a:r>
+              <a:rPr sz="1150" b="0">
+                <a:solidFill>
+                  <a:srgbClr val="333333"/>
+                </a:solidFill>
+                <a:latin typeface="Yu Gothic"/>
+              </a:rPr>
+              <a:t>新必要書類チェック表</a:t>
+            </a:r>
+          </a:p>
+        </p:txBody>
+      </p:sp>
+      <p:sp>
+        <p:nvSpPr>
+          <p:cNvPr id="8" name="TextBox 7"/>
+          <p:cNvSpPr txBox="1"/>
+          <p:nvPr/>
+        </p:nvSpPr>
+        <p:spPr>
+          <a:xfrm>
+            <a:off x="4892040" y="1280160"/>
+            <a:ext cx="1051560" cy="347472"/>
+          </a:xfrm>
+          <a:prstGeom prst="rect">
+            <a:avLst/>
+          </a:prstGeom>
+          <a:noFill/>
+        </p:spPr>
+        <p:txBody>
+          <a:bodyPr wrap="square" lIns="45720" rIns="45720" tIns="22860" bIns="22860" anchor="ctr">
+            <a:spAutoFit/>
+          </a:bodyPr>
+          <a:lstStyle/>
+          <a:p>
+            <a:pPr algn="ctr"/>
+            <a:r>
+              <a:rPr sz="1100" b="1">
+                <a:solidFill>
+                  <a:srgbClr val="F29A3C"/>
+                </a:solidFill>
+                <a:latin typeface="Yu Gothic"/>
+              </a:rPr>
+              <a:t>元の形式</a:t>
+            </a:r>
+          </a:p>
+        </p:txBody>
+      </p:sp>
+      <p:sp>
+        <p:nvSpPr>
+          <p:cNvPr id="9" name="Rectangle 8"/>
+          <p:cNvSpPr/>
+          <p:nvPr/>
+        </p:nvSpPr>
+        <p:spPr>
+          <a:xfrm>
+            <a:off x="411480" y="1719072"/>
+            <a:ext cx="5577840" cy="329184"/>
           </a:xfrm>
           <a:prstGeom prst="rect">
             <a:avLst/>
@@ -5624,14 +6268,14 @@
       </p:sp>
       <p:sp>
         <p:nvSpPr>
-          <p:cNvPr id="6" name="TextBox 5"/>
-          <p:cNvSpPr txBox="1"/>
-          <p:nvPr/>
-        </p:nvSpPr>
-        <p:spPr>
-          <a:xfrm>
-            <a:off x="548640" y="1280160"/>
-            <a:ext cx="822960" cy="411480"/>
+          <p:cNvPr id="10" name="TextBox 9"/>
+          <p:cNvSpPr txBox="1"/>
+          <p:nvPr/>
+        </p:nvSpPr>
+        <p:spPr>
+          <a:xfrm>
+            <a:off x="457200" y="1719072"/>
+            <a:ext cx="5486400" cy="329184"/>
           </a:xfrm>
           <a:prstGeom prst="rect">
             <a:avLst/>
@@ -5644,29 +6288,180 @@
           </a:bodyPr>
           <a:lstStyle/>
           <a:p>
-            <a:pPr algn="ctr"/>
-            <a:r>
-              <a:rPr sz="1300" b="1">
+            <a:pPr algn="l"/>
+            <a:r>
+              <a:rPr sz="1200" b="1">
                 <a:solidFill>
                   <a:srgbClr val="FFFFFF"/>
                 </a:solidFill>
                 <a:latin typeface="Yu Gothic"/>
               </a:rPr>
-              <a:t>番号</a:t>
-            </a:r>
-          </a:p>
-        </p:txBody>
-      </p:sp>
-      <p:sp>
-        <p:nvSpPr>
-          <p:cNvPr id="7" name="Rectangle 6"/>
+              <a:t>1.面接前　● 全員必須</a:t>
+            </a:r>
+          </a:p>
+        </p:txBody>
+      </p:sp>
+      <p:sp>
+        <p:nvSpPr>
+          <p:cNvPr id="11" name="Rectangle 10"/>
           <p:cNvSpPr/>
           <p:nvPr/>
         </p:nvSpPr>
         <p:spPr>
           <a:xfrm>
-            <a:off x="1371600" y="1280160"/>
-            <a:ext cx="3840480" cy="411480"/>
+            <a:off x="411480" y="2048255"/>
+            <a:ext cx="5577840" cy="347472"/>
+          </a:xfrm>
+          <a:prstGeom prst="rect">
+            <a:avLst/>
+          </a:prstGeom>
+          <a:solidFill>
+            <a:srgbClr val="F7F7F7"/>
+          </a:solidFill>
+          <a:ln w="6350">
+            <a:solidFill>
+              <a:srgbClr val="DDDDDD"/>
+            </a:solidFill>
+          </a:ln>
+          <a:effectLst/>
+        </p:spPr>
+        <p:style>
+          <a:lnRef idx="1">
+            <a:schemeClr val="accent1"/>
+          </a:lnRef>
+          <a:fillRef idx="3">
+            <a:schemeClr val="accent1"/>
+          </a:fillRef>
+          <a:effectRef idx="2">
+            <a:schemeClr val="accent1"/>
+          </a:effectRef>
+          <a:fontRef idx="minor">
+            <a:schemeClr val="lt1"/>
+          </a:fontRef>
+        </p:style>
+        <p:txBody>
+          <a:bodyPr rtlCol="0" anchor="ctr"/>
+          <a:lstStyle/>
+          <a:p>
+            <a:pPr algn="ctr"/>
+          </a:p>
+        </p:txBody>
+      </p:sp>
+      <p:sp>
+        <p:nvSpPr>
+          <p:cNvPr id="12" name="TextBox 11"/>
+          <p:cNvSpPr txBox="1"/>
+          <p:nvPr/>
+        </p:nvSpPr>
+        <p:spPr>
+          <a:xfrm>
+            <a:off x="411480" y="2048255"/>
+            <a:ext cx="685800" cy="347472"/>
+          </a:xfrm>
+          <a:prstGeom prst="rect">
+            <a:avLst/>
+          </a:prstGeom>
+          <a:noFill/>
+        </p:spPr>
+        <p:txBody>
+          <a:bodyPr wrap="square" lIns="45720" rIns="45720" tIns="22860" bIns="22860" anchor="ctr">
+            <a:spAutoFit/>
+          </a:bodyPr>
+          <a:lstStyle/>
+          <a:p>
+            <a:pPr algn="ctr"/>
+            <a:r>
+              <a:rPr sz="1200" b="1">
+                <a:solidFill>
+                  <a:srgbClr val="4FB6BE"/>
+                </a:solidFill>
+                <a:latin typeface="Yu Gothic"/>
+              </a:rPr>
+              <a:t>1.1</a:t>
+            </a:r>
+          </a:p>
+        </p:txBody>
+      </p:sp>
+      <p:sp>
+        <p:nvSpPr>
+          <p:cNvPr id="13" name="TextBox 12"/>
+          <p:cNvSpPr txBox="1"/>
+          <p:nvPr/>
+        </p:nvSpPr>
+        <p:spPr>
+          <a:xfrm>
+            <a:off x="1097280" y="2048255"/>
+            <a:ext cx="3794759" cy="347472"/>
+          </a:xfrm>
+          <a:prstGeom prst="rect">
+            <a:avLst/>
+          </a:prstGeom>
+          <a:noFill/>
+        </p:spPr>
+        <p:txBody>
+          <a:bodyPr wrap="square" lIns="45720" rIns="45720" tIns="22860" bIns="22860" anchor="ctr">
+            <a:spAutoFit/>
+          </a:bodyPr>
+          <a:lstStyle/>
+          <a:p>
+            <a:pPr algn="l"/>
+            <a:r>
+              <a:rPr sz="1150" b="0">
+                <a:solidFill>
+                  <a:srgbClr val="333333"/>
+                </a:solidFill>
+                <a:latin typeface="Yu Gothic"/>
+              </a:rPr>
+              <a:t>面接前同意forms</a:t>
+            </a:r>
+          </a:p>
+        </p:txBody>
+      </p:sp>
+      <p:sp>
+        <p:nvSpPr>
+          <p:cNvPr id="14" name="TextBox 13"/>
+          <p:cNvSpPr txBox="1"/>
+          <p:nvPr/>
+        </p:nvSpPr>
+        <p:spPr>
+          <a:xfrm>
+            <a:off x="4892040" y="2048255"/>
+            <a:ext cx="1051560" cy="347472"/>
+          </a:xfrm>
+          <a:prstGeom prst="rect">
+            <a:avLst/>
+          </a:prstGeom>
+          <a:noFill/>
+        </p:spPr>
+        <p:txBody>
+          <a:bodyPr wrap="square" lIns="45720" rIns="45720" tIns="22860" bIns="22860" anchor="ctr">
+            <a:spAutoFit/>
+          </a:bodyPr>
+          <a:lstStyle/>
+          <a:p>
+            <a:pPr algn="ctr"/>
+            <a:r>
+              <a:rPr sz="1100" b="1">
+                <a:solidFill>
+                  <a:srgbClr val="666666"/>
+                </a:solidFill>
+                <a:latin typeface="Yu Gothic"/>
+              </a:rPr>
+              <a:t>PDF</a:t>
+            </a:r>
+          </a:p>
+        </p:txBody>
+      </p:sp>
+      <p:sp>
+        <p:nvSpPr>
+          <p:cNvPr id="15" name="Rectangle 14"/>
+          <p:cNvSpPr/>
+          <p:nvPr/>
+        </p:nvSpPr>
+        <p:spPr>
+          <a:xfrm>
+            <a:off x="411480" y="2487168"/>
+            <a:ext cx="5577840" cy="329184"/>
           </a:xfrm>
           <a:prstGeom prst="rect">
             <a:avLst/>
@@ -5703,14 +6498,14 @@
       </p:sp>
       <p:sp>
         <p:nvSpPr>
-          <p:cNvPr id="8" name="TextBox 7"/>
-          <p:cNvSpPr txBox="1"/>
-          <p:nvPr/>
-        </p:nvSpPr>
-        <p:spPr>
-          <a:xfrm>
-            <a:off x="1371600" y="1280160"/>
-            <a:ext cx="3840480" cy="411480"/>
+          <p:cNvPr id="16" name="TextBox 15"/>
+          <p:cNvSpPr txBox="1"/>
+          <p:nvPr/>
+        </p:nvSpPr>
+        <p:spPr>
+          <a:xfrm>
+            <a:off x="457200" y="2487168"/>
+            <a:ext cx="5486400" cy="329184"/>
           </a:xfrm>
           <a:prstGeom prst="rect">
             <a:avLst/>
@@ -5723,29 +6518,180 @@
           </a:bodyPr>
           <a:lstStyle/>
           <a:p>
-            <a:pPr algn="ctr"/>
-            <a:r>
-              <a:rPr sz="1300" b="1">
+            <a:pPr algn="l"/>
+            <a:r>
+              <a:rPr sz="1200" b="1">
                 <a:solidFill>
                   <a:srgbClr val="FFFFFF"/>
                 </a:solidFill>
                 <a:latin typeface="Yu Gothic"/>
               </a:rPr>
-              <a:t>書類</a:t>
-            </a:r>
-          </a:p>
-        </p:txBody>
-      </p:sp>
-      <p:sp>
-        <p:nvSpPr>
-          <p:cNvPr id="9" name="Rectangle 8"/>
+              <a:t>2.面接時　● 全員必須</a:t>
+            </a:r>
+          </a:p>
+        </p:txBody>
+      </p:sp>
+      <p:sp>
+        <p:nvSpPr>
+          <p:cNvPr id="17" name="Rectangle 16"/>
           <p:cNvSpPr/>
           <p:nvPr/>
         </p:nvSpPr>
         <p:spPr>
           <a:xfrm>
-            <a:off x="5212080" y="1280160"/>
-            <a:ext cx="1463040" cy="411480"/>
+            <a:off x="411480" y="2816351"/>
+            <a:ext cx="5577840" cy="347472"/>
+          </a:xfrm>
+          <a:prstGeom prst="rect">
+            <a:avLst/>
+          </a:prstGeom>
+          <a:solidFill>
+            <a:srgbClr val="F7F7F7"/>
+          </a:solidFill>
+          <a:ln w="6350">
+            <a:solidFill>
+              <a:srgbClr val="DDDDDD"/>
+            </a:solidFill>
+          </a:ln>
+          <a:effectLst/>
+        </p:spPr>
+        <p:style>
+          <a:lnRef idx="1">
+            <a:schemeClr val="accent1"/>
+          </a:lnRef>
+          <a:fillRef idx="3">
+            <a:schemeClr val="accent1"/>
+          </a:fillRef>
+          <a:effectRef idx="2">
+            <a:schemeClr val="accent1"/>
+          </a:effectRef>
+          <a:fontRef idx="minor">
+            <a:schemeClr val="lt1"/>
+          </a:fontRef>
+        </p:style>
+        <p:txBody>
+          <a:bodyPr rtlCol="0" anchor="ctr"/>
+          <a:lstStyle/>
+          <a:p>
+            <a:pPr algn="ctr"/>
+          </a:p>
+        </p:txBody>
+      </p:sp>
+      <p:sp>
+        <p:nvSpPr>
+          <p:cNvPr id="18" name="TextBox 17"/>
+          <p:cNvSpPr txBox="1"/>
+          <p:nvPr/>
+        </p:nvSpPr>
+        <p:spPr>
+          <a:xfrm>
+            <a:off x="411480" y="2816351"/>
+            <a:ext cx="685800" cy="347472"/>
+          </a:xfrm>
+          <a:prstGeom prst="rect">
+            <a:avLst/>
+          </a:prstGeom>
+          <a:noFill/>
+        </p:spPr>
+        <p:txBody>
+          <a:bodyPr wrap="square" lIns="45720" rIns="45720" tIns="22860" bIns="22860" anchor="ctr">
+            <a:spAutoFit/>
+          </a:bodyPr>
+          <a:lstStyle/>
+          <a:p>
+            <a:pPr algn="ctr"/>
+            <a:r>
+              <a:rPr sz="1200" b="1">
+                <a:solidFill>
+                  <a:srgbClr val="4FB6BE"/>
+                </a:solidFill>
+                <a:latin typeface="Yu Gothic"/>
+              </a:rPr>
+              <a:t>2.1</a:t>
+            </a:r>
+          </a:p>
+        </p:txBody>
+      </p:sp>
+      <p:sp>
+        <p:nvSpPr>
+          <p:cNvPr id="19" name="TextBox 18"/>
+          <p:cNvSpPr txBox="1"/>
+          <p:nvPr/>
+        </p:nvSpPr>
+        <p:spPr>
+          <a:xfrm>
+            <a:off x="1097280" y="2816351"/>
+            <a:ext cx="3794759" cy="347472"/>
+          </a:xfrm>
+          <a:prstGeom prst="rect">
+            <a:avLst/>
+          </a:prstGeom>
+          <a:noFill/>
+        </p:spPr>
+        <p:txBody>
+          <a:bodyPr wrap="square" lIns="45720" rIns="45720" tIns="22860" bIns="22860" anchor="ctr">
+            <a:spAutoFit/>
+          </a:bodyPr>
+          <a:lstStyle/>
+          <a:p>
+            <a:pPr algn="l"/>
+            <a:r>
+              <a:rPr sz="1150" b="0">
+                <a:solidFill>
+                  <a:srgbClr val="333333"/>
+                </a:solidFill>
+                <a:latin typeface="Yu Gothic"/>
+              </a:rPr>
+              <a:t>面接時チェックシート</a:t>
+            </a:r>
+          </a:p>
+        </p:txBody>
+      </p:sp>
+      <p:sp>
+        <p:nvSpPr>
+          <p:cNvPr id="20" name="TextBox 19"/>
+          <p:cNvSpPr txBox="1"/>
+          <p:nvPr/>
+        </p:nvSpPr>
+        <p:spPr>
+          <a:xfrm>
+            <a:off x="4892040" y="2816351"/>
+            <a:ext cx="1051560" cy="347472"/>
+          </a:xfrm>
+          <a:prstGeom prst="rect">
+            <a:avLst/>
+          </a:prstGeom>
+          <a:noFill/>
+        </p:spPr>
+        <p:txBody>
+          <a:bodyPr wrap="square" lIns="45720" rIns="45720" tIns="22860" bIns="22860" anchor="ctr">
+            <a:spAutoFit/>
+          </a:bodyPr>
+          <a:lstStyle/>
+          <a:p>
+            <a:pPr algn="ctr"/>
+            <a:r>
+              <a:rPr sz="1100" b="1">
+                <a:solidFill>
+                  <a:srgbClr val="F29A3C"/>
+                </a:solidFill>
+                <a:latin typeface="Yu Gothic"/>
+              </a:rPr>
+              <a:t>元の形式</a:t>
+            </a:r>
+          </a:p>
+        </p:txBody>
+      </p:sp>
+      <p:sp>
+        <p:nvSpPr>
+          <p:cNvPr id="21" name="Rectangle 20"/>
+          <p:cNvSpPr/>
+          <p:nvPr/>
+        </p:nvSpPr>
+        <p:spPr>
+          <a:xfrm>
+            <a:off x="411480" y="3255263"/>
+            <a:ext cx="5577840" cy="329184"/>
           </a:xfrm>
           <a:prstGeom prst="rect">
             <a:avLst/>
@@ -5782,14 +6728,14 @@
       </p:sp>
       <p:sp>
         <p:nvSpPr>
-          <p:cNvPr id="10" name="TextBox 9"/>
-          <p:cNvSpPr txBox="1"/>
-          <p:nvPr/>
-        </p:nvSpPr>
-        <p:spPr>
-          <a:xfrm>
-            <a:off x="5212080" y="1280160"/>
-            <a:ext cx="1463040" cy="411480"/>
+          <p:cNvPr id="22" name="TextBox 21"/>
+          <p:cNvSpPr txBox="1"/>
+          <p:nvPr/>
+        </p:nvSpPr>
+        <p:spPr>
+          <a:xfrm>
+            <a:off x="457200" y="3255263"/>
+            <a:ext cx="5486400" cy="329184"/>
           </a:xfrm>
           <a:prstGeom prst="rect">
             <a:avLst/>
@@ -5802,114 +6748,35 @@
           </a:bodyPr>
           <a:lstStyle/>
           <a:p>
-            <a:pPr algn="ctr"/>
-            <a:r>
-              <a:rPr sz="1300" b="1">
+            <a:pPr algn="l"/>
+            <a:r>
+              <a:rPr sz="1200" b="1">
                 <a:solidFill>
                   <a:srgbClr val="FFFFFF"/>
                 </a:solidFill>
                 <a:latin typeface="Yu Gothic"/>
               </a:rPr>
-              <a:t>形式</a:t>
-            </a:r>
-          </a:p>
-        </p:txBody>
-      </p:sp>
-      <p:sp>
-        <p:nvSpPr>
-          <p:cNvPr id="11" name="Rectangle 10"/>
+              <a:t>3.登録時　● 全員必須</a:t>
+            </a:r>
+          </a:p>
+        </p:txBody>
+      </p:sp>
+      <p:sp>
+        <p:nvSpPr>
+          <p:cNvPr id="23" name="Rectangle 22"/>
           <p:cNvSpPr/>
           <p:nvPr/>
         </p:nvSpPr>
         <p:spPr>
           <a:xfrm>
-            <a:off x="6675120" y="1280160"/>
-            <a:ext cx="4937760" cy="411480"/>
+            <a:off x="411480" y="3584447"/>
+            <a:ext cx="5577840" cy="347472"/>
           </a:xfrm>
           <a:prstGeom prst="rect">
             <a:avLst/>
           </a:prstGeom>
           <a:solidFill>
-            <a:srgbClr val="4FB6BE"/>
-          </a:solidFill>
-          <a:ln>
-            <a:noFill/>
-          </a:ln>
-          <a:effectLst/>
-        </p:spPr>
-        <p:style>
-          <a:lnRef idx="1">
-            <a:schemeClr val="accent1"/>
-          </a:lnRef>
-          <a:fillRef idx="3">
-            <a:schemeClr val="accent1"/>
-          </a:fillRef>
-          <a:effectRef idx="2">
-            <a:schemeClr val="accent1"/>
-          </a:effectRef>
-          <a:fontRef idx="minor">
-            <a:schemeClr val="lt1"/>
-          </a:fontRef>
-        </p:style>
-        <p:txBody>
-          <a:bodyPr rtlCol="0" anchor="ctr"/>
-          <a:lstStyle/>
-          <a:p>
-            <a:pPr algn="ctr"/>
-          </a:p>
-        </p:txBody>
-      </p:sp>
-      <p:sp>
-        <p:nvSpPr>
-          <p:cNvPr id="12" name="TextBox 11"/>
-          <p:cNvSpPr txBox="1"/>
-          <p:nvPr/>
-        </p:nvSpPr>
-        <p:spPr>
-          <a:xfrm>
-            <a:off x="6675120" y="1280160"/>
-            <a:ext cx="4937760" cy="411480"/>
-          </a:xfrm>
-          <a:prstGeom prst="rect">
-            <a:avLst/>
-          </a:prstGeom>
-          <a:noFill/>
-        </p:spPr>
-        <p:txBody>
-          <a:bodyPr wrap="square" lIns="45720" rIns="45720" tIns="22860" bIns="22860" anchor="ctr">
-            <a:spAutoFit/>
-          </a:bodyPr>
-          <a:lstStyle/>
-          <a:p>
-            <a:pPr algn="ctr"/>
-            <a:r>
-              <a:rPr sz="1300" b="1">
-                <a:solidFill>
-                  <a:srgbClr val="FFFFFF"/>
-                </a:solidFill>
-                <a:latin typeface="Yu Gothic"/>
-              </a:rPr>
-              <a:t>ファイル名</a:t>
-            </a:r>
-          </a:p>
-        </p:txBody>
-      </p:sp>
-      <p:sp>
-        <p:nvSpPr>
-          <p:cNvPr id="13" name="Rectangle 12"/>
-          <p:cNvSpPr/>
-          <p:nvPr/>
-        </p:nvSpPr>
-        <p:spPr>
-          <a:xfrm>
-            <a:off x="548640" y="1691639"/>
-            <a:ext cx="822960" cy="502920"/>
-          </a:xfrm>
-          <a:prstGeom prst="rect">
-            <a:avLst/>
-          </a:prstGeom>
-          <a:solidFill>
-            <a:srgbClr val="FFF6E0"/>
+            <a:srgbClr val="F7F7F7"/>
           </a:solidFill>
           <a:ln w="6350">
             <a:solidFill>
@@ -5942,14 +6809,14 @@
       </p:sp>
       <p:sp>
         <p:nvSpPr>
-          <p:cNvPr id="14" name="TextBox 13"/>
-          <p:cNvSpPr txBox="1"/>
-          <p:nvPr/>
-        </p:nvSpPr>
-        <p:spPr>
-          <a:xfrm>
-            <a:off x="548640" y="1691639"/>
-            <a:ext cx="822960" cy="502920"/>
+          <p:cNvPr id="24" name="TextBox 23"/>
+          <p:cNvSpPr txBox="1"/>
+          <p:nvPr/>
+        </p:nvSpPr>
+        <p:spPr>
+          <a:xfrm>
+            <a:off x="411480" y="3584447"/>
+            <a:ext cx="685800" cy="347472"/>
           </a:xfrm>
           <a:prstGeom prst="rect">
             <a:avLst/>
@@ -5964,270 +6831,97 @@
           <a:p>
             <a:pPr algn="ctr"/>
             <a:r>
-              <a:rPr sz="1400" b="1">
+              <a:rPr sz="1200" b="1">
                 <a:solidFill>
                   <a:srgbClr val="4FB6BE"/>
                 </a:solidFill>
                 <a:latin typeface="Yu Gothic"/>
               </a:rPr>
-              <a:t>00</a:t>
-            </a:r>
-          </a:p>
-        </p:txBody>
-      </p:sp>
-      <p:sp>
-        <p:nvSpPr>
-          <p:cNvPr id="15" name="Rectangle 14"/>
+              <a:t>3.1</a:t>
+            </a:r>
+          </a:p>
+        </p:txBody>
+      </p:sp>
+      <p:sp>
+        <p:nvSpPr>
+          <p:cNvPr id="25" name="TextBox 24"/>
+          <p:cNvSpPr txBox="1"/>
+          <p:nvPr/>
+        </p:nvSpPr>
+        <p:spPr>
+          <a:xfrm>
+            <a:off x="1097280" y="3584447"/>
+            <a:ext cx="3794759" cy="347472"/>
+          </a:xfrm>
+          <a:prstGeom prst="rect">
+            <a:avLst/>
+          </a:prstGeom>
+          <a:noFill/>
+        </p:spPr>
+        <p:txBody>
+          <a:bodyPr wrap="square" lIns="45720" rIns="45720" tIns="22860" bIns="22860" anchor="ctr">
+            <a:spAutoFit/>
+          </a:bodyPr>
+          <a:lstStyle/>
+          <a:p>
+            <a:pPr algn="l"/>
+            <a:r>
+              <a:rPr sz="1150" b="0">
+                <a:solidFill>
+                  <a:srgbClr val="333333"/>
+                </a:solidFill>
+                <a:latin typeface="Yu Gothic"/>
+              </a:rPr>
+              <a:t>クラウドサイン（契約書、契約書別紙、宣誓書）</a:t>
+            </a:r>
+          </a:p>
+        </p:txBody>
+      </p:sp>
+      <p:sp>
+        <p:nvSpPr>
+          <p:cNvPr id="26" name="TextBox 25"/>
+          <p:cNvSpPr txBox="1"/>
+          <p:nvPr/>
+        </p:nvSpPr>
+        <p:spPr>
+          <a:xfrm>
+            <a:off x="4892040" y="3584447"/>
+            <a:ext cx="1051560" cy="347472"/>
+          </a:xfrm>
+          <a:prstGeom prst="rect">
+            <a:avLst/>
+          </a:prstGeom>
+          <a:noFill/>
+        </p:spPr>
+        <p:txBody>
+          <a:bodyPr wrap="square" lIns="45720" rIns="45720" tIns="22860" bIns="22860" anchor="ctr">
+            <a:spAutoFit/>
+          </a:bodyPr>
+          <a:lstStyle/>
+          <a:p>
+            <a:pPr algn="ctr"/>
+            <a:r>
+              <a:rPr sz="1100" b="1">
+                <a:solidFill>
+                  <a:srgbClr val="666666"/>
+                </a:solidFill>
+                <a:latin typeface="Yu Gothic"/>
+              </a:rPr>
+              <a:t>PDF</a:t>
+            </a:r>
+          </a:p>
+        </p:txBody>
+      </p:sp>
+      <p:sp>
+        <p:nvSpPr>
+          <p:cNvPr id="27" name="Rectangle 26"/>
           <p:cNvSpPr/>
           <p:nvPr/>
         </p:nvSpPr>
         <p:spPr>
           <a:xfrm>
-            <a:off x="1371600" y="1691639"/>
-            <a:ext cx="3840480" cy="502920"/>
-          </a:xfrm>
-          <a:prstGeom prst="rect">
-            <a:avLst/>
-          </a:prstGeom>
-          <a:solidFill>
-            <a:srgbClr val="FFF6E0"/>
-          </a:solidFill>
-          <a:ln w="6350">
-            <a:solidFill>
-              <a:srgbClr val="DDDDDD"/>
-            </a:solidFill>
-          </a:ln>
-          <a:effectLst/>
-        </p:spPr>
-        <p:style>
-          <a:lnRef idx="1">
-            <a:schemeClr val="accent1"/>
-          </a:lnRef>
-          <a:fillRef idx="3">
-            <a:schemeClr val="accent1"/>
-          </a:fillRef>
-          <a:effectRef idx="2">
-            <a:schemeClr val="accent1"/>
-          </a:effectRef>
-          <a:fontRef idx="minor">
-            <a:schemeClr val="lt1"/>
-          </a:fontRef>
-        </p:style>
-        <p:txBody>
-          <a:bodyPr rtlCol="0" anchor="ctr"/>
-          <a:lstStyle/>
-          <a:p>
-            <a:pPr algn="ctr"/>
-          </a:p>
-        </p:txBody>
-      </p:sp>
-      <p:sp>
-        <p:nvSpPr>
-          <p:cNvPr id="16" name="TextBox 15"/>
-          <p:cNvSpPr txBox="1"/>
-          <p:nvPr/>
-        </p:nvSpPr>
-        <p:spPr>
-          <a:xfrm>
-            <a:off x="1371600" y="1691639"/>
-            <a:ext cx="3840480" cy="502920"/>
-          </a:xfrm>
-          <a:prstGeom prst="rect">
-            <a:avLst/>
-          </a:prstGeom>
-          <a:noFill/>
-        </p:spPr>
-        <p:txBody>
-          <a:bodyPr wrap="square" lIns="45720" rIns="45720" tIns="22860" bIns="22860" anchor="ctr">
-            <a:spAutoFit/>
-          </a:bodyPr>
-          <a:lstStyle/>
-          <a:p>
-            <a:pPr algn="l"/>
-            <a:r>
-              <a:rPr sz="1400" b="0">
-                <a:solidFill>
-                  <a:srgbClr val="333333"/>
-                </a:solidFill>
-                <a:latin typeface="Yu Gothic"/>
-              </a:rPr>
-              <a:t>新必要書類チェック表</a:t>
-            </a:r>
-          </a:p>
-        </p:txBody>
-      </p:sp>
-      <p:sp>
-        <p:nvSpPr>
-          <p:cNvPr id="17" name="Rectangle 16"/>
-          <p:cNvSpPr/>
-          <p:nvPr/>
-        </p:nvSpPr>
-        <p:spPr>
-          <a:xfrm>
-            <a:off x="5212080" y="1691639"/>
-            <a:ext cx="1463040" cy="502920"/>
-          </a:xfrm>
-          <a:prstGeom prst="rect">
-            <a:avLst/>
-          </a:prstGeom>
-          <a:solidFill>
-            <a:srgbClr val="FFF6E0"/>
-          </a:solidFill>
-          <a:ln w="6350">
-            <a:solidFill>
-              <a:srgbClr val="DDDDDD"/>
-            </a:solidFill>
-          </a:ln>
-          <a:effectLst/>
-        </p:spPr>
-        <p:style>
-          <a:lnRef idx="1">
-            <a:schemeClr val="accent1"/>
-          </a:lnRef>
-          <a:fillRef idx="3">
-            <a:schemeClr val="accent1"/>
-          </a:fillRef>
-          <a:effectRef idx="2">
-            <a:schemeClr val="accent1"/>
-          </a:effectRef>
-          <a:fontRef idx="minor">
-            <a:schemeClr val="lt1"/>
-          </a:fontRef>
-        </p:style>
-        <p:txBody>
-          <a:bodyPr rtlCol="0" anchor="ctr"/>
-          <a:lstStyle/>
-          <a:p>
-            <a:pPr algn="ctr"/>
-          </a:p>
-        </p:txBody>
-      </p:sp>
-      <p:sp>
-        <p:nvSpPr>
-          <p:cNvPr id="18" name="TextBox 17"/>
-          <p:cNvSpPr txBox="1"/>
-          <p:nvPr/>
-        </p:nvSpPr>
-        <p:spPr>
-          <a:xfrm>
-            <a:off x="5212080" y="1691639"/>
-            <a:ext cx="1463040" cy="502920"/>
-          </a:xfrm>
-          <a:prstGeom prst="rect">
-            <a:avLst/>
-          </a:prstGeom>
-          <a:noFill/>
-        </p:spPr>
-        <p:txBody>
-          <a:bodyPr wrap="square" lIns="45720" rIns="45720" tIns="22860" bIns="22860" anchor="ctr">
-            <a:spAutoFit/>
-          </a:bodyPr>
-          <a:lstStyle/>
-          <a:p>
-            <a:pPr algn="ctr"/>
-            <a:r>
-              <a:rPr sz="1400" b="0">
-                <a:solidFill>
-                  <a:srgbClr val="333333"/>
-                </a:solidFill>
-                <a:latin typeface="Yu Gothic"/>
-              </a:rPr>
-              <a:t>元の形式</a:t>
-            </a:r>
-          </a:p>
-        </p:txBody>
-      </p:sp>
-      <p:sp>
-        <p:nvSpPr>
-          <p:cNvPr id="19" name="Rectangle 18"/>
-          <p:cNvSpPr/>
-          <p:nvPr/>
-        </p:nvSpPr>
-        <p:spPr>
-          <a:xfrm>
-            <a:off x="6675120" y="1691639"/>
-            <a:ext cx="4937760" cy="502920"/>
-          </a:xfrm>
-          <a:prstGeom prst="rect">
-            <a:avLst/>
-          </a:prstGeom>
-          <a:solidFill>
-            <a:srgbClr val="FFF6E0"/>
-          </a:solidFill>
-          <a:ln w="6350">
-            <a:solidFill>
-              <a:srgbClr val="DDDDDD"/>
-            </a:solidFill>
-          </a:ln>
-          <a:effectLst/>
-        </p:spPr>
-        <p:style>
-          <a:lnRef idx="1">
-            <a:schemeClr val="accent1"/>
-          </a:lnRef>
-          <a:fillRef idx="3">
-            <a:schemeClr val="accent1"/>
-          </a:fillRef>
-          <a:effectRef idx="2">
-            <a:schemeClr val="accent1"/>
-          </a:effectRef>
-          <a:fontRef idx="minor">
-            <a:schemeClr val="lt1"/>
-          </a:fontRef>
-        </p:style>
-        <p:txBody>
-          <a:bodyPr rtlCol="0" anchor="ctr"/>
-          <a:lstStyle/>
-          <a:p>
-            <a:pPr algn="ctr"/>
-          </a:p>
-        </p:txBody>
-      </p:sp>
-      <p:sp>
-        <p:nvSpPr>
-          <p:cNvPr id="20" name="TextBox 19"/>
-          <p:cNvSpPr txBox="1"/>
-          <p:nvPr/>
-        </p:nvSpPr>
-        <p:spPr>
-          <a:xfrm>
-            <a:off x="6675120" y="1691639"/>
-            <a:ext cx="4937760" cy="502920"/>
-          </a:xfrm>
-          <a:prstGeom prst="rect">
-            <a:avLst/>
-          </a:prstGeom>
-          <a:noFill/>
-        </p:spPr>
-        <p:txBody>
-          <a:bodyPr wrap="square" lIns="45720" rIns="45720" tIns="22860" bIns="22860" anchor="ctr">
-            <a:spAutoFit/>
-          </a:bodyPr>
-          <a:lstStyle/>
-          <a:p>
-            <a:pPr algn="l"/>
-            <a:r>
-              <a:rPr sz="1400" b="0">
-                <a:solidFill>
-                  <a:srgbClr val="333333"/>
-                </a:solidFill>
-                <a:latin typeface="Yu Gothic"/>
-              </a:rPr>
-              <a:t>00.新必要書類チェック表 氏名</a:t>
-            </a:r>
-          </a:p>
-        </p:txBody>
-      </p:sp>
-      <p:sp>
-        <p:nvSpPr>
-          <p:cNvPr id="21" name="Rectangle 20"/>
-          <p:cNvSpPr/>
-          <p:nvPr/>
-        </p:nvSpPr>
-        <p:spPr>
-          <a:xfrm>
-            <a:off x="548640" y="2194560"/>
-            <a:ext cx="822960" cy="502920"/>
+            <a:off x="411480" y="3931920"/>
+            <a:ext cx="5577840" cy="347472"/>
           </a:xfrm>
           <a:prstGeom prst="rect">
             <a:avLst/>
@@ -6266,14 +6960,14 @@
       </p:sp>
       <p:sp>
         <p:nvSpPr>
-          <p:cNvPr id="22" name="TextBox 21"/>
-          <p:cNvSpPr txBox="1"/>
-          <p:nvPr/>
-        </p:nvSpPr>
-        <p:spPr>
-          <a:xfrm>
-            <a:off x="548640" y="2194560"/>
-            <a:ext cx="822960" cy="502920"/>
+          <p:cNvPr id="28" name="TextBox 27"/>
+          <p:cNvSpPr txBox="1"/>
+          <p:nvPr/>
+        </p:nvSpPr>
+        <p:spPr>
+          <a:xfrm>
+            <a:off x="411480" y="3931920"/>
+            <a:ext cx="685800" cy="347472"/>
           </a:xfrm>
           <a:prstGeom prst="rect">
             <a:avLst/>
@@ -6288,27 +6982,248 @@
           <a:p>
             <a:pPr algn="ctr"/>
             <a:r>
-              <a:rPr sz="1400" b="1">
+              <a:rPr sz="1200" b="1">
                 <a:solidFill>
                   <a:srgbClr val="4FB6BE"/>
                 </a:solidFill>
                 <a:latin typeface="Yu Gothic"/>
               </a:rPr>
-              <a:t>1.1</a:t>
-            </a:r>
-          </a:p>
-        </p:txBody>
-      </p:sp>
-      <p:sp>
-        <p:nvSpPr>
-          <p:cNvPr id="23" name="Rectangle 22"/>
+              <a:t>3.2</a:t>
+            </a:r>
+          </a:p>
+        </p:txBody>
+      </p:sp>
+      <p:sp>
+        <p:nvSpPr>
+          <p:cNvPr id="29" name="TextBox 28"/>
+          <p:cNvSpPr txBox="1"/>
+          <p:nvPr/>
+        </p:nvSpPr>
+        <p:spPr>
+          <a:xfrm>
+            <a:off x="1097280" y="3931920"/>
+            <a:ext cx="3794759" cy="347472"/>
+          </a:xfrm>
+          <a:prstGeom prst="rect">
+            <a:avLst/>
+          </a:prstGeom>
+          <a:noFill/>
+        </p:spPr>
+        <p:txBody>
+          <a:bodyPr wrap="square" lIns="45720" rIns="45720" tIns="22860" bIns="22860" anchor="ctr">
+            <a:spAutoFit/>
+          </a:bodyPr>
+          <a:lstStyle/>
+          <a:p>
+            <a:pPr algn="l"/>
+            <a:r>
+              <a:rPr sz="1150" b="0">
+                <a:solidFill>
+                  <a:srgbClr val="333333"/>
+                </a:solidFill>
+                <a:latin typeface="Yu Gothic"/>
+              </a:rPr>
+              <a:t>免許証（両面）</a:t>
+            </a:r>
+          </a:p>
+        </p:txBody>
+      </p:sp>
+      <p:sp>
+        <p:nvSpPr>
+          <p:cNvPr id="30" name="TextBox 29"/>
+          <p:cNvSpPr txBox="1"/>
+          <p:nvPr/>
+        </p:nvSpPr>
+        <p:spPr>
+          <a:xfrm>
+            <a:off x="4892040" y="3931920"/>
+            <a:ext cx="1051560" cy="347472"/>
+          </a:xfrm>
+          <a:prstGeom prst="rect">
+            <a:avLst/>
+          </a:prstGeom>
+          <a:noFill/>
+        </p:spPr>
+        <p:txBody>
+          <a:bodyPr wrap="square" lIns="45720" rIns="45720" tIns="22860" bIns="22860" anchor="ctr">
+            <a:spAutoFit/>
+          </a:bodyPr>
+          <a:lstStyle/>
+          <a:p>
+            <a:pPr algn="ctr"/>
+            <a:r>
+              <a:rPr sz="1100" b="1">
+                <a:solidFill>
+                  <a:srgbClr val="666666"/>
+                </a:solidFill>
+                <a:latin typeface="Yu Gothic"/>
+              </a:rPr>
+              <a:t>PDF</a:t>
+            </a:r>
+          </a:p>
+        </p:txBody>
+      </p:sp>
+      <p:sp>
+        <p:nvSpPr>
+          <p:cNvPr id="31" name="Rectangle 30"/>
           <p:cNvSpPr/>
           <p:nvPr/>
         </p:nvSpPr>
         <p:spPr>
           <a:xfrm>
-            <a:off x="1371600" y="2194560"/>
-            <a:ext cx="3840480" cy="502920"/>
+            <a:off x="411480" y="4279392"/>
+            <a:ext cx="5577840" cy="347472"/>
+          </a:xfrm>
+          <a:prstGeom prst="rect">
+            <a:avLst/>
+          </a:prstGeom>
+          <a:solidFill>
+            <a:srgbClr val="F7F7F7"/>
+          </a:solidFill>
+          <a:ln w="6350">
+            <a:solidFill>
+              <a:srgbClr val="DDDDDD"/>
+            </a:solidFill>
+          </a:ln>
+          <a:effectLst/>
+        </p:spPr>
+        <p:style>
+          <a:lnRef idx="1">
+            <a:schemeClr val="accent1"/>
+          </a:lnRef>
+          <a:fillRef idx="3">
+            <a:schemeClr val="accent1"/>
+          </a:fillRef>
+          <a:effectRef idx="2">
+            <a:schemeClr val="accent1"/>
+          </a:effectRef>
+          <a:fontRef idx="minor">
+            <a:schemeClr val="lt1"/>
+          </a:fontRef>
+        </p:style>
+        <p:txBody>
+          <a:bodyPr rtlCol="0" anchor="ctr"/>
+          <a:lstStyle/>
+          <a:p>
+            <a:pPr algn="ctr"/>
+          </a:p>
+        </p:txBody>
+      </p:sp>
+      <p:sp>
+        <p:nvSpPr>
+          <p:cNvPr id="32" name="TextBox 31"/>
+          <p:cNvSpPr txBox="1"/>
+          <p:nvPr/>
+        </p:nvSpPr>
+        <p:spPr>
+          <a:xfrm>
+            <a:off x="411480" y="4279392"/>
+            <a:ext cx="685800" cy="347472"/>
+          </a:xfrm>
+          <a:prstGeom prst="rect">
+            <a:avLst/>
+          </a:prstGeom>
+          <a:noFill/>
+        </p:spPr>
+        <p:txBody>
+          <a:bodyPr wrap="square" lIns="45720" rIns="45720" tIns="22860" bIns="22860" anchor="ctr">
+            <a:spAutoFit/>
+          </a:bodyPr>
+          <a:lstStyle/>
+          <a:p>
+            <a:pPr algn="ctr"/>
+            <a:r>
+              <a:rPr sz="1200" b="1">
+                <a:solidFill>
+                  <a:srgbClr val="4FB6BE"/>
+                </a:solidFill>
+                <a:latin typeface="Yu Gothic"/>
+              </a:rPr>
+              <a:t>3.3</a:t>
+            </a:r>
+          </a:p>
+        </p:txBody>
+      </p:sp>
+      <p:sp>
+        <p:nvSpPr>
+          <p:cNvPr id="33" name="TextBox 32"/>
+          <p:cNvSpPr txBox="1"/>
+          <p:nvPr/>
+        </p:nvSpPr>
+        <p:spPr>
+          <a:xfrm>
+            <a:off x="1097280" y="4279392"/>
+            <a:ext cx="3794759" cy="347472"/>
+          </a:xfrm>
+          <a:prstGeom prst="rect">
+            <a:avLst/>
+          </a:prstGeom>
+          <a:noFill/>
+        </p:spPr>
+        <p:txBody>
+          <a:bodyPr wrap="square" lIns="45720" rIns="45720" tIns="22860" bIns="22860" anchor="ctr">
+            <a:spAutoFit/>
+          </a:bodyPr>
+          <a:lstStyle/>
+          <a:p>
+            <a:pPr algn="l"/>
+            <a:r>
+              <a:rPr sz="1150" b="0">
+                <a:solidFill>
+                  <a:srgbClr val="333333"/>
+                </a:solidFill>
+                <a:latin typeface="Yu Gothic"/>
+              </a:rPr>
+              <a:t>顔写真データ（背景白 肩から上部 JPEG形式）</a:t>
+            </a:r>
+          </a:p>
+        </p:txBody>
+      </p:sp>
+      <p:sp>
+        <p:nvSpPr>
+          <p:cNvPr id="34" name="TextBox 33"/>
+          <p:cNvSpPr txBox="1"/>
+          <p:nvPr/>
+        </p:nvSpPr>
+        <p:spPr>
+          <a:xfrm>
+            <a:off x="4892040" y="4279392"/>
+            <a:ext cx="1051560" cy="347472"/>
+          </a:xfrm>
+          <a:prstGeom prst="rect">
+            <a:avLst/>
+          </a:prstGeom>
+          <a:noFill/>
+        </p:spPr>
+        <p:txBody>
+          <a:bodyPr wrap="square" lIns="45720" rIns="45720" tIns="22860" bIns="22860" anchor="ctr">
+            <a:spAutoFit/>
+          </a:bodyPr>
+          <a:lstStyle/>
+          <a:p>
+            <a:pPr algn="ctr"/>
+            <a:r>
+              <a:rPr sz="1100" b="1">
+                <a:solidFill>
+                  <a:srgbClr val="F29A3C"/>
+                </a:solidFill>
+                <a:latin typeface="Yu Gothic"/>
+              </a:rPr>
+              <a:t>JPEG</a:t>
+            </a:r>
+          </a:p>
+        </p:txBody>
+      </p:sp>
+      <p:sp>
+        <p:nvSpPr>
+          <p:cNvPr id="35" name="Rectangle 34"/>
+          <p:cNvSpPr/>
+          <p:nvPr/>
+        </p:nvSpPr>
+        <p:spPr>
+          <a:xfrm>
+            <a:off x="411480" y="4626864"/>
+            <a:ext cx="5577840" cy="347472"/>
           </a:xfrm>
           <a:prstGeom prst="rect">
             <a:avLst/>
@@ -6347,14 +7262,14 @@
       </p:sp>
       <p:sp>
         <p:nvSpPr>
-          <p:cNvPr id="24" name="TextBox 23"/>
-          <p:cNvSpPr txBox="1"/>
-          <p:nvPr/>
-        </p:nvSpPr>
-        <p:spPr>
-          <a:xfrm>
-            <a:off x="1371600" y="2194560"/>
-            <a:ext cx="3840480" cy="502920"/>
+          <p:cNvPr id="36" name="TextBox 35"/>
+          <p:cNvSpPr txBox="1"/>
+          <p:nvPr/>
+        </p:nvSpPr>
+        <p:spPr>
+          <a:xfrm>
+            <a:off x="411480" y="4626864"/>
+            <a:ext cx="685800" cy="347472"/>
           </a:xfrm>
           <a:prstGeom prst="rect">
             <a:avLst/>
@@ -6367,29 +7282,329 @@
           </a:bodyPr>
           <a:lstStyle/>
           <a:p>
+            <a:pPr algn="ctr"/>
+            <a:r>
+              <a:rPr sz="1200" b="1">
+                <a:solidFill>
+                  <a:srgbClr val="4FB6BE"/>
+                </a:solidFill>
+                <a:latin typeface="Yu Gothic"/>
+              </a:rPr>
+              <a:t>3.4</a:t>
+            </a:r>
+          </a:p>
+        </p:txBody>
+      </p:sp>
+      <p:sp>
+        <p:nvSpPr>
+          <p:cNvPr id="37" name="TextBox 36"/>
+          <p:cNvSpPr txBox="1"/>
+          <p:nvPr/>
+        </p:nvSpPr>
+        <p:spPr>
+          <a:xfrm>
+            <a:off x="1097280" y="4626864"/>
+            <a:ext cx="3794759" cy="347472"/>
+          </a:xfrm>
+          <a:prstGeom prst="rect">
+            <a:avLst/>
+          </a:prstGeom>
+          <a:noFill/>
+        </p:spPr>
+        <p:txBody>
+          <a:bodyPr wrap="square" lIns="45720" rIns="45720" tIns="22860" bIns="22860" anchor="ctr">
+            <a:spAutoFit/>
+          </a:bodyPr>
+          <a:lstStyle/>
+          <a:p>
             <a:pPr algn="l"/>
             <a:r>
-              <a:rPr sz="1400" b="0">
+              <a:rPr sz="1150" b="0">
                 <a:solidFill>
                   <a:srgbClr val="333333"/>
                 </a:solidFill>
                 <a:latin typeface="Yu Gothic"/>
               </a:rPr>
-              <a:t>面接前同意forms</a:t>
-            </a:r>
-          </a:p>
-        </p:txBody>
-      </p:sp>
-      <p:sp>
-        <p:nvSpPr>
-          <p:cNvPr id="25" name="Rectangle 24"/>
+              <a:t>面接後forms（個人情報、緊急連絡先、口座情報）</a:t>
+            </a:r>
+          </a:p>
+        </p:txBody>
+      </p:sp>
+      <p:sp>
+        <p:nvSpPr>
+          <p:cNvPr id="38" name="TextBox 37"/>
+          <p:cNvSpPr txBox="1"/>
+          <p:nvPr/>
+        </p:nvSpPr>
+        <p:spPr>
+          <a:xfrm>
+            <a:off x="4892040" y="4626864"/>
+            <a:ext cx="1051560" cy="347472"/>
+          </a:xfrm>
+          <a:prstGeom prst="rect">
+            <a:avLst/>
+          </a:prstGeom>
+          <a:noFill/>
+        </p:spPr>
+        <p:txBody>
+          <a:bodyPr wrap="square" lIns="45720" rIns="45720" tIns="22860" bIns="22860" anchor="ctr">
+            <a:spAutoFit/>
+          </a:bodyPr>
+          <a:lstStyle/>
+          <a:p>
+            <a:pPr algn="ctr"/>
+            <a:r>
+              <a:rPr sz="1100" b="1">
+                <a:solidFill>
+                  <a:srgbClr val="666666"/>
+                </a:solidFill>
+                <a:latin typeface="Yu Gothic"/>
+              </a:rPr>
+              <a:t>PDF</a:t>
+            </a:r>
+          </a:p>
+        </p:txBody>
+      </p:sp>
+      <p:sp>
+        <p:nvSpPr>
+          <p:cNvPr id="39" name="Rectangle 38"/>
           <p:cNvSpPr/>
           <p:nvPr/>
         </p:nvSpPr>
         <p:spPr>
           <a:xfrm>
-            <a:off x="5212080" y="2194560"/>
-            <a:ext cx="1463040" cy="502920"/>
+            <a:off x="411480" y="5065775"/>
+            <a:ext cx="5577840" cy="329184"/>
+          </a:xfrm>
+          <a:prstGeom prst="rect">
+            <a:avLst/>
+          </a:prstGeom>
+          <a:solidFill>
+            <a:srgbClr val="666666"/>
+          </a:solidFill>
+          <a:ln>
+            <a:noFill/>
+          </a:ln>
+          <a:effectLst/>
+        </p:spPr>
+        <p:style>
+          <a:lnRef idx="1">
+            <a:schemeClr val="accent1"/>
+          </a:lnRef>
+          <a:fillRef idx="3">
+            <a:schemeClr val="accent1"/>
+          </a:fillRef>
+          <a:effectRef idx="2">
+            <a:schemeClr val="accent1"/>
+          </a:effectRef>
+          <a:fontRef idx="minor">
+            <a:schemeClr val="lt1"/>
+          </a:fontRef>
+        </p:style>
+        <p:txBody>
+          <a:bodyPr rtlCol="0" anchor="ctr"/>
+          <a:lstStyle/>
+          <a:p>
+            <a:pPr algn="ctr"/>
+          </a:p>
+        </p:txBody>
+      </p:sp>
+      <p:sp>
+        <p:nvSpPr>
+          <p:cNvPr id="40" name="TextBox 39"/>
+          <p:cNvSpPr txBox="1"/>
+          <p:nvPr/>
+        </p:nvSpPr>
+        <p:spPr>
+          <a:xfrm>
+            <a:off x="457200" y="5065775"/>
+            <a:ext cx="5486400" cy="329184"/>
+          </a:xfrm>
+          <a:prstGeom prst="rect">
+            <a:avLst/>
+          </a:prstGeom>
+          <a:noFill/>
+        </p:spPr>
+        <p:txBody>
+          <a:bodyPr wrap="square" lIns="45720" rIns="45720" tIns="22860" bIns="22860" anchor="ctr">
+            <a:spAutoFit/>
+          </a:bodyPr>
+          <a:lstStyle/>
+          <a:p>
+            <a:pPr algn="l"/>
+            <a:r>
+              <a:rPr sz="1200" b="1">
+                <a:solidFill>
+                  <a:srgbClr val="FFFFFF"/>
+                </a:solidFill>
+                <a:latin typeface="Yu Gothic"/>
+              </a:rPr>
+              <a:t>外国籍の方</a:t>
+            </a:r>
+          </a:p>
+        </p:txBody>
+      </p:sp>
+      <p:sp>
+        <p:nvSpPr>
+          <p:cNvPr id="41" name="Rectangle 40"/>
+          <p:cNvSpPr/>
+          <p:nvPr/>
+        </p:nvSpPr>
+        <p:spPr>
+          <a:xfrm>
+            <a:off x="411480" y="5394959"/>
+            <a:ext cx="5577840" cy="347472"/>
+          </a:xfrm>
+          <a:prstGeom prst="rect">
+            <a:avLst/>
+          </a:prstGeom>
+          <a:solidFill>
+            <a:srgbClr val="F7F7F7"/>
+          </a:solidFill>
+          <a:ln w="6350">
+            <a:solidFill>
+              <a:srgbClr val="DDDDDD"/>
+            </a:solidFill>
+          </a:ln>
+          <a:effectLst/>
+        </p:spPr>
+        <p:style>
+          <a:lnRef idx="1">
+            <a:schemeClr val="accent1"/>
+          </a:lnRef>
+          <a:fillRef idx="3">
+            <a:schemeClr val="accent1"/>
+          </a:fillRef>
+          <a:effectRef idx="2">
+            <a:schemeClr val="accent1"/>
+          </a:effectRef>
+          <a:fontRef idx="minor">
+            <a:schemeClr val="lt1"/>
+          </a:fontRef>
+        </p:style>
+        <p:txBody>
+          <a:bodyPr rtlCol="0" anchor="ctr"/>
+          <a:lstStyle/>
+          <a:p>
+            <a:pPr algn="ctr"/>
+          </a:p>
+        </p:txBody>
+      </p:sp>
+      <p:sp>
+        <p:nvSpPr>
+          <p:cNvPr id="42" name="TextBox 41"/>
+          <p:cNvSpPr txBox="1"/>
+          <p:nvPr/>
+        </p:nvSpPr>
+        <p:spPr>
+          <a:xfrm>
+            <a:off x="411480" y="5394959"/>
+            <a:ext cx="685800" cy="347472"/>
+          </a:xfrm>
+          <a:prstGeom prst="rect">
+            <a:avLst/>
+          </a:prstGeom>
+          <a:noFill/>
+        </p:spPr>
+        <p:txBody>
+          <a:bodyPr wrap="square" lIns="45720" rIns="45720" tIns="22860" bIns="22860" anchor="ctr">
+            <a:spAutoFit/>
+          </a:bodyPr>
+          <a:lstStyle/>
+          <a:p>
+            <a:pPr algn="ctr"/>
+            <a:r>
+              <a:rPr sz="1200" b="1">
+                <a:solidFill>
+                  <a:srgbClr val="666666"/>
+                </a:solidFill>
+                <a:latin typeface="Yu Gothic"/>
+              </a:rPr>
+              <a:t/>
+            </a:r>
+          </a:p>
+        </p:txBody>
+      </p:sp>
+      <p:sp>
+        <p:nvSpPr>
+          <p:cNvPr id="43" name="TextBox 42"/>
+          <p:cNvSpPr txBox="1"/>
+          <p:nvPr/>
+        </p:nvSpPr>
+        <p:spPr>
+          <a:xfrm>
+            <a:off x="1097280" y="5394959"/>
+            <a:ext cx="3794759" cy="347472"/>
+          </a:xfrm>
+          <a:prstGeom prst="rect">
+            <a:avLst/>
+          </a:prstGeom>
+          <a:noFill/>
+        </p:spPr>
+        <p:txBody>
+          <a:bodyPr wrap="square" lIns="45720" rIns="45720" tIns="22860" bIns="22860" anchor="ctr">
+            <a:spAutoFit/>
+          </a:bodyPr>
+          <a:lstStyle/>
+          <a:p>
+            <a:pPr algn="l"/>
+            <a:r>
+              <a:rPr sz="1050" b="0">
+                <a:solidFill>
+                  <a:srgbClr val="333333"/>
+                </a:solidFill>
+                <a:latin typeface="Yu Gothic"/>
+              </a:rPr>
+              <a:t>在留カードのコピー（永住権か就労制限なしでないと働けません）</a:t>
+            </a:r>
+          </a:p>
+        </p:txBody>
+      </p:sp>
+      <p:sp>
+        <p:nvSpPr>
+          <p:cNvPr id="44" name="TextBox 43"/>
+          <p:cNvSpPr txBox="1"/>
+          <p:nvPr/>
+        </p:nvSpPr>
+        <p:spPr>
+          <a:xfrm>
+            <a:off x="4892040" y="5394959"/>
+            <a:ext cx="1051560" cy="347472"/>
+          </a:xfrm>
+          <a:prstGeom prst="rect">
+            <a:avLst/>
+          </a:prstGeom>
+          <a:noFill/>
+        </p:spPr>
+        <p:txBody>
+          <a:bodyPr wrap="square" lIns="45720" rIns="45720" tIns="22860" bIns="22860" anchor="ctr">
+            <a:spAutoFit/>
+          </a:bodyPr>
+          <a:lstStyle/>
+          <a:p>
+            <a:pPr algn="ctr"/>
+            <a:r>
+              <a:rPr sz="1100" b="1">
+                <a:solidFill>
+                  <a:srgbClr val="666666"/>
+                </a:solidFill>
+                <a:latin typeface="Yu Gothic"/>
+              </a:rPr>
+              <a:t>PDF</a:t>
+            </a:r>
+          </a:p>
+        </p:txBody>
+      </p:sp>
+      <p:sp>
+        <p:nvSpPr>
+          <p:cNvPr id="45" name="Rectangle 44"/>
+          <p:cNvSpPr/>
+          <p:nvPr/>
+        </p:nvSpPr>
+        <p:spPr>
+          <a:xfrm>
+            <a:off x="411480" y="5742431"/>
+            <a:ext cx="5577840" cy="347472"/>
           </a:xfrm>
           <a:prstGeom prst="rect">
             <a:avLst/>
@@ -6428,14 +7643,14 @@
       </p:sp>
       <p:sp>
         <p:nvSpPr>
-          <p:cNvPr id="26" name="TextBox 25"/>
-          <p:cNvSpPr txBox="1"/>
-          <p:nvPr/>
-        </p:nvSpPr>
-        <p:spPr>
-          <a:xfrm>
-            <a:off x="5212080" y="2194560"/>
-            <a:ext cx="1463040" cy="502920"/>
+          <p:cNvPr id="46" name="TextBox 45"/>
+          <p:cNvSpPr txBox="1"/>
+          <p:nvPr/>
+        </p:nvSpPr>
+        <p:spPr>
+          <a:xfrm>
+            <a:off x="411480" y="5742431"/>
+            <a:ext cx="685800" cy="347472"/>
           </a:xfrm>
           <a:prstGeom prst="rect">
             <a:avLst/>
@@ -6450,12 +7665,82 @@
           <a:p>
             <a:pPr algn="ctr"/>
             <a:r>
-              <a:rPr sz="1400" b="0">
+              <a:rPr sz="1200" b="1">
+                <a:solidFill>
+                  <a:srgbClr val="666666"/>
+                </a:solidFill>
+                <a:latin typeface="Yu Gothic"/>
+              </a:rPr>
+              <a:t/>
+            </a:r>
+          </a:p>
+        </p:txBody>
+      </p:sp>
+      <p:sp>
+        <p:nvSpPr>
+          <p:cNvPr id="47" name="TextBox 46"/>
+          <p:cNvSpPr txBox="1"/>
+          <p:nvPr/>
+        </p:nvSpPr>
+        <p:spPr>
+          <a:xfrm>
+            <a:off x="1097280" y="5742431"/>
+            <a:ext cx="3794759" cy="347472"/>
+          </a:xfrm>
+          <a:prstGeom prst="rect">
+            <a:avLst/>
+          </a:prstGeom>
+          <a:noFill/>
+        </p:spPr>
+        <p:txBody>
+          <a:bodyPr wrap="square" lIns="45720" rIns="45720" tIns="22860" bIns="22860" anchor="ctr">
+            <a:spAutoFit/>
+          </a:bodyPr>
+          <a:lstStyle/>
+          <a:p>
+            <a:pPr algn="l"/>
+            <a:r>
+              <a:rPr sz="1150" b="0">
                 <a:solidFill>
                   <a:srgbClr val="333333"/>
                 </a:solidFill>
                 <a:latin typeface="Yu Gothic"/>
               </a:rPr>
+              <a:t>住民票</a:t>
+            </a:r>
+          </a:p>
+        </p:txBody>
+      </p:sp>
+      <p:sp>
+        <p:nvSpPr>
+          <p:cNvPr id="48" name="TextBox 47"/>
+          <p:cNvSpPr txBox="1"/>
+          <p:nvPr/>
+        </p:nvSpPr>
+        <p:spPr>
+          <a:xfrm>
+            <a:off x="4892040" y="5742431"/>
+            <a:ext cx="1051560" cy="347472"/>
+          </a:xfrm>
+          <a:prstGeom prst="rect">
+            <a:avLst/>
+          </a:prstGeom>
+          <a:noFill/>
+        </p:spPr>
+        <p:txBody>
+          <a:bodyPr wrap="square" lIns="45720" rIns="45720" tIns="22860" bIns="22860" anchor="ctr">
+            <a:spAutoFit/>
+          </a:bodyPr>
+          <a:lstStyle/>
+          <a:p>
+            <a:pPr algn="ctr"/>
+            <a:r>
+              <a:rPr sz="1100" b="1">
+                <a:solidFill>
+                  <a:srgbClr val="666666"/>
+                </a:solidFill>
+                <a:latin typeface="Yu Gothic"/>
+              </a:rPr>
               <a:t>PDF</a:t>
             </a:r>
           </a:p>
@@ -6463,14 +7748,244 @@
       </p:sp>
       <p:sp>
         <p:nvSpPr>
-          <p:cNvPr id="27" name="Rectangle 26"/>
+          <p:cNvPr id="49" name="Rectangle 48"/>
           <p:cNvSpPr/>
           <p:nvPr/>
         </p:nvSpPr>
         <p:spPr>
           <a:xfrm>
-            <a:off x="6675120" y="2194560"/>
-            <a:ext cx="4937760" cy="502920"/>
+            <a:off x="6172200" y="1280160"/>
+            <a:ext cx="5577840" cy="329184"/>
+          </a:xfrm>
+          <a:prstGeom prst="rect">
+            <a:avLst/>
+          </a:prstGeom>
+          <a:solidFill>
+            <a:srgbClr val="F29A3C"/>
+          </a:solidFill>
+          <a:ln>
+            <a:noFill/>
+          </a:ln>
+          <a:effectLst/>
+        </p:spPr>
+        <p:style>
+          <a:lnRef idx="1">
+            <a:schemeClr val="accent1"/>
+          </a:lnRef>
+          <a:fillRef idx="3">
+            <a:schemeClr val="accent1"/>
+          </a:fillRef>
+          <a:effectRef idx="2">
+            <a:schemeClr val="accent1"/>
+          </a:effectRef>
+          <a:fontRef idx="minor">
+            <a:schemeClr val="lt1"/>
+          </a:fontRef>
+        </p:style>
+        <p:txBody>
+          <a:bodyPr rtlCol="0" anchor="ctr"/>
+          <a:lstStyle/>
+          <a:p>
+            <a:pPr algn="ctr"/>
+          </a:p>
+        </p:txBody>
+      </p:sp>
+      <p:sp>
+        <p:nvSpPr>
+          <p:cNvPr id="50" name="TextBox 49"/>
+          <p:cNvSpPr txBox="1"/>
+          <p:nvPr/>
+        </p:nvSpPr>
+        <p:spPr>
+          <a:xfrm>
+            <a:off x="6217920" y="1280160"/>
+            <a:ext cx="5486400" cy="329184"/>
+          </a:xfrm>
+          <a:prstGeom prst="rect">
+            <a:avLst/>
+          </a:prstGeom>
+          <a:noFill/>
+        </p:spPr>
+        <p:txBody>
+          <a:bodyPr wrap="square" lIns="45720" rIns="45720" tIns="22860" bIns="22860" anchor="ctr">
+            <a:spAutoFit/>
+          </a:bodyPr>
+          <a:lstStyle/>
+          <a:p>
+            <a:pPr algn="l"/>
+            <a:r>
+              <a:rPr sz="1200" b="1">
+                <a:solidFill>
+                  <a:srgbClr val="FFFFFF"/>
+                </a:solidFill>
+                <a:latin typeface="Yu Gothic"/>
+              </a:rPr>
+              <a:t>4.そのほか　オレンジ＝該当者のみ</a:t>
+            </a:r>
+          </a:p>
+        </p:txBody>
+      </p:sp>
+      <p:sp>
+        <p:nvSpPr>
+          <p:cNvPr id="51" name="Rectangle 50"/>
+          <p:cNvSpPr/>
+          <p:nvPr/>
+        </p:nvSpPr>
+        <p:spPr>
+          <a:xfrm>
+            <a:off x="6172200" y="1609343"/>
+            <a:ext cx="5577840" cy="347472"/>
+          </a:xfrm>
+          <a:prstGeom prst="rect">
+            <a:avLst/>
+          </a:prstGeom>
+          <a:solidFill>
+            <a:srgbClr val="F7F7F7"/>
+          </a:solidFill>
+          <a:ln w="6350">
+            <a:solidFill>
+              <a:srgbClr val="DDDDDD"/>
+            </a:solidFill>
+          </a:ln>
+          <a:effectLst/>
+        </p:spPr>
+        <p:style>
+          <a:lnRef idx="1">
+            <a:schemeClr val="accent1"/>
+          </a:lnRef>
+          <a:fillRef idx="3">
+            <a:schemeClr val="accent1"/>
+          </a:fillRef>
+          <a:effectRef idx="2">
+            <a:schemeClr val="accent1"/>
+          </a:effectRef>
+          <a:fontRef idx="minor">
+            <a:schemeClr val="lt1"/>
+          </a:fontRef>
+        </p:style>
+        <p:txBody>
+          <a:bodyPr rtlCol="0" anchor="ctr"/>
+          <a:lstStyle/>
+          <a:p>
+            <a:pPr algn="ctr"/>
+          </a:p>
+        </p:txBody>
+      </p:sp>
+      <p:sp>
+        <p:nvSpPr>
+          <p:cNvPr id="52" name="TextBox 51"/>
+          <p:cNvSpPr txBox="1"/>
+          <p:nvPr/>
+        </p:nvSpPr>
+        <p:spPr>
+          <a:xfrm>
+            <a:off x="6172200" y="1609343"/>
+            <a:ext cx="685800" cy="347472"/>
+          </a:xfrm>
+          <a:prstGeom prst="rect">
+            <a:avLst/>
+          </a:prstGeom>
+          <a:noFill/>
+        </p:spPr>
+        <p:txBody>
+          <a:bodyPr wrap="square" lIns="45720" rIns="45720" tIns="22860" bIns="22860" anchor="ctr">
+            <a:spAutoFit/>
+          </a:bodyPr>
+          <a:lstStyle/>
+          <a:p>
+            <a:pPr algn="ctr"/>
+            <a:r>
+              <a:rPr sz="1200" b="1">
+                <a:solidFill>
+                  <a:srgbClr val="F29A3C"/>
+                </a:solidFill>
+                <a:latin typeface="Yu Gothic"/>
+              </a:rPr>
+              <a:t>4.1</a:t>
+            </a:r>
+          </a:p>
+        </p:txBody>
+      </p:sp>
+      <p:sp>
+        <p:nvSpPr>
+          <p:cNvPr id="53" name="TextBox 52"/>
+          <p:cNvSpPr txBox="1"/>
+          <p:nvPr/>
+        </p:nvSpPr>
+        <p:spPr>
+          <a:xfrm>
+            <a:off x="6858000" y="1609343"/>
+            <a:ext cx="3794759" cy="347472"/>
+          </a:xfrm>
+          <a:prstGeom prst="rect">
+            <a:avLst/>
+          </a:prstGeom>
+          <a:noFill/>
+        </p:spPr>
+        <p:txBody>
+          <a:bodyPr wrap="square" lIns="45720" rIns="45720" tIns="22860" bIns="22860" anchor="ctr">
+            <a:spAutoFit/>
+          </a:bodyPr>
+          <a:lstStyle/>
+          <a:p>
+            <a:pPr algn="l"/>
+            <a:r>
+              <a:rPr sz="1150" b="0">
+                <a:solidFill>
+                  <a:srgbClr val="333333"/>
+                </a:solidFill>
+                <a:latin typeface="Yu Gothic"/>
+              </a:rPr>
+              <a:t>運転記録証明（過去5年分）</a:t>
+            </a:r>
+          </a:p>
+        </p:txBody>
+      </p:sp>
+      <p:sp>
+        <p:nvSpPr>
+          <p:cNvPr id="54" name="TextBox 53"/>
+          <p:cNvSpPr txBox="1"/>
+          <p:nvPr/>
+        </p:nvSpPr>
+        <p:spPr>
+          <a:xfrm>
+            <a:off x="10652760" y="1609343"/>
+            <a:ext cx="1051560" cy="347472"/>
+          </a:xfrm>
+          <a:prstGeom prst="rect">
+            <a:avLst/>
+          </a:prstGeom>
+          <a:noFill/>
+        </p:spPr>
+        <p:txBody>
+          <a:bodyPr wrap="square" lIns="45720" rIns="45720" tIns="22860" bIns="22860" anchor="ctr">
+            <a:spAutoFit/>
+          </a:bodyPr>
+          <a:lstStyle/>
+          <a:p>
+            <a:pPr algn="ctr"/>
+            <a:r>
+              <a:rPr sz="1100" b="1">
+                <a:solidFill>
+                  <a:srgbClr val="666666"/>
+                </a:solidFill>
+                <a:latin typeface="Yu Gothic"/>
+              </a:rPr>
+              <a:t>PDF</a:t>
+            </a:r>
+          </a:p>
+        </p:txBody>
+      </p:sp>
+      <p:sp>
+        <p:nvSpPr>
+          <p:cNvPr id="55" name="Rectangle 54"/>
+          <p:cNvSpPr/>
+          <p:nvPr/>
+        </p:nvSpPr>
+        <p:spPr>
+          <a:xfrm>
+            <a:off x="6172200" y="1956815"/>
+            <a:ext cx="5577840" cy="347472"/>
           </a:xfrm>
           <a:prstGeom prst="rect">
             <a:avLst/>
@@ -6509,14 +8024,14 @@
       </p:sp>
       <p:sp>
         <p:nvSpPr>
-          <p:cNvPr id="28" name="TextBox 27"/>
-          <p:cNvSpPr txBox="1"/>
-          <p:nvPr/>
-        </p:nvSpPr>
-        <p:spPr>
-          <a:xfrm>
-            <a:off x="6675120" y="2194560"/>
-            <a:ext cx="4937760" cy="502920"/>
+          <p:cNvPr id="56" name="TextBox 55"/>
+          <p:cNvSpPr txBox="1"/>
+          <p:nvPr/>
+        </p:nvSpPr>
+        <p:spPr>
+          <a:xfrm>
+            <a:off x="6172200" y="1956815"/>
+            <a:ext cx="685800" cy="347472"/>
           </a:xfrm>
           <a:prstGeom prst="rect">
             <a:avLst/>
@@ -6529,35 +8044,184 @@
           </a:bodyPr>
           <a:lstStyle/>
           <a:p>
+            <a:pPr algn="ctr"/>
+            <a:r>
+              <a:rPr sz="1200" b="1">
+                <a:solidFill>
+                  <a:srgbClr val="F29A3C"/>
+                </a:solidFill>
+                <a:latin typeface="Yu Gothic"/>
+              </a:rPr>
+              <a:t>4.2</a:t>
+            </a:r>
+          </a:p>
+        </p:txBody>
+      </p:sp>
+      <p:sp>
+        <p:nvSpPr>
+          <p:cNvPr id="57" name="TextBox 56"/>
+          <p:cNvSpPr txBox="1"/>
+          <p:nvPr/>
+        </p:nvSpPr>
+        <p:spPr>
+          <a:xfrm>
+            <a:off x="6858000" y="1956815"/>
+            <a:ext cx="3794759" cy="347472"/>
+          </a:xfrm>
+          <a:prstGeom prst="rect">
+            <a:avLst/>
+          </a:prstGeom>
+          <a:noFill/>
+        </p:spPr>
+        <p:txBody>
+          <a:bodyPr wrap="square" lIns="45720" rIns="45720" tIns="22860" bIns="22860" anchor="ctr">
+            <a:spAutoFit/>
+          </a:bodyPr>
+          <a:lstStyle/>
+          <a:p>
             <a:pPr algn="l"/>
             <a:r>
-              <a:rPr sz="1400" b="0">
+              <a:rPr sz="1150" b="0">
                 <a:solidFill>
                   <a:srgbClr val="333333"/>
                 </a:solidFill>
                 <a:latin typeface="Yu Gothic"/>
               </a:rPr>
-              <a:t>1.1面接前同意forms 氏名.pdf</a:t>
-            </a:r>
-          </a:p>
-        </p:txBody>
-      </p:sp>
-      <p:sp>
-        <p:nvSpPr>
-          <p:cNvPr id="29" name="Rectangle 28"/>
+              <a:t>携帯貸与覚書</a:t>
+            </a:r>
+          </a:p>
+        </p:txBody>
+      </p:sp>
+      <p:sp>
+        <p:nvSpPr>
+          <p:cNvPr id="58" name="TextBox 57"/>
+          <p:cNvSpPr txBox="1"/>
+          <p:nvPr/>
+        </p:nvSpPr>
+        <p:spPr>
+          <a:xfrm>
+            <a:off x="10652760" y="1956815"/>
+            <a:ext cx="1051560" cy="347472"/>
+          </a:xfrm>
+          <a:prstGeom prst="rect">
+            <a:avLst/>
+          </a:prstGeom>
+          <a:noFill/>
+        </p:spPr>
+        <p:txBody>
+          <a:bodyPr wrap="square" lIns="45720" rIns="45720" tIns="22860" bIns="22860" anchor="ctr">
+            <a:spAutoFit/>
+          </a:bodyPr>
+          <a:lstStyle/>
+          <a:p>
+            <a:pPr algn="ctr"/>
+            <a:r>
+              <a:rPr sz="1100" b="1">
+                <a:solidFill>
+                  <a:srgbClr val="666666"/>
+                </a:solidFill>
+                <a:latin typeface="Yu Gothic"/>
+              </a:rPr>
+              <a:t>PDF</a:t>
+            </a:r>
+          </a:p>
+        </p:txBody>
+      </p:sp>
+      <p:sp>
+        <p:nvSpPr>
+          <p:cNvPr id="59" name="Rectangle 58"/>
           <p:cNvSpPr/>
           <p:nvPr/>
         </p:nvSpPr>
         <p:spPr>
           <a:xfrm>
-            <a:off x="548640" y="2697480"/>
-            <a:ext cx="822960" cy="502920"/>
+            <a:off x="6172200" y="2395727"/>
+            <a:ext cx="5577840" cy="329184"/>
           </a:xfrm>
           <a:prstGeom prst="rect">
             <a:avLst/>
           </a:prstGeom>
           <a:solidFill>
-            <a:srgbClr val="FFF6E0"/>
+            <a:srgbClr val="F29A3C"/>
+          </a:solidFill>
+          <a:ln>
+            <a:noFill/>
+          </a:ln>
+          <a:effectLst/>
+        </p:spPr>
+        <p:style>
+          <a:lnRef idx="1">
+            <a:schemeClr val="accent1"/>
+          </a:lnRef>
+          <a:fillRef idx="3">
+            <a:schemeClr val="accent1"/>
+          </a:fillRef>
+          <a:effectRef idx="2">
+            <a:schemeClr val="accent1"/>
+          </a:effectRef>
+          <a:fontRef idx="minor">
+            <a:schemeClr val="lt1"/>
+          </a:fontRef>
+        </p:style>
+        <p:txBody>
+          <a:bodyPr rtlCol="0" anchor="ctr"/>
+          <a:lstStyle/>
+          <a:p>
+            <a:pPr algn="ctr"/>
+          </a:p>
+        </p:txBody>
+      </p:sp>
+      <p:sp>
+        <p:nvSpPr>
+          <p:cNvPr id="60" name="TextBox 59"/>
+          <p:cNvSpPr txBox="1"/>
+          <p:nvPr/>
+        </p:nvSpPr>
+        <p:spPr>
+          <a:xfrm>
+            <a:off x="6217920" y="2395727"/>
+            <a:ext cx="5486400" cy="329184"/>
+          </a:xfrm>
+          <a:prstGeom prst="rect">
+            <a:avLst/>
+          </a:prstGeom>
+          <a:noFill/>
+        </p:spPr>
+        <p:txBody>
+          <a:bodyPr wrap="square" lIns="45720" rIns="45720" tIns="22860" bIns="22860" anchor="ctr">
+            <a:spAutoFit/>
+          </a:bodyPr>
+          <a:lstStyle/>
+          <a:p>
+            <a:pPr algn="l"/>
+            <a:r>
+              <a:rPr sz="1200" b="1">
+                <a:solidFill>
+                  <a:srgbClr val="FFFFFF"/>
+                </a:solidFill>
+                <a:latin typeface="Yu Gothic"/>
+              </a:rPr>
+              <a:t>5.車両情報　オレンジ＝該当者のみ</a:t>
+            </a:r>
+          </a:p>
+        </p:txBody>
+      </p:sp>
+      <p:sp>
+        <p:nvSpPr>
+          <p:cNvPr id="61" name="Rectangle 60"/>
+          <p:cNvSpPr/>
+          <p:nvPr/>
+        </p:nvSpPr>
+        <p:spPr>
+          <a:xfrm>
+            <a:off x="6172200" y="2724911"/>
+            <a:ext cx="5577840" cy="347472"/>
+          </a:xfrm>
+          <a:prstGeom prst="rect">
+            <a:avLst/>
+          </a:prstGeom>
+          <a:solidFill>
+            <a:srgbClr val="F7F7F7"/>
           </a:solidFill>
           <a:ln w="6350">
             <a:solidFill>
@@ -6590,14 +8254,14 @@
       </p:sp>
       <p:sp>
         <p:nvSpPr>
-          <p:cNvPr id="30" name="TextBox 29"/>
-          <p:cNvSpPr txBox="1"/>
-          <p:nvPr/>
-        </p:nvSpPr>
-        <p:spPr>
-          <a:xfrm>
-            <a:off x="548640" y="2697480"/>
-            <a:ext cx="822960" cy="502920"/>
+          <p:cNvPr id="62" name="TextBox 61"/>
+          <p:cNvSpPr txBox="1"/>
+          <p:nvPr/>
+        </p:nvSpPr>
+        <p:spPr>
+          <a:xfrm>
+            <a:off x="6172200" y="2724911"/>
+            <a:ext cx="685800" cy="347472"/>
           </a:xfrm>
           <a:prstGeom prst="rect">
             <a:avLst/>
@@ -6612,270 +8276,97 @@
           <a:p>
             <a:pPr algn="ctr"/>
             <a:r>
-              <a:rPr sz="1400" b="1">
-                <a:solidFill>
-                  <a:srgbClr val="4FB6BE"/>
-                </a:solidFill>
-                <a:latin typeface="Yu Gothic"/>
-              </a:rPr>
-              <a:t>2.1</a:t>
-            </a:r>
-          </a:p>
-        </p:txBody>
-      </p:sp>
-      <p:sp>
-        <p:nvSpPr>
-          <p:cNvPr id="31" name="Rectangle 30"/>
+              <a:rPr sz="1200" b="1">
+                <a:solidFill>
+                  <a:srgbClr val="F29A3C"/>
+                </a:solidFill>
+                <a:latin typeface="Yu Gothic"/>
+              </a:rPr>
+              <a:t>5.1</a:t>
+            </a:r>
+          </a:p>
+        </p:txBody>
+      </p:sp>
+      <p:sp>
+        <p:nvSpPr>
+          <p:cNvPr id="63" name="TextBox 62"/>
+          <p:cNvSpPr txBox="1"/>
+          <p:nvPr/>
+        </p:nvSpPr>
+        <p:spPr>
+          <a:xfrm>
+            <a:off x="6858000" y="2724911"/>
+            <a:ext cx="3794759" cy="347472"/>
+          </a:xfrm>
+          <a:prstGeom prst="rect">
+            <a:avLst/>
+          </a:prstGeom>
+          <a:noFill/>
+        </p:spPr>
+        <p:txBody>
+          <a:bodyPr wrap="square" lIns="45720" rIns="45720" tIns="22860" bIns="22860" anchor="ctr">
+            <a:spAutoFit/>
+          </a:bodyPr>
+          <a:lstStyle/>
+          <a:p>
+            <a:pPr algn="l"/>
+            <a:r>
+              <a:rPr sz="1150" b="0">
+                <a:solidFill>
+                  <a:srgbClr val="333333"/>
+                </a:solidFill>
+                <a:latin typeface="Yu Gothic"/>
+              </a:rPr>
+              <a:t>車検証・自動車検査記録事項</a:t>
+            </a:r>
+          </a:p>
+        </p:txBody>
+      </p:sp>
+      <p:sp>
+        <p:nvSpPr>
+          <p:cNvPr id="64" name="TextBox 63"/>
+          <p:cNvSpPr txBox="1"/>
+          <p:nvPr/>
+        </p:nvSpPr>
+        <p:spPr>
+          <a:xfrm>
+            <a:off x="10652760" y="2724911"/>
+            <a:ext cx="1051560" cy="347472"/>
+          </a:xfrm>
+          <a:prstGeom prst="rect">
+            <a:avLst/>
+          </a:prstGeom>
+          <a:noFill/>
+        </p:spPr>
+        <p:txBody>
+          <a:bodyPr wrap="square" lIns="45720" rIns="45720" tIns="22860" bIns="22860" anchor="ctr">
+            <a:spAutoFit/>
+          </a:bodyPr>
+          <a:lstStyle/>
+          <a:p>
+            <a:pPr algn="ctr"/>
+            <a:r>
+              <a:rPr sz="1100" b="1">
+                <a:solidFill>
+                  <a:srgbClr val="666666"/>
+                </a:solidFill>
+                <a:latin typeface="Yu Gothic"/>
+              </a:rPr>
+              <a:t>PDF</a:t>
+            </a:r>
+          </a:p>
+        </p:txBody>
+      </p:sp>
+      <p:sp>
+        <p:nvSpPr>
+          <p:cNvPr id="65" name="Rectangle 64"/>
           <p:cNvSpPr/>
           <p:nvPr/>
         </p:nvSpPr>
         <p:spPr>
           <a:xfrm>
-            <a:off x="1371600" y="2697480"/>
-            <a:ext cx="3840480" cy="502920"/>
-          </a:xfrm>
-          <a:prstGeom prst="rect">
-            <a:avLst/>
-          </a:prstGeom>
-          <a:solidFill>
-            <a:srgbClr val="FFF6E0"/>
-          </a:solidFill>
-          <a:ln w="6350">
-            <a:solidFill>
-              <a:srgbClr val="DDDDDD"/>
-            </a:solidFill>
-          </a:ln>
-          <a:effectLst/>
-        </p:spPr>
-        <p:style>
-          <a:lnRef idx="1">
-            <a:schemeClr val="accent1"/>
-          </a:lnRef>
-          <a:fillRef idx="3">
-            <a:schemeClr val="accent1"/>
-          </a:fillRef>
-          <a:effectRef idx="2">
-            <a:schemeClr val="accent1"/>
-          </a:effectRef>
-          <a:fontRef idx="minor">
-            <a:schemeClr val="lt1"/>
-          </a:fontRef>
-        </p:style>
-        <p:txBody>
-          <a:bodyPr rtlCol="0" anchor="ctr"/>
-          <a:lstStyle/>
-          <a:p>
-            <a:pPr algn="ctr"/>
-          </a:p>
-        </p:txBody>
-      </p:sp>
-      <p:sp>
-        <p:nvSpPr>
-          <p:cNvPr id="32" name="TextBox 31"/>
-          <p:cNvSpPr txBox="1"/>
-          <p:nvPr/>
-        </p:nvSpPr>
-        <p:spPr>
-          <a:xfrm>
-            <a:off x="1371600" y="2697480"/>
-            <a:ext cx="3840480" cy="502920"/>
-          </a:xfrm>
-          <a:prstGeom prst="rect">
-            <a:avLst/>
-          </a:prstGeom>
-          <a:noFill/>
-        </p:spPr>
-        <p:txBody>
-          <a:bodyPr wrap="square" lIns="45720" rIns="45720" tIns="22860" bIns="22860" anchor="ctr">
-            <a:spAutoFit/>
-          </a:bodyPr>
-          <a:lstStyle/>
-          <a:p>
-            <a:pPr algn="l"/>
-            <a:r>
-              <a:rPr sz="1400" b="0">
-                <a:solidFill>
-                  <a:srgbClr val="333333"/>
-                </a:solidFill>
-                <a:latin typeface="Yu Gothic"/>
-              </a:rPr>
-              <a:t>面接時チェックシート</a:t>
-            </a:r>
-          </a:p>
-        </p:txBody>
-      </p:sp>
-      <p:sp>
-        <p:nvSpPr>
-          <p:cNvPr id="33" name="Rectangle 32"/>
-          <p:cNvSpPr/>
-          <p:nvPr/>
-        </p:nvSpPr>
-        <p:spPr>
-          <a:xfrm>
-            <a:off x="5212080" y="2697480"/>
-            <a:ext cx="1463040" cy="502920"/>
-          </a:xfrm>
-          <a:prstGeom prst="rect">
-            <a:avLst/>
-          </a:prstGeom>
-          <a:solidFill>
-            <a:srgbClr val="FFF6E0"/>
-          </a:solidFill>
-          <a:ln w="6350">
-            <a:solidFill>
-              <a:srgbClr val="DDDDDD"/>
-            </a:solidFill>
-          </a:ln>
-          <a:effectLst/>
-        </p:spPr>
-        <p:style>
-          <a:lnRef idx="1">
-            <a:schemeClr val="accent1"/>
-          </a:lnRef>
-          <a:fillRef idx="3">
-            <a:schemeClr val="accent1"/>
-          </a:fillRef>
-          <a:effectRef idx="2">
-            <a:schemeClr val="accent1"/>
-          </a:effectRef>
-          <a:fontRef idx="minor">
-            <a:schemeClr val="lt1"/>
-          </a:fontRef>
-        </p:style>
-        <p:txBody>
-          <a:bodyPr rtlCol="0" anchor="ctr"/>
-          <a:lstStyle/>
-          <a:p>
-            <a:pPr algn="ctr"/>
-          </a:p>
-        </p:txBody>
-      </p:sp>
-      <p:sp>
-        <p:nvSpPr>
-          <p:cNvPr id="34" name="TextBox 33"/>
-          <p:cNvSpPr txBox="1"/>
-          <p:nvPr/>
-        </p:nvSpPr>
-        <p:spPr>
-          <a:xfrm>
-            <a:off x="5212080" y="2697480"/>
-            <a:ext cx="1463040" cy="502920"/>
-          </a:xfrm>
-          <a:prstGeom prst="rect">
-            <a:avLst/>
-          </a:prstGeom>
-          <a:noFill/>
-        </p:spPr>
-        <p:txBody>
-          <a:bodyPr wrap="square" lIns="45720" rIns="45720" tIns="22860" bIns="22860" anchor="ctr">
-            <a:spAutoFit/>
-          </a:bodyPr>
-          <a:lstStyle/>
-          <a:p>
-            <a:pPr algn="ctr"/>
-            <a:r>
-              <a:rPr sz="1400" b="0">
-                <a:solidFill>
-                  <a:srgbClr val="333333"/>
-                </a:solidFill>
-                <a:latin typeface="Yu Gothic"/>
-              </a:rPr>
-              <a:t>元の形式</a:t>
-            </a:r>
-          </a:p>
-        </p:txBody>
-      </p:sp>
-      <p:sp>
-        <p:nvSpPr>
-          <p:cNvPr id="35" name="Rectangle 34"/>
-          <p:cNvSpPr/>
-          <p:nvPr/>
-        </p:nvSpPr>
-        <p:spPr>
-          <a:xfrm>
-            <a:off x="6675120" y="2697480"/>
-            <a:ext cx="4937760" cy="502920"/>
-          </a:xfrm>
-          <a:prstGeom prst="rect">
-            <a:avLst/>
-          </a:prstGeom>
-          <a:solidFill>
-            <a:srgbClr val="FFF6E0"/>
-          </a:solidFill>
-          <a:ln w="6350">
-            <a:solidFill>
-              <a:srgbClr val="DDDDDD"/>
-            </a:solidFill>
-          </a:ln>
-          <a:effectLst/>
-        </p:spPr>
-        <p:style>
-          <a:lnRef idx="1">
-            <a:schemeClr val="accent1"/>
-          </a:lnRef>
-          <a:fillRef idx="3">
-            <a:schemeClr val="accent1"/>
-          </a:fillRef>
-          <a:effectRef idx="2">
-            <a:schemeClr val="accent1"/>
-          </a:effectRef>
-          <a:fontRef idx="minor">
-            <a:schemeClr val="lt1"/>
-          </a:fontRef>
-        </p:style>
-        <p:txBody>
-          <a:bodyPr rtlCol="0" anchor="ctr"/>
-          <a:lstStyle/>
-          <a:p>
-            <a:pPr algn="ctr"/>
-          </a:p>
-        </p:txBody>
-      </p:sp>
-      <p:sp>
-        <p:nvSpPr>
-          <p:cNvPr id="36" name="TextBox 35"/>
-          <p:cNvSpPr txBox="1"/>
-          <p:nvPr/>
-        </p:nvSpPr>
-        <p:spPr>
-          <a:xfrm>
-            <a:off x="6675120" y="2697480"/>
-            <a:ext cx="4937760" cy="502920"/>
-          </a:xfrm>
-          <a:prstGeom prst="rect">
-            <a:avLst/>
-          </a:prstGeom>
-          <a:noFill/>
-        </p:spPr>
-        <p:txBody>
-          <a:bodyPr wrap="square" lIns="45720" rIns="45720" tIns="22860" bIns="22860" anchor="ctr">
-            <a:spAutoFit/>
-          </a:bodyPr>
-          <a:lstStyle/>
-          <a:p>
-            <a:pPr algn="l"/>
-            <a:r>
-              <a:rPr sz="1400" b="0">
-                <a:solidFill>
-                  <a:srgbClr val="333333"/>
-                </a:solidFill>
-                <a:latin typeface="Yu Gothic"/>
-              </a:rPr>
-              <a:t>2.1面接時チェックシート 氏名</a:t>
-            </a:r>
-          </a:p>
-        </p:txBody>
-      </p:sp>
-      <p:sp>
-        <p:nvSpPr>
-          <p:cNvPr id="37" name="Rectangle 36"/>
-          <p:cNvSpPr/>
-          <p:nvPr/>
-        </p:nvSpPr>
-        <p:spPr>
-          <a:xfrm>
-            <a:off x="548640" y="3200400"/>
-            <a:ext cx="822960" cy="502920"/>
+            <a:off x="6172200" y="3072383"/>
+            <a:ext cx="5577840" cy="347472"/>
           </a:xfrm>
           <a:prstGeom prst="rect">
             <a:avLst/>
@@ -6914,14 +8405,14 @@
       </p:sp>
       <p:sp>
         <p:nvSpPr>
-          <p:cNvPr id="38" name="TextBox 37"/>
-          <p:cNvSpPr txBox="1"/>
-          <p:nvPr/>
-        </p:nvSpPr>
-        <p:spPr>
-          <a:xfrm>
-            <a:off x="548640" y="3200400"/>
-            <a:ext cx="822960" cy="502920"/>
+          <p:cNvPr id="66" name="TextBox 65"/>
+          <p:cNvSpPr txBox="1"/>
+          <p:nvPr/>
+        </p:nvSpPr>
+        <p:spPr>
+          <a:xfrm>
+            <a:off x="6172200" y="3072383"/>
+            <a:ext cx="685800" cy="347472"/>
           </a:xfrm>
           <a:prstGeom prst="rect">
             <a:avLst/>
@@ -6936,27 +8427,478 @@
           <a:p>
             <a:pPr algn="ctr"/>
             <a:r>
-              <a:rPr sz="1400" b="1">
-                <a:solidFill>
-                  <a:srgbClr val="4FB6BE"/>
-                </a:solidFill>
-                <a:latin typeface="Yu Gothic"/>
-              </a:rPr>
-              <a:t>3.1</a:t>
-            </a:r>
-          </a:p>
-        </p:txBody>
-      </p:sp>
-      <p:sp>
-        <p:nvSpPr>
-          <p:cNvPr id="39" name="Rectangle 38"/>
+              <a:rPr sz="1200" b="1">
+                <a:solidFill>
+                  <a:srgbClr val="F29A3C"/>
+                </a:solidFill>
+                <a:latin typeface="Yu Gothic"/>
+              </a:rPr>
+              <a:t>5.2</a:t>
+            </a:r>
+          </a:p>
+        </p:txBody>
+      </p:sp>
+      <p:sp>
+        <p:nvSpPr>
+          <p:cNvPr id="67" name="TextBox 66"/>
+          <p:cNvSpPr txBox="1"/>
+          <p:nvPr/>
+        </p:nvSpPr>
+        <p:spPr>
+          <a:xfrm>
+            <a:off x="6858000" y="3072383"/>
+            <a:ext cx="3794759" cy="347472"/>
+          </a:xfrm>
+          <a:prstGeom prst="rect">
+            <a:avLst/>
+          </a:prstGeom>
+          <a:noFill/>
+        </p:spPr>
+        <p:txBody>
+          <a:bodyPr wrap="square" lIns="45720" rIns="45720" tIns="22860" bIns="22860" anchor="ctr">
+            <a:spAutoFit/>
+          </a:bodyPr>
+          <a:lstStyle/>
+          <a:p>
+            <a:pPr algn="l"/>
+            <a:r>
+              <a:rPr sz="1150" b="0">
+                <a:solidFill>
+                  <a:srgbClr val="333333"/>
+                </a:solidFill>
+                <a:latin typeface="Yu Gothic"/>
+              </a:rPr>
+              <a:t>自賠責</a:t>
+            </a:r>
+          </a:p>
+        </p:txBody>
+      </p:sp>
+      <p:sp>
+        <p:nvSpPr>
+          <p:cNvPr id="68" name="TextBox 67"/>
+          <p:cNvSpPr txBox="1"/>
+          <p:nvPr/>
+        </p:nvSpPr>
+        <p:spPr>
+          <a:xfrm>
+            <a:off x="10652760" y="3072383"/>
+            <a:ext cx="1051560" cy="347472"/>
+          </a:xfrm>
+          <a:prstGeom prst="rect">
+            <a:avLst/>
+          </a:prstGeom>
+          <a:noFill/>
+        </p:spPr>
+        <p:txBody>
+          <a:bodyPr wrap="square" lIns="45720" rIns="45720" tIns="22860" bIns="22860" anchor="ctr">
+            <a:spAutoFit/>
+          </a:bodyPr>
+          <a:lstStyle/>
+          <a:p>
+            <a:pPr algn="ctr"/>
+            <a:r>
+              <a:rPr sz="1100" b="1">
+                <a:solidFill>
+                  <a:srgbClr val="666666"/>
+                </a:solidFill>
+                <a:latin typeface="Yu Gothic"/>
+              </a:rPr>
+              <a:t>PDF</a:t>
+            </a:r>
+          </a:p>
+        </p:txBody>
+      </p:sp>
+      <p:sp>
+        <p:nvSpPr>
+          <p:cNvPr id="69" name="Rectangle 68"/>
           <p:cNvSpPr/>
           <p:nvPr/>
         </p:nvSpPr>
         <p:spPr>
           <a:xfrm>
-            <a:off x="1371600" y="3200400"/>
-            <a:ext cx="3840480" cy="502920"/>
+            <a:off x="6172200" y="3419855"/>
+            <a:ext cx="5577840" cy="347472"/>
+          </a:xfrm>
+          <a:prstGeom prst="rect">
+            <a:avLst/>
+          </a:prstGeom>
+          <a:solidFill>
+            <a:srgbClr val="F7F7F7"/>
+          </a:solidFill>
+          <a:ln w="6350">
+            <a:solidFill>
+              <a:srgbClr val="DDDDDD"/>
+            </a:solidFill>
+          </a:ln>
+          <a:effectLst/>
+        </p:spPr>
+        <p:style>
+          <a:lnRef idx="1">
+            <a:schemeClr val="accent1"/>
+          </a:lnRef>
+          <a:fillRef idx="3">
+            <a:schemeClr val="accent1"/>
+          </a:fillRef>
+          <a:effectRef idx="2">
+            <a:schemeClr val="accent1"/>
+          </a:effectRef>
+          <a:fontRef idx="minor">
+            <a:schemeClr val="lt1"/>
+          </a:fontRef>
+        </p:style>
+        <p:txBody>
+          <a:bodyPr rtlCol="0" anchor="ctr"/>
+          <a:lstStyle/>
+          <a:p>
+            <a:pPr algn="ctr"/>
+          </a:p>
+        </p:txBody>
+      </p:sp>
+      <p:sp>
+        <p:nvSpPr>
+          <p:cNvPr id="70" name="TextBox 69"/>
+          <p:cNvSpPr txBox="1"/>
+          <p:nvPr/>
+        </p:nvSpPr>
+        <p:spPr>
+          <a:xfrm>
+            <a:off x="6172200" y="3419855"/>
+            <a:ext cx="685800" cy="347472"/>
+          </a:xfrm>
+          <a:prstGeom prst="rect">
+            <a:avLst/>
+          </a:prstGeom>
+          <a:noFill/>
+        </p:spPr>
+        <p:txBody>
+          <a:bodyPr wrap="square" lIns="45720" rIns="45720" tIns="22860" bIns="22860" anchor="ctr">
+            <a:spAutoFit/>
+          </a:bodyPr>
+          <a:lstStyle/>
+          <a:p>
+            <a:pPr algn="ctr"/>
+            <a:r>
+              <a:rPr sz="1200" b="1">
+                <a:solidFill>
+                  <a:srgbClr val="F29A3C"/>
+                </a:solidFill>
+                <a:latin typeface="Yu Gothic"/>
+              </a:rPr>
+              <a:t>5.3</a:t>
+            </a:r>
+          </a:p>
+        </p:txBody>
+      </p:sp>
+      <p:sp>
+        <p:nvSpPr>
+          <p:cNvPr id="71" name="TextBox 70"/>
+          <p:cNvSpPr txBox="1"/>
+          <p:nvPr/>
+        </p:nvSpPr>
+        <p:spPr>
+          <a:xfrm>
+            <a:off x="6858000" y="3419855"/>
+            <a:ext cx="3794759" cy="347472"/>
+          </a:xfrm>
+          <a:prstGeom prst="rect">
+            <a:avLst/>
+          </a:prstGeom>
+          <a:noFill/>
+        </p:spPr>
+        <p:txBody>
+          <a:bodyPr wrap="square" lIns="45720" rIns="45720" tIns="22860" bIns="22860" anchor="ctr">
+            <a:spAutoFit/>
+          </a:bodyPr>
+          <a:lstStyle/>
+          <a:p>
+            <a:pPr algn="l"/>
+            <a:r>
+              <a:rPr sz="1150" b="0">
+                <a:solidFill>
+                  <a:srgbClr val="333333"/>
+                </a:solidFill>
+                <a:latin typeface="Yu Gothic"/>
+              </a:rPr>
+              <a:t>任意保険（対人対物無制限）</a:t>
+            </a:r>
+          </a:p>
+        </p:txBody>
+      </p:sp>
+      <p:sp>
+        <p:nvSpPr>
+          <p:cNvPr id="72" name="TextBox 71"/>
+          <p:cNvSpPr txBox="1"/>
+          <p:nvPr/>
+        </p:nvSpPr>
+        <p:spPr>
+          <a:xfrm>
+            <a:off x="10652760" y="3419855"/>
+            <a:ext cx="1051560" cy="347472"/>
+          </a:xfrm>
+          <a:prstGeom prst="rect">
+            <a:avLst/>
+          </a:prstGeom>
+          <a:noFill/>
+        </p:spPr>
+        <p:txBody>
+          <a:bodyPr wrap="square" lIns="45720" rIns="45720" tIns="22860" bIns="22860" anchor="ctr">
+            <a:spAutoFit/>
+          </a:bodyPr>
+          <a:lstStyle/>
+          <a:p>
+            <a:pPr algn="ctr"/>
+            <a:r>
+              <a:rPr sz="1100" b="1">
+                <a:solidFill>
+                  <a:srgbClr val="666666"/>
+                </a:solidFill>
+                <a:latin typeface="Yu Gothic"/>
+              </a:rPr>
+              <a:t>PDF</a:t>
+            </a:r>
+          </a:p>
+        </p:txBody>
+      </p:sp>
+      <p:sp>
+        <p:nvSpPr>
+          <p:cNvPr id="73" name="Rectangle 72"/>
+          <p:cNvSpPr/>
+          <p:nvPr/>
+        </p:nvSpPr>
+        <p:spPr>
+          <a:xfrm>
+            <a:off x="6172200" y="3858767"/>
+            <a:ext cx="5577840" cy="329184"/>
+          </a:xfrm>
+          <a:prstGeom prst="rect">
+            <a:avLst/>
+          </a:prstGeom>
+          <a:solidFill>
+            <a:srgbClr val="F29A3C"/>
+          </a:solidFill>
+          <a:ln>
+            <a:noFill/>
+          </a:ln>
+          <a:effectLst/>
+        </p:spPr>
+        <p:style>
+          <a:lnRef idx="1">
+            <a:schemeClr val="accent1"/>
+          </a:lnRef>
+          <a:fillRef idx="3">
+            <a:schemeClr val="accent1"/>
+          </a:fillRef>
+          <a:effectRef idx="2">
+            <a:schemeClr val="accent1"/>
+          </a:effectRef>
+          <a:fontRef idx="minor">
+            <a:schemeClr val="lt1"/>
+          </a:fontRef>
+        </p:style>
+        <p:txBody>
+          <a:bodyPr rtlCol="0" anchor="ctr"/>
+          <a:lstStyle/>
+          <a:p>
+            <a:pPr algn="ctr"/>
+          </a:p>
+        </p:txBody>
+      </p:sp>
+      <p:sp>
+        <p:nvSpPr>
+          <p:cNvPr id="74" name="TextBox 73"/>
+          <p:cNvSpPr txBox="1"/>
+          <p:nvPr/>
+        </p:nvSpPr>
+        <p:spPr>
+          <a:xfrm>
+            <a:off x="6217920" y="3858767"/>
+            <a:ext cx="5486400" cy="329184"/>
+          </a:xfrm>
+          <a:prstGeom prst="rect">
+            <a:avLst/>
+          </a:prstGeom>
+          <a:noFill/>
+        </p:spPr>
+        <p:txBody>
+          <a:bodyPr wrap="square" lIns="45720" rIns="45720" tIns="22860" bIns="22860" anchor="ctr">
+            <a:spAutoFit/>
+          </a:bodyPr>
+          <a:lstStyle/>
+          <a:p>
+            <a:pPr algn="l"/>
+            <a:r>
+              <a:rPr sz="1200" b="1">
+                <a:solidFill>
+                  <a:srgbClr val="FFFFFF"/>
+                </a:solidFill>
+                <a:latin typeface="Yu Gothic"/>
+              </a:rPr>
+              <a:t>6.W-FINANCEリース車両契約者　オレンジ＝該当者のみ</a:t>
+            </a:r>
+          </a:p>
+        </p:txBody>
+      </p:sp>
+      <p:sp>
+        <p:nvSpPr>
+          <p:cNvPr id="75" name="Rectangle 74"/>
+          <p:cNvSpPr/>
+          <p:nvPr/>
+        </p:nvSpPr>
+        <p:spPr>
+          <a:xfrm>
+            <a:off x="6172200" y="4187951"/>
+            <a:ext cx="5577840" cy="347472"/>
+          </a:xfrm>
+          <a:prstGeom prst="rect">
+            <a:avLst/>
+          </a:prstGeom>
+          <a:solidFill>
+            <a:srgbClr val="F7F7F7"/>
+          </a:solidFill>
+          <a:ln w="6350">
+            <a:solidFill>
+              <a:srgbClr val="DDDDDD"/>
+            </a:solidFill>
+          </a:ln>
+          <a:effectLst/>
+        </p:spPr>
+        <p:style>
+          <a:lnRef idx="1">
+            <a:schemeClr val="accent1"/>
+          </a:lnRef>
+          <a:fillRef idx="3">
+            <a:schemeClr val="accent1"/>
+          </a:fillRef>
+          <a:effectRef idx="2">
+            <a:schemeClr val="accent1"/>
+          </a:effectRef>
+          <a:fontRef idx="minor">
+            <a:schemeClr val="lt1"/>
+          </a:fontRef>
+        </p:style>
+        <p:txBody>
+          <a:bodyPr rtlCol="0" anchor="ctr"/>
+          <a:lstStyle/>
+          <a:p>
+            <a:pPr algn="ctr"/>
+          </a:p>
+        </p:txBody>
+      </p:sp>
+      <p:sp>
+        <p:nvSpPr>
+          <p:cNvPr id="76" name="TextBox 75"/>
+          <p:cNvSpPr txBox="1"/>
+          <p:nvPr/>
+        </p:nvSpPr>
+        <p:spPr>
+          <a:xfrm>
+            <a:off x="6172200" y="4187951"/>
+            <a:ext cx="685800" cy="347472"/>
+          </a:xfrm>
+          <a:prstGeom prst="rect">
+            <a:avLst/>
+          </a:prstGeom>
+          <a:noFill/>
+        </p:spPr>
+        <p:txBody>
+          <a:bodyPr wrap="square" lIns="45720" rIns="45720" tIns="22860" bIns="22860" anchor="ctr">
+            <a:spAutoFit/>
+          </a:bodyPr>
+          <a:lstStyle/>
+          <a:p>
+            <a:pPr algn="ctr"/>
+            <a:r>
+              <a:rPr sz="1200" b="1">
+                <a:solidFill>
+                  <a:srgbClr val="F29A3C"/>
+                </a:solidFill>
+                <a:latin typeface="Yu Gothic"/>
+              </a:rPr>
+              <a:t>6.1</a:t>
+            </a:r>
+          </a:p>
+        </p:txBody>
+      </p:sp>
+      <p:sp>
+        <p:nvSpPr>
+          <p:cNvPr id="77" name="TextBox 76"/>
+          <p:cNvSpPr txBox="1"/>
+          <p:nvPr/>
+        </p:nvSpPr>
+        <p:spPr>
+          <a:xfrm>
+            <a:off x="6858000" y="4187951"/>
+            <a:ext cx="3794759" cy="347472"/>
+          </a:xfrm>
+          <a:prstGeom prst="rect">
+            <a:avLst/>
+          </a:prstGeom>
+          <a:noFill/>
+        </p:spPr>
+        <p:txBody>
+          <a:bodyPr wrap="square" lIns="45720" rIns="45720" tIns="22860" bIns="22860" anchor="ctr">
+            <a:spAutoFit/>
+          </a:bodyPr>
+          <a:lstStyle/>
+          <a:p>
+            <a:pPr algn="l"/>
+            <a:r>
+              <a:rPr sz="1150" b="0">
+                <a:solidFill>
+                  <a:srgbClr val="333333"/>
+                </a:solidFill>
+                <a:latin typeface="Yu Gothic"/>
+              </a:rPr>
+              <a:t>リース車に関する契約書（登録チーム格納）</a:t>
+            </a:r>
+          </a:p>
+        </p:txBody>
+      </p:sp>
+      <p:sp>
+        <p:nvSpPr>
+          <p:cNvPr id="78" name="TextBox 77"/>
+          <p:cNvSpPr txBox="1"/>
+          <p:nvPr/>
+        </p:nvSpPr>
+        <p:spPr>
+          <a:xfrm>
+            <a:off x="10652760" y="4187951"/>
+            <a:ext cx="1051560" cy="347472"/>
+          </a:xfrm>
+          <a:prstGeom prst="rect">
+            <a:avLst/>
+          </a:prstGeom>
+          <a:noFill/>
+        </p:spPr>
+        <p:txBody>
+          <a:bodyPr wrap="square" lIns="45720" rIns="45720" tIns="22860" bIns="22860" anchor="ctr">
+            <a:spAutoFit/>
+          </a:bodyPr>
+          <a:lstStyle/>
+          <a:p>
+            <a:pPr algn="ctr"/>
+            <a:r>
+              <a:rPr sz="1100" b="1">
+                <a:solidFill>
+                  <a:srgbClr val="666666"/>
+                </a:solidFill>
+                <a:latin typeface="Yu Gothic"/>
+              </a:rPr>
+              <a:t>PDF</a:t>
+            </a:r>
+          </a:p>
+        </p:txBody>
+      </p:sp>
+      <p:sp>
+        <p:nvSpPr>
+          <p:cNvPr id="79" name="Rectangle 78"/>
+          <p:cNvSpPr/>
+          <p:nvPr/>
+        </p:nvSpPr>
+        <p:spPr>
+          <a:xfrm>
+            <a:off x="6172200" y="4535423"/>
+            <a:ext cx="5577840" cy="347472"/>
           </a:xfrm>
           <a:prstGeom prst="rect">
             <a:avLst/>
@@ -6995,14 +8937,14 @@
       </p:sp>
       <p:sp>
         <p:nvSpPr>
-          <p:cNvPr id="40" name="TextBox 39"/>
-          <p:cNvSpPr txBox="1"/>
-          <p:nvPr/>
-        </p:nvSpPr>
-        <p:spPr>
-          <a:xfrm>
-            <a:off x="1371600" y="3200400"/>
-            <a:ext cx="3840480" cy="502920"/>
+          <p:cNvPr id="80" name="TextBox 79"/>
+          <p:cNvSpPr txBox="1"/>
+          <p:nvPr/>
+        </p:nvSpPr>
+        <p:spPr>
+          <a:xfrm>
+            <a:off x="6172200" y="4535423"/>
+            <a:ext cx="685800" cy="347472"/>
           </a:xfrm>
           <a:prstGeom prst="rect">
             <a:avLst/>
@@ -7015,35 +8957,105 @@
           </a:bodyPr>
           <a:lstStyle/>
           <a:p>
+            <a:pPr algn="ctr"/>
+            <a:r>
+              <a:rPr sz="1200" b="1">
+                <a:solidFill>
+                  <a:srgbClr val="F29A3C"/>
+                </a:solidFill>
+                <a:latin typeface="Yu Gothic"/>
+              </a:rPr>
+              <a:t>6.2</a:t>
+            </a:r>
+          </a:p>
+        </p:txBody>
+      </p:sp>
+      <p:sp>
+        <p:nvSpPr>
+          <p:cNvPr id="81" name="TextBox 80"/>
+          <p:cNvSpPr txBox="1"/>
+          <p:nvPr/>
+        </p:nvSpPr>
+        <p:spPr>
+          <a:xfrm>
+            <a:off x="6858000" y="4535423"/>
+            <a:ext cx="3794759" cy="347472"/>
+          </a:xfrm>
+          <a:prstGeom prst="rect">
+            <a:avLst/>
+          </a:prstGeom>
+          <a:noFill/>
+        </p:spPr>
+        <p:txBody>
+          <a:bodyPr wrap="square" lIns="45720" rIns="45720" tIns="22860" bIns="22860" anchor="ctr">
+            <a:spAutoFit/>
+          </a:bodyPr>
+          <a:lstStyle/>
+          <a:p>
             <a:pPr algn="l"/>
             <a:r>
-              <a:rPr sz="1400" b="0">
+              <a:rPr sz="1150" b="0">
                 <a:solidFill>
                   <a:srgbClr val="333333"/>
                 </a:solidFill>
                 <a:latin typeface="Yu Gothic"/>
               </a:rPr>
-              <a:t>クラウドサイン</a:t>
-            </a:r>
-          </a:p>
-        </p:txBody>
-      </p:sp>
-      <p:sp>
-        <p:nvSpPr>
-          <p:cNvPr id="41" name="Rectangle 40"/>
+              <a:t>住民票</a:t>
+            </a:r>
+          </a:p>
+        </p:txBody>
+      </p:sp>
+      <p:sp>
+        <p:nvSpPr>
+          <p:cNvPr id="82" name="TextBox 81"/>
+          <p:cNvSpPr txBox="1"/>
+          <p:nvPr/>
+        </p:nvSpPr>
+        <p:spPr>
+          <a:xfrm>
+            <a:off x="10652760" y="4535423"/>
+            <a:ext cx="1051560" cy="347472"/>
+          </a:xfrm>
+          <a:prstGeom prst="rect">
+            <a:avLst/>
+          </a:prstGeom>
+          <a:noFill/>
+        </p:spPr>
+        <p:txBody>
+          <a:bodyPr wrap="square" lIns="45720" rIns="45720" tIns="22860" bIns="22860" anchor="ctr">
+            <a:spAutoFit/>
+          </a:bodyPr>
+          <a:lstStyle/>
+          <a:p>
+            <a:pPr algn="ctr"/>
+            <a:r>
+              <a:rPr sz="1100" b="1">
+                <a:solidFill>
+                  <a:srgbClr val="666666"/>
+                </a:solidFill>
+                <a:latin typeface="Yu Gothic"/>
+              </a:rPr>
+              <a:t>PDF</a:t>
+            </a:r>
+          </a:p>
+        </p:txBody>
+      </p:sp>
+      <p:sp>
+        <p:nvSpPr>
+          <p:cNvPr id="83" name="Rectangle 82"/>
           <p:cNvSpPr/>
           <p:nvPr/>
         </p:nvSpPr>
         <p:spPr>
           <a:xfrm>
-            <a:off x="5212080" y="3200400"/>
-            <a:ext cx="1463040" cy="502920"/>
+            <a:off x="6172200" y="4882895"/>
+            <a:ext cx="5577840" cy="347472"/>
           </a:xfrm>
           <a:prstGeom prst="rect">
             <a:avLst/>
           </a:prstGeom>
           <a:solidFill>
-            <a:srgbClr val="FFFFFF"/>
+            <a:srgbClr val="F7F7F7"/>
           </a:solidFill>
           <a:ln w="6350">
             <a:solidFill>
@@ -7076,14 +9088,14 @@
       </p:sp>
       <p:sp>
         <p:nvSpPr>
-          <p:cNvPr id="42" name="TextBox 41"/>
-          <p:cNvSpPr txBox="1"/>
-          <p:nvPr/>
-        </p:nvSpPr>
-        <p:spPr>
-          <a:xfrm>
-            <a:off x="5212080" y="3200400"/>
-            <a:ext cx="1463040" cy="502920"/>
+          <p:cNvPr id="84" name="TextBox 83"/>
+          <p:cNvSpPr txBox="1"/>
+          <p:nvPr/>
+        </p:nvSpPr>
+        <p:spPr>
+          <a:xfrm>
+            <a:off x="6172200" y="4882895"/>
+            <a:ext cx="685800" cy="347472"/>
           </a:xfrm>
           <a:prstGeom prst="rect">
             <a:avLst/>
@@ -7098,12 +9110,82 @@
           <a:p>
             <a:pPr algn="ctr"/>
             <a:r>
-              <a:rPr sz="1400" b="0">
+              <a:rPr sz="1200" b="1">
+                <a:solidFill>
+                  <a:srgbClr val="F29A3C"/>
+                </a:solidFill>
+                <a:latin typeface="Yu Gothic"/>
+              </a:rPr>
+              <a:t>6.3</a:t>
+            </a:r>
+          </a:p>
+        </p:txBody>
+      </p:sp>
+      <p:sp>
+        <p:nvSpPr>
+          <p:cNvPr id="85" name="TextBox 84"/>
+          <p:cNvSpPr txBox="1"/>
+          <p:nvPr/>
+        </p:nvSpPr>
+        <p:spPr>
+          <a:xfrm>
+            <a:off x="6858000" y="4882895"/>
+            <a:ext cx="3794759" cy="347472"/>
+          </a:xfrm>
+          <a:prstGeom prst="rect">
+            <a:avLst/>
+          </a:prstGeom>
+          <a:noFill/>
+        </p:spPr>
+        <p:txBody>
+          <a:bodyPr wrap="square" lIns="45720" rIns="45720" tIns="22860" bIns="22860" anchor="ctr">
+            <a:spAutoFit/>
+          </a:bodyPr>
+          <a:lstStyle/>
+          <a:p>
+            <a:pPr algn="l"/>
+            <a:r>
+              <a:rPr sz="1150" b="0">
                 <a:solidFill>
                   <a:srgbClr val="333333"/>
                 </a:solidFill>
                 <a:latin typeface="Yu Gothic"/>
               </a:rPr>
+              <a:t>安全管理者講習修了書</a:t>
+            </a:r>
+          </a:p>
+        </p:txBody>
+      </p:sp>
+      <p:sp>
+        <p:nvSpPr>
+          <p:cNvPr id="86" name="TextBox 85"/>
+          <p:cNvSpPr txBox="1"/>
+          <p:nvPr/>
+        </p:nvSpPr>
+        <p:spPr>
+          <a:xfrm>
+            <a:off x="10652760" y="4882895"/>
+            <a:ext cx="1051560" cy="347472"/>
+          </a:xfrm>
+          <a:prstGeom prst="rect">
+            <a:avLst/>
+          </a:prstGeom>
+          <a:noFill/>
+        </p:spPr>
+        <p:txBody>
+          <a:bodyPr wrap="square" lIns="45720" rIns="45720" tIns="22860" bIns="22860" anchor="ctr">
+            <a:spAutoFit/>
+          </a:bodyPr>
+          <a:lstStyle/>
+          <a:p>
+            <a:pPr algn="ctr"/>
+            <a:r>
+              <a:rPr sz="1100" b="1">
+                <a:solidFill>
+                  <a:srgbClr val="666666"/>
+                </a:solidFill>
+                <a:latin typeface="Yu Gothic"/>
+              </a:rPr>
               <a:t>PDF</a:t>
             </a:r>
           </a:p>
@@ -7111,1067 +9193,14 @@
       </p:sp>
       <p:sp>
         <p:nvSpPr>
-          <p:cNvPr id="43" name="Rectangle 42"/>
+          <p:cNvPr id="87" name="Rounded Rectangle 86"/>
           <p:cNvSpPr/>
           <p:nvPr/>
         </p:nvSpPr>
         <p:spPr>
           <a:xfrm>
-            <a:off x="6675120" y="3200400"/>
-            <a:ext cx="4937760" cy="502920"/>
-          </a:xfrm>
-          <a:prstGeom prst="rect">
-            <a:avLst/>
-          </a:prstGeom>
-          <a:solidFill>
-            <a:srgbClr val="FFFFFF"/>
-          </a:solidFill>
-          <a:ln w="6350">
-            <a:solidFill>
-              <a:srgbClr val="DDDDDD"/>
-            </a:solidFill>
-          </a:ln>
-          <a:effectLst/>
-        </p:spPr>
-        <p:style>
-          <a:lnRef idx="1">
-            <a:schemeClr val="accent1"/>
-          </a:lnRef>
-          <a:fillRef idx="3">
-            <a:schemeClr val="accent1"/>
-          </a:fillRef>
-          <a:effectRef idx="2">
-            <a:schemeClr val="accent1"/>
-          </a:effectRef>
-          <a:fontRef idx="minor">
-            <a:schemeClr val="lt1"/>
-          </a:fontRef>
-        </p:style>
-        <p:txBody>
-          <a:bodyPr rtlCol="0" anchor="ctr"/>
-          <a:lstStyle/>
-          <a:p>
-            <a:pPr algn="ctr"/>
-          </a:p>
-        </p:txBody>
-      </p:sp>
-      <p:sp>
-        <p:nvSpPr>
-          <p:cNvPr id="44" name="TextBox 43"/>
-          <p:cNvSpPr txBox="1"/>
-          <p:nvPr/>
-        </p:nvSpPr>
-        <p:spPr>
-          <a:xfrm>
-            <a:off x="6675120" y="3200400"/>
-            <a:ext cx="4937760" cy="502920"/>
-          </a:xfrm>
-          <a:prstGeom prst="rect">
-            <a:avLst/>
-          </a:prstGeom>
-          <a:noFill/>
-        </p:spPr>
-        <p:txBody>
-          <a:bodyPr wrap="square" lIns="45720" rIns="45720" tIns="22860" bIns="22860" anchor="ctr">
-            <a:spAutoFit/>
-          </a:bodyPr>
-          <a:lstStyle/>
-          <a:p>
-            <a:pPr algn="l"/>
-            <a:r>
-              <a:rPr sz="1400" b="0">
-                <a:solidFill>
-                  <a:srgbClr val="333333"/>
-                </a:solidFill>
-                <a:latin typeface="Yu Gothic"/>
-              </a:rPr>
-              <a:t>3.1＋クラウドサインの名前</a:t>
-            </a:r>
-          </a:p>
-        </p:txBody>
-      </p:sp>
-      <p:sp>
-        <p:nvSpPr>
-          <p:cNvPr id="45" name="Rectangle 44"/>
-          <p:cNvSpPr/>
-          <p:nvPr/>
-        </p:nvSpPr>
-        <p:spPr>
-          <a:xfrm>
-            <a:off x="548640" y="3703320"/>
-            <a:ext cx="822960" cy="502920"/>
-          </a:xfrm>
-          <a:prstGeom prst="rect">
-            <a:avLst/>
-          </a:prstGeom>
-          <a:solidFill>
-            <a:srgbClr val="F6FBFC"/>
-          </a:solidFill>
-          <a:ln w="6350">
-            <a:solidFill>
-              <a:srgbClr val="DDDDDD"/>
-            </a:solidFill>
-          </a:ln>
-          <a:effectLst/>
-        </p:spPr>
-        <p:style>
-          <a:lnRef idx="1">
-            <a:schemeClr val="accent1"/>
-          </a:lnRef>
-          <a:fillRef idx="3">
-            <a:schemeClr val="accent1"/>
-          </a:fillRef>
-          <a:effectRef idx="2">
-            <a:schemeClr val="accent1"/>
-          </a:effectRef>
-          <a:fontRef idx="minor">
-            <a:schemeClr val="lt1"/>
-          </a:fontRef>
-        </p:style>
-        <p:txBody>
-          <a:bodyPr rtlCol="0" anchor="ctr"/>
-          <a:lstStyle/>
-          <a:p>
-            <a:pPr algn="ctr"/>
-          </a:p>
-        </p:txBody>
-      </p:sp>
-      <p:sp>
-        <p:nvSpPr>
-          <p:cNvPr id="46" name="TextBox 45"/>
-          <p:cNvSpPr txBox="1"/>
-          <p:nvPr/>
-        </p:nvSpPr>
-        <p:spPr>
-          <a:xfrm>
-            <a:off x="548640" y="3703320"/>
-            <a:ext cx="822960" cy="502920"/>
-          </a:xfrm>
-          <a:prstGeom prst="rect">
-            <a:avLst/>
-          </a:prstGeom>
-          <a:noFill/>
-        </p:spPr>
-        <p:txBody>
-          <a:bodyPr wrap="square" lIns="45720" rIns="45720" tIns="22860" bIns="22860" anchor="ctr">
-            <a:spAutoFit/>
-          </a:bodyPr>
-          <a:lstStyle/>
-          <a:p>
-            <a:pPr algn="ctr"/>
-            <a:r>
-              <a:rPr sz="1400" b="1">
-                <a:solidFill>
-                  <a:srgbClr val="4FB6BE"/>
-                </a:solidFill>
-                <a:latin typeface="Yu Gothic"/>
-              </a:rPr>
-              <a:t>3.2</a:t>
-            </a:r>
-          </a:p>
-        </p:txBody>
-      </p:sp>
-      <p:sp>
-        <p:nvSpPr>
-          <p:cNvPr id="47" name="Rectangle 46"/>
-          <p:cNvSpPr/>
-          <p:nvPr/>
-        </p:nvSpPr>
-        <p:spPr>
-          <a:xfrm>
-            <a:off x="1371600" y="3703320"/>
-            <a:ext cx="3840480" cy="502920"/>
-          </a:xfrm>
-          <a:prstGeom prst="rect">
-            <a:avLst/>
-          </a:prstGeom>
-          <a:solidFill>
-            <a:srgbClr val="F6FBFC"/>
-          </a:solidFill>
-          <a:ln w="6350">
-            <a:solidFill>
-              <a:srgbClr val="DDDDDD"/>
-            </a:solidFill>
-          </a:ln>
-          <a:effectLst/>
-        </p:spPr>
-        <p:style>
-          <a:lnRef idx="1">
-            <a:schemeClr val="accent1"/>
-          </a:lnRef>
-          <a:fillRef idx="3">
-            <a:schemeClr val="accent1"/>
-          </a:fillRef>
-          <a:effectRef idx="2">
-            <a:schemeClr val="accent1"/>
-          </a:effectRef>
-          <a:fontRef idx="minor">
-            <a:schemeClr val="lt1"/>
-          </a:fontRef>
-        </p:style>
-        <p:txBody>
-          <a:bodyPr rtlCol="0" anchor="ctr"/>
-          <a:lstStyle/>
-          <a:p>
-            <a:pPr algn="ctr"/>
-          </a:p>
-        </p:txBody>
-      </p:sp>
-      <p:sp>
-        <p:nvSpPr>
-          <p:cNvPr id="48" name="TextBox 47"/>
-          <p:cNvSpPr txBox="1"/>
-          <p:nvPr/>
-        </p:nvSpPr>
-        <p:spPr>
-          <a:xfrm>
-            <a:off x="1371600" y="3703320"/>
-            <a:ext cx="3840480" cy="502920"/>
-          </a:xfrm>
-          <a:prstGeom prst="rect">
-            <a:avLst/>
-          </a:prstGeom>
-          <a:noFill/>
-        </p:spPr>
-        <p:txBody>
-          <a:bodyPr wrap="square" lIns="45720" rIns="45720" tIns="22860" bIns="22860" anchor="ctr">
-            <a:spAutoFit/>
-          </a:bodyPr>
-          <a:lstStyle/>
-          <a:p>
-            <a:pPr algn="l"/>
-            <a:r>
-              <a:rPr sz="1400" b="0">
-                <a:solidFill>
-                  <a:srgbClr val="333333"/>
-                </a:solidFill>
-                <a:latin typeface="Yu Gothic"/>
-              </a:rPr>
-              <a:t>免許証（両面）</a:t>
-            </a:r>
-          </a:p>
-        </p:txBody>
-      </p:sp>
-      <p:sp>
-        <p:nvSpPr>
-          <p:cNvPr id="49" name="Rectangle 48"/>
-          <p:cNvSpPr/>
-          <p:nvPr/>
-        </p:nvSpPr>
-        <p:spPr>
-          <a:xfrm>
-            <a:off x="5212080" y="3703320"/>
-            <a:ext cx="1463040" cy="502920"/>
-          </a:xfrm>
-          <a:prstGeom prst="rect">
-            <a:avLst/>
-          </a:prstGeom>
-          <a:solidFill>
-            <a:srgbClr val="F6FBFC"/>
-          </a:solidFill>
-          <a:ln w="6350">
-            <a:solidFill>
-              <a:srgbClr val="DDDDDD"/>
-            </a:solidFill>
-          </a:ln>
-          <a:effectLst/>
-        </p:spPr>
-        <p:style>
-          <a:lnRef idx="1">
-            <a:schemeClr val="accent1"/>
-          </a:lnRef>
-          <a:fillRef idx="3">
-            <a:schemeClr val="accent1"/>
-          </a:fillRef>
-          <a:effectRef idx="2">
-            <a:schemeClr val="accent1"/>
-          </a:effectRef>
-          <a:fontRef idx="minor">
-            <a:schemeClr val="lt1"/>
-          </a:fontRef>
-        </p:style>
-        <p:txBody>
-          <a:bodyPr rtlCol="0" anchor="ctr"/>
-          <a:lstStyle/>
-          <a:p>
-            <a:pPr algn="ctr"/>
-          </a:p>
-        </p:txBody>
-      </p:sp>
-      <p:sp>
-        <p:nvSpPr>
-          <p:cNvPr id="50" name="TextBox 49"/>
-          <p:cNvSpPr txBox="1"/>
-          <p:nvPr/>
-        </p:nvSpPr>
-        <p:spPr>
-          <a:xfrm>
-            <a:off x="5212080" y="3703320"/>
-            <a:ext cx="1463040" cy="502920"/>
-          </a:xfrm>
-          <a:prstGeom prst="rect">
-            <a:avLst/>
-          </a:prstGeom>
-          <a:noFill/>
-        </p:spPr>
-        <p:txBody>
-          <a:bodyPr wrap="square" lIns="45720" rIns="45720" tIns="22860" bIns="22860" anchor="ctr">
-            <a:spAutoFit/>
-          </a:bodyPr>
-          <a:lstStyle/>
-          <a:p>
-            <a:pPr algn="ctr"/>
-            <a:r>
-              <a:rPr sz="1400" b="0">
-                <a:solidFill>
-                  <a:srgbClr val="333333"/>
-                </a:solidFill>
-                <a:latin typeface="Yu Gothic"/>
-              </a:rPr>
-              <a:t>PDF</a:t>
-            </a:r>
-          </a:p>
-        </p:txBody>
-      </p:sp>
-      <p:sp>
-        <p:nvSpPr>
-          <p:cNvPr id="51" name="Rectangle 50"/>
-          <p:cNvSpPr/>
-          <p:nvPr/>
-        </p:nvSpPr>
-        <p:spPr>
-          <a:xfrm>
-            <a:off x="6675120" y="3703320"/>
-            <a:ext cx="4937760" cy="502920"/>
-          </a:xfrm>
-          <a:prstGeom prst="rect">
-            <a:avLst/>
-          </a:prstGeom>
-          <a:solidFill>
-            <a:srgbClr val="F6FBFC"/>
-          </a:solidFill>
-          <a:ln w="6350">
-            <a:solidFill>
-              <a:srgbClr val="DDDDDD"/>
-            </a:solidFill>
-          </a:ln>
-          <a:effectLst/>
-        </p:spPr>
-        <p:style>
-          <a:lnRef idx="1">
-            <a:schemeClr val="accent1"/>
-          </a:lnRef>
-          <a:fillRef idx="3">
-            <a:schemeClr val="accent1"/>
-          </a:fillRef>
-          <a:effectRef idx="2">
-            <a:schemeClr val="accent1"/>
-          </a:effectRef>
-          <a:fontRef idx="minor">
-            <a:schemeClr val="lt1"/>
-          </a:fontRef>
-        </p:style>
-        <p:txBody>
-          <a:bodyPr rtlCol="0" anchor="ctr"/>
-          <a:lstStyle/>
-          <a:p>
-            <a:pPr algn="ctr"/>
-          </a:p>
-        </p:txBody>
-      </p:sp>
-      <p:sp>
-        <p:nvSpPr>
-          <p:cNvPr id="52" name="TextBox 51"/>
-          <p:cNvSpPr txBox="1"/>
-          <p:nvPr/>
-        </p:nvSpPr>
-        <p:spPr>
-          <a:xfrm>
-            <a:off x="6675120" y="3703320"/>
-            <a:ext cx="4937760" cy="502920"/>
-          </a:xfrm>
-          <a:prstGeom prst="rect">
-            <a:avLst/>
-          </a:prstGeom>
-          <a:noFill/>
-        </p:spPr>
-        <p:txBody>
-          <a:bodyPr wrap="square" lIns="45720" rIns="45720" tIns="22860" bIns="22860" anchor="ctr">
-            <a:spAutoFit/>
-          </a:bodyPr>
-          <a:lstStyle/>
-          <a:p>
-            <a:pPr algn="l"/>
-            <a:r>
-              <a:rPr sz="1400" b="0">
-                <a:solidFill>
-                  <a:srgbClr val="333333"/>
-                </a:solidFill>
-                <a:latin typeface="Yu Gothic"/>
-              </a:rPr>
-              <a:t>3.2免許証（両面）氏名.pdf</a:t>
-            </a:r>
-          </a:p>
-        </p:txBody>
-      </p:sp>
-      <p:sp>
-        <p:nvSpPr>
-          <p:cNvPr id="53" name="Rectangle 52"/>
-          <p:cNvSpPr/>
-          <p:nvPr/>
-        </p:nvSpPr>
-        <p:spPr>
-          <a:xfrm>
-            <a:off x="548640" y="4206240"/>
-            <a:ext cx="822960" cy="502920"/>
-          </a:xfrm>
-          <a:prstGeom prst="rect">
-            <a:avLst/>
-          </a:prstGeom>
-          <a:solidFill>
-            <a:srgbClr val="FFF6E0"/>
-          </a:solidFill>
-          <a:ln w="6350">
-            <a:solidFill>
-              <a:srgbClr val="DDDDDD"/>
-            </a:solidFill>
-          </a:ln>
-          <a:effectLst/>
-        </p:spPr>
-        <p:style>
-          <a:lnRef idx="1">
-            <a:schemeClr val="accent1"/>
-          </a:lnRef>
-          <a:fillRef idx="3">
-            <a:schemeClr val="accent1"/>
-          </a:fillRef>
-          <a:effectRef idx="2">
-            <a:schemeClr val="accent1"/>
-          </a:effectRef>
-          <a:fontRef idx="minor">
-            <a:schemeClr val="lt1"/>
-          </a:fontRef>
-        </p:style>
-        <p:txBody>
-          <a:bodyPr rtlCol="0" anchor="ctr"/>
-          <a:lstStyle/>
-          <a:p>
-            <a:pPr algn="ctr"/>
-          </a:p>
-        </p:txBody>
-      </p:sp>
-      <p:sp>
-        <p:nvSpPr>
-          <p:cNvPr id="54" name="TextBox 53"/>
-          <p:cNvSpPr txBox="1"/>
-          <p:nvPr/>
-        </p:nvSpPr>
-        <p:spPr>
-          <a:xfrm>
-            <a:off x="548640" y="4206240"/>
-            <a:ext cx="822960" cy="502920"/>
-          </a:xfrm>
-          <a:prstGeom prst="rect">
-            <a:avLst/>
-          </a:prstGeom>
-          <a:noFill/>
-        </p:spPr>
-        <p:txBody>
-          <a:bodyPr wrap="square" lIns="45720" rIns="45720" tIns="22860" bIns="22860" anchor="ctr">
-            <a:spAutoFit/>
-          </a:bodyPr>
-          <a:lstStyle/>
-          <a:p>
-            <a:pPr algn="ctr"/>
-            <a:r>
-              <a:rPr sz="1400" b="1">
-                <a:solidFill>
-                  <a:srgbClr val="4FB6BE"/>
-                </a:solidFill>
-                <a:latin typeface="Yu Gothic"/>
-              </a:rPr>
-              <a:t>3.3</a:t>
-            </a:r>
-          </a:p>
-        </p:txBody>
-      </p:sp>
-      <p:sp>
-        <p:nvSpPr>
-          <p:cNvPr id="55" name="Rectangle 54"/>
-          <p:cNvSpPr/>
-          <p:nvPr/>
-        </p:nvSpPr>
-        <p:spPr>
-          <a:xfrm>
-            <a:off x="1371600" y="4206240"/>
-            <a:ext cx="3840480" cy="502920"/>
-          </a:xfrm>
-          <a:prstGeom prst="rect">
-            <a:avLst/>
-          </a:prstGeom>
-          <a:solidFill>
-            <a:srgbClr val="FFF6E0"/>
-          </a:solidFill>
-          <a:ln w="6350">
-            <a:solidFill>
-              <a:srgbClr val="DDDDDD"/>
-            </a:solidFill>
-          </a:ln>
-          <a:effectLst/>
-        </p:spPr>
-        <p:style>
-          <a:lnRef idx="1">
-            <a:schemeClr val="accent1"/>
-          </a:lnRef>
-          <a:fillRef idx="3">
-            <a:schemeClr val="accent1"/>
-          </a:fillRef>
-          <a:effectRef idx="2">
-            <a:schemeClr val="accent1"/>
-          </a:effectRef>
-          <a:fontRef idx="minor">
-            <a:schemeClr val="lt1"/>
-          </a:fontRef>
-        </p:style>
-        <p:txBody>
-          <a:bodyPr rtlCol="0" anchor="ctr"/>
-          <a:lstStyle/>
-          <a:p>
-            <a:pPr algn="ctr"/>
-          </a:p>
-        </p:txBody>
-      </p:sp>
-      <p:sp>
-        <p:nvSpPr>
-          <p:cNvPr id="56" name="TextBox 55"/>
-          <p:cNvSpPr txBox="1"/>
-          <p:nvPr/>
-        </p:nvSpPr>
-        <p:spPr>
-          <a:xfrm>
-            <a:off x="1371600" y="4206240"/>
-            <a:ext cx="3840480" cy="502920"/>
-          </a:xfrm>
-          <a:prstGeom prst="rect">
-            <a:avLst/>
-          </a:prstGeom>
-          <a:noFill/>
-        </p:spPr>
-        <p:txBody>
-          <a:bodyPr wrap="square" lIns="45720" rIns="45720" tIns="22860" bIns="22860" anchor="ctr">
-            <a:spAutoFit/>
-          </a:bodyPr>
-          <a:lstStyle/>
-          <a:p>
-            <a:pPr algn="l"/>
-            <a:r>
-              <a:rPr sz="1400" b="0">
-                <a:solidFill>
-                  <a:srgbClr val="333333"/>
-                </a:solidFill>
-                <a:latin typeface="Yu Gothic"/>
-              </a:rPr>
-              <a:t>顔写真データ</a:t>
-            </a:r>
-          </a:p>
-        </p:txBody>
-      </p:sp>
-      <p:sp>
-        <p:nvSpPr>
-          <p:cNvPr id="57" name="Rectangle 56"/>
-          <p:cNvSpPr/>
-          <p:nvPr/>
-        </p:nvSpPr>
-        <p:spPr>
-          <a:xfrm>
-            <a:off x="5212080" y="4206240"/>
-            <a:ext cx="1463040" cy="502920"/>
-          </a:xfrm>
-          <a:prstGeom prst="rect">
-            <a:avLst/>
-          </a:prstGeom>
-          <a:solidFill>
-            <a:srgbClr val="FFF6E0"/>
-          </a:solidFill>
-          <a:ln w="6350">
-            <a:solidFill>
-              <a:srgbClr val="DDDDDD"/>
-            </a:solidFill>
-          </a:ln>
-          <a:effectLst/>
-        </p:spPr>
-        <p:style>
-          <a:lnRef idx="1">
-            <a:schemeClr val="accent1"/>
-          </a:lnRef>
-          <a:fillRef idx="3">
-            <a:schemeClr val="accent1"/>
-          </a:fillRef>
-          <a:effectRef idx="2">
-            <a:schemeClr val="accent1"/>
-          </a:effectRef>
-          <a:fontRef idx="minor">
-            <a:schemeClr val="lt1"/>
-          </a:fontRef>
-        </p:style>
-        <p:txBody>
-          <a:bodyPr rtlCol="0" anchor="ctr"/>
-          <a:lstStyle/>
-          <a:p>
-            <a:pPr algn="ctr"/>
-          </a:p>
-        </p:txBody>
-      </p:sp>
-      <p:sp>
-        <p:nvSpPr>
-          <p:cNvPr id="58" name="TextBox 57"/>
-          <p:cNvSpPr txBox="1"/>
-          <p:nvPr/>
-        </p:nvSpPr>
-        <p:spPr>
-          <a:xfrm>
-            <a:off x="5212080" y="4206240"/>
-            <a:ext cx="1463040" cy="502920"/>
-          </a:xfrm>
-          <a:prstGeom prst="rect">
-            <a:avLst/>
-          </a:prstGeom>
-          <a:noFill/>
-        </p:spPr>
-        <p:txBody>
-          <a:bodyPr wrap="square" lIns="45720" rIns="45720" tIns="22860" bIns="22860" anchor="ctr">
-            <a:spAutoFit/>
-          </a:bodyPr>
-          <a:lstStyle/>
-          <a:p>
-            <a:pPr algn="ctr"/>
-            <a:r>
-              <a:rPr sz="1400" b="0">
-                <a:solidFill>
-                  <a:srgbClr val="333333"/>
-                </a:solidFill>
-                <a:latin typeface="Yu Gothic"/>
-              </a:rPr>
-              <a:t>JPEG</a:t>
-            </a:r>
-          </a:p>
-        </p:txBody>
-      </p:sp>
-      <p:sp>
-        <p:nvSpPr>
-          <p:cNvPr id="59" name="Rectangle 58"/>
-          <p:cNvSpPr/>
-          <p:nvPr/>
-        </p:nvSpPr>
-        <p:spPr>
-          <a:xfrm>
-            <a:off x="6675120" y="4206240"/>
-            <a:ext cx="4937760" cy="502920"/>
-          </a:xfrm>
-          <a:prstGeom prst="rect">
-            <a:avLst/>
-          </a:prstGeom>
-          <a:solidFill>
-            <a:srgbClr val="FFF6E0"/>
-          </a:solidFill>
-          <a:ln w="6350">
-            <a:solidFill>
-              <a:srgbClr val="DDDDDD"/>
-            </a:solidFill>
-          </a:ln>
-          <a:effectLst/>
-        </p:spPr>
-        <p:style>
-          <a:lnRef idx="1">
-            <a:schemeClr val="accent1"/>
-          </a:lnRef>
-          <a:fillRef idx="3">
-            <a:schemeClr val="accent1"/>
-          </a:fillRef>
-          <a:effectRef idx="2">
-            <a:schemeClr val="accent1"/>
-          </a:effectRef>
-          <a:fontRef idx="minor">
-            <a:schemeClr val="lt1"/>
-          </a:fontRef>
-        </p:style>
-        <p:txBody>
-          <a:bodyPr rtlCol="0" anchor="ctr"/>
-          <a:lstStyle/>
-          <a:p>
-            <a:pPr algn="ctr"/>
-          </a:p>
-        </p:txBody>
-      </p:sp>
-      <p:sp>
-        <p:nvSpPr>
-          <p:cNvPr id="60" name="TextBox 59"/>
-          <p:cNvSpPr txBox="1"/>
-          <p:nvPr/>
-        </p:nvSpPr>
-        <p:spPr>
-          <a:xfrm>
-            <a:off x="6675120" y="4206240"/>
-            <a:ext cx="4937760" cy="502920"/>
-          </a:xfrm>
-          <a:prstGeom prst="rect">
-            <a:avLst/>
-          </a:prstGeom>
-          <a:noFill/>
-        </p:spPr>
-        <p:txBody>
-          <a:bodyPr wrap="square" lIns="45720" rIns="45720" tIns="22860" bIns="22860" anchor="ctr">
-            <a:spAutoFit/>
-          </a:bodyPr>
-          <a:lstStyle/>
-          <a:p>
-            <a:pPr algn="l"/>
-            <a:r>
-              <a:rPr sz="1400" b="0">
-                <a:solidFill>
-                  <a:srgbClr val="333333"/>
-                </a:solidFill>
-                <a:latin typeface="Yu Gothic"/>
-              </a:rPr>
-              <a:t>3.3顔写真 氏名.jpg</a:t>
-            </a:r>
-          </a:p>
-        </p:txBody>
-      </p:sp>
-      <p:sp>
-        <p:nvSpPr>
-          <p:cNvPr id="61" name="Rectangle 60"/>
-          <p:cNvSpPr/>
-          <p:nvPr/>
-        </p:nvSpPr>
-        <p:spPr>
-          <a:xfrm>
-            <a:off x="548640" y="4709160"/>
-            <a:ext cx="822960" cy="502920"/>
-          </a:xfrm>
-          <a:prstGeom prst="rect">
-            <a:avLst/>
-          </a:prstGeom>
-          <a:solidFill>
-            <a:srgbClr val="F6FBFC"/>
-          </a:solidFill>
-          <a:ln w="6350">
-            <a:solidFill>
-              <a:srgbClr val="DDDDDD"/>
-            </a:solidFill>
-          </a:ln>
-          <a:effectLst/>
-        </p:spPr>
-        <p:style>
-          <a:lnRef idx="1">
-            <a:schemeClr val="accent1"/>
-          </a:lnRef>
-          <a:fillRef idx="3">
-            <a:schemeClr val="accent1"/>
-          </a:fillRef>
-          <a:effectRef idx="2">
-            <a:schemeClr val="accent1"/>
-          </a:effectRef>
-          <a:fontRef idx="minor">
-            <a:schemeClr val="lt1"/>
-          </a:fontRef>
-        </p:style>
-        <p:txBody>
-          <a:bodyPr rtlCol="0" anchor="ctr"/>
-          <a:lstStyle/>
-          <a:p>
-            <a:pPr algn="ctr"/>
-          </a:p>
-        </p:txBody>
-      </p:sp>
-      <p:sp>
-        <p:nvSpPr>
-          <p:cNvPr id="62" name="TextBox 61"/>
-          <p:cNvSpPr txBox="1"/>
-          <p:nvPr/>
-        </p:nvSpPr>
-        <p:spPr>
-          <a:xfrm>
-            <a:off x="548640" y="4709160"/>
-            <a:ext cx="822960" cy="502920"/>
-          </a:xfrm>
-          <a:prstGeom prst="rect">
-            <a:avLst/>
-          </a:prstGeom>
-          <a:noFill/>
-        </p:spPr>
-        <p:txBody>
-          <a:bodyPr wrap="square" lIns="45720" rIns="45720" tIns="22860" bIns="22860" anchor="ctr">
-            <a:spAutoFit/>
-          </a:bodyPr>
-          <a:lstStyle/>
-          <a:p>
-            <a:pPr algn="ctr"/>
-            <a:r>
-              <a:rPr sz="1400" b="1">
-                <a:solidFill>
-                  <a:srgbClr val="4FB6BE"/>
-                </a:solidFill>
-                <a:latin typeface="Yu Gothic"/>
-              </a:rPr>
-              <a:t>3.4</a:t>
-            </a:r>
-          </a:p>
-        </p:txBody>
-      </p:sp>
-      <p:sp>
-        <p:nvSpPr>
-          <p:cNvPr id="63" name="Rectangle 62"/>
-          <p:cNvSpPr/>
-          <p:nvPr/>
-        </p:nvSpPr>
-        <p:spPr>
-          <a:xfrm>
-            <a:off x="1371600" y="4709160"/>
-            <a:ext cx="3840480" cy="502920"/>
-          </a:xfrm>
-          <a:prstGeom prst="rect">
-            <a:avLst/>
-          </a:prstGeom>
-          <a:solidFill>
-            <a:srgbClr val="F6FBFC"/>
-          </a:solidFill>
-          <a:ln w="6350">
-            <a:solidFill>
-              <a:srgbClr val="DDDDDD"/>
-            </a:solidFill>
-          </a:ln>
-          <a:effectLst/>
-        </p:spPr>
-        <p:style>
-          <a:lnRef idx="1">
-            <a:schemeClr val="accent1"/>
-          </a:lnRef>
-          <a:fillRef idx="3">
-            <a:schemeClr val="accent1"/>
-          </a:fillRef>
-          <a:effectRef idx="2">
-            <a:schemeClr val="accent1"/>
-          </a:effectRef>
-          <a:fontRef idx="minor">
-            <a:schemeClr val="lt1"/>
-          </a:fontRef>
-        </p:style>
-        <p:txBody>
-          <a:bodyPr rtlCol="0" anchor="ctr"/>
-          <a:lstStyle/>
-          <a:p>
-            <a:pPr algn="ctr"/>
-          </a:p>
-        </p:txBody>
-      </p:sp>
-      <p:sp>
-        <p:nvSpPr>
-          <p:cNvPr id="64" name="TextBox 63"/>
-          <p:cNvSpPr txBox="1"/>
-          <p:nvPr/>
-        </p:nvSpPr>
-        <p:spPr>
-          <a:xfrm>
-            <a:off x="1371600" y="4709160"/>
-            <a:ext cx="3840480" cy="502920"/>
-          </a:xfrm>
-          <a:prstGeom prst="rect">
-            <a:avLst/>
-          </a:prstGeom>
-          <a:noFill/>
-        </p:spPr>
-        <p:txBody>
-          <a:bodyPr wrap="square" lIns="45720" rIns="45720" tIns="22860" bIns="22860" anchor="ctr">
-            <a:spAutoFit/>
-          </a:bodyPr>
-          <a:lstStyle/>
-          <a:p>
-            <a:pPr algn="l"/>
-            <a:r>
-              <a:rPr sz="1400" b="0">
-                <a:solidFill>
-                  <a:srgbClr val="333333"/>
-                </a:solidFill>
-                <a:latin typeface="Yu Gothic"/>
-              </a:rPr>
-              <a:t>面接後forms</a:t>
-            </a:r>
-          </a:p>
-        </p:txBody>
-      </p:sp>
-      <p:sp>
-        <p:nvSpPr>
-          <p:cNvPr id="65" name="Rectangle 64"/>
-          <p:cNvSpPr/>
-          <p:nvPr/>
-        </p:nvSpPr>
-        <p:spPr>
-          <a:xfrm>
-            <a:off x="5212080" y="4709160"/>
-            <a:ext cx="1463040" cy="502920"/>
-          </a:xfrm>
-          <a:prstGeom prst="rect">
-            <a:avLst/>
-          </a:prstGeom>
-          <a:solidFill>
-            <a:srgbClr val="F6FBFC"/>
-          </a:solidFill>
-          <a:ln w="6350">
-            <a:solidFill>
-              <a:srgbClr val="DDDDDD"/>
-            </a:solidFill>
-          </a:ln>
-          <a:effectLst/>
-        </p:spPr>
-        <p:style>
-          <a:lnRef idx="1">
-            <a:schemeClr val="accent1"/>
-          </a:lnRef>
-          <a:fillRef idx="3">
-            <a:schemeClr val="accent1"/>
-          </a:fillRef>
-          <a:effectRef idx="2">
-            <a:schemeClr val="accent1"/>
-          </a:effectRef>
-          <a:fontRef idx="minor">
-            <a:schemeClr val="lt1"/>
-          </a:fontRef>
-        </p:style>
-        <p:txBody>
-          <a:bodyPr rtlCol="0" anchor="ctr"/>
-          <a:lstStyle/>
-          <a:p>
-            <a:pPr algn="ctr"/>
-          </a:p>
-        </p:txBody>
-      </p:sp>
-      <p:sp>
-        <p:nvSpPr>
-          <p:cNvPr id="66" name="TextBox 65"/>
-          <p:cNvSpPr txBox="1"/>
-          <p:nvPr/>
-        </p:nvSpPr>
-        <p:spPr>
-          <a:xfrm>
-            <a:off x="5212080" y="4709160"/>
-            <a:ext cx="1463040" cy="502920"/>
-          </a:xfrm>
-          <a:prstGeom prst="rect">
-            <a:avLst/>
-          </a:prstGeom>
-          <a:noFill/>
-        </p:spPr>
-        <p:txBody>
-          <a:bodyPr wrap="square" lIns="45720" rIns="45720" tIns="22860" bIns="22860" anchor="ctr">
-            <a:spAutoFit/>
-          </a:bodyPr>
-          <a:lstStyle/>
-          <a:p>
-            <a:pPr algn="ctr"/>
-            <a:r>
-              <a:rPr sz="1400" b="0">
-                <a:solidFill>
-                  <a:srgbClr val="333333"/>
-                </a:solidFill>
-                <a:latin typeface="Yu Gothic"/>
-              </a:rPr>
-              <a:t>PDF</a:t>
-            </a:r>
-          </a:p>
-        </p:txBody>
-      </p:sp>
-      <p:sp>
-        <p:nvSpPr>
-          <p:cNvPr id="67" name="Rectangle 66"/>
-          <p:cNvSpPr/>
-          <p:nvPr/>
-        </p:nvSpPr>
-        <p:spPr>
-          <a:xfrm>
-            <a:off x="6675120" y="4709160"/>
-            <a:ext cx="4937760" cy="502920"/>
-          </a:xfrm>
-          <a:prstGeom prst="rect">
-            <a:avLst/>
-          </a:prstGeom>
-          <a:solidFill>
-            <a:srgbClr val="F6FBFC"/>
-          </a:solidFill>
-          <a:ln w="6350">
-            <a:solidFill>
-              <a:srgbClr val="DDDDDD"/>
-            </a:solidFill>
-          </a:ln>
-          <a:effectLst/>
-        </p:spPr>
-        <p:style>
-          <a:lnRef idx="1">
-            <a:schemeClr val="accent1"/>
-          </a:lnRef>
-          <a:fillRef idx="3">
-            <a:schemeClr val="accent1"/>
-          </a:fillRef>
-          <a:effectRef idx="2">
-            <a:schemeClr val="accent1"/>
-          </a:effectRef>
-          <a:fontRef idx="minor">
-            <a:schemeClr val="lt1"/>
-          </a:fontRef>
-        </p:style>
-        <p:txBody>
-          <a:bodyPr rtlCol="0" anchor="ctr"/>
-          <a:lstStyle/>
-          <a:p>
-            <a:pPr algn="ctr"/>
-          </a:p>
-        </p:txBody>
-      </p:sp>
-      <p:sp>
-        <p:nvSpPr>
-          <p:cNvPr id="68" name="TextBox 67"/>
-          <p:cNvSpPr txBox="1"/>
-          <p:nvPr/>
-        </p:nvSpPr>
-        <p:spPr>
-          <a:xfrm>
-            <a:off x="6675120" y="4709160"/>
-            <a:ext cx="4937760" cy="502920"/>
-          </a:xfrm>
-          <a:prstGeom prst="rect">
-            <a:avLst/>
-          </a:prstGeom>
-          <a:noFill/>
-        </p:spPr>
-        <p:txBody>
-          <a:bodyPr wrap="square" lIns="45720" rIns="45720" tIns="22860" bIns="22860" anchor="ctr">
-            <a:spAutoFit/>
-          </a:bodyPr>
-          <a:lstStyle/>
-          <a:p>
-            <a:pPr algn="l"/>
-            <a:r>
-              <a:rPr sz="1400" b="0">
-                <a:solidFill>
-                  <a:srgbClr val="333333"/>
-                </a:solidFill>
-                <a:latin typeface="Yu Gothic"/>
-              </a:rPr>
-              <a:t>3.4面接後forms 氏名.pdf</a:t>
-            </a:r>
-          </a:p>
-        </p:txBody>
-      </p:sp>
-      <p:sp>
-        <p:nvSpPr>
-          <p:cNvPr id="69" name="Rounded Rectangle 68"/>
-          <p:cNvSpPr/>
-          <p:nvPr/>
-        </p:nvSpPr>
-        <p:spPr>
-          <a:xfrm>
-            <a:off x="548640" y="5394960"/>
-            <a:ext cx="11064240" cy="640080"/>
+            <a:off x="6172200" y="5367527"/>
+            <a:ext cx="5577840" cy="594360"/>
           </a:xfrm>
           <a:prstGeom prst="roundRect">
             <a:avLst>
@@ -8212,14 +9241,14 @@
       </p:sp>
       <p:sp>
         <p:nvSpPr>
-          <p:cNvPr id="70" name="TextBox 69"/>
-          <p:cNvSpPr txBox="1"/>
-          <p:nvPr/>
-        </p:nvSpPr>
-        <p:spPr>
-          <a:xfrm>
-            <a:off x="731520" y="5394960"/>
-            <a:ext cx="10698480" cy="640080"/>
+          <p:cNvPr id="88" name="TextBox 87"/>
+          <p:cNvSpPr txBox="1"/>
+          <p:nvPr/>
+        </p:nvSpPr>
+        <p:spPr>
+          <a:xfrm>
+            <a:off x="6263640" y="5367527"/>
+            <a:ext cx="5394959" cy="594360"/>
           </a:xfrm>
           <a:prstGeom prst="rect">
             <a:avLst/>
@@ -8234,13 +9263,13 @@
           <a:p>
             <a:pPr algn="l"/>
             <a:r>
-              <a:rPr sz="1500" b="1">
+              <a:rPr sz="1200" b="1">
                 <a:solidFill>
                   <a:srgbClr val="333333"/>
                 </a:solidFill>
                 <a:latin typeface="Yu Gothic"/>
               </a:rPr>
-              <a:t>該当者のみ：チェック表のオレンジ欄の書類も、同じルールでそろえる</a:t>
+              <a:t>バイカー・ウォーカーは、免許証の代わりに保険証でも可</a:t>
             </a:r>
           </a:p>
         </p:txBody>

--- a/out/登録の流れ_書類準備まで.pptx
+++ b/out/登録の流れ_書類準備まで.pptx
@@ -4420,7 +4420,7 @@
         <p:spPr>
           <a:xfrm>
             <a:off x="8366760" y="1417320"/>
-            <a:ext cx="3246120" cy="4709159"/>
+            <a:ext cx="3246120" cy="822960"/>
           </a:xfrm>
           <a:prstGeom prst="rect">
             <a:avLst/>
@@ -4435,73 +4435,559 @@
           <a:p>
             <a:pPr algn="l"/>
             <a:r>
-              <a:rPr sz="1600" b="1">
+              <a:rPr sz="1700" b="1">
                 <a:solidFill>
                   <a:srgbClr val="333333"/>
                 </a:solidFill>
                 <a:latin typeface="Yu Gothic"/>
               </a:rPr>
-              <a:t>面接時formsの</a:t>
+              <a:t>名前は免許証に</a:t>
             </a:r>
           </a:p>
           <a:p>
             <a:pPr algn="l"/>
             <a:r>
-              <a:rPr sz="1600" b="1">
+              <a:rPr sz="1700" b="1">
                 <a:solidFill>
                   <a:srgbClr val="333333"/>
                 </a:solidFill>
                 <a:latin typeface="Yu Gothic"/>
               </a:rPr>
-              <a:t>メールアドレスと名前</a:t>
-            </a:r>
-          </a:p>
+              <a:t>載っている漢字で入力</a:t>
+            </a:r>
+          </a:p>
+        </p:txBody>
+      </p:sp>
+      <p:sp>
+        <p:nvSpPr>
+          <p:cNvPr id="8" name="TextBox 7"/>
+          <p:cNvSpPr txBox="1"/>
+          <p:nvPr/>
+        </p:nvSpPr>
+        <p:spPr>
+          <a:xfrm>
+            <a:off x="8366760" y="2286000"/>
+            <a:ext cx="3246120" cy="320040"/>
+          </a:xfrm>
+          <a:prstGeom prst="rect">
+            <a:avLst/>
+          </a:prstGeom>
+          <a:noFill/>
+        </p:spPr>
+        <p:txBody>
+          <a:bodyPr wrap="square" lIns="45720" rIns="45720" tIns="22860" bIns="22860" anchor="t">
+            <a:spAutoFit/>
+          </a:bodyPr>
+          <a:lstStyle/>
           <a:p>
             <a:pPr algn="l"/>
             <a:r>
-              <a:rPr sz="1600" b="1">
-                <a:solidFill>
-                  <a:srgbClr val="333333"/>
-                </a:solidFill>
-                <a:latin typeface="Yu Gothic"/>
-              </a:rPr>
-              <a:t/>
-            </a:r>
-          </a:p>
+              <a:rPr sz="1200" b="1">
+                <a:solidFill>
+                  <a:srgbClr val="D32F2F"/>
+                </a:solidFill>
+                <a:latin typeface="Yu Gothic"/>
+              </a:rPr>
+              <a:t>間違えやすい例（×）</a:t>
+            </a:r>
+          </a:p>
+        </p:txBody>
+      </p:sp>
+      <p:sp>
+        <p:nvSpPr>
+          <p:cNvPr id="9" name="Rectangle 8"/>
+          <p:cNvSpPr/>
+          <p:nvPr/>
+        </p:nvSpPr>
+        <p:spPr>
+          <a:xfrm>
+            <a:off x="8366760" y="2651760"/>
+            <a:ext cx="3246120" cy="502920"/>
+          </a:xfrm>
+          <a:prstGeom prst="rect">
+            <a:avLst/>
+          </a:prstGeom>
+          <a:solidFill>
+            <a:srgbClr val="FFFFFF"/>
+          </a:solidFill>
+          <a:ln w="9525">
+            <a:solidFill>
+              <a:srgbClr val="DDDDDD"/>
+            </a:solidFill>
+          </a:ln>
+          <a:effectLst/>
+        </p:spPr>
+        <p:style>
+          <a:lnRef idx="1">
+            <a:schemeClr val="accent1"/>
+          </a:lnRef>
+          <a:fillRef idx="3">
+            <a:schemeClr val="accent1"/>
+          </a:fillRef>
+          <a:effectRef idx="2">
+            <a:schemeClr val="accent1"/>
+          </a:effectRef>
+          <a:fontRef idx="minor">
+            <a:schemeClr val="lt1"/>
+          </a:fontRef>
+        </p:style>
+        <p:txBody>
+          <a:bodyPr rtlCol="0" anchor="ctr"/>
+          <a:lstStyle/>
+          <a:p>
+            <a:pPr algn="ctr"/>
+          </a:p>
+        </p:txBody>
+      </p:sp>
+      <p:sp>
+        <p:nvSpPr>
+          <p:cNvPr id="10" name="TextBox 9"/>
+          <p:cNvSpPr txBox="1"/>
+          <p:nvPr/>
+        </p:nvSpPr>
+        <p:spPr>
+          <a:xfrm>
+            <a:off x="8366760" y="2651760"/>
+            <a:ext cx="1097280" cy="502920"/>
+          </a:xfrm>
+          <a:prstGeom prst="rect">
+            <a:avLst/>
+          </a:prstGeom>
+          <a:noFill/>
+        </p:spPr>
+        <p:txBody>
+          <a:bodyPr wrap="square" lIns="45720" rIns="45720" tIns="22860" bIns="22860" anchor="ctr">
+            <a:spAutoFit/>
+          </a:bodyPr>
+          <a:lstStyle/>
+          <a:p>
+            <a:pPr algn="ctr"/>
+            <a:r>
+              <a:rPr sz="1900" b="1">
+                <a:solidFill>
+                  <a:srgbClr val="E12A82"/>
+                </a:solidFill>
+                <a:latin typeface="Yu Gothic"/>
+              </a:rPr>
+              <a:t>齋藤</a:t>
+            </a:r>
+          </a:p>
+        </p:txBody>
+      </p:sp>
+      <p:sp>
+        <p:nvSpPr>
+          <p:cNvPr id="11" name="TextBox 10"/>
+          <p:cNvSpPr txBox="1"/>
+          <p:nvPr/>
+        </p:nvSpPr>
+        <p:spPr>
+          <a:xfrm>
+            <a:off x="9464040" y="2651760"/>
+            <a:ext cx="2103120" cy="502920"/>
+          </a:xfrm>
+          <a:prstGeom prst="rect">
+            <a:avLst/>
+          </a:prstGeom>
+          <a:noFill/>
+        </p:spPr>
+        <p:txBody>
+          <a:bodyPr wrap="square" lIns="45720" rIns="45720" tIns="22860" bIns="22860" anchor="ctr">
+            <a:spAutoFit/>
+          </a:bodyPr>
+          <a:lstStyle/>
           <a:p>
             <a:pPr algn="l"/>
             <a:r>
-              <a:rPr sz="1600" b="1">
-                <a:solidFill>
-                  <a:srgbClr val="333333"/>
-                </a:solidFill>
-                <a:latin typeface="Yu Gothic"/>
-              </a:rPr>
-              <a:t>⚠ 名前は</a:t>
-            </a:r>
-          </a:p>
+              <a:rPr sz="1400" b="1">
+                <a:solidFill>
+                  <a:srgbClr val="D32F2F"/>
+                </a:solidFill>
+                <a:latin typeface="Yu Gothic"/>
+              </a:rPr>
+              <a:t>× 斎藤 ／ 斉藤</a:t>
+            </a:r>
+          </a:p>
+        </p:txBody>
+      </p:sp>
+      <p:sp>
+        <p:nvSpPr>
+          <p:cNvPr id="12" name="Rectangle 11"/>
+          <p:cNvSpPr/>
+          <p:nvPr/>
+        </p:nvSpPr>
+        <p:spPr>
+          <a:xfrm>
+            <a:off x="8366760" y="3218688"/>
+            <a:ext cx="3246120" cy="502920"/>
+          </a:xfrm>
+          <a:prstGeom prst="rect">
+            <a:avLst/>
+          </a:prstGeom>
+          <a:solidFill>
+            <a:srgbClr val="FFFFFF"/>
+          </a:solidFill>
+          <a:ln w="9525">
+            <a:solidFill>
+              <a:srgbClr val="DDDDDD"/>
+            </a:solidFill>
+          </a:ln>
+          <a:effectLst/>
+        </p:spPr>
+        <p:style>
+          <a:lnRef idx="1">
+            <a:schemeClr val="accent1"/>
+          </a:lnRef>
+          <a:fillRef idx="3">
+            <a:schemeClr val="accent1"/>
+          </a:fillRef>
+          <a:effectRef idx="2">
+            <a:schemeClr val="accent1"/>
+          </a:effectRef>
+          <a:fontRef idx="minor">
+            <a:schemeClr val="lt1"/>
+          </a:fontRef>
+        </p:style>
+        <p:txBody>
+          <a:bodyPr rtlCol="0" anchor="ctr"/>
+          <a:lstStyle/>
+          <a:p>
+            <a:pPr algn="ctr"/>
+          </a:p>
+        </p:txBody>
+      </p:sp>
+      <p:sp>
+        <p:nvSpPr>
+          <p:cNvPr id="13" name="TextBox 12"/>
+          <p:cNvSpPr txBox="1"/>
+          <p:nvPr/>
+        </p:nvSpPr>
+        <p:spPr>
+          <a:xfrm>
+            <a:off x="8366760" y="3218688"/>
+            <a:ext cx="1097280" cy="502920"/>
+          </a:xfrm>
+          <a:prstGeom prst="rect">
+            <a:avLst/>
+          </a:prstGeom>
+          <a:noFill/>
+        </p:spPr>
+        <p:txBody>
+          <a:bodyPr wrap="square" lIns="45720" rIns="45720" tIns="22860" bIns="22860" anchor="ctr">
+            <a:spAutoFit/>
+          </a:bodyPr>
+          <a:lstStyle/>
+          <a:p>
+            <a:pPr algn="ctr"/>
+            <a:r>
+              <a:rPr sz="1900" b="1">
+                <a:solidFill>
+                  <a:srgbClr val="E12A82"/>
+                </a:solidFill>
+                <a:latin typeface="Yu Gothic"/>
+              </a:rPr>
+              <a:t>渡邉</a:t>
+            </a:r>
+          </a:p>
+        </p:txBody>
+      </p:sp>
+      <p:sp>
+        <p:nvSpPr>
+          <p:cNvPr id="14" name="TextBox 13"/>
+          <p:cNvSpPr txBox="1"/>
+          <p:nvPr/>
+        </p:nvSpPr>
+        <p:spPr>
+          <a:xfrm>
+            <a:off x="9464040" y="3218688"/>
+            <a:ext cx="2103120" cy="502920"/>
+          </a:xfrm>
+          <a:prstGeom prst="rect">
+            <a:avLst/>
+          </a:prstGeom>
+          <a:noFill/>
+        </p:spPr>
+        <p:txBody>
+          <a:bodyPr wrap="square" lIns="45720" rIns="45720" tIns="22860" bIns="22860" anchor="ctr">
+            <a:spAutoFit/>
+          </a:bodyPr>
+          <a:lstStyle/>
           <a:p>
             <a:pPr algn="l"/>
             <a:r>
-              <a:rPr sz="1600" b="1">
-                <a:solidFill>
-                  <a:srgbClr val="333333"/>
-                </a:solidFill>
-                <a:latin typeface="Yu Gothic"/>
-              </a:rPr>
-              <a:t>免許証に載っている</a:t>
-            </a:r>
-          </a:p>
+              <a:rPr sz="1400" b="1">
+                <a:solidFill>
+                  <a:srgbClr val="D32F2F"/>
+                </a:solidFill>
+                <a:latin typeface="Yu Gothic"/>
+              </a:rPr>
+              <a:t>× 渡辺 ／ 渡部</a:t>
+            </a:r>
+          </a:p>
+        </p:txBody>
+      </p:sp>
+      <p:sp>
+        <p:nvSpPr>
+          <p:cNvPr id="15" name="Rectangle 14"/>
+          <p:cNvSpPr/>
+          <p:nvPr/>
+        </p:nvSpPr>
+        <p:spPr>
+          <a:xfrm>
+            <a:off x="8366760" y="3785615"/>
+            <a:ext cx="3246120" cy="502920"/>
+          </a:xfrm>
+          <a:prstGeom prst="rect">
+            <a:avLst/>
+          </a:prstGeom>
+          <a:solidFill>
+            <a:srgbClr val="FFFFFF"/>
+          </a:solidFill>
+          <a:ln w="9525">
+            <a:solidFill>
+              <a:srgbClr val="DDDDDD"/>
+            </a:solidFill>
+          </a:ln>
+          <a:effectLst/>
+        </p:spPr>
+        <p:style>
+          <a:lnRef idx="1">
+            <a:schemeClr val="accent1"/>
+          </a:lnRef>
+          <a:fillRef idx="3">
+            <a:schemeClr val="accent1"/>
+          </a:fillRef>
+          <a:effectRef idx="2">
+            <a:schemeClr val="accent1"/>
+          </a:effectRef>
+          <a:fontRef idx="minor">
+            <a:schemeClr val="lt1"/>
+          </a:fontRef>
+        </p:style>
+        <p:txBody>
+          <a:bodyPr rtlCol="0" anchor="ctr"/>
+          <a:lstStyle/>
+          <a:p>
+            <a:pPr algn="ctr"/>
+          </a:p>
+        </p:txBody>
+      </p:sp>
+      <p:sp>
+        <p:nvSpPr>
+          <p:cNvPr id="16" name="TextBox 15"/>
+          <p:cNvSpPr txBox="1"/>
+          <p:nvPr/>
+        </p:nvSpPr>
+        <p:spPr>
+          <a:xfrm>
+            <a:off x="8366760" y="3785615"/>
+            <a:ext cx="1097280" cy="502920"/>
+          </a:xfrm>
+          <a:prstGeom prst="rect">
+            <a:avLst/>
+          </a:prstGeom>
+          <a:noFill/>
+        </p:spPr>
+        <p:txBody>
+          <a:bodyPr wrap="square" lIns="45720" rIns="45720" tIns="22860" bIns="22860" anchor="ctr">
+            <a:spAutoFit/>
+          </a:bodyPr>
+          <a:lstStyle/>
+          <a:p>
+            <a:pPr algn="ctr"/>
+            <a:r>
+              <a:rPr sz="1900" b="1">
+                <a:solidFill>
+                  <a:srgbClr val="E12A82"/>
+                </a:solidFill>
+                <a:latin typeface="Yu Gothic"/>
+              </a:rPr>
+              <a:t>髙橋</a:t>
+            </a:r>
+          </a:p>
+        </p:txBody>
+      </p:sp>
+      <p:sp>
+        <p:nvSpPr>
+          <p:cNvPr id="17" name="TextBox 16"/>
+          <p:cNvSpPr txBox="1"/>
+          <p:nvPr/>
+        </p:nvSpPr>
+        <p:spPr>
+          <a:xfrm>
+            <a:off x="9464040" y="3785615"/>
+            <a:ext cx="2103120" cy="502920"/>
+          </a:xfrm>
+          <a:prstGeom prst="rect">
+            <a:avLst/>
+          </a:prstGeom>
+          <a:noFill/>
+        </p:spPr>
+        <p:txBody>
+          <a:bodyPr wrap="square" lIns="45720" rIns="45720" tIns="22860" bIns="22860" anchor="ctr">
+            <a:spAutoFit/>
+          </a:bodyPr>
+          <a:lstStyle/>
           <a:p>
             <a:pPr algn="l"/>
             <a:r>
-              <a:rPr sz="1600" b="1">
-                <a:solidFill>
-                  <a:srgbClr val="333333"/>
-                </a:solidFill>
-                <a:latin typeface="Yu Gothic"/>
-              </a:rPr>
-              <a:t>漢字で入力</a:t>
+              <a:rPr sz="1400" b="1">
+                <a:solidFill>
+                  <a:srgbClr val="D32F2F"/>
+                </a:solidFill>
+                <a:latin typeface="Yu Gothic"/>
+              </a:rPr>
+              <a:t>× 高橋</a:t>
+            </a:r>
+          </a:p>
+        </p:txBody>
+      </p:sp>
+      <p:sp>
+        <p:nvSpPr>
+          <p:cNvPr id="18" name="Rectangle 17"/>
+          <p:cNvSpPr/>
+          <p:nvPr/>
+        </p:nvSpPr>
+        <p:spPr>
+          <a:xfrm>
+            <a:off x="8366760" y="4352544"/>
+            <a:ext cx="3246120" cy="502920"/>
+          </a:xfrm>
+          <a:prstGeom prst="rect">
+            <a:avLst/>
+          </a:prstGeom>
+          <a:solidFill>
+            <a:srgbClr val="FFFFFF"/>
+          </a:solidFill>
+          <a:ln w="9525">
+            <a:solidFill>
+              <a:srgbClr val="DDDDDD"/>
+            </a:solidFill>
+          </a:ln>
+          <a:effectLst/>
+        </p:spPr>
+        <p:style>
+          <a:lnRef idx="1">
+            <a:schemeClr val="accent1"/>
+          </a:lnRef>
+          <a:fillRef idx="3">
+            <a:schemeClr val="accent1"/>
+          </a:fillRef>
+          <a:effectRef idx="2">
+            <a:schemeClr val="accent1"/>
+          </a:effectRef>
+          <a:fontRef idx="minor">
+            <a:schemeClr val="lt1"/>
+          </a:fontRef>
+        </p:style>
+        <p:txBody>
+          <a:bodyPr rtlCol="0" anchor="ctr"/>
+          <a:lstStyle/>
+          <a:p>
+            <a:pPr algn="ctr"/>
+          </a:p>
+        </p:txBody>
+      </p:sp>
+      <p:sp>
+        <p:nvSpPr>
+          <p:cNvPr id="19" name="TextBox 18"/>
+          <p:cNvSpPr txBox="1"/>
+          <p:nvPr/>
+        </p:nvSpPr>
+        <p:spPr>
+          <a:xfrm>
+            <a:off x="8366760" y="4352544"/>
+            <a:ext cx="1097280" cy="502920"/>
+          </a:xfrm>
+          <a:prstGeom prst="rect">
+            <a:avLst/>
+          </a:prstGeom>
+          <a:noFill/>
+        </p:spPr>
+        <p:txBody>
+          <a:bodyPr wrap="square" lIns="45720" rIns="45720" tIns="22860" bIns="22860" anchor="ctr">
+            <a:spAutoFit/>
+          </a:bodyPr>
+          <a:lstStyle/>
+          <a:p>
+            <a:pPr algn="ctr"/>
+            <a:r>
+              <a:rPr sz="1900" b="1">
+                <a:solidFill>
+                  <a:srgbClr val="E12A82"/>
+                </a:solidFill>
+                <a:latin typeface="Yu Gothic"/>
+              </a:rPr>
+              <a:t>山﨑</a:t>
+            </a:r>
+          </a:p>
+        </p:txBody>
+      </p:sp>
+      <p:sp>
+        <p:nvSpPr>
+          <p:cNvPr id="20" name="TextBox 19"/>
+          <p:cNvSpPr txBox="1"/>
+          <p:nvPr/>
+        </p:nvSpPr>
+        <p:spPr>
+          <a:xfrm>
+            <a:off x="9464040" y="4352544"/>
+            <a:ext cx="2103120" cy="502920"/>
+          </a:xfrm>
+          <a:prstGeom prst="rect">
+            <a:avLst/>
+          </a:prstGeom>
+          <a:noFill/>
+        </p:spPr>
+        <p:txBody>
+          <a:bodyPr wrap="square" lIns="45720" rIns="45720" tIns="22860" bIns="22860" anchor="ctr">
+            <a:spAutoFit/>
+          </a:bodyPr>
+          <a:lstStyle/>
+          <a:p>
+            <a:pPr algn="l"/>
+            <a:r>
+              <a:rPr sz="1400" b="1">
+                <a:solidFill>
+                  <a:srgbClr val="D32F2F"/>
+                </a:solidFill>
+                <a:latin typeface="Yu Gothic"/>
+              </a:rPr>
+              <a:t>× 山崎</a:t>
+            </a:r>
+          </a:p>
+        </p:txBody>
+      </p:sp>
+      <p:sp>
+        <p:nvSpPr>
+          <p:cNvPr id="21" name="TextBox 20"/>
+          <p:cNvSpPr txBox="1"/>
+          <p:nvPr/>
+        </p:nvSpPr>
+        <p:spPr>
+          <a:xfrm>
+            <a:off x="8366760" y="4983480"/>
+            <a:ext cx="3246120" cy="457200"/>
+          </a:xfrm>
+          <a:prstGeom prst="rect">
+            <a:avLst/>
+          </a:prstGeom>
+          <a:noFill/>
+        </p:spPr>
+        <p:txBody>
+          <a:bodyPr wrap="square" lIns="45720" rIns="45720" tIns="22860" bIns="22860" anchor="t">
+            <a:spAutoFit/>
+          </a:bodyPr>
+          <a:lstStyle/>
+          <a:p>
+            <a:pPr algn="l"/>
+            <a:r>
+              <a:rPr sz="1200" b="0">
+                <a:solidFill>
+                  <a:srgbClr val="666666"/>
+                </a:solidFill>
+                <a:latin typeface="Yu Gothic"/>
+              </a:rPr>
+              <a:t>免許証と見比べて入力</a:t>
             </a:r>
           </a:p>
         </p:txBody>

--- a/out/登録の流れ_書類準備まで.pptx
+++ b/out/登録の流れ_書類準備まで.pptx
@@ -9240,7 +9240,7 @@
         <p:spPr>
           <a:xfrm>
             <a:off x="457200" y="1920240"/>
-            <a:ext cx="1417320" cy="1737360"/>
+            <a:ext cx="1627632" cy="1737360"/>
           </a:xfrm>
           <a:prstGeom prst="roundRect">
             <a:avLst>
@@ -9286,7 +9286,7 @@
         <p:spPr>
           <a:xfrm>
             <a:off x="457200" y="1920240"/>
-            <a:ext cx="1417320" cy="1737360"/>
+            <a:ext cx="1627632" cy="1737360"/>
           </a:xfrm>
           <a:prstGeom prst="rect">
             <a:avLst/>
@@ -9301,7 +9301,7 @@
           <a:p>
             <a:pPr algn="ctr"/>
             <a:r>
-              <a:rPr sz="1500" b="1">
+              <a:rPr sz="1600" b="1">
                 <a:solidFill>
                   <a:srgbClr val="FFFFFF"/>
                 </a:solidFill>
@@ -9313,7 +9313,7 @@
           <a:p>
             <a:pPr algn="ctr"/>
             <a:r>
-              <a:rPr sz="1500" b="1">
+              <a:rPr sz="1600" b="1">
                 <a:solidFill>
                   <a:srgbClr val="FFFFFF"/>
                 </a:solidFill>
@@ -9325,7 +9325,7 @@
           <a:p>
             <a:pPr algn="ctr"/>
             <a:r>
-              <a:rPr sz="1500" b="1">
+              <a:rPr sz="1600" b="1">
                 <a:solidFill>
                   <a:srgbClr val="FFFFFF"/>
                 </a:solidFill>
@@ -9345,7 +9345,7 @@
         <p:spPr>
           <a:xfrm>
             <a:off x="457200" y="3749039"/>
-            <a:ext cx="1417320" cy="365760"/>
+            <a:ext cx="1627632" cy="365760"/>
           </a:xfrm>
           <a:prstGeom prst="rect">
             <a:avLst/>
@@ -9379,8 +9379,8 @@
         </p:nvSpPr>
         <p:spPr>
           <a:xfrm>
-            <a:off x="1828800" y="2560320"/>
-            <a:ext cx="274320" cy="457200"/>
+            <a:off x="2057400" y="2560320"/>
+            <a:ext cx="320040" cy="457200"/>
           </a:xfrm>
           <a:prstGeom prst="rect">
             <a:avLst/>
@@ -9395,7 +9395,7 @@
           <a:p>
             <a:pPr algn="ctr"/>
             <a:r>
-              <a:rPr sz="1200" b="1">
+              <a:rPr sz="1300" b="1">
                 <a:solidFill>
                   <a:srgbClr val="666666"/>
                 </a:solidFill>
@@ -9414,8 +9414,8 @@
         </p:nvSpPr>
         <p:spPr>
           <a:xfrm>
-            <a:off x="2084832" y="1920240"/>
-            <a:ext cx="1417320" cy="1737360"/>
+            <a:off x="2359152" y="1920240"/>
+            <a:ext cx="1627632" cy="1737360"/>
           </a:xfrm>
           <a:prstGeom prst="roundRect">
             <a:avLst>
@@ -9460,8 +9460,8 @@
         </p:nvSpPr>
         <p:spPr>
           <a:xfrm>
-            <a:off x="2084832" y="1920240"/>
-            <a:ext cx="1417320" cy="1737360"/>
+            <a:off x="2359152" y="1920240"/>
+            <a:ext cx="1627632" cy="1737360"/>
           </a:xfrm>
           <a:prstGeom prst="rect">
             <a:avLst/>
@@ -9476,7 +9476,7 @@
           <a:p>
             <a:pPr algn="ctr"/>
             <a:r>
-              <a:rPr sz="1500" b="1">
+              <a:rPr sz="1600" b="1">
                 <a:solidFill>
                   <a:srgbClr val="FFFFFF"/>
                 </a:solidFill>
@@ -9488,7 +9488,7 @@
           <a:p>
             <a:pPr algn="ctr"/>
             <a:r>
-              <a:rPr sz="1500" b="1">
+              <a:rPr sz="1600" b="1">
                 <a:solidFill>
                   <a:srgbClr val="FFFFFF"/>
                 </a:solidFill>
@@ -9500,7 +9500,7 @@
           <a:p>
             <a:pPr algn="ctr"/>
             <a:r>
-              <a:rPr sz="1500" b="1">
+              <a:rPr sz="1600" b="1">
                 <a:solidFill>
                   <a:srgbClr val="FFFFFF"/>
                 </a:solidFill>
@@ -9519,8 +9519,8 @@
         </p:nvSpPr>
         <p:spPr>
           <a:xfrm>
-            <a:off x="2084832" y="3749039"/>
-            <a:ext cx="1417320" cy="365760"/>
+            <a:off x="2359152" y="3749039"/>
+            <a:ext cx="1627632" cy="365760"/>
           </a:xfrm>
           <a:prstGeom prst="rect">
             <a:avLst/>
@@ -9554,8 +9554,8 @@
         </p:nvSpPr>
         <p:spPr>
           <a:xfrm>
-            <a:off x="3456432" y="2560320"/>
-            <a:ext cx="274320" cy="457200"/>
+            <a:off x="3959352" y="2560320"/>
+            <a:ext cx="320040" cy="457200"/>
           </a:xfrm>
           <a:prstGeom prst="rect">
             <a:avLst/>
@@ -9570,7 +9570,7 @@
           <a:p>
             <a:pPr algn="ctr"/>
             <a:r>
-              <a:rPr sz="1200" b="1">
+              <a:rPr sz="1300" b="1">
                 <a:solidFill>
                   <a:srgbClr val="666666"/>
                 </a:solidFill>
@@ -9589,8 +9589,8 @@
         </p:nvSpPr>
         <p:spPr>
           <a:xfrm>
-            <a:off x="3712464" y="1920240"/>
-            <a:ext cx="1417320" cy="1737360"/>
+            <a:off x="4261104" y="1920240"/>
+            <a:ext cx="1627632" cy="1737360"/>
           </a:xfrm>
           <a:prstGeom prst="roundRect">
             <a:avLst>
@@ -9635,8 +9635,8 @@
         </p:nvSpPr>
         <p:spPr>
           <a:xfrm>
-            <a:off x="3712464" y="1920240"/>
-            <a:ext cx="1417320" cy="1737360"/>
+            <a:off x="4261104" y="1920240"/>
+            <a:ext cx="1627632" cy="1737360"/>
           </a:xfrm>
           <a:prstGeom prst="rect">
             <a:avLst/>
@@ -9651,7 +9651,7 @@
           <a:p>
             <a:pPr algn="ctr"/>
             <a:r>
-              <a:rPr sz="1500" b="1">
+              <a:rPr sz="1600" b="1">
                 <a:solidFill>
                   <a:srgbClr val="666666"/>
                 </a:solidFill>
@@ -9663,7 +9663,7 @@
           <a:p>
             <a:pPr algn="ctr"/>
             <a:r>
-              <a:rPr sz="1500" b="1">
+              <a:rPr sz="1600" b="1">
                 <a:solidFill>
                   <a:srgbClr val="666666"/>
                 </a:solidFill>
@@ -9675,7 +9675,7 @@
           <a:p>
             <a:pPr algn="ctr"/>
             <a:r>
-              <a:rPr sz="1500" b="1">
+              <a:rPr sz="1600" b="1">
                 <a:solidFill>
                   <a:srgbClr val="666666"/>
                 </a:solidFill>
@@ -9694,8 +9694,8 @@
         </p:nvSpPr>
         <p:spPr>
           <a:xfrm>
-            <a:off x="3712464" y="3749039"/>
-            <a:ext cx="1417320" cy="365760"/>
+            <a:off x="4261104" y="3749039"/>
+            <a:ext cx="1627632" cy="365760"/>
           </a:xfrm>
           <a:prstGeom prst="rect">
             <a:avLst/>
@@ -9729,8 +9729,8 @@
         </p:nvSpPr>
         <p:spPr>
           <a:xfrm>
-            <a:off x="5084064" y="2560320"/>
-            <a:ext cx="274320" cy="457200"/>
+            <a:off x="5861304" y="2560320"/>
+            <a:ext cx="320040" cy="457200"/>
           </a:xfrm>
           <a:prstGeom prst="rect">
             <a:avLst/>
@@ -9745,7 +9745,7 @@
           <a:p>
             <a:pPr algn="ctr"/>
             <a:r>
-              <a:rPr sz="1200" b="1">
+              <a:rPr sz="1300" b="1">
                 <a:solidFill>
                   <a:srgbClr val="666666"/>
                 </a:solidFill>
@@ -9764,8 +9764,8 @@
         </p:nvSpPr>
         <p:spPr>
           <a:xfrm>
-            <a:off x="5340096" y="1920240"/>
-            <a:ext cx="1417320" cy="1737360"/>
+            <a:off x="6163056" y="1920240"/>
+            <a:ext cx="1627632" cy="1737360"/>
           </a:xfrm>
           <a:prstGeom prst="roundRect">
             <a:avLst>
@@ -9810,8 +9810,8 @@
         </p:nvSpPr>
         <p:spPr>
           <a:xfrm>
-            <a:off x="5340096" y="1920240"/>
-            <a:ext cx="1417320" cy="1737360"/>
+            <a:off x="6163056" y="1920240"/>
+            <a:ext cx="1627632" cy="1737360"/>
           </a:xfrm>
           <a:prstGeom prst="rect">
             <a:avLst/>
@@ -9826,7 +9826,7 @@
           <a:p>
             <a:pPr algn="ctr"/>
             <a:r>
-              <a:rPr sz="1500" b="1">
+              <a:rPr sz="1600" b="1">
                 <a:solidFill>
                   <a:srgbClr val="FFFFFF"/>
                 </a:solidFill>
@@ -9838,7 +9838,7 @@
           <a:p>
             <a:pPr algn="ctr"/>
             <a:r>
-              <a:rPr sz="1500" b="1">
+              <a:rPr sz="1600" b="1">
                 <a:solidFill>
                   <a:srgbClr val="FFFFFF"/>
                 </a:solidFill>
@@ -9850,7 +9850,7 @@
           <a:p>
             <a:pPr algn="ctr"/>
             <a:r>
-              <a:rPr sz="1500" b="1">
+              <a:rPr sz="1600" b="1">
                 <a:solidFill>
                   <a:srgbClr val="FFFFFF"/>
                 </a:solidFill>
@@ -9869,8 +9869,8 @@
         </p:nvSpPr>
         <p:spPr>
           <a:xfrm>
-            <a:off x="5340096" y="3749039"/>
-            <a:ext cx="1417320" cy="365760"/>
+            <a:off x="6163056" y="3749039"/>
+            <a:ext cx="1627632" cy="365760"/>
           </a:xfrm>
           <a:prstGeom prst="rect">
             <a:avLst/>
@@ -9904,8 +9904,8 @@
         </p:nvSpPr>
         <p:spPr>
           <a:xfrm>
-            <a:off x="6711696" y="2560320"/>
-            <a:ext cx="274320" cy="457200"/>
+            <a:off x="7763256" y="2560320"/>
+            <a:ext cx="320040" cy="457200"/>
           </a:xfrm>
           <a:prstGeom prst="rect">
             <a:avLst/>
@@ -9920,7 +9920,7 @@
           <a:p>
             <a:pPr algn="ctr"/>
             <a:r>
-              <a:rPr sz="1200" b="1">
+              <a:rPr sz="1300" b="1">
                 <a:solidFill>
                   <a:srgbClr val="666666"/>
                 </a:solidFill>
@@ -9939,8 +9939,8 @@
         </p:nvSpPr>
         <p:spPr>
           <a:xfrm>
-            <a:off x="6967728" y="1920240"/>
-            <a:ext cx="1417320" cy="1737360"/>
+            <a:off x="8065008" y="1920240"/>
+            <a:ext cx="1627632" cy="1737360"/>
           </a:xfrm>
           <a:prstGeom prst="roundRect">
             <a:avLst>
@@ -9985,8 +9985,8 @@
         </p:nvSpPr>
         <p:spPr>
           <a:xfrm>
-            <a:off x="6967728" y="1920240"/>
-            <a:ext cx="1417320" cy="1737360"/>
+            <a:off x="8065008" y="1920240"/>
+            <a:ext cx="1627632" cy="1737360"/>
           </a:xfrm>
           <a:prstGeom prst="rect">
             <a:avLst/>
@@ -10001,7 +10001,7 @@
           <a:p>
             <a:pPr algn="ctr"/>
             <a:r>
-              <a:rPr sz="1500" b="1">
+              <a:rPr sz="1600" b="1">
                 <a:solidFill>
                   <a:srgbClr val="666666"/>
                 </a:solidFill>
@@ -10013,7 +10013,7 @@
           <a:p>
             <a:pPr algn="ctr"/>
             <a:r>
-              <a:rPr sz="1500" b="1">
+              <a:rPr sz="1600" b="1">
                 <a:solidFill>
                   <a:srgbClr val="666666"/>
                 </a:solidFill>
@@ -10025,7 +10025,7 @@
           <a:p>
             <a:pPr algn="ctr"/>
             <a:r>
-              <a:rPr sz="1500" b="1">
+              <a:rPr sz="1600" b="1">
                 <a:solidFill>
                   <a:srgbClr val="666666"/>
                 </a:solidFill>
@@ -10044,8 +10044,8 @@
         </p:nvSpPr>
         <p:spPr>
           <a:xfrm>
-            <a:off x="6967728" y="3749039"/>
-            <a:ext cx="1417320" cy="365760"/>
+            <a:off x="8065008" y="3749039"/>
+            <a:ext cx="1627632" cy="365760"/>
           </a:xfrm>
           <a:prstGeom prst="rect">
             <a:avLst/>
@@ -10079,8 +10079,8 @@
         </p:nvSpPr>
         <p:spPr>
           <a:xfrm>
-            <a:off x="8339328" y="2560320"/>
-            <a:ext cx="274320" cy="457200"/>
+            <a:off x="9665208" y="2560320"/>
+            <a:ext cx="320040" cy="457200"/>
           </a:xfrm>
           <a:prstGeom prst="rect">
             <a:avLst/>
@@ -10095,7 +10095,7 @@
           <a:p>
             <a:pPr algn="ctr"/>
             <a:r>
-              <a:rPr sz="1200" b="1">
+              <a:rPr sz="1300" b="1">
                 <a:solidFill>
                   <a:srgbClr val="666666"/>
                 </a:solidFill>
@@ -10114,8 +10114,8 @@
         </p:nvSpPr>
         <p:spPr>
           <a:xfrm>
-            <a:off x="8595360" y="1920240"/>
-            <a:ext cx="1417320" cy="1737360"/>
+            <a:off x="9966960" y="1920240"/>
+            <a:ext cx="1627632" cy="1737360"/>
           </a:xfrm>
           <a:prstGeom prst="roundRect">
             <a:avLst>
@@ -10160,8 +10160,8 @@
         </p:nvSpPr>
         <p:spPr>
           <a:xfrm>
-            <a:off x="8595360" y="1920240"/>
-            <a:ext cx="1417320" cy="1737360"/>
+            <a:off x="9966960" y="1920240"/>
+            <a:ext cx="1627632" cy="1737360"/>
           </a:xfrm>
           <a:prstGeom prst="rect">
             <a:avLst/>
@@ -10176,7 +10176,7 @@
           <a:p>
             <a:pPr algn="ctr"/>
             <a:r>
-              <a:rPr sz="1500" b="1">
+              <a:rPr sz="1600" b="1">
                 <a:solidFill>
                   <a:srgbClr val="666666"/>
                 </a:solidFill>
@@ -10188,59 +10188,47 @@
           <a:p>
             <a:pPr algn="ctr"/>
             <a:r>
-              <a:rPr sz="1500" b="1">
+              <a:rPr sz="1600" b="1">
                 <a:solidFill>
                   <a:srgbClr val="666666"/>
                 </a:solidFill>
                 <a:latin typeface="Yu Gothic"/>
               </a:rPr>
-              <a:t>身元調査</a:t>
-            </a:r>
-          </a:p>
-          <a:p>
-            <a:pPr algn="ctr"/>
-            <a:r>
-              <a:rPr sz="1500" b="1">
+              <a:t>登録完了</a:t>
+            </a:r>
+          </a:p>
+        </p:txBody>
+      </p:sp>
+      <p:sp>
+        <p:nvSpPr>
+          <p:cNvPr id="27" name="TextBox 26"/>
+          <p:cNvSpPr txBox="1"/>
+          <p:nvPr/>
+        </p:nvSpPr>
+        <p:spPr>
+          <a:xfrm>
+            <a:off x="9966960" y="3749039"/>
+            <a:ext cx="1627632" cy="365760"/>
+          </a:xfrm>
+          <a:prstGeom prst="rect">
+            <a:avLst/>
+          </a:prstGeom>
+          <a:noFill/>
+        </p:spPr>
+        <p:txBody>
+          <a:bodyPr wrap="square" lIns="45720" rIns="45720" tIns="22860" bIns="22860" anchor="t">
+            <a:spAutoFit/>
+          </a:bodyPr>
+          <a:lstStyle/>
+          <a:p>
+            <a:pPr algn="ctr"/>
+            <a:r>
+              <a:rPr sz="1200" b="1">
                 <a:solidFill>
                   <a:srgbClr val="666666"/>
                 </a:solidFill>
                 <a:latin typeface="Yu Gothic"/>
               </a:rPr>
-              <a:t>(BGC)</a:t>
-            </a:r>
-          </a:p>
-        </p:txBody>
-      </p:sp>
-      <p:sp>
-        <p:nvSpPr>
-          <p:cNvPr id="27" name="TextBox 26"/>
-          <p:cNvSpPr txBox="1"/>
-          <p:nvPr/>
-        </p:nvSpPr>
-        <p:spPr>
-          <a:xfrm>
-            <a:off x="8595360" y="3749039"/>
-            <a:ext cx="1417320" cy="365760"/>
-          </a:xfrm>
-          <a:prstGeom prst="rect">
-            <a:avLst/>
-          </a:prstGeom>
-          <a:noFill/>
-        </p:spPr>
-        <p:txBody>
-          <a:bodyPr wrap="square" lIns="45720" rIns="45720" tIns="22860" bIns="22860" anchor="t">
-            <a:spAutoFit/>
-          </a:bodyPr>
-          <a:lstStyle/>
-          <a:p>
-            <a:pPr algn="ctr"/>
-            <a:r>
-              <a:rPr sz="1200" b="1">
-                <a:solidFill>
-                  <a:srgbClr val="666666"/>
-                </a:solidFill>
-                <a:latin typeface="Yu Gothic"/>
-              </a:rPr>
               <a:t>作成中</a:t>
             </a:r>
           </a:p>
@@ -10248,170 +10236,7 @@
       </p:sp>
       <p:sp>
         <p:nvSpPr>
-          <p:cNvPr id="28" name="TextBox 27"/>
-          <p:cNvSpPr txBox="1"/>
-          <p:nvPr/>
-        </p:nvSpPr>
-        <p:spPr>
-          <a:xfrm>
-            <a:off x="9966960" y="2560320"/>
-            <a:ext cx="274320" cy="457200"/>
-          </a:xfrm>
-          <a:prstGeom prst="rect">
-            <a:avLst/>
-          </a:prstGeom>
-          <a:noFill/>
-        </p:spPr>
-        <p:txBody>
-          <a:bodyPr wrap="square" lIns="45720" rIns="45720" tIns="22860" bIns="22860" anchor="t">
-            <a:spAutoFit/>
-          </a:bodyPr>
-          <a:lstStyle/>
-          <a:p>
-            <a:pPr algn="ctr"/>
-            <a:r>
-              <a:rPr sz="1200" b="1">
-                <a:solidFill>
-                  <a:srgbClr val="666666"/>
-                </a:solidFill>
-                <a:latin typeface="Yu Gothic"/>
-              </a:rPr>
-              <a:t>▶</a:t>
-            </a:r>
-          </a:p>
-        </p:txBody>
-      </p:sp>
-      <p:sp>
-        <p:nvSpPr>
-          <p:cNvPr id="29" name="Rounded Rectangle 28"/>
-          <p:cNvSpPr/>
-          <p:nvPr/>
-        </p:nvSpPr>
-        <p:spPr>
-          <a:xfrm>
-            <a:off x="10222992" y="1920240"/>
-            <a:ext cx="1417320" cy="1737360"/>
-          </a:xfrm>
-          <a:prstGeom prst="roundRect">
-            <a:avLst>
-              <a:gd name="adj" fmla="val 10000"/>
-            </a:avLst>
-          </a:prstGeom>
-          <a:solidFill>
-            <a:srgbClr val="EEEEEE"/>
-          </a:solidFill>
-          <a:ln>
-            <a:noFill/>
-          </a:ln>
-          <a:effectLst/>
-        </p:spPr>
-        <p:style>
-          <a:lnRef idx="1">
-            <a:schemeClr val="accent1"/>
-          </a:lnRef>
-          <a:fillRef idx="3">
-            <a:schemeClr val="accent1"/>
-          </a:fillRef>
-          <a:effectRef idx="2">
-            <a:schemeClr val="accent1"/>
-          </a:effectRef>
-          <a:fontRef idx="minor">
-            <a:schemeClr val="lt1"/>
-          </a:fontRef>
-        </p:style>
-        <p:txBody>
-          <a:bodyPr rtlCol="0" anchor="ctr"/>
-          <a:lstStyle/>
-          <a:p>
-            <a:pPr algn="ctr"/>
-          </a:p>
-        </p:txBody>
-      </p:sp>
-      <p:sp>
-        <p:nvSpPr>
-          <p:cNvPr id="30" name="TextBox 29"/>
-          <p:cNvSpPr txBox="1"/>
-          <p:nvPr/>
-        </p:nvSpPr>
-        <p:spPr>
-          <a:xfrm>
-            <a:off x="10222992" y="1920240"/>
-            <a:ext cx="1417320" cy="1737360"/>
-          </a:xfrm>
-          <a:prstGeom prst="rect">
-            <a:avLst/>
-          </a:prstGeom>
-          <a:noFill/>
-        </p:spPr>
-        <p:txBody>
-          <a:bodyPr wrap="square" lIns="45720" rIns="45720" tIns="22860" bIns="22860" anchor="ctr">
-            <a:spAutoFit/>
-          </a:bodyPr>
-          <a:lstStyle/>
-          <a:p>
-            <a:pPr algn="ctr"/>
-            <a:r>
-              <a:rPr sz="1500" b="1">
-                <a:solidFill>
-                  <a:srgbClr val="666666"/>
-                </a:solidFill>
-                <a:latin typeface="Yu Gothic"/>
-              </a:rPr>
-              <a:t>⑦</a:t>
-            </a:r>
-          </a:p>
-          <a:p>
-            <a:pPr algn="ctr"/>
-            <a:r>
-              <a:rPr sz="1500" b="1">
-                <a:solidFill>
-                  <a:srgbClr val="666666"/>
-                </a:solidFill>
-                <a:latin typeface="Yu Gothic"/>
-              </a:rPr>
-              <a:t>登録完了</a:t>
-            </a:r>
-          </a:p>
-        </p:txBody>
-      </p:sp>
-      <p:sp>
-        <p:nvSpPr>
-          <p:cNvPr id="31" name="TextBox 30"/>
-          <p:cNvSpPr txBox="1"/>
-          <p:nvPr/>
-        </p:nvSpPr>
-        <p:spPr>
-          <a:xfrm>
-            <a:off x="10222992" y="3749039"/>
-            <a:ext cx="1417320" cy="365760"/>
-          </a:xfrm>
-          <a:prstGeom prst="rect">
-            <a:avLst/>
-          </a:prstGeom>
-          <a:noFill/>
-        </p:spPr>
-        <p:txBody>
-          <a:bodyPr wrap="square" lIns="45720" rIns="45720" tIns="22860" bIns="22860" anchor="t">
-            <a:spAutoFit/>
-          </a:bodyPr>
-          <a:lstStyle/>
-          <a:p>
-            <a:pPr algn="ctr"/>
-            <a:r>
-              <a:rPr sz="1200" b="1">
-                <a:solidFill>
-                  <a:srgbClr val="666666"/>
-                </a:solidFill>
-                <a:latin typeface="Yu Gothic"/>
-              </a:rPr>
-              <a:t>作成中</a:t>
-            </a:r>
-          </a:p>
-        </p:txBody>
-      </p:sp>
-      <p:sp>
-        <p:nvSpPr>
-          <p:cNvPr id="32" name="Rounded Rectangle 31"/>
+          <p:cNvPr id="28" name="Rounded Rectangle 27"/>
           <p:cNvSpPr/>
           <p:nvPr/>
         </p:nvSpPr>
@@ -10459,7 +10284,7 @@
       </p:sp>
       <p:sp>
         <p:nvSpPr>
-          <p:cNvPr id="33" name="TextBox 32"/>
+          <p:cNvPr id="29" name="TextBox 28"/>
           <p:cNvSpPr txBox="1"/>
           <p:nvPr/>
         </p:nvSpPr>

--- a/out/登録の流れ_書類準備まで.pptx
+++ b/out/登録の流れ_書類準備まで.pptx
@@ -20012,9 +20012,44 @@
           </a:p>
         </p:txBody>
       </p:sp>
+      <p:sp>
+        <p:nvSpPr>
+          <p:cNvPr id="5" name="TextBox 4"/>
+          <p:cNvSpPr txBox="1"/>
+          <p:nvPr/>
+        </p:nvSpPr>
+        <p:spPr>
+          <a:xfrm>
+            <a:off x="411480" y="1280160"/>
+            <a:ext cx="11338560" cy="365760"/>
+          </a:xfrm>
+          <a:prstGeom prst="rect">
+            <a:avLst/>
+          </a:prstGeom>
+          <a:noFill/>
+        </p:spPr>
+        <p:txBody>
+          <a:bodyPr wrap="square" lIns="45720" rIns="45720" tIns="22860" bIns="22860" anchor="t">
+            <a:spAutoFit/>
+          </a:bodyPr>
+          <a:lstStyle/>
+          <a:p>
+            <a:pPr algn="l"/>
+            <a:r>
+              <a:rPr sz="1500" b="1">
+                <a:solidFill>
+                  <a:srgbClr val="666666"/>
+                </a:solidFill>
+                <a:latin typeface="Yu Gothic"/>
+              </a:rPr>
+              <a:t>「オリジナルテンプレート」の一覧から選ぶ</a:t>
+            </a:r>
+          </a:p>
+        </p:txBody>
+      </p:sp>
       <p:pic>
         <p:nvPicPr>
-          <p:cNvPr id="5" name="Picture 4" descr="5.png"/>
+          <p:cNvPr id="6" name="Picture 5" descr="7.png"/>
           <p:cNvPicPr>
             <a:picLocks noChangeAspect="1"/>
           </p:cNvPicPr>
@@ -20028,8 +20063,8 @@
         </p:blipFill>
         <p:spPr>
           <a:xfrm>
-            <a:off x="1586076" y="1325880"/>
-            <a:ext cx="8989367" cy="4206240"/>
+            <a:off x="411480" y="1737360"/>
+            <a:ext cx="11338560" cy="890356"/>
           </a:xfrm>
           <a:prstGeom prst="rect">
             <a:avLst/>
@@ -20043,24 +20078,64 @@
       </p:pic>
       <p:sp>
         <p:nvSpPr>
-          <p:cNvPr id="6" name="Rounded Rectangle 5"/>
+          <p:cNvPr id="7" name="Rectangle 6"/>
           <p:cNvSpPr/>
           <p:nvPr/>
         </p:nvSpPr>
         <p:spPr>
           <a:xfrm>
-            <a:off x="411480" y="5641848"/>
-            <a:ext cx="11338560" cy="566928"/>
-          </a:xfrm>
-          <a:prstGeom prst="roundRect">
-            <a:avLst>
-              <a:gd name="adj" fmla="val 8000"/>
-            </a:avLst>
-          </a:prstGeom>
-          <a:solidFill>
-            <a:srgbClr val="FFF6E0"/>
-          </a:solidFill>
-          <a:ln w="19050">
+            <a:off x="438460" y="1755648"/>
+            <a:ext cx="11292840" cy="435582"/>
+          </a:xfrm>
+          <a:prstGeom prst="rect">
+            <a:avLst/>
+          </a:prstGeom>
+          <a:noFill/>
+          <a:ln w="38100">
+            <a:solidFill>
+              <a:srgbClr val="D32F2F"/>
+            </a:solidFill>
+          </a:ln>
+          <a:effectLst/>
+        </p:spPr>
+        <p:style>
+          <a:lnRef idx="1">
+            <a:schemeClr val="accent1"/>
+          </a:lnRef>
+          <a:fillRef idx="3">
+            <a:schemeClr val="accent1"/>
+          </a:fillRef>
+          <a:effectRef idx="2">
+            <a:schemeClr val="accent1"/>
+          </a:effectRef>
+          <a:fontRef idx="minor">
+            <a:schemeClr val="lt1"/>
+          </a:fontRef>
+        </p:style>
+        <p:txBody>
+          <a:bodyPr rtlCol="0" anchor="ctr"/>
+          <a:lstStyle/>
+          <a:p>
+            <a:pPr algn="ctr"/>
+          </a:p>
+        </p:txBody>
+      </p:sp>
+      <p:sp>
+        <p:nvSpPr>
+          <p:cNvPr id="8" name="Rectangle 7"/>
+          <p:cNvSpPr/>
+          <p:nvPr/>
+        </p:nvSpPr>
+        <p:spPr>
+          <a:xfrm>
+            <a:off x="438460" y="2241297"/>
+            <a:ext cx="11292840" cy="368131"/>
+          </a:xfrm>
+          <a:prstGeom prst="rect">
+            <a:avLst/>
+          </a:prstGeom>
+          <a:noFill/>
+          <a:ln w="38100">
             <a:solidFill>
               <a:srgbClr val="F29A3C"/>
             </a:solidFill>
@@ -20091,14 +20166,152 @@
       </p:sp>
       <p:sp>
         <p:nvSpPr>
-          <p:cNvPr id="7" name="TextBox 6"/>
-          <p:cNvSpPr txBox="1"/>
-          <p:nvPr/>
-        </p:nvSpPr>
-        <p:spPr>
-          <a:xfrm>
-            <a:off x="594360" y="5641848"/>
-            <a:ext cx="10972800" cy="566928"/>
+          <p:cNvPr id="9" name="Rounded Rectangle 8"/>
+          <p:cNvSpPr/>
+          <p:nvPr/>
+        </p:nvSpPr>
+        <p:spPr>
+          <a:xfrm>
+            <a:off x="411480" y="3108960"/>
+            <a:ext cx="5577840" cy="2651760"/>
+          </a:xfrm>
+          <a:prstGeom prst="roundRect">
+            <a:avLst>
+              <a:gd name="adj" fmla="val 8000"/>
+            </a:avLst>
+          </a:prstGeom>
+          <a:solidFill>
+            <a:srgbClr val="FDECEC"/>
+          </a:solidFill>
+          <a:ln w="12700">
+            <a:solidFill>
+              <a:srgbClr val="D32F2F"/>
+            </a:solidFill>
+          </a:ln>
+          <a:effectLst/>
+        </p:spPr>
+        <p:style>
+          <a:lnRef idx="1">
+            <a:schemeClr val="accent1"/>
+          </a:lnRef>
+          <a:fillRef idx="3">
+            <a:schemeClr val="accent1"/>
+          </a:fillRef>
+          <a:effectRef idx="2">
+            <a:schemeClr val="accent1"/>
+          </a:effectRef>
+          <a:fontRef idx="minor">
+            <a:schemeClr val="lt1"/>
+          </a:fontRef>
+        </p:style>
+        <p:txBody>
+          <a:bodyPr rtlCol="0" anchor="ctr"/>
+          <a:lstStyle/>
+          <a:p>
+            <a:pPr algn="ctr"/>
+          </a:p>
+        </p:txBody>
+      </p:sp>
+      <p:sp>
+        <p:nvSpPr>
+          <p:cNvPr id="10" name="Rounded Rectangle 9"/>
+          <p:cNvSpPr/>
+          <p:nvPr/>
+        </p:nvSpPr>
+        <p:spPr>
+          <a:xfrm>
+            <a:off x="411480" y="3108960"/>
+            <a:ext cx="5577840" cy="457200"/>
+          </a:xfrm>
+          <a:prstGeom prst="roundRect">
+            <a:avLst>
+              <a:gd name="adj" fmla="val 8000"/>
+            </a:avLst>
+          </a:prstGeom>
+          <a:solidFill>
+            <a:srgbClr val="D32F2F"/>
+          </a:solidFill>
+          <a:ln>
+            <a:noFill/>
+          </a:ln>
+          <a:effectLst/>
+        </p:spPr>
+        <p:style>
+          <a:lnRef idx="1">
+            <a:schemeClr val="accent1"/>
+          </a:lnRef>
+          <a:fillRef idx="3">
+            <a:schemeClr val="accent1"/>
+          </a:fillRef>
+          <a:effectRef idx="2">
+            <a:schemeClr val="accent1"/>
+          </a:effectRef>
+          <a:fontRef idx="minor">
+            <a:schemeClr val="lt1"/>
+          </a:fontRef>
+        </p:style>
+        <p:txBody>
+          <a:bodyPr rtlCol="0" anchor="ctr"/>
+          <a:lstStyle/>
+          <a:p>
+            <a:pPr algn="ctr"/>
+          </a:p>
+        </p:txBody>
+      </p:sp>
+      <p:sp>
+        <p:nvSpPr>
+          <p:cNvPr id="11" name="Rectangle 10"/>
+          <p:cNvSpPr/>
+          <p:nvPr/>
+        </p:nvSpPr>
+        <p:spPr>
+          <a:xfrm>
+            <a:off x="411480" y="3337560"/>
+            <a:ext cx="5577840" cy="228600"/>
+          </a:xfrm>
+          <a:prstGeom prst="rect">
+            <a:avLst/>
+          </a:prstGeom>
+          <a:solidFill>
+            <a:srgbClr val="D32F2F"/>
+          </a:solidFill>
+          <a:ln>
+            <a:noFill/>
+          </a:ln>
+          <a:effectLst/>
+        </p:spPr>
+        <p:style>
+          <a:lnRef idx="1">
+            <a:schemeClr val="accent1"/>
+          </a:lnRef>
+          <a:fillRef idx="3">
+            <a:schemeClr val="accent1"/>
+          </a:fillRef>
+          <a:effectRef idx="2">
+            <a:schemeClr val="accent1"/>
+          </a:effectRef>
+          <a:fontRef idx="minor">
+            <a:schemeClr val="lt1"/>
+          </a:fontRef>
+        </p:style>
+        <p:txBody>
+          <a:bodyPr rtlCol="0" anchor="ctr"/>
+          <a:lstStyle/>
+          <a:p>
+            <a:pPr algn="ctr"/>
+          </a:p>
+        </p:txBody>
+      </p:sp>
+      <p:sp>
+        <p:nvSpPr>
+          <p:cNvPr id="12" name="TextBox 11"/>
+          <p:cNvSpPr txBox="1"/>
+          <p:nvPr/>
+        </p:nvSpPr>
+        <p:spPr>
+          <a:xfrm>
+            <a:off x="411480" y="3108960"/>
+            <a:ext cx="5577840" cy="457200"/>
           </a:xfrm>
           <a:prstGeom prst="rect">
             <a:avLst/>
@@ -20111,15 +20324,330 @@
           </a:bodyPr>
           <a:lstStyle/>
           <a:p>
+            <a:pPr algn="ctr"/>
+            <a:r>
+              <a:rPr sz="1300" b="1">
+                <a:solidFill>
+                  <a:srgbClr val="FFFFFF"/>
+                </a:solidFill>
+                <a:latin typeface="Yu Gothic"/>
+              </a:rPr>
+              <a:t>ふつうの配達員</a:t>
+            </a:r>
+          </a:p>
+        </p:txBody>
+      </p:sp>
+      <p:sp>
+        <p:nvSpPr>
+          <p:cNvPr id="13" name="TextBox 12"/>
+          <p:cNvSpPr txBox="1"/>
+          <p:nvPr/>
+        </p:nvSpPr>
+        <p:spPr>
+          <a:xfrm>
+            <a:off x="594360" y="3703320"/>
+            <a:ext cx="5212080" cy="2011680"/>
+          </a:xfrm>
+          <a:prstGeom prst="rect">
+            <a:avLst/>
+          </a:prstGeom>
+          <a:noFill/>
+        </p:spPr>
+        <p:txBody>
+          <a:bodyPr wrap="square" lIns="45720" rIns="45720" tIns="22860" bIns="22860" anchor="t">
+            <a:spAutoFit/>
+          </a:bodyPr>
+          <a:lstStyle/>
+          <a:p>
             <a:pPr algn="l"/>
             <a:r>
-              <a:rPr sz="1500" b="1">
+              <a:rPr sz="1700" b="1">
                 <a:solidFill>
                   <a:srgbClr val="333333"/>
                 </a:solidFill>
                 <a:latin typeface="Yu Gothic"/>
               </a:rPr>
-              <a:t>選ぶのは「241001_アマゾン配送業務委託契約書(直接契約用)」</a:t>
+              <a:t>251201_アマゾン配送業務委託契約書</a:t>
+            </a:r>
+          </a:p>
+          <a:p>
+            <a:pPr algn="l"/>
+            <a:r>
+              <a:rPr sz="1700" b="1">
+                <a:solidFill>
+                  <a:srgbClr val="333333"/>
+                </a:solidFill>
+                <a:latin typeface="Yu Gothic"/>
+              </a:rPr>
+              <a:t>(直接契約用)</a:t>
+            </a:r>
+          </a:p>
+          <a:p>
+            <a:pPr algn="l"/>
+            <a:r>
+              <a:rPr sz="1700" b="1">
+                <a:solidFill>
+                  <a:srgbClr val="333333"/>
+                </a:solidFill>
+                <a:latin typeface="Yu Gothic"/>
+              </a:rPr>
+              <a:t/>
+            </a:r>
+          </a:p>
+          <a:p>
+            <a:pPr algn="l"/>
+            <a:r>
+              <a:rPr sz="1700" b="1">
+                <a:solidFill>
+                  <a:srgbClr val="333333"/>
+                </a:solidFill>
+                <a:latin typeface="Yu Gothic"/>
+              </a:rPr>
+              <a:t>上の行（赤枠）</a:t>
+            </a:r>
+          </a:p>
+        </p:txBody>
+      </p:sp>
+      <p:sp>
+        <p:nvSpPr>
+          <p:cNvPr id="14" name="Rounded Rectangle 13"/>
+          <p:cNvSpPr/>
+          <p:nvPr/>
+        </p:nvSpPr>
+        <p:spPr>
+          <a:xfrm>
+            <a:off x="6172200" y="3108960"/>
+            <a:ext cx="5577840" cy="2651760"/>
+          </a:xfrm>
+          <a:prstGeom prst="roundRect">
+            <a:avLst>
+              <a:gd name="adj" fmla="val 8000"/>
+            </a:avLst>
+          </a:prstGeom>
+          <a:solidFill>
+            <a:srgbClr val="FFF6E0"/>
+          </a:solidFill>
+          <a:ln w="12700">
+            <a:solidFill>
+              <a:srgbClr val="F29A3C"/>
+            </a:solidFill>
+          </a:ln>
+          <a:effectLst/>
+        </p:spPr>
+        <p:style>
+          <a:lnRef idx="1">
+            <a:schemeClr val="accent1"/>
+          </a:lnRef>
+          <a:fillRef idx="3">
+            <a:schemeClr val="accent1"/>
+          </a:fillRef>
+          <a:effectRef idx="2">
+            <a:schemeClr val="accent1"/>
+          </a:effectRef>
+          <a:fontRef idx="minor">
+            <a:schemeClr val="lt1"/>
+          </a:fontRef>
+        </p:style>
+        <p:txBody>
+          <a:bodyPr rtlCol="0" anchor="ctr"/>
+          <a:lstStyle/>
+          <a:p>
+            <a:pPr algn="ctr"/>
+          </a:p>
+        </p:txBody>
+      </p:sp>
+      <p:sp>
+        <p:nvSpPr>
+          <p:cNvPr id="15" name="Rounded Rectangle 14"/>
+          <p:cNvSpPr/>
+          <p:nvPr/>
+        </p:nvSpPr>
+        <p:spPr>
+          <a:xfrm>
+            <a:off x="6172200" y="3108960"/>
+            <a:ext cx="5577840" cy="457200"/>
+          </a:xfrm>
+          <a:prstGeom prst="roundRect">
+            <a:avLst>
+              <a:gd name="adj" fmla="val 8000"/>
+            </a:avLst>
+          </a:prstGeom>
+          <a:solidFill>
+            <a:srgbClr val="F29A3C"/>
+          </a:solidFill>
+          <a:ln>
+            <a:noFill/>
+          </a:ln>
+          <a:effectLst/>
+        </p:spPr>
+        <p:style>
+          <a:lnRef idx="1">
+            <a:schemeClr val="accent1"/>
+          </a:lnRef>
+          <a:fillRef idx="3">
+            <a:schemeClr val="accent1"/>
+          </a:fillRef>
+          <a:effectRef idx="2">
+            <a:schemeClr val="accent1"/>
+          </a:effectRef>
+          <a:fontRef idx="minor">
+            <a:schemeClr val="lt1"/>
+          </a:fontRef>
+        </p:style>
+        <p:txBody>
+          <a:bodyPr rtlCol="0" anchor="ctr"/>
+          <a:lstStyle/>
+          <a:p>
+            <a:pPr algn="ctr"/>
+          </a:p>
+        </p:txBody>
+      </p:sp>
+      <p:sp>
+        <p:nvSpPr>
+          <p:cNvPr id="16" name="Rectangle 15"/>
+          <p:cNvSpPr/>
+          <p:nvPr/>
+        </p:nvSpPr>
+        <p:spPr>
+          <a:xfrm>
+            <a:off x="6172200" y="3337560"/>
+            <a:ext cx="5577840" cy="228600"/>
+          </a:xfrm>
+          <a:prstGeom prst="rect">
+            <a:avLst/>
+          </a:prstGeom>
+          <a:solidFill>
+            <a:srgbClr val="F29A3C"/>
+          </a:solidFill>
+          <a:ln>
+            <a:noFill/>
+          </a:ln>
+          <a:effectLst/>
+        </p:spPr>
+        <p:style>
+          <a:lnRef idx="1">
+            <a:schemeClr val="accent1"/>
+          </a:lnRef>
+          <a:fillRef idx="3">
+            <a:schemeClr val="accent1"/>
+          </a:fillRef>
+          <a:effectRef idx="2">
+            <a:schemeClr val="accent1"/>
+          </a:effectRef>
+          <a:fontRef idx="minor">
+            <a:schemeClr val="lt1"/>
+          </a:fontRef>
+        </p:style>
+        <p:txBody>
+          <a:bodyPr rtlCol="0" anchor="ctr"/>
+          <a:lstStyle/>
+          <a:p>
+            <a:pPr algn="ctr"/>
+          </a:p>
+        </p:txBody>
+      </p:sp>
+      <p:sp>
+        <p:nvSpPr>
+          <p:cNvPr id="17" name="TextBox 16"/>
+          <p:cNvSpPr txBox="1"/>
+          <p:nvPr/>
+        </p:nvSpPr>
+        <p:spPr>
+          <a:xfrm>
+            <a:off x="6172200" y="3108960"/>
+            <a:ext cx="5577840" cy="457200"/>
+          </a:xfrm>
+          <a:prstGeom prst="rect">
+            <a:avLst/>
+          </a:prstGeom>
+          <a:noFill/>
+        </p:spPr>
+        <p:txBody>
+          <a:bodyPr wrap="square" lIns="45720" rIns="45720" tIns="22860" bIns="22860" anchor="ctr">
+            <a:spAutoFit/>
+          </a:bodyPr>
+          <a:lstStyle/>
+          <a:p>
+            <a:pPr algn="ctr"/>
+            <a:r>
+              <a:rPr sz="1300" b="1">
+                <a:solidFill>
+                  <a:srgbClr val="FFFFFF"/>
+                </a:solidFill>
+                <a:latin typeface="Yu Gothic"/>
+              </a:rPr>
+              <a:t>自転車・台車・原付の配達員</a:t>
+            </a:r>
+          </a:p>
+        </p:txBody>
+      </p:sp>
+      <p:sp>
+        <p:nvSpPr>
+          <p:cNvPr id="18" name="TextBox 17"/>
+          <p:cNvSpPr txBox="1"/>
+          <p:nvPr/>
+        </p:nvSpPr>
+        <p:spPr>
+          <a:xfrm>
+            <a:off x="6355080" y="3703320"/>
+            <a:ext cx="5212080" cy="2011680"/>
+          </a:xfrm>
+          <a:prstGeom prst="rect">
+            <a:avLst/>
+          </a:prstGeom>
+          <a:noFill/>
+        </p:spPr>
+        <p:txBody>
+          <a:bodyPr wrap="square" lIns="45720" rIns="45720" tIns="22860" bIns="22860" anchor="t">
+            <a:spAutoFit/>
+          </a:bodyPr>
+          <a:lstStyle/>
+          <a:p>
+            <a:pPr algn="l"/>
+            <a:r>
+              <a:rPr sz="1700" b="1">
+                <a:solidFill>
+                  <a:srgbClr val="333333"/>
+                </a:solidFill>
+                <a:latin typeface="Yu Gothic"/>
+              </a:rPr>
+              <a:t>251201_アマゾン配送業務委託契約書</a:t>
+            </a:r>
+          </a:p>
+          <a:p>
+            <a:pPr algn="l"/>
+            <a:r>
+              <a:rPr sz="1700" b="1">
+                <a:solidFill>
+                  <a:srgbClr val="333333"/>
+                </a:solidFill>
+                <a:latin typeface="Yu Gothic"/>
+              </a:rPr>
+              <a:t>(直契約自転車・台車・原付配達員用)</a:t>
+            </a:r>
+          </a:p>
+          <a:p>
+            <a:pPr algn="l"/>
+            <a:r>
+              <a:rPr sz="1700" b="1">
+                <a:solidFill>
+                  <a:srgbClr val="333333"/>
+                </a:solidFill>
+                <a:latin typeface="Yu Gothic"/>
+              </a:rPr>
+              <a:t/>
+            </a:r>
+          </a:p>
+          <a:p>
+            <a:pPr algn="l"/>
+            <a:r>
+              <a:rPr sz="1700" b="1">
+                <a:solidFill>
+                  <a:srgbClr val="333333"/>
+                </a:solidFill>
+                <a:latin typeface="Yu Gothic"/>
+              </a:rPr>
+              <a:t>下の行（橙枠）</a:t>
             </a:r>
           </a:p>
         </p:txBody>

--- a/out/登録の流れ_書類準備まで.pptx
+++ b/out/登録の流れ_書類準備まで.pptx
@@ -20042,7 +20042,7 @@
                 </a:solidFill>
                 <a:latin typeface="Yu Gothic"/>
               </a:rPr>
-              <a:t>「オリジナルテンプレート」の一覧から選ぶ</a:t>
+              <a:t>配送のタイプで、使う契約書が変わる</a:t>
             </a:r>
           </a:p>
         </p:txBody>
@@ -20332,7 +20332,7 @@
                 </a:solidFill>
                 <a:latin typeface="Yu Gothic"/>
               </a:rPr>
-              <a:t>ふつうの配達員</a:t>
+              <a:t>軽バンで配送する人</a:t>
             </a:r>
           </a:p>
         </p:txBody>
@@ -20576,7 +20576,7 @@
                 </a:solidFill>
                 <a:latin typeface="Yu Gothic"/>
               </a:rPr>
-              <a:t>自転車・台車・原付の配達員</a:t>
+              <a:t>バイカー・ウォーカーなど（軽バンを使わない配送）</a:t>
             </a:r>
           </a:p>
         </p:txBody>

--- a/out/登録の流れ_書類準備まで.pptx
+++ b/out/登録の流れ_書類準備まで.pptx
@@ -32,6 +32,7 @@
     <p:sldId id="277" r:id="rId31"/>
     <p:sldId id="278" r:id="rId32"/>
     <p:sldId id="279" r:id="rId33"/>
+    <p:sldId id="280" r:id="rId34"/>
   </p:sldIdLst>
   <p:sldSz cx="12192000" cy="6858000"/>
   <p:notesSz cx="6858000" cy="9144000"/>
@@ -5396,7 +5397,7 @@
                 </a:solidFill>
                 <a:latin typeface="Yu Gothic"/>
               </a:rPr>
-              <a:t>黄色の入力項目をクリックして、入力を完了する</a:t>
+              <a:t>この画面で、入力項目を確認する（次の3か所をドライバーが入力）</a:t>
             </a:r>
           </a:p>
         </p:txBody>
@@ -5530,7 +5531,7 @@
                 </a:solidFill>
                 <a:latin typeface="Yu Gothic"/>
               </a:rPr>
-              <a:t>⑨-1：契約書の入力項目</a:t>
+              <a:t>⑩ ドライバーが入力する場所は3か所</a:t>
             </a:r>
           </a:p>
         </p:txBody>
@@ -5618,95 +5619,49 @@
       </p:sp>
       <p:sp>
         <p:nvSpPr>
-          <p:cNvPr id="7" name="Rounded Rectangle 6"/>
+          <p:cNvPr id="7" name="TextBox 6"/>
+          <p:cNvSpPr txBox="1"/>
+          <p:nvPr/>
+        </p:nvSpPr>
+        <p:spPr>
+          <a:xfrm>
+            <a:off x="2743200" y="1280160"/>
+            <a:ext cx="8869680" cy="457200"/>
+          </a:xfrm>
+          <a:prstGeom prst="rect">
+            <a:avLst/>
+          </a:prstGeom>
+          <a:noFill/>
+        </p:spPr>
+        <p:txBody>
+          <a:bodyPr wrap="square" lIns="45720" rIns="45720" tIns="22860" bIns="22860" anchor="ctr">
+            <a:spAutoFit/>
+          </a:bodyPr>
+          <a:lstStyle/>
+          <a:p>
+            <a:pPr algn="l"/>
+            <a:r>
+              <a:rPr sz="1500" b="1">
+                <a:solidFill>
+                  <a:srgbClr val="666666"/>
+                </a:solidFill>
+                <a:latin typeface="Yu Gothic"/>
+              </a:rPr>
+              <a:t>金額（エリア・単価）の入力はありません</a:t>
+            </a:r>
+          </a:p>
+        </p:txBody>
+      </p:sp>
+      <p:sp>
+        <p:nvSpPr>
+          <p:cNvPr id="8" name="Rounded Rectangle 7"/>
           <p:cNvSpPr/>
           <p:nvPr/>
         </p:nvSpPr>
         <p:spPr>
           <a:xfrm>
-            <a:off x="2743200" y="1280160"/>
-            <a:ext cx="1828800" cy="457200"/>
-          </a:xfrm>
-          <a:prstGeom prst="roundRect">
-            <a:avLst>
-              <a:gd name="adj" fmla="val 20000"/>
-            </a:avLst>
-          </a:prstGeom>
-          <a:solidFill>
-            <a:srgbClr val="3DDC5A"/>
-          </a:solidFill>
-          <a:ln>
-            <a:noFill/>
-          </a:ln>
-          <a:effectLst/>
-        </p:spPr>
-        <p:style>
-          <a:lnRef idx="1">
-            <a:schemeClr val="accent1"/>
-          </a:lnRef>
-          <a:fillRef idx="3">
-            <a:schemeClr val="accent1"/>
-          </a:fillRef>
-          <a:effectRef idx="2">
-            <a:schemeClr val="accent1"/>
-          </a:effectRef>
-          <a:fontRef idx="minor">
-            <a:schemeClr val="lt1"/>
-          </a:fontRef>
-        </p:style>
-        <p:txBody>
-          <a:bodyPr rtlCol="0" anchor="ctr"/>
-          <a:lstStyle/>
-          <a:p>
-            <a:pPr algn="ctr"/>
-          </a:p>
-        </p:txBody>
-      </p:sp>
-      <p:sp>
-        <p:nvSpPr>
-          <p:cNvPr id="8" name="TextBox 7"/>
-          <p:cNvSpPr txBox="1"/>
-          <p:nvPr/>
-        </p:nvSpPr>
-        <p:spPr>
-          <a:xfrm>
-            <a:off x="2743200" y="1280160"/>
-            <a:ext cx="1828800" cy="457200"/>
-          </a:xfrm>
-          <a:prstGeom prst="rect">
-            <a:avLst/>
-          </a:prstGeom>
-          <a:noFill/>
-        </p:spPr>
-        <p:txBody>
-          <a:bodyPr wrap="square" lIns="45720" rIns="45720" tIns="22860" bIns="22860" anchor="ctr">
-            <a:spAutoFit/>
-          </a:bodyPr>
-          <a:lstStyle/>
-          <a:p>
-            <a:pPr algn="ctr"/>
-            <a:r>
-              <a:rPr sz="1600" b="1">
-                <a:solidFill>
-                  <a:srgbClr val="333333"/>
-                </a:solidFill>
-                <a:latin typeface="Yu Gothic"/>
-              </a:rPr>
-              <a:t>拠点入力</a:t>
-            </a:r>
-          </a:p>
-        </p:txBody>
-      </p:sp>
-      <p:sp>
-        <p:nvSpPr>
-          <p:cNvPr id="9" name="Rounded Rectangle 8"/>
-          <p:cNvSpPr/>
-          <p:nvPr/>
-        </p:nvSpPr>
-        <p:spPr>
-          <a:xfrm>
             <a:off x="548640" y="2103120"/>
-            <a:ext cx="11064240" cy="731520"/>
+            <a:ext cx="11064240" cy="868680"/>
           </a:xfrm>
           <a:prstGeom prst="roundRect">
             <a:avLst>
@@ -5747,14 +5702,49 @@
       </p:sp>
       <p:sp>
         <p:nvSpPr>
+          <p:cNvPr id="9" name="TextBox 8"/>
+          <p:cNvSpPr txBox="1"/>
+          <p:nvPr/>
+        </p:nvSpPr>
+        <p:spPr>
+          <a:xfrm>
+            <a:off x="685800" y="2103120"/>
+            <a:ext cx="548640" cy="868680"/>
+          </a:xfrm>
+          <a:prstGeom prst="rect">
+            <a:avLst/>
+          </a:prstGeom>
+          <a:noFill/>
+        </p:spPr>
+        <p:txBody>
+          <a:bodyPr wrap="square" lIns="45720" rIns="45720" tIns="22860" bIns="22860" anchor="ctr">
+            <a:spAutoFit/>
+          </a:bodyPr>
+          <a:lstStyle/>
+          <a:p>
+            <a:pPr algn="ctr"/>
+            <a:r>
+              <a:rPr sz="2200" b="1">
+                <a:solidFill>
+                  <a:srgbClr val="E12A82"/>
+                </a:solidFill>
+                <a:latin typeface="Yu Gothic"/>
+              </a:rPr>
+              <a:t>①</a:t>
+            </a:r>
+          </a:p>
+        </p:txBody>
+      </p:sp>
+      <p:sp>
+        <p:nvSpPr>
           <p:cNvPr id="10" name="TextBox 9"/>
           <p:cNvSpPr txBox="1"/>
           <p:nvPr/>
         </p:nvSpPr>
         <p:spPr>
           <a:xfrm>
-            <a:off x="685800" y="2103120"/>
-            <a:ext cx="548640" cy="731520"/>
+            <a:off x="1280160" y="2103120"/>
+            <a:ext cx="2926080" cy="868680"/>
           </a:xfrm>
           <a:prstGeom prst="rect">
             <a:avLst/>
@@ -5767,41 +5757,6 @@
           </a:bodyPr>
           <a:lstStyle/>
           <a:p>
-            <a:pPr algn="ctr"/>
-            <a:r>
-              <a:rPr sz="2000" b="1">
-                <a:solidFill>
-                  <a:srgbClr val="E12A82"/>
-                </a:solidFill>
-                <a:latin typeface="Yu Gothic"/>
-              </a:rPr>
-              <a:t>①</a:t>
-            </a:r>
-          </a:p>
-        </p:txBody>
-      </p:sp>
-      <p:sp>
-        <p:nvSpPr>
-          <p:cNvPr id="11" name="TextBox 10"/>
-          <p:cNvSpPr txBox="1"/>
-          <p:nvPr/>
-        </p:nvSpPr>
-        <p:spPr>
-          <a:xfrm>
-            <a:off x="1280160" y="2103120"/>
-            <a:ext cx="1828800" cy="731520"/>
-          </a:xfrm>
-          <a:prstGeom prst="rect">
-            <a:avLst/>
-          </a:prstGeom>
-          <a:noFill/>
-        </p:spPr>
-        <p:txBody>
-          <a:bodyPr wrap="square" lIns="45720" rIns="45720" tIns="22860" bIns="22860" anchor="ctr">
-            <a:spAutoFit/>
-          </a:bodyPr>
-          <a:lstStyle/>
-          <a:p>
             <a:pPr algn="l"/>
             <a:r>
               <a:rPr sz="1800" b="1">
@@ -5817,14 +5772,14 @@
       </p:sp>
       <p:sp>
         <p:nvSpPr>
-          <p:cNvPr id="12" name="Rounded Rectangle 11"/>
+          <p:cNvPr id="11" name="Rounded Rectangle 10"/>
           <p:cNvSpPr/>
           <p:nvPr/>
         </p:nvSpPr>
         <p:spPr>
           <a:xfrm>
-            <a:off x="3200400" y="2240279"/>
-            <a:ext cx="2414016" cy="457200"/>
+            <a:off x="4297680" y="2308860"/>
+            <a:ext cx="1005840" cy="457200"/>
           </a:xfrm>
           <a:prstGeom prst="roundRect">
             <a:avLst>
@@ -5863,14 +5818,14 @@
       </p:sp>
       <p:sp>
         <p:nvSpPr>
-          <p:cNvPr id="13" name="TextBox 12"/>
-          <p:cNvSpPr txBox="1"/>
-          <p:nvPr/>
-        </p:nvSpPr>
-        <p:spPr>
-          <a:xfrm>
-            <a:off x="3200400" y="2240279"/>
-            <a:ext cx="2414016" cy="457200"/>
+          <p:cNvPr id="12" name="TextBox 11"/>
+          <p:cNvSpPr txBox="1"/>
+          <p:nvPr/>
+        </p:nvSpPr>
+        <p:spPr>
+          <a:xfrm>
+            <a:off x="4297680" y="2308860"/>
+            <a:ext cx="1005840" cy="457200"/>
           </a:xfrm>
           <a:prstGeom prst="rect">
             <a:avLst/>
@@ -5891,21 +5846,21 @@
                 </a:solidFill>
                 <a:latin typeface="Yu Gothic"/>
               </a:rPr>
-              <a:t>ドライバーの名前</a:t>
-            </a:r>
-          </a:p>
-        </p:txBody>
-      </p:sp>
-      <p:sp>
-        <p:nvSpPr>
-          <p:cNvPr id="14" name="Rounded Rectangle 13"/>
+              <a:t>氏名</a:t>
+            </a:r>
+          </a:p>
+        </p:txBody>
+      </p:sp>
+      <p:sp>
+        <p:nvSpPr>
+          <p:cNvPr id="13" name="Rounded Rectangle 12"/>
           <p:cNvSpPr/>
           <p:nvPr/>
         </p:nvSpPr>
         <p:spPr>
           <a:xfrm>
-            <a:off x="548640" y="3017520"/>
-            <a:ext cx="11064240" cy="731520"/>
+            <a:off x="548640" y="3200400"/>
+            <a:ext cx="11064240" cy="868680"/>
           </a:xfrm>
           <a:prstGeom prst="roundRect">
             <a:avLst>
@@ -5946,14 +5901,49 @@
       </p:sp>
       <p:sp>
         <p:nvSpPr>
+          <p:cNvPr id="14" name="TextBox 13"/>
+          <p:cNvSpPr txBox="1"/>
+          <p:nvPr/>
+        </p:nvSpPr>
+        <p:spPr>
+          <a:xfrm>
+            <a:off x="685800" y="3200400"/>
+            <a:ext cx="548640" cy="868680"/>
+          </a:xfrm>
+          <a:prstGeom prst="rect">
+            <a:avLst/>
+          </a:prstGeom>
+          <a:noFill/>
+        </p:spPr>
+        <p:txBody>
+          <a:bodyPr wrap="square" lIns="45720" rIns="45720" tIns="22860" bIns="22860" anchor="ctr">
+            <a:spAutoFit/>
+          </a:bodyPr>
+          <a:lstStyle/>
+          <a:p>
+            <a:pPr algn="ctr"/>
+            <a:r>
+              <a:rPr sz="2200" b="1">
+                <a:solidFill>
+                  <a:srgbClr val="E12A82"/>
+                </a:solidFill>
+                <a:latin typeface="Yu Gothic"/>
+              </a:rPr>
+              <a:t>②</a:t>
+            </a:r>
+          </a:p>
+        </p:txBody>
+      </p:sp>
+      <p:sp>
+        <p:nvSpPr>
           <p:cNvPr id="15" name="TextBox 14"/>
           <p:cNvSpPr txBox="1"/>
           <p:nvPr/>
         </p:nvSpPr>
         <p:spPr>
           <a:xfrm>
-            <a:off x="685800" y="3017520"/>
-            <a:ext cx="548640" cy="731520"/>
+            <a:off x="1280160" y="3200400"/>
+            <a:ext cx="2926080" cy="868680"/>
           </a:xfrm>
           <a:prstGeom prst="rect">
             <a:avLst/>
@@ -5966,41 +5956,6 @@
           </a:bodyPr>
           <a:lstStyle/>
           <a:p>
-            <a:pPr algn="ctr"/>
-            <a:r>
-              <a:rPr sz="2000" b="1">
-                <a:solidFill>
-                  <a:srgbClr val="E12A82"/>
-                </a:solidFill>
-                <a:latin typeface="Yu Gothic"/>
-              </a:rPr>
-              <a:t>②</a:t>
-            </a:r>
-          </a:p>
-        </p:txBody>
-      </p:sp>
-      <p:sp>
-        <p:nvSpPr>
-          <p:cNvPr id="16" name="TextBox 15"/>
-          <p:cNvSpPr txBox="1"/>
-          <p:nvPr/>
-        </p:nvSpPr>
-        <p:spPr>
-          <a:xfrm>
-            <a:off x="1280160" y="3017520"/>
-            <a:ext cx="1828800" cy="731520"/>
-          </a:xfrm>
-          <a:prstGeom prst="rect">
-            <a:avLst/>
-          </a:prstGeom>
-          <a:noFill/>
-        </p:spPr>
-        <p:txBody>
-          <a:bodyPr wrap="square" lIns="45720" rIns="45720" tIns="22860" bIns="22860" anchor="ctr">
-            <a:spAutoFit/>
-          </a:bodyPr>
-          <a:lstStyle/>
-          <a:p>
             <a:pPr algn="l"/>
             <a:r>
               <a:rPr sz="1800" b="1">
@@ -6009,21 +5964,21 @@
                 </a:solidFill>
                 <a:latin typeface="Yu Gothic"/>
               </a:rPr>
-              <a:t>8ページ目</a:t>
-            </a:r>
-          </a:p>
-        </p:txBody>
-      </p:sp>
-      <p:sp>
-        <p:nvSpPr>
-          <p:cNvPr id="17" name="Rounded Rectangle 16"/>
+              <a:t>11ページ目</a:t>
+            </a:r>
+          </a:p>
+        </p:txBody>
+      </p:sp>
+      <p:sp>
+        <p:nvSpPr>
+          <p:cNvPr id="16" name="Rounded Rectangle 15"/>
           <p:cNvSpPr/>
           <p:nvPr/>
         </p:nvSpPr>
         <p:spPr>
           <a:xfrm>
-            <a:off x="3200400" y="3154679"/>
-            <a:ext cx="1133856" cy="457200"/>
+            <a:off x="4297680" y="3406140"/>
+            <a:ext cx="1280160" cy="457200"/>
           </a:xfrm>
           <a:prstGeom prst="roundRect">
             <a:avLst>
@@ -6062,14 +6017,14 @@
       </p:sp>
       <p:sp>
         <p:nvSpPr>
-          <p:cNvPr id="18" name="TextBox 17"/>
-          <p:cNvSpPr txBox="1"/>
-          <p:nvPr/>
-        </p:nvSpPr>
-        <p:spPr>
-          <a:xfrm>
-            <a:off x="3200400" y="3154679"/>
-            <a:ext cx="1133856" cy="457200"/>
+          <p:cNvPr id="17" name="TextBox 16"/>
+          <p:cNvSpPr txBox="1"/>
+          <p:nvPr/>
+        </p:nvSpPr>
+        <p:spPr>
+          <a:xfrm>
+            <a:off x="4297680" y="3406140"/>
+            <a:ext cx="1280160" cy="457200"/>
           </a:xfrm>
           <a:prstGeom prst="rect">
             <a:avLst/>
@@ -6090,21 +6045,21 @@
                 </a:solidFill>
                 <a:latin typeface="Yu Gothic"/>
               </a:rPr>
-              <a:t>締結日</a:t>
-            </a:r>
-          </a:p>
-        </p:txBody>
-      </p:sp>
-      <p:sp>
-        <p:nvSpPr>
-          <p:cNvPr id="19" name="Rounded Rectangle 18"/>
+              <a:t>契約日</a:t>
+            </a:r>
+          </a:p>
+        </p:txBody>
+      </p:sp>
+      <p:sp>
+        <p:nvSpPr>
+          <p:cNvPr id="18" name="Rounded Rectangle 17"/>
           <p:cNvSpPr/>
           <p:nvPr/>
         </p:nvSpPr>
         <p:spPr>
           <a:xfrm>
-            <a:off x="4471416" y="3154679"/>
-            <a:ext cx="2414016" cy="457200"/>
+            <a:off x="5715000" y="3406140"/>
+            <a:ext cx="1005840" cy="457200"/>
           </a:xfrm>
           <a:prstGeom prst="roundRect">
             <a:avLst>
@@ -6143,14 +6098,14 @@
       </p:sp>
       <p:sp>
         <p:nvSpPr>
-          <p:cNvPr id="20" name="TextBox 19"/>
-          <p:cNvSpPr txBox="1"/>
-          <p:nvPr/>
-        </p:nvSpPr>
-        <p:spPr>
-          <a:xfrm>
-            <a:off x="4471416" y="3154679"/>
-            <a:ext cx="2414016" cy="457200"/>
+          <p:cNvPr id="19" name="TextBox 18"/>
+          <p:cNvSpPr txBox="1"/>
+          <p:nvPr/>
+        </p:nvSpPr>
+        <p:spPr>
+          <a:xfrm>
+            <a:off x="5715000" y="3406140"/>
+            <a:ext cx="1005840" cy="457200"/>
           </a:xfrm>
           <a:prstGeom prst="rect">
             <a:avLst/>
@@ -6171,21 +6126,21 @@
                 </a:solidFill>
                 <a:latin typeface="Yu Gothic"/>
               </a:rPr>
-              <a:t>ドライバーの名前</a:t>
-            </a:r>
-          </a:p>
-        </p:txBody>
-      </p:sp>
-      <p:sp>
-        <p:nvSpPr>
-          <p:cNvPr id="21" name="Rounded Rectangle 20"/>
+              <a:t>住所</a:t>
+            </a:r>
+          </a:p>
+        </p:txBody>
+      </p:sp>
+      <p:sp>
+        <p:nvSpPr>
+          <p:cNvPr id="20" name="Rounded Rectangle 19"/>
           <p:cNvSpPr/>
           <p:nvPr/>
         </p:nvSpPr>
         <p:spPr>
           <a:xfrm>
-            <a:off x="7022592" y="3154679"/>
-            <a:ext cx="877824" cy="457200"/>
+            <a:off x="6858000" y="3406140"/>
+            <a:ext cx="1005840" cy="457200"/>
           </a:xfrm>
           <a:prstGeom prst="roundRect">
             <a:avLst>
@@ -6224,14 +6179,14 @@
       </p:sp>
       <p:sp>
         <p:nvSpPr>
-          <p:cNvPr id="22" name="TextBox 21"/>
-          <p:cNvSpPr txBox="1"/>
-          <p:nvPr/>
-        </p:nvSpPr>
-        <p:spPr>
-          <a:xfrm>
-            <a:off x="7022592" y="3154679"/>
-            <a:ext cx="877824" cy="457200"/>
+          <p:cNvPr id="21" name="TextBox 20"/>
+          <p:cNvSpPr txBox="1"/>
+          <p:nvPr/>
+        </p:nvSpPr>
+        <p:spPr>
+          <a:xfrm>
+            <a:off x="6858000" y="3406140"/>
+            <a:ext cx="1005840" cy="457200"/>
           </a:xfrm>
           <a:prstGeom prst="rect">
             <a:avLst/>
@@ -6252,21 +6207,21 @@
                 </a:solidFill>
                 <a:latin typeface="Yu Gothic"/>
               </a:rPr>
-              <a:t>住所</a:t>
-            </a:r>
-          </a:p>
-        </p:txBody>
-      </p:sp>
-      <p:sp>
-        <p:nvSpPr>
-          <p:cNvPr id="23" name="Rounded Rectangle 22"/>
+              <a:t>氏名</a:t>
+            </a:r>
+          </a:p>
+        </p:txBody>
+      </p:sp>
+      <p:sp>
+        <p:nvSpPr>
+          <p:cNvPr id="22" name="Rounded Rectangle 21"/>
           <p:cNvSpPr/>
           <p:nvPr/>
         </p:nvSpPr>
         <p:spPr>
           <a:xfrm>
-            <a:off x="8037576" y="3154679"/>
-            <a:ext cx="1133856" cy="457200"/>
+            <a:off x="8001000" y="3406140"/>
+            <a:ext cx="1554480" cy="457200"/>
           </a:xfrm>
           <a:prstGeom prst="roundRect">
             <a:avLst>
@@ -6305,14 +6260,14 @@
       </p:sp>
       <p:sp>
         <p:nvSpPr>
-          <p:cNvPr id="24" name="TextBox 23"/>
-          <p:cNvSpPr txBox="1"/>
-          <p:nvPr/>
-        </p:nvSpPr>
-        <p:spPr>
-          <a:xfrm>
-            <a:off x="8037576" y="3154679"/>
-            <a:ext cx="1133856" cy="457200"/>
+          <p:cNvPr id="23" name="TextBox 22"/>
+          <p:cNvSpPr txBox="1"/>
+          <p:nvPr/>
+        </p:nvSpPr>
+        <p:spPr>
+          <a:xfrm>
+            <a:off x="8001000" y="3406140"/>
+            <a:ext cx="1554480" cy="457200"/>
           </a:xfrm>
           <a:prstGeom prst="rect">
             <a:avLst/>
@@ -6333,21 +6288,21 @@
                 </a:solidFill>
                 <a:latin typeface="Yu Gothic"/>
               </a:rPr>
-              <a:t>連絡先</a:t>
-            </a:r>
-          </a:p>
-        </p:txBody>
-      </p:sp>
-      <p:sp>
-        <p:nvSpPr>
-          <p:cNvPr id="25" name="Rounded Rectangle 24"/>
+              <a:t>電話番号</a:t>
+            </a:r>
+          </a:p>
+        </p:txBody>
+      </p:sp>
+      <p:sp>
+        <p:nvSpPr>
+          <p:cNvPr id="24" name="Rounded Rectangle 23"/>
           <p:cNvSpPr/>
           <p:nvPr/>
         </p:nvSpPr>
         <p:spPr>
           <a:xfrm>
-            <a:off x="548640" y="3931920"/>
-            <a:ext cx="11064240" cy="731520"/>
+            <a:off x="548640" y="4297679"/>
+            <a:ext cx="11064240" cy="868680"/>
           </a:xfrm>
           <a:prstGeom prst="roundRect">
             <a:avLst>
@@ -6388,14 +6343,49 @@
       </p:sp>
       <p:sp>
         <p:nvSpPr>
+          <p:cNvPr id="25" name="TextBox 24"/>
+          <p:cNvSpPr txBox="1"/>
+          <p:nvPr/>
+        </p:nvSpPr>
+        <p:spPr>
+          <a:xfrm>
+            <a:off x="685800" y="4297679"/>
+            <a:ext cx="548640" cy="868680"/>
+          </a:xfrm>
+          <a:prstGeom prst="rect">
+            <a:avLst/>
+          </a:prstGeom>
+          <a:noFill/>
+        </p:spPr>
+        <p:txBody>
+          <a:bodyPr wrap="square" lIns="45720" rIns="45720" tIns="22860" bIns="22860" anchor="ctr">
+            <a:spAutoFit/>
+          </a:bodyPr>
+          <a:lstStyle/>
+          <a:p>
+            <a:pPr algn="ctr"/>
+            <a:r>
+              <a:rPr sz="2200" b="1">
+                <a:solidFill>
+                  <a:srgbClr val="E12A82"/>
+                </a:solidFill>
+                <a:latin typeface="Yu Gothic"/>
+              </a:rPr>
+              <a:t>③</a:t>
+            </a:r>
+          </a:p>
+        </p:txBody>
+      </p:sp>
+      <p:sp>
+        <p:nvSpPr>
           <p:cNvPr id="26" name="TextBox 25"/>
           <p:cNvSpPr txBox="1"/>
           <p:nvPr/>
         </p:nvSpPr>
         <p:spPr>
           <a:xfrm>
-            <a:off x="685800" y="3931920"/>
-            <a:ext cx="548640" cy="731520"/>
+            <a:off x="1280160" y="4297679"/>
+            <a:ext cx="2926080" cy="868680"/>
           </a:xfrm>
           <a:prstGeom prst="rect">
             <a:avLst/>
@@ -6408,41 +6398,6 @@
           </a:bodyPr>
           <a:lstStyle/>
           <a:p>
-            <a:pPr algn="ctr"/>
-            <a:r>
-              <a:rPr sz="2000" b="1">
-                <a:solidFill>
-                  <a:srgbClr val="E12A82"/>
-                </a:solidFill>
-                <a:latin typeface="Yu Gothic"/>
-              </a:rPr>
-              <a:t>③</a:t>
-            </a:r>
-          </a:p>
-        </p:txBody>
-      </p:sp>
-      <p:sp>
-        <p:nvSpPr>
-          <p:cNvPr id="27" name="TextBox 26"/>
-          <p:cNvSpPr txBox="1"/>
-          <p:nvPr/>
-        </p:nvSpPr>
-        <p:spPr>
-          <a:xfrm>
-            <a:off x="1280160" y="3931920"/>
-            <a:ext cx="1828800" cy="731520"/>
-          </a:xfrm>
-          <a:prstGeom prst="rect">
-            <a:avLst/>
-          </a:prstGeom>
-          <a:noFill/>
-        </p:spPr>
-        <p:txBody>
-          <a:bodyPr wrap="square" lIns="45720" rIns="45720" tIns="22860" bIns="22860" anchor="ctr">
-            <a:spAutoFit/>
-          </a:bodyPr>
-          <a:lstStyle/>
-          <a:p>
             <a:pPr algn="l"/>
             <a:r>
               <a:rPr sz="1800" b="1">
@@ -6451,301 +6406,21 @@
                 </a:solidFill>
                 <a:latin typeface="Yu Gothic"/>
               </a:rPr>
-              <a:t>9ページ目</a:t>
-            </a:r>
-          </a:p>
-        </p:txBody>
-      </p:sp>
-      <p:sp>
-        <p:nvSpPr>
-          <p:cNvPr id="28" name="Rounded Rectangle 27"/>
+              <a:t>宣誓書（14ページ目）</a:t>
+            </a:r>
+          </a:p>
+        </p:txBody>
+      </p:sp>
+      <p:sp>
+        <p:nvSpPr>
+          <p:cNvPr id="27" name="Rounded Rectangle 26"/>
           <p:cNvSpPr/>
           <p:nvPr/>
         </p:nvSpPr>
         <p:spPr>
           <a:xfrm>
-            <a:off x="3200400" y="4069080"/>
-            <a:ext cx="1133856" cy="457200"/>
-          </a:xfrm>
-          <a:prstGeom prst="roundRect">
-            <a:avLst>
-              <a:gd name="adj" fmla="val 20000"/>
-            </a:avLst>
-          </a:prstGeom>
-          <a:solidFill>
-            <a:srgbClr val="3DDC5A"/>
-          </a:solidFill>
-          <a:ln>
-            <a:noFill/>
-          </a:ln>
-          <a:effectLst/>
-        </p:spPr>
-        <p:style>
-          <a:lnRef idx="1">
-            <a:schemeClr val="accent1"/>
-          </a:lnRef>
-          <a:fillRef idx="3">
-            <a:schemeClr val="accent1"/>
-          </a:fillRef>
-          <a:effectRef idx="2">
-            <a:schemeClr val="accent1"/>
-          </a:effectRef>
-          <a:fontRef idx="minor">
-            <a:schemeClr val="lt1"/>
-          </a:fontRef>
-        </p:style>
-        <p:txBody>
-          <a:bodyPr rtlCol="0" anchor="ctr"/>
-          <a:lstStyle/>
-          <a:p>
-            <a:pPr algn="ctr"/>
-          </a:p>
-        </p:txBody>
-      </p:sp>
-      <p:sp>
-        <p:nvSpPr>
-          <p:cNvPr id="29" name="TextBox 28"/>
-          <p:cNvSpPr txBox="1"/>
-          <p:nvPr/>
-        </p:nvSpPr>
-        <p:spPr>
-          <a:xfrm>
-            <a:off x="3200400" y="4069080"/>
-            <a:ext cx="1133856" cy="457200"/>
-          </a:xfrm>
-          <a:prstGeom prst="rect">
-            <a:avLst/>
-          </a:prstGeom>
-          <a:noFill/>
-        </p:spPr>
-        <p:txBody>
-          <a:bodyPr wrap="square" lIns="45720" rIns="45720" tIns="22860" bIns="22860" anchor="ctr">
-            <a:spAutoFit/>
-          </a:bodyPr>
-          <a:lstStyle/>
-          <a:p>
-            <a:pPr algn="ctr"/>
-            <a:r>
-              <a:rPr sz="1600" b="1">
-                <a:solidFill>
-                  <a:srgbClr val="333333"/>
-                </a:solidFill>
-                <a:latin typeface="Yu Gothic"/>
-              </a:rPr>
-              <a:t>エリア</a:t>
-            </a:r>
-          </a:p>
-        </p:txBody>
-      </p:sp>
-      <p:sp>
-        <p:nvSpPr>
-          <p:cNvPr id="30" name="Rounded Rectangle 29"/>
-          <p:cNvSpPr/>
-          <p:nvPr/>
-        </p:nvSpPr>
-        <p:spPr>
-          <a:xfrm>
-            <a:off x="4471416" y="4069080"/>
-            <a:ext cx="877824" cy="457200"/>
-          </a:xfrm>
-          <a:prstGeom prst="roundRect">
-            <a:avLst>
-              <a:gd name="adj" fmla="val 20000"/>
-            </a:avLst>
-          </a:prstGeom>
-          <a:solidFill>
-            <a:srgbClr val="3DDC5A"/>
-          </a:solidFill>
-          <a:ln>
-            <a:noFill/>
-          </a:ln>
-          <a:effectLst/>
-        </p:spPr>
-        <p:style>
-          <a:lnRef idx="1">
-            <a:schemeClr val="accent1"/>
-          </a:lnRef>
-          <a:fillRef idx="3">
-            <a:schemeClr val="accent1"/>
-          </a:fillRef>
-          <a:effectRef idx="2">
-            <a:schemeClr val="accent1"/>
-          </a:effectRef>
-          <a:fontRef idx="minor">
-            <a:schemeClr val="lt1"/>
-          </a:fontRef>
-        </p:style>
-        <p:txBody>
-          <a:bodyPr rtlCol="0" anchor="ctr"/>
-          <a:lstStyle/>
-          <a:p>
-            <a:pPr algn="ctr"/>
-          </a:p>
-        </p:txBody>
-      </p:sp>
-      <p:sp>
-        <p:nvSpPr>
-          <p:cNvPr id="31" name="TextBox 30"/>
-          <p:cNvSpPr txBox="1"/>
-          <p:nvPr/>
-        </p:nvSpPr>
-        <p:spPr>
-          <a:xfrm>
-            <a:off x="4471416" y="4069080"/>
-            <a:ext cx="877824" cy="457200"/>
-          </a:xfrm>
-          <a:prstGeom prst="rect">
-            <a:avLst/>
-          </a:prstGeom>
-          <a:noFill/>
-        </p:spPr>
-        <p:txBody>
-          <a:bodyPr wrap="square" lIns="45720" rIns="45720" tIns="22860" bIns="22860" anchor="ctr">
-            <a:spAutoFit/>
-          </a:bodyPr>
-          <a:lstStyle/>
-          <a:p>
-            <a:pPr algn="ctr"/>
-            <a:r>
-              <a:rPr sz="1600" b="1">
-                <a:solidFill>
-                  <a:srgbClr val="333333"/>
-                </a:solidFill>
-                <a:latin typeface="Yu Gothic"/>
-              </a:rPr>
-              <a:t>単価</a:t>
-            </a:r>
-          </a:p>
-        </p:txBody>
-      </p:sp>
-      <p:sp>
-        <p:nvSpPr>
-          <p:cNvPr id="32" name="Rounded Rectangle 31"/>
-          <p:cNvSpPr/>
-          <p:nvPr/>
-        </p:nvSpPr>
-        <p:spPr>
-          <a:xfrm>
-            <a:off x="548640" y="4846320"/>
-            <a:ext cx="11064240" cy="731520"/>
-          </a:xfrm>
-          <a:prstGeom prst="roundRect">
-            <a:avLst>
-              <a:gd name="adj" fmla="val 8000"/>
-            </a:avLst>
-          </a:prstGeom>
-          <a:solidFill>
-            <a:srgbClr val="FFFFFF"/>
-          </a:solidFill>
-          <a:ln w="9525">
-            <a:solidFill>
-              <a:srgbClr val="DDDDDD"/>
-            </a:solidFill>
-          </a:ln>
-          <a:effectLst/>
-        </p:spPr>
-        <p:style>
-          <a:lnRef idx="1">
-            <a:schemeClr val="accent1"/>
-          </a:lnRef>
-          <a:fillRef idx="3">
-            <a:schemeClr val="accent1"/>
-          </a:fillRef>
-          <a:effectRef idx="2">
-            <a:schemeClr val="accent1"/>
-          </a:effectRef>
-          <a:fontRef idx="minor">
-            <a:schemeClr val="lt1"/>
-          </a:fontRef>
-        </p:style>
-        <p:txBody>
-          <a:bodyPr rtlCol="0" anchor="ctr"/>
-          <a:lstStyle/>
-          <a:p>
-            <a:pPr algn="ctr"/>
-          </a:p>
-        </p:txBody>
-      </p:sp>
-      <p:sp>
-        <p:nvSpPr>
-          <p:cNvPr id="33" name="TextBox 32"/>
-          <p:cNvSpPr txBox="1"/>
-          <p:nvPr/>
-        </p:nvSpPr>
-        <p:spPr>
-          <a:xfrm>
-            <a:off x="685800" y="4846320"/>
-            <a:ext cx="548640" cy="731520"/>
-          </a:xfrm>
-          <a:prstGeom prst="rect">
-            <a:avLst/>
-          </a:prstGeom>
-          <a:noFill/>
-        </p:spPr>
-        <p:txBody>
-          <a:bodyPr wrap="square" lIns="45720" rIns="45720" tIns="22860" bIns="22860" anchor="ctr">
-            <a:spAutoFit/>
-          </a:bodyPr>
-          <a:lstStyle/>
-          <a:p>
-            <a:pPr algn="ctr"/>
-            <a:r>
-              <a:rPr sz="2000" b="1">
-                <a:solidFill>
-                  <a:srgbClr val="E12A82"/>
-                </a:solidFill>
-                <a:latin typeface="Yu Gothic"/>
-              </a:rPr>
-              <a:t>④</a:t>
-            </a:r>
-          </a:p>
-        </p:txBody>
-      </p:sp>
-      <p:sp>
-        <p:nvSpPr>
-          <p:cNvPr id="34" name="TextBox 33"/>
-          <p:cNvSpPr txBox="1"/>
-          <p:nvPr/>
-        </p:nvSpPr>
-        <p:spPr>
-          <a:xfrm>
-            <a:off x="1280160" y="4846320"/>
-            <a:ext cx="1828800" cy="731520"/>
-          </a:xfrm>
-          <a:prstGeom prst="rect">
-            <a:avLst/>
-          </a:prstGeom>
-          <a:noFill/>
-        </p:spPr>
-        <p:txBody>
-          <a:bodyPr wrap="square" lIns="45720" rIns="45720" tIns="22860" bIns="22860" anchor="ctr">
-            <a:spAutoFit/>
-          </a:bodyPr>
-          <a:lstStyle/>
-          <a:p>
-            <a:pPr algn="l"/>
-            <a:r>
-              <a:rPr sz="1800" b="1">
-                <a:solidFill>
-                  <a:srgbClr val="333333"/>
-                </a:solidFill>
-                <a:latin typeface="Yu Gothic"/>
-              </a:rPr>
-              <a:t>宣誓書</a:t>
-            </a:r>
-          </a:p>
-        </p:txBody>
-      </p:sp>
-      <p:sp>
-        <p:nvSpPr>
-          <p:cNvPr id="35" name="Rounded Rectangle 34"/>
-          <p:cNvSpPr/>
-          <p:nvPr/>
-        </p:nvSpPr>
-        <p:spPr>
-          <a:xfrm>
-            <a:off x="3200400" y="4983480"/>
-            <a:ext cx="1133856" cy="457200"/>
+            <a:off x="4297680" y="4503419"/>
+            <a:ext cx="1005840" cy="457200"/>
           </a:xfrm>
           <a:prstGeom prst="roundRect">
             <a:avLst>
@@ -6784,14 +6459,14 @@
       </p:sp>
       <p:sp>
         <p:nvSpPr>
-          <p:cNvPr id="36" name="TextBox 35"/>
-          <p:cNvSpPr txBox="1"/>
-          <p:nvPr/>
-        </p:nvSpPr>
-        <p:spPr>
-          <a:xfrm>
-            <a:off x="3200400" y="4983480"/>
-            <a:ext cx="1133856" cy="457200"/>
+          <p:cNvPr id="28" name="TextBox 27"/>
+          <p:cNvSpPr txBox="1"/>
+          <p:nvPr/>
+        </p:nvSpPr>
+        <p:spPr>
+          <a:xfrm>
+            <a:off x="4297680" y="4503419"/>
+            <a:ext cx="1005840" cy="457200"/>
           </a:xfrm>
           <a:prstGeom prst="rect">
             <a:avLst/>
@@ -6812,102 +6487,21 @@
                 </a:solidFill>
                 <a:latin typeface="Yu Gothic"/>
               </a:rPr>
-              <a:t>名前①</a:t>
-            </a:r>
-          </a:p>
-        </p:txBody>
-      </p:sp>
-      <p:sp>
-        <p:nvSpPr>
-          <p:cNvPr id="37" name="Rounded Rectangle 36"/>
+              <a:t>氏名</a:t>
+            </a:r>
+          </a:p>
+        </p:txBody>
+      </p:sp>
+      <p:sp>
+        <p:nvSpPr>
+          <p:cNvPr id="29" name="Rounded Rectangle 28"/>
           <p:cNvSpPr/>
           <p:nvPr/>
         </p:nvSpPr>
         <p:spPr>
           <a:xfrm>
-            <a:off x="4471416" y="4983480"/>
-            <a:ext cx="1133856" cy="457200"/>
-          </a:xfrm>
-          <a:prstGeom prst="roundRect">
-            <a:avLst>
-              <a:gd name="adj" fmla="val 20000"/>
-            </a:avLst>
-          </a:prstGeom>
-          <a:solidFill>
-            <a:srgbClr val="3DDC5A"/>
-          </a:solidFill>
-          <a:ln>
-            <a:noFill/>
-          </a:ln>
-          <a:effectLst/>
-        </p:spPr>
-        <p:style>
-          <a:lnRef idx="1">
-            <a:schemeClr val="accent1"/>
-          </a:lnRef>
-          <a:fillRef idx="3">
-            <a:schemeClr val="accent1"/>
-          </a:fillRef>
-          <a:effectRef idx="2">
-            <a:schemeClr val="accent1"/>
-          </a:effectRef>
-          <a:fontRef idx="minor">
-            <a:schemeClr val="lt1"/>
-          </a:fontRef>
-        </p:style>
-        <p:txBody>
-          <a:bodyPr rtlCol="0" anchor="ctr"/>
-          <a:lstStyle/>
-          <a:p>
-            <a:pPr algn="ctr"/>
-          </a:p>
-        </p:txBody>
-      </p:sp>
-      <p:sp>
-        <p:nvSpPr>
-          <p:cNvPr id="38" name="TextBox 37"/>
-          <p:cNvSpPr txBox="1"/>
-          <p:nvPr/>
-        </p:nvSpPr>
-        <p:spPr>
-          <a:xfrm>
-            <a:off x="4471416" y="4983480"/>
-            <a:ext cx="1133856" cy="457200"/>
-          </a:xfrm>
-          <a:prstGeom prst="rect">
-            <a:avLst/>
-          </a:prstGeom>
-          <a:noFill/>
-        </p:spPr>
-        <p:txBody>
-          <a:bodyPr wrap="square" lIns="45720" rIns="45720" tIns="22860" bIns="22860" anchor="ctr">
-            <a:spAutoFit/>
-          </a:bodyPr>
-          <a:lstStyle/>
-          <a:p>
-            <a:pPr algn="ctr"/>
-            <a:r>
-              <a:rPr sz="1600" b="1">
-                <a:solidFill>
-                  <a:srgbClr val="333333"/>
-                </a:solidFill>
-                <a:latin typeface="Yu Gothic"/>
-              </a:rPr>
-              <a:t>名前②</a:t>
-            </a:r>
-          </a:p>
-        </p:txBody>
-      </p:sp>
-      <p:sp>
-        <p:nvSpPr>
-          <p:cNvPr id="39" name="Rounded Rectangle 38"/>
-          <p:cNvSpPr/>
-          <p:nvPr/>
-        </p:nvSpPr>
-        <p:spPr>
-          <a:xfrm>
-            <a:off x="5742432" y="4983480"/>
-            <a:ext cx="1133856" cy="457200"/>
+            <a:off x="5440680" y="4503419"/>
+            <a:ext cx="2103120" cy="457200"/>
           </a:xfrm>
           <a:prstGeom prst="roundRect">
             <a:avLst>
@@ -6946,14 +6540,14 @@
       </p:sp>
       <p:sp>
         <p:nvSpPr>
-          <p:cNvPr id="40" name="TextBox 39"/>
-          <p:cNvSpPr txBox="1"/>
-          <p:nvPr/>
-        </p:nvSpPr>
-        <p:spPr>
-          <a:xfrm>
-            <a:off x="5742432" y="4983480"/>
-            <a:ext cx="1133856" cy="457200"/>
+          <p:cNvPr id="30" name="TextBox 29"/>
+          <p:cNvSpPr txBox="1"/>
+          <p:nvPr/>
+        </p:nvSpPr>
+        <p:spPr>
+          <a:xfrm>
+            <a:off x="5440680" y="4503419"/>
+            <a:ext cx="2103120" cy="457200"/>
           </a:xfrm>
           <a:prstGeom prst="rect">
             <a:avLst/>
@@ -6974,21 +6568,21 @@
                 </a:solidFill>
                 <a:latin typeface="Yu Gothic"/>
               </a:rPr>
-              <a:t>名前③</a:t>
-            </a:r>
-          </a:p>
-        </p:txBody>
-      </p:sp>
-      <p:sp>
-        <p:nvSpPr>
-          <p:cNvPr id="41" name="Rounded Rectangle 40"/>
+              <a:t>署名（自署）</a:t>
+            </a:r>
+          </a:p>
+        </p:txBody>
+      </p:sp>
+      <p:sp>
+        <p:nvSpPr>
+          <p:cNvPr id="31" name="Rounded Rectangle 30"/>
           <p:cNvSpPr/>
           <p:nvPr/>
         </p:nvSpPr>
         <p:spPr>
           <a:xfrm>
-            <a:off x="7013448" y="4983480"/>
-            <a:ext cx="1133856" cy="457200"/>
+            <a:off x="7680960" y="4503419"/>
+            <a:ext cx="2103120" cy="457200"/>
           </a:xfrm>
           <a:prstGeom prst="roundRect">
             <a:avLst>
@@ -7027,14 +6621,14 @@
       </p:sp>
       <p:sp>
         <p:nvSpPr>
-          <p:cNvPr id="42" name="TextBox 41"/>
-          <p:cNvSpPr txBox="1"/>
-          <p:nvPr/>
-        </p:nvSpPr>
-        <p:spPr>
-          <a:xfrm>
-            <a:off x="7013448" y="4983480"/>
-            <a:ext cx="1133856" cy="457200"/>
+          <p:cNvPr id="32" name="TextBox 31"/>
+          <p:cNvSpPr txBox="1"/>
+          <p:nvPr/>
+        </p:nvSpPr>
+        <p:spPr>
+          <a:xfrm>
+            <a:off x="7680960" y="4503419"/>
+            <a:ext cx="2103120" cy="457200"/>
           </a:xfrm>
           <a:prstGeom prst="rect">
             <a:avLst/>
@@ -7055,34 +6649,32 @@
                 </a:solidFill>
                 <a:latin typeface="Yu Gothic"/>
               </a:rPr>
-              <a:t>入力日</a:t>
-            </a:r>
-          </a:p>
-        </p:txBody>
-      </p:sp>
-      <p:sp>
-        <p:nvSpPr>
-          <p:cNvPr id="43" name="Rounded Rectangle 42"/>
+              <a:t>氏名（記名）</a:t>
+            </a:r>
+          </a:p>
+        </p:txBody>
+      </p:sp>
+      <p:sp>
+        <p:nvSpPr>
+          <p:cNvPr id="33" name="Rounded Rectangle 32"/>
           <p:cNvSpPr/>
           <p:nvPr/>
         </p:nvSpPr>
         <p:spPr>
           <a:xfrm>
-            <a:off x="548640" y="5806440"/>
-            <a:ext cx="11064240" cy="457200"/>
+            <a:off x="9921240" y="4503419"/>
+            <a:ext cx="1005840" cy="457200"/>
           </a:xfrm>
           <a:prstGeom prst="roundRect">
             <a:avLst>
-              <a:gd name="adj" fmla="val 8000"/>
+              <a:gd name="adj" fmla="val 20000"/>
             </a:avLst>
           </a:prstGeom>
           <a:solidFill>
-            <a:srgbClr val="FFF6E0"/>
+            <a:srgbClr val="FFF14D"/>
           </a:solidFill>
-          <a:ln w="12700">
-            <a:solidFill>
-              <a:srgbClr val="F29A3C"/>
-            </a:solidFill>
+          <a:ln>
+            <a:noFill/>
           </a:ln>
           <a:effectLst/>
         </p:spPr>
@@ -7110,14 +6702,14 @@
       </p:sp>
       <p:sp>
         <p:nvSpPr>
-          <p:cNvPr id="44" name="TextBox 43"/>
-          <p:cNvSpPr txBox="1"/>
-          <p:nvPr/>
-        </p:nvSpPr>
-        <p:spPr>
-          <a:xfrm>
-            <a:off x="685800" y="5806440"/>
-            <a:ext cx="10789920" cy="457200"/>
+          <p:cNvPr id="34" name="TextBox 33"/>
+          <p:cNvSpPr txBox="1"/>
+          <p:nvPr/>
+        </p:nvSpPr>
+        <p:spPr>
+          <a:xfrm>
+            <a:off x="9921240" y="4503419"/>
+            <a:ext cx="1005840" cy="457200"/>
           </a:xfrm>
           <a:prstGeom prst="rect">
             <a:avLst/>
@@ -7130,15 +6722,98 @@
           </a:bodyPr>
           <a:lstStyle/>
           <a:p>
+            <a:pPr algn="ctr"/>
+            <a:r>
+              <a:rPr sz="1600" b="1">
+                <a:solidFill>
+                  <a:srgbClr val="333333"/>
+                </a:solidFill>
+                <a:latin typeface="Yu Gothic"/>
+              </a:rPr>
+              <a:t>日付</a:t>
+            </a:r>
+          </a:p>
+        </p:txBody>
+      </p:sp>
+      <p:sp>
+        <p:nvSpPr>
+          <p:cNvPr id="35" name="Rounded Rectangle 34"/>
+          <p:cNvSpPr/>
+          <p:nvPr/>
+        </p:nvSpPr>
+        <p:spPr>
+          <a:xfrm>
+            <a:off x="548640" y="5486400"/>
+            <a:ext cx="11064240" cy="548640"/>
+          </a:xfrm>
+          <a:prstGeom prst="roundRect">
+            <a:avLst>
+              <a:gd name="adj" fmla="val 8000"/>
+            </a:avLst>
+          </a:prstGeom>
+          <a:solidFill>
+            <a:srgbClr val="FDECEC"/>
+          </a:solidFill>
+          <a:ln w="19050">
+            <a:solidFill>
+              <a:srgbClr val="D32F2F"/>
+            </a:solidFill>
+          </a:ln>
+          <a:effectLst/>
+        </p:spPr>
+        <p:style>
+          <a:lnRef idx="1">
+            <a:schemeClr val="accent1"/>
+          </a:lnRef>
+          <a:fillRef idx="3">
+            <a:schemeClr val="accent1"/>
+          </a:fillRef>
+          <a:effectRef idx="2">
+            <a:schemeClr val="accent1"/>
+          </a:effectRef>
+          <a:fontRef idx="minor">
+            <a:schemeClr val="lt1"/>
+          </a:fontRef>
+        </p:style>
+        <p:txBody>
+          <a:bodyPr rtlCol="0" anchor="ctr"/>
+          <a:lstStyle/>
+          <a:p>
+            <a:pPr algn="ctr"/>
+          </a:p>
+        </p:txBody>
+      </p:sp>
+      <p:sp>
+        <p:nvSpPr>
+          <p:cNvPr id="36" name="TextBox 35"/>
+          <p:cNvSpPr txBox="1"/>
+          <p:nvPr/>
+        </p:nvSpPr>
+        <p:spPr>
+          <a:xfrm>
+            <a:off x="685800" y="5486400"/>
+            <a:ext cx="10789920" cy="548640"/>
+          </a:xfrm>
+          <a:prstGeom prst="rect">
+            <a:avLst/>
+          </a:prstGeom>
+          <a:noFill/>
+        </p:spPr>
+        <p:txBody>
+          <a:bodyPr wrap="square" lIns="45720" rIns="45720" tIns="22860" bIns="22860" anchor="ctr">
+            <a:spAutoFit/>
+          </a:bodyPr>
+          <a:lstStyle/>
+          <a:p>
             <a:pPr algn="l"/>
             <a:r>
-              <a:rPr sz="1400" b="1">
+              <a:rPr sz="1600" b="1">
                 <a:solidFill>
                   <a:srgbClr val="333333"/>
                 </a:solidFill>
                 <a:latin typeface="Yu Gothic"/>
               </a:rPr>
-              <a:t>⚠ 送信は1通200円。入力に間違いがないか確認してから送る</a:t>
+              <a:t>すべて免許証に載っている漢字で入力・署名</a:t>
             </a:r>
           </a:p>
         </p:txBody>
@@ -7272,14 +6947,14 @@
                 </a:solidFill>
                 <a:latin typeface="Yu Gothic"/>
               </a:rPr>
-              <a:t>⑨-2：1ページ目・8ページ目の入力箇所</a:t>
+              <a:t>⑩-1：1ページ目</a:t>
             </a:r>
           </a:p>
         </p:txBody>
       </p:sp>
       <p:pic>
         <p:nvPicPr>
-          <p:cNvPr id="5" name="Picture 4" descr="13.png"/>
+          <p:cNvPr id="5" name="Picture 4" descr="pg1.png"/>
           <p:cNvPicPr>
             <a:picLocks noChangeAspect="1"/>
           </p:cNvPicPr>
@@ -7293,19 +6968,225 @@
         </p:blipFill>
         <p:spPr>
           <a:xfrm>
-            <a:off x="1396222" y="1325880"/>
-            <a:ext cx="9369074" cy="4892040"/>
+            <a:off x="914400" y="1325880"/>
+            <a:ext cx="3510255" cy="4937760"/>
           </a:xfrm>
           <a:prstGeom prst="rect">
             <a:avLst/>
           </a:prstGeom>
           <a:ln w="12700">
             <a:solidFill>
-              <a:srgbClr val="CCCCCC"/>
+              <a:srgbClr val="BBBBBB"/>
             </a:solidFill>
           </a:ln>
         </p:spPr>
       </p:pic>
+      <p:sp>
+        <p:nvSpPr>
+          <p:cNvPr id="6" name="Rounded Rectangle 5"/>
+          <p:cNvSpPr/>
+          <p:nvPr/>
+        </p:nvSpPr>
+        <p:spPr>
+          <a:xfrm>
+            <a:off x="2554339" y="2257917"/>
+            <a:ext cx="1265902" cy="271329"/>
+          </a:xfrm>
+          <a:prstGeom prst="roundRect">
+            <a:avLst>
+              <a:gd name="adj" fmla="val 12000"/>
+            </a:avLst>
+          </a:prstGeom>
+          <a:noFill/>
+          <a:ln w="38100">
+            <a:solidFill>
+              <a:srgbClr val="D32F2F"/>
+            </a:solidFill>
+          </a:ln>
+          <a:effectLst/>
+        </p:spPr>
+        <p:style>
+          <a:lnRef idx="1">
+            <a:schemeClr val="accent1"/>
+          </a:lnRef>
+          <a:fillRef idx="3">
+            <a:schemeClr val="accent1"/>
+          </a:fillRef>
+          <a:effectRef idx="2">
+            <a:schemeClr val="accent1"/>
+          </a:effectRef>
+          <a:fontRef idx="minor">
+            <a:schemeClr val="lt1"/>
+          </a:fontRef>
+        </p:style>
+        <p:txBody>
+          <a:bodyPr rtlCol="0" anchor="ctr"/>
+          <a:lstStyle/>
+          <a:p>
+            <a:pPr algn="ctr"/>
+          </a:p>
+        </p:txBody>
+      </p:sp>
+      <p:cxnSp>
+        <p:nvCxnSpPr>
+          <p:cNvPr id="7" name="Connector 6"/>
+          <p:cNvCxnSpPr/>
+          <p:nvPr/>
+        </p:nvCxnSpPr>
+        <p:spPr>
+          <a:xfrm>
+            <a:off x="3820241" y="2393582"/>
+            <a:ext cx="1620439" cy="0"/>
+          </a:xfrm>
+          <a:prstGeom prst="line">
+            <a:avLst/>
+          </a:prstGeom>
+          <a:ln w="22225">
+            <a:solidFill>
+              <a:srgbClr val="D32F2F"/>
+            </a:solidFill>
+          </a:ln>
+        </p:spPr>
+        <p:style>
+          <a:lnRef idx="2">
+            <a:schemeClr val="accent1"/>
+          </a:lnRef>
+          <a:fillRef idx="0">
+            <a:schemeClr val="accent1"/>
+          </a:fillRef>
+          <a:effectRef idx="1">
+            <a:schemeClr val="accent1"/>
+          </a:effectRef>
+          <a:fontRef idx="minor">
+            <a:schemeClr val="tx1"/>
+          </a:fontRef>
+        </p:style>
+      </p:cxnSp>
+      <p:sp>
+        <p:nvSpPr>
+          <p:cNvPr id="8" name="Oval 7"/>
+          <p:cNvSpPr/>
+          <p:nvPr/>
+        </p:nvSpPr>
+        <p:spPr>
+          <a:xfrm>
+            <a:off x="5477256" y="2201558"/>
+            <a:ext cx="384048" cy="384048"/>
+          </a:xfrm>
+          <a:prstGeom prst="ellipse">
+            <a:avLst/>
+          </a:prstGeom>
+          <a:solidFill>
+            <a:srgbClr val="D32F2F"/>
+          </a:solidFill>
+          <a:ln w="19050">
+            <a:solidFill>
+              <a:srgbClr val="FFFFFF"/>
+            </a:solidFill>
+          </a:ln>
+          <a:effectLst/>
+        </p:spPr>
+        <p:style>
+          <a:lnRef idx="1">
+            <a:schemeClr val="accent1"/>
+          </a:lnRef>
+          <a:fillRef idx="3">
+            <a:schemeClr val="accent1"/>
+          </a:fillRef>
+          <a:effectRef idx="2">
+            <a:schemeClr val="accent1"/>
+          </a:effectRef>
+          <a:fontRef idx="minor">
+            <a:schemeClr val="lt1"/>
+          </a:fontRef>
+        </p:style>
+        <p:txBody>
+          <a:bodyPr rtlCol="0" anchor="ctr" lIns="0" rIns="0" tIns="0" bIns="0"/>
+          <a:lstStyle/>
+          <a:p>
+            <a:pPr algn="ctr"/>
+            <a:r>
+              <a:rPr sz="1400" b="1">
+                <a:solidFill>
+                  <a:srgbClr val="FFFFFF"/>
+                </a:solidFill>
+                <a:latin typeface="Yu Gothic"/>
+              </a:rPr>
+              <a:t>1</a:t>
+            </a:r>
+          </a:p>
+        </p:txBody>
+      </p:sp>
+      <p:sp>
+        <p:nvSpPr>
+          <p:cNvPr id="9" name="TextBox 8"/>
+          <p:cNvSpPr txBox="1"/>
+          <p:nvPr/>
+        </p:nvSpPr>
+        <p:spPr>
+          <a:xfrm>
+            <a:off x="6035040" y="2119262"/>
+            <a:ext cx="5943600" cy="411480"/>
+          </a:xfrm>
+          <a:prstGeom prst="rect">
+            <a:avLst/>
+          </a:prstGeom>
+          <a:noFill/>
+        </p:spPr>
+        <p:txBody>
+          <a:bodyPr wrap="square" lIns="45720" rIns="45720" tIns="22860" bIns="22860" anchor="ctr">
+            <a:spAutoFit/>
+          </a:bodyPr>
+          <a:lstStyle/>
+          <a:p>
+            <a:pPr algn="l"/>
+            <a:r>
+              <a:rPr sz="2000" b="1">
+                <a:solidFill>
+                  <a:srgbClr val="333333"/>
+                </a:solidFill>
+                <a:latin typeface="Yu Gothic"/>
+              </a:rPr>
+              <a:t>氏名</a:t>
+            </a:r>
+          </a:p>
+        </p:txBody>
+      </p:sp>
+      <p:sp>
+        <p:nvSpPr>
+          <p:cNvPr id="10" name="TextBox 9"/>
+          <p:cNvSpPr txBox="1"/>
+          <p:nvPr/>
+        </p:nvSpPr>
+        <p:spPr>
+          <a:xfrm>
+            <a:off x="6035040" y="2503310"/>
+            <a:ext cx="5943600" cy="365760"/>
+          </a:xfrm>
+          <a:prstGeom prst="rect">
+            <a:avLst/>
+          </a:prstGeom>
+          <a:noFill/>
+        </p:spPr>
+        <p:txBody>
+          <a:bodyPr wrap="square" lIns="45720" rIns="45720" tIns="22860" bIns="22860" anchor="t">
+            <a:spAutoFit/>
+          </a:bodyPr>
+          <a:lstStyle/>
+          <a:p>
+            <a:pPr algn="l"/>
+            <a:r>
+              <a:rPr sz="1400" b="0">
+                <a:solidFill>
+                  <a:srgbClr val="666666"/>
+                </a:solidFill>
+                <a:latin typeface="Yu Gothic"/>
+              </a:rPr>
+              <a:t>免許証に載っている漢字で</a:t>
+            </a:r>
+          </a:p>
+        </p:txBody>
+      </p:sp>
     </p:spTree>
   </p:cSld>
   <p:clrMapOvr>
@@ -7435,14 +7316,14 @@
                 </a:solidFill>
                 <a:latin typeface="Yu Gothic"/>
               </a:rPr>
-              <a:t>⑨-3：9ページ目・宣誓書の入力箇所</a:t>
+              <a:t>⑩-2：11ページ目</a:t>
             </a:r>
           </a:p>
         </p:txBody>
       </p:sp>
       <p:pic>
         <p:nvPicPr>
-          <p:cNvPr id="5" name="Picture 4" descr="14.png"/>
+          <p:cNvPr id="5" name="Picture 4" descr="pg11.png"/>
           <p:cNvPicPr>
             <a:picLocks noChangeAspect="1"/>
           </p:cNvPicPr>
@@ -7456,19 +7337,773 @@
         </p:blipFill>
         <p:spPr>
           <a:xfrm>
-            <a:off x="1967131" y="1325880"/>
-            <a:ext cx="8227256" cy="4892040"/>
+            <a:off x="914400" y="1325880"/>
+            <a:ext cx="3689203" cy="4937760"/>
           </a:xfrm>
           <a:prstGeom prst="rect">
             <a:avLst/>
           </a:prstGeom>
           <a:ln w="12700">
             <a:solidFill>
-              <a:srgbClr val="CCCCCC"/>
+              <a:srgbClr val="BBBBBB"/>
             </a:solidFill>
           </a:ln>
         </p:spPr>
       </p:pic>
+      <p:sp>
+        <p:nvSpPr>
+          <p:cNvPr id="6" name="Rounded Rectangle 5"/>
+          <p:cNvSpPr/>
+          <p:nvPr/>
+        </p:nvSpPr>
+        <p:spPr>
+          <a:xfrm>
+            <a:off x="3139389" y="1888218"/>
+            <a:ext cx="1353614" cy="287007"/>
+          </a:xfrm>
+          <a:prstGeom prst="roundRect">
+            <a:avLst>
+              <a:gd name="adj" fmla="val 12000"/>
+            </a:avLst>
+          </a:prstGeom>
+          <a:noFill/>
+          <a:ln w="38100">
+            <a:solidFill>
+              <a:srgbClr val="D32F2F"/>
+            </a:solidFill>
+          </a:ln>
+          <a:effectLst/>
+        </p:spPr>
+        <p:style>
+          <a:lnRef idx="1">
+            <a:schemeClr val="accent1"/>
+          </a:lnRef>
+          <a:fillRef idx="3">
+            <a:schemeClr val="accent1"/>
+          </a:fillRef>
+          <a:effectRef idx="2">
+            <a:schemeClr val="accent1"/>
+          </a:effectRef>
+          <a:fontRef idx="minor">
+            <a:schemeClr val="lt1"/>
+          </a:fontRef>
+        </p:style>
+        <p:txBody>
+          <a:bodyPr rtlCol="0" anchor="ctr"/>
+          <a:lstStyle/>
+          <a:p>
+            <a:pPr algn="ctr"/>
+          </a:p>
+        </p:txBody>
+      </p:sp>
+      <p:cxnSp>
+        <p:nvCxnSpPr>
+          <p:cNvPr id="7" name="Connector 6"/>
+          <p:cNvCxnSpPr/>
+          <p:nvPr/>
+        </p:nvCxnSpPr>
+        <p:spPr>
+          <a:xfrm flipV="1">
+            <a:off x="4493003" y="1376944"/>
+            <a:ext cx="947677" cy="654778"/>
+          </a:xfrm>
+          <a:prstGeom prst="line">
+            <a:avLst/>
+          </a:prstGeom>
+          <a:ln w="22225">
+            <a:solidFill>
+              <a:srgbClr val="D32F2F"/>
+            </a:solidFill>
+          </a:ln>
+        </p:spPr>
+        <p:style>
+          <a:lnRef idx="2">
+            <a:schemeClr val="accent1"/>
+          </a:lnRef>
+          <a:fillRef idx="0">
+            <a:schemeClr val="accent1"/>
+          </a:fillRef>
+          <a:effectRef idx="1">
+            <a:schemeClr val="accent1"/>
+          </a:effectRef>
+          <a:fontRef idx="minor">
+            <a:schemeClr val="tx1"/>
+          </a:fontRef>
+        </p:style>
+      </p:cxnSp>
+      <p:sp>
+        <p:nvSpPr>
+          <p:cNvPr id="8" name="Oval 7"/>
+          <p:cNvSpPr/>
+          <p:nvPr/>
+        </p:nvSpPr>
+        <p:spPr>
+          <a:xfrm>
+            <a:off x="5477256" y="1184920"/>
+            <a:ext cx="384048" cy="384048"/>
+          </a:xfrm>
+          <a:prstGeom prst="ellipse">
+            <a:avLst/>
+          </a:prstGeom>
+          <a:solidFill>
+            <a:srgbClr val="D32F2F"/>
+          </a:solidFill>
+          <a:ln w="19050">
+            <a:solidFill>
+              <a:srgbClr val="FFFFFF"/>
+            </a:solidFill>
+          </a:ln>
+          <a:effectLst/>
+        </p:spPr>
+        <p:style>
+          <a:lnRef idx="1">
+            <a:schemeClr val="accent1"/>
+          </a:lnRef>
+          <a:fillRef idx="3">
+            <a:schemeClr val="accent1"/>
+          </a:fillRef>
+          <a:effectRef idx="2">
+            <a:schemeClr val="accent1"/>
+          </a:effectRef>
+          <a:fontRef idx="minor">
+            <a:schemeClr val="lt1"/>
+          </a:fontRef>
+        </p:style>
+        <p:txBody>
+          <a:bodyPr rtlCol="0" anchor="ctr" lIns="0" rIns="0" tIns="0" bIns="0"/>
+          <a:lstStyle/>
+          <a:p>
+            <a:pPr algn="ctr"/>
+            <a:r>
+              <a:rPr sz="1400" b="1">
+                <a:solidFill>
+                  <a:srgbClr val="FFFFFF"/>
+                </a:solidFill>
+                <a:latin typeface="Yu Gothic"/>
+              </a:rPr>
+              <a:t>1</a:t>
+            </a:r>
+          </a:p>
+        </p:txBody>
+      </p:sp>
+      <p:sp>
+        <p:nvSpPr>
+          <p:cNvPr id="9" name="TextBox 8"/>
+          <p:cNvSpPr txBox="1"/>
+          <p:nvPr/>
+        </p:nvSpPr>
+        <p:spPr>
+          <a:xfrm>
+            <a:off x="6035040" y="1102624"/>
+            <a:ext cx="5943600" cy="411480"/>
+          </a:xfrm>
+          <a:prstGeom prst="rect">
+            <a:avLst/>
+          </a:prstGeom>
+          <a:noFill/>
+        </p:spPr>
+        <p:txBody>
+          <a:bodyPr wrap="square" lIns="45720" rIns="45720" tIns="22860" bIns="22860" anchor="ctr">
+            <a:spAutoFit/>
+          </a:bodyPr>
+          <a:lstStyle/>
+          <a:p>
+            <a:pPr algn="l"/>
+            <a:r>
+              <a:rPr sz="2000" b="1">
+                <a:solidFill>
+                  <a:srgbClr val="333333"/>
+                </a:solidFill>
+                <a:latin typeface="Yu Gothic"/>
+              </a:rPr>
+              <a:t>契約日</a:t>
+            </a:r>
+          </a:p>
+        </p:txBody>
+      </p:sp>
+      <p:sp>
+        <p:nvSpPr>
+          <p:cNvPr id="10" name="TextBox 9"/>
+          <p:cNvSpPr txBox="1"/>
+          <p:nvPr/>
+        </p:nvSpPr>
+        <p:spPr>
+          <a:xfrm>
+            <a:off x="6035040" y="1486672"/>
+            <a:ext cx="5943600" cy="365760"/>
+          </a:xfrm>
+          <a:prstGeom prst="rect">
+            <a:avLst/>
+          </a:prstGeom>
+          <a:noFill/>
+        </p:spPr>
+        <p:txBody>
+          <a:bodyPr wrap="square" lIns="45720" rIns="45720" tIns="22860" bIns="22860" anchor="t">
+            <a:spAutoFit/>
+          </a:bodyPr>
+          <a:lstStyle/>
+          <a:p>
+            <a:pPr algn="l"/>
+            <a:r>
+              <a:rPr sz="1400" b="0">
+                <a:solidFill>
+                  <a:srgbClr val="666666"/>
+                </a:solidFill>
+                <a:latin typeface="Yu Gothic"/>
+              </a:rPr>
+              <a:t>西暦で入力（yyyy/mm/dd）</a:t>
+            </a:r>
+          </a:p>
+        </p:txBody>
+      </p:sp>
+      <p:sp>
+        <p:nvSpPr>
+          <p:cNvPr id="11" name="Rounded Rectangle 10"/>
+          <p:cNvSpPr/>
+          <p:nvPr/>
+        </p:nvSpPr>
+        <p:spPr>
+          <a:xfrm>
+            <a:off x="1928477" y="3143049"/>
+            <a:ext cx="1353614" cy="287007"/>
+          </a:xfrm>
+          <a:prstGeom prst="roundRect">
+            <a:avLst>
+              <a:gd name="adj" fmla="val 12000"/>
+            </a:avLst>
+          </a:prstGeom>
+          <a:noFill/>
+          <a:ln w="38100">
+            <a:solidFill>
+              <a:srgbClr val="D32F2F"/>
+            </a:solidFill>
+          </a:ln>
+          <a:effectLst/>
+        </p:spPr>
+        <p:style>
+          <a:lnRef idx="1">
+            <a:schemeClr val="accent1"/>
+          </a:lnRef>
+          <a:fillRef idx="3">
+            <a:schemeClr val="accent1"/>
+          </a:fillRef>
+          <a:effectRef idx="2">
+            <a:schemeClr val="accent1"/>
+          </a:effectRef>
+          <a:fontRef idx="minor">
+            <a:schemeClr val="lt1"/>
+          </a:fontRef>
+        </p:style>
+        <p:txBody>
+          <a:bodyPr rtlCol="0" anchor="ctr"/>
+          <a:lstStyle/>
+          <a:p>
+            <a:pPr algn="ctr"/>
+          </a:p>
+        </p:txBody>
+      </p:sp>
+      <p:cxnSp>
+        <p:nvCxnSpPr>
+          <p:cNvPr id="12" name="Connector 11"/>
+          <p:cNvCxnSpPr/>
+          <p:nvPr/>
+        </p:nvCxnSpPr>
+        <p:spPr>
+          <a:xfrm flipV="1">
+            <a:off x="3282091" y="2245624"/>
+            <a:ext cx="2158589" cy="1040929"/>
+          </a:xfrm>
+          <a:prstGeom prst="line">
+            <a:avLst/>
+          </a:prstGeom>
+          <a:ln w="22225">
+            <a:solidFill>
+              <a:srgbClr val="D32F2F"/>
+            </a:solidFill>
+          </a:ln>
+        </p:spPr>
+        <p:style>
+          <a:lnRef idx="2">
+            <a:schemeClr val="accent1"/>
+          </a:lnRef>
+          <a:fillRef idx="0">
+            <a:schemeClr val="accent1"/>
+          </a:fillRef>
+          <a:effectRef idx="1">
+            <a:schemeClr val="accent1"/>
+          </a:effectRef>
+          <a:fontRef idx="minor">
+            <a:schemeClr val="tx1"/>
+          </a:fontRef>
+        </p:style>
+      </p:cxnSp>
+      <p:sp>
+        <p:nvSpPr>
+          <p:cNvPr id="13" name="Oval 12"/>
+          <p:cNvSpPr/>
+          <p:nvPr/>
+        </p:nvSpPr>
+        <p:spPr>
+          <a:xfrm>
+            <a:off x="5477256" y="2053600"/>
+            <a:ext cx="384048" cy="384048"/>
+          </a:xfrm>
+          <a:prstGeom prst="ellipse">
+            <a:avLst/>
+          </a:prstGeom>
+          <a:solidFill>
+            <a:srgbClr val="D32F2F"/>
+          </a:solidFill>
+          <a:ln w="19050">
+            <a:solidFill>
+              <a:srgbClr val="FFFFFF"/>
+            </a:solidFill>
+          </a:ln>
+          <a:effectLst/>
+        </p:spPr>
+        <p:style>
+          <a:lnRef idx="1">
+            <a:schemeClr val="accent1"/>
+          </a:lnRef>
+          <a:fillRef idx="3">
+            <a:schemeClr val="accent1"/>
+          </a:fillRef>
+          <a:effectRef idx="2">
+            <a:schemeClr val="accent1"/>
+          </a:effectRef>
+          <a:fontRef idx="minor">
+            <a:schemeClr val="lt1"/>
+          </a:fontRef>
+        </p:style>
+        <p:txBody>
+          <a:bodyPr rtlCol="0" anchor="ctr" lIns="0" rIns="0" tIns="0" bIns="0"/>
+          <a:lstStyle/>
+          <a:p>
+            <a:pPr algn="ctr"/>
+            <a:r>
+              <a:rPr sz="1400" b="1">
+                <a:solidFill>
+                  <a:srgbClr val="FFFFFF"/>
+                </a:solidFill>
+                <a:latin typeface="Yu Gothic"/>
+              </a:rPr>
+              <a:t>2</a:t>
+            </a:r>
+          </a:p>
+        </p:txBody>
+      </p:sp>
+      <p:sp>
+        <p:nvSpPr>
+          <p:cNvPr id="14" name="TextBox 13"/>
+          <p:cNvSpPr txBox="1"/>
+          <p:nvPr/>
+        </p:nvSpPr>
+        <p:spPr>
+          <a:xfrm>
+            <a:off x="6035040" y="1971304"/>
+            <a:ext cx="5943600" cy="411480"/>
+          </a:xfrm>
+          <a:prstGeom prst="rect">
+            <a:avLst/>
+          </a:prstGeom>
+          <a:noFill/>
+        </p:spPr>
+        <p:txBody>
+          <a:bodyPr wrap="square" lIns="45720" rIns="45720" tIns="22860" bIns="22860" anchor="ctr">
+            <a:spAutoFit/>
+          </a:bodyPr>
+          <a:lstStyle/>
+          <a:p>
+            <a:pPr algn="l"/>
+            <a:r>
+              <a:rPr sz="2000" b="1">
+                <a:solidFill>
+                  <a:srgbClr val="333333"/>
+                </a:solidFill>
+                <a:latin typeface="Yu Gothic"/>
+              </a:rPr>
+              <a:t>住所</a:t>
+            </a:r>
+          </a:p>
+        </p:txBody>
+      </p:sp>
+      <p:sp>
+        <p:nvSpPr>
+          <p:cNvPr id="15" name="Rounded Rectangle 14"/>
+          <p:cNvSpPr/>
+          <p:nvPr/>
+        </p:nvSpPr>
+        <p:spPr>
+          <a:xfrm>
+            <a:off x="1934751" y="3475579"/>
+            <a:ext cx="1353614" cy="287007"/>
+          </a:xfrm>
+          <a:prstGeom prst="roundRect">
+            <a:avLst>
+              <a:gd name="adj" fmla="val 12000"/>
+            </a:avLst>
+          </a:prstGeom>
+          <a:noFill/>
+          <a:ln w="38100">
+            <a:solidFill>
+              <a:srgbClr val="D32F2F"/>
+            </a:solidFill>
+          </a:ln>
+          <a:effectLst/>
+        </p:spPr>
+        <p:style>
+          <a:lnRef idx="1">
+            <a:schemeClr val="accent1"/>
+          </a:lnRef>
+          <a:fillRef idx="3">
+            <a:schemeClr val="accent1"/>
+          </a:fillRef>
+          <a:effectRef idx="2">
+            <a:schemeClr val="accent1"/>
+          </a:effectRef>
+          <a:fontRef idx="minor">
+            <a:schemeClr val="lt1"/>
+          </a:fontRef>
+        </p:style>
+        <p:txBody>
+          <a:bodyPr rtlCol="0" anchor="ctr"/>
+          <a:lstStyle/>
+          <a:p>
+            <a:pPr algn="ctr"/>
+          </a:p>
+        </p:txBody>
+      </p:sp>
+      <p:cxnSp>
+        <p:nvCxnSpPr>
+          <p:cNvPr id="16" name="Connector 15"/>
+          <p:cNvCxnSpPr/>
+          <p:nvPr/>
+        </p:nvCxnSpPr>
+        <p:spPr>
+          <a:xfrm flipV="1">
+            <a:off x="3288365" y="3114304"/>
+            <a:ext cx="2152315" cy="504779"/>
+          </a:xfrm>
+          <a:prstGeom prst="line">
+            <a:avLst/>
+          </a:prstGeom>
+          <a:ln w="22225">
+            <a:solidFill>
+              <a:srgbClr val="D32F2F"/>
+            </a:solidFill>
+          </a:ln>
+        </p:spPr>
+        <p:style>
+          <a:lnRef idx="2">
+            <a:schemeClr val="accent1"/>
+          </a:lnRef>
+          <a:fillRef idx="0">
+            <a:schemeClr val="accent1"/>
+          </a:fillRef>
+          <a:effectRef idx="1">
+            <a:schemeClr val="accent1"/>
+          </a:effectRef>
+          <a:fontRef idx="minor">
+            <a:schemeClr val="tx1"/>
+          </a:fontRef>
+        </p:style>
+      </p:cxnSp>
+      <p:sp>
+        <p:nvSpPr>
+          <p:cNvPr id="17" name="Oval 16"/>
+          <p:cNvSpPr/>
+          <p:nvPr/>
+        </p:nvSpPr>
+        <p:spPr>
+          <a:xfrm>
+            <a:off x="5477256" y="2922280"/>
+            <a:ext cx="384048" cy="384048"/>
+          </a:xfrm>
+          <a:prstGeom prst="ellipse">
+            <a:avLst/>
+          </a:prstGeom>
+          <a:solidFill>
+            <a:srgbClr val="D32F2F"/>
+          </a:solidFill>
+          <a:ln w="19050">
+            <a:solidFill>
+              <a:srgbClr val="FFFFFF"/>
+            </a:solidFill>
+          </a:ln>
+          <a:effectLst/>
+        </p:spPr>
+        <p:style>
+          <a:lnRef idx="1">
+            <a:schemeClr val="accent1"/>
+          </a:lnRef>
+          <a:fillRef idx="3">
+            <a:schemeClr val="accent1"/>
+          </a:fillRef>
+          <a:effectRef idx="2">
+            <a:schemeClr val="accent1"/>
+          </a:effectRef>
+          <a:fontRef idx="minor">
+            <a:schemeClr val="lt1"/>
+          </a:fontRef>
+        </p:style>
+        <p:txBody>
+          <a:bodyPr rtlCol="0" anchor="ctr" lIns="0" rIns="0" tIns="0" bIns="0"/>
+          <a:lstStyle/>
+          <a:p>
+            <a:pPr algn="ctr"/>
+            <a:r>
+              <a:rPr sz="1400" b="1">
+                <a:solidFill>
+                  <a:srgbClr val="FFFFFF"/>
+                </a:solidFill>
+                <a:latin typeface="Yu Gothic"/>
+              </a:rPr>
+              <a:t>3</a:t>
+            </a:r>
+          </a:p>
+        </p:txBody>
+      </p:sp>
+      <p:sp>
+        <p:nvSpPr>
+          <p:cNvPr id="18" name="TextBox 17"/>
+          <p:cNvSpPr txBox="1"/>
+          <p:nvPr/>
+        </p:nvSpPr>
+        <p:spPr>
+          <a:xfrm>
+            <a:off x="6035040" y="2839984"/>
+            <a:ext cx="5943600" cy="411480"/>
+          </a:xfrm>
+          <a:prstGeom prst="rect">
+            <a:avLst/>
+          </a:prstGeom>
+          <a:noFill/>
+        </p:spPr>
+        <p:txBody>
+          <a:bodyPr wrap="square" lIns="45720" rIns="45720" tIns="22860" bIns="22860" anchor="ctr">
+            <a:spAutoFit/>
+          </a:bodyPr>
+          <a:lstStyle/>
+          <a:p>
+            <a:pPr algn="l"/>
+            <a:r>
+              <a:rPr sz="2000" b="1">
+                <a:solidFill>
+                  <a:srgbClr val="333333"/>
+                </a:solidFill>
+                <a:latin typeface="Yu Gothic"/>
+              </a:rPr>
+              <a:t>氏名</a:t>
+            </a:r>
+          </a:p>
+        </p:txBody>
+      </p:sp>
+      <p:sp>
+        <p:nvSpPr>
+          <p:cNvPr id="19" name="TextBox 18"/>
+          <p:cNvSpPr txBox="1"/>
+          <p:nvPr/>
+        </p:nvSpPr>
+        <p:spPr>
+          <a:xfrm>
+            <a:off x="6035040" y="3224032"/>
+            <a:ext cx="5943600" cy="365760"/>
+          </a:xfrm>
+          <a:prstGeom prst="rect">
+            <a:avLst/>
+          </a:prstGeom>
+          <a:noFill/>
+        </p:spPr>
+        <p:txBody>
+          <a:bodyPr wrap="square" lIns="45720" rIns="45720" tIns="22860" bIns="22860" anchor="t">
+            <a:spAutoFit/>
+          </a:bodyPr>
+          <a:lstStyle/>
+          <a:p>
+            <a:pPr algn="l"/>
+            <a:r>
+              <a:rPr sz="1400" b="0">
+                <a:solidFill>
+                  <a:srgbClr val="666666"/>
+                </a:solidFill>
+                <a:latin typeface="Yu Gothic"/>
+              </a:rPr>
+              <a:t>免許証に載っている漢字で</a:t>
+            </a:r>
+          </a:p>
+        </p:txBody>
+      </p:sp>
+      <p:sp>
+        <p:nvSpPr>
+          <p:cNvPr id="20" name="Rounded Rectangle 19"/>
+          <p:cNvSpPr/>
+          <p:nvPr/>
+        </p:nvSpPr>
+        <p:spPr>
+          <a:xfrm>
+            <a:off x="1947300" y="3839480"/>
+            <a:ext cx="1353614" cy="287007"/>
+          </a:xfrm>
+          <a:prstGeom prst="roundRect">
+            <a:avLst>
+              <a:gd name="adj" fmla="val 12000"/>
+            </a:avLst>
+          </a:prstGeom>
+          <a:noFill/>
+          <a:ln w="38100">
+            <a:solidFill>
+              <a:srgbClr val="D32F2F"/>
+            </a:solidFill>
+          </a:ln>
+          <a:effectLst/>
+        </p:spPr>
+        <p:style>
+          <a:lnRef idx="1">
+            <a:schemeClr val="accent1"/>
+          </a:lnRef>
+          <a:fillRef idx="3">
+            <a:schemeClr val="accent1"/>
+          </a:fillRef>
+          <a:effectRef idx="2">
+            <a:schemeClr val="accent1"/>
+          </a:effectRef>
+          <a:fontRef idx="minor">
+            <a:schemeClr val="lt1"/>
+          </a:fontRef>
+        </p:style>
+        <p:txBody>
+          <a:bodyPr rtlCol="0" anchor="ctr"/>
+          <a:lstStyle/>
+          <a:p>
+            <a:pPr algn="ctr"/>
+          </a:p>
+        </p:txBody>
+      </p:sp>
+      <p:cxnSp>
+        <p:nvCxnSpPr>
+          <p:cNvPr id="21" name="Connector 20"/>
+          <p:cNvCxnSpPr/>
+          <p:nvPr/>
+        </p:nvCxnSpPr>
+        <p:spPr>
+          <a:xfrm>
+            <a:off x="3300914" y="3982984"/>
+            <a:ext cx="2139766" cy="0"/>
+          </a:xfrm>
+          <a:prstGeom prst="line">
+            <a:avLst/>
+          </a:prstGeom>
+          <a:ln w="22225">
+            <a:solidFill>
+              <a:srgbClr val="D32F2F"/>
+            </a:solidFill>
+          </a:ln>
+        </p:spPr>
+        <p:style>
+          <a:lnRef idx="2">
+            <a:schemeClr val="accent1"/>
+          </a:lnRef>
+          <a:fillRef idx="0">
+            <a:schemeClr val="accent1"/>
+          </a:fillRef>
+          <a:effectRef idx="1">
+            <a:schemeClr val="accent1"/>
+          </a:effectRef>
+          <a:fontRef idx="minor">
+            <a:schemeClr val="tx1"/>
+          </a:fontRef>
+        </p:style>
+      </p:cxnSp>
+      <p:sp>
+        <p:nvSpPr>
+          <p:cNvPr id="22" name="Oval 21"/>
+          <p:cNvSpPr/>
+          <p:nvPr/>
+        </p:nvSpPr>
+        <p:spPr>
+          <a:xfrm>
+            <a:off x="5477256" y="3790960"/>
+            <a:ext cx="384048" cy="384048"/>
+          </a:xfrm>
+          <a:prstGeom prst="ellipse">
+            <a:avLst/>
+          </a:prstGeom>
+          <a:solidFill>
+            <a:srgbClr val="D32F2F"/>
+          </a:solidFill>
+          <a:ln w="19050">
+            <a:solidFill>
+              <a:srgbClr val="FFFFFF"/>
+            </a:solidFill>
+          </a:ln>
+          <a:effectLst/>
+        </p:spPr>
+        <p:style>
+          <a:lnRef idx="1">
+            <a:schemeClr val="accent1"/>
+          </a:lnRef>
+          <a:fillRef idx="3">
+            <a:schemeClr val="accent1"/>
+          </a:fillRef>
+          <a:effectRef idx="2">
+            <a:schemeClr val="accent1"/>
+          </a:effectRef>
+          <a:fontRef idx="minor">
+            <a:schemeClr val="lt1"/>
+          </a:fontRef>
+        </p:style>
+        <p:txBody>
+          <a:bodyPr rtlCol="0" anchor="ctr" lIns="0" rIns="0" tIns="0" bIns="0"/>
+          <a:lstStyle/>
+          <a:p>
+            <a:pPr algn="ctr"/>
+            <a:r>
+              <a:rPr sz="1400" b="1">
+                <a:solidFill>
+                  <a:srgbClr val="FFFFFF"/>
+                </a:solidFill>
+                <a:latin typeface="Yu Gothic"/>
+              </a:rPr>
+              <a:t>4</a:t>
+            </a:r>
+          </a:p>
+        </p:txBody>
+      </p:sp>
+      <p:sp>
+        <p:nvSpPr>
+          <p:cNvPr id="23" name="TextBox 22"/>
+          <p:cNvSpPr txBox="1"/>
+          <p:nvPr/>
+        </p:nvSpPr>
+        <p:spPr>
+          <a:xfrm>
+            <a:off x="6035040" y="3708664"/>
+            <a:ext cx="5943600" cy="411480"/>
+          </a:xfrm>
+          <a:prstGeom prst="rect">
+            <a:avLst/>
+          </a:prstGeom>
+          <a:noFill/>
+        </p:spPr>
+        <p:txBody>
+          <a:bodyPr wrap="square" lIns="45720" rIns="45720" tIns="22860" bIns="22860" anchor="ctr">
+            <a:spAutoFit/>
+          </a:bodyPr>
+          <a:lstStyle/>
+          <a:p>
+            <a:pPr algn="l"/>
+            <a:r>
+              <a:rPr sz="2000" b="1">
+                <a:solidFill>
+                  <a:srgbClr val="333333"/>
+                </a:solidFill>
+                <a:latin typeface="Yu Gothic"/>
+              </a:rPr>
+              <a:t>電話番号</a:t>
+            </a:r>
+          </a:p>
+        </p:txBody>
+      </p:sp>
     </p:spTree>
   </p:cSld>
   <p:clrMapOvr>
@@ -7598,14 +8233,14 @@
                 </a:solidFill>
                 <a:latin typeface="Yu Gothic"/>
               </a:rPr>
-              <a:t>⑩ 入力が終わったら「送信する」</a:t>
+              <a:t>⑩-3：宣誓書（14ページ目）</a:t>
             </a:r>
           </a:p>
         </p:txBody>
       </p:sp>
       <p:pic>
         <p:nvPicPr>
-          <p:cNvPr id="5" name="Picture 4" descr="15.png"/>
+          <p:cNvPr id="5" name="Picture 4" descr="pg14.png"/>
           <p:cNvPicPr>
             <a:picLocks noChangeAspect="1"/>
           </p:cNvPicPr>
@@ -7619,15 +8254,15 @@
         </p:blipFill>
         <p:spPr>
           <a:xfrm>
-            <a:off x="1440208" y="1325880"/>
-            <a:ext cx="9281102" cy="4206240"/>
+            <a:off x="914400" y="1325880"/>
+            <a:ext cx="3726848" cy="4937760"/>
           </a:xfrm>
           <a:prstGeom prst="rect">
             <a:avLst/>
           </a:prstGeom>
           <a:ln w="12700">
             <a:solidFill>
-              <a:srgbClr val="CCCCCC"/>
+              <a:srgbClr val="BBBBBB"/>
             </a:solidFill>
           </a:ln>
         </p:spPr>
@@ -7640,20 +8275,18 @@
         </p:nvSpPr>
         <p:spPr>
           <a:xfrm>
-            <a:off x="411480" y="5641848"/>
-            <a:ext cx="11338560" cy="566928"/>
+            <a:off x="1219498" y="1932137"/>
+            <a:ext cx="1353614" cy="287007"/>
           </a:xfrm>
           <a:prstGeom prst="roundRect">
             <a:avLst>
-              <a:gd name="adj" fmla="val 8000"/>
+              <a:gd name="adj" fmla="val 12000"/>
             </a:avLst>
           </a:prstGeom>
-          <a:solidFill>
-            <a:srgbClr val="FFF6E0"/>
-          </a:solidFill>
-          <a:ln w="19050">
+          <a:noFill/>
+          <a:ln w="38100">
             <a:solidFill>
-              <a:srgbClr val="F29A3C"/>
+              <a:srgbClr val="D32F2F"/>
             </a:solidFill>
           </a:ln>
           <a:effectLst/>
@@ -7680,16 +8313,106 @@
           </a:p>
         </p:txBody>
       </p:sp>
-      <p:sp>
-        <p:nvSpPr>
-          <p:cNvPr id="7" name="TextBox 6"/>
-          <p:cNvSpPr txBox="1"/>
-          <p:nvPr/>
-        </p:nvSpPr>
-        <p:spPr>
-          <a:xfrm>
-            <a:off x="594360" y="5641848"/>
-            <a:ext cx="10972800" cy="566928"/>
+      <p:cxnSp>
+        <p:nvCxnSpPr>
+          <p:cNvPr id="7" name="Connector 6"/>
+          <p:cNvCxnSpPr/>
+          <p:nvPr/>
+        </p:nvCxnSpPr>
+        <p:spPr>
+          <a:xfrm>
+            <a:off x="2573112" y="2075641"/>
+            <a:ext cx="2867568" cy="0"/>
+          </a:xfrm>
+          <a:prstGeom prst="line">
+            <a:avLst/>
+          </a:prstGeom>
+          <a:ln w="22225">
+            <a:solidFill>
+              <a:srgbClr val="D32F2F"/>
+            </a:solidFill>
+          </a:ln>
+        </p:spPr>
+        <p:style>
+          <a:lnRef idx="2">
+            <a:schemeClr val="accent1"/>
+          </a:lnRef>
+          <a:fillRef idx="0">
+            <a:schemeClr val="accent1"/>
+          </a:fillRef>
+          <a:effectRef idx="1">
+            <a:schemeClr val="accent1"/>
+          </a:effectRef>
+          <a:fontRef idx="minor">
+            <a:schemeClr val="tx1"/>
+          </a:fontRef>
+        </p:style>
+      </p:cxnSp>
+      <p:sp>
+        <p:nvSpPr>
+          <p:cNvPr id="8" name="Oval 7"/>
+          <p:cNvSpPr/>
+          <p:nvPr/>
+        </p:nvSpPr>
+        <p:spPr>
+          <a:xfrm>
+            <a:off x="5477256" y="1883617"/>
+            <a:ext cx="384048" cy="384048"/>
+          </a:xfrm>
+          <a:prstGeom prst="ellipse">
+            <a:avLst/>
+          </a:prstGeom>
+          <a:solidFill>
+            <a:srgbClr val="D32F2F"/>
+          </a:solidFill>
+          <a:ln w="19050">
+            <a:solidFill>
+              <a:srgbClr val="FFFFFF"/>
+            </a:solidFill>
+          </a:ln>
+          <a:effectLst/>
+        </p:spPr>
+        <p:style>
+          <a:lnRef idx="1">
+            <a:schemeClr val="accent1"/>
+          </a:lnRef>
+          <a:fillRef idx="3">
+            <a:schemeClr val="accent1"/>
+          </a:fillRef>
+          <a:effectRef idx="2">
+            <a:schemeClr val="accent1"/>
+          </a:effectRef>
+          <a:fontRef idx="minor">
+            <a:schemeClr val="lt1"/>
+          </a:fontRef>
+        </p:style>
+        <p:txBody>
+          <a:bodyPr rtlCol="0" anchor="ctr" lIns="0" rIns="0" tIns="0" bIns="0"/>
+          <a:lstStyle/>
+          <a:p>
+            <a:pPr algn="ctr"/>
+            <a:r>
+              <a:rPr sz="1400" b="1">
+                <a:solidFill>
+                  <a:srgbClr val="FFFFFF"/>
+                </a:solidFill>
+                <a:latin typeface="Yu Gothic"/>
+              </a:rPr>
+              <a:t>1</a:t>
+            </a:r>
+          </a:p>
+        </p:txBody>
+      </p:sp>
+      <p:sp>
+        <p:nvSpPr>
+          <p:cNvPr id="9" name="TextBox 8"/>
+          <p:cNvSpPr txBox="1"/>
+          <p:nvPr/>
+        </p:nvSpPr>
+        <p:spPr>
+          <a:xfrm>
+            <a:off x="6035040" y="1801321"/>
+            <a:ext cx="5943600" cy="411480"/>
           </a:xfrm>
           <a:prstGeom prst="rect">
             <a:avLst/>
@@ -7704,13 +8427,631 @@
           <a:p>
             <a:pPr algn="l"/>
             <a:r>
-              <a:rPr sz="1500" b="1">
+              <a:rPr sz="2000" b="1">
                 <a:solidFill>
                   <a:srgbClr val="333333"/>
                 </a:solidFill>
                 <a:latin typeface="Yu Gothic"/>
               </a:rPr>
-              <a:t>⚠ 送信は1通200円。送る前に、名前・住所・単価をもう一度確認</a:t>
+              <a:t>氏名</a:t>
+            </a:r>
+          </a:p>
+        </p:txBody>
+      </p:sp>
+      <p:sp>
+        <p:nvSpPr>
+          <p:cNvPr id="10" name="TextBox 9"/>
+          <p:cNvSpPr txBox="1"/>
+          <p:nvPr/>
+        </p:nvSpPr>
+        <p:spPr>
+          <a:xfrm>
+            <a:off x="6035040" y="2185369"/>
+            <a:ext cx="5943600" cy="365760"/>
+          </a:xfrm>
+          <a:prstGeom prst="rect">
+            <a:avLst/>
+          </a:prstGeom>
+          <a:noFill/>
+        </p:spPr>
+        <p:txBody>
+          <a:bodyPr wrap="square" lIns="45720" rIns="45720" tIns="22860" bIns="22860" anchor="t">
+            <a:spAutoFit/>
+          </a:bodyPr>
+          <a:lstStyle/>
+          <a:p>
+            <a:pPr algn="l"/>
+            <a:r>
+              <a:rPr sz="1400" b="0">
+                <a:solidFill>
+                  <a:srgbClr val="666666"/>
+                </a:solidFill>
+                <a:latin typeface="Yu Gothic"/>
+              </a:rPr>
+              <a:t>免許証に載っている漢字で</a:t>
+            </a:r>
+          </a:p>
+        </p:txBody>
+      </p:sp>
+      <p:sp>
+        <p:nvSpPr>
+          <p:cNvPr id="11" name="Rounded Rectangle 10"/>
+          <p:cNvSpPr/>
+          <p:nvPr/>
+        </p:nvSpPr>
+        <p:spPr>
+          <a:xfrm>
+            <a:off x="1533205" y="5200972"/>
+            <a:ext cx="1359888" cy="280733"/>
+          </a:xfrm>
+          <a:prstGeom prst="roundRect">
+            <a:avLst>
+              <a:gd name="adj" fmla="val 12000"/>
+            </a:avLst>
+          </a:prstGeom>
+          <a:noFill/>
+          <a:ln w="38100">
+            <a:solidFill>
+              <a:srgbClr val="D32F2F"/>
+            </a:solidFill>
+          </a:ln>
+          <a:effectLst/>
+        </p:spPr>
+        <p:style>
+          <a:lnRef idx="1">
+            <a:schemeClr val="accent1"/>
+          </a:lnRef>
+          <a:fillRef idx="3">
+            <a:schemeClr val="accent1"/>
+          </a:fillRef>
+          <a:effectRef idx="2">
+            <a:schemeClr val="accent1"/>
+          </a:effectRef>
+          <a:fontRef idx="minor">
+            <a:schemeClr val="lt1"/>
+          </a:fontRef>
+        </p:style>
+        <p:txBody>
+          <a:bodyPr rtlCol="0" anchor="ctr"/>
+          <a:lstStyle/>
+          <a:p>
+            <a:pPr algn="ctr"/>
+          </a:p>
+        </p:txBody>
+      </p:sp>
+      <p:cxnSp>
+        <p:nvCxnSpPr>
+          <p:cNvPr id="12" name="Connector 11"/>
+          <p:cNvCxnSpPr/>
+          <p:nvPr/>
+        </p:nvCxnSpPr>
+        <p:spPr>
+          <a:xfrm flipV="1">
+            <a:off x="2893094" y="4023359"/>
+            <a:ext cx="2547586" cy="1317980"/>
+          </a:xfrm>
+          <a:prstGeom prst="line">
+            <a:avLst/>
+          </a:prstGeom>
+          <a:ln w="22225">
+            <a:solidFill>
+              <a:srgbClr val="D32F2F"/>
+            </a:solidFill>
+          </a:ln>
+        </p:spPr>
+        <p:style>
+          <a:lnRef idx="2">
+            <a:schemeClr val="accent1"/>
+          </a:lnRef>
+          <a:fillRef idx="0">
+            <a:schemeClr val="accent1"/>
+          </a:fillRef>
+          <a:effectRef idx="1">
+            <a:schemeClr val="accent1"/>
+          </a:effectRef>
+          <a:fontRef idx="minor">
+            <a:schemeClr val="tx1"/>
+          </a:fontRef>
+        </p:style>
+      </p:cxnSp>
+      <p:sp>
+        <p:nvSpPr>
+          <p:cNvPr id="13" name="Oval 12"/>
+          <p:cNvSpPr/>
+          <p:nvPr/>
+        </p:nvSpPr>
+        <p:spPr>
+          <a:xfrm>
+            <a:off x="5477256" y="3831335"/>
+            <a:ext cx="384048" cy="384048"/>
+          </a:xfrm>
+          <a:prstGeom prst="ellipse">
+            <a:avLst/>
+          </a:prstGeom>
+          <a:solidFill>
+            <a:srgbClr val="D32F2F"/>
+          </a:solidFill>
+          <a:ln w="19050">
+            <a:solidFill>
+              <a:srgbClr val="FFFFFF"/>
+            </a:solidFill>
+          </a:ln>
+          <a:effectLst/>
+        </p:spPr>
+        <p:style>
+          <a:lnRef idx="1">
+            <a:schemeClr val="accent1"/>
+          </a:lnRef>
+          <a:fillRef idx="3">
+            <a:schemeClr val="accent1"/>
+          </a:fillRef>
+          <a:effectRef idx="2">
+            <a:schemeClr val="accent1"/>
+          </a:effectRef>
+          <a:fontRef idx="minor">
+            <a:schemeClr val="lt1"/>
+          </a:fontRef>
+        </p:style>
+        <p:txBody>
+          <a:bodyPr rtlCol="0" anchor="ctr" lIns="0" rIns="0" tIns="0" bIns="0"/>
+          <a:lstStyle/>
+          <a:p>
+            <a:pPr algn="ctr"/>
+            <a:r>
+              <a:rPr sz="1400" b="1">
+                <a:solidFill>
+                  <a:srgbClr val="FFFFFF"/>
+                </a:solidFill>
+                <a:latin typeface="Yu Gothic"/>
+              </a:rPr>
+              <a:t>2</a:t>
+            </a:r>
+          </a:p>
+        </p:txBody>
+      </p:sp>
+      <p:sp>
+        <p:nvSpPr>
+          <p:cNvPr id="14" name="TextBox 13"/>
+          <p:cNvSpPr txBox="1"/>
+          <p:nvPr/>
+        </p:nvSpPr>
+        <p:spPr>
+          <a:xfrm>
+            <a:off x="6035040" y="3749039"/>
+            <a:ext cx="5943600" cy="411480"/>
+          </a:xfrm>
+          <a:prstGeom prst="rect">
+            <a:avLst/>
+          </a:prstGeom>
+          <a:noFill/>
+        </p:spPr>
+        <p:txBody>
+          <a:bodyPr wrap="square" lIns="45720" rIns="45720" tIns="22860" bIns="22860" anchor="ctr">
+            <a:spAutoFit/>
+          </a:bodyPr>
+          <a:lstStyle/>
+          <a:p>
+            <a:pPr algn="l"/>
+            <a:r>
+              <a:rPr sz="2000" b="1">
+                <a:solidFill>
+                  <a:srgbClr val="333333"/>
+                </a:solidFill>
+                <a:latin typeface="Yu Gothic"/>
+              </a:rPr>
+              <a:t>署名（自署）</a:t>
+            </a:r>
+          </a:p>
+        </p:txBody>
+      </p:sp>
+      <p:sp>
+        <p:nvSpPr>
+          <p:cNvPr id="15" name="Rounded Rectangle 14"/>
+          <p:cNvSpPr/>
+          <p:nvPr/>
+        </p:nvSpPr>
+        <p:spPr>
+          <a:xfrm>
+            <a:off x="1533205" y="5433116"/>
+            <a:ext cx="1359888" cy="280733"/>
+          </a:xfrm>
+          <a:prstGeom prst="roundRect">
+            <a:avLst>
+              <a:gd name="adj" fmla="val 12000"/>
+            </a:avLst>
+          </a:prstGeom>
+          <a:noFill/>
+          <a:ln w="38100">
+            <a:solidFill>
+              <a:srgbClr val="D32F2F"/>
+            </a:solidFill>
+          </a:ln>
+          <a:effectLst/>
+        </p:spPr>
+        <p:style>
+          <a:lnRef idx="1">
+            <a:schemeClr val="accent1"/>
+          </a:lnRef>
+          <a:fillRef idx="3">
+            <a:schemeClr val="accent1"/>
+          </a:fillRef>
+          <a:effectRef idx="2">
+            <a:schemeClr val="accent1"/>
+          </a:effectRef>
+          <a:fontRef idx="minor">
+            <a:schemeClr val="lt1"/>
+          </a:fontRef>
+        </p:style>
+        <p:txBody>
+          <a:bodyPr rtlCol="0" anchor="ctr"/>
+          <a:lstStyle/>
+          <a:p>
+            <a:pPr algn="ctr"/>
+          </a:p>
+        </p:txBody>
+      </p:sp>
+      <p:cxnSp>
+        <p:nvCxnSpPr>
+          <p:cNvPr id="16" name="Connector 15"/>
+          <p:cNvCxnSpPr/>
+          <p:nvPr/>
+        </p:nvCxnSpPr>
+        <p:spPr>
+          <a:xfrm flipV="1">
+            <a:off x="2893094" y="4892040"/>
+            <a:ext cx="2547586" cy="681442"/>
+          </a:xfrm>
+          <a:prstGeom prst="line">
+            <a:avLst/>
+          </a:prstGeom>
+          <a:ln w="22225">
+            <a:solidFill>
+              <a:srgbClr val="D32F2F"/>
+            </a:solidFill>
+          </a:ln>
+        </p:spPr>
+        <p:style>
+          <a:lnRef idx="2">
+            <a:schemeClr val="accent1"/>
+          </a:lnRef>
+          <a:fillRef idx="0">
+            <a:schemeClr val="accent1"/>
+          </a:fillRef>
+          <a:effectRef idx="1">
+            <a:schemeClr val="accent1"/>
+          </a:effectRef>
+          <a:fontRef idx="minor">
+            <a:schemeClr val="tx1"/>
+          </a:fontRef>
+        </p:style>
+      </p:cxnSp>
+      <p:sp>
+        <p:nvSpPr>
+          <p:cNvPr id="17" name="Oval 16"/>
+          <p:cNvSpPr/>
+          <p:nvPr/>
+        </p:nvSpPr>
+        <p:spPr>
+          <a:xfrm>
+            <a:off x="5477256" y="4700016"/>
+            <a:ext cx="384048" cy="384048"/>
+          </a:xfrm>
+          <a:prstGeom prst="ellipse">
+            <a:avLst/>
+          </a:prstGeom>
+          <a:solidFill>
+            <a:srgbClr val="D32F2F"/>
+          </a:solidFill>
+          <a:ln w="19050">
+            <a:solidFill>
+              <a:srgbClr val="FFFFFF"/>
+            </a:solidFill>
+          </a:ln>
+          <a:effectLst/>
+        </p:spPr>
+        <p:style>
+          <a:lnRef idx="1">
+            <a:schemeClr val="accent1"/>
+          </a:lnRef>
+          <a:fillRef idx="3">
+            <a:schemeClr val="accent1"/>
+          </a:fillRef>
+          <a:effectRef idx="2">
+            <a:schemeClr val="accent1"/>
+          </a:effectRef>
+          <a:fontRef idx="minor">
+            <a:schemeClr val="lt1"/>
+          </a:fontRef>
+        </p:style>
+        <p:txBody>
+          <a:bodyPr rtlCol="0" anchor="ctr" lIns="0" rIns="0" tIns="0" bIns="0"/>
+          <a:lstStyle/>
+          <a:p>
+            <a:pPr algn="ctr"/>
+            <a:r>
+              <a:rPr sz="1400" b="1">
+                <a:solidFill>
+                  <a:srgbClr val="FFFFFF"/>
+                </a:solidFill>
+                <a:latin typeface="Yu Gothic"/>
+              </a:rPr>
+              <a:t>3</a:t>
+            </a:r>
+          </a:p>
+        </p:txBody>
+      </p:sp>
+      <p:sp>
+        <p:nvSpPr>
+          <p:cNvPr id="18" name="TextBox 17"/>
+          <p:cNvSpPr txBox="1"/>
+          <p:nvPr/>
+        </p:nvSpPr>
+        <p:spPr>
+          <a:xfrm>
+            <a:off x="6035040" y="4617720"/>
+            <a:ext cx="5943600" cy="411480"/>
+          </a:xfrm>
+          <a:prstGeom prst="rect">
+            <a:avLst/>
+          </a:prstGeom>
+          <a:noFill/>
+        </p:spPr>
+        <p:txBody>
+          <a:bodyPr wrap="square" lIns="45720" rIns="45720" tIns="22860" bIns="22860" anchor="ctr">
+            <a:spAutoFit/>
+          </a:bodyPr>
+          <a:lstStyle/>
+          <a:p>
+            <a:pPr algn="l"/>
+            <a:r>
+              <a:rPr sz="2000" b="1">
+                <a:solidFill>
+                  <a:srgbClr val="333333"/>
+                </a:solidFill>
+                <a:latin typeface="Yu Gothic"/>
+              </a:rPr>
+              <a:t>氏名（記名）</a:t>
+            </a:r>
+          </a:p>
+        </p:txBody>
+      </p:sp>
+      <p:sp>
+        <p:nvSpPr>
+          <p:cNvPr id="19" name="TextBox 18"/>
+          <p:cNvSpPr txBox="1"/>
+          <p:nvPr/>
+        </p:nvSpPr>
+        <p:spPr>
+          <a:xfrm>
+            <a:off x="6035040" y="5001768"/>
+            <a:ext cx="5943600" cy="365760"/>
+          </a:xfrm>
+          <a:prstGeom prst="rect">
+            <a:avLst/>
+          </a:prstGeom>
+          <a:noFill/>
+        </p:spPr>
+        <p:txBody>
+          <a:bodyPr wrap="square" lIns="45720" rIns="45720" tIns="22860" bIns="22860" anchor="t">
+            <a:spAutoFit/>
+          </a:bodyPr>
+          <a:lstStyle/>
+          <a:p>
+            <a:pPr algn="l"/>
+            <a:r>
+              <a:rPr sz="1400" b="0">
+                <a:solidFill>
+                  <a:srgbClr val="666666"/>
+                </a:solidFill>
+                <a:latin typeface="Yu Gothic"/>
+              </a:rPr>
+              <a:t>署名と同じ漢字で</a:t>
+            </a:r>
+          </a:p>
+        </p:txBody>
+      </p:sp>
+      <p:sp>
+        <p:nvSpPr>
+          <p:cNvPr id="20" name="Rounded Rectangle 19"/>
+          <p:cNvSpPr/>
+          <p:nvPr/>
+        </p:nvSpPr>
+        <p:spPr>
+          <a:xfrm>
+            <a:off x="1533205" y="5665259"/>
+            <a:ext cx="1359888" cy="274459"/>
+          </a:xfrm>
+          <a:prstGeom prst="roundRect">
+            <a:avLst>
+              <a:gd name="adj" fmla="val 12000"/>
+            </a:avLst>
+          </a:prstGeom>
+          <a:noFill/>
+          <a:ln w="38100">
+            <a:solidFill>
+              <a:srgbClr val="D32F2F"/>
+            </a:solidFill>
+          </a:ln>
+          <a:effectLst/>
+        </p:spPr>
+        <p:style>
+          <a:lnRef idx="1">
+            <a:schemeClr val="accent1"/>
+          </a:lnRef>
+          <a:fillRef idx="3">
+            <a:schemeClr val="accent1"/>
+          </a:fillRef>
+          <a:effectRef idx="2">
+            <a:schemeClr val="accent1"/>
+          </a:effectRef>
+          <a:fontRef idx="minor">
+            <a:schemeClr val="lt1"/>
+          </a:fontRef>
+        </p:style>
+        <p:txBody>
+          <a:bodyPr rtlCol="0" anchor="ctr"/>
+          <a:lstStyle/>
+          <a:p>
+            <a:pPr algn="ctr"/>
+          </a:p>
+        </p:txBody>
+      </p:sp>
+      <p:cxnSp>
+        <p:nvCxnSpPr>
+          <p:cNvPr id="21" name="Connector 20"/>
+          <p:cNvCxnSpPr/>
+          <p:nvPr/>
+        </p:nvCxnSpPr>
+        <p:spPr>
+          <a:xfrm flipV="1">
+            <a:off x="2893094" y="5760720"/>
+            <a:ext cx="2547586" cy="41769"/>
+          </a:xfrm>
+          <a:prstGeom prst="line">
+            <a:avLst/>
+          </a:prstGeom>
+          <a:ln w="22225">
+            <a:solidFill>
+              <a:srgbClr val="D32F2F"/>
+            </a:solidFill>
+          </a:ln>
+        </p:spPr>
+        <p:style>
+          <a:lnRef idx="2">
+            <a:schemeClr val="accent1"/>
+          </a:lnRef>
+          <a:fillRef idx="0">
+            <a:schemeClr val="accent1"/>
+          </a:fillRef>
+          <a:effectRef idx="1">
+            <a:schemeClr val="accent1"/>
+          </a:effectRef>
+          <a:fontRef idx="minor">
+            <a:schemeClr val="tx1"/>
+          </a:fontRef>
+        </p:style>
+      </p:cxnSp>
+      <p:sp>
+        <p:nvSpPr>
+          <p:cNvPr id="22" name="Oval 21"/>
+          <p:cNvSpPr/>
+          <p:nvPr/>
+        </p:nvSpPr>
+        <p:spPr>
+          <a:xfrm>
+            <a:off x="5477256" y="5568696"/>
+            <a:ext cx="384048" cy="384048"/>
+          </a:xfrm>
+          <a:prstGeom prst="ellipse">
+            <a:avLst/>
+          </a:prstGeom>
+          <a:solidFill>
+            <a:srgbClr val="D32F2F"/>
+          </a:solidFill>
+          <a:ln w="19050">
+            <a:solidFill>
+              <a:srgbClr val="FFFFFF"/>
+            </a:solidFill>
+          </a:ln>
+          <a:effectLst/>
+        </p:spPr>
+        <p:style>
+          <a:lnRef idx="1">
+            <a:schemeClr val="accent1"/>
+          </a:lnRef>
+          <a:fillRef idx="3">
+            <a:schemeClr val="accent1"/>
+          </a:fillRef>
+          <a:effectRef idx="2">
+            <a:schemeClr val="accent1"/>
+          </a:effectRef>
+          <a:fontRef idx="minor">
+            <a:schemeClr val="lt1"/>
+          </a:fontRef>
+        </p:style>
+        <p:txBody>
+          <a:bodyPr rtlCol="0" anchor="ctr" lIns="0" rIns="0" tIns="0" bIns="0"/>
+          <a:lstStyle/>
+          <a:p>
+            <a:pPr algn="ctr"/>
+            <a:r>
+              <a:rPr sz="1400" b="1">
+                <a:solidFill>
+                  <a:srgbClr val="FFFFFF"/>
+                </a:solidFill>
+                <a:latin typeface="Yu Gothic"/>
+              </a:rPr>
+              <a:t>4</a:t>
+            </a:r>
+          </a:p>
+        </p:txBody>
+      </p:sp>
+      <p:sp>
+        <p:nvSpPr>
+          <p:cNvPr id="23" name="TextBox 22"/>
+          <p:cNvSpPr txBox="1"/>
+          <p:nvPr/>
+        </p:nvSpPr>
+        <p:spPr>
+          <a:xfrm>
+            <a:off x="6035040" y="5486400"/>
+            <a:ext cx="5943600" cy="411480"/>
+          </a:xfrm>
+          <a:prstGeom prst="rect">
+            <a:avLst/>
+          </a:prstGeom>
+          <a:noFill/>
+        </p:spPr>
+        <p:txBody>
+          <a:bodyPr wrap="square" lIns="45720" rIns="45720" tIns="22860" bIns="22860" anchor="ctr">
+            <a:spAutoFit/>
+          </a:bodyPr>
+          <a:lstStyle/>
+          <a:p>
+            <a:pPr algn="l"/>
+            <a:r>
+              <a:rPr sz="2000" b="1">
+                <a:solidFill>
+                  <a:srgbClr val="333333"/>
+                </a:solidFill>
+                <a:latin typeface="Yu Gothic"/>
+              </a:rPr>
+              <a:t>日付</a:t>
+            </a:r>
+          </a:p>
+        </p:txBody>
+      </p:sp>
+      <p:sp>
+        <p:nvSpPr>
+          <p:cNvPr id="24" name="TextBox 23"/>
+          <p:cNvSpPr txBox="1"/>
+          <p:nvPr/>
+        </p:nvSpPr>
+        <p:spPr>
+          <a:xfrm>
+            <a:off x="6035040" y="5870448"/>
+            <a:ext cx="5943600" cy="365760"/>
+          </a:xfrm>
+          <a:prstGeom prst="rect">
+            <a:avLst/>
+          </a:prstGeom>
+          <a:noFill/>
+        </p:spPr>
+        <p:txBody>
+          <a:bodyPr wrap="square" lIns="45720" rIns="45720" tIns="22860" bIns="22860" anchor="t">
+            <a:spAutoFit/>
+          </a:bodyPr>
+          <a:lstStyle/>
+          <a:p>
+            <a:pPr algn="l"/>
+            <a:r>
+              <a:rPr sz="1400" b="0">
+                <a:solidFill>
+                  <a:srgbClr val="666666"/>
+                </a:solidFill>
+                <a:latin typeface="Yu Gothic"/>
+              </a:rPr>
+              <a:t>西暦で入力（yyyy/mm/dd）</a:t>
             </a:r>
           </a:p>
         </p:txBody>
@@ -7844,21 +9185,50 @@
                 </a:solidFill>
                 <a:latin typeface="Yu Gothic"/>
               </a:rPr>
-              <a:t>クラウドサイン：氏名は免許証の漢字</a:t>
-            </a:r>
-          </a:p>
-        </p:txBody>
-      </p:sp>
-      <p:sp>
-        <p:nvSpPr>
-          <p:cNvPr id="5" name="Rounded Rectangle 4"/>
+              <a:t>⑪ 「送信する」をクリック</a:t>
+            </a:r>
+          </a:p>
+        </p:txBody>
+      </p:sp>
+      <p:pic>
+        <p:nvPicPr>
+          <p:cNvPr id="5" name="Picture 4" descr="15.png"/>
+          <p:cNvPicPr>
+            <a:picLocks noChangeAspect="1"/>
+          </p:cNvPicPr>
+          <p:nvPr/>
+        </p:nvPicPr>
+        <p:blipFill>
+          <a:blip r:embed="rId2"/>
+          <a:stretch>
+            <a:fillRect/>
+          </a:stretch>
+        </p:blipFill>
+        <p:spPr>
+          <a:xfrm>
+            <a:off x="1440208" y="1325880"/>
+            <a:ext cx="9281102" cy="4206240"/>
+          </a:xfrm>
+          <a:prstGeom prst="rect">
+            <a:avLst/>
+          </a:prstGeom>
+          <a:ln w="12700">
+            <a:solidFill>
+              <a:srgbClr val="CCCCCC"/>
+            </a:solidFill>
+          </a:ln>
+        </p:spPr>
+      </p:pic>
+      <p:sp>
+        <p:nvSpPr>
+          <p:cNvPr id="6" name="Rounded Rectangle 5"/>
           <p:cNvSpPr/>
           <p:nvPr/>
         </p:nvSpPr>
         <p:spPr>
           <a:xfrm>
-            <a:off x="548640" y="1325880"/>
-            <a:ext cx="11064240" cy="731520"/>
+            <a:off x="411480" y="5641848"/>
+            <a:ext cx="11338560" cy="566928"/>
           </a:xfrm>
           <a:prstGeom prst="roundRect">
             <a:avLst>
@@ -7866,11 +9236,11 @@
             </a:avLst>
           </a:prstGeom>
           <a:solidFill>
-            <a:srgbClr val="FDECEC"/>
+            <a:srgbClr val="FFF6E0"/>
           </a:solidFill>
           <a:ln w="19050">
             <a:solidFill>
-              <a:srgbClr val="D32F2F"/>
+              <a:srgbClr val="F29A3C"/>
             </a:solidFill>
           </a:ln>
           <a:effectLst/>
@@ -7899,14 +9269,14 @@
       </p:sp>
       <p:sp>
         <p:nvSpPr>
-          <p:cNvPr id="6" name="TextBox 5"/>
-          <p:cNvSpPr txBox="1"/>
-          <p:nvPr/>
-        </p:nvSpPr>
-        <p:spPr>
-          <a:xfrm>
-            <a:off x="548640" y="1325880"/>
-            <a:ext cx="11064240" cy="731520"/>
+          <p:cNvPr id="7" name="TextBox 6"/>
+          <p:cNvSpPr txBox="1"/>
+          <p:nvPr/>
+        </p:nvSpPr>
+        <p:spPr>
+          <a:xfrm>
+            <a:off x="594360" y="5641848"/>
+            <a:ext cx="10972800" cy="566928"/>
           </a:xfrm>
           <a:prstGeom prst="rect">
             <a:avLst/>
@@ -7919,1180 +9289,15 @@
           </a:bodyPr>
           <a:lstStyle/>
           <a:p>
-            <a:pPr algn="ctr"/>
-            <a:r>
-              <a:rPr sz="1800" b="1">
+            <a:pPr algn="l"/>
+            <a:r>
+              <a:rPr sz="1500" b="1">
                 <a:solidFill>
                   <a:srgbClr val="333333"/>
                 </a:solidFill>
                 <a:latin typeface="Yu Gothic"/>
               </a:rPr>
-              <a:t>免許証に載っている字のとおりに入力・署名</a:t>
-            </a:r>
-          </a:p>
-        </p:txBody>
-      </p:sp>
-      <p:sp>
-        <p:nvSpPr>
-          <p:cNvPr id="7" name="Rectangle 6"/>
-          <p:cNvSpPr/>
-          <p:nvPr/>
-        </p:nvSpPr>
-        <p:spPr>
-          <a:xfrm>
-            <a:off x="548640" y="2286000"/>
-            <a:ext cx="2743200" cy="411480"/>
-          </a:xfrm>
-          <a:prstGeom prst="rect">
-            <a:avLst/>
-          </a:prstGeom>
-          <a:solidFill>
-            <a:srgbClr val="E12A82"/>
-          </a:solidFill>
-          <a:ln>
-            <a:noFill/>
-          </a:ln>
-          <a:effectLst/>
-        </p:spPr>
-        <p:style>
-          <a:lnRef idx="1">
-            <a:schemeClr val="accent1"/>
-          </a:lnRef>
-          <a:fillRef idx="3">
-            <a:schemeClr val="accent1"/>
-          </a:fillRef>
-          <a:effectRef idx="2">
-            <a:schemeClr val="accent1"/>
-          </a:effectRef>
-          <a:fontRef idx="minor">
-            <a:schemeClr val="lt1"/>
-          </a:fontRef>
-        </p:style>
-        <p:txBody>
-          <a:bodyPr rtlCol="0" anchor="ctr"/>
-          <a:lstStyle/>
-          <a:p>
-            <a:pPr algn="ctr"/>
-          </a:p>
-        </p:txBody>
-      </p:sp>
-      <p:sp>
-        <p:nvSpPr>
-          <p:cNvPr id="8" name="TextBox 7"/>
-          <p:cNvSpPr txBox="1"/>
-          <p:nvPr/>
-        </p:nvSpPr>
-        <p:spPr>
-          <a:xfrm>
-            <a:off x="548640" y="2286000"/>
-            <a:ext cx="2743200" cy="411480"/>
-          </a:xfrm>
-          <a:prstGeom prst="rect">
-            <a:avLst/>
-          </a:prstGeom>
-          <a:noFill/>
-        </p:spPr>
-        <p:txBody>
-          <a:bodyPr wrap="square" lIns="45720" rIns="45720" tIns="22860" bIns="22860" anchor="ctr">
-            <a:spAutoFit/>
-          </a:bodyPr>
-          <a:lstStyle/>
-          <a:p>
-            <a:pPr algn="ctr"/>
-            <a:r>
-              <a:rPr sz="1300" b="1">
-                <a:solidFill>
-                  <a:srgbClr val="FFFFFF"/>
-                </a:solidFill>
-                <a:latin typeface="Yu Gothic"/>
-              </a:rPr>
-              <a:t>免許証</a:t>
-            </a:r>
-          </a:p>
-        </p:txBody>
-      </p:sp>
-      <p:sp>
-        <p:nvSpPr>
-          <p:cNvPr id="9" name="Rectangle 8"/>
-          <p:cNvSpPr/>
-          <p:nvPr/>
-        </p:nvSpPr>
-        <p:spPr>
-          <a:xfrm>
-            <a:off x="3291840" y="2286000"/>
-            <a:ext cx="8321040" cy="411480"/>
-          </a:xfrm>
-          <a:prstGeom prst="rect">
-            <a:avLst/>
-          </a:prstGeom>
-          <a:solidFill>
-            <a:srgbClr val="E12A82"/>
-          </a:solidFill>
-          <a:ln>
-            <a:noFill/>
-          </a:ln>
-          <a:effectLst/>
-        </p:spPr>
-        <p:style>
-          <a:lnRef idx="1">
-            <a:schemeClr val="accent1"/>
-          </a:lnRef>
-          <a:fillRef idx="3">
-            <a:schemeClr val="accent1"/>
-          </a:fillRef>
-          <a:effectRef idx="2">
-            <a:schemeClr val="accent1"/>
-          </a:effectRef>
-          <a:fontRef idx="minor">
-            <a:schemeClr val="lt1"/>
-          </a:fontRef>
-        </p:style>
-        <p:txBody>
-          <a:bodyPr rtlCol="0" anchor="ctr"/>
-          <a:lstStyle/>
-          <a:p>
-            <a:pPr algn="ctr"/>
-          </a:p>
-        </p:txBody>
-      </p:sp>
-      <p:sp>
-        <p:nvSpPr>
-          <p:cNvPr id="10" name="TextBox 9"/>
-          <p:cNvSpPr txBox="1"/>
-          <p:nvPr/>
-        </p:nvSpPr>
-        <p:spPr>
-          <a:xfrm>
-            <a:off x="3291840" y="2286000"/>
-            <a:ext cx="8321040" cy="411480"/>
-          </a:xfrm>
-          <a:prstGeom prst="rect">
-            <a:avLst/>
-          </a:prstGeom>
-          <a:noFill/>
-        </p:spPr>
-        <p:txBody>
-          <a:bodyPr wrap="square" lIns="45720" rIns="45720" tIns="22860" bIns="22860" anchor="ctr">
-            <a:spAutoFit/>
-          </a:bodyPr>
-          <a:lstStyle/>
-          <a:p>
-            <a:pPr algn="ctr"/>
-            <a:r>
-              <a:rPr sz="1300" b="1">
-                <a:solidFill>
-                  <a:srgbClr val="FFFFFF"/>
-                </a:solidFill>
-                <a:latin typeface="Yu Gothic"/>
-              </a:rPr>
-              <a:t>間違えやすい字</a:t>
-            </a:r>
-          </a:p>
-        </p:txBody>
-      </p:sp>
-      <p:sp>
-        <p:nvSpPr>
-          <p:cNvPr id="11" name="Rectangle 10"/>
-          <p:cNvSpPr/>
-          <p:nvPr/>
-        </p:nvSpPr>
-        <p:spPr>
-          <a:xfrm>
-            <a:off x="548640" y="2697480"/>
-            <a:ext cx="2743200" cy="530352"/>
-          </a:xfrm>
-          <a:prstGeom prst="rect">
-            <a:avLst/>
-          </a:prstGeom>
-          <a:solidFill>
-            <a:srgbClr val="FDECF3"/>
-          </a:solidFill>
-          <a:ln w="6350">
-            <a:solidFill>
-              <a:srgbClr val="DDDDDD"/>
-            </a:solidFill>
-          </a:ln>
-          <a:effectLst/>
-        </p:spPr>
-        <p:style>
-          <a:lnRef idx="1">
-            <a:schemeClr val="accent1"/>
-          </a:lnRef>
-          <a:fillRef idx="3">
-            <a:schemeClr val="accent1"/>
-          </a:fillRef>
-          <a:effectRef idx="2">
-            <a:schemeClr val="accent1"/>
-          </a:effectRef>
-          <a:fontRef idx="minor">
-            <a:schemeClr val="lt1"/>
-          </a:fontRef>
-        </p:style>
-        <p:txBody>
-          <a:bodyPr rtlCol="0" anchor="ctr"/>
-          <a:lstStyle/>
-          <a:p>
-            <a:pPr algn="ctr"/>
-          </a:p>
-        </p:txBody>
-      </p:sp>
-      <p:sp>
-        <p:nvSpPr>
-          <p:cNvPr id="12" name="TextBox 11"/>
-          <p:cNvSpPr txBox="1"/>
-          <p:nvPr/>
-        </p:nvSpPr>
-        <p:spPr>
-          <a:xfrm>
-            <a:off x="548640" y="2697480"/>
-            <a:ext cx="2743200" cy="530352"/>
-          </a:xfrm>
-          <a:prstGeom prst="rect">
-            <a:avLst/>
-          </a:prstGeom>
-          <a:noFill/>
-        </p:spPr>
-        <p:txBody>
-          <a:bodyPr wrap="square" lIns="45720" rIns="45720" tIns="22860" bIns="22860" anchor="ctr">
-            <a:spAutoFit/>
-          </a:bodyPr>
-          <a:lstStyle/>
-          <a:p>
-            <a:pPr algn="ctr"/>
-            <a:r>
-              <a:rPr sz="2000" b="1">
-                <a:solidFill>
-                  <a:srgbClr val="E12A82"/>
-                </a:solidFill>
-                <a:latin typeface="Yu Gothic"/>
-              </a:rPr>
-              <a:t>齋藤</a:t>
-            </a:r>
-          </a:p>
-        </p:txBody>
-      </p:sp>
-      <p:sp>
-        <p:nvSpPr>
-          <p:cNvPr id="13" name="Rectangle 12"/>
-          <p:cNvSpPr/>
-          <p:nvPr/>
-        </p:nvSpPr>
-        <p:spPr>
-          <a:xfrm>
-            <a:off x="3291840" y="2697480"/>
-            <a:ext cx="8321040" cy="530352"/>
-          </a:xfrm>
-          <a:prstGeom prst="rect">
-            <a:avLst/>
-          </a:prstGeom>
-          <a:solidFill>
-            <a:srgbClr val="FDECF3"/>
-          </a:solidFill>
-          <a:ln w="6350">
-            <a:solidFill>
-              <a:srgbClr val="DDDDDD"/>
-            </a:solidFill>
-          </a:ln>
-          <a:effectLst/>
-        </p:spPr>
-        <p:style>
-          <a:lnRef idx="1">
-            <a:schemeClr val="accent1"/>
-          </a:lnRef>
-          <a:fillRef idx="3">
-            <a:schemeClr val="accent1"/>
-          </a:fillRef>
-          <a:effectRef idx="2">
-            <a:schemeClr val="accent1"/>
-          </a:effectRef>
-          <a:fontRef idx="minor">
-            <a:schemeClr val="lt1"/>
-          </a:fontRef>
-        </p:style>
-        <p:txBody>
-          <a:bodyPr rtlCol="0" anchor="ctr"/>
-          <a:lstStyle/>
-          <a:p>
-            <a:pPr algn="ctr"/>
-          </a:p>
-        </p:txBody>
-      </p:sp>
-      <p:sp>
-        <p:nvSpPr>
-          <p:cNvPr id="14" name="TextBox 13"/>
-          <p:cNvSpPr txBox="1"/>
-          <p:nvPr/>
-        </p:nvSpPr>
-        <p:spPr>
-          <a:xfrm>
-            <a:off x="3474720" y="2697480"/>
-            <a:ext cx="7955279" cy="530352"/>
-          </a:xfrm>
-          <a:prstGeom prst="rect">
-            <a:avLst/>
-          </a:prstGeom>
-          <a:noFill/>
-        </p:spPr>
-        <p:txBody>
-          <a:bodyPr wrap="square" lIns="45720" rIns="45720" tIns="22860" bIns="22860" anchor="ctr">
-            <a:spAutoFit/>
-          </a:bodyPr>
-          <a:lstStyle/>
-          <a:p>
-            <a:pPr algn="l"/>
-            <a:r>
-              <a:rPr sz="1600" b="0">
-                <a:solidFill>
-                  <a:srgbClr val="D32F2F"/>
-                </a:solidFill>
-                <a:latin typeface="Yu Gothic"/>
-              </a:rPr>
-              <a:t>斎藤 ／ 斉藤 ／ 齊藤</a:t>
-            </a:r>
-          </a:p>
-        </p:txBody>
-      </p:sp>
-      <p:sp>
-        <p:nvSpPr>
-          <p:cNvPr id="15" name="Rectangle 14"/>
-          <p:cNvSpPr/>
-          <p:nvPr/>
-        </p:nvSpPr>
-        <p:spPr>
-          <a:xfrm>
-            <a:off x="548640" y="3227832"/>
-            <a:ext cx="2743200" cy="530352"/>
-          </a:xfrm>
-          <a:prstGeom prst="rect">
-            <a:avLst/>
-          </a:prstGeom>
-          <a:solidFill>
-            <a:srgbClr val="FFFFFF"/>
-          </a:solidFill>
-          <a:ln w="6350">
-            <a:solidFill>
-              <a:srgbClr val="DDDDDD"/>
-            </a:solidFill>
-          </a:ln>
-          <a:effectLst/>
-        </p:spPr>
-        <p:style>
-          <a:lnRef idx="1">
-            <a:schemeClr val="accent1"/>
-          </a:lnRef>
-          <a:fillRef idx="3">
-            <a:schemeClr val="accent1"/>
-          </a:fillRef>
-          <a:effectRef idx="2">
-            <a:schemeClr val="accent1"/>
-          </a:effectRef>
-          <a:fontRef idx="minor">
-            <a:schemeClr val="lt1"/>
-          </a:fontRef>
-        </p:style>
-        <p:txBody>
-          <a:bodyPr rtlCol="0" anchor="ctr"/>
-          <a:lstStyle/>
-          <a:p>
-            <a:pPr algn="ctr"/>
-          </a:p>
-        </p:txBody>
-      </p:sp>
-      <p:sp>
-        <p:nvSpPr>
-          <p:cNvPr id="16" name="TextBox 15"/>
-          <p:cNvSpPr txBox="1"/>
-          <p:nvPr/>
-        </p:nvSpPr>
-        <p:spPr>
-          <a:xfrm>
-            <a:off x="548640" y="3227832"/>
-            <a:ext cx="2743200" cy="530352"/>
-          </a:xfrm>
-          <a:prstGeom prst="rect">
-            <a:avLst/>
-          </a:prstGeom>
-          <a:noFill/>
-        </p:spPr>
-        <p:txBody>
-          <a:bodyPr wrap="square" lIns="45720" rIns="45720" tIns="22860" bIns="22860" anchor="ctr">
-            <a:spAutoFit/>
-          </a:bodyPr>
-          <a:lstStyle/>
-          <a:p>
-            <a:pPr algn="ctr"/>
-            <a:r>
-              <a:rPr sz="2000" b="1">
-                <a:solidFill>
-                  <a:srgbClr val="E12A82"/>
-                </a:solidFill>
-                <a:latin typeface="Yu Gothic"/>
-              </a:rPr>
-              <a:t>渡邉</a:t>
-            </a:r>
-          </a:p>
-        </p:txBody>
-      </p:sp>
-      <p:sp>
-        <p:nvSpPr>
-          <p:cNvPr id="17" name="Rectangle 16"/>
-          <p:cNvSpPr/>
-          <p:nvPr/>
-        </p:nvSpPr>
-        <p:spPr>
-          <a:xfrm>
-            <a:off x="3291840" y="3227832"/>
-            <a:ext cx="8321040" cy="530352"/>
-          </a:xfrm>
-          <a:prstGeom prst="rect">
-            <a:avLst/>
-          </a:prstGeom>
-          <a:solidFill>
-            <a:srgbClr val="FFFFFF"/>
-          </a:solidFill>
-          <a:ln w="6350">
-            <a:solidFill>
-              <a:srgbClr val="DDDDDD"/>
-            </a:solidFill>
-          </a:ln>
-          <a:effectLst/>
-        </p:spPr>
-        <p:style>
-          <a:lnRef idx="1">
-            <a:schemeClr val="accent1"/>
-          </a:lnRef>
-          <a:fillRef idx="3">
-            <a:schemeClr val="accent1"/>
-          </a:fillRef>
-          <a:effectRef idx="2">
-            <a:schemeClr val="accent1"/>
-          </a:effectRef>
-          <a:fontRef idx="minor">
-            <a:schemeClr val="lt1"/>
-          </a:fontRef>
-        </p:style>
-        <p:txBody>
-          <a:bodyPr rtlCol="0" anchor="ctr"/>
-          <a:lstStyle/>
-          <a:p>
-            <a:pPr algn="ctr"/>
-          </a:p>
-        </p:txBody>
-      </p:sp>
-      <p:sp>
-        <p:nvSpPr>
-          <p:cNvPr id="18" name="TextBox 17"/>
-          <p:cNvSpPr txBox="1"/>
-          <p:nvPr/>
-        </p:nvSpPr>
-        <p:spPr>
-          <a:xfrm>
-            <a:off x="3474720" y="3227832"/>
-            <a:ext cx="7955279" cy="530352"/>
-          </a:xfrm>
-          <a:prstGeom prst="rect">
-            <a:avLst/>
-          </a:prstGeom>
-          <a:noFill/>
-        </p:spPr>
-        <p:txBody>
-          <a:bodyPr wrap="square" lIns="45720" rIns="45720" tIns="22860" bIns="22860" anchor="ctr">
-            <a:spAutoFit/>
-          </a:bodyPr>
-          <a:lstStyle/>
-          <a:p>
-            <a:pPr algn="l"/>
-            <a:r>
-              <a:rPr sz="1600" b="0">
-                <a:solidFill>
-                  <a:srgbClr val="D32F2F"/>
-                </a:solidFill>
-                <a:latin typeface="Yu Gothic"/>
-              </a:rPr>
-              <a:t>渡辺 ／ 渡邊 ／ 渡部</a:t>
-            </a:r>
-          </a:p>
-        </p:txBody>
-      </p:sp>
-      <p:sp>
-        <p:nvSpPr>
-          <p:cNvPr id="19" name="Rectangle 18"/>
-          <p:cNvSpPr/>
-          <p:nvPr/>
-        </p:nvSpPr>
-        <p:spPr>
-          <a:xfrm>
-            <a:off x="548640" y="3758184"/>
-            <a:ext cx="2743200" cy="530352"/>
-          </a:xfrm>
-          <a:prstGeom prst="rect">
-            <a:avLst/>
-          </a:prstGeom>
-          <a:solidFill>
-            <a:srgbClr val="FDECF3"/>
-          </a:solidFill>
-          <a:ln w="6350">
-            <a:solidFill>
-              <a:srgbClr val="DDDDDD"/>
-            </a:solidFill>
-          </a:ln>
-          <a:effectLst/>
-        </p:spPr>
-        <p:style>
-          <a:lnRef idx="1">
-            <a:schemeClr val="accent1"/>
-          </a:lnRef>
-          <a:fillRef idx="3">
-            <a:schemeClr val="accent1"/>
-          </a:fillRef>
-          <a:effectRef idx="2">
-            <a:schemeClr val="accent1"/>
-          </a:effectRef>
-          <a:fontRef idx="minor">
-            <a:schemeClr val="lt1"/>
-          </a:fontRef>
-        </p:style>
-        <p:txBody>
-          <a:bodyPr rtlCol="0" anchor="ctr"/>
-          <a:lstStyle/>
-          <a:p>
-            <a:pPr algn="ctr"/>
-          </a:p>
-        </p:txBody>
-      </p:sp>
-      <p:sp>
-        <p:nvSpPr>
-          <p:cNvPr id="20" name="TextBox 19"/>
-          <p:cNvSpPr txBox="1"/>
-          <p:nvPr/>
-        </p:nvSpPr>
-        <p:spPr>
-          <a:xfrm>
-            <a:off x="548640" y="3758184"/>
-            <a:ext cx="2743200" cy="530352"/>
-          </a:xfrm>
-          <a:prstGeom prst="rect">
-            <a:avLst/>
-          </a:prstGeom>
-          <a:noFill/>
-        </p:spPr>
-        <p:txBody>
-          <a:bodyPr wrap="square" lIns="45720" rIns="45720" tIns="22860" bIns="22860" anchor="ctr">
-            <a:spAutoFit/>
-          </a:bodyPr>
-          <a:lstStyle/>
-          <a:p>
-            <a:pPr algn="ctr"/>
-            <a:r>
-              <a:rPr sz="2000" b="1">
-                <a:solidFill>
-                  <a:srgbClr val="E12A82"/>
-                </a:solidFill>
-                <a:latin typeface="Yu Gothic"/>
-              </a:rPr>
-              <a:t>髙橋</a:t>
-            </a:r>
-          </a:p>
-        </p:txBody>
-      </p:sp>
-      <p:sp>
-        <p:nvSpPr>
-          <p:cNvPr id="21" name="Rectangle 20"/>
-          <p:cNvSpPr/>
-          <p:nvPr/>
-        </p:nvSpPr>
-        <p:spPr>
-          <a:xfrm>
-            <a:off x="3291840" y="3758184"/>
-            <a:ext cx="8321040" cy="530352"/>
-          </a:xfrm>
-          <a:prstGeom prst="rect">
-            <a:avLst/>
-          </a:prstGeom>
-          <a:solidFill>
-            <a:srgbClr val="FDECF3"/>
-          </a:solidFill>
-          <a:ln w="6350">
-            <a:solidFill>
-              <a:srgbClr val="DDDDDD"/>
-            </a:solidFill>
-          </a:ln>
-          <a:effectLst/>
-        </p:spPr>
-        <p:style>
-          <a:lnRef idx="1">
-            <a:schemeClr val="accent1"/>
-          </a:lnRef>
-          <a:fillRef idx="3">
-            <a:schemeClr val="accent1"/>
-          </a:fillRef>
-          <a:effectRef idx="2">
-            <a:schemeClr val="accent1"/>
-          </a:effectRef>
-          <a:fontRef idx="minor">
-            <a:schemeClr val="lt1"/>
-          </a:fontRef>
-        </p:style>
-        <p:txBody>
-          <a:bodyPr rtlCol="0" anchor="ctr"/>
-          <a:lstStyle/>
-          <a:p>
-            <a:pPr algn="ctr"/>
-          </a:p>
-        </p:txBody>
-      </p:sp>
-      <p:sp>
-        <p:nvSpPr>
-          <p:cNvPr id="22" name="TextBox 21"/>
-          <p:cNvSpPr txBox="1"/>
-          <p:nvPr/>
-        </p:nvSpPr>
-        <p:spPr>
-          <a:xfrm>
-            <a:off x="3474720" y="3758184"/>
-            <a:ext cx="7955279" cy="530352"/>
-          </a:xfrm>
-          <a:prstGeom prst="rect">
-            <a:avLst/>
-          </a:prstGeom>
-          <a:noFill/>
-        </p:spPr>
-        <p:txBody>
-          <a:bodyPr wrap="square" lIns="45720" rIns="45720" tIns="22860" bIns="22860" anchor="ctr">
-            <a:spAutoFit/>
-          </a:bodyPr>
-          <a:lstStyle/>
-          <a:p>
-            <a:pPr algn="l"/>
-            <a:r>
-              <a:rPr sz="1600" b="0">
-                <a:solidFill>
-                  <a:srgbClr val="D32F2F"/>
-                </a:solidFill>
-                <a:latin typeface="Yu Gothic"/>
-              </a:rPr>
-              <a:t>高橋</a:t>
-            </a:r>
-          </a:p>
-        </p:txBody>
-      </p:sp>
-      <p:sp>
-        <p:nvSpPr>
-          <p:cNvPr id="23" name="Rectangle 22"/>
-          <p:cNvSpPr/>
-          <p:nvPr/>
-        </p:nvSpPr>
-        <p:spPr>
-          <a:xfrm>
-            <a:off x="548640" y="4288536"/>
-            <a:ext cx="2743200" cy="530352"/>
-          </a:xfrm>
-          <a:prstGeom prst="rect">
-            <a:avLst/>
-          </a:prstGeom>
-          <a:solidFill>
-            <a:srgbClr val="FFFFFF"/>
-          </a:solidFill>
-          <a:ln w="6350">
-            <a:solidFill>
-              <a:srgbClr val="DDDDDD"/>
-            </a:solidFill>
-          </a:ln>
-          <a:effectLst/>
-        </p:spPr>
-        <p:style>
-          <a:lnRef idx="1">
-            <a:schemeClr val="accent1"/>
-          </a:lnRef>
-          <a:fillRef idx="3">
-            <a:schemeClr val="accent1"/>
-          </a:fillRef>
-          <a:effectRef idx="2">
-            <a:schemeClr val="accent1"/>
-          </a:effectRef>
-          <a:fontRef idx="minor">
-            <a:schemeClr val="lt1"/>
-          </a:fontRef>
-        </p:style>
-        <p:txBody>
-          <a:bodyPr rtlCol="0" anchor="ctr"/>
-          <a:lstStyle/>
-          <a:p>
-            <a:pPr algn="ctr"/>
-          </a:p>
-        </p:txBody>
-      </p:sp>
-      <p:sp>
-        <p:nvSpPr>
-          <p:cNvPr id="24" name="TextBox 23"/>
-          <p:cNvSpPr txBox="1"/>
-          <p:nvPr/>
-        </p:nvSpPr>
-        <p:spPr>
-          <a:xfrm>
-            <a:off x="548640" y="4288536"/>
-            <a:ext cx="2743200" cy="530352"/>
-          </a:xfrm>
-          <a:prstGeom prst="rect">
-            <a:avLst/>
-          </a:prstGeom>
-          <a:noFill/>
-        </p:spPr>
-        <p:txBody>
-          <a:bodyPr wrap="square" lIns="45720" rIns="45720" tIns="22860" bIns="22860" anchor="ctr">
-            <a:spAutoFit/>
-          </a:bodyPr>
-          <a:lstStyle/>
-          <a:p>
-            <a:pPr algn="ctr"/>
-            <a:r>
-              <a:rPr sz="2000" b="1">
-                <a:solidFill>
-                  <a:srgbClr val="E12A82"/>
-                </a:solidFill>
-                <a:latin typeface="Yu Gothic"/>
-              </a:rPr>
-              <a:t>山﨑</a:t>
-            </a:r>
-          </a:p>
-        </p:txBody>
-      </p:sp>
-      <p:sp>
-        <p:nvSpPr>
-          <p:cNvPr id="25" name="Rectangle 24"/>
-          <p:cNvSpPr/>
-          <p:nvPr/>
-        </p:nvSpPr>
-        <p:spPr>
-          <a:xfrm>
-            <a:off x="3291840" y="4288536"/>
-            <a:ext cx="8321040" cy="530352"/>
-          </a:xfrm>
-          <a:prstGeom prst="rect">
-            <a:avLst/>
-          </a:prstGeom>
-          <a:solidFill>
-            <a:srgbClr val="FFFFFF"/>
-          </a:solidFill>
-          <a:ln w="6350">
-            <a:solidFill>
-              <a:srgbClr val="DDDDDD"/>
-            </a:solidFill>
-          </a:ln>
-          <a:effectLst/>
-        </p:spPr>
-        <p:style>
-          <a:lnRef idx="1">
-            <a:schemeClr val="accent1"/>
-          </a:lnRef>
-          <a:fillRef idx="3">
-            <a:schemeClr val="accent1"/>
-          </a:fillRef>
-          <a:effectRef idx="2">
-            <a:schemeClr val="accent1"/>
-          </a:effectRef>
-          <a:fontRef idx="minor">
-            <a:schemeClr val="lt1"/>
-          </a:fontRef>
-        </p:style>
-        <p:txBody>
-          <a:bodyPr rtlCol="0" anchor="ctr"/>
-          <a:lstStyle/>
-          <a:p>
-            <a:pPr algn="ctr"/>
-          </a:p>
-        </p:txBody>
-      </p:sp>
-      <p:sp>
-        <p:nvSpPr>
-          <p:cNvPr id="26" name="TextBox 25"/>
-          <p:cNvSpPr txBox="1"/>
-          <p:nvPr/>
-        </p:nvSpPr>
-        <p:spPr>
-          <a:xfrm>
-            <a:off x="3474720" y="4288536"/>
-            <a:ext cx="7955279" cy="530352"/>
-          </a:xfrm>
-          <a:prstGeom prst="rect">
-            <a:avLst/>
-          </a:prstGeom>
-          <a:noFill/>
-        </p:spPr>
-        <p:txBody>
-          <a:bodyPr wrap="square" lIns="45720" rIns="45720" tIns="22860" bIns="22860" anchor="ctr">
-            <a:spAutoFit/>
-          </a:bodyPr>
-          <a:lstStyle/>
-          <a:p>
-            <a:pPr algn="l"/>
-            <a:r>
-              <a:rPr sz="1600" b="0">
-                <a:solidFill>
-                  <a:srgbClr val="D32F2F"/>
-                </a:solidFill>
-                <a:latin typeface="Yu Gothic"/>
-              </a:rPr>
-              <a:t>山崎</a:t>
-            </a:r>
-          </a:p>
-        </p:txBody>
-      </p:sp>
-      <p:sp>
-        <p:nvSpPr>
-          <p:cNvPr id="27" name="Rectangle 26"/>
-          <p:cNvSpPr/>
-          <p:nvPr/>
-        </p:nvSpPr>
-        <p:spPr>
-          <a:xfrm>
-            <a:off x="548640" y="4818888"/>
-            <a:ext cx="2743200" cy="530352"/>
-          </a:xfrm>
-          <a:prstGeom prst="rect">
-            <a:avLst/>
-          </a:prstGeom>
-          <a:solidFill>
-            <a:srgbClr val="FDECF3"/>
-          </a:solidFill>
-          <a:ln w="6350">
-            <a:solidFill>
-              <a:srgbClr val="DDDDDD"/>
-            </a:solidFill>
-          </a:ln>
-          <a:effectLst/>
-        </p:spPr>
-        <p:style>
-          <a:lnRef idx="1">
-            <a:schemeClr val="accent1"/>
-          </a:lnRef>
-          <a:fillRef idx="3">
-            <a:schemeClr val="accent1"/>
-          </a:fillRef>
-          <a:effectRef idx="2">
-            <a:schemeClr val="accent1"/>
-          </a:effectRef>
-          <a:fontRef idx="minor">
-            <a:schemeClr val="lt1"/>
-          </a:fontRef>
-        </p:style>
-        <p:txBody>
-          <a:bodyPr rtlCol="0" anchor="ctr"/>
-          <a:lstStyle/>
-          <a:p>
-            <a:pPr algn="ctr"/>
-          </a:p>
-        </p:txBody>
-      </p:sp>
-      <p:sp>
-        <p:nvSpPr>
-          <p:cNvPr id="28" name="TextBox 27"/>
-          <p:cNvSpPr txBox="1"/>
-          <p:nvPr/>
-        </p:nvSpPr>
-        <p:spPr>
-          <a:xfrm>
-            <a:off x="548640" y="4818888"/>
-            <a:ext cx="2743200" cy="530352"/>
-          </a:xfrm>
-          <a:prstGeom prst="rect">
-            <a:avLst/>
-          </a:prstGeom>
-          <a:noFill/>
-        </p:spPr>
-        <p:txBody>
-          <a:bodyPr wrap="square" lIns="45720" rIns="45720" tIns="22860" bIns="22860" anchor="ctr">
-            <a:spAutoFit/>
-          </a:bodyPr>
-          <a:lstStyle/>
-          <a:p>
-            <a:pPr algn="ctr"/>
-            <a:r>
-              <a:rPr sz="2000" b="1">
-                <a:solidFill>
-                  <a:srgbClr val="E12A82"/>
-                </a:solidFill>
-                <a:latin typeface="Yu Gothic"/>
-              </a:rPr>
-              <a:t>澤田</a:t>
-            </a:r>
-          </a:p>
-        </p:txBody>
-      </p:sp>
-      <p:sp>
-        <p:nvSpPr>
-          <p:cNvPr id="29" name="Rectangle 28"/>
-          <p:cNvSpPr/>
-          <p:nvPr/>
-        </p:nvSpPr>
-        <p:spPr>
-          <a:xfrm>
-            <a:off x="3291840" y="4818888"/>
-            <a:ext cx="8321040" cy="530352"/>
-          </a:xfrm>
-          <a:prstGeom prst="rect">
-            <a:avLst/>
-          </a:prstGeom>
-          <a:solidFill>
-            <a:srgbClr val="FDECF3"/>
-          </a:solidFill>
-          <a:ln w="6350">
-            <a:solidFill>
-              <a:srgbClr val="DDDDDD"/>
-            </a:solidFill>
-          </a:ln>
-          <a:effectLst/>
-        </p:spPr>
-        <p:style>
-          <a:lnRef idx="1">
-            <a:schemeClr val="accent1"/>
-          </a:lnRef>
-          <a:fillRef idx="3">
-            <a:schemeClr val="accent1"/>
-          </a:fillRef>
-          <a:effectRef idx="2">
-            <a:schemeClr val="accent1"/>
-          </a:effectRef>
-          <a:fontRef idx="minor">
-            <a:schemeClr val="lt1"/>
-          </a:fontRef>
-        </p:style>
-        <p:txBody>
-          <a:bodyPr rtlCol="0" anchor="ctr"/>
-          <a:lstStyle/>
-          <a:p>
-            <a:pPr algn="ctr"/>
-          </a:p>
-        </p:txBody>
-      </p:sp>
-      <p:sp>
-        <p:nvSpPr>
-          <p:cNvPr id="30" name="TextBox 29"/>
-          <p:cNvSpPr txBox="1"/>
-          <p:nvPr/>
-        </p:nvSpPr>
-        <p:spPr>
-          <a:xfrm>
-            <a:off x="3474720" y="4818888"/>
-            <a:ext cx="7955279" cy="530352"/>
-          </a:xfrm>
-          <a:prstGeom prst="rect">
-            <a:avLst/>
-          </a:prstGeom>
-          <a:noFill/>
-        </p:spPr>
-        <p:txBody>
-          <a:bodyPr wrap="square" lIns="45720" rIns="45720" tIns="22860" bIns="22860" anchor="ctr">
-            <a:spAutoFit/>
-          </a:bodyPr>
-          <a:lstStyle/>
-          <a:p>
-            <a:pPr algn="l"/>
-            <a:r>
-              <a:rPr sz="1600" b="0">
-                <a:solidFill>
-                  <a:srgbClr val="D32F2F"/>
-                </a:solidFill>
-                <a:latin typeface="Yu Gothic"/>
-              </a:rPr>
-              <a:t>沢田</a:t>
-            </a:r>
-          </a:p>
-        </p:txBody>
-      </p:sp>
-      <p:sp>
-        <p:nvSpPr>
-          <p:cNvPr id="31" name="Rectangle 30"/>
-          <p:cNvSpPr/>
-          <p:nvPr/>
-        </p:nvSpPr>
-        <p:spPr>
-          <a:xfrm>
-            <a:off x="548640" y="5349240"/>
-            <a:ext cx="2743200" cy="530352"/>
-          </a:xfrm>
-          <a:prstGeom prst="rect">
-            <a:avLst/>
-          </a:prstGeom>
-          <a:solidFill>
-            <a:srgbClr val="FFFFFF"/>
-          </a:solidFill>
-          <a:ln w="6350">
-            <a:solidFill>
-              <a:srgbClr val="DDDDDD"/>
-            </a:solidFill>
-          </a:ln>
-          <a:effectLst/>
-        </p:spPr>
-        <p:style>
-          <a:lnRef idx="1">
-            <a:schemeClr val="accent1"/>
-          </a:lnRef>
-          <a:fillRef idx="3">
-            <a:schemeClr val="accent1"/>
-          </a:fillRef>
-          <a:effectRef idx="2">
-            <a:schemeClr val="accent1"/>
-          </a:effectRef>
-          <a:fontRef idx="minor">
-            <a:schemeClr val="lt1"/>
-          </a:fontRef>
-        </p:style>
-        <p:txBody>
-          <a:bodyPr rtlCol="0" anchor="ctr"/>
-          <a:lstStyle/>
-          <a:p>
-            <a:pPr algn="ctr"/>
-          </a:p>
-        </p:txBody>
-      </p:sp>
-      <p:sp>
-        <p:nvSpPr>
-          <p:cNvPr id="32" name="TextBox 31"/>
-          <p:cNvSpPr txBox="1"/>
-          <p:nvPr/>
-        </p:nvSpPr>
-        <p:spPr>
-          <a:xfrm>
-            <a:off x="548640" y="5349240"/>
-            <a:ext cx="2743200" cy="530352"/>
-          </a:xfrm>
-          <a:prstGeom prst="rect">
-            <a:avLst/>
-          </a:prstGeom>
-          <a:noFill/>
-        </p:spPr>
-        <p:txBody>
-          <a:bodyPr wrap="square" lIns="45720" rIns="45720" tIns="22860" bIns="22860" anchor="ctr">
-            <a:spAutoFit/>
-          </a:bodyPr>
-          <a:lstStyle/>
-          <a:p>
-            <a:pPr algn="ctr"/>
-            <a:r>
-              <a:rPr sz="2000" b="1">
-                <a:solidFill>
-                  <a:srgbClr val="E12A82"/>
-                </a:solidFill>
-                <a:latin typeface="Yu Gothic"/>
-              </a:rPr>
-              <a:t>濱田</a:t>
-            </a:r>
-          </a:p>
-        </p:txBody>
-      </p:sp>
-      <p:sp>
-        <p:nvSpPr>
-          <p:cNvPr id="33" name="Rectangle 32"/>
-          <p:cNvSpPr/>
-          <p:nvPr/>
-        </p:nvSpPr>
-        <p:spPr>
-          <a:xfrm>
-            <a:off x="3291840" y="5349240"/>
-            <a:ext cx="8321040" cy="530352"/>
-          </a:xfrm>
-          <a:prstGeom prst="rect">
-            <a:avLst/>
-          </a:prstGeom>
-          <a:solidFill>
-            <a:srgbClr val="FFFFFF"/>
-          </a:solidFill>
-          <a:ln w="6350">
-            <a:solidFill>
-              <a:srgbClr val="DDDDDD"/>
-            </a:solidFill>
-          </a:ln>
-          <a:effectLst/>
-        </p:spPr>
-        <p:style>
-          <a:lnRef idx="1">
-            <a:schemeClr val="accent1"/>
-          </a:lnRef>
-          <a:fillRef idx="3">
-            <a:schemeClr val="accent1"/>
-          </a:fillRef>
-          <a:effectRef idx="2">
-            <a:schemeClr val="accent1"/>
-          </a:effectRef>
-          <a:fontRef idx="minor">
-            <a:schemeClr val="lt1"/>
-          </a:fontRef>
-        </p:style>
-        <p:txBody>
-          <a:bodyPr rtlCol="0" anchor="ctr"/>
-          <a:lstStyle/>
-          <a:p>
-            <a:pPr algn="ctr"/>
-          </a:p>
-        </p:txBody>
-      </p:sp>
-      <p:sp>
-        <p:nvSpPr>
-          <p:cNvPr id="34" name="TextBox 33"/>
-          <p:cNvSpPr txBox="1"/>
-          <p:nvPr/>
-        </p:nvSpPr>
-        <p:spPr>
-          <a:xfrm>
-            <a:off x="3474720" y="5349240"/>
-            <a:ext cx="7955279" cy="530352"/>
-          </a:xfrm>
-          <a:prstGeom prst="rect">
-            <a:avLst/>
-          </a:prstGeom>
-          <a:noFill/>
-        </p:spPr>
-        <p:txBody>
-          <a:bodyPr wrap="square" lIns="45720" rIns="45720" tIns="22860" bIns="22860" anchor="ctr">
-            <a:spAutoFit/>
-          </a:bodyPr>
-          <a:lstStyle/>
-          <a:p>
-            <a:pPr algn="l"/>
-            <a:r>
-              <a:rPr sz="1600" b="0">
-                <a:solidFill>
-                  <a:srgbClr val="D32F2F"/>
-                </a:solidFill>
-                <a:latin typeface="Yu Gothic"/>
-              </a:rPr>
-              <a:t>浜田</a:t>
-            </a:r>
-          </a:p>
-        </p:txBody>
-      </p:sp>
-      <p:sp>
-        <p:nvSpPr>
-          <p:cNvPr id="35" name="TextBox 34"/>
-          <p:cNvSpPr txBox="1"/>
-          <p:nvPr/>
-        </p:nvSpPr>
-        <p:spPr>
-          <a:xfrm>
-            <a:off x="548640" y="5989320"/>
-            <a:ext cx="10972800" cy="365760"/>
-          </a:xfrm>
-          <a:prstGeom prst="rect">
-            <a:avLst/>
-          </a:prstGeom>
-          <a:noFill/>
-        </p:spPr>
-        <p:txBody>
-          <a:bodyPr wrap="square" lIns="45720" rIns="45720" tIns="22860" bIns="22860" anchor="t">
-            <a:spAutoFit/>
-          </a:bodyPr>
-          <a:lstStyle/>
-          <a:p>
-            <a:pPr algn="l"/>
-            <a:r>
-              <a:rPr sz="1300" b="0">
-                <a:solidFill>
-                  <a:srgbClr val="666666"/>
-                </a:solidFill>
-                <a:latin typeface="Yu Gothic"/>
-              </a:rPr>
-              <a:t>外国籍の方も免許証記載の名前</a:t>
+              <a:t>⚠ 送信は1通200円。送る前に、送付先（名前・メールアドレス）をもう一度確認</a:t>
             </a:r>
           </a:p>
         </p:txBody>
@@ -10344,7 +10549,7 @@
         <p:spPr>
           <a:xfrm>
             <a:off x="411480" y="777240"/>
-            <a:ext cx="502920" cy="384048"/>
+            <a:ext cx="868680" cy="384048"/>
           </a:xfrm>
           <a:prstGeom prst="roundRect">
             <a:avLst>
@@ -10390,7 +10595,7 @@
         <p:spPr>
           <a:xfrm>
             <a:off x="411480" y="777240"/>
-            <a:ext cx="502920" cy="384048"/>
+            <a:ext cx="868680" cy="384048"/>
           </a:xfrm>
           <a:prstGeom prst="rect">
             <a:avLst/>
@@ -10411,7 +10616,7 @@
                 </a:solidFill>
                 <a:latin typeface="Yu Gothic"/>
               </a:rPr>
-              <a:t>④</a:t>
+              <a:t>②-15</a:t>
             </a:r>
           </a:p>
         </p:txBody>
@@ -10424,7 +10629,7 @@
         </p:nvSpPr>
         <p:spPr>
           <a:xfrm>
-            <a:off x="1078992" y="777240"/>
+            <a:off x="1444751" y="777240"/>
             <a:ext cx="10607040" cy="384048"/>
           </a:xfrm>
           <a:prstGeom prst="rect">
@@ -10446,7 +10651,7 @@
                 </a:solidFill>
                 <a:latin typeface="Yu Gothic"/>
               </a:rPr>
-              <a:t>Amazon登録（途中まで）</a:t>
+              <a:t>クラウドサイン：氏名は免許証の漢字</a:t>
             </a:r>
           </a:p>
         </p:txBody>
@@ -10459,8 +10664,8 @@
         </p:nvSpPr>
         <p:spPr>
           <a:xfrm>
-            <a:off x="548640" y="1280160"/>
-            <a:ext cx="11064240" cy="548640"/>
+            <a:off x="548640" y="1325880"/>
+            <a:ext cx="11064240" cy="731520"/>
           </a:xfrm>
           <a:prstGeom prst="roundRect">
             <a:avLst>
@@ -10468,11 +10673,11 @@
             </a:avLst>
           </a:prstGeom>
           <a:solidFill>
-            <a:srgbClr val="E3F4F6"/>
+            <a:srgbClr val="FDECEC"/>
           </a:solidFill>
-          <a:ln w="12700">
+          <a:ln w="19050">
             <a:solidFill>
-              <a:srgbClr val="4FB6BE"/>
+              <a:srgbClr val="D32F2F"/>
             </a:solidFill>
           </a:ln>
           <a:effectLst/>
@@ -10507,8 +10712,8 @@
         </p:nvSpPr>
         <p:spPr>
           <a:xfrm>
-            <a:off x="548640" y="1280160"/>
-            <a:ext cx="11064240" cy="548640"/>
+            <a:off x="548640" y="1325880"/>
+            <a:ext cx="11064240" cy="731520"/>
           </a:xfrm>
           <a:prstGeom prst="rect">
             <a:avLst/>
@@ -10523,67 +10728,36 @@
           <a:p>
             <a:pPr algn="ctr"/>
             <a:r>
-              <a:rPr sz="1600" b="1">
+              <a:rPr sz="1800" b="1">
                 <a:solidFill>
                   <a:srgbClr val="333333"/>
                 </a:solidFill>
                 <a:latin typeface="Yu Gothic"/>
               </a:rPr>
-              <a:t>必要書類がそろったら　招待メールを送る　→　メールのURLをタップ</a:t>
-            </a:r>
-          </a:p>
-        </p:txBody>
-      </p:sp>
-      <p:pic>
-        <p:nvPicPr>
-          <p:cNvPr id="7" name="Picture 6" descr="1.jpg"/>
-          <p:cNvPicPr>
-            <a:picLocks noChangeAspect="1"/>
-          </p:cNvPicPr>
-          <p:nvPr/>
-        </p:nvPicPr>
-        <p:blipFill>
-          <a:blip r:embed="rId2"/>
-          <a:stretch>
-            <a:fillRect/>
-          </a:stretch>
-        </p:blipFill>
-        <p:spPr>
-          <a:xfrm>
-            <a:off x="777240" y="2011680"/>
-            <a:ext cx="1668882" cy="3611880"/>
-          </a:xfrm>
-          <a:prstGeom prst="rect">
-            <a:avLst/>
-          </a:prstGeom>
-          <a:ln w="12700">
-            <a:solidFill>
-              <a:srgbClr val="BBBBBB"/>
-            </a:solidFill>
-          </a:ln>
-        </p:spPr>
-      </p:pic>
-      <p:sp>
-        <p:nvSpPr>
-          <p:cNvPr id="8" name="Oval 7"/>
+              <a:t>免許証に載っている字のとおりに入力・署名</a:t>
+            </a:r>
+          </a:p>
+        </p:txBody>
+      </p:sp>
+      <p:sp>
+        <p:nvSpPr>
+          <p:cNvPr id="7" name="Rectangle 6"/>
           <p:cNvSpPr/>
           <p:nvPr/>
         </p:nvSpPr>
         <p:spPr>
           <a:xfrm>
-            <a:off x="630936" y="1865376"/>
-            <a:ext cx="384048" cy="384048"/>
-          </a:xfrm>
-          <a:prstGeom prst="ellipse">
+            <a:off x="548640" y="2286000"/>
+            <a:ext cx="2743200" cy="411480"/>
+          </a:xfrm>
+          <a:prstGeom prst="rect">
             <a:avLst/>
           </a:prstGeom>
           <a:solidFill>
-            <a:srgbClr val="4FB6BE"/>
+            <a:srgbClr val="E12A82"/>
           </a:solidFill>
-          <a:ln w="19050">
-            <a:solidFill>
-              <a:srgbClr val="FFFFFF"/>
-            </a:solidFill>
+          <a:ln>
+            <a:noFill/>
           </a:ln>
           <a:effectLst/>
         </p:spPr>
@@ -10602,142 +10776,67 @@
           </a:fontRef>
         </p:style>
         <p:txBody>
-          <a:bodyPr rtlCol="0" anchor="ctr" lIns="0" rIns="0" tIns="0" bIns="0"/>
-          <a:lstStyle/>
-          <a:p>
-            <a:pPr algn="ctr"/>
-            <a:r>
-              <a:rPr sz="1400" b="1">
+          <a:bodyPr rtlCol="0" anchor="ctr"/>
+          <a:lstStyle/>
+          <a:p>
+            <a:pPr algn="ctr"/>
+          </a:p>
+        </p:txBody>
+      </p:sp>
+      <p:sp>
+        <p:nvSpPr>
+          <p:cNvPr id="8" name="TextBox 7"/>
+          <p:cNvSpPr txBox="1"/>
+          <p:nvPr/>
+        </p:nvSpPr>
+        <p:spPr>
+          <a:xfrm>
+            <a:off x="548640" y="2286000"/>
+            <a:ext cx="2743200" cy="411480"/>
+          </a:xfrm>
+          <a:prstGeom prst="rect">
+            <a:avLst/>
+          </a:prstGeom>
+          <a:noFill/>
+        </p:spPr>
+        <p:txBody>
+          <a:bodyPr wrap="square" lIns="45720" rIns="45720" tIns="22860" bIns="22860" anchor="ctr">
+            <a:spAutoFit/>
+          </a:bodyPr>
+          <a:lstStyle/>
+          <a:p>
+            <a:pPr algn="ctr"/>
+            <a:r>
+              <a:rPr sz="1300" b="1">
                 <a:solidFill>
                   <a:srgbClr val="FFFFFF"/>
                 </a:solidFill>
                 <a:latin typeface="Yu Gothic"/>
               </a:rPr>
-              <a:t>1</a:t>
-            </a:r>
-          </a:p>
-        </p:txBody>
-      </p:sp>
-      <p:sp>
-        <p:nvSpPr>
-          <p:cNvPr id="9" name="TextBox 8"/>
-          <p:cNvSpPr txBox="1"/>
-          <p:nvPr/>
-        </p:nvSpPr>
-        <p:spPr>
-          <a:xfrm>
-            <a:off x="502920" y="5715000"/>
-            <a:ext cx="2834640" cy="411480"/>
-          </a:xfrm>
-          <a:prstGeom prst="rect">
-            <a:avLst/>
-          </a:prstGeom>
-          <a:noFill/>
-        </p:spPr>
-        <p:txBody>
-          <a:bodyPr wrap="square" lIns="45720" rIns="45720" tIns="22860" bIns="22860" anchor="t">
-            <a:spAutoFit/>
-          </a:bodyPr>
-          <a:lstStyle/>
-          <a:p>
-            <a:pPr algn="ctr"/>
-            <a:r>
-              <a:rPr sz="1600" b="1">
-                <a:solidFill>
-                  <a:srgbClr val="333333"/>
-                </a:solidFill>
-                <a:latin typeface="Yu Gothic"/>
-              </a:rPr>
-              <a:t>アカウント作成</a:t>
-            </a:r>
-          </a:p>
-        </p:txBody>
-      </p:sp>
-      <p:sp>
-        <p:nvSpPr>
-          <p:cNvPr id="10" name="TextBox 9"/>
-          <p:cNvSpPr txBox="1"/>
-          <p:nvPr/>
-        </p:nvSpPr>
-        <p:spPr>
-          <a:xfrm>
-            <a:off x="2560320" y="3566160"/>
-            <a:ext cx="640080" cy="548640"/>
-          </a:xfrm>
-          <a:prstGeom prst="rect">
-            <a:avLst/>
-          </a:prstGeom>
-          <a:noFill/>
-        </p:spPr>
-        <p:txBody>
-          <a:bodyPr wrap="square" lIns="45720" rIns="45720" tIns="22860" bIns="22860" anchor="t">
-            <a:spAutoFit/>
-          </a:bodyPr>
-          <a:lstStyle/>
-          <a:p>
-            <a:pPr algn="ctr"/>
-            <a:r>
-              <a:rPr sz="2000" b="1">
-                <a:solidFill>
-                  <a:srgbClr val="666666"/>
-                </a:solidFill>
-                <a:latin typeface="Yu Gothic"/>
-              </a:rPr>
-              <a:t>▶</a:t>
-            </a:r>
-          </a:p>
-        </p:txBody>
-      </p:sp>
-      <p:pic>
-        <p:nvPicPr>
-          <p:cNvPr id="11" name="Picture 10" descr="2.jpg"/>
-          <p:cNvPicPr>
-            <a:picLocks noChangeAspect="1"/>
-          </p:cNvPicPr>
-          <p:nvPr/>
-        </p:nvPicPr>
-        <p:blipFill>
-          <a:blip r:embed="rId3"/>
-          <a:stretch>
-            <a:fillRect/>
-          </a:stretch>
-        </p:blipFill>
-        <p:spPr>
-          <a:xfrm>
-            <a:off x="3611880" y="2011680"/>
-            <a:ext cx="1668882" cy="3611880"/>
-          </a:xfrm>
-          <a:prstGeom prst="rect">
-            <a:avLst/>
-          </a:prstGeom>
-          <a:ln w="12700">
-            <a:solidFill>
-              <a:srgbClr val="BBBBBB"/>
-            </a:solidFill>
-          </a:ln>
-        </p:spPr>
-      </p:pic>
-      <p:sp>
-        <p:nvSpPr>
-          <p:cNvPr id="12" name="Oval 11"/>
+              <a:t>免許証</a:t>
+            </a:r>
+          </a:p>
+        </p:txBody>
+      </p:sp>
+      <p:sp>
+        <p:nvSpPr>
+          <p:cNvPr id="9" name="Rectangle 8"/>
           <p:cNvSpPr/>
           <p:nvPr/>
         </p:nvSpPr>
         <p:spPr>
           <a:xfrm>
-            <a:off x="3465576" y="1865376"/>
-            <a:ext cx="384048" cy="384048"/>
-          </a:xfrm>
-          <a:prstGeom prst="ellipse">
+            <a:off x="3291840" y="2286000"/>
+            <a:ext cx="8321040" cy="411480"/>
+          </a:xfrm>
+          <a:prstGeom prst="rect">
             <a:avLst/>
           </a:prstGeom>
           <a:solidFill>
-            <a:srgbClr val="4FB6BE"/>
+            <a:srgbClr val="E12A82"/>
           </a:solidFill>
-          <a:ln w="19050">
-            <a:solidFill>
-              <a:srgbClr val="FFFFFF"/>
-            </a:solidFill>
+          <a:ln>
+            <a:noFill/>
           </a:ln>
           <a:effectLst/>
         </p:spPr>
@@ -10756,141 +10855,68 @@
           </a:fontRef>
         </p:style>
         <p:txBody>
-          <a:bodyPr rtlCol="0" anchor="ctr" lIns="0" rIns="0" tIns="0" bIns="0"/>
-          <a:lstStyle/>
-          <a:p>
-            <a:pPr algn="ctr"/>
-            <a:r>
-              <a:rPr sz="1400" b="1">
+          <a:bodyPr rtlCol="0" anchor="ctr"/>
+          <a:lstStyle/>
+          <a:p>
+            <a:pPr algn="ctr"/>
+          </a:p>
+        </p:txBody>
+      </p:sp>
+      <p:sp>
+        <p:nvSpPr>
+          <p:cNvPr id="10" name="TextBox 9"/>
+          <p:cNvSpPr txBox="1"/>
+          <p:nvPr/>
+        </p:nvSpPr>
+        <p:spPr>
+          <a:xfrm>
+            <a:off x="3291840" y="2286000"/>
+            <a:ext cx="8321040" cy="411480"/>
+          </a:xfrm>
+          <a:prstGeom prst="rect">
+            <a:avLst/>
+          </a:prstGeom>
+          <a:noFill/>
+        </p:spPr>
+        <p:txBody>
+          <a:bodyPr wrap="square" lIns="45720" rIns="45720" tIns="22860" bIns="22860" anchor="ctr">
+            <a:spAutoFit/>
+          </a:bodyPr>
+          <a:lstStyle/>
+          <a:p>
+            <a:pPr algn="ctr"/>
+            <a:r>
+              <a:rPr sz="1300" b="1">
                 <a:solidFill>
                   <a:srgbClr val="FFFFFF"/>
                 </a:solidFill>
                 <a:latin typeface="Yu Gothic"/>
               </a:rPr>
-              <a:t>2</a:t>
-            </a:r>
-          </a:p>
-        </p:txBody>
-      </p:sp>
-      <p:sp>
-        <p:nvSpPr>
-          <p:cNvPr id="13" name="TextBox 12"/>
-          <p:cNvSpPr txBox="1"/>
-          <p:nvPr/>
-        </p:nvSpPr>
-        <p:spPr>
-          <a:xfrm>
-            <a:off x="3337560" y="5715000"/>
-            <a:ext cx="2834640" cy="411480"/>
-          </a:xfrm>
-          <a:prstGeom prst="rect">
-            <a:avLst/>
-          </a:prstGeom>
-          <a:noFill/>
-        </p:spPr>
-        <p:txBody>
-          <a:bodyPr wrap="square" lIns="45720" rIns="45720" tIns="22860" bIns="22860" anchor="t">
-            <a:spAutoFit/>
-          </a:bodyPr>
-          <a:lstStyle/>
-          <a:p>
-            <a:pPr algn="ctr"/>
-            <a:r>
-              <a:rPr sz="1600" b="1">
-                <a:solidFill>
-                  <a:srgbClr val="333333"/>
-                </a:solidFill>
-                <a:latin typeface="Yu Gothic"/>
-              </a:rPr>
-              <a:t>アプリを開く</a:t>
-            </a:r>
-          </a:p>
-        </p:txBody>
-      </p:sp>
-      <p:sp>
-        <p:nvSpPr>
-          <p:cNvPr id="14" name="TextBox 13"/>
-          <p:cNvSpPr txBox="1"/>
-          <p:nvPr/>
-        </p:nvSpPr>
-        <p:spPr>
-          <a:xfrm>
-            <a:off x="5394960" y="3566160"/>
-            <a:ext cx="640080" cy="548640"/>
-          </a:xfrm>
-          <a:prstGeom prst="rect">
-            <a:avLst/>
-          </a:prstGeom>
-          <a:noFill/>
-        </p:spPr>
-        <p:txBody>
-          <a:bodyPr wrap="square" lIns="45720" rIns="45720" tIns="22860" bIns="22860" anchor="t">
-            <a:spAutoFit/>
-          </a:bodyPr>
-          <a:lstStyle/>
-          <a:p>
-            <a:pPr algn="ctr"/>
-            <a:r>
-              <a:rPr sz="2000" b="1">
-                <a:solidFill>
-                  <a:srgbClr val="666666"/>
-                </a:solidFill>
-                <a:latin typeface="Yu Gothic"/>
-              </a:rPr>
-              <a:t>▶</a:t>
-            </a:r>
-          </a:p>
-        </p:txBody>
-      </p:sp>
-      <p:pic>
-        <p:nvPicPr>
-          <p:cNvPr id="15" name="Picture 14" descr="3.jpg"/>
-          <p:cNvPicPr>
-            <a:picLocks noChangeAspect="1"/>
-          </p:cNvPicPr>
-          <p:nvPr/>
-        </p:nvPicPr>
-        <p:blipFill>
-          <a:blip r:embed="rId4"/>
-          <a:stretch>
-            <a:fillRect/>
-          </a:stretch>
-        </p:blipFill>
-        <p:spPr>
-          <a:xfrm>
-            <a:off x="6446520" y="2011680"/>
-            <a:ext cx="1668882" cy="3611880"/>
-          </a:xfrm>
-          <a:prstGeom prst="rect">
-            <a:avLst/>
-          </a:prstGeom>
-          <a:ln w="12700">
+              <a:t>間違えやすい字</a:t>
+            </a:r>
+          </a:p>
+        </p:txBody>
+      </p:sp>
+      <p:sp>
+        <p:nvSpPr>
+          <p:cNvPr id="11" name="Rectangle 10"/>
+          <p:cNvSpPr/>
+          <p:nvPr/>
+        </p:nvSpPr>
+        <p:spPr>
+          <a:xfrm>
+            <a:off x="548640" y="2697480"/>
+            <a:ext cx="2743200" cy="530352"/>
+          </a:xfrm>
+          <a:prstGeom prst="rect">
+            <a:avLst/>
+          </a:prstGeom>
+          <a:solidFill>
+            <a:srgbClr val="FDECF3"/>
+          </a:solidFill>
+          <a:ln w="6350">
             <a:solidFill>
-              <a:srgbClr val="BBBBBB"/>
-            </a:solidFill>
-          </a:ln>
-        </p:spPr>
-      </p:pic>
-      <p:sp>
-        <p:nvSpPr>
-          <p:cNvPr id="16" name="Oval 15"/>
-          <p:cNvSpPr/>
-          <p:nvPr/>
-        </p:nvSpPr>
-        <p:spPr>
-          <a:xfrm>
-            <a:off x="6300216" y="1865376"/>
-            <a:ext cx="384048" cy="384048"/>
-          </a:xfrm>
-          <a:prstGeom prst="ellipse">
-            <a:avLst/>
-          </a:prstGeom>
-          <a:solidFill>
-            <a:srgbClr val="4FB6BE"/>
-          </a:solidFill>
-          <a:ln w="19050">
-            <a:solidFill>
-              <a:srgbClr val="FFFFFF"/>
+              <a:srgbClr val="DDDDDD"/>
             </a:solidFill>
           </a:ln>
           <a:effectLst/>
@@ -10910,75 +10936,31 @@
           </a:fontRef>
         </p:style>
         <p:txBody>
-          <a:bodyPr rtlCol="0" anchor="ctr" lIns="0" rIns="0" tIns="0" bIns="0"/>
-          <a:lstStyle/>
-          <a:p>
-            <a:pPr algn="ctr"/>
-            <a:r>
-              <a:rPr sz="1400" b="1">
-                <a:solidFill>
-                  <a:srgbClr val="FFFFFF"/>
-                </a:solidFill>
-                <a:latin typeface="Yu Gothic"/>
-              </a:rPr>
-              <a:t>3</a:t>
-            </a:r>
-          </a:p>
-        </p:txBody>
-      </p:sp>
-      <p:sp>
-        <p:nvSpPr>
-          <p:cNvPr id="17" name="TextBox 16"/>
-          <p:cNvSpPr txBox="1"/>
-          <p:nvPr/>
-        </p:nvSpPr>
-        <p:spPr>
-          <a:xfrm>
-            <a:off x="6172200" y="5715000"/>
-            <a:ext cx="2834640" cy="411480"/>
-          </a:xfrm>
-          <a:prstGeom prst="rect">
-            <a:avLst/>
-          </a:prstGeom>
-          <a:noFill/>
-        </p:spPr>
-        <p:txBody>
-          <a:bodyPr wrap="square" lIns="45720" rIns="45720" tIns="22860" bIns="22860" anchor="t">
-            <a:spAutoFit/>
-          </a:bodyPr>
-          <a:lstStyle/>
-          <a:p>
-            <a:pPr algn="ctr"/>
-            <a:r>
-              <a:rPr sz="1600" b="1">
-                <a:solidFill>
-                  <a:srgbClr val="333333"/>
-                </a:solidFill>
-                <a:latin typeface="Yu Gothic"/>
-              </a:rPr>
-              <a:t>サインイン</a:t>
-            </a:r>
-          </a:p>
-        </p:txBody>
-      </p:sp>
-      <p:sp>
-        <p:nvSpPr>
-          <p:cNvPr id="18" name="TextBox 17"/>
-          <p:cNvSpPr txBox="1"/>
-          <p:nvPr/>
-        </p:nvSpPr>
-        <p:spPr>
-          <a:xfrm>
-            <a:off x="8229600" y="3566160"/>
-            <a:ext cx="640080" cy="548640"/>
-          </a:xfrm>
-          <a:prstGeom prst="rect">
-            <a:avLst/>
-          </a:prstGeom>
-          <a:noFill/>
-        </p:spPr>
-        <p:txBody>
-          <a:bodyPr wrap="square" lIns="45720" rIns="45720" tIns="22860" bIns="22860" anchor="t">
+          <a:bodyPr rtlCol="0" anchor="ctr"/>
+          <a:lstStyle/>
+          <a:p>
+            <a:pPr algn="ctr"/>
+          </a:p>
+        </p:txBody>
+      </p:sp>
+      <p:sp>
+        <p:nvSpPr>
+          <p:cNvPr id="12" name="TextBox 11"/>
+          <p:cNvSpPr txBox="1"/>
+          <p:nvPr/>
+        </p:nvSpPr>
+        <p:spPr>
+          <a:xfrm>
+            <a:off x="548640" y="2697480"/>
+            <a:ext cx="2743200" cy="530352"/>
+          </a:xfrm>
+          <a:prstGeom prst="rect">
+            <a:avLst/>
+          </a:prstGeom>
+          <a:noFill/>
+        </p:spPr>
+        <p:txBody>
+          <a:bodyPr wrap="square" lIns="45720" rIns="45720" tIns="22860" bIns="22860" anchor="ctr">
             <a:spAutoFit/>
           </a:bodyPr>
           <a:lstStyle/>
@@ -10987,64 +10969,35 @@
             <a:r>
               <a:rPr sz="2000" b="1">
                 <a:solidFill>
-                  <a:srgbClr val="666666"/>
-                </a:solidFill>
-                <a:latin typeface="Yu Gothic"/>
-              </a:rPr>
-              <a:t>▶</a:t>
-            </a:r>
-          </a:p>
-        </p:txBody>
-      </p:sp>
-      <p:pic>
-        <p:nvPicPr>
-          <p:cNvPr id="19" name="Picture 18" descr="4.jpg"/>
-          <p:cNvPicPr>
-            <a:picLocks noChangeAspect="1"/>
-          </p:cNvPicPr>
-          <p:nvPr/>
-        </p:nvPicPr>
-        <p:blipFill>
-          <a:blip r:embed="rId5"/>
-          <a:stretch>
-            <a:fillRect/>
-          </a:stretch>
-        </p:blipFill>
-        <p:spPr>
-          <a:xfrm>
-            <a:off x="9281160" y="2011680"/>
-            <a:ext cx="1668882" cy="3611880"/>
-          </a:xfrm>
-          <a:prstGeom prst="rect">
-            <a:avLst/>
-          </a:prstGeom>
-          <a:ln w="12700">
+                  <a:srgbClr val="E12A82"/>
+                </a:solidFill>
+                <a:latin typeface="Yu Gothic"/>
+              </a:rPr>
+              <a:t>齋藤</a:t>
+            </a:r>
+          </a:p>
+        </p:txBody>
+      </p:sp>
+      <p:sp>
+        <p:nvSpPr>
+          <p:cNvPr id="13" name="Rectangle 12"/>
+          <p:cNvSpPr/>
+          <p:nvPr/>
+        </p:nvSpPr>
+        <p:spPr>
+          <a:xfrm>
+            <a:off x="3291840" y="2697480"/>
+            <a:ext cx="8321040" cy="530352"/>
+          </a:xfrm>
+          <a:prstGeom prst="rect">
+            <a:avLst/>
+          </a:prstGeom>
+          <a:solidFill>
+            <a:srgbClr val="FDECF3"/>
+          </a:solidFill>
+          <a:ln w="6350">
             <a:solidFill>
-              <a:srgbClr val="BBBBBB"/>
-            </a:solidFill>
-          </a:ln>
-        </p:spPr>
-      </p:pic>
-      <p:sp>
-        <p:nvSpPr>
-          <p:cNvPr id="20" name="Oval 19"/>
-          <p:cNvSpPr/>
-          <p:nvPr/>
-        </p:nvSpPr>
-        <p:spPr>
-          <a:xfrm>
-            <a:off x="9134856" y="1865376"/>
-            <a:ext cx="384048" cy="384048"/>
-          </a:xfrm>
-          <a:prstGeom prst="ellipse">
-            <a:avLst/>
-          </a:prstGeom>
-          <a:solidFill>
-            <a:srgbClr val="4FB6BE"/>
-          </a:solidFill>
-          <a:ln w="19050">
-            <a:solidFill>
-              <a:srgbClr val="FFFFFF"/>
+              <a:srgbClr val="DDDDDD"/>
             </a:solidFill>
           </a:ln>
           <a:effectLst/>
@@ -11064,32 +11017,868 @@
           </a:fontRef>
         </p:style>
         <p:txBody>
-          <a:bodyPr rtlCol="0" anchor="ctr" lIns="0" rIns="0" tIns="0" bIns="0"/>
-          <a:lstStyle/>
-          <a:p>
-            <a:pPr algn="ctr"/>
-            <a:r>
-              <a:rPr sz="1400" b="1">
-                <a:solidFill>
-                  <a:srgbClr val="FFFFFF"/>
-                </a:solidFill>
-                <a:latin typeface="Yu Gothic"/>
-              </a:rPr>
-              <a:t>4</a:t>
-            </a:r>
-          </a:p>
-        </p:txBody>
-      </p:sp>
-      <p:sp>
-        <p:nvSpPr>
-          <p:cNvPr id="21" name="TextBox 20"/>
-          <p:cNvSpPr txBox="1"/>
-          <p:nvPr/>
-        </p:nvSpPr>
-        <p:spPr>
-          <a:xfrm>
-            <a:off x="9006840" y="5715000"/>
-            <a:ext cx="2834640" cy="411480"/>
+          <a:bodyPr rtlCol="0" anchor="ctr"/>
+          <a:lstStyle/>
+          <a:p>
+            <a:pPr algn="ctr"/>
+          </a:p>
+        </p:txBody>
+      </p:sp>
+      <p:sp>
+        <p:nvSpPr>
+          <p:cNvPr id="14" name="TextBox 13"/>
+          <p:cNvSpPr txBox="1"/>
+          <p:nvPr/>
+        </p:nvSpPr>
+        <p:spPr>
+          <a:xfrm>
+            <a:off x="3474720" y="2697480"/>
+            <a:ext cx="7955279" cy="530352"/>
+          </a:xfrm>
+          <a:prstGeom prst="rect">
+            <a:avLst/>
+          </a:prstGeom>
+          <a:noFill/>
+        </p:spPr>
+        <p:txBody>
+          <a:bodyPr wrap="square" lIns="45720" rIns="45720" tIns="22860" bIns="22860" anchor="ctr">
+            <a:spAutoFit/>
+          </a:bodyPr>
+          <a:lstStyle/>
+          <a:p>
+            <a:pPr algn="l"/>
+            <a:r>
+              <a:rPr sz="1600" b="0">
+                <a:solidFill>
+                  <a:srgbClr val="D32F2F"/>
+                </a:solidFill>
+                <a:latin typeface="Yu Gothic"/>
+              </a:rPr>
+              <a:t>斎藤 ／ 斉藤 ／ 齊藤</a:t>
+            </a:r>
+          </a:p>
+        </p:txBody>
+      </p:sp>
+      <p:sp>
+        <p:nvSpPr>
+          <p:cNvPr id="15" name="Rectangle 14"/>
+          <p:cNvSpPr/>
+          <p:nvPr/>
+        </p:nvSpPr>
+        <p:spPr>
+          <a:xfrm>
+            <a:off x="548640" y="3227832"/>
+            <a:ext cx="2743200" cy="530352"/>
+          </a:xfrm>
+          <a:prstGeom prst="rect">
+            <a:avLst/>
+          </a:prstGeom>
+          <a:solidFill>
+            <a:srgbClr val="FFFFFF"/>
+          </a:solidFill>
+          <a:ln w="6350">
+            <a:solidFill>
+              <a:srgbClr val="DDDDDD"/>
+            </a:solidFill>
+          </a:ln>
+          <a:effectLst/>
+        </p:spPr>
+        <p:style>
+          <a:lnRef idx="1">
+            <a:schemeClr val="accent1"/>
+          </a:lnRef>
+          <a:fillRef idx="3">
+            <a:schemeClr val="accent1"/>
+          </a:fillRef>
+          <a:effectRef idx="2">
+            <a:schemeClr val="accent1"/>
+          </a:effectRef>
+          <a:fontRef idx="minor">
+            <a:schemeClr val="lt1"/>
+          </a:fontRef>
+        </p:style>
+        <p:txBody>
+          <a:bodyPr rtlCol="0" anchor="ctr"/>
+          <a:lstStyle/>
+          <a:p>
+            <a:pPr algn="ctr"/>
+          </a:p>
+        </p:txBody>
+      </p:sp>
+      <p:sp>
+        <p:nvSpPr>
+          <p:cNvPr id="16" name="TextBox 15"/>
+          <p:cNvSpPr txBox="1"/>
+          <p:nvPr/>
+        </p:nvSpPr>
+        <p:spPr>
+          <a:xfrm>
+            <a:off x="548640" y="3227832"/>
+            <a:ext cx="2743200" cy="530352"/>
+          </a:xfrm>
+          <a:prstGeom prst="rect">
+            <a:avLst/>
+          </a:prstGeom>
+          <a:noFill/>
+        </p:spPr>
+        <p:txBody>
+          <a:bodyPr wrap="square" lIns="45720" rIns="45720" tIns="22860" bIns="22860" anchor="ctr">
+            <a:spAutoFit/>
+          </a:bodyPr>
+          <a:lstStyle/>
+          <a:p>
+            <a:pPr algn="ctr"/>
+            <a:r>
+              <a:rPr sz="2000" b="1">
+                <a:solidFill>
+                  <a:srgbClr val="E12A82"/>
+                </a:solidFill>
+                <a:latin typeface="Yu Gothic"/>
+              </a:rPr>
+              <a:t>渡邉</a:t>
+            </a:r>
+          </a:p>
+        </p:txBody>
+      </p:sp>
+      <p:sp>
+        <p:nvSpPr>
+          <p:cNvPr id="17" name="Rectangle 16"/>
+          <p:cNvSpPr/>
+          <p:nvPr/>
+        </p:nvSpPr>
+        <p:spPr>
+          <a:xfrm>
+            <a:off x="3291840" y="3227832"/>
+            <a:ext cx="8321040" cy="530352"/>
+          </a:xfrm>
+          <a:prstGeom prst="rect">
+            <a:avLst/>
+          </a:prstGeom>
+          <a:solidFill>
+            <a:srgbClr val="FFFFFF"/>
+          </a:solidFill>
+          <a:ln w="6350">
+            <a:solidFill>
+              <a:srgbClr val="DDDDDD"/>
+            </a:solidFill>
+          </a:ln>
+          <a:effectLst/>
+        </p:spPr>
+        <p:style>
+          <a:lnRef idx="1">
+            <a:schemeClr val="accent1"/>
+          </a:lnRef>
+          <a:fillRef idx="3">
+            <a:schemeClr val="accent1"/>
+          </a:fillRef>
+          <a:effectRef idx="2">
+            <a:schemeClr val="accent1"/>
+          </a:effectRef>
+          <a:fontRef idx="minor">
+            <a:schemeClr val="lt1"/>
+          </a:fontRef>
+        </p:style>
+        <p:txBody>
+          <a:bodyPr rtlCol="0" anchor="ctr"/>
+          <a:lstStyle/>
+          <a:p>
+            <a:pPr algn="ctr"/>
+          </a:p>
+        </p:txBody>
+      </p:sp>
+      <p:sp>
+        <p:nvSpPr>
+          <p:cNvPr id="18" name="TextBox 17"/>
+          <p:cNvSpPr txBox="1"/>
+          <p:nvPr/>
+        </p:nvSpPr>
+        <p:spPr>
+          <a:xfrm>
+            <a:off x="3474720" y="3227832"/>
+            <a:ext cx="7955279" cy="530352"/>
+          </a:xfrm>
+          <a:prstGeom prst="rect">
+            <a:avLst/>
+          </a:prstGeom>
+          <a:noFill/>
+        </p:spPr>
+        <p:txBody>
+          <a:bodyPr wrap="square" lIns="45720" rIns="45720" tIns="22860" bIns="22860" anchor="ctr">
+            <a:spAutoFit/>
+          </a:bodyPr>
+          <a:lstStyle/>
+          <a:p>
+            <a:pPr algn="l"/>
+            <a:r>
+              <a:rPr sz="1600" b="0">
+                <a:solidFill>
+                  <a:srgbClr val="D32F2F"/>
+                </a:solidFill>
+                <a:latin typeface="Yu Gothic"/>
+              </a:rPr>
+              <a:t>渡辺 ／ 渡邊 ／ 渡部</a:t>
+            </a:r>
+          </a:p>
+        </p:txBody>
+      </p:sp>
+      <p:sp>
+        <p:nvSpPr>
+          <p:cNvPr id="19" name="Rectangle 18"/>
+          <p:cNvSpPr/>
+          <p:nvPr/>
+        </p:nvSpPr>
+        <p:spPr>
+          <a:xfrm>
+            <a:off x="548640" y="3758184"/>
+            <a:ext cx="2743200" cy="530352"/>
+          </a:xfrm>
+          <a:prstGeom prst="rect">
+            <a:avLst/>
+          </a:prstGeom>
+          <a:solidFill>
+            <a:srgbClr val="FDECF3"/>
+          </a:solidFill>
+          <a:ln w="6350">
+            <a:solidFill>
+              <a:srgbClr val="DDDDDD"/>
+            </a:solidFill>
+          </a:ln>
+          <a:effectLst/>
+        </p:spPr>
+        <p:style>
+          <a:lnRef idx="1">
+            <a:schemeClr val="accent1"/>
+          </a:lnRef>
+          <a:fillRef idx="3">
+            <a:schemeClr val="accent1"/>
+          </a:fillRef>
+          <a:effectRef idx="2">
+            <a:schemeClr val="accent1"/>
+          </a:effectRef>
+          <a:fontRef idx="minor">
+            <a:schemeClr val="lt1"/>
+          </a:fontRef>
+        </p:style>
+        <p:txBody>
+          <a:bodyPr rtlCol="0" anchor="ctr"/>
+          <a:lstStyle/>
+          <a:p>
+            <a:pPr algn="ctr"/>
+          </a:p>
+        </p:txBody>
+      </p:sp>
+      <p:sp>
+        <p:nvSpPr>
+          <p:cNvPr id="20" name="TextBox 19"/>
+          <p:cNvSpPr txBox="1"/>
+          <p:nvPr/>
+        </p:nvSpPr>
+        <p:spPr>
+          <a:xfrm>
+            <a:off x="548640" y="3758184"/>
+            <a:ext cx="2743200" cy="530352"/>
+          </a:xfrm>
+          <a:prstGeom prst="rect">
+            <a:avLst/>
+          </a:prstGeom>
+          <a:noFill/>
+        </p:spPr>
+        <p:txBody>
+          <a:bodyPr wrap="square" lIns="45720" rIns="45720" tIns="22860" bIns="22860" anchor="ctr">
+            <a:spAutoFit/>
+          </a:bodyPr>
+          <a:lstStyle/>
+          <a:p>
+            <a:pPr algn="ctr"/>
+            <a:r>
+              <a:rPr sz="2000" b="1">
+                <a:solidFill>
+                  <a:srgbClr val="E12A82"/>
+                </a:solidFill>
+                <a:latin typeface="Yu Gothic"/>
+              </a:rPr>
+              <a:t>髙橋</a:t>
+            </a:r>
+          </a:p>
+        </p:txBody>
+      </p:sp>
+      <p:sp>
+        <p:nvSpPr>
+          <p:cNvPr id="21" name="Rectangle 20"/>
+          <p:cNvSpPr/>
+          <p:nvPr/>
+        </p:nvSpPr>
+        <p:spPr>
+          <a:xfrm>
+            <a:off x="3291840" y="3758184"/>
+            <a:ext cx="8321040" cy="530352"/>
+          </a:xfrm>
+          <a:prstGeom prst="rect">
+            <a:avLst/>
+          </a:prstGeom>
+          <a:solidFill>
+            <a:srgbClr val="FDECF3"/>
+          </a:solidFill>
+          <a:ln w="6350">
+            <a:solidFill>
+              <a:srgbClr val="DDDDDD"/>
+            </a:solidFill>
+          </a:ln>
+          <a:effectLst/>
+        </p:spPr>
+        <p:style>
+          <a:lnRef idx="1">
+            <a:schemeClr val="accent1"/>
+          </a:lnRef>
+          <a:fillRef idx="3">
+            <a:schemeClr val="accent1"/>
+          </a:fillRef>
+          <a:effectRef idx="2">
+            <a:schemeClr val="accent1"/>
+          </a:effectRef>
+          <a:fontRef idx="minor">
+            <a:schemeClr val="lt1"/>
+          </a:fontRef>
+        </p:style>
+        <p:txBody>
+          <a:bodyPr rtlCol="0" anchor="ctr"/>
+          <a:lstStyle/>
+          <a:p>
+            <a:pPr algn="ctr"/>
+          </a:p>
+        </p:txBody>
+      </p:sp>
+      <p:sp>
+        <p:nvSpPr>
+          <p:cNvPr id="22" name="TextBox 21"/>
+          <p:cNvSpPr txBox="1"/>
+          <p:nvPr/>
+        </p:nvSpPr>
+        <p:spPr>
+          <a:xfrm>
+            <a:off x="3474720" y="3758184"/>
+            <a:ext cx="7955279" cy="530352"/>
+          </a:xfrm>
+          <a:prstGeom prst="rect">
+            <a:avLst/>
+          </a:prstGeom>
+          <a:noFill/>
+        </p:spPr>
+        <p:txBody>
+          <a:bodyPr wrap="square" lIns="45720" rIns="45720" tIns="22860" bIns="22860" anchor="ctr">
+            <a:spAutoFit/>
+          </a:bodyPr>
+          <a:lstStyle/>
+          <a:p>
+            <a:pPr algn="l"/>
+            <a:r>
+              <a:rPr sz="1600" b="0">
+                <a:solidFill>
+                  <a:srgbClr val="D32F2F"/>
+                </a:solidFill>
+                <a:latin typeface="Yu Gothic"/>
+              </a:rPr>
+              <a:t>高橋</a:t>
+            </a:r>
+          </a:p>
+        </p:txBody>
+      </p:sp>
+      <p:sp>
+        <p:nvSpPr>
+          <p:cNvPr id="23" name="Rectangle 22"/>
+          <p:cNvSpPr/>
+          <p:nvPr/>
+        </p:nvSpPr>
+        <p:spPr>
+          <a:xfrm>
+            <a:off x="548640" y="4288536"/>
+            <a:ext cx="2743200" cy="530352"/>
+          </a:xfrm>
+          <a:prstGeom prst="rect">
+            <a:avLst/>
+          </a:prstGeom>
+          <a:solidFill>
+            <a:srgbClr val="FFFFFF"/>
+          </a:solidFill>
+          <a:ln w="6350">
+            <a:solidFill>
+              <a:srgbClr val="DDDDDD"/>
+            </a:solidFill>
+          </a:ln>
+          <a:effectLst/>
+        </p:spPr>
+        <p:style>
+          <a:lnRef idx="1">
+            <a:schemeClr val="accent1"/>
+          </a:lnRef>
+          <a:fillRef idx="3">
+            <a:schemeClr val="accent1"/>
+          </a:fillRef>
+          <a:effectRef idx="2">
+            <a:schemeClr val="accent1"/>
+          </a:effectRef>
+          <a:fontRef idx="minor">
+            <a:schemeClr val="lt1"/>
+          </a:fontRef>
+        </p:style>
+        <p:txBody>
+          <a:bodyPr rtlCol="0" anchor="ctr"/>
+          <a:lstStyle/>
+          <a:p>
+            <a:pPr algn="ctr"/>
+          </a:p>
+        </p:txBody>
+      </p:sp>
+      <p:sp>
+        <p:nvSpPr>
+          <p:cNvPr id="24" name="TextBox 23"/>
+          <p:cNvSpPr txBox="1"/>
+          <p:nvPr/>
+        </p:nvSpPr>
+        <p:spPr>
+          <a:xfrm>
+            <a:off x="548640" y="4288536"/>
+            <a:ext cx="2743200" cy="530352"/>
+          </a:xfrm>
+          <a:prstGeom prst="rect">
+            <a:avLst/>
+          </a:prstGeom>
+          <a:noFill/>
+        </p:spPr>
+        <p:txBody>
+          <a:bodyPr wrap="square" lIns="45720" rIns="45720" tIns="22860" bIns="22860" anchor="ctr">
+            <a:spAutoFit/>
+          </a:bodyPr>
+          <a:lstStyle/>
+          <a:p>
+            <a:pPr algn="ctr"/>
+            <a:r>
+              <a:rPr sz="2000" b="1">
+                <a:solidFill>
+                  <a:srgbClr val="E12A82"/>
+                </a:solidFill>
+                <a:latin typeface="Yu Gothic"/>
+              </a:rPr>
+              <a:t>山﨑</a:t>
+            </a:r>
+          </a:p>
+        </p:txBody>
+      </p:sp>
+      <p:sp>
+        <p:nvSpPr>
+          <p:cNvPr id="25" name="Rectangle 24"/>
+          <p:cNvSpPr/>
+          <p:nvPr/>
+        </p:nvSpPr>
+        <p:spPr>
+          <a:xfrm>
+            <a:off x="3291840" y="4288536"/>
+            <a:ext cx="8321040" cy="530352"/>
+          </a:xfrm>
+          <a:prstGeom prst="rect">
+            <a:avLst/>
+          </a:prstGeom>
+          <a:solidFill>
+            <a:srgbClr val="FFFFFF"/>
+          </a:solidFill>
+          <a:ln w="6350">
+            <a:solidFill>
+              <a:srgbClr val="DDDDDD"/>
+            </a:solidFill>
+          </a:ln>
+          <a:effectLst/>
+        </p:spPr>
+        <p:style>
+          <a:lnRef idx="1">
+            <a:schemeClr val="accent1"/>
+          </a:lnRef>
+          <a:fillRef idx="3">
+            <a:schemeClr val="accent1"/>
+          </a:fillRef>
+          <a:effectRef idx="2">
+            <a:schemeClr val="accent1"/>
+          </a:effectRef>
+          <a:fontRef idx="minor">
+            <a:schemeClr val="lt1"/>
+          </a:fontRef>
+        </p:style>
+        <p:txBody>
+          <a:bodyPr rtlCol="0" anchor="ctr"/>
+          <a:lstStyle/>
+          <a:p>
+            <a:pPr algn="ctr"/>
+          </a:p>
+        </p:txBody>
+      </p:sp>
+      <p:sp>
+        <p:nvSpPr>
+          <p:cNvPr id="26" name="TextBox 25"/>
+          <p:cNvSpPr txBox="1"/>
+          <p:nvPr/>
+        </p:nvSpPr>
+        <p:spPr>
+          <a:xfrm>
+            <a:off x="3474720" y="4288536"/>
+            <a:ext cx="7955279" cy="530352"/>
+          </a:xfrm>
+          <a:prstGeom prst="rect">
+            <a:avLst/>
+          </a:prstGeom>
+          <a:noFill/>
+        </p:spPr>
+        <p:txBody>
+          <a:bodyPr wrap="square" lIns="45720" rIns="45720" tIns="22860" bIns="22860" anchor="ctr">
+            <a:spAutoFit/>
+          </a:bodyPr>
+          <a:lstStyle/>
+          <a:p>
+            <a:pPr algn="l"/>
+            <a:r>
+              <a:rPr sz="1600" b="0">
+                <a:solidFill>
+                  <a:srgbClr val="D32F2F"/>
+                </a:solidFill>
+                <a:latin typeface="Yu Gothic"/>
+              </a:rPr>
+              <a:t>山崎</a:t>
+            </a:r>
+          </a:p>
+        </p:txBody>
+      </p:sp>
+      <p:sp>
+        <p:nvSpPr>
+          <p:cNvPr id="27" name="Rectangle 26"/>
+          <p:cNvSpPr/>
+          <p:nvPr/>
+        </p:nvSpPr>
+        <p:spPr>
+          <a:xfrm>
+            <a:off x="548640" y="4818888"/>
+            <a:ext cx="2743200" cy="530352"/>
+          </a:xfrm>
+          <a:prstGeom prst="rect">
+            <a:avLst/>
+          </a:prstGeom>
+          <a:solidFill>
+            <a:srgbClr val="FDECF3"/>
+          </a:solidFill>
+          <a:ln w="6350">
+            <a:solidFill>
+              <a:srgbClr val="DDDDDD"/>
+            </a:solidFill>
+          </a:ln>
+          <a:effectLst/>
+        </p:spPr>
+        <p:style>
+          <a:lnRef idx="1">
+            <a:schemeClr val="accent1"/>
+          </a:lnRef>
+          <a:fillRef idx="3">
+            <a:schemeClr val="accent1"/>
+          </a:fillRef>
+          <a:effectRef idx="2">
+            <a:schemeClr val="accent1"/>
+          </a:effectRef>
+          <a:fontRef idx="minor">
+            <a:schemeClr val="lt1"/>
+          </a:fontRef>
+        </p:style>
+        <p:txBody>
+          <a:bodyPr rtlCol="0" anchor="ctr"/>
+          <a:lstStyle/>
+          <a:p>
+            <a:pPr algn="ctr"/>
+          </a:p>
+        </p:txBody>
+      </p:sp>
+      <p:sp>
+        <p:nvSpPr>
+          <p:cNvPr id="28" name="TextBox 27"/>
+          <p:cNvSpPr txBox="1"/>
+          <p:nvPr/>
+        </p:nvSpPr>
+        <p:spPr>
+          <a:xfrm>
+            <a:off x="548640" y="4818888"/>
+            <a:ext cx="2743200" cy="530352"/>
+          </a:xfrm>
+          <a:prstGeom prst="rect">
+            <a:avLst/>
+          </a:prstGeom>
+          <a:noFill/>
+        </p:spPr>
+        <p:txBody>
+          <a:bodyPr wrap="square" lIns="45720" rIns="45720" tIns="22860" bIns="22860" anchor="ctr">
+            <a:spAutoFit/>
+          </a:bodyPr>
+          <a:lstStyle/>
+          <a:p>
+            <a:pPr algn="ctr"/>
+            <a:r>
+              <a:rPr sz="2000" b="1">
+                <a:solidFill>
+                  <a:srgbClr val="E12A82"/>
+                </a:solidFill>
+                <a:latin typeface="Yu Gothic"/>
+              </a:rPr>
+              <a:t>澤田</a:t>
+            </a:r>
+          </a:p>
+        </p:txBody>
+      </p:sp>
+      <p:sp>
+        <p:nvSpPr>
+          <p:cNvPr id="29" name="Rectangle 28"/>
+          <p:cNvSpPr/>
+          <p:nvPr/>
+        </p:nvSpPr>
+        <p:spPr>
+          <a:xfrm>
+            <a:off x="3291840" y="4818888"/>
+            <a:ext cx="8321040" cy="530352"/>
+          </a:xfrm>
+          <a:prstGeom prst="rect">
+            <a:avLst/>
+          </a:prstGeom>
+          <a:solidFill>
+            <a:srgbClr val="FDECF3"/>
+          </a:solidFill>
+          <a:ln w="6350">
+            <a:solidFill>
+              <a:srgbClr val="DDDDDD"/>
+            </a:solidFill>
+          </a:ln>
+          <a:effectLst/>
+        </p:spPr>
+        <p:style>
+          <a:lnRef idx="1">
+            <a:schemeClr val="accent1"/>
+          </a:lnRef>
+          <a:fillRef idx="3">
+            <a:schemeClr val="accent1"/>
+          </a:fillRef>
+          <a:effectRef idx="2">
+            <a:schemeClr val="accent1"/>
+          </a:effectRef>
+          <a:fontRef idx="minor">
+            <a:schemeClr val="lt1"/>
+          </a:fontRef>
+        </p:style>
+        <p:txBody>
+          <a:bodyPr rtlCol="0" anchor="ctr"/>
+          <a:lstStyle/>
+          <a:p>
+            <a:pPr algn="ctr"/>
+          </a:p>
+        </p:txBody>
+      </p:sp>
+      <p:sp>
+        <p:nvSpPr>
+          <p:cNvPr id="30" name="TextBox 29"/>
+          <p:cNvSpPr txBox="1"/>
+          <p:nvPr/>
+        </p:nvSpPr>
+        <p:spPr>
+          <a:xfrm>
+            <a:off x="3474720" y="4818888"/>
+            <a:ext cx="7955279" cy="530352"/>
+          </a:xfrm>
+          <a:prstGeom prst="rect">
+            <a:avLst/>
+          </a:prstGeom>
+          <a:noFill/>
+        </p:spPr>
+        <p:txBody>
+          <a:bodyPr wrap="square" lIns="45720" rIns="45720" tIns="22860" bIns="22860" anchor="ctr">
+            <a:spAutoFit/>
+          </a:bodyPr>
+          <a:lstStyle/>
+          <a:p>
+            <a:pPr algn="l"/>
+            <a:r>
+              <a:rPr sz="1600" b="0">
+                <a:solidFill>
+                  <a:srgbClr val="D32F2F"/>
+                </a:solidFill>
+                <a:latin typeface="Yu Gothic"/>
+              </a:rPr>
+              <a:t>沢田</a:t>
+            </a:r>
+          </a:p>
+        </p:txBody>
+      </p:sp>
+      <p:sp>
+        <p:nvSpPr>
+          <p:cNvPr id="31" name="Rectangle 30"/>
+          <p:cNvSpPr/>
+          <p:nvPr/>
+        </p:nvSpPr>
+        <p:spPr>
+          <a:xfrm>
+            <a:off x="548640" y="5349240"/>
+            <a:ext cx="2743200" cy="530352"/>
+          </a:xfrm>
+          <a:prstGeom prst="rect">
+            <a:avLst/>
+          </a:prstGeom>
+          <a:solidFill>
+            <a:srgbClr val="FFFFFF"/>
+          </a:solidFill>
+          <a:ln w="6350">
+            <a:solidFill>
+              <a:srgbClr val="DDDDDD"/>
+            </a:solidFill>
+          </a:ln>
+          <a:effectLst/>
+        </p:spPr>
+        <p:style>
+          <a:lnRef idx="1">
+            <a:schemeClr val="accent1"/>
+          </a:lnRef>
+          <a:fillRef idx="3">
+            <a:schemeClr val="accent1"/>
+          </a:fillRef>
+          <a:effectRef idx="2">
+            <a:schemeClr val="accent1"/>
+          </a:effectRef>
+          <a:fontRef idx="minor">
+            <a:schemeClr val="lt1"/>
+          </a:fontRef>
+        </p:style>
+        <p:txBody>
+          <a:bodyPr rtlCol="0" anchor="ctr"/>
+          <a:lstStyle/>
+          <a:p>
+            <a:pPr algn="ctr"/>
+          </a:p>
+        </p:txBody>
+      </p:sp>
+      <p:sp>
+        <p:nvSpPr>
+          <p:cNvPr id="32" name="TextBox 31"/>
+          <p:cNvSpPr txBox="1"/>
+          <p:nvPr/>
+        </p:nvSpPr>
+        <p:spPr>
+          <a:xfrm>
+            <a:off x="548640" y="5349240"/>
+            <a:ext cx="2743200" cy="530352"/>
+          </a:xfrm>
+          <a:prstGeom prst="rect">
+            <a:avLst/>
+          </a:prstGeom>
+          <a:noFill/>
+        </p:spPr>
+        <p:txBody>
+          <a:bodyPr wrap="square" lIns="45720" rIns="45720" tIns="22860" bIns="22860" anchor="ctr">
+            <a:spAutoFit/>
+          </a:bodyPr>
+          <a:lstStyle/>
+          <a:p>
+            <a:pPr algn="ctr"/>
+            <a:r>
+              <a:rPr sz="2000" b="1">
+                <a:solidFill>
+                  <a:srgbClr val="E12A82"/>
+                </a:solidFill>
+                <a:latin typeface="Yu Gothic"/>
+              </a:rPr>
+              <a:t>濱田</a:t>
+            </a:r>
+          </a:p>
+        </p:txBody>
+      </p:sp>
+      <p:sp>
+        <p:nvSpPr>
+          <p:cNvPr id="33" name="Rectangle 32"/>
+          <p:cNvSpPr/>
+          <p:nvPr/>
+        </p:nvSpPr>
+        <p:spPr>
+          <a:xfrm>
+            <a:off x="3291840" y="5349240"/>
+            <a:ext cx="8321040" cy="530352"/>
+          </a:xfrm>
+          <a:prstGeom prst="rect">
+            <a:avLst/>
+          </a:prstGeom>
+          <a:solidFill>
+            <a:srgbClr val="FFFFFF"/>
+          </a:solidFill>
+          <a:ln w="6350">
+            <a:solidFill>
+              <a:srgbClr val="DDDDDD"/>
+            </a:solidFill>
+          </a:ln>
+          <a:effectLst/>
+        </p:spPr>
+        <p:style>
+          <a:lnRef idx="1">
+            <a:schemeClr val="accent1"/>
+          </a:lnRef>
+          <a:fillRef idx="3">
+            <a:schemeClr val="accent1"/>
+          </a:fillRef>
+          <a:effectRef idx="2">
+            <a:schemeClr val="accent1"/>
+          </a:effectRef>
+          <a:fontRef idx="minor">
+            <a:schemeClr val="lt1"/>
+          </a:fontRef>
+        </p:style>
+        <p:txBody>
+          <a:bodyPr rtlCol="0" anchor="ctr"/>
+          <a:lstStyle/>
+          <a:p>
+            <a:pPr algn="ctr"/>
+          </a:p>
+        </p:txBody>
+      </p:sp>
+      <p:sp>
+        <p:nvSpPr>
+          <p:cNvPr id="34" name="TextBox 33"/>
+          <p:cNvSpPr txBox="1"/>
+          <p:nvPr/>
+        </p:nvSpPr>
+        <p:spPr>
+          <a:xfrm>
+            <a:off x="3474720" y="5349240"/>
+            <a:ext cx="7955279" cy="530352"/>
+          </a:xfrm>
+          <a:prstGeom prst="rect">
+            <a:avLst/>
+          </a:prstGeom>
+          <a:noFill/>
+        </p:spPr>
+        <p:txBody>
+          <a:bodyPr wrap="square" lIns="45720" rIns="45720" tIns="22860" bIns="22860" anchor="ctr">
+            <a:spAutoFit/>
+          </a:bodyPr>
+          <a:lstStyle/>
+          <a:p>
+            <a:pPr algn="l"/>
+            <a:r>
+              <a:rPr sz="1600" b="0">
+                <a:solidFill>
+                  <a:srgbClr val="D32F2F"/>
+                </a:solidFill>
+                <a:latin typeface="Yu Gothic"/>
+              </a:rPr>
+              <a:t>浜田</a:t>
+            </a:r>
+          </a:p>
+        </p:txBody>
+      </p:sp>
+      <p:sp>
+        <p:nvSpPr>
+          <p:cNvPr id="35" name="TextBox 34"/>
+          <p:cNvSpPr txBox="1"/>
+          <p:nvPr/>
+        </p:nvSpPr>
+        <p:spPr>
+          <a:xfrm>
+            <a:off x="548640" y="5989320"/>
+            <a:ext cx="10972800" cy="365760"/>
           </a:xfrm>
           <a:prstGeom prst="rect">
             <a:avLst/>
@@ -11102,15 +11891,15 @@
           </a:bodyPr>
           <a:lstStyle/>
           <a:p>
-            <a:pPr algn="ctr"/>
-            <a:r>
-              <a:rPr sz="1600" b="1">
-                <a:solidFill>
-                  <a:srgbClr val="333333"/>
-                </a:solidFill>
-                <a:latin typeface="Yu Gothic"/>
-              </a:rPr>
-              <a:t>項目をクリア</a:t>
+            <a:pPr algn="l"/>
+            <a:r>
+              <a:rPr sz="1300" b="0">
+                <a:solidFill>
+                  <a:srgbClr val="666666"/>
+                </a:solidFill>
+                <a:latin typeface="Yu Gothic"/>
+              </a:rPr>
+              <a:t>外国籍の方も免許証記載の名前</a:t>
             </a:r>
           </a:p>
         </p:txBody>
@@ -11209,7 +11998,7 @@
                 </a:solidFill>
                 <a:latin typeface="Yu Gothic"/>
               </a:rPr>
-              <a:t>④-1</a:t>
+              <a:t>④</a:t>
             </a:r>
           </a:p>
         </p:txBody>
@@ -11244,7 +12033,7 @@
                 </a:solidFill>
                 <a:latin typeface="Yu Gothic"/>
               </a:rPr>
-              <a:t>アカウント作成</a:t>
+              <a:t>Amazon登録（途中まで）</a:t>
             </a:r>
           </a:p>
         </p:txBody>
@@ -11257,8 +12046,8 @@
         </p:nvSpPr>
         <p:spPr>
           <a:xfrm>
-            <a:off x="4663440" y="1280160"/>
-            <a:ext cx="6949440" cy="502920"/>
+            <a:off x="548640" y="1280160"/>
+            <a:ext cx="11064240" cy="548640"/>
           </a:xfrm>
           <a:prstGeom prst="roundRect">
             <a:avLst>
@@ -11305,8 +12094,8 @@
         </p:nvSpPr>
         <p:spPr>
           <a:xfrm>
-            <a:off x="4800600" y="1280160"/>
-            <a:ext cx="6766560" cy="502920"/>
+            <a:off x="548640" y="1280160"/>
+            <a:ext cx="11064240" cy="548640"/>
           </a:xfrm>
           <a:prstGeom prst="rect">
             <a:avLst/>
@@ -11319,15 +12108,15 @@
           </a:bodyPr>
           <a:lstStyle/>
           <a:p>
-            <a:pPr algn="l"/>
-            <a:r>
-              <a:rPr sz="1500" b="1">
+            <a:pPr algn="ctr"/>
+            <a:r>
+              <a:rPr sz="1600" b="1">
                 <a:solidFill>
                   <a:srgbClr val="333333"/>
                 </a:solidFill>
                 <a:latin typeface="Yu Gothic"/>
               </a:rPr>
-              <a:t>招待メールのURLをタップすると、この画面</a:t>
+              <a:t>必要書類がそろったら　招待メールを送る　→　メールのURLをタップ</a:t>
             </a:r>
           </a:p>
         </p:txBody>
@@ -11348,8 +12137,8 @@
         </p:blipFill>
         <p:spPr>
           <a:xfrm>
-            <a:off x="1097280" y="1280160"/>
-            <a:ext cx="2323759" cy="5029200"/>
+            <a:off x="777240" y="2011680"/>
+            <a:ext cx="1668882" cy="3611880"/>
           </a:xfrm>
           <a:prstGeom prst="rect">
             <a:avLst/>
@@ -11363,101 +12152,20 @@
       </p:pic>
       <p:sp>
         <p:nvSpPr>
-          <p:cNvPr id="8" name="Rounded Rectangle 7"/>
+          <p:cNvPr id="8" name="Oval 7"/>
           <p:cNvSpPr/>
           <p:nvPr/>
         </p:nvSpPr>
         <p:spPr>
           <a:xfrm>
-            <a:off x="1276894" y="2585170"/>
-            <a:ext cx="1964531" cy="241356"/>
-          </a:xfrm>
-          <a:prstGeom prst="roundRect">
-            <a:avLst>
-              <a:gd name="adj" fmla="val 12000"/>
-            </a:avLst>
-          </a:prstGeom>
-          <a:noFill/>
-          <a:ln w="38100">
-            <a:solidFill>
-              <a:srgbClr val="D32F2F"/>
-            </a:solidFill>
-          </a:ln>
-          <a:effectLst/>
-        </p:spPr>
-        <p:style>
-          <a:lnRef idx="1">
-            <a:schemeClr val="accent1"/>
-          </a:lnRef>
-          <a:fillRef idx="3">
-            <a:schemeClr val="accent1"/>
-          </a:fillRef>
-          <a:effectRef idx="2">
-            <a:schemeClr val="accent1"/>
-          </a:effectRef>
-          <a:fontRef idx="minor">
-            <a:schemeClr val="lt1"/>
-          </a:fontRef>
-        </p:style>
-        <p:txBody>
-          <a:bodyPr rtlCol="0" anchor="ctr"/>
-          <a:lstStyle/>
-          <a:p>
-            <a:pPr algn="ctr"/>
-          </a:p>
-        </p:txBody>
-      </p:sp>
-      <p:cxnSp>
-        <p:nvCxnSpPr>
-          <p:cNvPr id="9" name="Connector 8"/>
-          <p:cNvCxnSpPr/>
-          <p:nvPr/>
-        </p:nvCxnSpPr>
-        <p:spPr>
-          <a:xfrm>
-            <a:off x="3241425" y="2705848"/>
-            <a:ext cx="1467735" cy="0"/>
-          </a:xfrm>
-          <a:prstGeom prst="line">
-            <a:avLst/>
-          </a:prstGeom>
-          <a:ln w="22225">
-            <a:solidFill>
-              <a:srgbClr val="D32F2F"/>
-            </a:solidFill>
-          </a:ln>
-        </p:spPr>
-        <p:style>
-          <a:lnRef idx="2">
-            <a:schemeClr val="accent1"/>
-          </a:lnRef>
-          <a:fillRef idx="0">
-            <a:schemeClr val="accent1"/>
-          </a:fillRef>
-          <a:effectRef idx="1">
-            <a:schemeClr val="accent1"/>
-          </a:effectRef>
-          <a:fontRef idx="minor">
-            <a:schemeClr val="tx1"/>
-          </a:fontRef>
-        </p:style>
-      </p:cxnSp>
-      <p:sp>
-        <p:nvSpPr>
-          <p:cNvPr id="10" name="Oval 9"/>
-          <p:cNvSpPr/>
-          <p:nvPr/>
-        </p:nvSpPr>
-        <p:spPr>
-          <a:xfrm>
-            <a:off x="4745736" y="2513824"/>
+            <a:off x="630936" y="1865376"/>
             <a:ext cx="384048" cy="384048"/>
           </a:xfrm>
           <a:prstGeom prst="ellipse">
             <a:avLst/>
           </a:prstGeom>
           <a:solidFill>
-            <a:srgbClr val="D32F2F"/>
+            <a:srgbClr val="4FB6BE"/>
           </a:solidFill>
           <a:ln w="19050">
             <a:solidFill>
@@ -11499,136 +12207,119 @@
       </p:sp>
       <p:sp>
         <p:nvSpPr>
-          <p:cNvPr id="11" name="TextBox 10"/>
-          <p:cNvSpPr txBox="1"/>
-          <p:nvPr/>
-        </p:nvSpPr>
-        <p:spPr>
-          <a:xfrm>
-            <a:off x="5303520" y="2431528"/>
-            <a:ext cx="6583680" cy="411480"/>
-          </a:xfrm>
-          <a:prstGeom prst="rect">
-            <a:avLst/>
-          </a:prstGeom>
-          <a:noFill/>
-        </p:spPr>
-        <p:txBody>
-          <a:bodyPr wrap="square" lIns="45720" rIns="45720" tIns="22860" bIns="22860" anchor="ctr">
-            <a:spAutoFit/>
-          </a:bodyPr>
-          <a:lstStyle/>
-          <a:p>
-            <a:pPr algn="l"/>
+          <p:cNvPr id="9" name="TextBox 8"/>
+          <p:cNvSpPr txBox="1"/>
+          <p:nvPr/>
+        </p:nvSpPr>
+        <p:spPr>
+          <a:xfrm>
+            <a:off x="502920" y="5715000"/>
+            <a:ext cx="2834640" cy="411480"/>
+          </a:xfrm>
+          <a:prstGeom prst="rect">
+            <a:avLst/>
+          </a:prstGeom>
+          <a:noFill/>
+        </p:spPr>
+        <p:txBody>
+          <a:bodyPr wrap="square" lIns="45720" rIns="45720" tIns="22860" bIns="22860" anchor="t">
+            <a:spAutoFit/>
+          </a:bodyPr>
+          <a:lstStyle/>
+          <a:p>
+            <a:pPr algn="ctr"/>
+            <a:r>
+              <a:rPr sz="1600" b="1">
+                <a:solidFill>
+                  <a:srgbClr val="333333"/>
+                </a:solidFill>
+                <a:latin typeface="Yu Gothic"/>
+              </a:rPr>
+              <a:t>アカウント作成</a:t>
+            </a:r>
+          </a:p>
+        </p:txBody>
+      </p:sp>
+      <p:sp>
+        <p:nvSpPr>
+          <p:cNvPr id="10" name="TextBox 9"/>
+          <p:cNvSpPr txBox="1"/>
+          <p:nvPr/>
+        </p:nvSpPr>
+        <p:spPr>
+          <a:xfrm>
+            <a:off x="2560320" y="3566160"/>
+            <a:ext cx="640080" cy="548640"/>
+          </a:xfrm>
+          <a:prstGeom prst="rect">
+            <a:avLst/>
+          </a:prstGeom>
+          <a:noFill/>
+        </p:spPr>
+        <p:txBody>
+          <a:bodyPr wrap="square" lIns="45720" rIns="45720" tIns="22860" bIns="22860" anchor="t">
+            <a:spAutoFit/>
+          </a:bodyPr>
+          <a:lstStyle/>
+          <a:p>
+            <a:pPr algn="ctr"/>
             <a:r>
               <a:rPr sz="2000" b="1">
                 <a:solidFill>
-                  <a:srgbClr val="333333"/>
-                </a:solidFill>
-                <a:latin typeface="Yu Gothic"/>
-              </a:rPr>
-              <a:t>名前を入力</a:t>
-            </a:r>
-          </a:p>
-        </p:txBody>
-      </p:sp>
-      <p:sp>
-        <p:nvSpPr>
-          <p:cNvPr id="12" name="Rounded Rectangle 11"/>
-          <p:cNvSpPr/>
-          <p:nvPr/>
-        </p:nvSpPr>
-        <p:spPr>
-          <a:xfrm>
-            <a:off x="1276894" y="3511306"/>
-            <a:ext cx="1964531" cy="241356"/>
-          </a:xfrm>
-          <a:prstGeom prst="roundRect">
-            <a:avLst>
-              <a:gd name="adj" fmla="val 12000"/>
-            </a:avLst>
-          </a:prstGeom>
-          <a:noFill/>
-          <a:ln w="38100">
+                  <a:srgbClr val="666666"/>
+                </a:solidFill>
+                <a:latin typeface="Yu Gothic"/>
+              </a:rPr>
+              <a:t>▶</a:t>
+            </a:r>
+          </a:p>
+        </p:txBody>
+      </p:sp>
+      <p:pic>
+        <p:nvPicPr>
+          <p:cNvPr id="11" name="Picture 10" descr="2.jpg"/>
+          <p:cNvPicPr>
+            <a:picLocks noChangeAspect="1"/>
+          </p:cNvPicPr>
+          <p:nvPr/>
+        </p:nvPicPr>
+        <p:blipFill>
+          <a:blip r:embed="rId3"/>
+          <a:stretch>
+            <a:fillRect/>
+          </a:stretch>
+        </p:blipFill>
+        <p:spPr>
+          <a:xfrm>
+            <a:off x="3611880" y="2011680"/>
+            <a:ext cx="1668882" cy="3611880"/>
+          </a:xfrm>
+          <a:prstGeom prst="rect">
+            <a:avLst/>
+          </a:prstGeom>
+          <a:ln w="12700">
             <a:solidFill>
-              <a:srgbClr val="D32F2F"/>
+              <a:srgbClr val="BBBBBB"/>
             </a:solidFill>
           </a:ln>
-          <a:effectLst/>
-        </p:spPr>
-        <p:style>
-          <a:lnRef idx="1">
-            <a:schemeClr val="accent1"/>
-          </a:lnRef>
-          <a:fillRef idx="3">
-            <a:schemeClr val="accent1"/>
-          </a:fillRef>
-          <a:effectRef idx="2">
-            <a:schemeClr val="accent1"/>
-          </a:effectRef>
-          <a:fontRef idx="minor">
-            <a:schemeClr val="lt1"/>
-          </a:fontRef>
-        </p:style>
-        <p:txBody>
-          <a:bodyPr rtlCol="0" anchor="ctr"/>
-          <a:lstStyle/>
-          <a:p>
-            <a:pPr algn="ctr"/>
-          </a:p>
-        </p:txBody>
-      </p:sp>
-      <p:cxnSp>
-        <p:nvCxnSpPr>
-          <p:cNvPr id="13" name="Connector 12"/>
-          <p:cNvCxnSpPr/>
-          <p:nvPr/>
-        </p:nvCxnSpPr>
-        <p:spPr>
-          <a:xfrm>
-            <a:off x="3241425" y="3631984"/>
-            <a:ext cx="1467735" cy="0"/>
-          </a:xfrm>
-          <a:prstGeom prst="line">
-            <a:avLst/>
-          </a:prstGeom>
-          <a:ln w="22225">
-            <a:solidFill>
-              <a:srgbClr val="D32F2F"/>
-            </a:solidFill>
-          </a:ln>
-        </p:spPr>
-        <p:style>
-          <a:lnRef idx="2">
-            <a:schemeClr val="accent1"/>
-          </a:lnRef>
-          <a:fillRef idx="0">
-            <a:schemeClr val="accent1"/>
-          </a:fillRef>
-          <a:effectRef idx="1">
-            <a:schemeClr val="accent1"/>
-          </a:effectRef>
-          <a:fontRef idx="minor">
-            <a:schemeClr val="tx1"/>
-          </a:fontRef>
-        </p:style>
-      </p:cxnSp>
-      <p:sp>
-        <p:nvSpPr>
-          <p:cNvPr id="14" name="Oval 13"/>
+        </p:spPr>
+      </p:pic>
+      <p:sp>
+        <p:nvSpPr>
+          <p:cNvPr id="12" name="Oval 11"/>
           <p:cNvSpPr/>
           <p:nvPr/>
         </p:nvSpPr>
         <p:spPr>
           <a:xfrm>
-            <a:off x="4745736" y="3439960"/>
+            <a:off x="3465576" y="1865376"/>
             <a:ext cx="384048" cy="384048"/>
           </a:xfrm>
           <a:prstGeom prst="ellipse">
             <a:avLst/>
           </a:prstGeom>
           <a:solidFill>
-            <a:srgbClr val="D32F2F"/>
+            <a:srgbClr val="4FB6BE"/>
           </a:solidFill>
           <a:ln w="19050">
             <a:solidFill>
@@ -11670,171 +12361,119 @@
       </p:sp>
       <p:sp>
         <p:nvSpPr>
-          <p:cNvPr id="15" name="TextBox 14"/>
-          <p:cNvSpPr txBox="1"/>
-          <p:nvPr/>
-        </p:nvSpPr>
-        <p:spPr>
-          <a:xfrm>
-            <a:off x="5303520" y="3357664"/>
-            <a:ext cx="6583680" cy="411480"/>
-          </a:xfrm>
-          <a:prstGeom prst="rect">
-            <a:avLst/>
-          </a:prstGeom>
-          <a:noFill/>
-        </p:spPr>
-        <p:txBody>
-          <a:bodyPr wrap="square" lIns="45720" rIns="45720" tIns="22860" bIns="22860" anchor="ctr">
-            <a:spAutoFit/>
-          </a:bodyPr>
-          <a:lstStyle/>
-          <a:p>
-            <a:pPr algn="l"/>
+          <p:cNvPr id="13" name="TextBox 12"/>
+          <p:cNvSpPr txBox="1"/>
+          <p:nvPr/>
+        </p:nvSpPr>
+        <p:spPr>
+          <a:xfrm>
+            <a:off x="3337560" y="5715000"/>
+            <a:ext cx="2834640" cy="411480"/>
+          </a:xfrm>
+          <a:prstGeom prst="rect">
+            <a:avLst/>
+          </a:prstGeom>
+          <a:noFill/>
+        </p:spPr>
+        <p:txBody>
+          <a:bodyPr wrap="square" lIns="45720" rIns="45720" tIns="22860" bIns="22860" anchor="t">
+            <a:spAutoFit/>
+          </a:bodyPr>
+          <a:lstStyle/>
+          <a:p>
+            <a:pPr algn="ctr"/>
+            <a:r>
+              <a:rPr sz="1600" b="1">
+                <a:solidFill>
+                  <a:srgbClr val="333333"/>
+                </a:solidFill>
+                <a:latin typeface="Yu Gothic"/>
+              </a:rPr>
+              <a:t>アプリを開く</a:t>
+            </a:r>
+          </a:p>
+        </p:txBody>
+      </p:sp>
+      <p:sp>
+        <p:nvSpPr>
+          <p:cNvPr id="14" name="TextBox 13"/>
+          <p:cNvSpPr txBox="1"/>
+          <p:nvPr/>
+        </p:nvSpPr>
+        <p:spPr>
+          <a:xfrm>
+            <a:off x="5394960" y="3566160"/>
+            <a:ext cx="640080" cy="548640"/>
+          </a:xfrm>
+          <a:prstGeom prst="rect">
+            <a:avLst/>
+          </a:prstGeom>
+          <a:noFill/>
+        </p:spPr>
+        <p:txBody>
+          <a:bodyPr wrap="square" lIns="45720" rIns="45720" tIns="22860" bIns="22860" anchor="t">
+            <a:spAutoFit/>
+          </a:bodyPr>
+          <a:lstStyle/>
+          <a:p>
+            <a:pPr algn="ctr"/>
             <a:r>
               <a:rPr sz="2000" b="1">
                 <a:solidFill>
-                  <a:srgbClr val="333333"/>
-                </a:solidFill>
-                <a:latin typeface="Yu Gothic"/>
-              </a:rPr>
-              <a:t>パスワードを決める</a:t>
-            </a:r>
-          </a:p>
-        </p:txBody>
-      </p:sp>
-      <p:sp>
-        <p:nvSpPr>
-          <p:cNvPr id="16" name="TextBox 15"/>
-          <p:cNvSpPr txBox="1"/>
-          <p:nvPr/>
-        </p:nvSpPr>
-        <p:spPr>
-          <a:xfrm>
-            <a:off x="5303520" y="3741712"/>
-            <a:ext cx="6583680" cy="365760"/>
-          </a:xfrm>
-          <a:prstGeom prst="rect">
-            <a:avLst/>
-          </a:prstGeom>
-          <a:noFill/>
-        </p:spPr>
-        <p:txBody>
-          <a:bodyPr wrap="square" lIns="45720" rIns="45720" tIns="22860" bIns="22860" anchor="t">
-            <a:spAutoFit/>
-          </a:bodyPr>
-          <a:lstStyle/>
-          <a:p>
-            <a:pPr algn="l"/>
-            <a:r>
-              <a:rPr sz="1400" b="0">
-                <a:solidFill>
                   <a:srgbClr val="666666"/>
                 </a:solidFill>
                 <a:latin typeface="Yu Gothic"/>
               </a:rPr>
-              <a:t>6文字以上</a:t>
-            </a:r>
-          </a:p>
-        </p:txBody>
-      </p:sp>
-      <p:sp>
-        <p:nvSpPr>
-          <p:cNvPr id="17" name="Rounded Rectangle 16"/>
-          <p:cNvSpPr/>
-          <p:nvPr/>
-        </p:nvSpPr>
-        <p:spPr>
-          <a:xfrm>
-            <a:off x="1276894" y="4330796"/>
-            <a:ext cx="1964531" cy="241356"/>
-          </a:xfrm>
-          <a:prstGeom prst="roundRect">
-            <a:avLst>
-              <a:gd name="adj" fmla="val 12000"/>
-            </a:avLst>
-          </a:prstGeom>
-          <a:noFill/>
-          <a:ln w="38100">
+              <a:t>▶</a:t>
+            </a:r>
+          </a:p>
+        </p:txBody>
+      </p:sp>
+      <p:pic>
+        <p:nvPicPr>
+          <p:cNvPr id="15" name="Picture 14" descr="3.jpg"/>
+          <p:cNvPicPr>
+            <a:picLocks noChangeAspect="1"/>
+          </p:cNvPicPr>
+          <p:nvPr/>
+        </p:nvPicPr>
+        <p:blipFill>
+          <a:blip r:embed="rId4"/>
+          <a:stretch>
+            <a:fillRect/>
+          </a:stretch>
+        </p:blipFill>
+        <p:spPr>
+          <a:xfrm>
+            <a:off x="6446520" y="2011680"/>
+            <a:ext cx="1668882" cy="3611880"/>
+          </a:xfrm>
+          <a:prstGeom prst="rect">
+            <a:avLst/>
+          </a:prstGeom>
+          <a:ln w="12700">
             <a:solidFill>
-              <a:srgbClr val="D32F2F"/>
+              <a:srgbClr val="BBBBBB"/>
             </a:solidFill>
           </a:ln>
-          <a:effectLst/>
-        </p:spPr>
-        <p:style>
-          <a:lnRef idx="1">
-            <a:schemeClr val="accent1"/>
-          </a:lnRef>
-          <a:fillRef idx="3">
-            <a:schemeClr val="accent1"/>
-          </a:fillRef>
-          <a:effectRef idx="2">
-            <a:schemeClr val="accent1"/>
-          </a:effectRef>
-          <a:fontRef idx="minor">
-            <a:schemeClr val="lt1"/>
-          </a:fontRef>
-        </p:style>
-        <p:txBody>
-          <a:bodyPr rtlCol="0" anchor="ctr"/>
-          <a:lstStyle/>
-          <a:p>
-            <a:pPr algn="ctr"/>
-          </a:p>
-        </p:txBody>
-      </p:sp>
-      <p:cxnSp>
-        <p:nvCxnSpPr>
-          <p:cNvPr id="18" name="Connector 17"/>
-          <p:cNvCxnSpPr/>
-          <p:nvPr/>
-        </p:nvCxnSpPr>
-        <p:spPr>
-          <a:xfrm>
-            <a:off x="3241425" y="4451474"/>
-            <a:ext cx="1467735" cy="3470"/>
-          </a:xfrm>
-          <a:prstGeom prst="line">
-            <a:avLst/>
-          </a:prstGeom>
-          <a:ln w="22225">
-            <a:solidFill>
-              <a:srgbClr val="D32F2F"/>
-            </a:solidFill>
-          </a:ln>
-        </p:spPr>
-        <p:style>
-          <a:lnRef idx="2">
-            <a:schemeClr val="accent1"/>
-          </a:lnRef>
-          <a:fillRef idx="0">
-            <a:schemeClr val="accent1"/>
-          </a:fillRef>
-          <a:effectRef idx="1">
-            <a:schemeClr val="accent1"/>
-          </a:effectRef>
-          <a:fontRef idx="minor">
-            <a:schemeClr val="tx1"/>
-          </a:fontRef>
-        </p:style>
-      </p:cxnSp>
-      <p:sp>
-        <p:nvSpPr>
-          <p:cNvPr id="19" name="Oval 18"/>
+        </p:spPr>
+      </p:pic>
+      <p:sp>
+        <p:nvSpPr>
+          <p:cNvPr id="16" name="Oval 15"/>
           <p:cNvSpPr/>
           <p:nvPr/>
         </p:nvSpPr>
         <p:spPr>
           <a:xfrm>
-            <a:off x="4745736" y="4262920"/>
+            <a:off x="6300216" y="1865376"/>
             <a:ext cx="384048" cy="384048"/>
           </a:xfrm>
           <a:prstGeom prst="ellipse">
             <a:avLst/>
           </a:prstGeom>
           <a:solidFill>
-            <a:srgbClr val="D32F2F"/>
+            <a:srgbClr val="4FB6BE"/>
           </a:solidFill>
           <a:ln w="19050">
             <a:solidFill>
@@ -11876,96 +12515,123 @@
       </p:sp>
       <p:sp>
         <p:nvSpPr>
-          <p:cNvPr id="20" name="TextBox 19"/>
-          <p:cNvSpPr txBox="1"/>
-          <p:nvPr/>
-        </p:nvSpPr>
-        <p:spPr>
-          <a:xfrm>
-            <a:off x="5303520" y="4180624"/>
-            <a:ext cx="6583680" cy="411480"/>
-          </a:xfrm>
-          <a:prstGeom prst="rect">
-            <a:avLst/>
-          </a:prstGeom>
-          <a:noFill/>
-        </p:spPr>
-        <p:txBody>
-          <a:bodyPr wrap="square" lIns="45720" rIns="45720" tIns="22860" bIns="22860" anchor="ctr">
-            <a:spAutoFit/>
-          </a:bodyPr>
-          <a:lstStyle/>
-          <a:p>
-            <a:pPr algn="l"/>
+          <p:cNvPr id="17" name="TextBox 16"/>
+          <p:cNvSpPr txBox="1"/>
+          <p:nvPr/>
+        </p:nvSpPr>
+        <p:spPr>
+          <a:xfrm>
+            <a:off x="6172200" y="5715000"/>
+            <a:ext cx="2834640" cy="411480"/>
+          </a:xfrm>
+          <a:prstGeom prst="rect">
+            <a:avLst/>
+          </a:prstGeom>
+          <a:noFill/>
+        </p:spPr>
+        <p:txBody>
+          <a:bodyPr wrap="square" lIns="45720" rIns="45720" tIns="22860" bIns="22860" anchor="t">
+            <a:spAutoFit/>
+          </a:bodyPr>
+          <a:lstStyle/>
+          <a:p>
+            <a:pPr algn="ctr"/>
+            <a:r>
+              <a:rPr sz="1600" b="1">
+                <a:solidFill>
+                  <a:srgbClr val="333333"/>
+                </a:solidFill>
+                <a:latin typeface="Yu Gothic"/>
+              </a:rPr>
+              <a:t>サインイン</a:t>
+            </a:r>
+          </a:p>
+        </p:txBody>
+      </p:sp>
+      <p:sp>
+        <p:nvSpPr>
+          <p:cNvPr id="18" name="TextBox 17"/>
+          <p:cNvSpPr txBox="1"/>
+          <p:nvPr/>
+        </p:nvSpPr>
+        <p:spPr>
+          <a:xfrm>
+            <a:off x="8229600" y="3566160"/>
+            <a:ext cx="640080" cy="548640"/>
+          </a:xfrm>
+          <a:prstGeom prst="rect">
+            <a:avLst/>
+          </a:prstGeom>
+          <a:noFill/>
+        </p:spPr>
+        <p:txBody>
+          <a:bodyPr wrap="square" lIns="45720" rIns="45720" tIns="22860" bIns="22860" anchor="t">
+            <a:spAutoFit/>
+          </a:bodyPr>
+          <a:lstStyle/>
+          <a:p>
+            <a:pPr algn="ctr"/>
             <a:r>
               <a:rPr sz="2000" b="1">
                 <a:solidFill>
-                  <a:srgbClr val="333333"/>
-                </a:solidFill>
-                <a:latin typeface="Yu Gothic"/>
-              </a:rPr>
-              <a:t>「Create your Amazon account」</a:t>
-            </a:r>
-          </a:p>
-        </p:txBody>
-      </p:sp>
-      <p:sp>
-        <p:nvSpPr>
-          <p:cNvPr id="21" name="TextBox 20"/>
-          <p:cNvSpPr txBox="1"/>
-          <p:nvPr/>
-        </p:nvSpPr>
-        <p:spPr>
-          <a:xfrm>
-            <a:off x="5303520" y="4564672"/>
-            <a:ext cx="6583680" cy="365760"/>
-          </a:xfrm>
-          <a:prstGeom prst="rect">
-            <a:avLst/>
-          </a:prstGeom>
-          <a:noFill/>
-        </p:spPr>
-        <p:txBody>
-          <a:bodyPr wrap="square" lIns="45720" rIns="45720" tIns="22860" bIns="22860" anchor="t">
-            <a:spAutoFit/>
-          </a:bodyPr>
-          <a:lstStyle/>
-          <a:p>
-            <a:pPr algn="l"/>
-            <a:r>
-              <a:rPr sz="1400" b="0">
-                <a:solidFill>
                   <a:srgbClr val="666666"/>
                 </a:solidFill>
                 <a:latin typeface="Yu Gothic"/>
               </a:rPr>
-              <a:t>をタップ</a:t>
-            </a:r>
-          </a:p>
-        </p:txBody>
-      </p:sp>
-      <p:sp>
-        <p:nvSpPr>
-          <p:cNvPr id="22" name="Rounded Rectangle 21"/>
+              <a:t>▶</a:t>
+            </a:r>
+          </a:p>
+        </p:txBody>
+      </p:sp>
+      <p:pic>
+        <p:nvPicPr>
+          <p:cNvPr id="19" name="Picture 18" descr="4.jpg"/>
+          <p:cNvPicPr>
+            <a:picLocks noChangeAspect="1"/>
+          </p:cNvPicPr>
+          <p:nvPr/>
+        </p:nvPicPr>
+        <p:blipFill>
+          <a:blip r:embed="rId5"/>
+          <a:stretch>
+            <a:fillRect/>
+          </a:stretch>
+        </p:blipFill>
+        <p:spPr>
+          <a:xfrm>
+            <a:off x="9281160" y="2011680"/>
+            <a:ext cx="1668882" cy="3611880"/>
+          </a:xfrm>
+          <a:prstGeom prst="rect">
+            <a:avLst/>
+          </a:prstGeom>
+          <a:ln w="12700">
+            <a:solidFill>
+              <a:srgbClr val="BBBBBB"/>
+            </a:solidFill>
+          </a:ln>
+        </p:spPr>
+      </p:pic>
+      <p:sp>
+        <p:nvSpPr>
+          <p:cNvPr id="20" name="Oval 19"/>
           <p:cNvSpPr/>
           <p:nvPr/>
         </p:nvSpPr>
         <p:spPr>
           <a:xfrm>
-            <a:off x="4663440" y="5577840"/>
-            <a:ext cx="6949440" cy="640080"/>
-          </a:xfrm>
-          <a:prstGeom prst="roundRect">
-            <a:avLst>
-              <a:gd name="adj" fmla="val 8000"/>
-            </a:avLst>
+            <a:off x="9134856" y="1865376"/>
+            <a:ext cx="384048" cy="384048"/>
+          </a:xfrm>
+          <a:prstGeom prst="ellipse">
+            <a:avLst/>
           </a:prstGeom>
           <a:solidFill>
-            <a:srgbClr val="FFF6E0"/>
+            <a:srgbClr val="4FB6BE"/>
           </a:solidFill>
           <a:ln w="19050">
             <a:solidFill>
-              <a:srgbClr val="F29A3C"/>
+              <a:srgbClr val="FFFFFF"/>
             </a:solidFill>
           </a:ln>
           <a:effectLst/>
@@ -11985,36 +12651,45 @@
           </a:fontRef>
         </p:style>
         <p:txBody>
-          <a:bodyPr rtlCol="0" anchor="ctr"/>
-          <a:lstStyle/>
-          <a:p>
-            <a:pPr algn="ctr"/>
-          </a:p>
-        </p:txBody>
-      </p:sp>
-      <p:sp>
-        <p:nvSpPr>
-          <p:cNvPr id="23" name="TextBox 22"/>
-          <p:cNvSpPr txBox="1"/>
-          <p:nvPr/>
-        </p:nvSpPr>
-        <p:spPr>
-          <a:xfrm>
-            <a:off x="4800600" y="5577840"/>
-            <a:ext cx="6675120" cy="640080"/>
-          </a:xfrm>
-          <a:prstGeom prst="rect">
-            <a:avLst/>
-          </a:prstGeom>
-          <a:noFill/>
-        </p:spPr>
-        <p:txBody>
-          <a:bodyPr wrap="square" lIns="45720" rIns="45720" tIns="22860" bIns="22860" anchor="ctr">
-            <a:spAutoFit/>
-          </a:bodyPr>
-          <a:lstStyle/>
-          <a:p>
-            <a:pPr algn="l"/>
+          <a:bodyPr rtlCol="0" anchor="ctr" lIns="0" rIns="0" tIns="0" bIns="0"/>
+          <a:lstStyle/>
+          <a:p>
+            <a:pPr algn="ctr"/>
+            <a:r>
+              <a:rPr sz="1400" b="1">
+                <a:solidFill>
+                  <a:srgbClr val="FFFFFF"/>
+                </a:solidFill>
+                <a:latin typeface="Yu Gothic"/>
+              </a:rPr>
+              <a:t>4</a:t>
+            </a:r>
+          </a:p>
+        </p:txBody>
+      </p:sp>
+      <p:sp>
+        <p:nvSpPr>
+          <p:cNvPr id="21" name="TextBox 20"/>
+          <p:cNvSpPr txBox="1"/>
+          <p:nvPr/>
+        </p:nvSpPr>
+        <p:spPr>
+          <a:xfrm>
+            <a:off x="9006840" y="5715000"/>
+            <a:ext cx="2834640" cy="411480"/>
+          </a:xfrm>
+          <a:prstGeom prst="rect">
+            <a:avLst/>
+          </a:prstGeom>
+          <a:noFill/>
+        </p:spPr>
+        <p:txBody>
+          <a:bodyPr wrap="square" lIns="45720" rIns="45720" tIns="22860" bIns="22860" anchor="t">
+            <a:spAutoFit/>
+          </a:bodyPr>
+          <a:lstStyle/>
+          <a:p>
+            <a:pPr algn="ctr"/>
             <a:r>
               <a:rPr sz="1600" b="1">
                 <a:solidFill>
@@ -12022,7 +12697,7 @@
                 </a:solidFill>
                 <a:latin typeface="Yu Gothic"/>
               </a:rPr>
-              <a:t>⚠ パスワードは忘れない！この後も使います</a:t>
+              <a:t>項目をクリア</a:t>
             </a:r>
           </a:p>
         </p:txBody>
@@ -12121,7 +12796,7 @@
                 </a:solidFill>
                 <a:latin typeface="Yu Gothic"/>
               </a:rPr>
-              <a:t>④-2</a:t>
+              <a:t>④-1</a:t>
             </a:r>
           </a:p>
         </p:txBody>
@@ -12156,14 +12831,97 @@
                 </a:solidFill>
                 <a:latin typeface="Yu Gothic"/>
               </a:rPr>
-              <a:t>アプリを取得して開く</a:t>
+              <a:t>アカウント作成</a:t>
+            </a:r>
+          </a:p>
+        </p:txBody>
+      </p:sp>
+      <p:sp>
+        <p:nvSpPr>
+          <p:cNvPr id="5" name="Rounded Rectangle 4"/>
+          <p:cNvSpPr/>
+          <p:nvPr/>
+        </p:nvSpPr>
+        <p:spPr>
+          <a:xfrm>
+            <a:off x="4663440" y="1280160"/>
+            <a:ext cx="6949440" cy="502920"/>
+          </a:xfrm>
+          <a:prstGeom prst="roundRect">
+            <a:avLst>
+              <a:gd name="adj" fmla="val 8000"/>
+            </a:avLst>
+          </a:prstGeom>
+          <a:solidFill>
+            <a:srgbClr val="E3F4F6"/>
+          </a:solidFill>
+          <a:ln w="12700">
+            <a:solidFill>
+              <a:srgbClr val="4FB6BE"/>
+            </a:solidFill>
+          </a:ln>
+          <a:effectLst/>
+        </p:spPr>
+        <p:style>
+          <a:lnRef idx="1">
+            <a:schemeClr val="accent1"/>
+          </a:lnRef>
+          <a:fillRef idx="3">
+            <a:schemeClr val="accent1"/>
+          </a:fillRef>
+          <a:effectRef idx="2">
+            <a:schemeClr val="accent1"/>
+          </a:effectRef>
+          <a:fontRef idx="minor">
+            <a:schemeClr val="lt1"/>
+          </a:fontRef>
+        </p:style>
+        <p:txBody>
+          <a:bodyPr rtlCol="0" anchor="ctr"/>
+          <a:lstStyle/>
+          <a:p>
+            <a:pPr algn="ctr"/>
+          </a:p>
+        </p:txBody>
+      </p:sp>
+      <p:sp>
+        <p:nvSpPr>
+          <p:cNvPr id="6" name="TextBox 5"/>
+          <p:cNvSpPr txBox="1"/>
+          <p:nvPr/>
+        </p:nvSpPr>
+        <p:spPr>
+          <a:xfrm>
+            <a:off x="4800600" y="1280160"/>
+            <a:ext cx="6766560" cy="502920"/>
+          </a:xfrm>
+          <a:prstGeom prst="rect">
+            <a:avLst/>
+          </a:prstGeom>
+          <a:noFill/>
+        </p:spPr>
+        <p:txBody>
+          <a:bodyPr wrap="square" lIns="45720" rIns="45720" tIns="22860" bIns="22860" anchor="ctr">
+            <a:spAutoFit/>
+          </a:bodyPr>
+          <a:lstStyle/>
+          <a:p>
+            <a:pPr algn="l"/>
+            <a:r>
+              <a:rPr sz="1500" b="1">
+                <a:solidFill>
+                  <a:srgbClr val="333333"/>
+                </a:solidFill>
+                <a:latin typeface="Yu Gothic"/>
+              </a:rPr>
+              <a:t>招待メールのURLをタップすると、この画面</a:t>
             </a:r>
           </a:p>
         </p:txBody>
       </p:sp>
       <p:pic>
         <p:nvPicPr>
-          <p:cNvPr id="5" name="Picture 4" descr="2.jpg"/>
+          <p:cNvPr id="7" name="Picture 6" descr="1.jpg"/>
           <p:cNvPicPr>
             <a:picLocks noChangeAspect="1"/>
           </p:cNvPicPr>
@@ -12192,14 +12950,14 @@
       </p:pic>
       <p:sp>
         <p:nvSpPr>
-          <p:cNvPr id="6" name="Rounded Rectangle 5"/>
+          <p:cNvPr id="8" name="Rounded Rectangle 7"/>
           <p:cNvSpPr/>
           <p:nvPr/>
         </p:nvSpPr>
         <p:spPr>
           <a:xfrm>
-            <a:off x="1187087" y="5447772"/>
-            <a:ext cx="2144145" cy="266614"/>
+            <a:off x="1276894" y="2585170"/>
+            <a:ext cx="1964531" cy="241356"/>
           </a:xfrm>
           <a:prstGeom prst="roundRect">
             <a:avLst>
@@ -12238,14 +12996,14 @@
       </p:sp>
       <p:cxnSp>
         <p:nvCxnSpPr>
-          <p:cNvPr id="7" name="Connector 6"/>
+          <p:cNvPr id="9" name="Connector 8"/>
           <p:cNvCxnSpPr/>
           <p:nvPr/>
         </p:nvCxnSpPr>
         <p:spPr>
           <a:xfrm>
-            <a:off x="3331232" y="5581080"/>
-            <a:ext cx="1377928" cy="0"/>
+            <a:off x="3241425" y="2705848"/>
+            <a:ext cx="1467735" cy="0"/>
           </a:xfrm>
           <a:prstGeom prst="line">
             <a:avLst/>
@@ -12273,13 +13031,13 @@
       </p:cxnSp>
       <p:sp>
         <p:nvSpPr>
-          <p:cNvPr id="8" name="Oval 7"/>
+          <p:cNvPr id="10" name="Oval 9"/>
           <p:cNvSpPr/>
           <p:nvPr/>
         </p:nvSpPr>
         <p:spPr>
           <a:xfrm>
-            <a:off x="4745736" y="5389056"/>
+            <a:off x="4745736" y="2513824"/>
             <a:ext cx="384048" cy="384048"/>
           </a:xfrm>
           <a:prstGeom prst="ellipse">
@@ -12328,13 +13086,13 @@
       </p:sp>
       <p:sp>
         <p:nvSpPr>
-          <p:cNvPr id="9" name="TextBox 8"/>
-          <p:cNvSpPr txBox="1"/>
-          <p:nvPr/>
-        </p:nvSpPr>
-        <p:spPr>
-          <a:xfrm>
-            <a:off x="5303520" y="5306760"/>
+          <p:cNvPr id="11" name="TextBox 10"/>
+          <p:cNvSpPr txBox="1"/>
+          <p:nvPr/>
+        </p:nvSpPr>
+        <p:spPr>
+          <a:xfrm>
+            <a:off x="5303520" y="2431528"/>
             <a:ext cx="6583680" cy="411480"/>
           </a:xfrm>
           <a:prstGeom prst="rect">
@@ -12356,68 +13114,31 @@
                 </a:solidFill>
                 <a:latin typeface="Yu Gothic"/>
               </a:rPr>
-              <a:t>「Amazonでサインイン」</a:t>
-            </a:r>
-          </a:p>
-        </p:txBody>
-      </p:sp>
-      <p:sp>
-        <p:nvSpPr>
-          <p:cNvPr id="10" name="TextBox 9"/>
-          <p:cNvSpPr txBox="1"/>
-          <p:nvPr/>
-        </p:nvSpPr>
-        <p:spPr>
-          <a:xfrm>
-            <a:off x="5303520" y="5690808"/>
-            <a:ext cx="6583680" cy="365760"/>
-          </a:xfrm>
-          <a:prstGeom prst="rect">
-            <a:avLst/>
-          </a:prstGeom>
-          <a:noFill/>
-        </p:spPr>
-        <p:txBody>
-          <a:bodyPr wrap="square" lIns="45720" rIns="45720" tIns="22860" bIns="22860" anchor="t">
-            <a:spAutoFit/>
-          </a:bodyPr>
-          <a:lstStyle/>
-          <a:p>
-            <a:pPr algn="l"/>
-            <a:r>
-              <a:rPr sz="1400" b="0">
-                <a:solidFill>
-                  <a:srgbClr val="666666"/>
-                </a:solidFill>
-                <a:latin typeface="Yu Gothic"/>
-              </a:rPr>
-              <a:t>をタップ</a:t>
-            </a:r>
-          </a:p>
-        </p:txBody>
-      </p:sp>
-      <p:sp>
-        <p:nvSpPr>
-          <p:cNvPr id="11" name="Rounded Rectangle 10"/>
+              <a:t>名前を入力</a:t>
+            </a:r>
+          </a:p>
+        </p:txBody>
+      </p:sp>
+      <p:sp>
+        <p:nvSpPr>
+          <p:cNvPr id="12" name="Rounded Rectangle 11"/>
           <p:cNvSpPr/>
           <p:nvPr/>
         </p:nvSpPr>
         <p:spPr>
           <a:xfrm>
-            <a:off x="4663440" y="1828800"/>
-            <a:ext cx="6949440" cy="1188720"/>
+            <a:off x="1276894" y="3511306"/>
+            <a:ext cx="1964531" cy="241356"/>
           </a:xfrm>
           <a:prstGeom prst="roundRect">
             <a:avLst>
-              <a:gd name="adj" fmla="val 8000"/>
+              <a:gd name="adj" fmla="val 12000"/>
             </a:avLst>
           </a:prstGeom>
-          <a:solidFill>
-            <a:srgbClr val="E8F1FB"/>
-          </a:solidFill>
-          <a:ln w="12700">
+          <a:noFill/>
+          <a:ln w="38100">
             <a:solidFill>
-              <a:srgbClr val="126EC9"/>
+              <a:srgbClr val="D32F2F"/>
             </a:solidFill>
           </a:ln>
           <a:effectLst/>
@@ -12444,16 +13165,106 @@
           </a:p>
         </p:txBody>
       </p:sp>
-      <p:sp>
-        <p:nvSpPr>
-          <p:cNvPr id="12" name="TextBox 11"/>
-          <p:cNvSpPr txBox="1"/>
-          <p:nvPr/>
-        </p:nvSpPr>
-        <p:spPr>
-          <a:xfrm>
-            <a:off x="4846320" y="1828800"/>
-            <a:ext cx="6675120" cy="1188720"/>
+      <p:cxnSp>
+        <p:nvCxnSpPr>
+          <p:cNvPr id="13" name="Connector 12"/>
+          <p:cNvCxnSpPr/>
+          <p:nvPr/>
+        </p:nvCxnSpPr>
+        <p:spPr>
+          <a:xfrm>
+            <a:off x="3241425" y="3631984"/>
+            <a:ext cx="1467735" cy="0"/>
+          </a:xfrm>
+          <a:prstGeom prst="line">
+            <a:avLst/>
+          </a:prstGeom>
+          <a:ln w="22225">
+            <a:solidFill>
+              <a:srgbClr val="D32F2F"/>
+            </a:solidFill>
+          </a:ln>
+        </p:spPr>
+        <p:style>
+          <a:lnRef idx="2">
+            <a:schemeClr val="accent1"/>
+          </a:lnRef>
+          <a:fillRef idx="0">
+            <a:schemeClr val="accent1"/>
+          </a:fillRef>
+          <a:effectRef idx="1">
+            <a:schemeClr val="accent1"/>
+          </a:effectRef>
+          <a:fontRef idx="minor">
+            <a:schemeClr val="tx1"/>
+          </a:fontRef>
+        </p:style>
+      </p:cxnSp>
+      <p:sp>
+        <p:nvSpPr>
+          <p:cNvPr id="14" name="Oval 13"/>
+          <p:cNvSpPr/>
+          <p:nvPr/>
+        </p:nvSpPr>
+        <p:spPr>
+          <a:xfrm>
+            <a:off x="4745736" y="3439960"/>
+            <a:ext cx="384048" cy="384048"/>
+          </a:xfrm>
+          <a:prstGeom prst="ellipse">
+            <a:avLst/>
+          </a:prstGeom>
+          <a:solidFill>
+            <a:srgbClr val="D32F2F"/>
+          </a:solidFill>
+          <a:ln w="19050">
+            <a:solidFill>
+              <a:srgbClr val="FFFFFF"/>
+            </a:solidFill>
+          </a:ln>
+          <a:effectLst/>
+        </p:spPr>
+        <p:style>
+          <a:lnRef idx="1">
+            <a:schemeClr val="accent1"/>
+          </a:lnRef>
+          <a:fillRef idx="3">
+            <a:schemeClr val="accent1"/>
+          </a:fillRef>
+          <a:effectRef idx="2">
+            <a:schemeClr val="accent1"/>
+          </a:effectRef>
+          <a:fontRef idx="minor">
+            <a:schemeClr val="lt1"/>
+          </a:fontRef>
+        </p:style>
+        <p:txBody>
+          <a:bodyPr rtlCol="0" anchor="ctr" lIns="0" rIns="0" tIns="0" bIns="0"/>
+          <a:lstStyle/>
+          <a:p>
+            <a:pPr algn="ctr"/>
+            <a:r>
+              <a:rPr sz="1400" b="1">
+                <a:solidFill>
+                  <a:srgbClr val="FFFFFF"/>
+                </a:solidFill>
+                <a:latin typeface="Yu Gothic"/>
+              </a:rPr>
+              <a:t>2</a:t>
+            </a:r>
+          </a:p>
+        </p:txBody>
+      </p:sp>
+      <p:sp>
+        <p:nvSpPr>
+          <p:cNvPr id="15" name="TextBox 14"/>
+          <p:cNvSpPr txBox="1"/>
+          <p:nvPr/>
+        </p:nvSpPr>
+        <p:spPr>
+          <a:xfrm>
+            <a:off x="5303520" y="3357664"/>
+            <a:ext cx="6583680" cy="411480"/>
           </a:xfrm>
           <a:prstGeom prst="rect">
             <a:avLst/>
@@ -12468,25 +13279,337 @@
           <a:p>
             <a:pPr algn="l"/>
             <a:r>
-              <a:rPr sz="1700" b="1">
+              <a:rPr sz="2000" b="1">
                 <a:solidFill>
                   <a:srgbClr val="333333"/>
                 </a:solidFill>
                 <a:latin typeface="Yu Gothic"/>
               </a:rPr>
-              <a:t>アカウント作成のあとにアプリを取得</a:t>
-            </a:r>
-          </a:p>
+              <a:t>パスワードを決める</a:t>
+            </a:r>
+          </a:p>
+        </p:txBody>
+      </p:sp>
+      <p:sp>
+        <p:nvSpPr>
+          <p:cNvPr id="16" name="TextBox 15"/>
+          <p:cNvSpPr txBox="1"/>
+          <p:nvPr/>
+        </p:nvSpPr>
+        <p:spPr>
+          <a:xfrm>
+            <a:off x="5303520" y="3741712"/>
+            <a:ext cx="6583680" cy="365760"/>
+          </a:xfrm>
+          <a:prstGeom prst="rect">
+            <a:avLst/>
+          </a:prstGeom>
+          <a:noFill/>
+        </p:spPr>
+        <p:txBody>
+          <a:bodyPr wrap="square" lIns="45720" rIns="45720" tIns="22860" bIns="22860" anchor="t">
+            <a:spAutoFit/>
+          </a:bodyPr>
+          <a:lstStyle/>
           <a:p>
             <a:pPr algn="l"/>
             <a:r>
-              <a:rPr sz="1700" b="1">
+              <a:rPr sz="1400" b="0">
+                <a:solidFill>
+                  <a:srgbClr val="666666"/>
+                </a:solidFill>
+                <a:latin typeface="Yu Gothic"/>
+              </a:rPr>
+              <a:t>6文字以上</a:t>
+            </a:r>
+          </a:p>
+        </p:txBody>
+      </p:sp>
+      <p:sp>
+        <p:nvSpPr>
+          <p:cNvPr id="17" name="Rounded Rectangle 16"/>
+          <p:cNvSpPr/>
+          <p:nvPr/>
+        </p:nvSpPr>
+        <p:spPr>
+          <a:xfrm>
+            <a:off x="1276894" y="4330796"/>
+            <a:ext cx="1964531" cy="241356"/>
+          </a:xfrm>
+          <a:prstGeom prst="roundRect">
+            <a:avLst>
+              <a:gd name="adj" fmla="val 12000"/>
+            </a:avLst>
+          </a:prstGeom>
+          <a:noFill/>
+          <a:ln w="38100">
+            <a:solidFill>
+              <a:srgbClr val="D32F2F"/>
+            </a:solidFill>
+          </a:ln>
+          <a:effectLst/>
+        </p:spPr>
+        <p:style>
+          <a:lnRef idx="1">
+            <a:schemeClr val="accent1"/>
+          </a:lnRef>
+          <a:fillRef idx="3">
+            <a:schemeClr val="accent1"/>
+          </a:fillRef>
+          <a:effectRef idx="2">
+            <a:schemeClr val="accent1"/>
+          </a:effectRef>
+          <a:fontRef idx="minor">
+            <a:schemeClr val="lt1"/>
+          </a:fontRef>
+        </p:style>
+        <p:txBody>
+          <a:bodyPr rtlCol="0" anchor="ctr"/>
+          <a:lstStyle/>
+          <a:p>
+            <a:pPr algn="ctr"/>
+          </a:p>
+        </p:txBody>
+      </p:sp>
+      <p:cxnSp>
+        <p:nvCxnSpPr>
+          <p:cNvPr id="18" name="Connector 17"/>
+          <p:cNvCxnSpPr/>
+          <p:nvPr/>
+        </p:nvCxnSpPr>
+        <p:spPr>
+          <a:xfrm>
+            <a:off x="3241425" y="4451474"/>
+            <a:ext cx="1467735" cy="3470"/>
+          </a:xfrm>
+          <a:prstGeom prst="line">
+            <a:avLst/>
+          </a:prstGeom>
+          <a:ln w="22225">
+            <a:solidFill>
+              <a:srgbClr val="D32F2F"/>
+            </a:solidFill>
+          </a:ln>
+        </p:spPr>
+        <p:style>
+          <a:lnRef idx="2">
+            <a:schemeClr val="accent1"/>
+          </a:lnRef>
+          <a:fillRef idx="0">
+            <a:schemeClr val="accent1"/>
+          </a:fillRef>
+          <a:effectRef idx="1">
+            <a:schemeClr val="accent1"/>
+          </a:effectRef>
+          <a:fontRef idx="minor">
+            <a:schemeClr val="tx1"/>
+          </a:fontRef>
+        </p:style>
+      </p:cxnSp>
+      <p:sp>
+        <p:nvSpPr>
+          <p:cNvPr id="19" name="Oval 18"/>
+          <p:cNvSpPr/>
+          <p:nvPr/>
+        </p:nvSpPr>
+        <p:spPr>
+          <a:xfrm>
+            <a:off x="4745736" y="4262920"/>
+            <a:ext cx="384048" cy="384048"/>
+          </a:xfrm>
+          <a:prstGeom prst="ellipse">
+            <a:avLst/>
+          </a:prstGeom>
+          <a:solidFill>
+            <a:srgbClr val="D32F2F"/>
+          </a:solidFill>
+          <a:ln w="19050">
+            <a:solidFill>
+              <a:srgbClr val="FFFFFF"/>
+            </a:solidFill>
+          </a:ln>
+          <a:effectLst/>
+        </p:spPr>
+        <p:style>
+          <a:lnRef idx="1">
+            <a:schemeClr val="accent1"/>
+          </a:lnRef>
+          <a:fillRef idx="3">
+            <a:schemeClr val="accent1"/>
+          </a:fillRef>
+          <a:effectRef idx="2">
+            <a:schemeClr val="accent1"/>
+          </a:effectRef>
+          <a:fontRef idx="minor">
+            <a:schemeClr val="lt1"/>
+          </a:fontRef>
+        </p:style>
+        <p:txBody>
+          <a:bodyPr rtlCol="0" anchor="ctr" lIns="0" rIns="0" tIns="0" bIns="0"/>
+          <a:lstStyle/>
+          <a:p>
+            <a:pPr algn="ctr"/>
+            <a:r>
+              <a:rPr sz="1400" b="1">
+                <a:solidFill>
+                  <a:srgbClr val="FFFFFF"/>
+                </a:solidFill>
+                <a:latin typeface="Yu Gothic"/>
+              </a:rPr>
+              <a:t>3</a:t>
+            </a:r>
+          </a:p>
+        </p:txBody>
+      </p:sp>
+      <p:sp>
+        <p:nvSpPr>
+          <p:cNvPr id="20" name="TextBox 19"/>
+          <p:cNvSpPr txBox="1"/>
+          <p:nvPr/>
+        </p:nvSpPr>
+        <p:spPr>
+          <a:xfrm>
+            <a:off x="5303520" y="4180624"/>
+            <a:ext cx="6583680" cy="411480"/>
+          </a:xfrm>
+          <a:prstGeom prst="rect">
+            <a:avLst/>
+          </a:prstGeom>
+          <a:noFill/>
+        </p:spPr>
+        <p:txBody>
+          <a:bodyPr wrap="square" lIns="45720" rIns="45720" tIns="22860" bIns="22860" anchor="ctr">
+            <a:spAutoFit/>
+          </a:bodyPr>
+          <a:lstStyle/>
+          <a:p>
+            <a:pPr algn="l"/>
+            <a:r>
+              <a:rPr sz="2000" b="1">
                 <a:solidFill>
                   <a:srgbClr val="333333"/>
                 </a:solidFill>
                 <a:latin typeface="Yu Gothic"/>
               </a:rPr>
-              <a:t>アプリを開くと、この画面</a:t>
+              <a:t>「Create your Amazon account」</a:t>
+            </a:r>
+          </a:p>
+        </p:txBody>
+      </p:sp>
+      <p:sp>
+        <p:nvSpPr>
+          <p:cNvPr id="21" name="TextBox 20"/>
+          <p:cNvSpPr txBox="1"/>
+          <p:nvPr/>
+        </p:nvSpPr>
+        <p:spPr>
+          <a:xfrm>
+            <a:off x="5303520" y="4564672"/>
+            <a:ext cx="6583680" cy="365760"/>
+          </a:xfrm>
+          <a:prstGeom prst="rect">
+            <a:avLst/>
+          </a:prstGeom>
+          <a:noFill/>
+        </p:spPr>
+        <p:txBody>
+          <a:bodyPr wrap="square" lIns="45720" rIns="45720" tIns="22860" bIns="22860" anchor="t">
+            <a:spAutoFit/>
+          </a:bodyPr>
+          <a:lstStyle/>
+          <a:p>
+            <a:pPr algn="l"/>
+            <a:r>
+              <a:rPr sz="1400" b="0">
+                <a:solidFill>
+                  <a:srgbClr val="666666"/>
+                </a:solidFill>
+                <a:latin typeface="Yu Gothic"/>
+              </a:rPr>
+              <a:t>をタップ</a:t>
+            </a:r>
+          </a:p>
+        </p:txBody>
+      </p:sp>
+      <p:sp>
+        <p:nvSpPr>
+          <p:cNvPr id="22" name="Rounded Rectangle 21"/>
+          <p:cNvSpPr/>
+          <p:nvPr/>
+        </p:nvSpPr>
+        <p:spPr>
+          <a:xfrm>
+            <a:off x="4663440" y="5577840"/>
+            <a:ext cx="6949440" cy="640080"/>
+          </a:xfrm>
+          <a:prstGeom prst="roundRect">
+            <a:avLst>
+              <a:gd name="adj" fmla="val 8000"/>
+            </a:avLst>
+          </a:prstGeom>
+          <a:solidFill>
+            <a:srgbClr val="FFF6E0"/>
+          </a:solidFill>
+          <a:ln w="19050">
+            <a:solidFill>
+              <a:srgbClr val="F29A3C"/>
+            </a:solidFill>
+          </a:ln>
+          <a:effectLst/>
+        </p:spPr>
+        <p:style>
+          <a:lnRef idx="1">
+            <a:schemeClr val="accent1"/>
+          </a:lnRef>
+          <a:fillRef idx="3">
+            <a:schemeClr val="accent1"/>
+          </a:fillRef>
+          <a:effectRef idx="2">
+            <a:schemeClr val="accent1"/>
+          </a:effectRef>
+          <a:fontRef idx="minor">
+            <a:schemeClr val="lt1"/>
+          </a:fontRef>
+        </p:style>
+        <p:txBody>
+          <a:bodyPr rtlCol="0" anchor="ctr"/>
+          <a:lstStyle/>
+          <a:p>
+            <a:pPr algn="ctr"/>
+          </a:p>
+        </p:txBody>
+      </p:sp>
+      <p:sp>
+        <p:nvSpPr>
+          <p:cNvPr id="23" name="TextBox 22"/>
+          <p:cNvSpPr txBox="1"/>
+          <p:nvPr/>
+        </p:nvSpPr>
+        <p:spPr>
+          <a:xfrm>
+            <a:off x="4800600" y="5577840"/>
+            <a:ext cx="6675120" cy="640080"/>
+          </a:xfrm>
+          <a:prstGeom prst="rect">
+            <a:avLst/>
+          </a:prstGeom>
+          <a:noFill/>
+        </p:spPr>
+        <p:txBody>
+          <a:bodyPr wrap="square" lIns="45720" rIns="45720" tIns="22860" bIns="22860" anchor="ctr">
+            <a:spAutoFit/>
+          </a:bodyPr>
+          <a:lstStyle/>
+          <a:p>
+            <a:pPr algn="l"/>
+            <a:r>
+              <a:rPr sz="1600" b="1">
+                <a:solidFill>
+                  <a:srgbClr val="333333"/>
+                </a:solidFill>
+                <a:latin typeface="Yu Gothic"/>
+              </a:rPr>
+              <a:t>⚠ パスワードは忘れない！この後も使います</a:t>
             </a:r>
           </a:p>
         </p:txBody>
@@ -12585,7 +13708,7 @@
                 </a:solidFill>
                 <a:latin typeface="Yu Gothic"/>
               </a:rPr>
-              <a:t>④-3</a:t>
+              <a:t>④-2</a:t>
             </a:r>
           </a:p>
         </p:txBody>
@@ -12620,14 +13743,14 @@
                 </a:solidFill>
                 <a:latin typeface="Yu Gothic"/>
               </a:rPr>
-              <a:t>サインイン</a:t>
+              <a:t>アプリを取得して開く</a:t>
             </a:r>
           </a:p>
         </p:txBody>
       </p:sp>
       <p:pic>
         <p:nvPicPr>
-          <p:cNvPr id="5" name="Picture 4" descr="3.jpg"/>
+          <p:cNvPr id="5" name="Picture 4" descr="2.jpg"/>
           <p:cNvPicPr>
             <a:picLocks noChangeAspect="1"/>
           </p:cNvPicPr>
@@ -12662,8 +13785,8 @@
         </p:nvSpPr>
         <p:spPr>
           <a:xfrm>
-            <a:off x="1198313" y="4277473"/>
-            <a:ext cx="2121693" cy="269421"/>
+            <a:off x="1187087" y="5447772"/>
+            <a:ext cx="2144145" cy="266614"/>
           </a:xfrm>
           <a:prstGeom prst="roundRect">
             <a:avLst>
@@ -12707,9 +13830,9 @@
           <p:nvPr/>
         </p:nvCxnSpPr>
         <p:spPr>
-          <a:xfrm flipV="1">
-            <a:off x="3320006" y="4114799"/>
-            <a:ext cx="1389154" cy="297385"/>
+          <a:xfrm>
+            <a:off x="3331232" y="5581080"/>
+            <a:ext cx="1377928" cy="0"/>
           </a:xfrm>
           <a:prstGeom prst="line">
             <a:avLst/>
@@ -12743,7 +13866,7 @@
         </p:nvSpPr>
         <p:spPr>
           <a:xfrm>
-            <a:off x="4745736" y="3922775"/>
+            <a:off x="4745736" y="5389056"/>
             <a:ext cx="384048" cy="384048"/>
           </a:xfrm>
           <a:prstGeom prst="ellipse">
@@ -12798,7 +13921,7 @@
         </p:nvSpPr>
         <p:spPr>
           <a:xfrm>
-            <a:off x="5303520" y="3840479"/>
+            <a:off x="5303520" y="5306760"/>
             <a:ext cx="6583680" cy="411480"/>
           </a:xfrm>
           <a:prstGeom prst="rect">
@@ -12820,7 +13943,7 @@
                 </a:solidFill>
                 <a:latin typeface="Yu Gothic"/>
               </a:rPr>
-              <a:t>メールアドレス</a:t>
+              <a:t>「Amazonでサインイン」</a:t>
             </a:r>
           </a:p>
         </p:txBody>
@@ -12833,7 +13956,7 @@
         </p:nvSpPr>
         <p:spPr>
           <a:xfrm>
-            <a:off x="5303520" y="4224527"/>
+            <a:off x="5303520" y="5690808"/>
             <a:ext cx="6583680" cy="365760"/>
           </a:xfrm>
           <a:prstGeom prst="rect">
@@ -12855,7 +13978,7 @@
                 </a:solidFill>
                 <a:latin typeface="Yu Gothic"/>
               </a:rPr>
-              <a:t>招待メールのアドレス</a:t>
+              <a:t>をタップ</a:t>
             </a:r>
           </a:p>
         </p:txBody>
@@ -12868,18 +13991,20 @@
         </p:nvSpPr>
         <p:spPr>
           <a:xfrm>
-            <a:off x="1198313" y="4594604"/>
-            <a:ext cx="2121693" cy="266614"/>
+            <a:off x="4663440" y="1828800"/>
+            <a:ext cx="6949440" cy="1188720"/>
           </a:xfrm>
           <a:prstGeom prst="roundRect">
             <a:avLst>
-              <a:gd name="adj" fmla="val 12000"/>
+              <a:gd name="adj" fmla="val 8000"/>
             </a:avLst>
           </a:prstGeom>
-          <a:noFill/>
-          <a:ln w="38100">
+          <a:solidFill>
+            <a:srgbClr val="E8F1FB"/>
+          </a:solidFill>
+          <a:ln w="12700">
             <a:solidFill>
-              <a:srgbClr val="D32F2F"/>
+              <a:srgbClr val="126EC9"/>
             </a:solidFill>
           </a:ln>
           <a:effectLst/>
@@ -12906,106 +14031,16 @@
           </a:p>
         </p:txBody>
       </p:sp>
-      <p:cxnSp>
-        <p:nvCxnSpPr>
-          <p:cNvPr id="12" name="Connector 11"/>
-          <p:cNvCxnSpPr/>
-          <p:nvPr/>
-        </p:nvCxnSpPr>
-        <p:spPr>
-          <a:xfrm>
-            <a:off x="3320006" y="4727912"/>
-            <a:ext cx="1389154" cy="209847"/>
-          </a:xfrm>
-          <a:prstGeom prst="line">
-            <a:avLst/>
-          </a:prstGeom>
-          <a:ln w="22225">
-            <a:solidFill>
-              <a:srgbClr val="D32F2F"/>
-            </a:solidFill>
-          </a:ln>
-        </p:spPr>
-        <p:style>
-          <a:lnRef idx="2">
-            <a:schemeClr val="accent1"/>
-          </a:lnRef>
-          <a:fillRef idx="0">
-            <a:schemeClr val="accent1"/>
-          </a:fillRef>
-          <a:effectRef idx="1">
-            <a:schemeClr val="accent1"/>
-          </a:effectRef>
-          <a:fontRef idx="minor">
-            <a:schemeClr val="tx1"/>
-          </a:fontRef>
-        </p:style>
-      </p:cxnSp>
-      <p:sp>
-        <p:nvSpPr>
-          <p:cNvPr id="13" name="Oval 12"/>
-          <p:cNvSpPr/>
-          <p:nvPr/>
-        </p:nvSpPr>
-        <p:spPr>
-          <a:xfrm>
-            <a:off x="4745736" y="4745736"/>
-            <a:ext cx="384048" cy="384048"/>
-          </a:xfrm>
-          <a:prstGeom prst="ellipse">
-            <a:avLst/>
-          </a:prstGeom>
-          <a:solidFill>
-            <a:srgbClr val="D32F2F"/>
-          </a:solidFill>
-          <a:ln w="19050">
-            <a:solidFill>
-              <a:srgbClr val="FFFFFF"/>
-            </a:solidFill>
-          </a:ln>
-          <a:effectLst/>
-        </p:spPr>
-        <p:style>
-          <a:lnRef idx="1">
-            <a:schemeClr val="accent1"/>
-          </a:lnRef>
-          <a:fillRef idx="3">
-            <a:schemeClr val="accent1"/>
-          </a:fillRef>
-          <a:effectRef idx="2">
-            <a:schemeClr val="accent1"/>
-          </a:effectRef>
-          <a:fontRef idx="minor">
-            <a:schemeClr val="lt1"/>
-          </a:fontRef>
-        </p:style>
-        <p:txBody>
-          <a:bodyPr rtlCol="0" anchor="ctr" lIns="0" rIns="0" tIns="0" bIns="0"/>
-          <a:lstStyle/>
-          <a:p>
-            <a:pPr algn="ctr"/>
-            <a:r>
-              <a:rPr sz="1400" b="1">
-                <a:solidFill>
-                  <a:srgbClr val="FFFFFF"/>
-                </a:solidFill>
-                <a:latin typeface="Yu Gothic"/>
-              </a:rPr>
-              <a:t>2</a:t>
-            </a:r>
-          </a:p>
-        </p:txBody>
-      </p:sp>
-      <p:sp>
-        <p:nvSpPr>
-          <p:cNvPr id="14" name="TextBox 13"/>
-          <p:cNvSpPr txBox="1"/>
-          <p:nvPr/>
-        </p:nvSpPr>
-        <p:spPr>
-          <a:xfrm>
-            <a:off x="5303520" y="4663440"/>
-            <a:ext cx="6583680" cy="411480"/>
+      <p:sp>
+        <p:nvSpPr>
+          <p:cNvPr id="12" name="TextBox 11"/>
+          <p:cNvSpPr txBox="1"/>
+          <p:nvPr/>
+        </p:nvSpPr>
+        <p:spPr>
+          <a:xfrm>
+            <a:off x="4846320" y="1828800"/>
+            <a:ext cx="6675120" cy="1188720"/>
           </a:xfrm>
           <a:prstGeom prst="rect">
             <a:avLst/>
@@ -13020,254 +14055,25 @@
           <a:p>
             <a:pPr algn="l"/>
             <a:r>
-              <a:rPr sz="2000" b="1">
+              <a:rPr sz="1700" b="1">
                 <a:solidFill>
                   <a:srgbClr val="333333"/>
                 </a:solidFill>
                 <a:latin typeface="Yu Gothic"/>
               </a:rPr>
-              <a:t>パスワード</a:t>
-            </a:r>
-          </a:p>
-        </p:txBody>
-      </p:sp>
-      <p:sp>
-        <p:nvSpPr>
-          <p:cNvPr id="15" name="TextBox 14"/>
-          <p:cNvSpPr txBox="1"/>
-          <p:nvPr/>
-        </p:nvSpPr>
-        <p:spPr>
-          <a:xfrm>
-            <a:off x="5303520" y="5047488"/>
-            <a:ext cx="6583680" cy="365760"/>
-          </a:xfrm>
-          <a:prstGeom prst="rect">
-            <a:avLst/>
-          </a:prstGeom>
-          <a:noFill/>
-        </p:spPr>
-        <p:txBody>
-          <a:bodyPr wrap="square" lIns="45720" rIns="45720" tIns="22860" bIns="22860" anchor="t">
-            <a:spAutoFit/>
-          </a:bodyPr>
-          <a:lstStyle/>
+              <a:t>アカウント作成のあとにアプリを取得</a:t>
+            </a:r>
+          </a:p>
           <a:p>
             <a:pPr algn="l"/>
             <a:r>
-              <a:rPr sz="1400" b="0">
-                <a:solidFill>
-                  <a:srgbClr val="666666"/>
-                </a:solidFill>
-                <a:latin typeface="Yu Gothic"/>
-              </a:rPr>
-              <a:t>④-1で決めたパスワード</a:t>
-            </a:r>
-          </a:p>
-        </p:txBody>
-      </p:sp>
-      <p:sp>
-        <p:nvSpPr>
-          <p:cNvPr id="16" name="Rounded Rectangle 15"/>
-          <p:cNvSpPr/>
-          <p:nvPr/>
-        </p:nvSpPr>
-        <p:spPr>
-          <a:xfrm>
-            <a:off x="1209538" y="5332707"/>
-            <a:ext cx="2099241" cy="269421"/>
-          </a:xfrm>
-          <a:prstGeom prst="roundRect">
-            <a:avLst>
-              <a:gd name="adj" fmla="val 12000"/>
-            </a:avLst>
-          </a:prstGeom>
-          <a:noFill/>
-          <a:ln w="38100">
-            <a:solidFill>
-              <a:srgbClr val="D32F2F"/>
-            </a:solidFill>
-          </a:ln>
-          <a:effectLst/>
-        </p:spPr>
-        <p:style>
-          <a:lnRef idx="1">
-            <a:schemeClr val="accent1"/>
-          </a:lnRef>
-          <a:fillRef idx="3">
-            <a:schemeClr val="accent1"/>
-          </a:fillRef>
-          <a:effectRef idx="2">
-            <a:schemeClr val="accent1"/>
-          </a:effectRef>
-          <a:fontRef idx="minor">
-            <a:schemeClr val="lt1"/>
-          </a:fontRef>
-        </p:style>
-        <p:txBody>
-          <a:bodyPr rtlCol="0" anchor="ctr"/>
-          <a:lstStyle/>
-          <a:p>
-            <a:pPr algn="ctr"/>
-          </a:p>
-        </p:txBody>
-      </p:sp>
-      <p:cxnSp>
-        <p:nvCxnSpPr>
-          <p:cNvPr id="17" name="Connector 16"/>
-          <p:cNvCxnSpPr/>
-          <p:nvPr/>
-        </p:nvCxnSpPr>
-        <p:spPr>
-          <a:xfrm>
-            <a:off x="3308780" y="5467418"/>
-            <a:ext cx="1400380" cy="293302"/>
-          </a:xfrm>
-          <a:prstGeom prst="line">
-            <a:avLst/>
-          </a:prstGeom>
-          <a:ln w="22225">
-            <a:solidFill>
-              <a:srgbClr val="D32F2F"/>
-            </a:solidFill>
-          </a:ln>
-        </p:spPr>
-        <p:style>
-          <a:lnRef idx="2">
-            <a:schemeClr val="accent1"/>
-          </a:lnRef>
-          <a:fillRef idx="0">
-            <a:schemeClr val="accent1"/>
-          </a:fillRef>
-          <a:effectRef idx="1">
-            <a:schemeClr val="accent1"/>
-          </a:effectRef>
-          <a:fontRef idx="minor">
-            <a:schemeClr val="tx1"/>
-          </a:fontRef>
-        </p:style>
-      </p:cxnSp>
-      <p:sp>
-        <p:nvSpPr>
-          <p:cNvPr id="18" name="Oval 17"/>
-          <p:cNvSpPr/>
-          <p:nvPr/>
-        </p:nvSpPr>
-        <p:spPr>
-          <a:xfrm>
-            <a:off x="4745736" y="5568696"/>
-            <a:ext cx="384048" cy="384048"/>
-          </a:xfrm>
-          <a:prstGeom prst="ellipse">
-            <a:avLst/>
-          </a:prstGeom>
-          <a:solidFill>
-            <a:srgbClr val="D32F2F"/>
-          </a:solidFill>
-          <a:ln w="19050">
-            <a:solidFill>
-              <a:srgbClr val="FFFFFF"/>
-            </a:solidFill>
-          </a:ln>
-          <a:effectLst/>
-        </p:spPr>
-        <p:style>
-          <a:lnRef idx="1">
-            <a:schemeClr val="accent1"/>
-          </a:lnRef>
-          <a:fillRef idx="3">
-            <a:schemeClr val="accent1"/>
-          </a:fillRef>
-          <a:effectRef idx="2">
-            <a:schemeClr val="accent1"/>
-          </a:effectRef>
-          <a:fontRef idx="minor">
-            <a:schemeClr val="lt1"/>
-          </a:fontRef>
-        </p:style>
-        <p:txBody>
-          <a:bodyPr rtlCol="0" anchor="ctr" lIns="0" rIns="0" tIns="0" bIns="0"/>
-          <a:lstStyle/>
-          <a:p>
-            <a:pPr algn="ctr"/>
-            <a:r>
-              <a:rPr sz="1400" b="1">
-                <a:solidFill>
-                  <a:srgbClr val="FFFFFF"/>
-                </a:solidFill>
-                <a:latin typeface="Yu Gothic"/>
-              </a:rPr>
-              <a:t>3</a:t>
-            </a:r>
-          </a:p>
-        </p:txBody>
-      </p:sp>
-      <p:sp>
-        <p:nvSpPr>
-          <p:cNvPr id="19" name="TextBox 18"/>
-          <p:cNvSpPr txBox="1"/>
-          <p:nvPr/>
-        </p:nvSpPr>
-        <p:spPr>
-          <a:xfrm>
-            <a:off x="5303520" y="5486400"/>
-            <a:ext cx="6583680" cy="411480"/>
-          </a:xfrm>
-          <a:prstGeom prst="rect">
-            <a:avLst/>
-          </a:prstGeom>
-          <a:noFill/>
-        </p:spPr>
-        <p:txBody>
-          <a:bodyPr wrap="square" lIns="45720" rIns="45720" tIns="22860" bIns="22860" anchor="ctr">
-            <a:spAutoFit/>
-          </a:bodyPr>
-          <a:lstStyle/>
-          <a:p>
-            <a:pPr algn="l"/>
-            <a:r>
-              <a:rPr sz="2000" b="1">
+              <a:rPr sz="1700" b="1">
                 <a:solidFill>
                   <a:srgbClr val="333333"/>
                 </a:solidFill>
                 <a:latin typeface="Yu Gothic"/>
               </a:rPr>
-              <a:t>「サインイン」</a:t>
-            </a:r>
-          </a:p>
-        </p:txBody>
-      </p:sp>
-      <p:sp>
-        <p:nvSpPr>
-          <p:cNvPr id="20" name="TextBox 19"/>
-          <p:cNvSpPr txBox="1"/>
-          <p:nvPr/>
-        </p:nvSpPr>
-        <p:spPr>
-          <a:xfrm>
-            <a:off x="5303520" y="5870448"/>
-            <a:ext cx="6583680" cy="365760"/>
-          </a:xfrm>
-          <a:prstGeom prst="rect">
-            <a:avLst/>
-          </a:prstGeom>
-          <a:noFill/>
-        </p:spPr>
-        <p:txBody>
-          <a:bodyPr wrap="square" lIns="45720" rIns="45720" tIns="22860" bIns="22860" anchor="t">
-            <a:spAutoFit/>
-          </a:bodyPr>
-          <a:lstStyle/>
-          <a:p>
-            <a:pPr algn="l"/>
-            <a:r>
-              <a:rPr sz="1400" b="0">
-                <a:solidFill>
-                  <a:srgbClr val="666666"/>
-                </a:solidFill>
-                <a:latin typeface="Yu Gothic"/>
-              </a:rPr>
-              <a:t>をタップ</a:t>
+              <a:t>アプリを開くと、この画面</a:t>
             </a:r>
           </a:p>
         </p:txBody>
@@ -13366,6 +14172,787 @@
                 </a:solidFill>
                 <a:latin typeface="Yu Gothic"/>
               </a:rPr>
+              <a:t>④-3</a:t>
+            </a:r>
+          </a:p>
+        </p:txBody>
+      </p:sp>
+      <p:sp>
+        <p:nvSpPr>
+          <p:cNvPr id="4" name="TextBox 3"/>
+          <p:cNvSpPr txBox="1"/>
+          <p:nvPr/>
+        </p:nvSpPr>
+        <p:spPr>
+          <a:xfrm>
+            <a:off x="1078992" y="777240"/>
+            <a:ext cx="10607040" cy="384048"/>
+          </a:xfrm>
+          <a:prstGeom prst="rect">
+            <a:avLst/>
+          </a:prstGeom>
+          <a:noFill/>
+        </p:spPr>
+        <p:txBody>
+          <a:bodyPr wrap="square" lIns="45720" rIns="45720" tIns="22860" bIns="22860" anchor="ctr">
+            <a:spAutoFit/>
+          </a:bodyPr>
+          <a:lstStyle/>
+          <a:p>
+            <a:pPr algn="l"/>
+            <a:r>
+              <a:rPr sz="2000" b="1">
+                <a:solidFill>
+                  <a:srgbClr val="333333"/>
+                </a:solidFill>
+                <a:latin typeface="Yu Gothic"/>
+              </a:rPr>
+              <a:t>サインイン</a:t>
+            </a:r>
+          </a:p>
+        </p:txBody>
+      </p:sp>
+      <p:pic>
+        <p:nvPicPr>
+          <p:cNvPr id="5" name="Picture 4" descr="3.jpg"/>
+          <p:cNvPicPr>
+            <a:picLocks noChangeAspect="1"/>
+          </p:cNvPicPr>
+          <p:nvPr/>
+        </p:nvPicPr>
+        <p:blipFill>
+          <a:blip r:embed="rId2"/>
+          <a:stretch>
+            <a:fillRect/>
+          </a:stretch>
+        </p:blipFill>
+        <p:spPr>
+          <a:xfrm>
+            <a:off x="1097280" y="1280160"/>
+            <a:ext cx="2323759" cy="5029200"/>
+          </a:xfrm>
+          <a:prstGeom prst="rect">
+            <a:avLst/>
+          </a:prstGeom>
+          <a:ln w="12700">
+            <a:solidFill>
+              <a:srgbClr val="BBBBBB"/>
+            </a:solidFill>
+          </a:ln>
+        </p:spPr>
+      </p:pic>
+      <p:sp>
+        <p:nvSpPr>
+          <p:cNvPr id="6" name="Rounded Rectangle 5"/>
+          <p:cNvSpPr/>
+          <p:nvPr/>
+        </p:nvSpPr>
+        <p:spPr>
+          <a:xfrm>
+            <a:off x="1198313" y="4277473"/>
+            <a:ext cx="2121693" cy="269421"/>
+          </a:xfrm>
+          <a:prstGeom prst="roundRect">
+            <a:avLst>
+              <a:gd name="adj" fmla="val 12000"/>
+            </a:avLst>
+          </a:prstGeom>
+          <a:noFill/>
+          <a:ln w="38100">
+            <a:solidFill>
+              <a:srgbClr val="D32F2F"/>
+            </a:solidFill>
+          </a:ln>
+          <a:effectLst/>
+        </p:spPr>
+        <p:style>
+          <a:lnRef idx="1">
+            <a:schemeClr val="accent1"/>
+          </a:lnRef>
+          <a:fillRef idx="3">
+            <a:schemeClr val="accent1"/>
+          </a:fillRef>
+          <a:effectRef idx="2">
+            <a:schemeClr val="accent1"/>
+          </a:effectRef>
+          <a:fontRef idx="minor">
+            <a:schemeClr val="lt1"/>
+          </a:fontRef>
+        </p:style>
+        <p:txBody>
+          <a:bodyPr rtlCol="0" anchor="ctr"/>
+          <a:lstStyle/>
+          <a:p>
+            <a:pPr algn="ctr"/>
+          </a:p>
+        </p:txBody>
+      </p:sp>
+      <p:cxnSp>
+        <p:nvCxnSpPr>
+          <p:cNvPr id="7" name="Connector 6"/>
+          <p:cNvCxnSpPr/>
+          <p:nvPr/>
+        </p:nvCxnSpPr>
+        <p:spPr>
+          <a:xfrm flipV="1">
+            <a:off x="3320006" y="4114799"/>
+            <a:ext cx="1389154" cy="297385"/>
+          </a:xfrm>
+          <a:prstGeom prst="line">
+            <a:avLst/>
+          </a:prstGeom>
+          <a:ln w="22225">
+            <a:solidFill>
+              <a:srgbClr val="D32F2F"/>
+            </a:solidFill>
+          </a:ln>
+        </p:spPr>
+        <p:style>
+          <a:lnRef idx="2">
+            <a:schemeClr val="accent1"/>
+          </a:lnRef>
+          <a:fillRef idx="0">
+            <a:schemeClr val="accent1"/>
+          </a:fillRef>
+          <a:effectRef idx="1">
+            <a:schemeClr val="accent1"/>
+          </a:effectRef>
+          <a:fontRef idx="minor">
+            <a:schemeClr val="tx1"/>
+          </a:fontRef>
+        </p:style>
+      </p:cxnSp>
+      <p:sp>
+        <p:nvSpPr>
+          <p:cNvPr id="8" name="Oval 7"/>
+          <p:cNvSpPr/>
+          <p:nvPr/>
+        </p:nvSpPr>
+        <p:spPr>
+          <a:xfrm>
+            <a:off x="4745736" y="3922775"/>
+            <a:ext cx="384048" cy="384048"/>
+          </a:xfrm>
+          <a:prstGeom prst="ellipse">
+            <a:avLst/>
+          </a:prstGeom>
+          <a:solidFill>
+            <a:srgbClr val="D32F2F"/>
+          </a:solidFill>
+          <a:ln w="19050">
+            <a:solidFill>
+              <a:srgbClr val="FFFFFF"/>
+            </a:solidFill>
+          </a:ln>
+          <a:effectLst/>
+        </p:spPr>
+        <p:style>
+          <a:lnRef idx="1">
+            <a:schemeClr val="accent1"/>
+          </a:lnRef>
+          <a:fillRef idx="3">
+            <a:schemeClr val="accent1"/>
+          </a:fillRef>
+          <a:effectRef idx="2">
+            <a:schemeClr val="accent1"/>
+          </a:effectRef>
+          <a:fontRef idx="minor">
+            <a:schemeClr val="lt1"/>
+          </a:fontRef>
+        </p:style>
+        <p:txBody>
+          <a:bodyPr rtlCol="0" anchor="ctr" lIns="0" rIns="0" tIns="0" bIns="0"/>
+          <a:lstStyle/>
+          <a:p>
+            <a:pPr algn="ctr"/>
+            <a:r>
+              <a:rPr sz="1400" b="1">
+                <a:solidFill>
+                  <a:srgbClr val="FFFFFF"/>
+                </a:solidFill>
+                <a:latin typeface="Yu Gothic"/>
+              </a:rPr>
+              <a:t>1</a:t>
+            </a:r>
+          </a:p>
+        </p:txBody>
+      </p:sp>
+      <p:sp>
+        <p:nvSpPr>
+          <p:cNvPr id="9" name="TextBox 8"/>
+          <p:cNvSpPr txBox="1"/>
+          <p:nvPr/>
+        </p:nvSpPr>
+        <p:spPr>
+          <a:xfrm>
+            <a:off x="5303520" y="3840479"/>
+            <a:ext cx="6583680" cy="411480"/>
+          </a:xfrm>
+          <a:prstGeom prst="rect">
+            <a:avLst/>
+          </a:prstGeom>
+          <a:noFill/>
+        </p:spPr>
+        <p:txBody>
+          <a:bodyPr wrap="square" lIns="45720" rIns="45720" tIns="22860" bIns="22860" anchor="ctr">
+            <a:spAutoFit/>
+          </a:bodyPr>
+          <a:lstStyle/>
+          <a:p>
+            <a:pPr algn="l"/>
+            <a:r>
+              <a:rPr sz="2000" b="1">
+                <a:solidFill>
+                  <a:srgbClr val="333333"/>
+                </a:solidFill>
+                <a:latin typeface="Yu Gothic"/>
+              </a:rPr>
+              <a:t>メールアドレス</a:t>
+            </a:r>
+          </a:p>
+        </p:txBody>
+      </p:sp>
+      <p:sp>
+        <p:nvSpPr>
+          <p:cNvPr id="10" name="TextBox 9"/>
+          <p:cNvSpPr txBox="1"/>
+          <p:nvPr/>
+        </p:nvSpPr>
+        <p:spPr>
+          <a:xfrm>
+            <a:off x="5303520" y="4224527"/>
+            <a:ext cx="6583680" cy="365760"/>
+          </a:xfrm>
+          <a:prstGeom prst="rect">
+            <a:avLst/>
+          </a:prstGeom>
+          <a:noFill/>
+        </p:spPr>
+        <p:txBody>
+          <a:bodyPr wrap="square" lIns="45720" rIns="45720" tIns="22860" bIns="22860" anchor="t">
+            <a:spAutoFit/>
+          </a:bodyPr>
+          <a:lstStyle/>
+          <a:p>
+            <a:pPr algn="l"/>
+            <a:r>
+              <a:rPr sz="1400" b="0">
+                <a:solidFill>
+                  <a:srgbClr val="666666"/>
+                </a:solidFill>
+                <a:latin typeface="Yu Gothic"/>
+              </a:rPr>
+              <a:t>招待メールのアドレス</a:t>
+            </a:r>
+          </a:p>
+        </p:txBody>
+      </p:sp>
+      <p:sp>
+        <p:nvSpPr>
+          <p:cNvPr id="11" name="Rounded Rectangle 10"/>
+          <p:cNvSpPr/>
+          <p:nvPr/>
+        </p:nvSpPr>
+        <p:spPr>
+          <a:xfrm>
+            <a:off x="1198313" y="4594604"/>
+            <a:ext cx="2121693" cy="266614"/>
+          </a:xfrm>
+          <a:prstGeom prst="roundRect">
+            <a:avLst>
+              <a:gd name="adj" fmla="val 12000"/>
+            </a:avLst>
+          </a:prstGeom>
+          <a:noFill/>
+          <a:ln w="38100">
+            <a:solidFill>
+              <a:srgbClr val="D32F2F"/>
+            </a:solidFill>
+          </a:ln>
+          <a:effectLst/>
+        </p:spPr>
+        <p:style>
+          <a:lnRef idx="1">
+            <a:schemeClr val="accent1"/>
+          </a:lnRef>
+          <a:fillRef idx="3">
+            <a:schemeClr val="accent1"/>
+          </a:fillRef>
+          <a:effectRef idx="2">
+            <a:schemeClr val="accent1"/>
+          </a:effectRef>
+          <a:fontRef idx="minor">
+            <a:schemeClr val="lt1"/>
+          </a:fontRef>
+        </p:style>
+        <p:txBody>
+          <a:bodyPr rtlCol="0" anchor="ctr"/>
+          <a:lstStyle/>
+          <a:p>
+            <a:pPr algn="ctr"/>
+          </a:p>
+        </p:txBody>
+      </p:sp>
+      <p:cxnSp>
+        <p:nvCxnSpPr>
+          <p:cNvPr id="12" name="Connector 11"/>
+          <p:cNvCxnSpPr/>
+          <p:nvPr/>
+        </p:nvCxnSpPr>
+        <p:spPr>
+          <a:xfrm>
+            <a:off x="3320006" y="4727912"/>
+            <a:ext cx="1389154" cy="209847"/>
+          </a:xfrm>
+          <a:prstGeom prst="line">
+            <a:avLst/>
+          </a:prstGeom>
+          <a:ln w="22225">
+            <a:solidFill>
+              <a:srgbClr val="D32F2F"/>
+            </a:solidFill>
+          </a:ln>
+        </p:spPr>
+        <p:style>
+          <a:lnRef idx="2">
+            <a:schemeClr val="accent1"/>
+          </a:lnRef>
+          <a:fillRef idx="0">
+            <a:schemeClr val="accent1"/>
+          </a:fillRef>
+          <a:effectRef idx="1">
+            <a:schemeClr val="accent1"/>
+          </a:effectRef>
+          <a:fontRef idx="minor">
+            <a:schemeClr val="tx1"/>
+          </a:fontRef>
+        </p:style>
+      </p:cxnSp>
+      <p:sp>
+        <p:nvSpPr>
+          <p:cNvPr id="13" name="Oval 12"/>
+          <p:cNvSpPr/>
+          <p:nvPr/>
+        </p:nvSpPr>
+        <p:spPr>
+          <a:xfrm>
+            <a:off x="4745736" y="4745736"/>
+            <a:ext cx="384048" cy="384048"/>
+          </a:xfrm>
+          <a:prstGeom prst="ellipse">
+            <a:avLst/>
+          </a:prstGeom>
+          <a:solidFill>
+            <a:srgbClr val="D32F2F"/>
+          </a:solidFill>
+          <a:ln w="19050">
+            <a:solidFill>
+              <a:srgbClr val="FFFFFF"/>
+            </a:solidFill>
+          </a:ln>
+          <a:effectLst/>
+        </p:spPr>
+        <p:style>
+          <a:lnRef idx="1">
+            <a:schemeClr val="accent1"/>
+          </a:lnRef>
+          <a:fillRef idx="3">
+            <a:schemeClr val="accent1"/>
+          </a:fillRef>
+          <a:effectRef idx="2">
+            <a:schemeClr val="accent1"/>
+          </a:effectRef>
+          <a:fontRef idx="minor">
+            <a:schemeClr val="lt1"/>
+          </a:fontRef>
+        </p:style>
+        <p:txBody>
+          <a:bodyPr rtlCol="0" anchor="ctr" lIns="0" rIns="0" tIns="0" bIns="0"/>
+          <a:lstStyle/>
+          <a:p>
+            <a:pPr algn="ctr"/>
+            <a:r>
+              <a:rPr sz="1400" b="1">
+                <a:solidFill>
+                  <a:srgbClr val="FFFFFF"/>
+                </a:solidFill>
+                <a:latin typeface="Yu Gothic"/>
+              </a:rPr>
+              <a:t>2</a:t>
+            </a:r>
+          </a:p>
+        </p:txBody>
+      </p:sp>
+      <p:sp>
+        <p:nvSpPr>
+          <p:cNvPr id="14" name="TextBox 13"/>
+          <p:cNvSpPr txBox="1"/>
+          <p:nvPr/>
+        </p:nvSpPr>
+        <p:spPr>
+          <a:xfrm>
+            <a:off x="5303520" y="4663440"/>
+            <a:ext cx="6583680" cy="411480"/>
+          </a:xfrm>
+          <a:prstGeom prst="rect">
+            <a:avLst/>
+          </a:prstGeom>
+          <a:noFill/>
+        </p:spPr>
+        <p:txBody>
+          <a:bodyPr wrap="square" lIns="45720" rIns="45720" tIns="22860" bIns="22860" anchor="ctr">
+            <a:spAutoFit/>
+          </a:bodyPr>
+          <a:lstStyle/>
+          <a:p>
+            <a:pPr algn="l"/>
+            <a:r>
+              <a:rPr sz="2000" b="1">
+                <a:solidFill>
+                  <a:srgbClr val="333333"/>
+                </a:solidFill>
+                <a:latin typeface="Yu Gothic"/>
+              </a:rPr>
+              <a:t>パスワード</a:t>
+            </a:r>
+          </a:p>
+        </p:txBody>
+      </p:sp>
+      <p:sp>
+        <p:nvSpPr>
+          <p:cNvPr id="15" name="TextBox 14"/>
+          <p:cNvSpPr txBox="1"/>
+          <p:nvPr/>
+        </p:nvSpPr>
+        <p:spPr>
+          <a:xfrm>
+            <a:off x="5303520" y="5047488"/>
+            <a:ext cx="6583680" cy="365760"/>
+          </a:xfrm>
+          <a:prstGeom prst="rect">
+            <a:avLst/>
+          </a:prstGeom>
+          <a:noFill/>
+        </p:spPr>
+        <p:txBody>
+          <a:bodyPr wrap="square" lIns="45720" rIns="45720" tIns="22860" bIns="22860" anchor="t">
+            <a:spAutoFit/>
+          </a:bodyPr>
+          <a:lstStyle/>
+          <a:p>
+            <a:pPr algn="l"/>
+            <a:r>
+              <a:rPr sz="1400" b="0">
+                <a:solidFill>
+                  <a:srgbClr val="666666"/>
+                </a:solidFill>
+                <a:latin typeface="Yu Gothic"/>
+              </a:rPr>
+              <a:t>④-1で決めたパスワード</a:t>
+            </a:r>
+          </a:p>
+        </p:txBody>
+      </p:sp>
+      <p:sp>
+        <p:nvSpPr>
+          <p:cNvPr id="16" name="Rounded Rectangle 15"/>
+          <p:cNvSpPr/>
+          <p:nvPr/>
+        </p:nvSpPr>
+        <p:spPr>
+          <a:xfrm>
+            <a:off x="1209538" y="5332707"/>
+            <a:ext cx="2099241" cy="269421"/>
+          </a:xfrm>
+          <a:prstGeom prst="roundRect">
+            <a:avLst>
+              <a:gd name="adj" fmla="val 12000"/>
+            </a:avLst>
+          </a:prstGeom>
+          <a:noFill/>
+          <a:ln w="38100">
+            <a:solidFill>
+              <a:srgbClr val="D32F2F"/>
+            </a:solidFill>
+          </a:ln>
+          <a:effectLst/>
+        </p:spPr>
+        <p:style>
+          <a:lnRef idx="1">
+            <a:schemeClr val="accent1"/>
+          </a:lnRef>
+          <a:fillRef idx="3">
+            <a:schemeClr val="accent1"/>
+          </a:fillRef>
+          <a:effectRef idx="2">
+            <a:schemeClr val="accent1"/>
+          </a:effectRef>
+          <a:fontRef idx="minor">
+            <a:schemeClr val="lt1"/>
+          </a:fontRef>
+        </p:style>
+        <p:txBody>
+          <a:bodyPr rtlCol="0" anchor="ctr"/>
+          <a:lstStyle/>
+          <a:p>
+            <a:pPr algn="ctr"/>
+          </a:p>
+        </p:txBody>
+      </p:sp>
+      <p:cxnSp>
+        <p:nvCxnSpPr>
+          <p:cNvPr id="17" name="Connector 16"/>
+          <p:cNvCxnSpPr/>
+          <p:nvPr/>
+        </p:nvCxnSpPr>
+        <p:spPr>
+          <a:xfrm>
+            <a:off x="3308780" y="5467418"/>
+            <a:ext cx="1400380" cy="293302"/>
+          </a:xfrm>
+          <a:prstGeom prst="line">
+            <a:avLst/>
+          </a:prstGeom>
+          <a:ln w="22225">
+            <a:solidFill>
+              <a:srgbClr val="D32F2F"/>
+            </a:solidFill>
+          </a:ln>
+        </p:spPr>
+        <p:style>
+          <a:lnRef idx="2">
+            <a:schemeClr val="accent1"/>
+          </a:lnRef>
+          <a:fillRef idx="0">
+            <a:schemeClr val="accent1"/>
+          </a:fillRef>
+          <a:effectRef idx="1">
+            <a:schemeClr val="accent1"/>
+          </a:effectRef>
+          <a:fontRef idx="minor">
+            <a:schemeClr val="tx1"/>
+          </a:fontRef>
+        </p:style>
+      </p:cxnSp>
+      <p:sp>
+        <p:nvSpPr>
+          <p:cNvPr id="18" name="Oval 17"/>
+          <p:cNvSpPr/>
+          <p:nvPr/>
+        </p:nvSpPr>
+        <p:spPr>
+          <a:xfrm>
+            <a:off x="4745736" y="5568696"/>
+            <a:ext cx="384048" cy="384048"/>
+          </a:xfrm>
+          <a:prstGeom prst="ellipse">
+            <a:avLst/>
+          </a:prstGeom>
+          <a:solidFill>
+            <a:srgbClr val="D32F2F"/>
+          </a:solidFill>
+          <a:ln w="19050">
+            <a:solidFill>
+              <a:srgbClr val="FFFFFF"/>
+            </a:solidFill>
+          </a:ln>
+          <a:effectLst/>
+        </p:spPr>
+        <p:style>
+          <a:lnRef idx="1">
+            <a:schemeClr val="accent1"/>
+          </a:lnRef>
+          <a:fillRef idx="3">
+            <a:schemeClr val="accent1"/>
+          </a:fillRef>
+          <a:effectRef idx="2">
+            <a:schemeClr val="accent1"/>
+          </a:effectRef>
+          <a:fontRef idx="minor">
+            <a:schemeClr val="lt1"/>
+          </a:fontRef>
+        </p:style>
+        <p:txBody>
+          <a:bodyPr rtlCol="0" anchor="ctr" lIns="0" rIns="0" tIns="0" bIns="0"/>
+          <a:lstStyle/>
+          <a:p>
+            <a:pPr algn="ctr"/>
+            <a:r>
+              <a:rPr sz="1400" b="1">
+                <a:solidFill>
+                  <a:srgbClr val="FFFFFF"/>
+                </a:solidFill>
+                <a:latin typeface="Yu Gothic"/>
+              </a:rPr>
+              <a:t>3</a:t>
+            </a:r>
+          </a:p>
+        </p:txBody>
+      </p:sp>
+      <p:sp>
+        <p:nvSpPr>
+          <p:cNvPr id="19" name="TextBox 18"/>
+          <p:cNvSpPr txBox="1"/>
+          <p:nvPr/>
+        </p:nvSpPr>
+        <p:spPr>
+          <a:xfrm>
+            <a:off x="5303520" y="5486400"/>
+            <a:ext cx="6583680" cy="411480"/>
+          </a:xfrm>
+          <a:prstGeom prst="rect">
+            <a:avLst/>
+          </a:prstGeom>
+          <a:noFill/>
+        </p:spPr>
+        <p:txBody>
+          <a:bodyPr wrap="square" lIns="45720" rIns="45720" tIns="22860" bIns="22860" anchor="ctr">
+            <a:spAutoFit/>
+          </a:bodyPr>
+          <a:lstStyle/>
+          <a:p>
+            <a:pPr algn="l"/>
+            <a:r>
+              <a:rPr sz="2000" b="1">
+                <a:solidFill>
+                  <a:srgbClr val="333333"/>
+                </a:solidFill>
+                <a:latin typeface="Yu Gothic"/>
+              </a:rPr>
+              <a:t>「サインイン」</a:t>
+            </a:r>
+          </a:p>
+        </p:txBody>
+      </p:sp>
+      <p:sp>
+        <p:nvSpPr>
+          <p:cNvPr id="20" name="TextBox 19"/>
+          <p:cNvSpPr txBox="1"/>
+          <p:nvPr/>
+        </p:nvSpPr>
+        <p:spPr>
+          <a:xfrm>
+            <a:off x="5303520" y="5870448"/>
+            <a:ext cx="6583680" cy="365760"/>
+          </a:xfrm>
+          <a:prstGeom prst="rect">
+            <a:avLst/>
+          </a:prstGeom>
+          <a:noFill/>
+        </p:spPr>
+        <p:txBody>
+          <a:bodyPr wrap="square" lIns="45720" rIns="45720" tIns="22860" bIns="22860" anchor="t">
+            <a:spAutoFit/>
+          </a:bodyPr>
+          <a:lstStyle/>
+          <a:p>
+            <a:pPr algn="l"/>
+            <a:r>
+              <a:rPr sz="1400" b="0">
+                <a:solidFill>
+                  <a:srgbClr val="666666"/>
+                </a:solidFill>
+                <a:latin typeface="Yu Gothic"/>
+              </a:rPr>
+              <a:t>をタップ</a:t>
+            </a:r>
+          </a:p>
+        </p:txBody>
+      </p:sp>
+    </p:spTree>
+  </p:cSld>
+  <p:clrMapOvr>
+    <a:masterClrMapping/>
+  </p:clrMapOvr>
+</p:sld>
+</file>
+
+<file path=ppt/slides/slide25.xml><?xml version="1.0" encoding="utf-8"?>
+<p:sld xmlns:a="http://schemas.openxmlformats.org/drawingml/2006/main" xmlns:p="http://schemas.openxmlformats.org/presentationml/2006/main" xmlns:r="http://schemas.openxmlformats.org/officeDocument/2006/relationships">
+  <p:cSld>
+    <p:spTree>
+      <p:nvGrpSpPr>
+        <p:cNvPr id="1" name=""/>
+        <p:cNvGrpSpPr/>
+        <p:nvPr/>
+      </p:nvGrpSpPr>
+      <p:grpSpPr/>
+      <p:sp>
+        <p:nvSpPr>
+          <p:cNvPr id="2" name="Rounded Rectangle 1"/>
+          <p:cNvSpPr/>
+          <p:nvPr/>
+        </p:nvSpPr>
+        <p:spPr>
+          <a:xfrm>
+            <a:off x="411480" y="777240"/>
+            <a:ext cx="502920" cy="384048"/>
+          </a:xfrm>
+          <a:prstGeom prst="roundRect">
+            <a:avLst>
+              <a:gd name="adj" fmla="val 8000"/>
+            </a:avLst>
+          </a:prstGeom>
+          <a:solidFill>
+            <a:srgbClr val="4FB6BE"/>
+          </a:solidFill>
+          <a:ln>
+            <a:noFill/>
+          </a:ln>
+          <a:effectLst/>
+        </p:spPr>
+        <p:style>
+          <a:lnRef idx="1">
+            <a:schemeClr val="accent1"/>
+          </a:lnRef>
+          <a:fillRef idx="3">
+            <a:schemeClr val="accent1"/>
+          </a:fillRef>
+          <a:effectRef idx="2">
+            <a:schemeClr val="accent1"/>
+          </a:effectRef>
+          <a:fontRef idx="minor">
+            <a:schemeClr val="lt1"/>
+          </a:fontRef>
+        </p:style>
+        <p:txBody>
+          <a:bodyPr rtlCol="0" anchor="ctr"/>
+          <a:lstStyle/>
+          <a:p>
+            <a:pPr algn="ctr"/>
+          </a:p>
+        </p:txBody>
+      </p:sp>
+      <p:sp>
+        <p:nvSpPr>
+          <p:cNvPr id="3" name="TextBox 2"/>
+          <p:cNvSpPr txBox="1"/>
+          <p:nvPr/>
+        </p:nvSpPr>
+        <p:spPr>
+          <a:xfrm>
+            <a:off x="411480" y="777240"/>
+            <a:ext cx="502920" cy="384048"/>
+          </a:xfrm>
+          <a:prstGeom prst="rect">
+            <a:avLst/>
+          </a:prstGeom>
+          <a:noFill/>
+        </p:spPr>
+        <p:txBody>
+          <a:bodyPr wrap="square" lIns="45720" rIns="45720" tIns="22860" bIns="22860" anchor="ctr">
+            <a:spAutoFit/>
+          </a:bodyPr>
+          <a:lstStyle/>
+          <a:p>
+            <a:pPr algn="ctr"/>
+            <a:r>
+              <a:rPr sz="1200" b="1">
+                <a:solidFill>
+                  <a:srgbClr val="FFFFFF"/>
+                </a:solidFill>
+                <a:latin typeface="Yu Gothic"/>
+              </a:rPr>
               <a:t>④-4</a:t>
             </a:r>
           </a:p>
@@ -19102,7 +20689,7 @@
                 </a:solidFill>
                 <a:latin typeface="Yu Gothic"/>
               </a:rPr>
-              <a:t>フリーテキストの</a:t>
+              <a:t>金額の入力はなし</a:t>
             </a:r>
           </a:p>
           <a:p>
@@ -19114,7 +20701,7 @@
                 </a:solidFill>
                 <a:latin typeface="Yu Gothic"/>
               </a:rPr>
-              <a:t>拠点入力部分へ入力</a:t>
+              <a:t>ドライバーの入力は3か所</a:t>
             </a:r>
           </a:p>
         </p:txBody>

--- a/out/登録の流れ_書類準備まで.pptx
+++ b/out/登録の流れ_書類準備まで.pptx
@@ -9445,7 +9445,7 @@
         <p:spPr>
           <a:xfrm>
             <a:off x="457200" y="1920240"/>
-            <a:ext cx="1627632" cy="1737360"/>
+            <a:ext cx="1965960" cy="1737360"/>
           </a:xfrm>
           <a:prstGeom prst="roundRect">
             <a:avLst>
@@ -9491,7 +9491,7 @@
         <p:spPr>
           <a:xfrm>
             <a:off x="457200" y="1920240"/>
-            <a:ext cx="1627632" cy="1737360"/>
+            <a:ext cx="1965960" cy="1737360"/>
           </a:xfrm>
           <a:prstGeom prst="rect">
             <a:avLst/>
@@ -9506,7 +9506,7 @@
           <a:p>
             <a:pPr algn="ctr"/>
             <a:r>
-              <a:rPr sz="1600" b="1">
+              <a:rPr sz="1700" b="1">
                 <a:solidFill>
                   <a:srgbClr val="FFFFFF"/>
                 </a:solidFill>
@@ -9518,7 +9518,7 @@
           <a:p>
             <a:pPr algn="ctr"/>
             <a:r>
-              <a:rPr sz="1600" b="1">
+              <a:rPr sz="1700" b="1">
                 <a:solidFill>
                   <a:srgbClr val="FFFFFF"/>
                 </a:solidFill>
@@ -9530,7 +9530,7 @@
           <a:p>
             <a:pPr algn="ctr"/>
             <a:r>
-              <a:rPr sz="1600" b="1">
+              <a:rPr sz="1700" b="1">
                 <a:solidFill>
                   <a:srgbClr val="FFFFFF"/>
                 </a:solidFill>
@@ -9550,7 +9550,7 @@
         <p:spPr>
           <a:xfrm>
             <a:off x="457200" y="3749039"/>
-            <a:ext cx="1627632" cy="365760"/>
+            <a:ext cx="1965960" cy="365760"/>
           </a:xfrm>
           <a:prstGeom prst="rect">
             <a:avLst/>
@@ -9584,8 +9584,8 @@
         </p:nvSpPr>
         <p:spPr>
           <a:xfrm>
-            <a:off x="2057400" y="2560320"/>
-            <a:ext cx="320040" cy="457200"/>
+            <a:off x="2395728" y="2560320"/>
+            <a:ext cx="365760" cy="457200"/>
           </a:xfrm>
           <a:prstGeom prst="rect">
             <a:avLst/>
@@ -9600,7 +9600,7 @@
           <a:p>
             <a:pPr algn="ctr"/>
             <a:r>
-              <a:rPr sz="1300" b="1">
+              <a:rPr sz="1400" b="1">
                 <a:solidFill>
                   <a:srgbClr val="666666"/>
                 </a:solidFill>
@@ -9619,8 +9619,8 @@
         </p:nvSpPr>
         <p:spPr>
           <a:xfrm>
-            <a:off x="2359152" y="1920240"/>
-            <a:ext cx="1627632" cy="1737360"/>
+            <a:off x="2743200" y="1920240"/>
+            <a:ext cx="1965960" cy="1737360"/>
           </a:xfrm>
           <a:prstGeom prst="roundRect">
             <a:avLst>
@@ -9665,8 +9665,8 @@
         </p:nvSpPr>
         <p:spPr>
           <a:xfrm>
-            <a:off x="2359152" y="1920240"/>
-            <a:ext cx="1627632" cy="1737360"/>
+            <a:off x="2743200" y="1920240"/>
+            <a:ext cx="1965960" cy="1737360"/>
           </a:xfrm>
           <a:prstGeom prst="rect">
             <a:avLst/>
@@ -9681,7 +9681,7 @@
           <a:p>
             <a:pPr algn="ctr"/>
             <a:r>
-              <a:rPr sz="1600" b="1">
+              <a:rPr sz="1700" b="1">
                 <a:solidFill>
                   <a:srgbClr val="FFFFFF"/>
                 </a:solidFill>
@@ -9693,7 +9693,7 @@
           <a:p>
             <a:pPr algn="ctr"/>
             <a:r>
-              <a:rPr sz="1600" b="1">
+              <a:rPr sz="1700" b="1">
                 <a:solidFill>
                   <a:srgbClr val="FFFFFF"/>
                 </a:solidFill>
@@ -9705,7 +9705,7 @@
           <a:p>
             <a:pPr algn="ctr"/>
             <a:r>
-              <a:rPr sz="1600" b="1">
+              <a:rPr sz="1700" b="1">
                 <a:solidFill>
                   <a:srgbClr val="FFFFFF"/>
                 </a:solidFill>
@@ -9724,8 +9724,8 @@
         </p:nvSpPr>
         <p:spPr>
           <a:xfrm>
-            <a:off x="2359152" y="3749039"/>
-            <a:ext cx="1627632" cy="365760"/>
+            <a:off x="2743200" y="3749039"/>
+            <a:ext cx="1965960" cy="365760"/>
           </a:xfrm>
           <a:prstGeom prst="rect">
             <a:avLst/>
@@ -9759,8 +9759,8 @@
         </p:nvSpPr>
         <p:spPr>
           <a:xfrm>
-            <a:off x="3959352" y="2560320"/>
-            <a:ext cx="320040" cy="457200"/>
+            <a:off x="4681728" y="2560320"/>
+            <a:ext cx="365760" cy="457200"/>
           </a:xfrm>
           <a:prstGeom prst="rect">
             <a:avLst/>
@@ -9775,7 +9775,7 @@
           <a:p>
             <a:pPr algn="ctr"/>
             <a:r>
-              <a:rPr sz="1300" b="1">
+              <a:rPr sz="1400" b="1">
                 <a:solidFill>
                   <a:srgbClr val="666666"/>
                 </a:solidFill>
@@ -9794,8 +9794,183 @@
         </p:nvSpPr>
         <p:spPr>
           <a:xfrm>
-            <a:off x="4261104" y="1920240"/>
-            <a:ext cx="1627632" cy="1737360"/>
+            <a:off x="5029200" y="1920240"/>
+            <a:ext cx="1965960" cy="1737360"/>
+          </a:xfrm>
+          <a:prstGeom prst="roundRect">
+            <a:avLst>
+              <a:gd name="adj" fmla="val 10000"/>
+            </a:avLst>
+          </a:prstGeom>
+          <a:solidFill>
+            <a:srgbClr val="4FB6BE"/>
+          </a:solidFill>
+          <a:ln>
+            <a:noFill/>
+          </a:ln>
+          <a:effectLst/>
+        </p:spPr>
+        <p:style>
+          <a:lnRef idx="1">
+            <a:schemeClr val="accent1"/>
+          </a:lnRef>
+          <a:fillRef idx="3">
+            <a:schemeClr val="accent1"/>
+          </a:fillRef>
+          <a:effectRef idx="2">
+            <a:schemeClr val="accent1"/>
+          </a:effectRef>
+          <a:fontRef idx="minor">
+            <a:schemeClr val="lt1"/>
+          </a:fontRef>
+        </p:style>
+        <p:txBody>
+          <a:bodyPr rtlCol="0" anchor="ctr"/>
+          <a:lstStyle/>
+          <a:p>
+            <a:pPr algn="ctr"/>
+          </a:p>
+        </p:txBody>
+      </p:sp>
+      <p:sp>
+        <p:nvSpPr>
+          <p:cNvPr id="14" name="TextBox 13"/>
+          <p:cNvSpPr txBox="1"/>
+          <p:nvPr/>
+        </p:nvSpPr>
+        <p:spPr>
+          <a:xfrm>
+            <a:off x="5029200" y="1920240"/>
+            <a:ext cx="1965960" cy="1737360"/>
+          </a:xfrm>
+          <a:prstGeom prst="rect">
+            <a:avLst/>
+          </a:prstGeom>
+          <a:noFill/>
+        </p:spPr>
+        <p:txBody>
+          <a:bodyPr wrap="square" lIns="45720" rIns="45720" tIns="22860" bIns="22860" anchor="ctr">
+            <a:spAutoFit/>
+          </a:bodyPr>
+          <a:lstStyle/>
+          <a:p>
+            <a:pPr algn="ctr"/>
+            <a:r>
+              <a:rPr sz="1700" b="1">
+                <a:solidFill>
+                  <a:srgbClr val="FFFFFF"/>
+                </a:solidFill>
+                <a:latin typeface="Yu Gothic"/>
+              </a:rPr>
+              <a:t>③</a:t>
+            </a:r>
+          </a:p>
+          <a:p>
+            <a:pPr algn="ctr"/>
+            <a:r>
+              <a:rPr sz="1700" b="1">
+                <a:solidFill>
+                  <a:srgbClr val="FFFFFF"/>
+                </a:solidFill>
+                <a:latin typeface="Yu Gothic"/>
+              </a:rPr>
+              <a:t>Amazon</a:t>
+            </a:r>
+          </a:p>
+          <a:p>
+            <a:pPr algn="ctr"/>
+            <a:r>
+              <a:rPr sz="1700" b="1">
+                <a:solidFill>
+                  <a:srgbClr val="FFFFFF"/>
+                </a:solidFill>
+                <a:latin typeface="Yu Gothic"/>
+              </a:rPr>
+              <a:t>登録</a:t>
+            </a:r>
+          </a:p>
+        </p:txBody>
+      </p:sp>
+      <p:sp>
+        <p:nvSpPr>
+          <p:cNvPr id="15" name="TextBox 14"/>
+          <p:cNvSpPr txBox="1"/>
+          <p:nvPr/>
+        </p:nvSpPr>
+        <p:spPr>
+          <a:xfrm>
+            <a:off x="5029200" y="3749039"/>
+            <a:ext cx="1965960" cy="365760"/>
+          </a:xfrm>
+          <a:prstGeom prst="rect">
+            <a:avLst/>
+          </a:prstGeom>
+          <a:noFill/>
+        </p:spPr>
+        <p:txBody>
+          <a:bodyPr wrap="square" lIns="45720" rIns="45720" tIns="22860" bIns="22860" anchor="t">
+            <a:spAutoFit/>
+          </a:bodyPr>
+          <a:lstStyle/>
+          <a:p>
+            <a:pPr algn="ctr"/>
+            <a:r>
+              <a:rPr sz="1200" b="1">
+                <a:solidFill>
+                  <a:srgbClr val="4FB6BE"/>
+                </a:solidFill>
+                <a:latin typeface="Yu Gothic"/>
+              </a:rPr>
+              <a:t>途中まで</a:t>
+            </a:r>
+          </a:p>
+        </p:txBody>
+      </p:sp>
+      <p:sp>
+        <p:nvSpPr>
+          <p:cNvPr id="16" name="TextBox 15"/>
+          <p:cNvSpPr txBox="1"/>
+          <p:nvPr/>
+        </p:nvSpPr>
+        <p:spPr>
+          <a:xfrm>
+            <a:off x="6967728" y="2560320"/>
+            <a:ext cx="365760" cy="457200"/>
+          </a:xfrm>
+          <a:prstGeom prst="rect">
+            <a:avLst/>
+          </a:prstGeom>
+          <a:noFill/>
+        </p:spPr>
+        <p:txBody>
+          <a:bodyPr wrap="square" lIns="45720" rIns="45720" tIns="22860" bIns="22860" anchor="t">
+            <a:spAutoFit/>
+          </a:bodyPr>
+          <a:lstStyle/>
+          <a:p>
+            <a:pPr algn="ctr"/>
+            <a:r>
+              <a:rPr sz="1400" b="1">
+                <a:solidFill>
+                  <a:srgbClr val="666666"/>
+                </a:solidFill>
+                <a:latin typeface="Yu Gothic"/>
+              </a:rPr>
+              <a:t>▶</a:t>
+            </a:r>
+          </a:p>
+        </p:txBody>
+      </p:sp>
+      <p:sp>
+        <p:nvSpPr>
+          <p:cNvPr id="17" name="Rounded Rectangle 16"/>
+          <p:cNvSpPr/>
+          <p:nvPr/>
+        </p:nvSpPr>
+        <p:spPr>
+          <a:xfrm>
+            <a:off x="7315200" y="1920240"/>
+            <a:ext cx="1965960" cy="1737360"/>
           </a:xfrm>
           <a:prstGeom prst="roundRect">
             <a:avLst>
@@ -9834,14 +10009,14 @@
       </p:sp>
       <p:sp>
         <p:nvSpPr>
-          <p:cNvPr id="14" name="TextBox 13"/>
-          <p:cNvSpPr txBox="1"/>
-          <p:nvPr/>
-        </p:nvSpPr>
-        <p:spPr>
-          <a:xfrm>
-            <a:off x="4261104" y="1920240"/>
-            <a:ext cx="1627632" cy="1737360"/>
+          <p:cNvPr id="18" name="TextBox 17"/>
+          <p:cNvSpPr txBox="1"/>
+          <p:nvPr/>
+        </p:nvSpPr>
+        <p:spPr>
+          <a:xfrm>
+            <a:off x="7315200" y="1920240"/>
+            <a:ext cx="1965960" cy="1737360"/>
           </a:xfrm>
           <a:prstGeom prst="rect">
             <a:avLst/>
@@ -9856,51 +10031,51 @@
           <a:p>
             <a:pPr algn="ctr"/>
             <a:r>
-              <a:rPr sz="1600" b="1">
+              <a:rPr sz="1700" b="1">
                 <a:solidFill>
                   <a:srgbClr val="666666"/>
                 </a:solidFill>
                 <a:latin typeface="Yu Gothic"/>
               </a:rPr>
-              <a:t>③</a:t>
-            </a:r>
-          </a:p>
-          <a:p>
-            <a:pPr algn="ctr"/>
-            <a:r>
-              <a:rPr sz="1600" b="1">
+              <a:t>④</a:t>
+            </a:r>
+          </a:p>
+          <a:p>
+            <a:pPr algn="ctr"/>
+            <a:r>
+              <a:rPr sz="1700" b="1">
                 <a:solidFill>
                   <a:srgbClr val="666666"/>
                 </a:solidFill>
                 <a:latin typeface="Yu Gothic"/>
               </a:rPr>
-              <a:t>フォルダへ</a:t>
-            </a:r>
-          </a:p>
-          <a:p>
-            <a:pPr algn="ctr"/>
-            <a:r>
-              <a:rPr sz="1600" b="1">
+              <a:t>Disprz</a:t>
+            </a:r>
+          </a:p>
+          <a:p>
+            <a:pPr algn="ctr"/>
+            <a:r>
+              <a:rPr sz="1700" b="1">
                 <a:solidFill>
                   <a:srgbClr val="666666"/>
                 </a:solidFill>
                 <a:latin typeface="Yu Gothic"/>
               </a:rPr>
-              <a:t>格納</a:t>
-            </a:r>
-          </a:p>
-        </p:txBody>
-      </p:sp>
-      <p:sp>
-        <p:nvSpPr>
-          <p:cNvPr id="15" name="TextBox 14"/>
-          <p:cNvSpPr txBox="1"/>
-          <p:nvPr/>
-        </p:nvSpPr>
-        <p:spPr>
-          <a:xfrm>
-            <a:off x="4261104" y="3749039"/>
-            <a:ext cx="1627632" cy="365760"/>
+              <a:t>視聴</a:t>
+            </a:r>
+          </a:p>
+        </p:txBody>
+      </p:sp>
+      <p:sp>
+        <p:nvSpPr>
+          <p:cNvPr id="19" name="TextBox 18"/>
+          <p:cNvSpPr txBox="1"/>
+          <p:nvPr/>
+        </p:nvSpPr>
+        <p:spPr>
+          <a:xfrm>
+            <a:off x="7315200" y="3749039"/>
+            <a:ext cx="1965960" cy="365760"/>
           </a:xfrm>
           <a:prstGeom prst="rect">
             <a:avLst/>
@@ -9928,14 +10103,14 @@
       </p:sp>
       <p:sp>
         <p:nvSpPr>
-          <p:cNvPr id="16" name="TextBox 15"/>
-          <p:cNvSpPr txBox="1"/>
-          <p:nvPr/>
-        </p:nvSpPr>
-        <p:spPr>
-          <a:xfrm>
-            <a:off x="5861304" y="2560320"/>
-            <a:ext cx="320040" cy="457200"/>
+          <p:cNvPr id="20" name="TextBox 19"/>
+          <p:cNvSpPr txBox="1"/>
+          <p:nvPr/>
+        </p:nvSpPr>
+        <p:spPr>
+          <a:xfrm>
+            <a:off x="9253728" y="2560320"/>
+            <a:ext cx="365760" cy="457200"/>
           </a:xfrm>
           <a:prstGeom prst="rect">
             <a:avLst/>
@@ -9950,182 +10125,7 @@
           <a:p>
             <a:pPr algn="ctr"/>
             <a:r>
-              <a:rPr sz="1300" b="1">
-                <a:solidFill>
-                  <a:srgbClr val="666666"/>
-                </a:solidFill>
-                <a:latin typeface="Yu Gothic"/>
-              </a:rPr>
-              <a:t>▶</a:t>
-            </a:r>
-          </a:p>
-        </p:txBody>
-      </p:sp>
-      <p:sp>
-        <p:nvSpPr>
-          <p:cNvPr id="17" name="Rounded Rectangle 16"/>
-          <p:cNvSpPr/>
-          <p:nvPr/>
-        </p:nvSpPr>
-        <p:spPr>
-          <a:xfrm>
-            <a:off x="6163056" y="1920240"/>
-            <a:ext cx="1627632" cy="1737360"/>
-          </a:xfrm>
-          <a:prstGeom prst="roundRect">
-            <a:avLst>
-              <a:gd name="adj" fmla="val 10000"/>
-            </a:avLst>
-          </a:prstGeom>
-          <a:solidFill>
-            <a:srgbClr val="4FB6BE"/>
-          </a:solidFill>
-          <a:ln>
-            <a:noFill/>
-          </a:ln>
-          <a:effectLst/>
-        </p:spPr>
-        <p:style>
-          <a:lnRef idx="1">
-            <a:schemeClr val="accent1"/>
-          </a:lnRef>
-          <a:fillRef idx="3">
-            <a:schemeClr val="accent1"/>
-          </a:fillRef>
-          <a:effectRef idx="2">
-            <a:schemeClr val="accent1"/>
-          </a:effectRef>
-          <a:fontRef idx="minor">
-            <a:schemeClr val="lt1"/>
-          </a:fontRef>
-        </p:style>
-        <p:txBody>
-          <a:bodyPr rtlCol="0" anchor="ctr"/>
-          <a:lstStyle/>
-          <a:p>
-            <a:pPr algn="ctr"/>
-          </a:p>
-        </p:txBody>
-      </p:sp>
-      <p:sp>
-        <p:nvSpPr>
-          <p:cNvPr id="18" name="TextBox 17"/>
-          <p:cNvSpPr txBox="1"/>
-          <p:nvPr/>
-        </p:nvSpPr>
-        <p:spPr>
-          <a:xfrm>
-            <a:off x="6163056" y="1920240"/>
-            <a:ext cx="1627632" cy="1737360"/>
-          </a:xfrm>
-          <a:prstGeom prst="rect">
-            <a:avLst/>
-          </a:prstGeom>
-          <a:noFill/>
-        </p:spPr>
-        <p:txBody>
-          <a:bodyPr wrap="square" lIns="45720" rIns="45720" tIns="22860" bIns="22860" anchor="ctr">
-            <a:spAutoFit/>
-          </a:bodyPr>
-          <a:lstStyle/>
-          <a:p>
-            <a:pPr algn="ctr"/>
-            <a:r>
-              <a:rPr sz="1600" b="1">
-                <a:solidFill>
-                  <a:srgbClr val="FFFFFF"/>
-                </a:solidFill>
-                <a:latin typeface="Yu Gothic"/>
-              </a:rPr>
-              <a:t>④</a:t>
-            </a:r>
-          </a:p>
-          <a:p>
-            <a:pPr algn="ctr"/>
-            <a:r>
-              <a:rPr sz="1600" b="1">
-                <a:solidFill>
-                  <a:srgbClr val="FFFFFF"/>
-                </a:solidFill>
-                <a:latin typeface="Yu Gothic"/>
-              </a:rPr>
-              <a:t>Amazon</a:t>
-            </a:r>
-          </a:p>
-          <a:p>
-            <a:pPr algn="ctr"/>
-            <a:r>
-              <a:rPr sz="1600" b="1">
-                <a:solidFill>
-                  <a:srgbClr val="FFFFFF"/>
-                </a:solidFill>
-                <a:latin typeface="Yu Gothic"/>
-              </a:rPr>
-              <a:t>登録</a:t>
-            </a:r>
-          </a:p>
-        </p:txBody>
-      </p:sp>
-      <p:sp>
-        <p:nvSpPr>
-          <p:cNvPr id="19" name="TextBox 18"/>
-          <p:cNvSpPr txBox="1"/>
-          <p:nvPr/>
-        </p:nvSpPr>
-        <p:spPr>
-          <a:xfrm>
-            <a:off x="6163056" y="3749039"/>
-            <a:ext cx="1627632" cy="365760"/>
-          </a:xfrm>
-          <a:prstGeom prst="rect">
-            <a:avLst/>
-          </a:prstGeom>
-          <a:noFill/>
-        </p:spPr>
-        <p:txBody>
-          <a:bodyPr wrap="square" lIns="45720" rIns="45720" tIns="22860" bIns="22860" anchor="t">
-            <a:spAutoFit/>
-          </a:bodyPr>
-          <a:lstStyle/>
-          <a:p>
-            <a:pPr algn="ctr"/>
-            <a:r>
-              <a:rPr sz="1200" b="1">
-                <a:solidFill>
-                  <a:srgbClr val="4FB6BE"/>
-                </a:solidFill>
-                <a:latin typeface="Yu Gothic"/>
-              </a:rPr>
-              <a:t>途中まで</a:t>
-            </a:r>
-          </a:p>
-        </p:txBody>
-      </p:sp>
-      <p:sp>
-        <p:nvSpPr>
-          <p:cNvPr id="20" name="TextBox 19"/>
-          <p:cNvSpPr txBox="1"/>
-          <p:nvPr/>
-        </p:nvSpPr>
-        <p:spPr>
-          <a:xfrm>
-            <a:off x="7763256" y="2560320"/>
-            <a:ext cx="320040" cy="457200"/>
-          </a:xfrm>
-          <a:prstGeom prst="rect">
-            <a:avLst/>
-          </a:prstGeom>
-          <a:noFill/>
-        </p:spPr>
-        <p:txBody>
-          <a:bodyPr wrap="square" lIns="45720" rIns="45720" tIns="22860" bIns="22860" anchor="t">
-            <a:spAutoFit/>
-          </a:bodyPr>
-          <a:lstStyle/>
-          <a:p>
-            <a:pPr algn="ctr"/>
-            <a:r>
-              <a:rPr sz="1300" b="1">
+              <a:rPr sz="1400" b="1">
                 <a:solidFill>
                   <a:srgbClr val="666666"/>
                 </a:solidFill>
@@ -10144,8 +10144,8 @@
         </p:nvSpPr>
         <p:spPr>
           <a:xfrm>
-            <a:off x="8065008" y="1920240"/>
-            <a:ext cx="1627632" cy="1737360"/>
+            <a:off x="9601200" y="1920240"/>
+            <a:ext cx="1965960" cy="1737360"/>
           </a:xfrm>
           <a:prstGeom prst="roundRect">
             <a:avLst>
@@ -10190,8 +10190,8 @@
         </p:nvSpPr>
         <p:spPr>
           <a:xfrm>
-            <a:off x="8065008" y="1920240"/>
-            <a:ext cx="1627632" cy="1737360"/>
+            <a:off x="9601200" y="1920240"/>
+            <a:ext cx="1965960" cy="1737360"/>
           </a:xfrm>
           <a:prstGeom prst="rect">
             <a:avLst/>
@@ -10206,7 +10206,7 @@
           <a:p>
             <a:pPr algn="ctr"/>
             <a:r>
-              <a:rPr sz="1600" b="1">
+              <a:rPr sz="1700" b="1">
                 <a:solidFill>
                   <a:srgbClr val="666666"/>
                 </a:solidFill>
@@ -10218,59 +10218,47 @@
           <a:p>
             <a:pPr algn="ctr"/>
             <a:r>
-              <a:rPr sz="1600" b="1">
+              <a:rPr sz="1700" b="1">
                 <a:solidFill>
                   <a:srgbClr val="666666"/>
                 </a:solidFill>
                 <a:latin typeface="Yu Gothic"/>
               </a:rPr>
-              <a:t>Disprz</a:t>
-            </a:r>
-          </a:p>
-          <a:p>
-            <a:pPr algn="ctr"/>
-            <a:r>
-              <a:rPr sz="1600" b="1">
+              <a:t>登録完了</a:t>
+            </a:r>
+          </a:p>
+        </p:txBody>
+      </p:sp>
+      <p:sp>
+        <p:nvSpPr>
+          <p:cNvPr id="23" name="TextBox 22"/>
+          <p:cNvSpPr txBox="1"/>
+          <p:nvPr/>
+        </p:nvSpPr>
+        <p:spPr>
+          <a:xfrm>
+            <a:off x="9601200" y="3749039"/>
+            <a:ext cx="1965960" cy="365760"/>
+          </a:xfrm>
+          <a:prstGeom prst="rect">
+            <a:avLst/>
+          </a:prstGeom>
+          <a:noFill/>
+        </p:spPr>
+        <p:txBody>
+          <a:bodyPr wrap="square" lIns="45720" rIns="45720" tIns="22860" bIns="22860" anchor="t">
+            <a:spAutoFit/>
+          </a:bodyPr>
+          <a:lstStyle/>
+          <a:p>
+            <a:pPr algn="ctr"/>
+            <a:r>
+              <a:rPr sz="1200" b="1">
                 <a:solidFill>
                   <a:srgbClr val="666666"/>
                 </a:solidFill>
                 <a:latin typeface="Yu Gothic"/>
               </a:rPr>
-              <a:t>視聴</a:t>
-            </a:r>
-          </a:p>
-        </p:txBody>
-      </p:sp>
-      <p:sp>
-        <p:nvSpPr>
-          <p:cNvPr id="23" name="TextBox 22"/>
-          <p:cNvSpPr txBox="1"/>
-          <p:nvPr/>
-        </p:nvSpPr>
-        <p:spPr>
-          <a:xfrm>
-            <a:off x="8065008" y="3749039"/>
-            <a:ext cx="1627632" cy="365760"/>
-          </a:xfrm>
-          <a:prstGeom prst="rect">
-            <a:avLst/>
-          </a:prstGeom>
-          <a:noFill/>
-        </p:spPr>
-        <p:txBody>
-          <a:bodyPr wrap="square" lIns="45720" rIns="45720" tIns="22860" bIns="22860" anchor="t">
-            <a:spAutoFit/>
-          </a:bodyPr>
-          <a:lstStyle/>
-          <a:p>
-            <a:pPr algn="ctr"/>
-            <a:r>
-              <a:rPr sz="1200" b="1">
-                <a:solidFill>
-                  <a:srgbClr val="666666"/>
-                </a:solidFill>
-                <a:latin typeface="Yu Gothic"/>
-              </a:rPr>
               <a:t>作成中</a:t>
             </a:r>
           </a:p>
@@ -10278,170 +10266,7 @@
       </p:sp>
       <p:sp>
         <p:nvSpPr>
-          <p:cNvPr id="24" name="TextBox 23"/>
-          <p:cNvSpPr txBox="1"/>
-          <p:nvPr/>
-        </p:nvSpPr>
-        <p:spPr>
-          <a:xfrm>
-            <a:off x="9665208" y="2560320"/>
-            <a:ext cx="320040" cy="457200"/>
-          </a:xfrm>
-          <a:prstGeom prst="rect">
-            <a:avLst/>
-          </a:prstGeom>
-          <a:noFill/>
-        </p:spPr>
-        <p:txBody>
-          <a:bodyPr wrap="square" lIns="45720" rIns="45720" tIns="22860" bIns="22860" anchor="t">
-            <a:spAutoFit/>
-          </a:bodyPr>
-          <a:lstStyle/>
-          <a:p>
-            <a:pPr algn="ctr"/>
-            <a:r>
-              <a:rPr sz="1300" b="1">
-                <a:solidFill>
-                  <a:srgbClr val="666666"/>
-                </a:solidFill>
-                <a:latin typeface="Yu Gothic"/>
-              </a:rPr>
-              <a:t>▶</a:t>
-            </a:r>
-          </a:p>
-        </p:txBody>
-      </p:sp>
-      <p:sp>
-        <p:nvSpPr>
-          <p:cNvPr id="25" name="Rounded Rectangle 24"/>
-          <p:cNvSpPr/>
-          <p:nvPr/>
-        </p:nvSpPr>
-        <p:spPr>
-          <a:xfrm>
-            <a:off x="9966960" y="1920240"/>
-            <a:ext cx="1627632" cy="1737360"/>
-          </a:xfrm>
-          <a:prstGeom prst="roundRect">
-            <a:avLst>
-              <a:gd name="adj" fmla="val 10000"/>
-            </a:avLst>
-          </a:prstGeom>
-          <a:solidFill>
-            <a:srgbClr val="EEEEEE"/>
-          </a:solidFill>
-          <a:ln>
-            <a:noFill/>
-          </a:ln>
-          <a:effectLst/>
-        </p:spPr>
-        <p:style>
-          <a:lnRef idx="1">
-            <a:schemeClr val="accent1"/>
-          </a:lnRef>
-          <a:fillRef idx="3">
-            <a:schemeClr val="accent1"/>
-          </a:fillRef>
-          <a:effectRef idx="2">
-            <a:schemeClr val="accent1"/>
-          </a:effectRef>
-          <a:fontRef idx="minor">
-            <a:schemeClr val="lt1"/>
-          </a:fontRef>
-        </p:style>
-        <p:txBody>
-          <a:bodyPr rtlCol="0" anchor="ctr"/>
-          <a:lstStyle/>
-          <a:p>
-            <a:pPr algn="ctr"/>
-          </a:p>
-        </p:txBody>
-      </p:sp>
-      <p:sp>
-        <p:nvSpPr>
-          <p:cNvPr id="26" name="TextBox 25"/>
-          <p:cNvSpPr txBox="1"/>
-          <p:nvPr/>
-        </p:nvSpPr>
-        <p:spPr>
-          <a:xfrm>
-            <a:off x="9966960" y="1920240"/>
-            <a:ext cx="1627632" cy="1737360"/>
-          </a:xfrm>
-          <a:prstGeom prst="rect">
-            <a:avLst/>
-          </a:prstGeom>
-          <a:noFill/>
-        </p:spPr>
-        <p:txBody>
-          <a:bodyPr wrap="square" lIns="45720" rIns="45720" tIns="22860" bIns="22860" anchor="ctr">
-            <a:spAutoFit/>
-          </a:bodyPr>
-          <a:lstStyle/>
-          <a:p>
-            <a:pPr algn="ctr"/>
-            <a:r>
-              <a:rPr sz="1600" b="1">
-                <a:solidFill>
-                  <a:srgbClr val="666666"/>
-                </a:solidFill>
-                <a:latin typeface="Yu Gothic"/>
-              </a:rPr>
-              <a:t>⑥</a:t>
-            </a:r>
-          </a:p>
-          <a:p>
-            <a:pPr algn="ctr"/>
-            <a:r>
-              <a:rPr sz="1600" b="1">
-                <a:solidFill>
-                  <a:srgbClr val="666666"/>
-                </a:solidFill>
-                <a:latin typeface="Yu Gothic"/>
-              </a:rPr>
-              <a:t>登録完了</a:t>
-            </a:r>
-          </a:p>
-        </p:txBody>
-      </p:sp>
-      <p:sp>
-        <p:nvSpPr>
-          <p:cNvPr id="27" name="TextBox 26"/>
-          <p:cNvSpPr txBox="1"/>
-          <p:nvPr/>
-        </p:nvSpPr>
-        <p:spPr>
-          <a:xfrm>
-            <a:off x="9966960" y="3749039"/>
-            <a:ext cx="1627632" cy="365760"/>
-          </a:xfrm>
-          <a:prstGeom prst="rect">
-            <a:avLst/>
-          </a:prstGeom>
-          <a:noFill/>
-        </p:spPr>
-        <p:txBody>
-          <a:bodyPr wrap="square" lIns="45720" rIns="45720" tIns="22860" bIns="22860" anchor="t">
-            <a:spAutoFit/>
-          </a:bodyPr>
-          <a:lstStyle/>
-          <a:p>
-            <a:pPr algn="ctr"/>
-            <a:r>
-              <a:rPr sz="1200" b="1">
-                <a:solidFill>
-                  <a:srgbClr val="666666"/>
-                </a:solidFill>
-                <a:latin typeface="Yu Gothic"/>
-              </a:rPr>
-              <a:t>作成中</a:t>
-            </a:r>
-          </a:p>
-        </p:txBody>
-      </p:sp>
-      <p:sp>
-        <p:nvSpPr>
-          <p:cNvPr id="28" name="Rounded Rectangle 27"/>
+          <p:cNvPr id="24" name="Rounded Rectangle 23"/>
           <p:cNvSpPr/>
           <p:nvPr/>
         </p:nvSpPr>
@@ -10489,7 +10314,7 @@
       </p:sp>
       <p:sp>
         <p:nvSpPr>
-          <p:cNvPr id="29" name="TextBox 28"/>
+          <p:cNvPr id="25" name="TextBox 24"/>
           <p:cNvSpPr txBox="1"/>
           <p:nvPr/>
         </p:nvSpPr>
@@ -11998,7 +11823,7 @@
                 </a:solidFill>
                 <a:latin typeface="Yu Gothic"/>
               </a:rPr>
-              <a:t>④</a:t>
+              <a:t>③</a:t>
             </a:r>
           </a:p>
         </p:txBody>
@@ -12796,7 +12621,7 @@
                 </a:solidFill>
                 <a:latin typeface="Yu Gothic"/>
               </a:rPr>
-              <a:t>④-1</a:t>
+              <a:t>③-1</a:t>
             </a:r>
           </a:p>
         </p:txBody>
@@ -13708,7 +13533,7 @@
                 </a:solidFill>
                 <a:latin typeface="Yu Gothic"/>
               </a:rPr>
-              <a:t>④-2</a:t>
+              <a:t>③-2</a:t>
             </a:r>
           </a:p>
         </p:txBody>
@@ -14172,7 +13997,7 @@
                 </a:solidFill>
                 <a:latin typeface="Yu Gothic"/>
               </a:rPr>
-              <a:t>④-3</a:t>
+              <a:t>③-3</a:t>
             </a:r>
           </a:p>
         </p:txBody>
@@ -14648,7 +14473,7 @@
                 </a:solidFill>
                 <a:latin typeface="Yu Gothic"/>
               </a:rPr>
-              <a:t>④-1で決めたパスワード</a:t>
+              <a:t>③-1で決めたパスワード</a:t>
             </a:r>
           </a:p>
         </p:txBody>
@@ -14953,7 +14778,7 @@
                 </a:solidFill>
                 <a:latin typeface="Yu Gothic"/>
               </a:rPr>
-              <a:t>④-4</a:t>
+              <a:t>③-4</a:t>
             </a:r>
           </a:p>
         </p:txBody>

--- a/out/登録の流れ_書類準備まで.pptx
+++ b/out/登録の流れ_書類準備まで.pptx
@@ -5397,7 +5397,7 @@
                 </a:solidFill>
                 <a:latin typeface="Yu Gothic"/>
               </a:rPr>
-              <a:t>この画面で、入力項目を確認する（次の3か所をドライバーが入力）</a:t>
+              <a:t>この画面で、入力項目を確認する（次の3か所に入力する）</a:t>
             </a:r>
           </a:p>
         </p:txBody>
@@ -5531,7 +5531,7 @@
                 </a:solidFill>
                 <a:latin typeface="Yu Gothic"/>
               </a:rPr>
-              <a:t>⑩ ドライバーが入力する場所は3か所</a:t>
+              <a:t>⑩ 入力する場所は3か所</a:t>
             </a:r>
           </a:p>
         </p:txBody>
@@ -5619,14 +5619,60 @@
       </p:sp>
       <p:sp>
         <p:nvSpPr>
-          <p:cNvPr id="7" name="TextBox 6"/>
-          <p:cNvSpPr txBox="1"/>
-          <p:nvPr/>
-        </p:nvSpPr>
-        <p:spPr>
-          <a:xfrm>
-            <a:off x="2743200" y="1280160"/>
-            <a:ext cx="8869680" cy="457200"/>
+          <p:cNvPr id="7" name="Rounded Rectangle 6"/>
+          <p:cNvSpPr/>
+          <p:nvPr/>
+        </p:nvSpPr>
+        <p:spPr>
+          <a:xfrm>
+            <a:off x="2697480" y="1280160"/>
+            <a:ext cx="1645920" cy="457200"/>
+          </a:xfrm>
+          <a:prstGeom prst="roundRect">
+            <a:avLst>
+              <a:gd name="adj" fmla="val 20000"/>
+            </a:avLst>
+          </a:prstGeom>
+          <a:solidFill>
+            <a:srgbClr val="3DDC5A"/>
+          </a:solidFill>
+          <a:ln>
+            <a:noFill/>
+          </a:ln>
+          <a:effectLst/>
+        </p:spPr>
+        <p:style>
+          <a:lnRef idx="1">
+            <a:schemeClr val="accent1"/>
+          </a:lnRef>
+          <a:fillRef idx="3">
+            <a:schemeClr val="accent1"/>
+          </a:fillRef>
+          <a:effectRef idx="2">
+            <a:schemeClr val="accent1"/>
+          </a:effectRef>
+          <a:fontRef idx="minor">
+            <a:schemeClr val="lt1"/>
+          </a:fontRef>
+        </p:style>
+        <p:txBody>
+          <a:bodyPr rtlCol="0" anchor="ctr"/>
+          <a:lstStyle/>
+          <a:p>
+            <a:pPr algn="ctr"/>
+          </a:p>
+        </p:txBody>
+      </p:sp>
+      <p:sp>
+        <p:nvSpPr>
+          <p:cNvPr id="8" name="TextBox 7"/>
+          <p:cNvSpPr txBox="1"/>
+          <p:nvPr/>
+        </p:nvSpPr>
+        <p:spPr>
+          <a:xfrm>
+            <a:off x="2697480" y="1280160"/>
+            <a:ext cx="1645920" cy="457200"/>
           </a:xfrm>
           <a:prstGeom prst="rect">
             <a:avLst/>
@@ -5639,6 +5685,41 @@
           </a:bodyPr>
           <a:lstStyle/>
           <a:p>
+            <a:pPr algn="ctr"/>
+            <a:r>
+              <a:rPr sz="1600" b="1">
+                <a:solidFill>
+                  <a:srgbClr val="333333"/>
+                </a:solidFill>
+                <a:latin typeface="Yu Gothic"/>
+              </a:rPr>
+              <a:t>拠点入力</a:t>
+            </a:r>
+          </a:p>
+        </p:txBody>
+      </p:sp>
+      <p:sp>
+        <p:nvSpPr>
+          <p:cNvPr id="9" name="TextBox 8"/>
+          <p:cNvSpPr txBox="1"/>
+          <p:nvPr/>
+        </p:nvSpPr>
+        <p:spPr>
+          <a:xfrm>
+            <a:off x="4526280" y="1280160"/>
+            <a:ext cx="7132320" cy="457200"/>
+          </a:xfrm>
+          <a:prstGeom prst="rect">
+            <a:avLst/>
+          </a:prstGeom>
+          <a:noFill/>
+        </p:spPr>
+        <p:txBody>
+          <a:bodyPr wrap="square" lIns="45720" rIns="45720" tIns="22860" bIns="22860" anchor="ctr">
+            <a:spAutoFit/>
+          </a:bodyPr>
+          <a:lstStyle/>
+          <a:p>
             <a:pPr algn="l"/>
             <a:r>
               <a:rPr sz="1500" b="1">
@@ -5654,7 +5735,7 @@
       </p:sp>
       <p:sp>
         <p:nvSpPr>
-          <p:cNvPr id="8" name="Rounded Rectangle 7"/>
+          <p:cNvPr id="10" name="Rounded Rectangle 9"/>
           <p:cNvSpPr/>
           <p:nvPr/>
         </p:nvSpPr>
@@ -5702,7 +5783,7 @@
       </p:sp>
       <p:sp>
         <p:nvSpPr>
-          <p:cNvPr id="9" name="TextBox 8"/>
+          <p:cNvPr id="11" name="TextBox 10"/>
           <p:cNvSpPr txBox="1"/>
           <p:nvPr/>
         </p:nvSpPr>
@@ -5737,7 +5818,7 @@
       </p:sp>
       <p:sp>
         <p:nvSpPr>
-          <p:cNvPr id="10" name="TextBox 9"/>
+          <p:cNvPr id="12" name="TextBox 11"/>
           <p:cNvSpPr txBox="1"/>
           <p:nvPr/>
         </p:nvSpPr>
@@ -5772,7 +5853,7 @@
       </p:sp>
       <p:sp>
         <p:nvSpPr>
-          <p:cNvPr id="11" name="Rounded Rectangle 10"/>
+          <p:cNvPr id="13" name="Rounded Rectangle 12"/>
           <p:cNvSpPr/>
           <p:nvPr/>
         </p:nvSpPr>
@@ -5818,7 +5899,7 @@
       </p:sp>
       <p:sp>
         <p:nvSpPr>
-          <p:cNvPr id="12" name="TextBox 11"/>
+          <p:cNvPr id="14" name="TextBox 13"/>
           <p:cNvSpPr txBox="1"/>
           <p:nvPr/>
         </p:nvSpPr>
@@ -5853,7 +5934,7 @@
       </p:sp>
       <p:sp>
         <p:nvSpPr>
-          <p:cNvPr id="13" name="Rounded Rectangle 12"/>
+          <p:cNvPr id="15" name="Rounded Rectangle 14"/>
           <p:cNvSpPr/>
           <p:nvPr/>
         </p:nvSpPr>
@@ -5901,7 +5982,7 @@
       </p:sp>
       <p:sp>
         <p:nvSpPr>
-          <p:cNvPr id="14" name="TextBox 13"/>
+          <p:cNvPr id="16" name="TextBox 15"/>
           <p:cNvSpPr txBox="1"/>
           <p:nvPr/>
         </p:nvSpPr>
@@ -5936,7 +6017,7 @@
       </p:sp>
       <p:sp>
         <p:nvSpPr>
-          <p:cNvPr id="15" name="TextBox 14"/>
+          <p:cNvPr id="17" name="TextBox 16"/>
           <p:cNvSpPr txBox="1"/>
           <p:nvPr/>
         </p:nvSpPr>
@@ -5971,7 +6052,7 @@
       </p:sp>
       <p:sp>
         <p:nvSpPr>
-          <p:cNvPr id="16" name="Rounded Rectangle 15"/>
+          <p:cNvPr id="18" name="Rounded Rectangle 17"/>
           <p:cNvSpPr/>
           <p:nvPr/>
         </p:nvSpPr>
@@ -6017,7 +6098,7 @@
       </p:sp>
       <p:sp>
         <p:nvSpPr>
-          <p:cNvPr id="17" name="TextBox 16"/>
+          <p:cNvPr id="19" name="TextBox 18"/>
           <p:cNvSpPr txBox="1"/>
           <p:nvPr/>
         </p:nvSpPr>
@@ -6052,7 +6133,7 @@
       </p:sp>
       <p:sp>
         <p:nvSpPr>
-          <p:cNvPr id="18" name="Rounded Rectangle 17"/>
+          <p:cNvPr id="20" name="Rounded Rectangle 19"/>
           <p:cNvSpPr/>
           <p:nvPr/>
         </p:nvSpPr>
@@ -6098,7 +6179,7 @@
       </p:sp>
       <p:sp>
         <p:nvSpPr>
-          <p:cNvPr id="19" name="TextBox 18"/>
+          <p:cNvPr id="21" name="TextBox 20"/>
           <p:cNvSpPr txBox="1"/>
           <p:nvPr/>
         </p:nvSpPr>
@@ -6133,7 +6214,7 @@
       </p:sp>
       <p:sp>
         <p:nvSpPr>
-          <p:cNvPr id="20" name="Rounded Rectangle 19"/>
+          <p:cNvPr id="22" name="Rounded Rectangle 21"/>
           <p:cNvSpPr/>
           <p:nvPr/>
         </p:nvSpPr>
@@ -6179,7 +6260,7 @@
       </p:sp>
       <p:sp>
         <p:nvSpPr>
-          <p:cNvPr id="21" name="TextBox 20"/>
+          <p:cNvPr id="23" name="TextBox 22"/>
           <p:cNvSpPr txBox="1"/>
           <p:nvPr/>
         </p:nvSpPr>
@@ -6214,7 +6295,7 @@
       </p:sp>
       <p:sp>
         <p:nvSpPr>
-          <p:cNvPr id="22" name="Rounded Rectangle 21"/>
+          <p:cNvPr id="24" name="Rounded Rectangle 23"/>
           <p:cNvSpPr/>
           <p:nvPr/>
         </p:nvSpPr>
@@ -6260,7 +6341,7 @@
       </p:sp>
       <p:sp>
         <p:nvSpPr>
-          <p:cNvPr id="23" name="TextBox 22"/>
+          <p:cNvPr id="25" name="TextBox 24"/>
           <p:cNvSpPr txBox="1"/>
           <p:nvPr/>
         </p:nvSpPr>
@@ -6295,7 +6376,7 @@
       </p:sp>
       <p:sp>
         <p:nvSpPr>
-          <p:cNvPr id="24" name="Rounded Rectangle 23"/>
+          <p:cNvPr id="26" name="Rounded Rectangle 25"/>
           <p:cNvSpPr/>
           <p:nvPr/>
         </p:nvSpPr>
@@ -6343,7 +6424,7 @@
       </p:sp>
       <p:sp>
         <p:nvSpPr>
-          <p:cNvPr id="25" name="TextBox 24"/>
+          <p:cNvPr id="27" name="TextBox 26"/>
           <p:cNvSpPr txBox="1"/>
           <p:nvPr/>
         </p:nvSpPr>
@@ -6378,7 +6459,7 @@
       </p:sp>
       <p:sp>
         <p:nvSpPr>
-          <p:cNvPr id="26" name="TextBox 25"/>
+          <p:cNvPr id="28" name="TextBox 27"/>
           <p:cNvSpPr txBox="1"/>
           <p:nvPr/>
         </p:nvSpPr>
@@ -6413,7 +6494,7 @@
       </p:sp>
       <p:sp>
         <p:nvSpPr>
-          <p:cNvPr id="27" name="Rounded Rectangle 26"/>
+          <p:cNvPr id="29" name="Rounded Rectangle 28"/>
           <p:cNvSpPr/>
           <p:nvPr/>
         </p:nvSpPr>
@@ -6459,7 +6540,7 @@
       </p:sp>
       <p:sp>
         <p:nvSpPr>
-          <p:cNvPr id="28" name="TextBox 27"/>
+          <p:cNvPr id="30" name="TextBox 29"/>
           <p:cNvSpPr txBox="1"/>
           <p:nvPr/>
         </p:nvSpPr>
@@ -6494,7 +6575,7 @@
       </p:sp>
       <p:sp>
         <p:nvSpPr>
-          <p:cNvPr id="29" name="Rounded Rectangle 28"/>
+          <p:cNvPr id="31" name="Rounded Rectangle 30"/>
           <p:cNvSpPr/>
           <p:nvPr/>
         </p:nvSpPr>
@@ -6540,7 +6621,7 @@
       </p:sp>
       <p:sp>
         <p:nvSpPr>
-          <p:cNvPr id="30" name="TextBox 29"/>
+          <p:cNvPr id="32" name="TextBox 31"/>
           <p:cNvSpPr txBox="1"/>
           <p:nvPr/>
         </p:nvSpPr>
@@ -6575,7 +6656,7 @@
       </p:sp>
       <p:sp>
         <p:nvSpPr>
-          <p:cNvPr id="31" name="Rounded Rectangle 30"/>
+          <p:cNvPr id="33" name="Rounded Rectangle 32"/>
           <p:cNvSpPr/>
           <p:nvPr/>
         </p:nvSpPr>
@@ -6583,6 +6664,87 @@
           <a:xfrm>
             <a:off x="7680960" y="4503419"/>
             <a:ext cx="2103120" cy="457200"/>
+          </a:xfrm>
+          <a:prstGeom prst="roundRect">
+            <a:avLst>
+              <a:gd name="adj" fmla="val 20000"/>
+            </a:avLst>
+          </a:prstGeom>
+          <a:solidFill>
+            <a:srgbClr val="3DDC5A"/>
+          </a:solidFill>
+          <a:ln>
+            <a:noFill/>
+          </a:ln>
+          <a:effectLst/>
+        </p:spPr>
+        <p:style>
+          <a:lnRef idx="1">
+            <a:schemeClr val="accent1"/>
+          </a:lnRef>
+          <a:fillRef idx="3">
+            <a:schemeClr val="accent1"/>
+          </a:fillRef>
+          <a:effectRef idx="2">
+            <a:schemeClr val="accent1"/>
+          </a:effectRef>
+          <a:fontRef idx="minor">
+            <a:schemeClr val="lt1"/>
+          </a:fontRef>
+        </p:style>
+        <p:txBody>
+          <a:bodyPr rtlCol="0" anchor="ctr"/>
+          <a:lstStyle/>
+          <a:p>
+            <a:pPr algn="ctr"/>
+          </a:p>
+        </p:txBody>
+      </p:sp>
+      <p:sp>
+        <p:nvSpPr>
+          <p:cNvPr id="34" name="TextBox 33"/>
+          <p:cNvSpPr txBox="1"/>
+          <p:nvPr/>
+        </p:nvSpPr>
+        <p:spPr>
+          <a:xfrm>
+            <a:off x="7680960" y="4503419"/>
+            <a:ext cx="2103120" cy="457200"/>
+          </a:xfrm>
+          <a:prstGeom prst="rect">
+            <a:avLst/>
+          </a:prstGeom>
+          <a:noFill/>
+        </p:spPr>
+        <p:txBody>
+          <a:bodyPr wrap="square" lIns="45720" rIns="45720" tIns="22860" bIns="22860" anchor="ctr">
+            <a:spAutoFit/>
+          </a:bodyPr>
+          <a:lstStyle/>
+          <a:p>
+            <a:pPr algn="ctr"/>
+            <a:r>
+              <a:rPr sz="1600" b="1">
+                <a:solidFill>
+                  <a:srgbClr val="333333"/>
+                </a:solidFill>
+                <a:latin typeface="Yu Gothic"/>
+              </a:rPr>
+              <a:t>氏名（記名）</a:t>
+            </a:r>
+          </a:p>
+        </p:txBody>
+      </p:sp>
+      <p:sp>
+        <p:nvSpPr>
+          <p:cNvPr id="35" name="Rounded Rectangle 34"/>
+          <p:cNvSpPr/>
+          <p:nvPr/>
+        </p:nvSpPr>
+        <p:spPr>
+          <a:xfrm>
+            <a:off x="9921240" y="4503419"/>
+            <a:ext cx="1005840" cy="457200"/>
           </a:xfrm>
           <a:prstGeom prst="roundRect">
             <a:avLst>
@@ -6621,43 +6783,8 @@
       </p:sp>
       <p:sp>
         <p:nvSpPr>
-          <p:cNvPr id="32" name="TextBox 31"/>
-          <p:cNvSpPr txBox="1"/>
-          <p:nvPr/>
-        </p:nvSpPr>
-        <p:spPr>
-          <a:xfrm>
-            <a:off x="7680960" y="4503419"/>
-            <a:ext cx="2103120" cy="457200"/>
-          </a:xfrm>
-          <a:prstGeom prst="rect">
-            <a:avLst/>
-          </a:prstGeom>
-          <a:noFill/>
-        </p:spPr>
-        <p:txBody>
-          <a:bodyPr wrap="square" lIns="45720" rIns="45720" tIns="22860" bIns="22860" anchor="ctr">
-            <a:spAutoFit/>
-          </a:bodyPr>
-          <a:lstStyle/>
-          <a:p>
-            <a:pPr algn="ctr"/>
-            <a:r>
-              <a:rPr sz="1600" b="1">
-                <a:solidFill>
-                  <a:srgbClr val="333333"/>
-                </a:solidFill>
-                <a:latin typeface="Yu Gothic"/>
-              </a:rPr>
-              <a:t>氏名（記名）</a:t>
-            </a:r>
-          </a:p>
-        </p:txBody>
-      </p:sp>
-      <p:sp>
-        <p:nvSpPr>
-          <p:cNvPr id="33" name="Rounded Rectangle 32"/>
-          <p:cNvSpPr/>
+          <p:cNvPr id="36" name="TextBox 35"/>
+          <p:cNvSpPr txBox="1"/>
           <p:nvPr/>
         </p:nvSpPr>
         <p:spPr>
@@ -6665,52 +6792,6 @@
             <a:off x="9921240" y="4503419"/>
             <a:ext cx="1005840" cy="457200"/>
           </a:xfrm>
-          <a:prstGeom prst="roundRect">
-            <a:avLst>
-              <a:gd name="adj" fmla="val 20000"/>
-            </a:avLst>
-          </a:prstGeom>
-          <a:solidFill>
-            <a:srgbClr val="FFF14D"/>
-          </a:solidFill>
-          <a:ln>
-            <a:noFill/>
-          </a:ln>
-          <a:effectLst/>
-        </p:spPr>
-        <p:style>
-          <a:lnRef idx="1">
-            <a:schemeClr val="accent1"/>
-          </a:lnRef>
-          <a:fillRef idx="3">
-            <a:schemeClr val="accent1"/>
-          </a:fillRef>
-          <a:effectRef idx="2">
-            <a:schemeClr val="accent1"/>
-          </a:effectRef>
-          <a:fontRef idx="minor">
-            <a:schemeClr val="lt1"/>
-          </a:fontRef>
-        </p:style>
-        <p:txBody>
-          <a:bodyPr rtlCol="0" anchor="ctr"/>
-          <a:lstStyle/>
-          <a:p>
-            <a:pPr algn="ctr"/>
-          </a:p>
-        </p:txBody>
-      </p:sp>
-      <p:sp>
-        <p:nvSpPr>
-          <p:cNvPr id="34" name="TextBox 33"/>
-          <p:cNvSpPr txBox="1"/>
-          <p:nvPr/>
-        </p:nvSpPr>
-        <p:spPr>
-          <a:xfrm>
-            <a:off x="9921240" y="4503419"/>
-            <a:ext cx="1005840" cy="457200"/>
-          </a:xfrm>
           <a:prstGeom prst="rect">
             <a:avLst/>
           </a:prstGeom>
@@ -6737,7 +6818,7 @@
       </p:sp>
       <p:sp>
         <p:nvSpPr>
-          <p:cNvPr id="35" name="Rounded Rectangle 34"/>
+          <p:cNvPr id="37" name="Rounded Rectangle 36"/>
           <p:cNvSpPr/>
           <p:nvPr/>
         </p:nvSpPr>
@@ -6785,7 +6866,7 @@
       </p:sp>
       <p:sp>
         <p:nvSpPr>
-          <p:cNvPr id="36" name="TextBox 35"/>
+          <p:cNvPr id="38" name="TextBox 37"/>
           <p:cNvSpPr txBox="1"/>
           <p:nvPr/>
         </p:nvSpPr>
@@ -6813,7 +6894,7 @@
                 </a:solidFill>
                 <a:latin typeface="Yu Gothic"/>
               </a:rPr>
-              <a:t>すべて免許証に載っている漢字で入力・署名</a:t>
+              <a:t>氏名は、すべて免許証に載っている漢字で</a:t>
             </a:r>
           </a:p>
         </p:txBody>
@@ -8663,7 +8744,7 @@
           <a:noFill/>
           <a:ln w="38100">
             <a:solidFill>
-              <a:srgbClr val="D32F2F"/>
+              <a:srgbClr val="4CAF6A"/>
             </a:solidFill>
           </a:ln>
           <a:effectLst/>
@@ -8706,7 +8787,7 @@
           </a:prstGeom>
           <a:ln w="22225">
             <a:solidFill>
-              <a:srgbClr val="D32F2F"/>
+              <a:srgbClr val="4CAF6A"/>
             </a:solidFill>
           </a:ln>
         </p:spPr>
@@ -8734,6 +8815,212 @@
         <p:spPr>
           <a:xfrm>
             <a:off x="5477256" y="4700016"/>
+            <a:ext cx="384048" cy="384048"/>
+          </a:xfrm>
+          <a:prstGeom prst="ellipse">
+            <a:avLst/>
+          </a:prstGeom>
+          <a:solidFill>
+            <a:srgbClr val="4CAF6A"/>
+          </a:solidFill>
+          <a:ln w="19050">
+            <a:solidFill>
+              <a:srgbClr val="FFFFFF"/>
+            </a:solidFill>
+          </a:ln>
+          <a:effectLst/>
+        </p:spPr>
+        <p:style>
+          <a:lnRef idx="1">
+            <a:schemeClr val="accent1"/>
+          </a:lnRef>
+          <a:fillRef idx="3">
+            <a:schemeClr val="accent1"/>
+          </a:fillRef>
+          <a:effectRef idx="2">
+            <a:schemeClr val="accent1"/>
+          </a:effectRef>
+          <a:fontRef idx="minor">
+            <a:schemeClr val="lt1"/>
+          </a:fontRef>
+        </p:style>
+        <p:txBody>
+          <a:bodyPr rtlCol="0" anchor="ctr" lIns="0" rIns="0" tIns="0" bIns="0"/>
+          <a:lstStyle/>
+          <a:p>
+            <a:pPr algn="ctr"/>
+            <a:r>
+              <a:rPr sz="1400" b="1">
+                <a:solidFill>
+                  <a:srgbClr val="FFFFFF"/>
+                </a:solidFill>
+                <a:latin typeface="Yu Gothic"/>
+              </a:rPr>
+              <a:t>3</a:t>
+            </a:r>
+          </a:p>
+        </p:txBody>
+      </p:sp>
+      <p:sp>
+        <p:nvSpPr>
+          <p:cNvPr id="18" name="TextBox 17"/>
+          <p:cNvSpPr txBox="1"/>
+          <p:nvPr/>
+        </p:nvSpPr>
+        <p:spPr>
+          <a:xfrm>
+            <a:off x="6035040" y="4617720"/>
+            <a:ext cx="5943600" cy="411480"/>
+          </a:xfrm>
+          <a:prstGeom prst="rect">
+            <a:avLst/>
+          </a:prstGeom>
+          <a:noFill/>
+        </p:spPr>
+        <p:txBody>
+          <a:bodyPr wrap="square" lIns="45720" rIns="45720" tIns="22860" bIns="22860" anchor="ctr">
+            <a:spAutoFit/>
+          </a:bodyPr>
+          <a:lstStyle/>
+          <a:p>
+            <a:pPr algn="l"/>
+            <a:r>
+              <a:rPr sz="2000" b="1">
+                <a:solidFill>
+                  <a:srgbClr val="333333"/>
+                </a:solidFill>
+                <a:latin typeface="Yu Gothic"/>
+              </a:rPr>
+              <a:t>氏名（記名）　拠点が入力</a:t>
+            </a:r>
+          </a:p>
+        </p:txBody>
+      </p:sp>
+      <p:sp>
+        <p:nvSpPr>
+          <p:cNvPr id="19" name="TextBox 18"/>
+          <p:cNvSpPr txBox="1"/>
+          <p:nvPr/>
+        </p:nvSpPr>
+        <p:spPr>
+          <a:xfrm>
+            <a:off x="6035040" y="5001768"/>
+            <a:ext cx="5943600" cy="365760"/>
+          </a:xfrm>
+          <a:prstGeom prst="rect">
+            <a:avLst/>
+          </a:prstGeom>
+          <a:noFill/>
+        </p:spPr>
+        <p:txBody>
+          <a:bodyPr wrap="square" lIns="45720" rIns="45720" tIns="22860" bIns="22860" anchor="t">
+            <a:spAutoFit/>
+          </a:bodyPr>
+          <a:lstStyle/>
+          <a:p>
+            <a:pPr algn="l"/>
+            <a:r>
+              <a:rPr sz="1400" b="0">
+                <a:solidFill>
+                  <a:srgbClr val="666666"/>
+                </a:solidFill>
+                <a:latin typeface="Yu Gothic"/>
+              </a:rPr>
+              <a:t>ドライバーの署名と同じ漢字で</a:t>
+            </a:r>
+          </a:p>
+        </p:txBody>
+      </p:sp>
+      <p:sp>
+        <p:nvSpPr>
+          <p:cNvPr id="20" name="Rounded Rectangle 19"/>
+          <p:cNvSpPr/>
+          <p:nvPr/>
+        </p:nvSpPr>
+        <p:spPr>
+          <a:xfrm>
+            <a:off x="1533205" y="5665259"/>
+            <a:ext cx="1359888" cy="274459"/>
+          </a:xfrm>
+          <a:prstGeom prst="roundRect">
+            <a:avLst>
+              <a:gd name="adj" fmla="val 12000"/>
+            </a:avLst>
+          </a:prstGeom>
+          <a:noFill/>
+          <a:ln w="38100">
+            <a:solidFill>
+              <a:srgbClr val="D32F2F"/>
+            </a:solidFill>
+          </a:ln>
+          <a:effectLst/>
+        </p:spPr>
+        <p:style>
+          <a:lnRef idx="1">
+            <a:schemeClr val="accent1"/>
+          </a:lnRef>
+          <a:fillRef idx="3">
+            <a:schemeClr val="accent1"/>
+          </a:fillRef>
+          <a:effectRef idx="2">
+            <a:schemeClr val="accent1"/>
+          </a:effectRef>
+          <a:fontRef idx="minor">
+            <a:schemeClr val="lt1"/>
+          </a:fontRef>
+        </p:style>
+        <p:txBody>
+          <a:bodyPr rtlCol="0" anchor="ctr"/>
+          <a:lstStyle/>
+          <a:p>
+            <a:pPr algn="ctr"/>
+          </a:p>
+        </p:txBody>
+      </p:sp>
+      <p:cxnSp>
+        <p:nvCxnSpPr>
+          <p:cNvPr id="21" name="Connector 20"/>
+          <p:cNvCxnSpPr/>
+          <p:nvPr/>
+        </p:nvCxnSpPr>
+        <p:spPr>
+          <a:xfrm flipV="1">
+            <a:off x="2893094" y="5760720"/>
+            <a:ext cx="2547586" cy="41769"/>
+          </a:xfrm>
+          <a:prstGeom prst="line">
+            <a:avLst/>
+          </a:prstGeom>
+          <a:ln w="22225">
+            <a:solidFill>
+              <a:srgbClr val="D32F2F"/>
+            </a:solidFill>
+          </a:ln>
+        </p:spPr>
+        <p:style>
+          <a:lnRef idx="2">
+            <a:schemeClr val="accent1"/>
+          </a:lnRef>
+          <a:fillRef idx="0">
+            <a:schemeClr val="accent1"/>
+          </a:fillRef>
+          <a:effectRef idx="1">
+            <a:schemeClr val="accent1"/>
+          </a:effectRef>
+          <a:fontRef idx="minor">
+            <a:schemeClr val="tx1"/>
+          </a:fontRef>
+        </p:style>
+      </p:cxnSp>
+      <p:sp>
+        <p:nvSpPr>
+          <p:cNvPr id="22" name="Oval 21"/>
+          <p:cNvSpPr/>
+          <p:nvPr/>
+        </p:nvSpPr>
+        <p:spPr>
+          <a:xfrm>
+            <a:off x="5477256" y="5568696"/>
             <a:ext cx="384048" cy="384048"/>
           </a:xfrm>
           <a:prstGeom prst="ellipse">
@@ -8775,212 +9062,6 @@
                 </a:solidFill>
                 <a:latin typeface="Yu Gothic"/>
               </a:rPr>
-              <a:t>3</a:t>
-            </a:r>
-          </a:p>
-        </p:txBody>
-      </p:sp>
-      <p:sp>
-        <p:nvSpPr>
-          <p:cNvPr id="18" name="TextBox 17"/>
-          <p:cNvSpPr txBox="1"/>
-          <p:nvPr/>
-        </p:nvSpPr>
-        <p:spPr>
-          <a:xfrm>
-            <a:off x="6035040" y="4617720"/>
-            <a:ext cx="5943600" cy="411480"/>
-          </a:xfrm>
-          <a:prstGeom prst="rect">
-            <a:avLst/>
-          </a:prstGeom>
-          <a:noFill/>
-        </p:spPr>
-        <p:txBody>
-          <a:bodyPr wrap="square" lIns="45720" rIns="45720" tIns="22860" bIns="22860" anchor="ctr">
-            <a:spAutoFit/>
-          </a:bodyPr>
-          <a:lstStyle/>
-          <a:p>
-            <a:pPr algn="l"/>
-            <a:r>
-              <a:rPr sz="2000" b="1">
-                <a:solidFill>
-                  <a:srgbClr val="333333"/>
-                </a:solidFill>
-                <a:latin typeface="Yu Gothic"/>
-              </a:rPr>
-              <a:t>氏名（記名）</a:t>
-            </a:r>
-          </a:p>
-        </p:txBody>
-      </p:sp>
-      <p:sp>
-        <p:nvSpPr>
-          <p:cNvPr id="19" name="TextBox 18"/>
-          <p:cNvSpPr txBox="1"/>
-          <p:nvPr/>
-        </p:nvSpPr>
-        <p:spPr>
-          <a:xfrm>
-            <a:off x="6035040" y="5001768"/>
-            <a:ext cx="5943600" cy="365760"/>
-          </a:xfrm>
-          <a:prstGeom prst="rect">
-            <a:avLst/>
-          </a:prstGeom>
-          <a:noFill/>
-        </p:spPr>
-        <p:txBody>
-          <a:bodyPr wrap="square" lIns="45720" rIns="45720" tIns="22860" bIns="22860" anchor="t">
-            <a:spAutoFit/>
-          </a:bodyPr>
-          <a:lstStyle/>
-          <a:p>
-            <a:pPr algn="l"/>
-            <a:r>
-              <a:rPr sz="1400" b="0">
-                <a:solidFill>
-                  <a:srgbClr val="666666"/>
-                </a:solidFill>
-                <a:latin typeface="Yu Gothic"/>
-              </a:rPr>
-              <a:t>署名と同じ漢字で</a:t>
-            </a:r>
-          </a:p>
-        </p:txBody>
-      </p:sp>
-      <p:sp>
-        <p:nvSpPr>
-          <p:cNvPr id="20" name="Rounded Rectangle 19"/>
-          <p:cNvSpPr/>
-          <p:nvPr/>
-        </p:nvSpPr>
-        <p:spPr>
-          <a:xfrm>
-            <a:off x="1533205" y="5665259"/>
-            <a:ext cx="1359888" cy="274459"/>
-          </a:xfrm>
-          <a:prstGeom prst="roundRect">
-            <a:avLst>
-              <a:gd name="adj" fmla="val 12000"/>
-            </a:avLst>
-          </a:prstGeom>
-          <a:noFill/>
-          <a:ln w="38100">
-            <a:solidFill>
-              <a:srgbClr val="D32F2F"/>
-            </a:solidFill>
-          </a:ln>
-          <a:effectLst/>
-        </p:spPr>
-        <p:style>
-          <a:lnRef idx="1">
-            <a:schemeClr val="accent1"/>
-          </a:lnRef>
-          <a:fillRef idx="3">
-            <a:schemeClr val="accent1"/>
-          </a:fillRef>
-          <a:effectRef idx="2">
-            <a:schemeClr val="accent1"/>
-          </a:effectRef>
-          <a:fontRef idx="minor">
-            <a:schemeClr val="lt1"/>
-          </a:fontRef>
-        </p:style>
-        <p:txBody>
-          <a:bodyPr rtlCol="0" anchor="ctr"/>
-          <a:lstStyle/>
-          <a:p>
-            <a:pPr algn="ctr"/>
-          </a:p>
-        </p:txBody>
-      </p:sp>
-      <p:cxnSp>
-        <p:nvCxnSpPr>
-          <p:cNvPr id="21" name="Connector 20"/>
-          <p:cNvCxnSpPr/>
-          <p:nvPr/>
-        </p:nvCxnSpPr>
-        <p:spPr>
-          <a:xfrm flipV="1">
-            <a:off x="2893094" y="5760720"/>
-            <a:ext cx="2547586" cy="41769"/>
-          </a:xfrm>
-          <a:prstGeom prst="line">
-            <a:avLst/>
-          </a:prstGeom>
-          <a:ln w="22225">
-            <a:solidFill>
-              <a:srgbClr val="D32F2F"/>
-            </a:solidFill>
-          </a:ln>
-        </p:spPr>
-        <p:style>
-          <a:lnRef idx="2">
-            <a:schemeClr val="accent1"/>
-          </a:lnRef>
-          <a:fillRef idx="0">
-            <a:schemeClr val="accent1"/>
-          </a:fillRef>
-          <a:effectRef idx="1">
-            <a:schemeClr val="accent1"/>
-          </a:effectRef>
-          <a:fontRef idx="minor">
-            <a:schemeClr val="tx1"/>
-          </a:fontRef>
-        </p:style>
-      </p:cxnSp>
-      <p:sp>
-        <p:nvSpPr>
-          <p:cNvPr id="22" name="Oval 21"/>
-          <p:cNvSpPr/>
-          <p:nvPr/>
-        </p:nvSpPr>
-        <p:spPr>
-          <a:xfrm>
-            <a:off x="5477256" y="5568696"/>
-            <a:ext cx="384048" cy="384048"/>
-          </a:xfrm>
-          <a:prstGeom prst="ellipse">
-            <a:avLst/>
-          </a:prstGeom>
-          <a:solidFill>
-            <a:srgbClr val="D32F2F"/>
-          </a:solidFill>
-          <a:ln w="19050">
-            <a:solidFill>
-              <a:srgbClr val="FFFFFF"/>
-            </a:solidFill>
-          </a:ln>
-          <a:effectLst/>
-        </p:spPr>
-        <p:style>
-          <a:lnRef idx="1">
-            <a:schemeClr val="accent1"/>
-          </a:lnRef>
-          <a:fillRef idx="3">
-            <a:schemeClr val="accent1"/>
-          </a:fillRef>
-          <a:effectRef idx="2">
-            <a:schemeClr val="accent1"/>
-          </a:effectRef>
-          <a:fontRef idx="minor">
-            <a:schemeClr val="lt1"/>
-          </a:fontRef>
-        </p:style>
-        <p:txBody>
-          <a:bodyPr rtlCol="0" anchor="ctr" lIns="0" rIns="0" tIns="0" bIns="0"/>
-          <a:lstStyle/>
-          <a:p>
-            <a:pPr algn="ctr"/>
-            <a:r>
-              <a:rPr sz="1400" b="1">
-                <a:solidFill>
-                  <a:srgbClr val="FFFFFF"/>
-                </a:solidFill>
-                <a:latin typeface="Yu Gothic"/>
-              </a:rPr>
               <a:t>4</a:t>
             </a:r>
           </a:p>
@@ -9052,6 +9133,41 @@
                 <a:latin typeface="Yu Gothic"/>
               </a:rPr>
               <a:t>西暦で入力（yyyy/mm/dd）</a:t>
+            </a:r>
+          </a:p>
+        </p:txBody>
+      </p:sp>
+      <p:sp>
+        <p:nvSpPr>
+          <p:cNvPr id="25" name="TextBox 24"/>
+          <p:cNvSpPr txBox="1"/>
+          <p:nvPr/>
+        </p:nvSpPr>
+        <p:spPr>
+          <a:xfrm>
+            <a:off x="5669280" y="1325880"/>
+            <a:ext cx="6035040" cy="365760"/>
+          </a:xfrm>
+          <a:prstGeom prst="rect">
+            <a:avLst/>
+          </a:prstGeom>
+          <a:noFill/>
+        </p:spPr>
+        <p:txBody>
+          <a:bodyPr wrap="square" lIns="45720" rIns="45720" tIns="22860" bIns="22860" anchor="t">
+            <a:spAutoFit/>
+          </a:bodyPr>
+          <a:lstStyle/>
+          <a:p>
+            <a:pPr algn="l"/>
+            <a:r>
+              <a:rPr sz="1300" b="1">
+                <a:solidFill>
+                  <a:srgbClr val="666666"/>
+                </a:solidFill>
+                <a:latin typeface="Yu Gothic"/>
+              </a:rPr>
+              <a:t>赤枠：ドライバーが入力　／　緑枠：拠点が入力</a:t>
             </a:r>
           </a:p>
         </p:txBody>
@@ -9297,7 +9413,7 @@
                 </a:solidFill>
                 <a:latin typeface="Yu Gothic"/>
               </a:rPr>
-              <a:t>⚠ 送信は1通200円。送る前に、送付先（名前・メールアドレス）をもう一度確認</a:t>
+              <a:t>⚠ 送信は1通240円（税込）。送る前に、送付先（名前・メールアドレス）をもう一度確認</a:t>
             </a:r>
           </a:p>
         </p:txBody>
@@ -20526,7 +20642,7 @@
                 </a:solidFill>
                 <a:latin typeface="Yu Gothic"/>
               </a:rPr>
-              <a:t>ドライバーの入力は3か所</a:t>
+              <a:t>入力する場所は3か所</a:t>
             </a:r>
           </a:p>
         </p:txBody>

--- a/out/登録の流れ_書類準備まで.pptx
+++ b/out/登録の流れ_書類準備まで.pptx
@@ -4004,14 +4004,14 @@
                 </a:solidFill>
                 <a:latin typeface="Yu Gothic"/>
               </a:rPr>
-              <a:t>⑤ このページは「次へ」を押すだけでOK</a:t>
+              <a:t>⑤ 別紙（配送金額）を添付して「次へ」</a:t>
             </a:r>
           </a:p>
         </p:txBody>
       </p:sp>
       <p:pic>
         <p:nvPicPr>
-          <p:cNvPr id="5" name="Picture 4" descr="7.png"/>
+          <p:cNvPr id="5" name="Picture 4" descr="up.png"/>
           <p:cNvPicPr>
             <a:picLocks noChangeAspect="1"/>
           </p:cNvPicPr>
@@ -4025,19 +4025,497 @@
         </p:blipFill>
         <p:spPr>
           <a:xfrm>
-            <a:off x="1271037" y="1325880"/>
-            <a:ext cx="9619444" cy="4892040"/>
+            <a:off x="411480" y="1325880"/>
+            <a:ext cx="7648754" cy="3840480"/>
           </a:xfrm>
           <a:prstGeom prst="rect">
             <a:avLst/>
           </a:prstGeom>
           <a:ln w="12700">
             <a:solidFill>
-              <a:srgbClr val="CCCCCC"/>
+              <a:srgbClr val="BBBBBB"/>
             </a:solidFill>
           </a:ln>
         </p:spPr>
       </p:pic>
+      <p:sp>
+        <p:nvSpPr>
+          <p:cNvPr id="6" name="Rounded Rectangle 5"/>
+          <p:cNvSpPr/>
+          <p:nvPr/>
+        </p:nvSpPr>
+        <p:spPr>
+          <a:xfrm>
+            <a:off x="4710540" y="2283642"/>
+            <a:ext cx="862181" cy="1119823"/>
+          </a:xfrm>
+          <a:prstGeom prst="roundRect">
+            <a:avLst>
+              <a:gd name="adj" fmla="val 10000"/>
+            </a:avLst>
+          </a:prstGeom>
+          <a:noFill/>
+          <a:ln w="44450">
+            <a:solidFill>
+              <a:srgbClr val="D32F2F"/>
+            </a:solidFill>
+          </a:ln>
+          <a:effectLst/>
+        </p:spPr>
+        <p:style>
+          <a:lnRef idx="1">
+            <a:schemeClr val="accent1"/>
+          </a:lnRef>
+          <a:fillRef idx="3">
+            <a:schemeClr val="accent1"/>
+          </a:fillRef>
+          <a:effectRef idx="2">
+            <a:schemeClr val="accent1"/>
+          </a:effectRef>
+          <a:fontRef idx="minor">
+            <a:schemeClr val="lt1"/>
+          </a:fontRef>
+        </p:style>
+        <p:txBody>
+          <a:bodyPr rtlCol="0" anchor="ctr"/>
+          <a:lstStyle/>
+          <a:p>
+            <a:pPr algn="ctr"/>
+          </a:p>
+        </p:txBody>
+      </p:sp>
+      <p:sp>
+        <p:nvSpPr>
+          <p:cNvPr id="7" name="Oval 6"/>
+          <p:cNvSpPr/>
+          <p:nvPr/>
+        </p:nvSpPr>
+        <p:spPr>
+          <a:xfrm>
+            <a:off x="4463652" y="2036754"/>
+            <a:ext cx="384048" cy="384048"/>
+          </a:xfrm>
+          <a:prstGeom prst="ellipse">
+            <a:avLst/>
+          </a:prstGeom>
+          <a:solidFill>
+            <a:srgbClr val="D32F2F"/>
+          </a:solidFill>
+          <a:ln w="19050">
+            <a:solidFill>
+              <a:srgbClr val="FFFFFF"/>
+            </a:solidFill>
+          </a:ln>
+          <a:effectLst/>
+        </p:spPr>
+        <p:style>
+          <a:lnRef idx="1">
+            <a:schemeClr val="accent1"/>
+          </a:lnRef>
+          <a:fillRef idx="3">
+            <a:schemeClr val="accent1"/>
+          </a:fillRef>
+          <a:effectRef idx="2">
+            <a:schemeClr val="accent1"/>
+          </a:effectRef>
+          <a:fontRef idx="minor">
+            <a:schemeClr val="lt1"/>
+          </a:fontRef>
+        </p:style>
+        <p:txBody>
+          <a:bodyPr rtlCol="0" anchor="ctr" lIns="0" rIns="0" tIns="0" bIns="0"/>
+          <a:lstStyle/>
+          <a:p>
+            <a:pPr algn="ctr"/>
+            <a:r>
+              <a:rPr sz="1400" b="1">
+                <a:solidFill>
+                  <a:srgbClr val="FFFFFF"/>
+                </a:solidFill>
+                <a:latin typeface="Yu Gothic"/>
+              </a:rPr>
+              <a:t>1</a:t>
+            </a:r>
+          </a:p>
+        </p:txBody>
+      </p:sp>
+      <p:sp>
+        <p:nvSpPr>
+          <p:cNvPr id="8" name="Rounded Rectangle 7"/>
+          <p:cNvSpPr/>
+          <p:nvPr/>
+        </p:nvSpPr>
+        <p:spPr>
+          <a:xfrm>
+            <a:off x="4271743" y="4864090"/>
+            <a:ext cx="789719" cy="254306"/>
+          </a:xfrm>
+          <a:prstGeom prst="roundRect">
+            <a:avLst>
+              <a:gd name="adj" fmla="val 10000"/>
+            </a:avLst>
+          </a:prstGeom>
+          <a:noFill/>
+          <a:ln w="44450">
+            <a:solidFill>
+              <a:srgbClr val="D32F2F"/>
+            </a:solidFill>
+          </a:ln>
+          <a:effectLst/>
+        </p:spPr>
+        <p:style>
+          <a:lnRef idx="1">
+            <a:schemeClr val="accent1"/>
+          </a:lnRef>
+          <a:fillRef idx="3">
+            <a:schemeClr val="accent1"/>
+          </a:fillRef>
+          <a:effectRef idx="2">
+            <a:schemeClr val="accent1"/>
+          </a:effectRef>
+          <a:fontRef idx="minor">
+            <a:schemeClr val="lt1"/>
+          </a:fontRef>
+        </p:style>
+        <p:txBody>
+          <a:bodyPr rtlCol="0" anchor="ctr"/>
+          <a:lstStyle/>
+          <a:p>
+            <a:pPr algn="ctr"/>
+          </a:p>
+        </p:txBody>
+      </p:sp>
+      <p:sp>
+        <p:nvSpPr>
+          <p:cNvPr id="9" name="Oval 8"/>
+          <p:cNvSpPr/>
+          <p:nvPr/>
+        </p:nvSpPr>
+        <p:spPr>
+          <a:xfrm>
+            <a:off x="4024855" y="4617202"/>
+            <a:ext cx="384048" cy="384048"/>
+          </a:xfrm>
+          <a:prstGeom prst="ellipse">
+            <a:avLst/>
+          </a:prstGeom>
+          <a:solidFill>
+            <a:srgbClr val="D32F2F"/>
+          </a:solidFill>
+          <a:ln w="19050">
+            <a:solidFill>
+              <a:srgbClr val="FFFFFF"/>
+            </a:solidFill>
+          </a:ln>
+          <a:effectLst/>
+        </p:spPr>
+        <p:style>
+          <a:lnRef idx="1">
+            <a:schemeClr val="accent1"/>
+          </a:lnRef>
+          <a:fillRef idx="3">
+            <a:schemeClr val="accent1"/>
+          </a:fillRef>
+          <a:effectRef idx="2">
+            <a:schemeClr val="accent1"/>
+          </a:effectRef>
+          <a:fontRef idx="minor">
+            <a:schemeClr val="lt1"/>
+          </a:fontRef>
+        </p:style>
+        <p:txBody>
+          <a:bodyPr rtlCol="0" anchor="ctr" lIns="0" rIns="0" tIns="0" bIns="0"/>
+          <a:lstStyle/>
+          <a:p>
+            <a:pPr algn="ctr"/>
+            <a:r>
+              <a:rPr sz="1400" b="1">
+                <a:solidFill>
+                  <a:srgbClr val="FFFFFF"/>
+                </a:solidFill>
+                <a:latin typeface="Yu Gothic"/>
+              </a:rPr>
+              <a:t>2</a:t>
+            </a:r>
+          </a:p>
+        </p:txBody>
+      </p:sp>
+      <p:sp>
+        <p:nvSpPr>
+          <p:cNvPr id="10" name="Rounded Rectangle 9"/>
+          <p:cNvSpPr/>
+          <p:nvPr/>
+        </p:nvSpPr>
+        <p:spPr>
+          <a:xfrm>
+            <a:off x="8288834" y="1463040"/>
+            <a:ext cx="3461205" cy="1737360"/>
+          </a:xfrm>
+          <a:prstGeom prst="roundRect">
+            <a:avLst>
+              <a:gd name="adj" fmla="val 8000"/>
+            </a:avLst>
+          </a:prstGeom>
+          <a:solidFill>
+            <a:srgbClr val="FDECEC"/>
+          </a:solidFill>
+          <a:ln w="19050">
+            <a:solidFill>
+              <a:srgbClr val="D32F2F"/>
+            </a:solidFill>
+          </a:ln>
+          <a:effectLst/>
+        </p:spPr>
+        <p:style>
+          <a:lnRef idx="1">
+            <a:schemeClr val="accent1"/>
+          </a:lnRef>
+          <a:fillRef idx="3">
+            <a:schemeClr val="accent1"/>
+          </a:fillRef>
+          <a:effectRef idx="2">
+            <a:schemeClr val="accent1"/>
+          </a:effectRef>
+          <a:fontRef idx="minor">
+            <a:schemeClr val="lt1"/>
+          </a:fontRef>
+        </p:style>
+        <p:txBody>
+          <a:bodyPr rtlCol="0" anchor="ctr"/>
+          <a:lstStyle/>
+          <a:p>
+            <a:pPr algn="ctr"/>
+          </a:p>
+        </p:txBody>
+      </p:sp>
+      <p:sp>
+        <p:nvSpPr>
+          <p:cNvPr id="11" name="Oval 10"/>
+          <p:cNvSpPr/>
+          <p:nvPr/>
+        </p:nvSpPr>
+        <p:spPr>
+          <a:xfrm>
+            <a:off x="8416850" y="1636776"/>
+            <a:ext cx="384048" cy="384048"/>
+          </a:xfrm>
+          <a:prstGeom prst="ellipse">
+            <a:avLst/>
+          </a:prstGeom>
+          <a:solidFill>
+            <a:srgbClr val="D32F2F"/>
+          </a:solidFill>
+          <a:ln w="19050">
+            <a:solidFill>
+              <a:srgbClr val="FFFFFF"/>
+            </a:solidFill>
+          </a:ln>
+          <a:effectLst/>
+        </p:spPr>
+        <p:style>
+          <a:lnRef idx="1">
+            <a:schemeClr val="accent1"/>
+          </a:lnRef>
+          <a:fillRef idx="3">
+            <a:schemeClr val="accent1"/>
+          </a:fillRef>
+          <a:effectRef idx="2">
+            <a:schemeClr val="accent1"/>
+          </a:effectRef>
+          <a:fontRef idx="minor">
+            <a:schemeClr val="lt1"/>
+          </a:fontRef>
+        </p:style>
+        <p:txBody>
+          <a:bodyPr rtlCol="0" anchor="ctr" lIns="0" rIns="0" tIns="0" bIns="0"/>
+          <a:lstStyle/>
+          <a:p>
+            <a:pPr algn="ctr"/>
+            <a:r>
+              <a:rPr sz="1400" b="1">
+                <a:solidFill>
+                  <a:srgbClr val="FFFFFF"/>
+                </a:solidFill>
+                <a:latin typeface="Yu Gothic"/>
+              </a:rPr>
+              <a:t>1</a:t>
+            </a:r>
+          </a:p>
+        </p:txBody>
+      </p:sp>
+      <p:sp>
+        <p:nvSpPr>
+          <p:cNvPr id="12" name="TextBox 11"/>
+          <p:cNvSpPr txBox="1"/>
+          <p:nvPr/>
+        </p:nvSpPr>
+        <p:spPr>
+          <a:xfrm>
+            <a:off x="8928914" y="1554480"/>
+            <a:ext cx="2729685" cy="1554480"/>
+          </a:xfrm>
+          <a:prstGeom prst="rect">
+            <a:avLst/>
+          </a:prstGeom>
+          <a:noFill/>
+        </p:spPr>
+        <p:txBody>
+          <a:bodyPr wrap="square" lIns="45720" rIns="45720" tIns="22860" bIns="22860" anchor="ctr">
+            <a:spAutoFit/>
+          </a:bodyPr>
+          <a:lstStyle/>
+          <a:p>
+            <a:pPr algn="l"/>
+            <a:r>
+              <a:rPr sz="1600" b="1">
+                <a:solidFill>
+                  <a:srgbClr val="333333"/>
+                </a:solidFill>
+                <a:latin typeface="Yu Gothic"/>
+              </a:rPr>
+              <a:t>配送金額が載っている別紙（PDF）を、右のアップロードに添付</a:t>
+            </a:r>
+          </a:p>
+        </p:txBody>
+      </p:sp>
+      <p:sp>
+        <p:nvSpPr>
+          <p:cNvPr id="13" name="Rounded Rectangle 12"/>
+          <p:cNvSpPr/>
+          <p:nvPr/>
+        </p:nvSpPr>
+        <p:spPr>
+          <a:xfrm>
+            <a:off x="8288834" y="3474720"/>
+            <a:ext cx="3461205" cy="822960"/>
+          </a:xfrm>
+          <a:prstGeom prst="roundRect">
+            <a:avLst>
+              <a:gd name="adj" fmla="val 8000"/>
+            </a:avLst>
+          </a:prstGeom>
+          <a:solidFill>
+            <a:srgbClr val="E8F1FB"/>
+          </a:solidFill>
+          <a:ln w="19050">
+            <a:solidFill>
+              <a:srgbClr val="126EC9"/>
+            </a:solidFill>
+          </a:ln>
+          <a:effectLst/>
+        </p:spPr>
+        <p:style>
+          <a:lnRef idx="1">
+            <a:schemeClr val="accent1"/>
+          </a:lnRef>
+          <a:fillRef idx="3">
+            <a:schemeClr val="accent1"/>
+          </a:fillRef>
+          <a:effectRef idx="2">
+            <a:schemeClr val="accent1"/>
+          </a:effectRef>
+          <a:fontRef idx="minor">
+            <a:schemeClr val="lt1"/>
+          </a:fontRef>
+        </p:style>
+        <p:txBody>
+          <a:bodyPr rtlCol="0" anchor="ctr"/>
+          <a:lstStyle/>
+          <a:p>
+            <a:pPr algn="ctr"/>
+          </a:p>
+        </p:txBody>
+      </p:sp>
+      <p:sp>
+        <p:nvSpPr>
+          <p:cNvPr id="14" name="Oval 13"/>
+          <p:cNvSpPr/>
+          <p:nvPr/>
+        </p:nvSpPr>
+        <p:spPr>
+          <a:xfrm>
+            <a:off x="8416850" y="3694176"/>
+            <a:ext cx="384048" cy="384048"/>
+          </a:xfrm>
+          <a:prstGeom prst="ellipse">
+            <a:avLst/>
+          </a:prstGeom>
+          <a:solidFill>
+            <a:srgbClr val="D32F2F"/>
+          </a:solidFill>
+          <a:ln w="19050">
+            <a:solidFill>
+              <a:srgbClr val="FFFFFF"/>
+            </a:solidFill>
+          </a:ln>
+          <a:effectLst/>
+        </p:spPr>
+        <p:style>
+          <a:lnRef idx="1">
+            <a:schemeClr val="accent1"/>
+          </a:lnRef>
+          <a:fillRef idx="3">
+            <a:schemeClr val="accent1"/>
+          </a:fillRef>
+          <a:effectRef idx="2">
+            <a:schemeClr val="accent1"/>
+          </a:effectRef>
+          <a:fontRef idx="minor">
+            <a:schemeClr val="lt1"/>
+          </a:fontRef>
+        </p:style>
+        <p:txBody>
+          <a:bodyPr rtlCol="0" anchor="ctr" lIns="0" rIns="0" tIns="0" bIns="0"/>
+          <a:lstStyle/>
+          <a:p>
+            <a:pPr algn="ctr"/>
+            <a:r>
+              <a:rPr sz="1400" b="1">
+                <a:solidFill>
+                  <a:srgbClr val="FFFFFF"/>
+                </a:solidFill>
+                <a:latin typeface="Yu Gothic"/>
+              </a:rPr>
+              <a:t>2</a:t>
+            </a:r>
+          </a:p>
+        </p:txBody>
+      </p:sp>
+      <p:sp>
+        <p:nvSpPr>
+          <p:cNvPr id="15" name="TextBox 14"/>
+          <p:cNvSpPr txBox="1"/>
+          <p:nvPr/>
+        </p:nvSpPr>
+        <p:spPr>
+          <a:xfrm>
+            <a:off x="8928914" y="3474720"/>
+            <a:ext cx="2729685" cy="822960"/>
+          </a:xfrm>
+          <a:prstGeom prst="rect">
+            <a:avLst/>
+          </a:prstGeom>
+          <a:noFill/>
+        </p:spPr>
+        <p:txBody>
+          <a:bodyPr wrap="square" lIns="45720" rIns="45720" tIns="22860" bIns="22860" anchor="ctr">
+            <a:spAutoFit/>
+          </a:bodyPr>
+          <a:lstStyle/>
+          <a:p>
+            <a:pPr algn="l"/>
+            <a:r>
+              <a:rPr sz="1600" b="1">
+                <a:solidFill>
+                  <a:srgbClr val="333333"/>
+                </a:solidFill>
+                <a:latin typeface="Yu Gothic"/>
+              </a:rPr>
+              <a:t>「次へ」をクリック</a:t>
+            </a:r>
+          </a:p>
+        </p:txBody>
+      </p:sp>
     </p:spTree>
   </p:cSld>
   <p:clrMapOvr>
@@ -11818,8 +12296,8 @@
         </p:nvSpPr>
         <p:spPr>
           <a:xfrm>
-            <a:off x="548640" y="5989320"/>
-            <a:ext cx="10972800" cy="365760"/>
+            <a:off x="548640" y="5897880"/>
+            <a:ext cx="11064240" cy="502920"/>
           </a:xfrm>
           <a:prstGeom prst="rect">
             <a:avLst/>
@@ -11834,13 +12312,25 @@
           <a:p>
             <a:pPr algn="l"/>
             <a:r>
-              <a:rPr sz="1300" b="0">
+              <a:rPr sz="1200" b="0">
                 <a:solidFill>
                   <a:srgbClr val="666666"/>
                 </a:solidFill>
                 <a:latin typeface="Yu Gothic"/>
               </a:rPr>
               <a:t>外国籍の方も免許証記載の名前</a:t>
+            </a:r>
+          </a:p>
+          <a:p>
+            <a:pPr algn="l"/>
+            <a:r>
+              <a:rPr sz="1200" b="0">
+                <a:solidFill>
+                  <a:srgbClr val="666666"/>
+                </a:solidFill>
+                <a:latin typeface="Yu Gothic"/>
+              </a:rPr>
+              <a:t>バイカー・ウォーカーは、提出した本人確認書類（マイナンバーカード・パスポート）に載っている字のとおりに</a:t>
             </a:r>
           </a:p>
         </p:txBody>
@@ -18814,7 +19304,19 @@
                 </a:solidFill>
                 <a:latin typeface="Yu Gothic"/>
               </a:rPr>
-              <a:t>バイカー・ウォーカーは、免許証の代わりに保険証でも可</a:t>
+              <a:t>バイカー・ウォーカーは、免許証の代わりに</a:t>
+            </a:r>
+          </a:p>
+          <a:p>
+            <a:pPr algn="l"/>
+            <a:r>
+              <a:rPr sz="1200" b="1">
+                <a:solidFill>
+                  <a:srgbClr val="333333"/>
+                </a:solidFill>
+                <a:latin typeface="Yu Gothic"/>
+              </a:rPr>
+              <a:t>マイナンバーカードやパスポートでも可</a:t>
             </a:r>
           </a:p>
         </p:txBody>
@@ -20151,6 +20653,18 @@
                 <a:latin typeface="Yu Gothic"/>
               </a:rPr>
               <a:t>テンプレートを選ぶ</a:t>
+            </a:r>
+          </a:p>
+          <a:p>
+            <a:pPr algn="l"/>
+            <a:r>
+              <a:rPr sz="1600" b="0">
+                <a:solidFill>
+                  <a:srgbClr val="333333"/>
+                </a:solidFill>
+                <a:latin typeface="Yu Gothic"/>
+              </a:rPr>
+              <a:t>配送金額の別紙を添付</a:t>
             </a:r>
           </a:p>
         </p:txBody>

--- a/out/登録の流れ_書類準備まで.pptx
+++ b/out/登録の流れ_書類準備まで.pptx
@@ -13970,8 +13970,91 @@
         </p:nvSpPr>
         <p:spPr>
           <a:xfrm>
-            <a:off x="4663440" y="5577840"/>
+            <a:off x="4663440" y="4983480"/>
             <a:ext cx="6949440" cy="640080"/>
+          </a:xfrm>
+          <a:prstGeom prst="roundRect">
+            <a:avLst>
+              <a:gd name="adj" fmla="val 8000"/>
+            </a:avLst>
+          </a:prstGeom>
+          <a:solidFill>
+            <a:srgbClr val="FDECEC"/>
+          </a:solidFill>
+          <a:ln w="25400">
+            <a:solidFill>
+              <a:srgbClr val="D32F2F"/>
+            </a:solidFill>
+          </a:ln>
+          <a:effectLst/>
+        </p:spPr>
+        <p:style>
+          <a:lnRef idx="1">
+            <a:schemeClr val="accent1"/>
+          </a:lnRef>
+          <a:fillRef idx="3">
+            <a:schemeClr val="accent1"/>
+          </a:fillRef>
+          <a:effectRef idx="2">
+            <a:schemeClr val="accent1"/>
+          </a:effectRef>
+          <a:fontRef idx="minor">
+            <a:schemeClr val="lt1"/>
+          </a:fontRef>
+        </p:style>
+        <p:txBody>
+          <a:bodyPr rtlCol="0" anchor="ctr"/>
+          <a:lstStyle/>
+          <a:p>
+            <a:pPr algn="ctr"/>
+          </a:p>
+        </p:txBody>
+      </p:sp>
+      <p:sp>
+        <p:nvSpPr>
+          <p:cNvPr id="23" name="TextBox 22"/>
+          <p:cNvSpPr txBox="1"/>
+          <p:nvPr/>
+        </p:nvSpPr>
+        <p:spPr>
+          <a:xfrm>
+            <a:off x="4800600" y="4983480"/>
+            <a:ext cx="6675120" cy="640080"/>
+          </a:xfrm>
+          <a:prstGeom prst="rect">
+            <a:avLst/>
+          </a:prstGeom>
+          <a:noFill/>
+        </p:spPr>
+        <p:txBody>
+          <a:bodyPr wrap="square" lIns="45720" rIns="45720" tIns="22860" bIns="22860" anchor="ctr">
+            <a:spAutoFit/>
+          </a:bodyPr>
+          <a:lstStyle/>
+          <a:p>
+            <a:pPr algn="l"/>
+            <a:r>
+              <a:rPr sz="1400" b="1">
+                <a:solidFill>
+                  <a:srgbClr val="333333"/>
+                </a:solidFill>
+                <a:latin typeface="Yu Gothic"/>
+              </a:rPr>
+              <a:t>⚠ バイカー・ウォーカー→軽バンに変更：アカウントを消して作り直し</a:t>
+            </a:r>
+          </a:p>
+        </p:txBody>
+      </p:sp>
+      <p:sp>
+        <p:nvSpPr>
+          <p:cNvPr id="24" name="Rounded Rectangle 23"/>
+          <p:cNvSpPr/>
+          <p:nvPr/>
+        </p:nvSpPr>
+        <p:spPr>
+          <a:xfrm>
+            <a:off x="4663440" y="5715000"/>
+            <a:ext cx="6949440" cy="594360"/>
           </a:xfrm>
           <a:prstGeom prst="roundRect">
             <a:avLst>
@@ -14012,14 +14095,14 @@
       </p:sp>
       <p:sp>
         <p:nvSpPr>
-          <p:cNvPr id="23" name="TextBox 22"/>
-          <p:cNvSpPr txBox="1"/>
-          <p:nvPr/>
-        </p:nvSpPr>
-        <p:spPr>
-          <a:xfrm>
-            <a:off x="4800600" y="5577840"/>
-            <a:ext cx="6675120" cy="640080"/>
+          <p:cNvPr id="25" name="TextBox 24"/>
+          <p:cNvSpPr txBox="1"/>
+          <p:nvPr/>
+        </p:nvSpPr>
+        <p:spPr>
+          <a:xfrm>
+            <a:off x="4800600" y="5715000"/>
+            <a:ext cx="6675120" cy="594360"/>
           </a:xfrm>
           <a:prstGeom prst="rect">
             <a:avLst/>
@@ -22214,8 +22297,8 @@
         </p:nvSpPr>
         <p:spPr>
           <a:xfrm>
-            <a:off x="411480" y="3108960"/>
-            <a:ext cx="5577840" cy="2651760"/>
+            <a:off x="411480" y="3063240"/>
+            <a:ext cx="5577840" cy="2148840"/>
           </a:xfrm>
           <a:prstGeom prst="roundRect">
             <a:avLst>
@@ -22262,7 +22345,7 @@
         </p:nvSpPr>
         <p:spPr>
           <a:xfrm>
-            <a:off x="411480" y="3108960"/>
+            <a:off x="411480" y="3063240"/>
             <a:ext cx="5577840" cy="457200"/>
           </a:xfrm>
           <a:prstGeom prst="roundRect">
@@ -22308,7 +22391,7 @@
         </p:nvSpPr>
         <p:spPr>
           <a:xfrm>
-            <a:off x="411480" y="3337560"/>
+            <a:off x="411480" y="3291840"/>
             <a:ext cx="5577840" cy="228600"/>
           </a:xfrm>
           <a:prstGeom prst="rect">
@@ -22352,7 +22435,7 @@
         </p:nvSpPr>
         <p:spPr>
           <a:xfrm>
-            <a:off x="411480" y="3108960"/>
+            <a:off x="411480" y="3063240"/>
             <a:ext cx="5577840" cy="457200"/>
           </a:xfrm>
           <a:prstGeom prst="rect">
@@ -22387,8 +22470,8 @@
         </p:nvSpPr>
         <p:spPr>
           <a:xfrm>
-            <a:off x="594360" y="3703320"/>
-            <a:ext cx="5212080" cy="2011680"/>
+            <a:off x="594360" y="3611880"/>
+            <a:ext cx="5212080" cy="1554480"/>
           </a:xfrm>
           <a:prstGeom prst="rect">
             <a:avLst/>
@@ -22403,7 +22486,7 @@
           <a:p>
             <a:pPr algn="l"/>
             <a:r>
-              <a:rPr sz="1700" b="1">
+              <a:rPr sz="1600" b="1">
                 <a:solidFill>
                   <a:srgbClr val="333333"/>
                 </a:solidFill>
@@ -22415,7 +22498,7 @@
           <a:p>
             <a:pPr algn="l"/>
             <a:r>
-              <a:rPr sz="1700" b="1">
+              <a:rPr sz="1600" b="1">
                 <a:solidFill>
                   <a:srgbClr val="333333"/>
                 </a:solidFill>
@@ -22427,7 +22510,7 @@
           <a:p>
             <a:pPr algn="l"/>
             <a:r>
-              <a:rPr sz="1700" b="1">
+              <a:rPr sz="1600" b="1">
                 <a:solidFill>
                   <a:srgbClr val="333333"/>
                 </a:solidFill>
@@ -22439,7 +22522,7 @@
           <a:p>
             <a:pPr algn="l"/>
             <a:r>
-              <a:rPr sz="1700" b="1">
+              <a:rPr sz="1600" b="1">
                 <a:solidFill>
                   <a:srgbClr val="333333"/>
                 </a:solidFill>
@@ -22458,8 +22541,8 @@
         </p:nvSpPr>
         <p:spPr>
           <a:xfrm>
-            <a:off x="6172200" y="3108960"/>
-            <a:ext cx="5577840" cy="2651760"/>
+            <a:off x="6172200" y="3063240"/>
+            <a:ext cx="5577840" cy="2148840"/>
           </a:xfrm>
           <a:prstGeom prst="roundRect">
             <a:avLst>
@@ -22506,7 +22589,7 @@
         </p:nvSpPr>
         <p:spPr>
           <a:xfrm>
-            <a:off x="6172200" y="3108960"/>
+            <a:off x="6172200" y="3063240"/>
             <a:ext cx="5577840" cy="457200"/>
           </a:xfrm>
           <a:prstGeom prst="roundRect">
@@ -22552,7 +22635,7 @@
         </p:nvSpPr>
         <p:spPr>
           <a:xfrm>
-            <a:off x="6172200" y="3337560"/>
+            <a:off x="6172200" y="3291840"/>
             <a:ext cx="5577840" cy="228600"/>
           </a:xfrm>
           <a:prstGeom prst="rect">
@@ -22596,7 +22679,7 @@
         </p:nvSpPr>
         <p:spPr>
           <a:xfrm>
-            <a:off x="6172200" y="3108960"/>
+            <a:off x="6172200" y="3063240"/>
             <a:ext cx="5577840" cy="457200"/>
           </a:xfrm>
           <a:prstGeom prst="rect">
@@ -22631,8 +22714,8 @@
         </p:nvSpPr>
         <p:spPr>
           <a:xfrm>
-            <a:off x="6355080" y="3703320"/>
-            <a:ext cx="5212080" cy="2011680"/>
+            <a:off x="6355080" y="3611880"/>
+            <a:ext cx="5212080" cy="1554480"/>
           </a:xfrm>
           <a:prstGeom prst="rect">
             <a:avLst/>
@@ -22647,7 +22730,7 @@
           <a:p>
             <a:pPr algn="l"/>
             <a:r>
-              <a:rPr sz="1700" b="1">
+              <a:rPr sz="1600" b="1">
                 <a:solidFill>
                   <a:srgbClr val="333333"/>
                 </a:solidFill>
@@ -22659,7 +22742,7 @@
           <a:p>
             <a:pPr algn="l"/>
             <a:r>
-              <a:rPr sz="1700" b="1">
+              <a:rPr sz="1600" b="1">
                 <a:solidFill>
                   <a:srgbClr val="333333"/>
                 </a:solidFill>
@@ -22671,7 +22754,7 @@
           <a:p>
             <a:pPr algn="l"/>
             <a:r>
-              <a:rPr sz="1700" b="1">
+              <a:rPr sz="1600" b="1">
                 <a:solidFill>
                   <a:srgbClr val="333333"/>
                 </a:solidFill>
@@ -22683,13 +22766,108 @@
           <a:p>
             <a:pPr algn="l"/>
             <a:r>
-              <a:rPr sz="1700" b="1">
+              <a:rPr sz="1600" b="1">
                 <a:solidFill>
                   <a:srgbClr val="333333"/>
                 </a:solidFill>
                 <a:latin typeface="Yu Gothic"/>
               </a:rPr>
               <a:t>下の行（橙枠）</a:t>
+            </a:r>
+          </a:p>
+        </p:txBody>
+      </p:sp>
+      <p:sp>
+        <p:nvSpPr>
+          <p:cNvPr id="19" name="Rounded Rectangle 18"/>
+          <p:cNvSpPr/>
+          <p:nvPr/>
+        </p:nvSpPr>
+        <p:spPr>
+          <a:xfrm>
+            <a:off x="411480" y="5394960"/>
+            <a:ext cx="11338560" cy="777240"/>
+          </a:xfrm>
+          <a:prstGeom prst="roundRect">
+            <a:avLst>
+              <a:gd name="adj" fmla="val 8000"/>
+            </a:avLst>
+          </a:prstGeom>
+          <a:solidFill>
+            <a:srgbClr val="FDECEC"/>
+          </a:solidFill>
+          <a:ln w="25400">
+            <a:solidFill>
+              <a:srgbClr val="D32F2F"/>
+            </a:solidFill>
+          </a:ln>
+          <a:effectLst/>
+        </p:spPr>
+        <p:style>
+          <a:lnRef idx="1">
+            <a:schemeClr val="accent1"/>
+          </a:lnRef>
+          <a:fillRef idx="3">
+            <a:schemeClr val="accent1"/>
+          </a:fillRef>
+          <a:effectRef idx="2">
+            <a:schemeClr val="accent1"/>
+          </a:effectRef>
+          <a:fontRef idx="minor">
+            <a:schemeClr val="lt1"/>
+          </a:fontRef>
+        </p:style>
+        <p:txBody>
+          <a:bodyPr rtlCol="0" anchor="ctr"/>
+          <a:lstStyle/>
+          <a:p>
+            <a:pPr algn="ctr"/>
+          </a:p>
+        </p:txBody>
+      </p:sp>
+      <p:sp>
+        <p:nvSpPr>
+          <p:cNvPr id="20" name="TextBox 19"/>
+          <p:cNvSpPr txBox="1"/>
+          <p:nvPr/>
+        </p:nvSpPr>
+        <p:spPr>
+          <a:xfrm>
+            <a:off x="594360" y="5394960"/>
+            <a:ext cx="10972800" cy="777240"/>
+          </a:xfrm>
+          <a:prstGeom prst="rect">
+            <a:avLst/>
+          </a:prstGeom>
+          <a:noFill/>
+        </p:spPr>
+        <p:txBody>
+          <a:bodyPr wrap="square" lIns="45720" rIns="45720" tIns="22860" bIns="22860" anchor="ctr">
+            <a:spAutoFit/>
+          </a:bodyPr>
+          <a:lstStyle/>
+          <a:p>
+            <a:pPr algn="l"/>
+            <a:r>
+              <a:rPr sz="1500" b="1">
+                <a:solidFill>
+                  <a:srgbClr val="333333"/>
+                </a:solidFill>
+                <a:latin typeface="Yu Gothic"/>
+              </a:rPr>
+              <a:t>⚠ 登録のあとで、バイカー・ウォーカーから軽バンに変えたいとき</a:t>
+            </a:r>
+          </a:p>
+          <a:p>
+            <a:pPr algn="l"/>
+            <a:r>
+              <a:rPr sz="1500" b="1">
+                <a:solidFill>
+                  <a:srgbClr val="333333"/>
+                </a:solidFill>
+                <a:latin typeface="Yu Gothic"/>
+              </a:rPr>
+              <a:t>アカウントを消して、作り直しになります（最初のタイプ選びに注意）</a:t>
             </a:r>
           </a:p>
         </p:txBody>

--- a/out/登録の流れ_書類準備まで.pptx
+++ b/out/登録の流れ_書類準備まで.pptx
@@ -33,6 +33,14 @@
     <p:sldId id="278" r:id="rId32"/>
     <p:sldId id="279" r:id="rId33"/>
     <p:sldId id="280" r:id="rId34"/>
+    <p:sldId id="281" r:id="rId35"/>
+    <p:sldId id="282" r:id="rId36"/>
+    <p:sldId id="283" r:id="rId37"/>
+    <p:sldId id="284" r:id="rId38"/>
+    <p:sldId id="285" r:id="rId39"/>
+    <p:sldId id="286" r:id="rId40"/>
+    <p:sldId id="287" r:id="rId41"/>
+    <p:sldId id="288" r:id="rId42"/>
   </p:sldIdLst>
   <p:sldSz cx="12192000" cy="6858000"/>
   <p:notesSz cx="6858000" cy="9144000"/>
@@ -10572,7 +10580,7 @@
             </a:avLst>
           </a:prstGeom>
           <a:solidFill>
-            <a:srgbClr val="EEEEEE"/>
+            <a:srgbClr val="4FB6BE"/>
           </a:solidFill>
           <a:ln>
             <a:noFill/>
@@ -10627,7 +10635,7 @@
             <a:r>
               <a:rPr sz="1700" b="1">
                 <a:solidFill>
-                  <a:srgbClr val="666666"/>
+                  <a:srgbClr val="FFFFFF"/>
                 </a:solidFill>
                 <a:latin typeface="Yu Gothic"/>
               </a:rPr>
@@ -10639,7 +10647,7 @@
             <a:r>
               <a:rPr sz="1700" b="1">
                 <a:solidFill>
-                  <a:srgbClr val="666666"/>
+                  <a:srgbClr val="FFFFFF"/>
                 </a:solidFill>
                 <a:latin typeface="Yu Gothic"/>
               </a:rPr>
@@ -10651,7 +10659,7 @@
             <a:r>
               <a:rPr sz="1700" b="1">
                 <a:solidFill>
-                  <a:srgbClr val="666666"/>
+                  <a:srgbClr val="FFFFFF"/>
                 </a:solidFill>
                 <a:latin typeface="Yu Gothic"/>
               </a:rPr>
@@ -10686,11 +10694,11 @@
             <a:r>
               <a:rPr sz="1200" b="1">
                 <a:solidFill>
-                  <a:srgbClr val="666666"/>
-                </a:solidFill>
-                <a:latin typeface="Yu Gothic"/>
-              </a:rPr>
-              <a:t>作成中</a:t>
+                  <a:srgbClr val="4FB6BE"/>
+                </a:solidFill>
+                <a:latin typeface="Yu Gothic"/>
+              </a:rPr>
+              <a:t>途中まで</a:t>
             </a:r>
           </a:p>
         </p:txBody>
@@ -16063,6 +16071,2801 @@
 </p:sld>
 </file>
 
+<file path=ppt/slides/slide26.xml><?xml version="1.0" encoding="utf-8"?>
+<p:sld xmlns:a="http://schemas.openxmlformats.org/drawingml/2006/main" xmlns:p="http://schemas.openxmlformats.org/presentationml/2006/main" xmlns:r="http://schemas.openxmlformats.org/officeDocument/2006/relationships">
+  <p:cSld>
+    <p:spTree>
+      <p:nvGrpSpPr>
+        <p:cNvPr id="1" name=""/>
+        <p:cNvGrpSpPr/>
+        <p:nvPr/>
+      </p:nvGrpSpPr>
+      <p:grpSpPr/>
+      <p:sp>
+        <p:nvSpPr>
+          <p:cNvPr id="2" name="Rounded Rectangle 1"/>
+          <p:cNvSpPr/>
+          <p:nvPr/>
+        </p:nvSpPr>
+        <p:spPr>
+          <a:xfrm>
+            <a:off x="411480" y="777240"/>
+            <a:ext cx="502920" cy="384048"/>
+          </a:xfrm>
+          <a:prstGeom prst="roundRect">
+            <a:avLst>
+              <a:gd name="adj" fmla="val 8000"/>
+            </a:avLst>
+          </a:prstGeom>
+          <a:solidFill>
+            <a:srgbClr val="4FB6BE"/>
+          </a:solidFill>
+          <a:ln>
+            <a:noFill/>
+          </a:ln>
+          <a:effectLst/>
+        </p:spPr>
+        <p:style>
+          <a:lnRef idx="1">
+            <a:schemeClr val="accent1"/>
+          </a:lnRef>
+          <a:fillRef idx="3">
+            <a:schemeClr val="accent1"/>
+          </a:fillRef>
+          <a:effectRef idx="2">
+            <a:schemeClr val="accent1"/>
+          </a:effectRef>
+          <a:fontRef idx="minor">
+            <a:schemeClr val="lt1"/>
+          </a:fontRef>
+        </p:style>
+        <p:txBody>
+          <a:bodyPr rtlCol="0" anchor="ctr"/>
+          <a:lstStyle/>
+          <a:p>
+            <a:pPr algn="ctr"/>
+          </a:p>
+        </p:txBody>
+      </p:sp>
+      <p:sp>
+        <p:nvSpPr>
+          <p:cNvPr id="3" name="TextBox 2"/>
+          <p:cNvSpPr txBox="1"/>
+          <p:nvPr/>
+        </p:nvSpPr>
+        <p:spPr>
+          <a:xfrm>
+            <a:off x="411480" y="777240"/>
+            <a:ext cx="502920" cy="384048"/>
+          </a:xfrm>
+          <a:prstGeom prst="rect">
+            <a:avLst/>
+          </a:prstGeom>
+          <a:noFill/>
+        </p:spPr>
+        <p:txBody>
+          <a:bodyPr wrap="square" lIns="45720" rIns="45720" tIns="22860" bIns="22860" anchor="ctr">
+            <a:spAutoFit/>
+          </a:bodyPr>
+          <a:lstStyle/>
+          <a:p>
+            <a:pPr algn="ctr"/>
+            <a:r>
+              <a:rPr sz="1200" b="1">
+                <a:solidFill>
+                  <a:srgbClr val="FFFFFF"/>
+                </a:solidFill>
+                <a:latin typeface="Yu Gothic"/>
+              </a:rPr>
+              <a:t>④</a:t>
+            </a:r>
+          </a:p>
+        </p:txBody>
+      </p:sp>
+      <p:sp>
+        <p:nvSpPr>
+          <p:cNvPr id="4" name="TextBox 3"/>
+          <p:cNvSpPr txBox="1"/>
+          <p:nvPr/>
+        </p:nvSpPr>
+        <p:spPr>
+          <a:xfrm>
+            <a:off x="1078992" y="777240"/>
+            <a:ext cx="10607040" cy="384048"/>
+          </a:xfrm>
+          <a:prstGeom prst="rect">
+            <a:avLst/>
+          </a:prstGeom>
+          <a:noFill/>
+        </p:spPr>
+        <p:txBody>
+          <a:bodyPr wrap="square" lIns="45720" rIns="45720" tIns="22860" bIns="22860" anchor="ctr">
+            <a:spAutoFit/>
+          </a:bodyPr>
+          <a:lstStyle/>
+          <a:p>
+            <a:pPr algn="l"/>
+            <a:r>
+              <a:rPr sz="2000" b="1">
+                <a:solidFill>
+                  <a:srgbClr val="333333"/>
+                </a:solidFill>
+                <a:latin typeface="Yu Gothic"/>
+              </a:rPr>
+              <a:t>Disprz視聴の流れ（メール〜ガイダンス）</a:t>
+            </a:r>
+          </a:p>
+        </p:txBody>
+      </p:sp>
+      <p:sp>
+        <p:nvSpPr>
+          <p:cNvPr id="5" name="TextBox 4"/>
+          <p:cNvSpPr txBox="1"/>
+          <p:nvPr/>
+        </p:nvSpPr>
+        <p:spPr>
+          <a:xfrm>
+            <a:off x="411480" y="1234440"/>
+            <a:ext cx="11338560" cy="365760"/>
+          </a:xfrm>
+          <a:prstGeom prst="rect">
+            <a:avLst/>
+          </a:prstGeom>
+          <a:noFill/>
+        </p:spPr>
+        <p:txBody>
+          <a:bodyPr wrap="square" lIns="45720" rIns="45720" tIns="22860" bIns="22860" anchor="t">
+            <a:spAutoFit/>
+          </a:bodyPr>
+          <a:lstStyle/>
+          <a:p>
+            <a:pPr algn="l"/>
+            <a:r>
+              <a:rPr sz="1400" b="1">
+                <a:solidFill>
+                  <a:srgbClr val="666666"/>
+                </a:solidFill>
+                <a:latin typeface="Yu Gothic"/>
+              </a:rPr>
+              <a:t>Disprzからメールが届く → アプリを取得 → メールのID・パスワードでログイン → ガイダンスを全部クリア</a:t>
+            </a:r>
+          </a:p>
+        </p:txBody>
+      </p:sp>
+      <p:pic>
+        <p:nvPicPr>
+          <p:cNvPr id="6" name="Picture 5" descr="d12.jpg"/>
+          <p:cNvPicPr>
+            <a:picLocks noChangeAspect="1"/>
+          </p:cNvPicPr>
+          <p:nvPr/>
+        </p:nvPicPr>
+        <p:blipFill>
+          <a:blip r:embed="rId2"/>
+          <a:stretch>
+            <a:fillRect/>
+          </a:stretch>
+        </p:blipFill>
+        <p:spPr>
+          <a:xfrm>
+            <a:off x="502920" y="1737360"/>
+            <a:ext cx="1647756" cy="3566160"/>
+          </a:xfrm>
+          <a:prstGeom prst="rect">
+            <a:avLst/>
+          </a:prstGeom>
+          <a:ln w="12700">
+            <a:solidFill>
+              <a:srgbClr val="BBBBBB"/>
+            </a:solidFill>
+          </a:ln>
+        </p:spPr>
+      </p:pic>
+      <p:sp>
+        <p:nvSpPr>
+          <p:cNvPr id="7" name="Oval 6"/>
+          <p:cNvSpPr/>
+          <p:nvPr/>
+        </p:nvSpPr>
+        <p:spPr>
+          <a:xfrm>
+            <a:off x="356616" y="1591056"/>
+            <a:ext cx="384048" cy="384048"/>
+          </a:xfrm>
+          <a:prstGeom prst="ellipse">
+            <a:avLst/>
+          </a:prstGeom>
+          <a:solidFill>
+            <a:srgbClr val="E12A82"/>
+          </a:solidFill>
+          <a:ln w="19050">
+            <a:solidFill>
+              <a:srgbClr val="FFFFFF"/>
+            </a:solidFill>
+          </a:ln>
+          <a:effectLst/>
+        </p:spPr>
+        <p:style>
+          <a:lnRef idx="1">
+            <a:schemeClr val="accent1"/>
+          </a:lnRef>
+          <a:fillRef idx="3">
+            <a:schemeClr val="accent1"/>
+          </a:fillRef>
+          <a:effectRef idx="2">
+            <a:schemeClr val="accent1"/>
+          </a:effectRef>
+          <a:fontRef idx="minor">
+            <a:schemeClr val="lt1"/>
+          </a:fontRef>
+        </p:style>
+        <p:txBody>
+          <a:bodyPr rtlCol="0" anchor="ctr" lIns="0" rIns="0" tIns="0" bIns="0"/>
+          <a:lstStyle/>
+          <a:p>
+            <a:pPr algn="ctr"/>
+            <a:r>
+              <a:rPr sz="1400" b="1">
+                <a:solidFill>
+                  <a:srgbClr val="FFFFFF"/>
+                </a:solidFill>
+                <a:latin typeface="Yu Gothic"/>
+              </a:rPr>
+              <a:t>1</a:t>
+            </a:r>
+          </a:p>
+        </p:txBody>
+      </p:sp>
+      <p:sp>
+        <p:nvSpPr>
+          <p:cNvPr id="8" name="TextBox 7"/>
+          <p:cNvSpPr txBox="1"/>
+          <p:nvPr/>
+        </p:nvSpPr>
+        <p:spPr>
+          <a:xfrm>
+            <a:off x="137160" y="5394960"/>
+            <a:ext cx="2379276" cy="685800"/>
+          </a:xfrm>
+          <a:prstGeom prst="rect">
+            <a:avLst/>
+          </a:prstGeom>
+          <a:noFill/>
+        </p:spPr>
+        <p:txBody>
+          <a:bodyPr wrap="square" lIns="45720" rIns="45720" tIns="22860" bIns="22860" anchor="t">
+            <a:spAutoFit/>
+          </a:bodyPr>
+          <a:lstStyle/>
+          <a:p>
+            <a:pPr algn="ctr"/>
+            <a:r>
+              <a:rPr sz="1400" b="1">
+                <a:solidFill>
+                  <a:srgbClr val="333333"/>
+                </a:solidFill>
+                <a:latin typeface="Yu Gothic"/>
+              </a:rPr>
+              <a:t>メールが届く</a:t>
+            </a:r>
+          </a:p>
+        </p:txBody>
+      </p:sp>
+      <p:sp>
+        <p:nvSpPr>
+          <p:cNvPr id="9" name="TextBox 8"/>
+          <p:cNvSpPr txBox="1"/>
+          <p:nvPr/>
+        </p:nvSpPr>
+        <p:spPr>
+          <a:xfrm>
+            <a:off x="2150676" y="3200400"/>
+            <a:ext cx="457200" cy="457200"/>
+          </a:xfrm>
+          <a:prstGeom prst="rect">
+            <a:avLst/>
+          </a:prstGeom>
+          <a:noFill/>
+        </p:spPr>
+        <p:txBody>
+          <a:bodyPr wrap="square" lIns="45720" rIns="45720" tIns="22860" bIns="22860" anchor="t">
+            <a:spAutoFit/>
+          </a:bodyPr>
+          <a:lstStyle/>
+          <a:p>
+            <a:pPr algn="ctr"/>
+            <a:r>
+              <a:rPr sz="1600" b="1">
+                <a:solidFill>
+                  <a:srgbClr val="666666"/>
+                </a:solidFill>
+                <a:latin typeface="Yu Gothic"/>
+              </a:rPr>
+              <a:t>▶</a:t>
+            </a:r>
+          </a:p>
+        </p:txBody>
+      </p:sp>
+      <p:pic>
+        <p:nvPicPr>
+          <p:cNvPr id="10" name="Picture 9" descr="d16.jpg"/>
+          <p:cNvPicPr>
+            <a:picLocks noChangeAspect="1"/>
+          </p:cNvPicPr>
+          <p:nvPr/>
+        </p:nvPicPr>
+        <p:blipFill>
+          <a:blip r:embed="rId3"/>
+          <a:stretch>
+            <a:fillRect/>
+          </a:stretch>
+        </p:blipFill>
+        <p:spPr>
+          <a:xfrm>
+            <a:off x="2788920" y="1737360"/>
+            <a:ext cx="1647756" cy="3566160"/>
+          </a:xfrm>
+          <a:prstGeom prst="rect">
+            <a:avLst/>
+          </a:prstGeom>
+          <a:ln w="12700">
+            <a:solidFill>
+              <a:srgbClr val="BBBBBB"/>
+            </a:solidFill>
+          </a:ln>
+        </p:spPr>
+      </p:pic>
+      <p:sp>
+        <p:nvSpPr>
+          <p:cNvPr id="11" name="Oval 10"/>
+          <p:cNvSpPr/>
+          <p:nvPr/>
+        </p:nvSpPr>
+        <p:spPr>
+          <a:xfrm>
+            <a:off x="2642615" y="1591056"/>
+            <a:ext cx="384048" cy="384048"/>
+          </a:xfrm>
+          <a:prstGeom prst="ellipse">
+            <a:avLst/>
+          </a:prstGeom>
+          <a:solidFill>
+            <a:srgbClr val="E12A82"/>
+          </a:solidFill>
+          <a:ln w="19050">
+            <a:solidFill>
+              <a:srgbClr val="FFFFFF"/>
+            </a:solidFill>
+          </a:ln>
+          <a:effectLst/>
+        </p:spPr>
+        <p:style>
+          <a:lnRef idx="1">
+            <a:schemeClr val="accent1"/>
+          </a:lnRef>
+          <a:fillRef idx="3">
+            <a:schemeClr val="accent1"/>
+          </a:fillRef>
+          <a:effectRef idx="2">
+            <a:schemeClr val="accent1"/>
+          </a:effectRef>
+          <a:fontRef idx="minor">
+            <a:schemeClr val="lt1"/>
+          </a:fontRef>
+        </p:style>
+        <p:txBody>
+          <a:bodyPr rtlCol="0" anchor="ctr" lIns="0" rIns="0" tIns="0" bIns="0"/>
+          <a:lstStyle/>
+          <a:p>
+            <a:pPr algn="ctr"/>
+            <a:r>
+              <a:rPr sz="1400" b="1">
+                <a:solidFill>
+                  <a:srgbClr val="FFFFFF"/>
+                </a:solidFill>
+                <a:latin typeface="Yu Gothic"/>
+              </a:rPr>
+              <a:t>2</a:t>
+            </a:r>
+          </a:p>
+        </p:txBody>
+      </p:sp>
+      <p:sp>
+        <p:nvSpPr>
+          <p:cNvPr id="12" name="TextBox 11"/>
+          <p:cNvSpPr txBox="1"/>
+          <p:nvPr/>
+        </p:nvSpPr>
+        <p:spPr>
+          <a:xfrm>
+            <a:off x="2423160" y="5394960"/>
+            <a:ext cx="2379276" cy="685800"/>
+          </a:xfrm>
+          <a:prstGeom prst="rect">
+            <a:avLst/>
+          </a:prstGeom>
+          <a:noFill/>
+        </p:spPr>
+        <p:txBody>
+          <a:bodyPr wrap="square" lIns="45720" rIns="45720" tIns="22860" bIns="22860" anchor="t">
+            <a:spAutoFit/>
+          </a:bodyPr>
+          <a:lstStyle/>
+          <a:p>
+            <a:pPr algn="ctr"/>
+            <a:r>
+              <a:rPr sz="1400" b="1">
+                <a:solidFill>
+                  <a:srgbClr val="333333"/>
+                </a:solidFill>
+                <a:latin typeface="Yu Gothic"/>
+              </a:rPr>
+              <a:t>ID・パスワード</a:t>
+            </a:r>
+          </a:p>
+          <a:p>
+            <a:pPr algn="ctr"/>
+            <a:r>
+              <a:rPr sz="1400" b="1">
+                <a:solidFill>
+                  <a:srgbClr val="333333"/>
+                </a:solidFill>
+                <a:latin typeface="Yu Gothic"/>
+              </a:rPr>
+              <a:t>を確認</a:t>
+            </a:r>
+          </a:p>
+        </p:txBody>
+      </p:sp>
+      <p:sp>
+        <p:nvSpPr>
+          <p:cNvPr id="13" name="TextBox 12"/>
+          <p:cNvSpPr txBox="1"/>
+          <p:nvPr/>
+        </p:nvSpPr>
+        <p:spPr>
+          <a:xfrm>
+            <a:off x="4436676" y="3200400"/>
+            <a:ext cx="457200" cy="457200"/>
+          </a:xfrm>
+          <a:prstGeom prst="rect">
+            <a:avLst/>
+          </a:prstGeom>
+          <a:noFill/>
+        </p:spPr>
+        <p:txBody>
+          <a:bodyPr wrap="square" lIns="45720" rIns="45720" tIns="22860" bIns="22860" anchor="t">
+            <a:spAutoFit/>
+          </a:bodyPr>
+          <a:lstStyle/>
+          <a:p>
+            <a:pPr algn="ctr"/>
+            <a:r>
+              <a:rPr sz="1600" b="1">
+                <a:solidFill>
+                  <a:srgbClr val="666666"/>
+                </a:solidFill>
+                <a:latin typeface="Yu Gothic"/>
+              </a:rPr>
+              <a:t>▶</a:t>
+            </a:r>
+          </a:p>
+        </p:txBody>
+      </p:sp>
+      <p:pic>
+        <p:nvPicPr>
+          <p:cNvPr id="14" name="Picture 13" descr="d15.jpg"/>
+          <p:cNvPicPr>
+            <a:picLocks noChangeAspect="1"/>
+          </p:cNvPicPr>
+          <p:nvPr/>
+        </p:nvPicPr>
+        <p:blipFill>
+          <a:blip r:embed="rId4"/>
+          <a:stretch>
+            <a:fillRect/>
+          </a:stretch>
+        </p:blipFill>
+        <p:spPr>
+          <a:xfrm>
+            <a:off x="5074920" y="1737360"/>
+            <a:ext cx="1647756" cy="3566160"/>
+          </a:xfrm>
+          <a:prstGeom prst="rect">
+            <a:avLst/>
+          </a:prstGeom>
+          <a:ln w="12700">
+            <a:solidFill>
+              <a:srgbClr val="BBBBBB"/>
+            </a:solidFill>
+          </a:ln>
+        </p:spPr>
+      </p:pic>
+      <p:sp>
+        <p:nvSpPr>
+          <p:cNvPr id="15" name="Oval 14"/>
+          <p:cNvSpPr/>
+          <p:nvPr/>
+        </p:nvSpPr>
+        <p:spPr>
+          <a:xfrm>
+            <a:off x="4928616" y="1591056"/>
+            <a:ext cx="384048" cy="384048"/>
+          </a:xfrm>
+          <a:prstGeom prst="ellipse">
+            <a:avLst/>
+          </a:prstGeom>
+          <a:solidFill>
+            <a:srgbClr val="E12A82"/>
+          </a:solidFill>
+          <a:ln w="19050">
+            <a:solidFill>
+              <a:srgbClr val="FFFFFF"/>
+            </a:solidFill>
+          </a:ln>
+          <a:effectLst/>
+        </p:spPr>
+        <p:style>
+          <a:lnRef idx="1">
+            <a:schemeClr val="accent1"/>
+          </a:lnRef>
+          <a:fillRef idx="3">
+            <a:schemeClr val="accent1"/>
+          </a:fillRef>
+          <a:effectRef idx="2">
+            <a:schemeClr val="accent1"/>
+          </a:effectRef>
+          <a:fontRef idx="minor">
+            <a:schemeClr val="lt1"/>
+          </a:fontRef>
+        </p:style>
+        <p:txBody>
+          <a:bodyPr rtlCol="0" anchor="ctr" lIns="0" rIns="0" tIns="0" bIns="0"/>
+          <a:lstStyle/>
+          <a:p>
+            <a:pPr algn="ctr"/>
+            <a:r>
+              <a:rPr sz="1400" b="1">
+                <a:solidFill>
+                  <a:srgbClr val="FFFFFF"/>
+                </a:solidFill>
+                <a:latin typeface="Yu Gothic"/>
+              </a:rPr>
+              <a:t>3</a:t>
+            </a:r>
+          </a:p>
+        </p:txBody>
+      </p:sp>
+      <p:sp>
+        <p:nvSpPr>
+          <p:cNvPr id="16" name="TextBox 15"/>
+          <p:cNvSpPr txBox="1"/>
+          <p:nvPr/>
+        </p:nvSpPr>
+        <p:spPr>
+          <a:xfrm>
+            <a:off x="4709159" y="5394960"/>
+            <a:ext cx="2379276" cy="685800"/>
+          </a:xfrm>
+          <a:prstGeom prst="rect">
+            <a:avLst/>
+          </a:prstGeom>
+          <a:noFill/>
+        </p:spPr>
+        <p:txBody>
+          <a:bodyPr wrap="square" lIns="45720" rIns="45720" tIns="22860" bIns="22860" anchor="t">
+            <a:spAutoFit/>
+          </a:bodyPr>
+          <a:lstStyle/>
+          <a:p>
+            <a:pPr algn="ctr"/>
+            <a:r>
+              <a:rPr sz="1400" b="1">
+                <a:solidFill>
+                  <a:srgbClr val="333333"/>
+                </a:solidFill>
+                <a:latin typeface="Yu Gothic"/>
+              </a:rPr>
+              <a:t>ログイン</a:t>
+            </a:r>
+          </a:p>
+        </p:txBody>
+      </p:sp>
+      <p:sp>
+        <p:nvSpPr>
+          <p:cNvPr id="17" name="TextBox 16"/>
+          <p:cNvSpPr txBox="1"/>
+          <p:nvPr/>
+        </p:nvSpPr>
+        <p:spPr>
+          <a:xfrm>
+            <a:off x="6722676" y="3200400"/>
+            <a:ext cx="457200" cy="457200"/>
+          </a:xfrm>
+          <a:prstGeom prst="rect">
+            <a:avLst/>
+          </a:prstGeom>
+          <a:noFill/>
+        </p:spPr>
+        <p:txBody>
+          <a:bodyPr wrap="square" lIns="45720" rIns="45720" tIns="22860" bIns="22860" anchor="t">
+            <a:spAutoFit/>
+          </a:bodyPr>
+          <a:lstStyle/>
+          <a:p>
+            <a:pPr algn="ctr"/>
+            <a:r>
+              <a:rPr sz="1600" b="1">
+                <a:solidFill>
+                  <a:srgbClr val="666666"/>
+                </a:solidFill>
+                <a:latin typeface="Yu Gothic"/>
+              </a:rPr>
+              <a:t>▶</a:t>
+            </a:r>
+          </a:p>
+        </p:txBody>
+      </p:sp>
+      <p:pic>
+        <p:nvPicPr>
+          <p:cNvPr id="18" name="Picture 17" descr="d14.jpg"/>
+          <p:cNvPicPr>
+            <a:picLocks noChangeAspect="1"/>
+          </p:cNvPicPr>
+          <p:nvPr/>
+        </p:nvPicPr>
+        <p:blipFill>
+          <a:blip r:embed="rId5"/>
+          <a:stretch>
+            <a:fillRect/>
+          </a:stretch>
+        </p:blipFill>
+        <p:spPr>
+          <a:xfrm>
+            <a:off x="7360920" y="1737360"/>
+            <a:ext cx="1647756" cy="3566160"/>
+          </a:xfrm>
+          <a:prstGeom prst="rect">
+            <a:avLst/>
+          </a:prstGeom>
+          <a:ln w="12700">
+            <a:solidFill>
+              <a:srgbClr val="BBBBBB"/>
+            </a:solidFill>
+          </a:ln>
+        </p:spPr>
+      </p:pic>
+      <p:sp>
+        <p:nvSpPr>
+          <p:cNvPr id="19" name="Oval 18"/>
+          <p:cNvSpPr/>
+          <p:nvPr/>
+        </p:nvSpPr>
+        <p:spPr>
+          <a:xfrm>
+            <a:off x="7214616" y="1591056"/>
+            <a:ext cx="384048" cy="384048"/>
+          </a:xfrm>
+          <a:prstGeom prst="ellipse">
+            <a:avLst/>
+          </a:prstGeom>
+          <a:solidFill>
+            <a:srgbClr val="E12A82"/>
+          </a:solidFill>
+          <a:ln w="19050">
+            <a:solidFill>
+              <a:srgbClr val="FFFFFF"/>
+            </a:solidFill>
+          </a:ln>
+          <a:effectLst/>
+        </p:spPr>
+        <p:style>
+          <a:lnRef idx="1">
+            <a:schemeClr val="accent1"/>
+          </a:lnRef>
+          <a:fillRef idx="3">
+            <a:schemeClr val="accent1"/>
+          </a:fillRef>
+          <a:effectRef idx="2">
+            <a:schemeClr val="accent1"/>
+          </a:effectRef>
+          <a:fontRef idx="minor">
+            <a:schemeClr val="lt1"/>
+          </a:fontRef>
+        </p:style>
+        <p:txBody>
+          <a:bodyPr rtlCol="0" anchor="ctr" lIns="0" rIns="0" tIns="0" bIns="0"/>
+          <a:lstStyle/>
+          <a:p>
+            <a:pPr algn="ctr"/>
+            <a:r>
+              <a:rPr sz="1400" b="1">
+                <a:solidFill>
+                  <a:srgbClr val="FFFFFF"/>
+                </a:solidFill>
+                <a:latin typeface="Yu Gothic"/>
+              </a:rPr>
+              <a:t>4</a:t>
+            </a:r>
+          </a:p>
+        </p:txBody>
+      </p:sp>
+      <p:sp>
+        <p:nvSpPr>
+          <p:cNvPr id="20" name="TextBox 19"/>
+          <p:cNvSpPr txBox="1"/>
+          <p:nvPr/>
+        </p:nvSpPr>
+        <p:spPr>
+          <a:xfrm>
+            <a:off x="6995160" y="5394960"/>
+            <a:ext cx="2379276" cy="685800"/>
+          </a:xfrm>
+          <a:prstGeom prst="rect">
+            <a:avLst/>
+          </a:prstGeom>
+          <a:noFill/>
+        </p:spPr>
+        <p:txBody>
+          <a:bodyPr wrap="square" lIns="45720" rIns="45720" tIns="22860" bIns="22860" anchor="t">
+            <a:spAutoFit/>
+          </a:bodyPr>
+          <a:lstStyle/>
+          <a:p>
+            <a:pPr algn="ctr"/>
+            <a:r>
+              <a:rPr sz="1400" b="1">
+                <a:solidFill>
+                  <a:srgbClr val="333333"/>
+                </a:solidFill>
+                <a:latin typeface="Yu Gothic"/>
+              </a:rPr>
+              <a:t>ガイダンスを</a:t>
+            </a:r>
+          </a:p>
+          <a:p>
+            <a:pPr algn="ctr"/>
+            <a:r>
+              <a:rPr sz="1400" b="1">
+                <a:solidFill>
+                  <a:srgbClr val="333333"/>
+                </a:solidFill>
+                <a:latin typeface="Yu Gothic"/>
+              </a:rPr>
+              <a:t>タップ</a:t>
+            </a:r>
+          </a:p>
+        </p:txBody>
+      </p:sp>
+      <p:sp>
+        <p:nvSpPr>
+          <p:cNvPr id="21" name="TextBox 20"/>
+          <p:cNvSpPr txBox="1"/>
+          <p:nvPr/>
+        </p:nvSpPr>
+        <p:spPr>
+          <a:xfrm>
+            <a:off x="9008676" y="3200400"/>
+            <a:ext cx="457200" cy="457200"/>
+          </a:xfrm>
+          <a:prstGeom prst="rect">
+            <a:avLst/>
+          </a:prstGeom>
+          <a:noFill/>
+        </p:spPr>
+        <p:txBody>
+          <a:bodyPr wrap="square" lIns="45720" rIns="45720" tIns="22860" bIns="22860" anchor="t">
+            <a:spAutoFit/>
+          </a:bodyPr>
+          <a:lstStyle/>
+          <a:p>
+            <a:pPr algn="ctr"/>
+            <a:r>
+              <a:rPr sz="1600" b="1">
+                <a:solidFill>
+                  <a:srgbClr val="666666"/>
+                </a:solidFill>
+                <a:latin typeface="Yu Gothic"/>
+              </a:rPr>
+              <a:t>▶</a:t>
+            </a:r>
+          </a:p>
+        </p:txBody>
+      </p:sp>
+      <p:pic>
+        <p:nvPicPr>
+          <p:cNvPr id="22" name="Picture 21" descr="d13.jpg"/>
+          <p:cNvPicPr>
+            <a:picLocks noChangeAspect="1"/>
+          </p:cNvPicPr>
+          <p:nvPr/>
+        </p:nvPicPr>
+        <p:blipFill>
+          <a:blip r:embed="rId6"/>
+          <a:stretch>
+            <a:fillRect/>
+          </a:stretch>
+        </p:blipFill>
+        <p:spPr>
+          <a:xfrm>
+            <a:off x="9646920" y="1737360"/>
+            <a:ext cx="1647756" cy="3566160"/>
+          </a:xfrm>
+          <a:prstGeom prst="rect">
+            <a:avLst/>
+          </a:prstGeom>
+          <a:ln w="12700">
+            <a:solidFill>
+              <a:srgbClr val="BBBBBB"/>
+            </a:solidFill>
+          </a:ln>
+        </p:spPr>
+      </p:pic>
+      <p:sp>
+        <p:nvSpPr>
+          <p:cNvPr id="23" name="Oval 22"/>
+          <p:cNvSpPr/>
+          <p:nvPr/>
+        </p:nvSpPr>
+        <p:spPr>
+          <a:xfrm>
+            <a:off x="9500616" y="1591056"/>
+            <a:ext cx="384048" cy="384048"/>
+          </a:xfrm>
+          <a:prstGeom prst="ellipse">
+            <a:avLst/>
+          </a:prstGeom>
+          <a:solidFill>
+            <a:srgbClr val="E12A82"/>
+          </a:solidFill>
+          <a:ln w="19050">
+            <a:solidFill>
+              <a:srgbClr val="FFFFFF"/>
+            </a:solidFill>
+          </a:ln>
+          <a:effectLst/>
+        </p:spPr>
+        <p:style>
+          <a:lnRef idx="1">
+            <a:schemeClr val="accent1"/>
+          </a:lnRef>
+          <a:fillRef idx="3">
+            <a:schemeClr val="accent1"/>
+          </a:fillRef>
+          <a:effectRef idx="2">
+            <a:schemeClr val="accent1"/>
+          </a:effectRef>
+          <a:fontRef idx="minor">
+            <a:schemeClr val="lt1"/>
+          </a:fontRef>
+        </p:style>
+        <p:txBody>
+          <a:bodyPr rtlCol="0" anchor="ctr" lIns="0" rIns="0" tIns="0" bIns="0"/>
+          <a:lstStyle/>
+          <a:p>
+            <a:pPr algn="ctr"/>
+            <a:r>
+              <a:rPr sz="1400" b="1">
+                <a:solidFill>
+                  <a:srgbClr val="FFFFFF"/>
+                </a:solidFill>
+                <a:latin typeface="Yu Gothic"/>
+              </a:rPr>
+              <a:t>5</a:t>
+            </a:r>
+          </a:p>
+        </p:txBody>
+      </p:sp>
+      <p:sp>
+        <p:nvSpPr>
+          <p:cNvPr id="24" name="TextBox 23"/>
+          <p:cNvSpPr txBox="1"/>
+          <p:nvPr/>
+        </p:nvSpPr>
+        <p:spPr>
+          <a:xfrm>
+            <a:off x="9281160" y="5394960"/>
+            <a:ext cx="2379276" cy="685800"/>
+          </a:xfrm>
+          <a:prstGeom prst="rect">
+            <a:avLst/>
+          </a:prstGeom>
+          <a:noFill/>
+        </p:spPr>
+        <p:txBody>
+          <a:bodyPr wrap="square" lIns="45720" rIns="45720" tIns="22860" bIns="22860" anchor="t">
+            <a:spAutoFit/>
+          </a:bodyPr>
+          <a:lstStyle/>
+          <a:p>
+            <a:pPr algn="ctr"/>
+            <a:r>
+              <a:rPr sz="1400" b="1">
+                <a:solidFill>
+                  <a:srgbClr val="333333"/>
+                </a:solidFill>
+                <a:latin typeface="Yu Gothic"/>
+              </a:rPr>
+              <a:t>すべてクリア</a:t>
+            </a:r>
+          </a:p>
+        </p:txBody>
+      </p:sp>
+    </p:spTree>
+  </p:cSld>
+  <p:clrMapOvr>
+    <a:masterClrMapping/>
+  </p:clrMapOvr>
+</p:sld>
+</file>
+
+<file path=ppt/slides/slide27.xml><?xml version="1.0" encoding="utf-8"?>
+<p:sld xmlns:a="http://schemas.openxmlformats.org/drawingml/2006/main" xmlns:p="http://schemas.openxmlformats.org/presentationml/2006/main" xmlns:r="http://schemas.openxmlformats.org/officeDocument/2006/relationships">
+  <p:cSld>
+    <p:spTree>
+      <p:nvGrpSpPr>
+        <p:cNvPr id="1" name=""/>
+        <p:cNvGrpSpPr/>
+        <p:nvPr/>
+      </p:nvGrpSpPr>
+      <p:grpSpPr/>
+      <p:sp>
+        <p:nvSpPr>
+          <p:cNvPr id="2" name="Rounded Rectangle 1"/>
+          <p:cNvSpPr/>
+          <p:nvPr/>
+        </p:nvSpPr>
+        <p:spPr>
+          <a:xfrm>
+            <a:off x="411480" y="777240"/>
+            <a:ext cx="502920" cy="384048"/>
+          </a:xfrm>
+          <a:prstGeom prst="roundRect">
+            <a:avLst>
+              <a:gd name="adj" fmla="val 8000"/>
+            </a:avLst>
+          </a:prstGeom>
+          <a:solidFill>
+            <a:srgbClr val="4FB6BE"/>
+          </a:solidFill>
+          <a:ln>
+            <a:noFill/>
+          </a:ln>
+          <a:effectLst/>
+        </p:spPr>
+        <p:style>
+          <a:lnRef idx="1">
+            <a:schemeClr val="accent1"/>
+          </a:lnRef>
+          <a:fillRef idx="3">
+            <a:schemeClr val="accent1"/>
+          </a:fillRef>
+          <a:effectRef idx="2">
+            <a:schemeClr val="accent1"/>
+          </a:effectRef>
+          <a:fontRef idx="minor">
+            <a:schemeClr val="lt1"/>
+          </a:fontRef>
+        </p:style>
+        <p:txBody>
+          <a:bodyPr rtlCol="0" anchor="ctr"/>
+          <a:lstStyle/>
+          <a:p>
+            <a:pPr algn="ctr"/>
+          </a:p>
+        </p:txBody>
+      </p:sp>
+      <p:sp>
+        <p:nvSpPr>
+          <p:cNvPr id="3" name="TextBox 2"/>
+          <p:cNvSpPr txBox="1"/>
+          <p:nvPr/>
+        </p:nvSpPr>
+        <p:spPr>
+          <a:xfrm>
+            <a:off x="411480" y="777240"/>
+            <a:ext cx="502920" cy="384048"/>
+          </a:xfrm>
+          <a:prstGeom prst="rect">
+            <a:avLst/>
+          </a:prstGeom>
+          <a:noFill/>
+        </p:spPr>
+        <p:txBody>
+          <a:bodyPr wrap="square" lIns="45720" rIns="45720" tIns="22860" bIns="22860" anchor="ctr">
+            <a:spAutoFit/>
+          </a:bodyPr>
+          <a:lstStyle/>
+          <a:p>
+            <a:pPr algn="ctr"/>
+            <a:r>
+              <a:rPr sz="1200" b="1">
+                <a:solidFill>
+                  <a:srgbClr val="FFFFFF"/>
+                </a:solidFill>
+                <a:latin typeface="Yu Gothic"/>
+              </a:rPr>
+              <a:t>④-1</a:t>
+            </a:r>
+          </a:p>
+        </p:txBody>
+      </p:sp>
+      <p:sp>
+        <p:nvSpPr>
+          <p:cNvPr id="4" name="TextBox 3"/>
+          <p:cNvSpPr txBox="1"/>
+          <p:nvPr/>
+        </p:nvSpPr>
+        <p:spPr>
+          <a:xfrm>
+            <a:off x="1078992" y="777240"/>
+            <a:ext cx="10607040" cy="384048"/>
+          </a:xfrm>
+          <a:prstGeom prst="rect">
+            <a:avLst/>
+          </a:prstGeom>
+          <a:noFill/>
+        </p:spPr>
+        <p:txBody>
+          <a:bodyPr wrap="square" lIns="45720" rIns="45720" tIns="22860" bIns="22860" anchor="ctr">
+            <a:spAutoFit/>
+          </a:bodyPr>
+          <a:lstStyle/>
+          <a:p>
+            <a:pPr algn="l"/>
+            <a:r>
+              <a:rPr sz="2000" b="1">
+                <a:solidFill>
+                  <a:srgbClr val="333333"/>
+                </a:solidFill>
+                <a:latin typeface="Yu Gothic"/>
+              </a:rPr>
+              <a:t>Disprzからメールが届く</a:t>
+            </a:r>
+          </a:p>
+        </p:txBody>
+      </p:sp>
+      <p:pic>
+        <p:nvPicPr>
+          <p:cNvPr id="5" name="Picture 4" descr="d12.jpg"/>
+          <p:cNvPicPr>
+            <a:picLocks noChangeAspect="1"/>
+          </p:cNvPicPr>
+          <p:nvPr/>
+        </p:nvPicPr>
+        <p:blipFill>
+          <a:blip r:embed="rId2"/>
+          <a:stretch>
+            <a:fillRect/>
+          </a:stretch>
+        </p:blipFill>
+        <p:spPr>
+          <a:xfrm>
+            <a:off x="914400" y="1325880"/>
+            <a:ext cx="2281509" cy="4937760"/>
+          </a:xfrm>
+          <a:prstGeom prst="rect">
+            <a:avLst/>
+          </a:prstGeom>
+          <a:ln w="12700">
+            <a:solidFill>
+              <a:srgbClr val="BBBBBB"/>
+            </a:solidFill>
+          </a:ln>
+        </p:spPr>
+      </p:pic>
+      <p:sp>
+        <p:nvSpPr>
+          <p:cNvPr id="6" name="Rounded Rectangle 5"/>
+          <p:cNvSpPr/>
+          <p:nvPr/>
+        </p:nvSpPr>
+        <p:spPr>
+          <a:xfrm>
+            <a:off x="997185" y="2262854"/>
+            <a:ext cx="2121448" cy="335919"/>
+          </a:xfrm>
+          <a:prstGeom prst="roundRect">
+            <a:avLst>
+              <a:gd name="adj" fmla="val 12000"/>
+            </a:avLst>
+          </a:prstGeom>
+          <a:noFill/>
+          <a:ln w="38100">
+            <a:solidFill>
+              <a:srgbClr val="D32F2F"/>
+            </a:solidFill>
+          </a:ln>
+          <a:effectLst/>
+        </p:spPr>
+        <p:style>
+          <a:lnRef idx="1">
+            <a:schemeClr val="accent1"/>
+          </a:lnRef>
+          <a:fillRef idx="3">
+            <a:schemeClr val="accent1"/>
+          </a:fillRef>
+          <a:effectRef idx="2">
+            <a:schemeClr val="accent1"/>
+          </a:effectRef>
+          <a:fontRef idx="minor">
+            <a:schemeClr val="lt1"/>
+          </a:fontRef>
+        </p:style>
+        <p:txBody>
+          <a:bodyPr rtlCol="0" anchor="ctr"/>
+          <a:lstStyle/>
+          <a:p>
+            <a:pPr algn="ctr"/>
+          </a:p>
+        </p:txBody>
+      </p:sp>
+      <p:cxnSp>
+        <p:nvCxnSpPr>
+          <p:cNvPr id="7" name="Connector 6"/>
+          <p:cNvCxnSpPr/>
+          <p:nvPr/>
+        </p:nvCxnSpPr>
+        <p:spPr>
+          <a:xfrm>
+            <a:off x="3118634" y="2430814"/>
+            <a:ext cx="2322046" cy="0"/>
+          </a:xfrm>
+          <a:prstGeom prst="line">
+            <a:avLst/>
+          </a:prstGeom>
+          <a:ln w="22225">
+            <a:solidFill>
+              <a:srgbClr val="D32F2F"/>
+            </a:solidFill>
+          </a:ln>
+        </p:spPr>
+        <p:style>
+          <a:lnRef idx="2">
+            <a:schemeClr val="accent1"/>
+          </a:lnRef>
+          <a:fillRef idx="0">
+            <a:schemeClr val="accent1"/>
+          </a:fillRef>
+          <a:effectRef idx="1">
+            <a:schemeClr val="accent1"/>
+          </a:effectRef>
+          <a:fontRef idx="minor">
+            <a:schemeClr val="tx1"/>
+          </a:fontRef>
+        </p:style>
+      </p:cxnSp>
+      <p:sp>
+        <p:nvSpPr>
+          <p:cNvPr id="8" name="Oval 7"/>
+          <p:cNvSpPr/>
+          <p:nvPr/>
+        </p:nvSpPr>
+        <p:spPr>
+          <a:xfrm>
+            <a:off x="5477256" y="2238790"/>
+            <a:ext cx="384048" cy="384048"/>
+          </a:xfrm>
+          <a:prstGeom prst="ellipse">
+            <a:avLst/>
+          </a:prstGeom>
+          <a:solidFill>
+            <a:srgbClr val="D32F2F"/>
+          </a:solidFill>
+          <a:ln w="19050">
+            <a:solidFill>
+              <a:srgbClr val="FFFFFF"/>
+            </a:solidFill>
+          </a:ln>
+          <a:effectLst/>
+        </p:spPr>
+        <p:style>
+          <a:lnRef idx="1">
+            <a:schemeClr val="accent1"/>
+          </a:lnRef>
+          <a:fillRef idx="3">
+            <a:schemeClr val="accent1"/>
+          </a:fillRef>
+          <a:effectRef idx="2">
+            <a:schemeClr val="accent1"/>
+          </a:effectRef>
+          <a:fontRef idx="minor">
+            <a:schemeClr val="lt1"/>
+          </a:fontRef>
+        </p:style>
+        <p:txBody>
+          <a:bodyPr rtlCol="0" anchor="ctr" lIns="0" rIns="0" tIns="0" bIns="0"/>
+          <a:lstStyle/>
+          <a:p>
+            <a:pPr algn="ctr"/>
+            <a:r>
+              <a:rPr sz="1400" b="1">
+                <a:solidFill>
+                  <a:srgbClr val="FFFFFF"/>
+                </a:solidFill>
+                <a:latin typeface="Yu Gothic"/>
+              </a:rPr>
+              <a:t>1</a:t>
+            </a:r>
+          </a:p>
+        </p:txBody>
+      </p:sp>
+      <p:sp>
+        <p:nvSpPr>
+          <p:cNvPr id="9" name="TextBox 8"/>
+          <p:cNvSpPr txBox="1"/>
+          <p:nvPr/>
+        </p:nvSpPr>
+        <p:spPr>
+          <a:xfrm>
+            <a:off x="6035040" y="2156494"/>
+            <a:ext cx="5943600" cy="411480"/>
+          </a:xfrm>
+          <a:prstGeom prst="rect">
+            <a:avLst/>
+          </a:prstGeom>
+          <a:noFill/>
+        </p:spPr>
+        <p:txBody>
+          <a:bodyPr wrap="square" lIns="45720" rIns="45720" tIns="22860" bIns="22860" anchor="ctr">
+            <a:spAutoFit/>
+          </a:bodyPr>
+          <a:lstStyle/>
+          <a:p>
+            <a:pPr algn="l"/>
+            <a:r>
+              <a:rPr sz="2000" b="1">
+                <a:solidFill>
+                  <a:srgbClr val="333333"/>
+                </a:solidFill>
+                <a:latin typeface="Yu Gothic"/>
+              </a:rPr>
+              <a:t>Disprzからのメール</a:t>
+            </a:r>
+          </a:p>
+        </p:txBody>
+      </p:sp>
+      <p:sp>
+        <p:nvSpPr>
+          <p:cNvPr id="10" name="TextBox 9"/>
+          <p:cNvSpPr txBox="1"/>
+          <p:nvPr/>
+        </p:nvSpPr>
+        <p:spPr>
+          <a:xfrm>
+            <a:off x="6035040" y="2540542"/>
+            <a:ext cx="5943600" cy="365760"/>
+          </a:xfrm>
+          <a:prstGeom prst="rect">
+            <a:avLst/>
+          </a:prstGeom>
+          <a:noFill/>
+        </p:spPr>
+        <p:txBody>
+          <a:bodyPr wrap="square" lIns="45720" rIns="45720" tIns="22860" bIns="22860" anchor="t">
+            <a:spAutoFit/>
+          </a:bodyPr>
+          <a:lstStyle/>
+          <a:p>
+            <a:pPr algn="l"/>
+            <a:r>
+              <a:rPr sz="1400" b="0">
+                <a:solidFill>
+                  <a:srgbClr val="666666"/>
+                </a:solidFill>
+                <a:latin typeface="Yu Gothic"/>
+              </a:rPr>
+              <a:t>案内どおりに進める</a:t>
+            </a:r>
+          </a:p>
+        </p:txBody>
+      </p:sp>
+      <p:sp>
+        <p:nvSpPr>
+          <p:cNvPr id="11" name="Rounded Rectangle 10"/>
+          <p:cNvSpPr/>
+          <p:nvPr/>
+        </p:nvSpPr>
+        <p:spPr>
+          <a:xfrm>
+            <a:off x="5394960" y="3931920"/>
+            <a:ext cx="6355080" cy="1188720"/>
+          </a:xfrm>
+          <a:prstGeom prst="roundRect">
+            <a:avLst>
+              <a:gd name="adj" fmla="val 8000"/>
+            </a:avLst>
+          </a:prstGeom>
+          <a:solidFill>
+            <a:srgbClr val="FDECEC"/>
+          </a:solidFill>
+          <a:ln w="25400">
+            <a:solidFill>
+              <a:srgbClr val="D32F2F"/>
+            </a:solidFill>
+          </a:ln>
+          <a:effectLst/>
+        </p:spPr>
+        <p:style>
+          <a:lnRef idx="1">
+            <a:schemeClr val="accent1"/>
+          </a:lnRef>
+          <a:fillRef idx="3">
+            <a:schemeClr val="accent1"/>
+          </a:fillRef>
+          <a:effectRef idx="2">
+            <a:schemeClr val="accent1"/>
+          </a:effectRef>
+          <a:fontRef idx="minor">
+            <a:schemeClr val="lt1"/>
+          </a:fontRef>
+        </p:style>
+        <p:txBody>
+          <a:bodyPr rtlCol="0" anchor="ctr"/>
+          <a:lstStyle/>
+          <a:p>
+            <a:pPr algn="ctr"/>
+          </a:p>
+        </p:txBody>
+      </p:sp>
+      <p:sp>
+        <p:nvSpPr>
+          <p:cNvPr id="12" name="TextBox 11"/>
+          <p:cNvSpPr txBox="1"/>
+          <p:nvPr/>
+        </p:nvSpPr>
+        <p:spPr>
+          <a:xfrm>
+            <a:off x="5577840" y="3931920"/>
+            <a:ext cx="6035040" cy="1188720"/>
+          </a:xfrm>
+          <a:prstGeom prst="rect">
+            <a:avLst/>
+          </a:prstGeom>
+          <a:noFill/>
+        </p:spPr>
+        <p:txBody>
+          <a:bodyPr wrap="square" lIns="45720" rIns="45720" tIns="22860" bIns="22860" anchor="ctr">
+            <a:spAutoFit/>
+          </a:bodyPr>
+          <a:lstStyle/>
+          <a:p>
+            <a:pPr algn="l"/>
+            <a:r>
+              <a:rPr sz="1800" b="1">
+                <a:solidFill>
+                  <a:srgbClr val="333333"/>
+                </a:solidFill>
+                <a:latin typeface="Yu Gothic"/>
+              </a:rPr>
+              <a:t>⚠ メールが届かないときは</a:t>
+            </a:r>
+          </a:p>
+          <a:p>
+            <a:pPr algn="l"/>
+            <a:r>
+              <a:rPr sz="1800" b="1">
+                <a:solidFill>
+                  <a:srgbClr val="333333"/>
+                </a:solidFill>
+                <a:latin typeface="Yu Gothic"/>
+              </a:rPr>
+              <a:t>登録チームへ報告</a:t>
+            </a:r>
+          </a:p>
+        </p:txBody>
+      </p:sp>
+    </p:spTree>
+  </p:cSld>
+  <p:clrMapOvr>
+    <a:masterClrMapping/>
+  </p:clrMapOvr>
+</p:sld>
+</file>
+
+<file path=ppt/slides/slide28.xml><?xml version="1.0" encoding="utf-8"?>
+<p:sld xmlns:a="http://schemas.openxmlformats.org/drawingml/2006/main" xmlns:p="http://schemas.openxmlformats.org/presentationml/2006/main" xmlns:r="http://schemas.openxmlformats.org/officeDocument/2006/relationships">
+  <p:cSld>
+    <p:spTree>
+      <p:nvGrpSpPr>
+        <p:cNvPr id="1" name=""/>
+        <p:cNvGrpSpPr/>
+        <p:nvPr/>
+      </p:nvGrpSpPr>
+      <p:grpSpPr/>
+      <p:sp>
+        <p:nvSpPr>
+          <p:cNvPr id="2" name="Rounded Rectangle 1"/>
+          <p:cNvSpPr/>
+          <p:nvPr/>
+        </p:nvSpPr>
+        <p:spPr>
+          <a:xfrm>
+            <a:off x="411480" y="777240"/>
+            <a:ext cx="502920" cy="384048"/>
+          </a:xfrm>
+          <a:prstGeom prst="roundRect">
+            <a:avLst>
+              <a:gd name="adj" fmla="val 8000"/>
+            </a:avLst>
+          </a:prstGeom>
+          <a:solidFill>
+            <a:srgbClr val="4FB6BE"/>
+          </a:solidFill>
+          <a:ln>
+            <a:noFill/>
+          </a:ln>
+          <a:effectLst/>
+        </p:spPr>
+        <p:style>
+          <a:lnRef idx="1">
+            <a:schemeClr val="accent1"/>
+          </a:lnRef>
+          <a:fillRef idx="3">
+            <a:schemeClr val="accent1"/>
+          </a:fillRef>
+          <a:effectRef idx="2">
+            <a:schemeClr val="accent1"/>
+          </a:effectRef>
+          <a:fontRef idx="minor">
+            <a:schemeClr val="lt1"/>
+          </a:fontRef>
+        </p:style>
+        <p:txBody>
+          <a:bodyPr rtlCol="0" anchor="ctr"/>
+          <a:lstStyle/>
+          <a:p>
+            <a:pPr algn="ctr"/>
+          </a:p>
+        </p:txBody>
+      </p:sp>
+      <p:sp>
+        <p:nvSpPr>
+          <p:cNvPr id="3" name="TextBox 2"/>
+          <p:cNvSpPr txBox="1"/>
+          <p:nvPr/>
+        </p:nvSpPr>
+        <p:spPr>
+          <a:xfrm>
+            <a:off x="411480" y="777240"/>
+            <a:ext cx="502920" cy="384048"/>
+          </a:xfrm>
+          <a:prstGeom prst="rect">
+            <a:avLst/>
+          </a:prstGeom>
+          <a:noFill/>
+        </p:spPr>
+        <p:txBody>
+          <a:bodyPr wrap="square" lIns="45720" rIns="45720" tIns="22860" bIns="22860" anchor="ctr">
+            <a:spAutoFit/>
+          </a:bodyPr>
+          <a:lstStyle/>
+          <a:p>
+            <a:pPr algn="ctr"/>
+            <a:r>
+              <a:rPr sz="1200" b="1">
+                <a:solidFill>
+                  <a:srgbClr val="FFFFFF"/>
+                </a:solidFill>
+                <a:latin typeface="Yu Gothic"/>
+              </a:rPr>
+              <a:t>④-2</a:t>
+            </a:r>
+          </a:p>
+        </p:txBody>
+      </p:sp>
+      <p:sp>
+        <p:nvSpPr>
+          <p:cNvPr id="4" name="TextBox 3"/>
+          <p:cNvSpPr txBox="1"/>
+          <p:nvPr/>
+        </p:nvSpPr>
+        <p:spPr>
+          <a:xfrm>
+            <a:off x="1078992" y="777240"/>
+            <a:ext cx="10607040" cy="384048"/>
+          </a:xfrm>
+          <a:prstGeom prst="rect">
+            <a:avLst/>
+          </a:prstGeom>
+          <a:noFill/>
+        </p:spPr>
+        <p:txBody>
+          <a:bodyPr wrap="square" lIns="45720" rIns="45720" tIns="22860" bIns="22860" anchor="ctr">
+            <a:spAutoFit/>
+          </a:bodyPr>
+          <a:lstStyle/>
+          <a:p>
+            <a:pPr algn="l"/>
+            <a:r>
+              <a:rPr sz="2000" b="1">
+                <a:solidFill>
+                  <a:srgbClr val="333333"/>
+                </a:solidFill>
+                <a:latin typeface="Yu Gothic"/>
+              </a:rPr>
+              <a:t>アプリを取得する</a:t>
+            </a:r>
+          </a:p>
+        </p:txBody>
+      </p:sp>
+      <p:pic>
+        <p:nvPicPr>
+          <p:cNvPr id="5" name="Picture 4" descr="d12.jpg"/>
+          <p:cNvPicPr>
+            <a:picLocks noChangeAspect="1"/>
+          </p:cNvPicPr>
+          <p:nvPr/>
+        </p:nvPicPr>
+        <p:blipFill>
+          <a:blip r:embed="rId2"/>
+          <a:stretch>
+            <a:fillRect/>
+          </a:stretch>
+        </p:blipFill>
+        <p:spPr>
+          <a:xfrm>
+            <a:off x="914400" y="1325880"/>
+            <a:ext cx="2281509" cy="4937760"/>
+          </a:xfrm>
+          <a:prstGeom prst="rect">
+            <a:avLst/>
+          </a:prstGeom>
+          <a:ln w="12700">
+            <a:solidFill>
+              <a:srgbClr val="BBBBBB"/>
+            </a:solidFill>
+          </a:ln>
+        </p:spPr>
+      </p:pic>
+      <p:sp>
+        <p:nvSpPr>
+          <p:cNvPr id="6" name="Rounded Rectangle 5"/>
+          <p:cNvSpPr/>
+          <p:nvPr/>
+        </p:nvSpPr>
+        <p:spPr>
+          <a:xfrm>
+            <a:off x="1300284" y="4618760"/>
+            <a:ext cx="1033047" cy="228457"/>
+          </a:xfrm>
+          <a:prstGeom prst="roundRect">
+            <a:avLst>
+              <a:gd name="adj" fmla="val 12000"/>
+            </a:avLst>
+          </a:prstGeom>
+          <a:noFill/>
+          <a:ln w="38100">
+            <a:solidFill>
+              <a:srgbClr val="D32F2F"/>
+            </a:solidFill>
+          </a:ln>
+          <a:effectLst/>
+        </p:spPr>
+        <p:style>
+          <a:lnRef idx="1">
+            <a:schemeClr val="accent1"/>
+          </a:lnRef>
+          <a:fillRef idx="3">
+            <a:schemeClr val="accent1"/>
+          </a:fillRef>
+          <a:effectRef idx="2">
+            <a:schemeClr val="accent1"/>
+          </a:effectRef>
+          <a:fontRef idx="minor">
+            <a:schemeClr val="lt1"/>
+          </a:fontRef>
+        </p:style>
+        <p:txBody>
+          <a:bodyPr rtlCol="0" anchor="ctr"/>
+          <a:lstStyle/>
+          <a:p>
+            <a:pPr algn="ctr"/>
+          </a:p>
+        </p:txBody>
+      </p:sp>
+      <p:cxnSp>
+        <p:nvCxnSpPr>
+          <p:cNvPr id="7" name="Connector 6"/>
+          <p:cNvCxnSpPr/>
+          <p:nvPr/>
+        </p:nvCxnSpPr>
+        <p:spPr>
+          <a:xfrm flipV="1">
+            <a:off x="2333332" y="4106788"/>
+            <a:ext cx="3107348" cy="626201"/>
+          </a:xfrm>
+          <a:prstGeom prst="line">
+            <a:avLst/>
+          </a:prstGeom>
+          <a:ln w="22225">
+            <a:solidFill>
+              <a:srgbClr val="D32F2F"/>
+            </a:solidFill>
+          </a:ln>
+        </p:spPr>
+        <p:style>
+          <a:lnRef idx="2">
+            <a:schemeClr val="accent1"/>
+          </a:lnRef>
+          <a:fillRef idx="0">
+            <a:schemeClr val="accent1"/>
+          </a:fillRef>
+          <a:effectRef idx="1">
+            <a:schemeClr val="accent1"/>
+          </a:effectRef>
+          <a:fontRef idx="minor">
+            <a:schemeClr val="tx1"/>
+          </a:fontRef>
+        </p:style>
+      </p:cxnSp>
+      <p:sp>
+        <p:nvSpPr>
+          <p:cNvPr id="8" name="Oval 7"/>
+          <p:cNvSpPr/>
+          <p:nvPr/>
+        </p:nvSpPr>
+        <p:spPr>
+          <a:xfrm>
+            <a:off x="5477256" y="3914764"/>
+            <a:ext cx="384048" cy="384048"/>
+          </a:xfrm>
+          <a:prstGeom prst="ellipse">
+            <a:avLst/>
+          </a:prstGeom>
+          <a:solidFill>
+            <a:srgbClr val="D32F2F"/>
+          </a:solidFill>
+          <a:ln w="19050">
+            <a:solidFill>
+              <a:srgbClr val="FFFFFF"/>
+            </a:solidFill>
+          </a:ln>
+          <a:effectLst/>
+        </p:spPr>
+        <p:style>
+          <a:lnRef idx="1">
+            <a:schemeClr val="accent1"/>
+          </a:lnRef>
+          <a:fillRef idx="3">
+            <a:schemeClr val="accent1"/>
+          </a:fillRef>
+          <a:effectRef idx="2">
+            <a:schemeClr val="accent1"/>
+          </a:effectRef>
+          <a:fontRef idx="minor">
+            <a:schemeClr val="lt1"/>
+          </a:fontRef>
+        </p:style>
+        <p:txBody>
+          <a:bodyPr rtlCol="0" anchor="ctr" lIns="0" rIns="0" tIns="0" bIns="0"/>
+          <a:lstStyle/>
+          <a:p>
+            <a:pPr algn="ctr"/>
+            <a:r>
+              <a:rPr sz="1400" b="1">
+                <a:solidFill>
+                  <a:srgbClr val="FFFFFF"/>
+                </a:solidFill>
+                <a:latin typeface="Yu Gothic"/>
+              </a:rPr>
+              <a:t>1</a:t>
+            </a:r>
+          </a:p>
+        </p:txBody>
+      </p:sp>
+      <p:sp>
+        <p:nvSpPr>
+          <p:cNvPr id="9" name="TextBox 8"/>
+          <p:cNvSpPr txBox="1"/>
+          <p:nvPr/>
+        </p:nvSpPr>
+        <p:spPr>
+          <a:xfrm>
+            <a:off x="6035040" y="3832468"/>
+            <a:ext cx="5943600" cy="411480"/>
+          </a:xfrm>
+          <a:prstGeom prst="rect">
+            <a:avLst/>
+          </a:prstGeom>
+          <a:noFill/>
+        </p:spPr>
+        <p:txBody>
+          <a:bodyPr wrap="square" lIns="45720" rIns="45720" tIns="22860" bIns="22860" anchor="ctr">
+            <a:spAutoFit/>
+          </a:bodyPr>
+          <a:lstStyle/>
+          <a:p>
+            <a:pPr algn="l"/>
+            <a:r>
+              <a:rPr sz="2000" b="1">
+                <a:solidFill>
+                  <a:srgbClr val="333333"/>
+                </a:solidFill>
+                <a:latin typeface="Yu Gothic"/>
+              </a:rPr>
+              <a:t>Google Play Store</a:t>
+            </a:r>
+          </a:p>
+        </p:txBody>
+      </p:sp>
+      <p:sp>
+        <p:nvSpPr>
+          <p:cNvPr id="10" name="TextBox 9"/>
+          <p:cNvSpPr txBox="1"/>
+          <p:nvPr/>
+        </p:nvSpPr>
+        <p:spPr>
+          <a:xfrm>
+            <a:off x="6035040" y="4216516"/>
+            <a:ext cx="5943600" cy="365760"/>
+          </a:xfrm>
+          <a:prstGeom prst="rect">
+            <a:avLst/>
+          </a:prstGeom>
+          <a:noFill/>
+        </p:spPr>
+        <p:txBody>
+          <a:bodyPr wrap="square" lIns="45720" rIns="45720" tIns="22860" bIns="22860" anchor="t">
+            <a:spAutoFit/>
+          </a:bodyPr>
+          <a:lstStyle/>
+          <a:p>
+            <a:pPr algn="l"/>
+            <a:r>
+              <a:rPr sz="1400" b="0">
+                <a:solidFill>
+                  <a:srgbClr val="666666"/>
+                </a:solidFill>
+                <a:latin typeface="Yu Gothic"/>
+              </a:rPr>
+              <a:t>Android の人はこちらのリンク</a:t>
+            </a:r>
+          </a:p>
+        </p:txBody>
+      </p:sp>
+      <p:sp>
+        <p:nvSpPr>
+          <p:cNvPr id="11" name="Rounded Rectangle 10"/>
+          <p:cNvSpPr/>
+          <p:nvPr/>
+        </p:nvSpPr>
+        <p:spPr>
+          <a:xfrm>
+            <a:off x="1300284" y="4861240"/>
+            <a:ext cx="964161" cy="228457"/>
+          </a:xfrm>
+          <a:prstGeom prst="roundRect">
+            <a:avLst>
+              <a:gd name="adj" fmla="val 12000"/>
+            </a:avLst>
+          </a:prstGeom>
+          <a:noFill/>
+          <a:ln w="38100">
+            <a:solidFill>
+              <a:srgbClr val="D32F2F"/>
+            </a:solidFill>
+          </a:ln>
+          <a:effectLst/>
+        </p:spPr>
+        <p:style>
+          <a:lnRef idx="1">
+            <a:schemeClr val="accent1"/>
+          </a:lnRef>
+          <a:fillRef idx="3">
+            <a:schemeClr val="accent1"/>
+          </a:fillRef>
+          <a:effectRef idx="2">
+            <a:schemeClr val="accent1"/>
+          </a:effectRef>
+          <a:fontRef idx="minor">
+            <a:schemeClr val="lt1"/>
+          </a:fontRef>
+        </p:style>
+        <p:txBody>
+          <a:bodyPr rtlCol="0" anchor="ctr"/>
+          <a:lstStyle/>
+          <a:p>
+            <a:pPr algn="ctr"/>
+          </a:p>
+        </p:txBody>
+      </p:sp>
+      <p:cxnSp>
+        <p:nvCxnSpPr>
+          <p:cNvPr id="12" name="Connector 11"/>
+          <p:cNvCxnSpPr/>
+          <p:nvPr/>
+        </p:nvCxnSpPr>
+        <p:spPr>
+          <a:xfrm>
+            <a:off x="2264446" y="4975468"/>
+            <a:ext cx="3176234" cy="0"/>
+          </a:xfrm>
+          <a:prstGeom prst="line">
+            <a:avLst/>
+          </a:prstGeom>
+          <a:ln w="22225">
+            <a:solidFill>
+              <a:srgbClr val="D32F2F"/>
+            </a:solidFill>
+          </a:ln>
+        </p:spPr>
+        <p:style>
+          <a:lnRef idx="2">
+            <a:schemeClr val="accent1"/>
+          </a:lnRef>
+          <a:fillRef idx="0">
+            <a:schemeClr val="accent1"/>
+          </a:fillRef>
+          <a:effectRef idx="1">
+            <a:schemeClr val="accent1"/>
+          </a:effectRef>
+          <a:fontRef idx="minor">
+            <a:schemeClr val="tx1"/>
+          </a:fontRef>
+        </p:style>
+      </p:cxnSp>
+      <p:sp>
+        <p:nvSpPr>
+          <p:cNvPr id="13" name="Oval 12"/>
+          <p:cNvSpPr/>
+          <p:nvPr/>
+        </p:nvSpPr>
+        <p:spPr>
+          <a:xfrm>
+            <a:off x="5477256" y="4783444"/>
+            <a:ext cx="384048" cy="384048"/>
+          </a:xfrm>
+          <a:prstGeom prst="ellipse">
+            <a:avLst/>
+          </a:prstGeom>
+          <a:solidFill>
+            <a:srgbClr val="D32F2F"/>
+          </a:solidFill>
+          <a:ln w="19050">
+            <a:solidFill>
+              <a:srgbClr val="FFFFFF"/>
+            </a:solidFill>
+          </a:ln>
+          <a:effectLst/>
+        </p:spPr>
+        <p:style>
+          <a:lnRef idx="1">
+            <a:schemeClr val="accent1"/>
+          </a:lnRef>
+          <a:fillRef idx="3">
+            <a:schemeClr val="accent1"/>
+          </a:fillRef>
+          <a:effectRef idx="2">
+            <a:schemeClr val="accent1"/>
+          </a:effectRef>
+          <a:fontRef idx="minor">
+            <a:schemeClr val="lt1"/>
+          </a:fontRef>
+        </p:style>
+        <p:txBody>
+          <a:bodyPr rtlCol="0" anchor="ctr" lIns="0" rIns="0" tIns="0" bIns="0"/>
+          <a:lstStyle/>
+          <a:p>
+            <a:pPr algn="ctr"/>
+            <a:r>
+              <a:rPr sz="1400" b="1">
+                <a:solidFill>
+                  <a:srgbClr val="FFFFFF"/>
+                </a:solidFill>
+                <a:latin typeface="Yu Gothic"/>
+              </a:rPr>
+              <a:t>2</a:t>
+            </a:r>
+          </a:p>
+        </p:txBody>
+      </p:sp>
+      <p:sp>
+        <p:nvSpPr>
+          <p:cNvPr id="14" name="TextBox 13"/>
+          <p:cNvSpPr txBox="1"/>
+          <p:nvPr/>
+        </p:nvSpPr>
+        <p:spPr>
+          <a:xfrm>
+            <a:off x="6035040" y="4701148"/>
+            <a:ext cx="5943600" cy="411480"/>
+          </a:xfrm>
+          <a:prstGeom prst="rect">
+            <a:avLst/>
+          </a:prstGeom>
+          <a:noFill/>
+        </p:spPr>
+        <p:txBody>
+          <a:bodyPr wrap="square" lIns="45720" rIns="45720" tIns="22860" bIns="22860" anchor="ctr">
+            <a:spAutoFit/>
+          </a:bodyPr>
+          <a:lstStyle/>
+          <a:p>
+            <a:pPr algn="l"/>
+            <a:r>
+              <a:rPr sz="2000" b="1">
+                <a:solidFill>
+                  <a:srgbClr val="333333"/>
+                </a:solidFill>
+                <a:latin typeface="Yu Gothic"/>
+              </a:rPr>
+              <a:t>Apple App Store</a:t>
+            </a:r>
+          </a:p>
+        </p:txBody>
+      </p:sp>
+      <p:sp>
+        <p:nvSpPr>
+          <p:cNvPr id="15" name="TextBox 14"/>
+          <p:cNvSpPr txBox="1"/>
+          <p:nvPr/>
+        </p:nvSpPr>
+        <p:spPr>
+          <a:xfrm>
+            <a:off x="6035040" y="5085196"/>
+            <a:ext cx="5943600" cy="365760"/>
+          </a:xfrm>
+          <a:prstGeom prst="rect">
+            <a:avLst/>
+          </a:prstGeom>
+          <a:noFill/>
+        </p:spPr>
+        <p:txBody>
+          <a:bodyPr wrap="square" lIns="45720" rIns="45720" tIns="22860" bIns="22860" anchor="t">
+            <a:spAutoFit/>
+          </a:bodyPr>
+          <a:lstStyle/>
+          <a:p>
+            <a:pPr algn="l"/>
+            <a:r>
+              <a:rPr sz="1400" b="0">
+                <a:solidFill>
+                  <a:srgbClr val="666666"/>
+                </a:solidFill>
+                <a:latin typeface="Yu Gothic"/>
+              </a:rPr>
+              <a:t>iPhone の人はこちらのリンク</a:t>
+            </a:r>
+          </a:p>
+        </p:txBody>
+      </p:sp>
+      <p:sp>
+        <p:nvSpPr>
+          <p:cNvPr id="16" name="TextBox 15"/>
+          <p:cNvSpPr txBox="1"/>
+          <p:nvPr/>
+        </p:nvSpPr>
+        <p:spPr>
+          <a:xfrm>
+            <a:off x="5394960" y="1463040"/>
+            <a:ext cx="6355080" cy="822960"/>
+          </a:xfrm>
+          <a:prstGeom prst="rect">
+            <a:avLst/>
+          </a:prstGeom>
+          <a:noFill/>
+        </p:spPr>
+        <p:txBody>
+          <a:bodyPr wrap="square" lIns="45720" rIns="45720" tIns="22860" bIns="22860" anchor="t">
+            <a:spAutoFit/>
+          </a:bodyPr>
+          <a:lstStyle/>
+          <a:p>
+            <a:pPr algn="l"/>
+            <a:r>
+              <a:rPr sz="1600" b="1">
+                <a:solidFill>
+                  <a:srgbClr val="333333"/>
+                </a:solidFill>
+                <a:latin typeface="Yu Gothic"/>
+              </a:rPr>
+              <a:t>お使いのスマートフォンに応じて、</a:t>
+            </a:r>
+          </a:p>
+          <a:p>
+            <a:pPr algn="l"/>
+            <a:r>
+              <a:rPr sz="1600" b="1">
+                <a:solidFill>
+                  <a:srgbClr val="333333"/>
+                </a:solidFill>
+                <a:latin typeface="Yu Gothic"/>
+              </a:rPr>
+              <a:t>メールのリンクからアプリをダウンロード</a:t>
+            </a:r>
+          </a:p>
+        </p:txBody>
+      </p:sp>
+    </p:spTree>
+  </p:cSld>
+  <p:clrMapOvr>
+    <a:masterClrMapping/>
+  </p:clrMapOvr>
+</p:sld>
+</file>
+
+<file path=ppt/slides/slide29.xml><?xml version="1.0" encoding="utf-8"?>
+<p:sld xmlns:a="http://schemas.openxmlformats.org/drawingml/2006/main" xmlns:p="http://schemas.openxmlformats.org/presentationml/2006/main" xmlns:r="http://schemas.openxmlformats.org/officeDocument/2006/relationships">
+  <p:cSld>
+    <p:spTree>
+      <p:nvGrpSpPr>
+        <p:cNvPr id="1" name=""/>
+        <p:cNvGrpSpPr/>
+        <p:nvPr/>
+      </p:nvGrpSpPr>
+      <p:grpSpPr/>
+      <p:sp>
+        <p:nvSpPr>
+          <p:cNvPr id="2" name="Rounded Rectangle 1"/>
+          <p:cNvSpPr/>
+          <p:nvPr/>
+        </p:nvSpPr>
+        <p:spPr>
+          <a:xfrm>
+            <a:off x="411480" y="777240"/>
+            <a:ext cx="502920" cy="384048"/>
+          </a:xfrm>
+          <a:prstGeom prst="roundRect">
+            <a:avLst>
+              <a:gd name="adj" fmla="val 8000"/>
+            </a:avLst>
+          </a:prstGeom>
+          <a:solidFill>
+            <a:srgbClr val="4FB6BE"/>
+          </a:solidFill>
+          <a:ln>
+            <a:noFill/>
+          </a:ln>
+          <a:effectLst/>
+        </p:spPr>
+        <p:style>
+          <a:lnRef idx="1">
+            <a:schemeClr val="accent1"/>
+          </a:lnRef>
+          <a:fillRef idx="3">
+            <a:schemeClr val="accent1"/>
+          </a:fillRef>
+          <a:effectRef idx="2">
+            <a:schemeClr val="accent1"/>
+          </a:effectRef>
+          <a:fontRef idx="minor">
+            <a:schemeClr val="lt1"/>
+          </a:fontRef>
+        </p:style>
+        <p:txBody>
+          <a:bodyPr rtlCol="0" anchor="ctr"/>
+          <a:lstStyle/>
+          <a:p>
+            <a:pPr algn="ctr"/>
+          </a:p>
+        </p:txBody>
+      </p:sp>
+      <p:sp>
+        <p:nvSpPr>
+          <p:cNvPr id="3" name="TextBox 2"/>
+          <p:cNvSpPr txBox="1"/>
+          <p:nvPr/>
+        </p:nvSpPr>
+        <p:spPr>
+          <a:xfrm>
+            <a:off x="411480" y="777240"/>
+            <a:ext cx="502920" cy="384048"/>
+          </a:xfrm>
+          <a:prstGeom prst="rect">
+            <a:avLst/>
+          </a:prstGeom>
+          <a:noFill/>
+        </p:spPr>
+        <p:txBody>
+          <a:bodyPr wrap="square" lIns="45720" rIns="45720" tIns="22860" bIns="22860" anchor="ctr">
+            <a:spAutoFit/>
+          </a:bodyPr>
+          <a:lstStyle/>
+          <a:p>
+            <a:pPr algn="ctr"/>
+            <a:r>
+              <a:rPr sz="1200" b="1">
+                <a:solidFill>
+                  <a:srgbClr val="FFFFFF"/>
+                </a:solidFill>
+                <a:latin typeface="Yu Gothic"/>
+              </a:rPr>
+              <a:t>④-3</a:t>
+            </a:r>
+          </a:p>
+        </p:txBody>
+      </p:sp>
+      <p:sp>
+        <p:nvSpPr>
+          <p:cNvPr id="4" name="TextBox 3"/>
+          <p:cNvSpPr txBox="1"/>
+          <p:nvPr/>
+        </p:nvSpPr>
+        <p:spPr>
+          <a:xfrm>
+            <a:off x="1078992" y="777240"/>
+            <a:ext cx="10607040" cy="384048"/>
+          </a:xfrm>
+          <a:prstGeom prst="rect">
+            <a:avLst/>
+          </a:prstGeom>
+          <a:noFill/>
+        </p:spPr>
+        <p:txBody>
+          <a:bodyPr wrap="square" lIns="45720" rIns="45720" tIns="22860" bIns="22860" anchor="ctr">
+            <a:spAutoFit/>
+          </a:bodyPr>
+          <a:lstStyle/>
+          <a:p>
+            <a:pPr algn="l"/>
+            <a:r>
+              <a:rPr sz="2000" b="1">
+                <a:solidFill>
+                  <a:srgbClr val="333333"/>
+                </a:solidFill>
+                <a:latin typeface="Yu Gothic"/>
+              </a:rPr>
+              <a:t>メールのID・パスワードを確認する</a:t>
+            </a:r>
+          </a:p>
+        </p:txBody>
+      </p:sp>
+      <p:pic>
+        <p:nvPicPr>
+          <p:cNvPr id="5" name="Picture 4" descr="d16.jpg"/>
+          <p:cNvPicPr>
+            <a:picLocks noChangeAspect="1"/>
+          </p:cNvPicPr>
+          <p:nvPr/>
+        </p:nvPicPr>
+        <p:blipFill>
+          <a:blip r:embed="rId2"/>
+          <a:stretch>
+            <a:fillRect/>
+          </a:stretch>
+        </p:blipFill>
+        <p:spPr>
+          <a:xfrm>
+            <a:off x="914400" y="1325880"/>
+            <a:ext cx="2281509" cy="4937760"/>
+          </a:xfrm>
+          <a:prstGeom prst="rect">
+            <a:avLst/>
+          </a:prstGeom>
+          <a:ln w="12700">
+            <a:solidFill>
+              <a:srgbClr val="BBBBBB"/>
+            </a:solidFill>
+          </a:ln>
+        </p:spPr>
+      </p:pic>
+      <p:sp>
+        <p:nvSpPr>
+          <p:cNvPr id="6" name="Rounded Rectangle 5"/>
+          <p:cNvSpPr/>
+          <p:nvPr/>
+        </p:nvSpPr>
+        <p:spPr>
+          <a:xfrm>
+            <a:off x="1300284" y="3122553"/>
+            <a:ext cx="1170819" cy="159570"/>
+          </a:xfrm>
+          <a:prstGeom prst="roundRect">
+            <a:avLst>
+              <a:gd name="adj" fmla="val 12000"/>
+            </a:avLst>
+          </a:prstGeom>
+          <a:noFill/>
+          <a:ln w="38100">
+            <a:solidFill>
+              <a:srgbClr val="D32F2F"/>
+            </a:solidFill>
+          </a:ln>
+          <a:effectLst/>
+        </p:spPr>
+        <p:style>
+          <a:lnRef idx="1">
+            <a:schemeClr val="accent1"/>
+          </a:lnRef>
+          <a:fillRef idx="3">
+            <a:schemeClr val="accent1"/>
+          </a:fillRef>
+          <a:effectRef idx="2">
+            <a:schemeClr val="accent1"/>
+          </a:effectRef>
+          <a:fontRef idx="minor">
+            <a:schemeClr val="lt1"/>
+          </a:fontRef>
+        </p:style>
+        <p:txBody>
+          <a:bodyPr rtlCol="0" anchor="ctr"/>
+          <a:lstStyle/>
+          <a:p>
+            <a:pPr algn="ctr"/>
+          </a:p>
+        </p:txBody>
+      </p:sp>
+      <p:cxnSp>
+        <p:nvCxnSpPr>
+          <p:cNvPr id="7" name="Connector 6"/>
+          <p:cNvCxnSpPr/>
+          <p:nvPr/>
+        </p:nvCxnSpPr>
+        <p:spPr>
+          <a:xfrm flipV="1">
+            <a:off x="2471104" y="2798615"/>
+            <a:ext cx="2969576" cy="403724"/>
+          </a:xfrm>
+          <a:prstGeom prst="line">
+            <a:avLst/>
+          </a:prstGeom>
+          <a:ln w="22225">
+            <a:solidFill>
+              <a:srgbClr val="D32F2F"/>
+            </a:solidFill>
+          </a:ln>
+        </p:spPr>
+        <p:style>
+          <a:lnRef idx="2">
+            <a:schemeClr val="accent1"/>
+          </a:lnRef>
+          <a:fillRef idx="0">
+            <a:schemeClr val="accent1"/>
+          </a:fillRef>
+          <a:effectRef idx="1">
+            <a:schemeClr val="accent1"/>
+          </a:effectRef>
+          <a:fontRef idx="minor">
+            <a:schemeClr val="tx1"/>
+          </a:fontRef>
+        </p:style>
+      </p:cxnSp>
+      <p:sp>
+        <p:nvSpPr>
+          <p:cNvPr id="8" name="Oval 7"/>
+          <p:cNvSpPr/>
+          <p:nvPr/>
+        </p:nvSpPr>
+        <p:spPr>
+          <a:xfrm>
+            <a:off x="5477256" y="2606591"/>
+            <a:ext cx="384048" cy="384048"/>
+          </a:xfrm>
+          <a:prstGeom prst="ellipse">
+            <a:avLst/>
+          </a:prstGeom>
+          <a:solidFill>
+            <a:srgbClr val="D32F2F"/>
+          </a:solidFill>
+          <a:ln w="19050">
+            <a:solidFill>
+              <a:srgbClr val="FFFFFF"/>
+            </a:solidFill>
+          </a:ln>
+          <a:effectLst/>
+        </p:spPr>
+        <p:style>
+          <a:lnRef idx="1">
+            <a:schemeClr val="accent1"/>
+          </a:lnRef>
+          <a:fillRef idx="3">
+            <a:schemeClr val="accent1"/>
+          </a:fillRef>
+          <a:effectRef idx="2">
+            <a:schemeClr val="accent1"/>
+          </a:effectRef>
+          <a:fontRef idx="minor">
+            <a:schemeClr val="lt1"/>
+          </a:fontRef>
+        </p:style>
+        <p:txBody>
+          <a:bodyPr rtlCol="0" anchor="ctr" lIns="0" rIns="0" tIns="0" bIns="0"/>
+          <a:lstStyle/>
+          <a:p>
+            <a:pPr algn="ctr"/>
+            <a:r>
+              <a:rPr sz="1400" b="1">
+                <a:solidFill>
+                  <a:srgbClr val="FFFFFF"/>
+                </a:solidFill>
+                <a:latin typeface="Yu Gothic"/>
+              </a:rPr>
+              <a:t>1</a:t>
+            </a:r>
+          </a:p>
+        </p:txBody>
+      </p:sp>
+      <p:sp>
+        <p:nvSpPr>
+          <p:cNvPr id="9" name="TextBox 8"/>
+          <p:cNvSpPr txBox="1"/>
+          <p:nvPr/>
+        </p:nvSpPr>
+        <p:spPr>
+          <a:xfrm>
+            <a:off x="6035040" y="2524295"/>
+            <a:ext cx="5943600" cy="411480"/>
+          </a:xfrm>
+          <a:prstGeom prst="rect">
+            <a:avLst/>
+          </a:prstGeom>
+          <a:noFill/>
+        </p:spPr>
+        <p:txBody>
+          <a:bodyPr wrap="square" lIns="45720" rIns="45720" tIns="22860" bIns="22860" anchor="ctr">
+            <a:spAutoFit/>
+          </a:bodyPr>
+          <a:lstStyle/>
+          <a:p>
+            <a:pPr algn="l"/>
+            <a:r>
+              <a:rPr sz="2000" b="1">
+                <a:solidFill>
+                  <a:srgbClr val="333333"/>
+                </a:solidFill>
+                <a:latin typeface="Yu Gothic"/>
+              </a:rPr>
+              <a:t>組織のURL</a:t>
+            </a:r>
+          </a:p>
+        </p:txBody>
+      </p:sp>
+      <p:sp>
+        <p:nvSpPr>
+          <p:cNvPr id="10" name="TextBox 9"/>
+          <p:cNvSpPr txBox="1"/>
+          <p:nvPr/>
+        </p:nvSpPr>
+        <p:spPr>
+          <a:xfrm>
+            <a:off x="6035040" y="2908343"/>
+            <a:ext cx="5943600" cy="365760"/>
+          </a:xfrm>
+          <a:prstGeom prst="rect">
+            <a:avLst/>
+          </a:prstGeom>
+          <a:noFill/>
+        </p:spPr>
+        <p:txBody>
+          <a:bodyPr wrap="square" lIns="45720" rIns="45720" tIns="22860" bIns="22860" anchor="t">
+            <a:spAutoFit/>
+          </a:bodyPr>
+          <a:lstStyle/>
+          <a:p>
+            <a:pPr algn="l"/>
+            <a:r>
+              <a:rPr sz="1400" b="0">
+                <a:solidFill>
+                  <a:srgbClr val="666666"/>
+                </a:solidFill>
+                <a:latin typeface="Yu Gothic"/>
+              </a:rPr>
+              <a:t>アプリで「組織のURLとともに」をタップして貼り付け</a:t>
+            </a:r>
+          </a:p>
+        </p:txBody>
+      </p:sp>
+      <p:sp>
+        <p:nvSpPr>
+          <p:cNvPr id="11" name="Rounded Rectangle 10"/>
+          <p:cNvSpPr/>
+          <p:nvPr/>
+        </p:nvSpPr>
+        <p:spPr>
+          <a:xfrm>
+            <a:off x="1300284" y="4329439"/>
+            <a:ext cx="1349923" cy="165081"/>
+          </a:xfrm>
+          <a:prstGeom prst="roundRect">
+            <a:avLst>
+              <a:gd name="adj" fmla="val 12000"/>
+            </a:avLst>
+          </a:prstGeom>
+          <a:noFill/>
+          <a:ln w="38100">
+            <a:solidFill>
+              <a:srgbClr val="D32F2F"/>
+            </a:solidFill>
+          </a:ln>
+          <a:effectLst/>
+        </p:spPr>
+        <p:style>
+          <a:lnRef idx="1">
+            <a:schemeClr val="accent1"/>
+          </a:lnRef>
+          <a:fillRef idx="3">
+            <a:schemeClr val="accent1"/>
+          </a:fillRef>
+          <a:effectRef idx="2">
+            <a:schemeClr val="accent1"/>
+          </a:effectRef>
+          <a:fontRef idx="minor">
+            <a:schemeClr val="lt1"/>
+          </a:fontRef>
+        </p:style>
+        <p:txBody>
+          <a:bodyPr rtlCol="0" anchor="ctr"/>
+          <a:lstStyle/>
+          <a:p>
+            <a:pPr algn="ctr"/>
+          </a:p>
+        </p:txBody>
+      </p:sp>
+      <p:cxnSp>
+        <p:nvCxnSpPr>
+          <p:cNvPr id="12" name="Connector 11"/>
+          <p:cNvCxnSpPr/>
+          <p:nvPr/>
+        </p:nvCxnSpPr>
+        <p:spPr>
+          <a:xfrm flipV="1">
+            <a:off x="2650208" y="3667295"/>
+            <a:ext cx="2790472" cy="744685"/>
+          </a:xfrm>
+          <a:prstGeom prst="line">
+            <a:avLst/>
+          </a:prstGeom>
+          <a:ln w="22225">
+            <a:solidFill>
+              <a:srgbClr val="D32F2F"/>
+            </a:solidFill>
+          </a:ln>
+        </p:spPr>
+        <p:style>
+          <a:lnRef idx="2">
+            <a:schemeClr val="accent1"/>
+          </a:lnRef>
+          <a:fillRef idx="0">
+            <a:schemeClr val="accent1"/>
+          </a:fillRef>
+          <a:effectRef idx="1">
+            <a:schemeClr val="accent1"/>
+          </a:effectRef>
+          <a:fontRef idx="minor">
+            <a:schemeClr val="tx1"/>
+          </a:fontRef>
+        </p:style>
+      </p:cxnSp>
+      <p:sp>
+        <p:nvSpPr>
+          <p:cNvPr id="13" name="Oval 12"/>
+          <p:cNvSpPr/>
+          <p:nvPr/>
+        </p:nvSpPr>
+        <p:spPr>
+          <a:xfrm>
+            <a:off x="5477256" y="3475271"/>
+            <a:ext cx="384048" cy="384048"/>
+          </a:xfrm>
+          <a:prstGeom prst="ellipse">
+            <a:avLst/>
+          </a:prstGeom>
+          <a:solidFill>
+            <a:srgbClr val="D32F2F"/>
+          </a:solidFill>
+          <a:ln w="19050">
+            <a:solidFill>
+              <a:srgbClr val="FFFFFF"/>
+            </a:solidFill>
+          </a:ln>
+          <a:effectLst/>
+        </p:spPr>
+        <p:style>
+          <a:lnRef idx="1">
+            <a:schemeClr val="accent1"/>
+          </a:lnRef>
+          <a:fillRef idx="3">
+            <a:schemeClr val="accent1"/>
+          </a:fillRef>
+          <a:effectRef idx="2">
+            <a:schemeClr val="accent1"/>
+          </a:effectRef>
+          <a:fontRef idx="minor">
+            <a:schemeClr val="lt1"/>
+          </a:fontRef>
+        </p:style>
+        <p:txBody>
+          <a:bodyPr rtlCol="0" anchor="ctr" lIns="0" rIns="0" tIns="0" bIns="0"/>
+          <a:lstStyle/>
+          <a:p>
+            <a:pPr algn="ctr"/>
+            <a:r>
+              <a:rPr sz="1400" b="1">
+                <a:solidFill>
+                  <a:srgbClr val="FFFFFF"/>
+                </a:solidFill>
+                <a:latin typeface="Yu Gothic"/>
+              </a:rPr>
+              <a:t>2</a:t>
+            </a:r>
+          </a:p>
+        </p:txBody>
+      </p:sp>
+      <p:sp>
+        <p:nvSpPr>
+          <p:cNvPr id="14" name="TextBox 13"/>
+          <p:cNvSpPr txBox="1"/>
+          <p:nvPr/>
+        </p:nvSpPr>
+        <p:spPr>
+          <a:xfrm>
+            <a:off x="6035040" y="3392975"/>
+            <a:ext cx="5943600" cy="411480"/>
+          </a:xfrm>
+          <a:prstGeom prst="rect">
+            <a:avLst/>
+          </a:prstGeom>
+          <a:noFill/>
+        </p:spPr>
+        <p:txBody>
+          <a:bodyPr wrap="square" lIns="45720" rIns="45720" tIns="22860" bIns="22860" anchor="ctr">
+            <a:spAutoFit/>
+          </a:bodyPr>
+          <a:lstStyle/>
+          <a:p>
+            <a:pPr algn="l"/>
+            <a:r>
+              <a:rPr sz="2000" b="1">
+                <a:solidFill>
+                  <a:srgbClr val="333333"/>
+                </a:solidFill>
+                <a:latin typeface="Yu Gothic"/>
+              </a:rPr>
+              <a:t>ユーザーID</a:t>
+            </a:r>
+          </a:p>
+        </p:txBody>
+      </p:sp>
+      <p:sp>
+        <p:nvSpPr>
+          <p:cNvPr id="15" name="TextBox 14"/>
+          <p:cNvSpPr txBox="1"/>
+          <p:nvPr/>
+        </p:nvSpPr>
+        <p:spPr>
+          <a:xfrm>
+            <a:off x="6035040" y="3777023"/>
+            <a:ext cx="5943600" cy="365760"/>
+          </a:xfrm>
+          <a:prstGeom prst="rect">
+            <a:avLst/>
+          </a:prstGeom>
+          <a:noFill/>
+        </p:spPr>
+        <p:txBody>
+          <a:bodyPr wrap="square" lIns="45720" rIns="45720" tIns="22860" bIns="22860" anchor="t">
+            <a:spAutoFit/>
+          </a:bodyPr>
+          <a:lstStyle/>
+          <a:p>
+            <a:pPr algn="l"/>
+            <a:r>
+              <a:rPr sz="1400" b="0">
+                <a:solidFill>
+                  <a:srgbClr val="666666"/>
+                </a:solidFill>
+                <a:latin typeface="Yu Gothic"/>
+              </a:rPr>
+              <a:t>ログインで使う</a:t>
+            </a:r>
+          </a:p>
+        </p:txBody>
+      </p:sp>
+      <p:sp>
+        <p:nvSpPr>
+          <p:cNvPr id="16" name="Rounded Rectangle 15"/>
+          <p:cNvSpPr/>
+          <p:nvPr/>
+        </p:nvSpPr>
+        <p:spPr>
+          <a:xfrm>
+            <a:off x="1300284" y="4453434"/>
+            <a:ext cx="1349923" cy="165081"/>
+          </a:xfrm>
+          <a:prstGeom prst="roundRect">
+            <a:avLst>
+              <a:gd name="adj" fmla="val 12000"/>
+            </a:avLst>
+          </a:prstGeom>
+          <a:noFill/>
+          <a:ln w="38100">
+            <a:solidFill>
+              <a:srgbClr val="D32F2F"/>
+            </a:solidFill>
+          </a:ln>
+          <a:effectLst/>
+        </p:spPr>
+        <p:style>
+          <a:lnRef idx="1">
+            <a:schemeClr val="accent1"/>
+          </a:lnRef>
+          <a:fillRef idx="3">
+            <a:schemeClr val="accent1"/>
+          </a:fillRef>
+          <a:effectRef idx="2">
+            <a:schemeClr val="accent1"/>
+          </a:effectRef>
+          <a:fontRef idx="minor">
+            <a:schemeClr val="lt1"/>
+          </a:fontRef>
+        </p:style>
+        <p:txBody>
+          <a:bodyPr rtlCol="0" anchor="ctr"/>
+          <a:lstStyle/>
+          <a:p>
+            <a:pPr algn="ctr"/>
+          </a:p>
+        </p:txBody>
+      </p:sp>
+      <p:cxnSp>
+        <p:nvCxnSpPr>
+          <p:cNvPr id="17" name="Connector 16"/>
+          <p:cNvCxnSpPr/>
+          <p:nvPr/>
+        </p:nvCxnSpPr>
+        <p:spPr>
+          <a:xfrm>
+            <a:off x="2650208" y="4535975"/>
+            <a:ext cx="2790472" cy="0"/>
+          </a:xfrm>
+          <a:prstGeom prst="line">
+            <a:avLst/>
+          </a:prstGeom>
+          <a:ln w="22225">
+            <a:solidFill>
+              <a:srgbClr val="D32F2F"/>
+            </a:solidFill>
+          </a:ln>
+        </p:spPr>
+        <p:style>
+          <a:lnRef idx="2">
+            <a:schemeClr val="accent1"/>
+          </a:lnRef>
+          <a:fillRef idx="0">
+            <a:schemeClr val="accent1"/>
+          </a:fillRef>
+          <a:effectRef idx="1">
+            <a:schemeClr val="accent1"/>
+          </a:effectRef>
+          <a:fontRef idx="minor">
+            <a:schemeClr val="tx1"/>
+          </a:fontRef>
+        </p:style>
+      </p:cxnSp>
+      <p:sp>
+        <p:nvSpPr>
+          <p:cNvPr id="18" name="Oval 17"/>
+          <p:cNvSpPr/>
+          <p:nvPr/>
+        </p:nvSpPr>
+        <p:spPr>
+          <a:xfrm>
+            <a:off x="5477256" y="4343951"/>
+            <a:ext cx="384048" cy="384048"/>
+          </a:xfrm>
+          <a:prstGeom prst="ellipse">
+            <a:avLst/>
+          </a:prstGeom>
+          <a:solidFill>
+            <a:srgbClr val="D32F2F"/>
+          </a:solidFill>
+          <a:ln w="19050">
+            <a:solidFill>
+              <a:srgbClr val="FFFFFF"/>
+            </a:solidFill>
+          </a:ln>
+          <a:effectLst/>
+        </p:spPr>
+        <p:style>
+          <a:lnRef idx="1">
+            <a:schemeClr val="accent1"/>
+          </a:lnRef>
+          <a:fillRef idx="3">
+            <a:schemeClr val="accent1"/>
+          </a:fillRef>
+          <a:effectRef idx="2">
+            <a:schemeClr val="accent1"/>
+          </a:effectRef>
+          <a:fontRef idx="minor">
+            <a:schemeClr val="lt1"/>
+          </a:fontRef>
+        </p:style>
+        <p:txBody>
+          <a:bodyPr rtlCol="0" anchor="ctr" lIns="0" rIns="0" tIns="0" bIns="0"/>
+          <a:lstStyle/>
+          <a:p>
+            <a:pPr algn="ctr"/>
+            <a:r>
+              <a:rPr sz="1400" b="1">
+                <a:solidFill>
+                  <a:srgbClr val="FFFFFF"/>
+                </a:solidFill>
+                <a:latin typeface="Yu Gothic"/>
+              </a:rPr>
+              <a:t>3</a:t>
+            </a:r>
+          </a:p>
+        </p:txBody>
+      </p:sp>
+      <p:sp>
+        <p:nvSpPr>
+          <p:cNvPr id="19" name="TextBox 18"/>
+          <p:cNvSpPr txBox="1"/>
+          <p:nvPr/>
+        </p:nvSpPr>
+        <p:spPr>
+          <a:xfrm>
+            <a:off x="6035040" y="4261655"/>
+            <a:ext cx="5943600" cy="411480"/>
+          </a:xfrm>
+          <a:prstGeom prst="rect">
+            <a:avLst/>
+          </a:prstGeom>
+          <a:noFill/>
+        </p:spPr>
+        <p:txBody>
+          <a:bodyPr wrap="square" lIns="45720" rIns="45720" tIns="22860" bIns="22860" anchor="ctr">
+            <a:spAutoFit/>
+          </a:bodyPr>
+          <a:lstStyle/>
+          <a:p>
+            <a:pPr algn="l"/>
+            <a:r>
+              <a:rPr sz="2000" b="1">
+                <a:solidFill>
+                  <a:srgbClr val="333333"/>
+                </a:solidFill>
+                <a:latin typeface="Yu Gothic"/>
+              </a:rPr>
+              <a:t>パスワード</a:t>
+            </a:r>
+          </a:p>
+        </p:txBody>
+      </p:sp>
+      <p:sp>
+        <p:nvSpPr>
+          <p:cNvPr id="20" name="TextBox 19"/>
+          <p:cNvSpPr txBox="1"/>
+          <p:nvPr/>
+        </p:nvSpPr>
+        <p:spPr>
+          <a:xfrm>
+            <a:off x="6035040" y="4645703"/>
+            <a:ext cx="5943600" cy="365760"/>
+          </a:xfrm>
+          <a:prstGeom prst="rect">
+            <a:avLst/>
+          </a:prstGeom>
+          <a:noFill/>
+        </p:spPr>
+        <p:txBody>
+          <a:bodyPr wrap="square" lIns="45720" rIns="45720" tIns="22860" bIns="22860" anchor="t">
+            <a:spAutoFit/>
+          </a:bodyPr>
+          <a:lstStyle/>
+          <a:p>
+            <a:pPr algn="l"/>
+            <a:r>
+              <a:rPr sz="1400" b="0">
+                <a:solidFill>
+                  <a:srgbClr val="666666"/>
+                </a:solidFill>
+                <a:latin typeface="Yu Gothic"/>
+              </a:rPr>
+              <a:t>ログインで使う</a:t>
+            </a:r>
+          </a:p>
+        </p:txBody>
+      </p:sp>
+    </p:spTree>
+  </p:cSld>
+  <p:clrMapOvr>
+    <a:masterClrMapping/>
+  </p:clrMapOvr>
+</p:sld>
+</file>
+
 <file path=ppt/slides/slide3.xml><?xml version="1.0" encoding="utf-8"?>
 <p:sld xmlns:a="http://schemas.openxmlformats.org/drawingml/2006/main" xmlns:p="http://schemas.openxmlformats.org/presentationml/2006/main" xmlns:r="http://schemas.openxmlformats.org/officeDocument/2006/relationships">
   <p:cSld>
@@ -19400,6 +22203,2143 @@
                 <a:latin typeface="Yu Gothic"/>
               </a:rPr>
               <a:t>マイナンバーカードやパスポートでも可</a:t>
+            </a:r>
+          </a:p>
+        </p:txBody>
+      </p:sp>
+    </p:spTree>
+  </p:cSld>
+  <p:clrMapOvr>
+    <a:masterClrMapping/>
+  </p:clrMapOvr>
+</p:sld>
+</file>
+
+<file path=ppt/slides/slide30.xml><?xml version="1.0" encoding="utf-8"?>
+<p:sld xmlns:a="http://schemas.openxmlformats.org/drawingml/2006/main" xmlns:p="http://schemas.openxmlformats.org/presentationml/2006/main" xmlns:r="http://schemas.openxmlformats.org/officeDocument/2006/relationships">
+  <p:cSld>
+    <p:spTree>
+      <p:nvGrpSpPr>
+        <p:cNvPr id="1" name=""/>
+        <p:cNvGrpSpPr/>
+        <p:nvPr/>
+      </p:nvGrpSpPr>
+      <p:grpSpPr/>
+      <p:sp>
+        <p:nvSpPr>
+          <p:cNvPr id="2" name="Rounded Rectangle 1"/>
+          <p:cNvSpPr/>
+          <p:nvPr/>
+        </p:nvSpPr>
+        <p:spPr>
+          <a:xfrm>
+            <a:off x="411480" y="777240"/>
+            <a:ext cx="502920" cy="384048"/>
+          </a:xfrm>
+          <a:prstGeom prst="roundRect">
+            <a:avLst>
+              <a:gd name="adj" fmla="val 8000"/>
+            </a:avLst>
+          </a:prstGeom>
+          <a:solidFill>
+            <a:srgbClr val="4FB6BE"/>
+          </a:solidFill>
+          <a:ln>
+            <a:noFill/>
+          </a:ln>
+          <a:effectLst/>
+        </p:spPr>
+        <p:style>
+          <a:lnRef idx="1">
+            <a:schemeClr val="accent1"/>
+          </a:lnRef>
+          <a:fillRef idx="3">
+            <a:schemeClr val="accent1"/>
+          </a:fillRef>
+          <a:effectRef idx="2">
+            <a:schemeClr val="accent1"/>
+          </a:effectRef>
+          <a:fontRef idx="minor">
+            <a:schemeClr val="lt1"/>
+          </a:fontRef>
+        </p:style>
+        <p:txBody>
+          <a:bodyPr rtlCol="0" anchor="ctr"/>
+          <a:lstStyle/>
+          <a:p>
+            <a:pPr algn="ctr"/>
+          </a:p>
+        </p:txBody>
+      </p:sp>
+      <p:sp>
+        <p:nvSpPr>
+          <p:cNvPr id="3" name="TextBox 2"/>
+          <p:cNvSpPr txBox="1"/>
+          <p:nvPr/>
+        </p:nvSpPr>
+        <p:spPr>
+          <a:xfrm>
+            <a:off x="411480" y="777240"/>
+            <a:ext cx="502920" cy="384048"/>
+          </a:xfrm>
+          <a:prstGeom prst="rect">
+            <a:avLst/>
+          </a:prstGeom>
+          <a:noFill/>
+        </p:spPr>
+        <p:txBody>
+          <a:bodyPr wrap="square" lIns="45720" rIns="45720" tIns="22860" bIns="22860" anchor="ctr">
+            <a:spAutoFit/>
+          </a:bodyPr>
+          <a:lstStyle/>
+          <a:p>
+            <a:pPr algn="ctr"/>
+            <a:r>
+              <a:rPr sz="1200" b="1">
+                <a:solidFill>
+                  <a:srgbClr val="FFFFFF"/>
+                </a:solidFill>
+                <a:latin typeface="Yu Gothic"/>
+              </a:rPr>
+              <a:t>④-4</a:t>
+            </a:r>
+          </a:p>
+        </p:txBody>
+      </p:sp>
+      <p:sp>
+        <p:nvSpPr>
+          <p:cNvPr id="4" name="TextBox 3"/>
+          <p:cNvSpPr txBox="1"/>
+          <p:nvPr/>
+        </p:nvSpPr>
+        <p:spPr>
+          <a:xfrm>
+            <a:off x="1078992" y="777240"/>
+            <a:ext cx="10607040" cy="384048"/>
+          </a:xfrm>
+          <a:prstGeom prst="rect">
+            <a:avLst/>
+          </a:prstGeom>
+          <a:noFill/>
+        </p:spPr>
+        <p:txBody>
+          <a:bodyPr wrap="square" lIns="45720" rIns="45720" tIns="22860" bIns="22860" anchor="ctr">
+            <a:spAutoFit/>
+          </a:bodyPr>
+          <a:lstStyle/>
+          <a:p>
+            <a:pPr algn="l"/>
+            <a:r>
+              <a:rPr sz="2000" b="1">
+                <a:solidFill>
+                  <a:srgbClr val="333333"/>
+                </a:solidFill>
+                <a:latin typeface="Yu Gothic"/>
+              </a:rPr>
+              <a:t>アプリでログインする</a:t>
+            </a:r>
+          </a:p>
+        </p:txBody>
+      </p:sp>
+      <p:pic>
+        <p:nvPicPr>
+          <p:cNvPr id="5" name="Picture 4" descr="d15.jpg"/>
+          <p:cNvPicPr>
+            <a:picLocks noChangeAspect="1"/>
+          </p:cNvPicPr>
+          <p:nvPr/>
+        </p:nvPicPr>
+        <p:blipFill>
+          <a:blip r:embed="rId2"/>
+          <a:stretch>
+            <a:fillRect/>
+          </a:stretch>
+        </p:blipFill>
+        <p:spPr>
+          <a:xfrm>
+            <a:off x="914400" y="1325880"/>
+            <a:ext cx="2281509" cy="4937760"/>
+          </a:xfrm>
+          <a:prstGeom prst="rect">
+            <a:avLst/>
+          </a:prstGeom>
+          <a:ln w="12700">
+            <a:solidFill>
+              <a:srgbClr val="BBBBBB"/>
+            </a:solidFill>
+          </a:ln>
+        </p:spPr>
+      </p:pic>
+      <p:sp>
+        <p:nvSpPr>
+          <p:cNvPr id="6" name="Rounded Rectangle 5"/>
+          <p:cNvSpPr/>
+          <p:nvPr/>
+        </p:nvSpPr>
+        <p:spPr>
+          <a:xfrm>
+            <a:off x="1085360" y="4701424"/>
+            <a:ext cx="1939589" cy="316631"/>
+          </a:xfrm>
+          <a:prstGeom prst="roundRect">
+            <a:avLst>
+              <a:gd name="adj" fmla="val 12000"/>
+            </a:avLst>
+          </a:prstGeom>
+          <a:noFill/>
+          <a:ln w="38100">
+            <a:solidFill>
+              <a:srgbClr val="D32F2F"/>
+            </a:solidFill>
+          </a:ln>
+          <a:effectLst/>
+        </p:spPr>
+        <p:style>
+          <a:lnRef idx="1">
+            <a:schemeClr val="accent1"/>
+          </a:lnRef>
+          <a:fillRef idx="3">
+            <a:schemeClr val="accent1"/>
+          </a:fillRef>
+          <a:effectRef idx="2">
+            <a:schemeClr val="accent1"/>
+          </a:effectRef>
+          <a:fontRef idx="minor">
+            <a:schemeClr val="lt1"/>
+          </a:fontRef>
+        </p:style>
+        <p:txBody>
+          <a:bodyPr rtlCol="0" anchor="ctr"/>
+          <a:lstStyle/>
+          <a:p>
+            <a:pPr algn="ctr"/>
+          </a:p>
+        </p:txBody>
+      </p:sp>
+      <p:cxnSp>
+        <p:nvCxnSpPr>
+          <p:cNvPr id="7" name="Connector 6"/>
+          <p:cNvCxnSpPr/>
+          <p:nvPr/>
+        </p:nvCxnSpPr>
+        <p:spPr>
+          <a:xfrm flipV="1">
+            <a:off x="3024949" y="3977946"/>
+            <a:ext cx="2415731" cy="881794"/>
+          </a:xfrm>
+          <a:prstGeom prst="line">
+            <a:avLst/>
+          </a:prstGeom>
+          <a:ln w="22225">
+            <a:solidFill>
+              <a:srgbClr val="D32F2F"/>
+            </a:solidFill>
+          </a:ln>
+        </p:spPr>
+        <p:style>
+          <a:lnRef idx="2">
+            <a:schemeClr val="accent1"/>
+          </a:lnRef>
+          <a:fillRef idx="0">
+            <a:schemeClr val="accent1"/>
+          </a:fillRef>
+          <a:effectRef idx="1">
+            <a:schemeClr val="accent1"/>
+          </a:effectRef>
+          <a:fontRef idx="minor">
+            <a:schemeClr val="tx1"/>
+          </a:fontRef>
+        </p:style>
+      </p:cxnSp>
+      <p:sp>
+        <p:nvSpPr>
+          <p:cNvPr id="8" name="Oval 7"/>
+          <p:cNvSpPr/>
+          <p:nvPr/>
+        </p:nvSpPr>
+        <p:spPr>
+          <a:xfrm>
+            <a:off x="5477256" y="3785922"/>
+            <a:ext cx="384048" cy="384048"/>
+          </a:xfrm>
+          <a:prstGeom prst="ellipse">
+            <a:avLst/>
+          </a:prstGeom>
+          <a:solidFill>
+            <a:srgbClr val="D32F2F"/>
+          </a:solidFill>
+          <a:ln w="19050">
+            <a:solidFill>
+              <a:srgbClr val="FFFFFF"/>
+            </a:solidFill>
+          </a:ln>
+          <a:effectLst/>
+        </p:spPr>
+        <p:style>
+          <a:lnRef idx="1">
+            <a:schemeClr val="accent1"/>
+          </a:lnRef>
+          <a:fillRef idx="3">
+            <a:schemeClr val="accent1"/>
+          </a:fillRef>
+          <a:effectRef idx="2">
+            <a:schemeClr val="accent1"/>
+          </a:effectRef>
+          <a:fontRef idx="minor">
+            <a:schemeClr val="lt1"/>
+          </a:fontRef>
+        </p:style>
+        <p:txBody>
+          <a:bodyPr rtlCol="0" anchor="ctr" lIns="0" rIns="0" tIns="0" bIns="0"/>
+          <a:lstStyle/>
+          <a:p>
+            <a:pPr algn="ctr"/>
+            <a:r>
+              <a:rPr sz="1400" b="1">
+                <a:solidFill>
+                  <a:srgbClr val="FFFFFF"/>
+                </a:solidFill>
+                <a:latin typeface="Yu Gothic"/>
+              </a:rPr>
+              <a:t>1</a:t>
+            </a:r>
+          </a:p>
+        </p:txBody>
+      </p:sp>
+      <p:sp>
+        <p:nvSpPr>
+          <p:cNvPr id="9" name="TextBox 8"/>
+          <p:cNvSpPr txBox="1"/>
+          <p:nvPr/>
+        </p:nvSpPr>
+        <p:spPr>
+          <a:xfrm>
+            <a:off x="6035040" y="3703626"/>
+            <a:ext cx="5943600" cy="411480"/>
+          </a:xfrm>
+          <a:prstGeom prst="rect">
+            <a:avLst/>
+          </a:prstGeom>
+          <a:noFill/>
+        </p:spPr>
+        <p:txBody>
+          <a:bodyPr wrap="square" lIns="45720" rIns="45720" tIns="22860" bIns="22860" anchor="ctr">
+            <a:spAutoFit/>
+          </a:bodyPr>
+          <a:lstStyle/>
+          <a:p>
+            <a:pPr algn="l"/>
+            <a:r>
+              <a:rPr sz="2000" b="1">
+                <a:solidFill>
+                  <a:srgbClr val="333333"/>
+                </a:solidFill>
+                <a:latin typeface="Yu Gothic"/>
+              </a:rPr>
+              <a:t>ユーザーID</a:t>
+            </a:r>
+          </a:p>
+        </p:txBody>
+      </p:sp>
+      <p:sp>
+        <p:nvSpPr>
+          <p:cNvPr id="10" name="TextBox 9"/>
+          <p:cNvSpPr txBox="1"/>
+          <p:nvPr/>
+        </p:nvSpPr>
+        <p:spPr>
+          <a:xfrm>
+            <a:off x="6035040" y="4087674"/>
+            <a:ext cx="5943600" cy="365760"/>
+          </a:xfrm>
+          <a:prstGeom prst="rect">
+            <a:avLst/>
+          </a:prstGeom>
+          <a:noFill/>
+        </p:spPr>
+        <p:txBody>
+          <a:bodyPr wrap="square" lIns="45720" rIns="45720" tIns="22860" bIns="22860" anchor="t">
+            <a:spAutoFit/>
+          </a:bodyPr>
+          <a:lstStyle/>
+          <a:p>
+            <a:pPr algn="l"/>
+            <a:r>
+              <a:rPr sz="1400" b="0">
+                <a:solidFill>
+                  <a:srgbClr val="666666"/>
+                </a:solidFill>
+                <a:latin typeface="Yu Gothic"/>
+              </a:rPr>
+              <a:t>メールに書いてあるID</a:t>
+            </a:r>
+          </a:p>
+        </p:txBody>
+      </p:sp>
+      <p:sp>
+        <p:nvSpPr>
+          <p:cNvPr id="11" name="Rounded Rectangle 10"/>
+          <p:cNvSpPr/>
+          <p:nvPr/>
+        </p:nvSpPr>
+        <p:spPr>
+          <a:xfrm>
+            <a:off x="1085360" y="5161583"/>
+            <a:ext cx="1939589" cy="316631"/>
+          </a:xfrm>
+          <a:prstGeom prst="roundRect">
+            <a:avLst>
+              <a:gd name="adj" fmla="val 12000"/>
+            </a:avLst>
+          </a:prstGeom>
+          <a:noFill/>
+          <a:ln w="38100">
+            <a:solidFill>
+              <a:srgbClr val="D32F2F"/>
+            </a:solidFill>
+          </a:ln>
+          <a:effectLst/>
+        </p:spPr>
+        <p:style>
+          <a:lnRef idx="1">
+            <a:schemeClr val="accent1"/>
+          </a:lnRef>
+          <a:fillRef idx="3">
+            <a:schemeClr val="accent1"/>
+          </a:fillRef>
+          <a:effectRef idx="2">
+            <a:schemeClr val="accent1"/>
+          </a:effectRef>
+          <a:fontRef idx="minor">
+            <a:schemeClr val="lt1"/>
+          </a:fontRef>
+        </p:style>
+        <p:txBody>
+          <a:bodyPr rtlCol="0" anchor="ctr"/>
+          <a:lstStyle/>
+          <a:p>
+            <a:pPr algn="ctr"/>
+          </a:p>
+        </p:txBody>
+      </p:sp>
+      <p:cxnSp>
+        <p:nvCxnSpPr>
+          <p:cNvPr id="12" name="Connector 11"/>
+          <p:cNvCxnSpPr/>
+          <p:nvPr/>
+        </p:nvCxnSpPr>
+        <p:spPr>
+          <a:xfrm flipV="1">
+            <a:off x="3024949" y="4846626"/>
+            <a:ext cx="2415731" cy="473273"/>
+          </a:xfrm>
+          <a:prstGeom prst="line">
+            <a:avLst/>
+          </a:prstGeom>
+          <a:ln w="22225">
+            <a:solidFill>
+              <a:srgbClr val="D32F2F"/>
+            </a:solidFill>
+          </a:ln>
+        </p:spPr>
+        <p:style>
+          <a:lnRef idx="2">
+            <a:schemeClr val="accent1"/>
+          </a:lnRef>
+          <a:fillRef idx="0">
+            <a:schemeClr val="accent1"/>
+          </a:fillRef>
+          <a:effectRef idx="1">
+            <a:schemeClr val="accent1"/>
+          </a:effectRef>
+          <a:fontRef idx="minor">
+            <a:schemeClr val="tx1"/>
+          </a:fontRef>
+        </p:style>
+      </p:cxnSp>
+      <p:sp>
+        <p:nvSpPr>
+          <p:cNvPr id="13" name="Oval 12"/>
+          <p:cNvSpPr/>
+          <p:nvPr/>
+        </p:nvSpPr>
+        <p:spPr>
+          <a:xfrm>
+            <a:off x="5477256" y="4654602"/>
+            <a:ext cx="384048" cy="384048"/>
+          </a:xfrm>
+          <a:prstGeom prst="ellipse">
+            <a:avLst/>
+          </a:prstGeom>
+          <a:solidFill>
+            <a:srgbClr val="D32F2F"/>
+          </a:solidFill>
+          <a:ln w="19050">
+            <a:solidFill>
+              <a:srgbClr val="FFFFFF"/>
+            </a:solidFill>
+          </a:ln>
+          <a:effectLst/>
+        </p:spPr>
+        <p:style>
+          <a:lnRef idx="1">
+            <a:schemeClr val="accent1"/>
+          </a:lnRef>
+          <a:fillRef idx="3">
+            <a:schemeClr val="accent1"/>
+          </a:fillRef>
+          <a:effectRef idx="2">
+            <a:schemeClr val="accent1"/>
+          </a:effectRef>
+          <a:fontRef idx="minor">
+            <a:schemeClr val="lt1"/>
+          </a:fontRef>
+        </p:style>
+        <p:txBody>
+          <a:bodyPr rtlCol="0" anchor="ctr" lIns="0" rIns="0" tIns="0" bIns="0"/>
+          <a:lstStyle/>
+          <a:p>
+            <a:pPr algn="ctr"/>
+            <a:r>
+              <a:rPr sz="1400" b="1">
+                <a:solidFill>
+                  <a:srgbClr val="FFFFFF"/>
+                </a:solidFill>
+                <a:latin typeface="Yu Gothic"/>
+              </a:rPr>
+              <a:t>2</a:t>
+            </a:r>
+          </a:p>
+        </p:txBody>
+      </p:sp>
+      <p:sp>
+        <p:nvSpPr>
+          <p:cNvPr id="14" name="TextBox 13"/>
+          <p:cNvSpPr txBox="1"/>
+          <p:nvPr/>
+        </p:nvSpPr>
+        <p:spPr>
+          <a:xfrm>
+            <a:off x="6035040" y="4572306"/>
+            <a:ext cx="5943600" cy="411480"/>
+          </a:xfrm>
+          <a:prstGeom prst="rect">
+            <a:avLst/>
+          </a:prstGeom>
+          <a:noFill/>
+        </p:spPr>
+        <p:txBody>
+          <a:bodyPr wrap="square" lIns="45720" rIns="45720" tIns="22860" bIns="22860" anchor="ctr">
+            <a:spAutoFit/>
+          </a:bodyPr>
+          <a:lstStyle/>
+          <a:p>
+            <a:pPr algn="l"/>
+            <a:r>
+              <a:rPr sz="2000" b="1">
+                <a:solidFill>
+                  <a:srgbClr val="333333"/>
+                </a:solidFill>
+                <a:latin typeface="Yu Gothic"/>
+              </a:rPr>
+              <a:t>パスワード</a:t>
+            </a:r>
+          </a:p>
+        </p:txBody>
+      </p:sp>
+      <p:sp>
+        <p:nvSpPr>
+          <p:cNvPr id="15" name="TextBox 14"/>
+          <p:cNvSpPr txBox="1"/>
+          <p:nvPr/>
+        </p:nvSpPr>
+        <p:spPr>
+          <a:xfrm>
+            <a:off x="6035040" y="4956354"/>
+            <a:ext cx="5943600" cy="365760"/>
+          </a:xfrm>
+          <a:prstGeom prst="rect">
+            <a:avLst/>
+          </a:prstGeom>
+          <a:noFill/>
+        </p:spPr>
+        <p:txBody>
+          <a:bodyPr wrap="square" lIns="45720" rIns="45720" tIns="22860" bIns="22860" anchor="t">
+            <a:spAutoFit/>
+          </a:bodyPr>
+          <a:lstStyle/>
+          <a:p>
+            <a:pPr algn="l"/>
+            <a:r>
+              <a:rPr sz="1400" b="0">
+                <a:solidFill>
+                  <a:srgbClr val="666666"/>
+                </a:solidFill>
+                <a:latin typeface="Yu Gothic"/>
+              </a:rPr>
+              <a:t>メールに書いてあるパスワード</a:t>
+            </a:r>
+          </a:p>
+        </p:txBody>
+      </p:sp>
+      <p:sp>
+        <p:nvSpPr>
+          <p:cNvPr id="16" name="Rounded Rectangle 15"/>
+          <p:cNvSpPr/>
+          <p:nvPr/>
+        </p:nvSpPr>
+        <p:spPr>
+          <a:xfrm>
+            <a:off x="1112914" y="5550101"/>
+            <a:ext cx="1881724" cy="330408"/>
+          </a:xfrm>
+          <a:prstGeom prst="roundRect">
+            <a:avLst>
+              <a:gd name="adj" fmla="val 12000"/>
+            </a:avLst>
+          </a:prstGeom>
+          <a:noFill/>
+          <a:ln w="38100">
+            <a:solidFill>
+              <a:srgbClr val="D32F2F"/>
+            </a:solidFill>
+          </a:ln>
+          <a:effectLst/>
+        </p:spPr>
+        <p:style>
+          <a:lnRef idx="1">
+            <a:schemeClr val="accent1"/>
+          </a:lnRef>
+          <a:fillRef idx="3">
+            <a:schemeClr val="accent1"/>
+          </a:fillRef>
+          <a:effectRef idx="2">
+            <a:schemeClr val="accent1"/>
+          </a:effectRef>
+          <a:fontRef idx="minor">
+            <a:schemeClr val="lt1"/>
+          </a:fontRef>
+        </p:style>
+        <p:txBody>
+          <a:bodyPr rtlCol="0" anchor="ctr"/>
+          <a:lstStyle/>
+          <a:p>
+            <a:pPr algn="ctr"/>
+          </a:p>
+        </p:txBody>
+      </p:sp>
+      <p:cxnSp>
+        <p:nvCxnSpPr>
+          <p:cNvPr id="17" name="Connector 16"/>
+          <p:cNvCxnSpPr/>
+          <p:nvPr/>
+        </p:nvCxnSpPr>
+        <p:spPr>
+          <a:xfrm>
+            <a:off x="2994639" y="5715306"/>
+            <a:ext cx="2446041" cy="0"/>
+          </a:xfrm>
+          <a:prstGeom prst="line">
+            <a:avLst/>
+          </a:prstGeom>
+          <a:ln w="22225">
+            <a:solidFill>
+              <a:srgbClr val="D32F2F"/>
+            </a:solidFill>
+          </a:ln>
+        </p:spPr>
+        <p:style>
+          <a:lnRef idx="2">
+            <a:schemeClr val="accent1"/>
+          </a:lnRef>
+          <a:fillRef idx="0">
+            <a:schemeClr val="accent1"/>
+          </a:fillRef>
+          <a:effectRef idx="1">
+            <a:schemeClr val="accent1"/>
+          </a:effectRef>
+          <a:fontRef idx="minor">
+            <a:schemeClr val="tx1"/>
+          </a:fontRef>
+        </p:style>
+      </p:cxnSp>
+      <p:sp>
+        <p:nvSpPr>
+          <p:cNvPr id="18" name="Oval 17"/>
+          <p:cNvSpPr/>
+          <p:nvPr/>
+        </p:nvSpPr>
+        <p:spPr>
+          <a:xfrm>
+            <a:off x="5477256" y="5523282"/>
+            <a:ext cx="384048" cy="384048"/>
+          </a:xfrm>
+          <a:prstGeom prst="ellipse">
+            <a:avLst/>
+          </a:prstGeom>
+          <a:solidFill>
+            <a:srgbClr val="D32F2F"/>
+          </a:solidFill>
+          <a:ln w="19050">
+            <a:solidFill>
+              <a:srgbClr val="FFFFFF"/>
+            </a:solidFill>
+          </a:ln>
+          <a:effectLst/>
+        </p:spPr>
+        <p:style>
+          <a:lnRef idx="1">
+            <a:schemeClr val="accent1"/>
+          </a:lnRef>
+          <a:fillRef idx="3">
+            <a:schemeClr val="accent1"/>
+          </a:fillRef>
+          <a:effectRef idx="2">
+            <a:schemeClr val="accent1"/>
+          </a:effectRef>
+          <a:fontRef idx="minor">
+            <a:schemeClr val="lt1"/>
+          </a:fontRef>
+        </p:style>
+        <p:txBody>
+          <a:bodyPr rtlCol="0" anchor="ctr" lIns="0" rIns="0" tIns="0" bIns="0"/>
+          <a:lstStyle/>
+          <a:p>
+            <a:pPr algn="ctr"/>
+            <a:r>
+              <a:rPr sz="1400" b="1">
+                <a:solidFill>
+                  <a:srgbClr val="FFFFFF"/>
+                </a:solidFill>
+                <a:latin typeface="Yu Gothic"/>
+              </a:rPr>
+              <a:t>3</a:t>
+            </a:r>
+          </a:p>
+        </p:txBody>
+      </p:sp>
+      <p:sp>
+        <p:nvSpPr>
+          <p:cNvPr id="19" name="TextBox 18"/>
+          <p:cNvSpPr txBox="1"/>
+          <p:nvPr/>
+        </p:nvSpPr>
+        <p:spPr>
+          <a:xfrm>
+            <a:off x="6035040" y="5440986"/>
+            <a:ext cx="5943600" cy="411480"/>
+          </a:xfrm>
+          <a:prstGeom prst="rect">
+            <a:avLst/>
+          </a:prstGeom>
+          <a:noFill/>
+        </p:spPr>
+        <p:txBody>
+          <a:bodyPr wrap="square" lIns="45720" rIns="45720" tIns="22860" bIns="22860" anchor="ctr">
+            <a:spAutoFit/>
+          </a:bodyPr>
+          <a:lstStyle/>
+          <a:p>
+            <a:pPr algn="l"/>
+            <a:r>
+              <a:rPr sz="2000" b="1">
+                <a:solidFill>
+                  <a:srgbClr val="333333"/>
+                </a:solidFill>
+                <a:latin typeface="Yu Gothic"/>
+              </a:rPr>
+              <a:t>「サインイン」</a:t>
+            </a:r>
+          </a:p>
+        </p:txBody>
+      </p:sp>
+      <p:sp>
+        <p:nvSpPr>
+          <p:cNvPr id="20" name="TextBox 19"/>
+          <p:cNvSpPr txBox="1"/>
+          <p:nvPr/>
+        </p:nvSpPr>
+        <p:spPr>
+          <a:xfrm>
+            <a:off x="6035040" y="5825034"/>
+            <a:ext cx="5943600" cy="365760"/>
+          </a:xfrm>
+          <a:prstGeom prst="rect">
+            <a:avLst/>
+          </a:prstGeom>
+          <a:noFill/>
+        </p:spPr>
+        <p:txBody>
+          <a:bodyPr wrap="square" lIns="45720" rIns="45720" tIns="22860" bIns="22860" anchor="t">
+            <a:spAutoFit/>
+          </a:bodyPr>
+          <a:lstStyle/>
+          <a:p>
+            <a:pPr algn="l"/>
+            <a:r>
+              <a:rPr sz="1400" b="0">
+                <a:solidFill>
+                  <a:srgbClr val="666666"/>
+                </a:solidFill>
+                <a:latin typeface="Yu Gothic"/>
+              </a:rPr>
+              <a:t>をタップ</a:t>
+            </a:r>
+          </a:p>
+        </p:txBody>
+      </p:sp>
+    </p:spTree>
+  </p:cSld>
+  <p:clrMapOvr>
+    <a:masterClrMapping/>
+  </p:clrMapOvr>
+</p:sld>
+</file>
+
+<file path=ppt/slides/slide31.xml><?xml version="1.0" encoding="utf-8"?>
+<p:sld xmlns:a="http://schemas.openxmlformats.org/drawingml/2006/main" xmlns:p="http://schemas.openxmlformats.org/presentationml/2006/main" xmlns:r="http://schemas.openxmlformats.org/officeDocument/2006/relationships">
+  <p:cSld>
+    <p:spTree>
+      <p:nvGrpSpPr>
+        <p:cNvPr id="1" name=""/>
+        <p:cNvGrpSpPr/>
+        <p:nvPr/>
+      </p:nvGrpSpPr>
+      <p:grpSpPr/>
+      <p:sp>
+        <p:nvSpPr>
+          <p:cNvPr id="2" name="Rounded Rectangle 1"/>
+          <p:cNvSpPr/>
+          <p:nvPr/>
+        </p:nvSpPr>
+        <p:spPr>
+          <a:xfrm>
+            <a:off x="411480" y="777240"/>
+            <a:ext cx="502920" cy="384048"/>
+          </a:xfrm>
+          <a:prstGeom prst="roundRect">
+            <a:avLst>
+              <a:gd name="adj" fmla="val 8000"/>
+            </a:avLst>
+          </a:prstGeom>
+          <a:solidFill>
+            <a:srgbClr val="4FB6BE"/>
+          </a:solidFill>
+          <a:ln>
+            <a:noFill/>
+          </a:ln>
+          <a:effectLst/>
+        </p:spPr>
+        <p:style>
+          <a:lnRef idx="1">
+            <a:schemeClr val="accent1"/>
+          </a:lnRef>
+          <a:fillRef idx="3">
+            <a:schemeClr val="accent1"/>
+          </a:fillRef>
+          <a:effectRef idx="2">
+            <a:schemeClr val="accent1"/>
+          </a:effectRef>
+          <a:fontRef idx="minor">
+            <a:schemeClr val="lt1"/>
+          </a:fontRef>
+        </p:style>
+        <p:txBody>
+          <a:bodyPr rtlCol="0" anchor="ctr"/>
+          <a:lstStyle/>
+          <a:p>
+            <a:pPr algn="ctr"/>
+          </a:p>
+        </p:txBody>
+      </p:sp>
+      <p:sp>
+        <p:nvSpPr>
+          <p:cNvPr id="3" name="TextBox 2"/>
+          <p:cNvSpPr txBox="1"/>
+          <p:nvPr/>
+        </p:nvSpPr>
+        <p:spPr>
+          <a:xfrm>
+            <a:off x="411480" y="777240"/>
+            <a:ext cx="502920" cy="384048"/>
+          </a:xfrm>
+          <a:prstGeom prst="rect">
+            <a:avLst/>
+          </a:prstGeom>
+          <a:noFill/>
+        </p:spPr>
+        <p:txBody>
+          <a:bodyPr wrap="square" lIns="45720" rIns="45720" tIns="22860" bIns="22860" anchor="ctr">
+            <a:spAutoFit/>
+          </a:bodyPr>
+          <a:lstStyle/>
+          <a:p>
+            <a:pPr algn="ctr"/>
+            <a:r>
+              <a:rPr sz="1200" b="1">
+                <a:solidFill>
+                  <a:srgbClr val="FFFFFF"/>
+                </a:solidFill>
+                <a:latin typeface="Yu Gothic"/>
+              </a:rPr>
+              <a:t>④-5</a:t>
+            </a:r>
+          </a:p>
+        </p:txBody>
+      </p:sp>
+      <p:sp>
+        <p:nvSpPr>
+          <p:cNvPr id="4" name="TextBox 3"/>
+          <p:cNvSpPr txBox="1"/>
+          <p:nvPr/>
+        </p:nvSpPr>
+        <p:spPr>
+          <a:xfrm>
+            <a:off x="1078992" y="777240"/>
+            <a:ext cx="10607040" cy="384048"/>
+          </a:xfrm>
+          <a:prstGeom prst="rect">
+            <a:avLst/>
+          </a:prstGeom>
+          <a:noFill/>
+        </p:spPr>
+        <p:txBody>
+          <a:bodyPr wrap="square" lIns="45720" rIns="45720" tIns="22860" bIns="22860" anchor="ctr">
+            <a:spAutoFit/>
+          </a:bodyPr>
+          <a:lstStyle/>
+          <a:p>
+            <a:pPr algn="l"/>
+            <a:r>
+              <a:rPr sz="2000" b="1">
+                <a:solidFill>
+                  <a:srgbClr val="333333"/>
+                </a:solidFill>
+                <a:latin typeface="Yu Gothic"/>
+              </a:rPr>
+              <a:t>「オンボーディングガイダンス」をタップ</a:t>
+            </a:r>
+          </a:p>
+        </p:txBody>
+      </p:sp>
+      <p:pic>
+        <p:nvPicPr>
+          <p:cNvPr id="5" name="Picture 4" descr="d14.jpg"/>
+          <p:cNvPicPr>
+            <a:picLocks noChangeAspect="1"/>
+          </p:cNvPicPr>
+          <p:nvPr/>
+        </p:nvPicPr>
+        <p:blipFill>
+          <a:blip r:embed="rId2"/>
+          <a:stretch>
+            <a:fillRect/>
+          </a:stretch>
+        </p:blipFill>
+        <p:spPr>
+          <a:xfrm>
+            <a:off x="914400" y="1325880"/>
+            <a:ext cx="2281509" cy="4937760"/>
+          </a:xfrm>
+          <a:prstGeom prst="rect">
+            <a:avLst/>
+          </a:prstGeom>
+          <a:ln w="12700">
+            <a:solidFill>
+              <a:srgbClr val="BBBBBB"/>
+            </a:solidFill>
+          </a:ln>
+        </p:spPr>
+      </p:pic>
+      <p:sp>
+        <p:nvSpPr>
+          <p:cNvPr id="6" name="Rounded Rectangle 5"/>
+          <p:cNvSpPr/>
+          <p:nvPr/>
+        </p:nvSpPr>
+        <p:spPr>
+          <a:xfrm>
+            <a:off x="955854" y="4571918"/>
+            <a:ext cx="1192863" cy="1548315"/>
+          </a:xfrm>
+          <a:prstGeom prst="roundRect">
+            <a:avLst>
+              <a:gd name="adj" fmla="val 12000"/>
+            </a:avLst>
+          </a:prstGeom>
+          <a:noFill/>
+          <a:ln w="38100">
+            <a:solidFill>
+              <a:srgbClr val="D32F2F"/>
+            </a:solidFill>
+          </a:ln>
+          <a:effectLst/>
+        </p:spPr>
+        <p:style>
+          <a:lnRef idx="1">
+            <a:schemeClr val="accent1"/>
+          </a:lnRef>
+          <a:fillRef idx="3">
+            <a:schemeClr val="accent1"/>
+          </a:fillRef>
+          <a:effectRef idx="2">
+            <a:schemeClr val="accent1"/>
+          </a:effectRef>
+          <a:fontRef idx="minor">
+            <a:schemeClr val="lt1"/>
+          </a:fontRef>
+        </p:style>
+        <p:txBody>
+          <a:bodyPr rtlCol="0" anchor="ctr"/>
+          <a:lstStyle/>
+          <a:p>
+            <a:pPr algn="ctr"/>
+          </a:p>
+        </p:txBody>
+      </p:sp>
+      <p:cxnSp>
+        <p:nvCxnSpPr>
+          <p:cNvPr id="7" name="Connector 6"/>
+          <p:cNvCxnSpPr/>
+          <p:nvPr/>
+        </p:nvCxnSpPr>
+        <p:spPr>
+          <a:xfrm>
+            <a:off x="2148717" y="5346076"/>
+            <a:ext cx="3291963" cy="0"/>
+          </a:xfrm>
+          <a:prstGeom prst="line">
+            <a:avLst/>
+          </a:prstGeom>
+          <a:ln w="22225">
+            <a:solidFill>
+              <a:srgbClr val="D32F2F"/>
+            </a:solidFill>
+          </a:ln>
+        </p:spPr>
+        <p:style>
+          <a:lnRef idx="2">
+            <a:schemeClr val="accent1"/>
+          </a:lnRef>
+          <a:fillRef idx="0">
+            <a:schemeClr val="accent1"/>
+          </a:fillRef>
+          <a:effectRef idx="1">
+            <a:schemeClr val="accent1"/>
+          </a:effectRef>
+          <a:fontRef idx="minor">
+            <a:schemeClr val="tx1"/>
+          </a:fontRef>
+        </p:style>
+      </p:cxnSp>
+      <p:sp>
+        <p:nvSpPr>
+          <p:cNvPr id="8" name="Oval 7"/>
+          <p:cNvSpPr/>
+          <p:nvPr/>
+        </p:nvSpPr>
+        <p:spPr>
+          <a:xfrm>
+            <a:off x="5477256" y="5154052"/>
+            <a:ext cx="384048" cy="384048"/>
+          </a:xfrm>
+          <a:prstGeom prst="ellipse">
+            <a:avLst/>
+          </a:prstGeom>
+          <a:solidFill>
+            <a:srgbClr val="D32F2F"/>
+          </a:solidFill>
+          <a:ln w="19050">
+            <a:solidFill>
+              <a:srgbClr val="FFFFFF"/>
+            </a:solidFill>
+          </a:ln>
+          <a:effectLst/>
+        </p:spPr>
+        <p:style>
+          <a:lnRef idx="1">
+            <a:schemeClr val="accent1"/>
+          </a:lnRef>
+          <a:fillRef idx="3">
+            <a:schemeClr val="accent1"/>
+          </a:fillRef>
+          <a:effectRef idx="2">
+            <a:schemeClr val="accent1"/>
+          </a:effectRef>
+          <a:fontRef idx="minor">
+            <a:schemeClr val="lt1"/>
+          </a:fontRef>
+        </p:style>
+        <p:txBody>
+          <a:bodyPr rtlCol="0" anchor="ctr" lIns="0" rIns="0" tIns="0" bIns="0"/>
+          <a:lstStyle/>
+          <a:p>
+            <a:pPr algn="ctr"/>
+            <a:r>
+              <a:rPr sz="1400" b="1">
+                <a:solidFill>
+                  <a:srgbClr val="FFFFFF"/>
+                </a:solidFill>
+                <a:latin typeface="Yu Gothic"/>
+              </a:rPr>
+              <a:t>1</a:t>
+            </a:r>
+          </a:p>
+        </p:txBody>
+      </p:sp>
+      <p:sp>
+        <p:nvSpPr>
+          <p:cNvPr id="9" name="TextBox 8"/>
+          <p:cNvSpPr txBox="1"/>
+          <p:nvPr/>
+        </p:nvSpPr>
+        <p:spPr>
+          <a:xfrm>
+            <a:off x="6035040" y="5071756"/>
+            <a:ext cx="5943600" cy="411480"/>
+          </a:xfrm>
+          <a:prstGeom prst="rect">
+            <a:avLst/>
+          </a:prstGeom>
+          <a:noFill/>
+        </p:spPr>
+        <p:txBody>
+          <a:bodyPr wrap="square" lIns="45720" rIns="45720" tIns="22860" bIns="22860" anchor="ctr">
+            <a:spAutoFit/>
+          </a:bodyPr>
+          <a:lstStyle/>
+          <a:p>
+            <a:pPr algn="l"/>
+            <a:r>
+              <a:rPr sz="2000" b="1">
+                <a:solidFill>
+                  <a:srgbClr val="333333"/>
+                </a:solidFill>
+                <a:latin typeface="Yu Gothic"/>
+              </a:rPr>
+              <a:t>オンボーディングガイダンス</a:t>
+            </a:r>
+          </a:p>
+        </p:txBody>
+      </p:sp>
+      <p:sp>
+        <p:nvSpPr>
+          <p:cNvPr id="10" name="TextBox 9"/>
+          <p:cNvSpPr txBox="1"/>
+          <p:nvPr/>
+        </p:nvSpPr>
+        <p:spPr>
+          <a:xfrm>
+            <a:off x="6035040" y="5455804"/>
+            <a:ext cx="5943600" cy="365760"/>
+          </a:xfrm>
+          <a:prstGeom prst="rect">
+            <a:avLst/>
+          </a:prstGeom>
+          <a:noFill/>
+        </p:spPr>
+        <p:txBody>
+          <a:bodyPr wrap="square" lIns="45720" rIns="45720" tIns="22860" bIns="22860" anchor="t">
+            <a:spAutoFit/>
+          </a:bodyPr>
+          <a:lstStyle/>
+          <a:p>
+            <a:pPr algn="l"/>
+            <a:r>
+              <a:rPr sz="1400" b="0">
+                <a:solidFill>
+                  <a:srgbClr val="666666"/>
+                </a:solidFill>
+                <a:latin typeface="Yu Gothic"/>
+              </a:rPr>
+              <a:t>をタップ</a:t>
+            </a:r>
+          </a:p>
+        </p:txBody>
+      </p:sp>
+    </p:spTree>
+  </p:cSld>
+  <p:clrMapOvr>
+    <a:masterClrMapping/>
+  </p:clrMapOvr>
+</p:sld>
+</file>
+
+<file path=ppt/slides/slide32.xml><?xml version="1.0" encoding="utf-8"?>
+<p:sld xmlns:a="http://schemas.openxmlformats.org/drawingml/2006/main" xmlns:p="http://schemas.openxmlformats.org/presentationml/2006/main" xmlns:r="http://schemas.openxmlformats.org/officeDocument/2006/relationships">
+  <p:cSld>
+    <p:spTree>
+      <p:nvGrpSpPr>
+        <p:cNvPr id="1" name=""/>
+        <p:cNvGrpSpPr/>
+        <p:nvPr/>
+      </p:nvGrpSpPr>
+      <p:grpSpPr/>
+      <p:sp>
+        <p:nvSpPr>
+          <p:cNvPr id="2" name="Rounded Rectangle 1"/>
+          <p:cNvSpPr/>
+          <p:nvPr/>
+        </p:nvSpPr>
+        <p:spPr>
+          <a:xfrm>
+            <a:off x="411480" y="777240"/>
+            <a:ext cx="502920" cy="384048"/>
+          </a:xfrm>
+          <a:prstGeom prst="roundRect">
+            <a:avLst>
+              <a:gd name="adj" fmla="val 8000"/>
+            </a:avLst>
+          </a:prstGeom>
+          <a:solidFill>
+            <a:srgbClr val="4FB6BE"/>
+          </a:solidFill>
+          <a:ln>
+            <a:noFill/>
+          </a:ln>
+          <a:effectLst/>
+        </p:spPr>
+        <p:style>
+          <a:lnRef idx="1">
+            <a:schemeClr val="accent1"/>
+          </a:lnRef>
+          <a:fillRef idx="3">
+            <a:schemeClr val="accent1"/>
+          </a:fillRef>
+          <a:effectRef idx="2">
+            <a:schemeClr val="accent1"/>
+          </a:effectRef>
+          <a:fontRef idx="minor">
+            <a:schemeClr val="lt1"/>
+          </a:fontRef>
+        </p:style>
+        <p:txBody>
+          <a:bodyPr rtlCol="0" anchor="ctr"/>
+          <a:lstStyle/>
+          <a:p>
+            <a:pPr algn="ctr"/>
+          </a:p>
+        </p:txBody>
+      </p:sp>
+      <p:sp>
+        <p:nvSpPr>
+          <p:cNvPr id="3" name="TextBox 2"/>
+          <p:cNvSpPr txBox="1"/>
+          <p:nvPr/>
+        </p:nvSpPr>
+        <p:spPr>
+          <a:xfrm>
+            <a:off x="411480" y="777240"/>
+            <a:ext cx="502920" cy="384048"/>
+          </a:xfrm>
+          <a:prstGeom prst="rect">
+            <a:avLst/>
+          </a:prstGeom>
+          <a:noFill/>
+        </p:spPr>
+        <p:txBody>
+          <a:bodyPr wrap="square" lIns="45720" rIns="45720" tIns="22860" bIns="22860" anchor="ctr">
+            <a:spAutoFit/>
+          </a:bodyPr>
+          <a:lstStyle/>
+          <a:p>
+            <a:pPr algn="ctr"/>
+            <a:r>
+              <a:rPr sz="1200" b="1">
+                <a:solidFill>
+                  <a:srgbClr val="FFFFFF"/>
+                </a:solidFill>
+                <a:latin typeface="Yu Gothic"/>
+              </a:rPr>
+              <a:t>④-6</a:t>
+            </a:r>
+          </a:p>
+        </p:txBody>
+      </p:sp>
+      <p:sp>
+        <p:nvSpPr>
+          <p:cNvPr id="4" name="TextBox 3"/>
+          <p:cNvSpPr txBox="1"/>
+          <p:nvPr/>
+        </p:nvSpPr>
+        <p:spPr>
+          <a:xfrm>
+            <a:off x="1078992" y="777240"/>
+            <a:ext cx="10607040" cy="384048"/>
+          </a:xfrm>
+          <a:prstGeom prst="rect">
+            <a:avLst/>
+          </a:prstGeom>
+          <a:noFill/>
+        </p:spPr>
+        <p:txBody>
+          <a:bodyPr wrap="square" lIns="45720" rIns="45720" tIns="22860" bIns="22860" anchor="ctr">
+            <a:spAutoFit/>
+          </a:bodyPr>
+          <a:lstStyle/>
+          <a:p>
+            <a:pPr algn="l"/>
+            <a:r>
+              <a:rPr sz="2000" b="1">
+                <a:solidFill>
+                  <a:srgbClr val="333333"/>
+                </a:solidFill>
+                <a:latin typeface="Yu Gothic"/>
+              </a:rPr>
+              <a:t>中身をすべてクリアする</a:t>
+            </a:r>
+          </a:p>
+        </p:txBody>
+      </p:sp>
+      <p:pic>
+        <p:nvPicPr>
+          <p:cNvPr id="5" name="Picture 4" descr="d13.jpg"/>
+          <p:cNvPicPr>
+            <a:picLocks noChangeAspect="1"/>
+          </p:cNvPicPr>
+          <p:nvPr/>
+        </p:nvPicPr>
+        <p:blipFill>
+          <a:blip r:embed="rId2"/>
+          <a:stretch>
+            <a:fillRect/>
+          </a:stretch>
+        </p:blipFill>
+        <p:spPr>
+          <a:xfrm>
+            <a:off x="914400" y="1325880"/>
+            <a:ext cx="2281509" cy="4937760"/>
+          </a:xfrm>
+          <a:prstGeom prst="rect">
+            <a:avLst/>
+          </a:prstGeom>
+          <a:ln w="12700">
+            <a:solidFill>
+              <a:srgbClr val="BBBBBB"/>
+            </a:solidFill>
+          </a:ln>
+        </p:spPr>
+      </p:pic>
+      <p:sp>
+        <p:nvSpPr>
+          <p:cNvPr id="6" name="Rounded Rectangle 5"/>
+          <p:cNvSpPr/>
+          <p:nvPr/>
+        </p:nvSpPr>
+        <p:spPr>
+          <a:xfrm>
+            <a:off x="991674" y="3158374"/>
+            <a:ext cx="2126959" cy="2589874"/>
+          </a:xfrm>
+          <a:prstGeom prst="roundRect">
+            <a:avLst>
+              <a:gd name="adj" fmla="val 12000"/>
+            </a:avLst>
+          </a:prstGeom>
+          <a:noFill/>
+          <a:ln w="38100">
+            <a:solidFill>
+              <a:srgbClr val="4CAF6A"/>
+            </a:solidFill>
+          </a:ln>
+          <a:effectLst/>
+        </p:spPr>
+        <p:style>
+          <a:lnRef idx="1">
+            <a:schemeClr val="accent1"/>
+          </a:lnRef>
+          <a:fillRef idx="3">
+            <a:schemeClr val="accent1"/>
+          </a:fillRef>
+          <a:effectRef idx="2">
+            <a:schemeClr val="accent1"/>
+          </a:effectRef>
+          <a:fontRef idx="minor">
+            <a:schemeClr val="lt1"/>
+          </a:fontRef>
+        </p:style>
+        <p:txBody>
+          <a:bodyPr rtlCol="0" anchor="ctr"/>
+          <a:lstStyle/>
+          <a:p>
+            <a:pPr algn="ctr"/>
+          </a:p>
+        </p:txBody>
+      </p:sp>
+      <p:cxnSp>
+        <p:nvCxnSpPr>
+          <p:cNvPr id="7" name="Connector 6"/>
+          <p:cNvCxnSpPr/>
+          <p:nvPr/>
+        </p:nvCxnSpPr>
+        <p:spPr>
+          <a:xfrm>
+            <a:off x="3118634" y="4453311"/>
+            <a:ext cx="2322046" cy="0"/>
+          </a:xfrm>
+          <a:prstGeom prst="line">
+            <a:avLst/>
+          </a:prstGeom>
+          <a:ln w="22225">
+            <a:solidFill>
+              <a:srgbClr val="4CAF6A"/>
+            </a:solidFill>
+          </a:ln>
+        </p:spPr>
+        <p:style>
+          <a:lnRef idx="2">
+            <a:schemeClr val="accent1"/>
+          </a:lnRef>
+          <a:fillRef idx="0">
+            <a:schemeClr val="accent1"/>
+          </a:fillRef>
+          <a:effectRef idx="1">
+            <a:schemeClr val="accent1"/>
+          </a:effectRef>
+          <a:fontRef idx="minor">
+            <a:schemeClr val="tx1"/>
+          </a:fontRef>
+        </p:style>
+      </p:cxnSp>
+      <p:sp>
+        <p:nvSpPr>
+          <p:cNvPr id="8" name="Oval 7"/>
+          <p:cNvSpPr/>
+          <p:nvPr/>
+        </p:nvSpPr>
+        <p:spPr>
+          <a:xfrm>
+            <a:off x="5477256" y="4261287"/>
+            <a:ext cx="384048" cy="384048"/>
+          </a:xfrm>
+          <a:prstGeom prst="ellipse">
+            <a:avLst/>
+          </a:prstGeom>
+          <a:solidFill>
+            <a:srgbClr val="4CAF6A"/>
+          </a:solidFill>
+          <a:ln w="19050">
+            <a:solidFill>
+              <a:srgbClr val="FFFFFF"/>
+            </a:solidFill>
+          </a:ln>
+          <a:effectLst/>
+        </p:spPr>
+        <p:style>
+          <a:lnRef idx="1">
+            <a:schemeClr val="accent1"/>
+          </a:lnRef>
+          <a:fillRef idx="3">
+            <a:schemeClr val="accent1"/>
+          </a:fillRef>
+          <a:effectRef idx="2">
+            <a:schemeClr val="accent1"/>
+          </a:effectRef>
+          <a:fontRef idx="minor">
+            <a:schemeClr val="lt1"/>
+          </a:fontRef>
+        </p:style>
+        <p:txBody>
+          <a:bodyPr rtlCol="0" anchor="ctr" lIns="0" rIns="0" tIns="0" bIns="0"/>
+          <a:lstStyle/>
+          <a:p>
+            <a:pPr algn="ctr"/>
+            <a:r>
+              <a:rPr sz="1400" b="1">
+                <a:solidFill>
+                  <a:srgbClr val="FFFFFF"/>
+                </a:solidFill>
+                <a:latin typeface="Yu Gothic"/>
+              </a:rPr>
+              <a:t>1</a:t>
+            </a:r>
+          </a:p>
+        </p:txBody>
+      </p:sp>
+      <p:sp>
+        <p:nvSpPr>
+          <p:cNvPr id="9" name="TextBox 8"/>
+          <p:cNvSpPr txBox="1"/>
+          <p:nvPr/>
+        </p:nvSpPr>
+        <p:spPr>
+          <a:xfrm>
+            <a:off x="6035040" y="4178991"/>
+            <a:ext cx="5943600" cy="411480"/>
+          </a:xfrm>
+          <a:prstGeom prst="rect">
+            <a:avLst/>
+          </a:prstGeom>
+          <a:noFill/>
+        </p:spPr>
+        <p:txBody>
+          <a:bodyPr wrap="square" lIns="45720" rIns="45720" tIns="22860" bIns="22860" anchor="ctr">
+            <a:spAutoFit/>
+          </a:bodyPr>
+          <a:lstStyle/>
+          <a:p>
+            <a:pPr algn="l"/>
+            <a:r>
+              <a:rPr sz="2000" b="1">
+                <a:solidFill>
+                  <a:srgbClr val="333333"/>
+                </a:solidFill>
+                <a:latin typeface="Yu Gothic"/>
+              </a:rPr>
+              <a:t>4つの項目をすべてクリア</a:t>
+            </a:r>
+          </a:p>
+        </p:txBody>
+      </p:sp>
+      <p:sp>
+        <p:nvSpPr>
+          <p:cNvPr id="10" name="TextBox 9"/>
+          <p:cNvSpPr txBox="1"/>
+          <p:nvPr/>
+        </p:nvSpPr>
+        <p:spPr>
+          <a:xfrm>
+            <a:off x="6035040" y="4563039"/>
+            <a:ext cx="5943600" cy="365760"/>
+          </a:xfrm>
+          <a:prstGeom prst="rect">
+            <a:avLst/>
+          </a:prstGeom>
+          <a:noFill/>
+        </p:spPr>
+        <p:txBody>
+          <a:bodyPr wrap="square" lIns="45720" rIns="45720" tIns="22860" bIns="22860" anchor="t">
+            <a:spAutoFit/>
+          </a:bodyPr>
+          <a:lstStyle/>
+          <a:p>
+            <a:pPr algn="l"/>
+            <a:r>
+              <a:rPr sz="1400" b="0">
+                <a:solidFill>
+                  <a:srgbClr val="666666"/>
+                </a:solidFill>
+                <a:latin typeface="Yu Gothic"/>
+              </a:rPr>
+              <a:t>上から順に進める</a:t>
+            </a:r>
+          </a:p>
+        </p:txBody>
+      </p:sp>
+    </p:spTree>
+  </p:cSld>
+  <p:clrMapOvr>
+    <a:masterClrMapping/>
+  </p:clrMapOvr>
+</p:sld>
+</file>
+
+<file path=ppt/slides/slide33.xml><?xml version="1.0" encoding="utf-8"?>
+<p:sld xmlns:a="http://schemas.openxmlformats.org/drawingml/2006/main" xmlns:p="http://schemas.openxmlformats.org/presentationml/2006/main" xmlns:r="http://schemas.openxmlformats.org/officeDocument/2006/relationships">
+  <p:cSld>
+    <p:spTree>
+      <p:nvGrpSpPr>
+        <p:cNvPr id="1" name=""/>
+        <p:cNvGrpSpPr/>
+        <p:nvPr/>
+      </p:nvGrpSpPr>
+      <p:grpSpPr/>
+      <p:sp>
+        <p:nvSpPr>
+          <p:cNvPr id="2" name="Rounded Rectangle 1"/>
+          <p:cNvSpPr/>
+          <p:nvPr/>
+        </p:nvSpPr>
+        <p:spPr>
+          <a:xfrm>
+            <a:off x="411480" y="777240"/>
+            <a:ext cx="502920" cy="384048"/>
+          </a:xfrm>
+          <a:prstGeom prst="roundRect">
+            <a:avLst>
+              <a:gd name="adj" fmla="val 8000"/>
+            </a:avLst>
+          </a:prstGeom>
+          <a:solidFill>
+            <a:srgbClr val="4FB6BE"/>
+          </a:solidFill>
+          <a:ln>
+            <a:noFill/>
+          </a:ln>
+          <a:effectLst/>
+        </p:spPr>
+        <p:style>
+          <a:lnRef idx="1">
+            <a:schemeClr val="accent1"/>
+          </a:lnRef>
+          <a:fillRef idx="3">
+            <a:schemeClr val="accent1"/>
+          </a:fillRef>
+          <a:effectRef idx="2">
+            <a:schemeClr val="accent1"/>
+          </a:effectRef>
+          <a:fontRef idx="minor">
+            <a:schemeClr val="lt1"/>
+          </a:fontRef>
+        </p:style>
+        <p:txBody>
+          <a:bodyPr rtlCol="0" anchor="ctr"/>
+          <a:lstStyle/>
+          <a:p>
+            <a:pPr algn="ctr"/>
+          </a:p>
+        </p:txBody>
+      </p:sp>
+      <p:sp>
+        <p:nvSpPr>
+          <p:cNvPr id="3" name="TextBox 2"/>
+          <p:cNvSpPr txBox="1"/>
+          <p:nvPr/>
+        </p:nvSpPr>
+        <p:spPr>
+          <a:xfrm>
+            <a:off x="411480" y="777240"/>
+            <a:ext cx="502920" cy="384048"/>
+          </a:xfrm>
+          <a:prstGeom prst="rect">
+            <a:avLst/>
+          </a:prstGeom>
+          <a:noFill/>
+        </p:spPr>
+        <p:txBody>
+          <a:bodyPr wrap="square" lIns="45720" rIns="45720" tIns="22860" bIns="22860" anchor="ctr">
+            <a:spAutoFit/>
+          </a:bodyPr>
+          <a:lstStyle/>
+          <a:p>
+            <a:pPr algn="ctr"/>
+            <a:r>
+              <a:rPr sz="1200" b="1">
+                <a:solidFill>
+                  <a:srgbClr val="FFFFFF"/>
+                </a:solidFill>
+                <a:latin typeface="Yu Gothic"/>
+              </a:rPr>
+              <a:t>④-7</a:t>
+            </a:r>
+          </a:p>
+        </p:txBody>
+      </p:sp>
+      <p:sp>
+        <p:nvSpPr>
+          <p:cNvPr id="4" name="TextBox 3"/>
+          <p:cNvSpPr txBox="1"/>
+          <p:nvPr/>
+        </p:nvSpPr>
+        <p:spPr>
+          <a:xfrm>
+            <a:off x="1078992" y="777240"/>
+            <a:ext cx="10607040" cy="384048"/>
+          </a:xfrm>
+          <a:prstGeom prst="rect">
+            <a:avLst/>
+          </a:prstGeom>
+          <a:noFill/>
+        </p:spPr>
+        <p:txBody>
+          <a:bodyPr wrap="square" lIns="45720" rIns="45720" tIns="22860" bIns="22860" anchor="ctr">
+            <a:spAutoFit/>
+          </a:bodyPr>
+          <a:lstStyle/>
+          <a:p>
+            <a:pPr algn="l"/>
+            <a:r>
+              <a:rPr sz="2000" b="1">
+                <a:solidFill>
+                  <a:srgbClr val="333333"/>
+                </a:solidFill>
+                <a:latin typeface="Yu Gothic"/>
+              </a:rPr>
+              <a:t>すべてクリアしたら100%</a:t>
+            </a:r>
+          </a:p>
+        </p:txBody>
+      </p:sp>
+      <p:sp>
+        <p:nvSpPr>
+          <p:cNvPr id="5" name="Rounded Rectangle 4"/>
+          <p:cNvSpPr/>
+          <p:nvPr/>
+        </p:nvSpPr>
+        <p:spPr>
+          <a:xfrm>
+            <a:off x="731520" y="1463040"/>
+            <a:ext cx="10698480" cy="1097280"/>
+          </a:xfrm>
+          <a:prstGeom prst="roundRect">
+            <a:avLst>
+              <a:gd name="adj" fmla="val 8000"/>
+            </a:avLst>
+          </a:prstGeom>
+          <a:solidFill>
+            <a:srgbClr val="FFFFFF"/>
+          </a:solidFill>
+          <a:ln w="25400">
+            <a:solidFill>
+              <a:srgbClr val="4CAF6A"/>
+            </a:solidFill>
+          </a:ln>
+          <a:effectLst/>
+        </p:spPr>
+        <p:style>
+          <a:lnRef idx="1">
+            <a:schemeClr val="accent1"/>
+          </a:lnRef>
+          <a:fillRef idx="3">
+            <a:schemeClr val="accent1"/>
+          </a:fillRef>
+          <a:effectRef idx="2">
+            <a:schemeClr val="accent1"/>
+          </a:effectRef>
+          <a:fontRef idx="minor">
+            <a:schemeClr val="lt1"/>
+          </a:fontRef>
+        </p:style>
+        <p:txBody>
+          <a:bodyPr rtlCol="0" anchor="ctr"/>
+          <a:lstStyle/>
+          <a:p>
+            <a:pPr algn="ctr"/>
+          </a:p>
+        </p:txBody>
+      </p:sp>
+      <p:sp>
+        <p:nvSpPr>
+          <p:cNvPr id="6" name="Oval 5"/>
+          <p:cNvSpPr/>
+          <p:nvPr/>
+        </p:nvSpPr>
+        <p:spPr>
+          <a:xfrm>
+            <a:off x="1051560" y="1691640"/>
+            <a:ext cx="640080" cy="640080"/>
+          </a:xfrm>
+          <a:prstGeom prst="ellipse">
+            <a:avLst/>
+          </a:prstGeom>
+          <a:solidFill>
+            <a:srgbClr val="4CAF6A"/>
+          </a:solidFill>
+          <a:ln w="19050">
+            <a:solidFill>
+              <a:srgbClr val="FFFFFF"/>
+            </a:solidFill>
+          </a:ln>
+          <a:effectLst/>
+        </p:spPr>
+        <p:style>
+          <a:lnRef idx="1">
+            <a:schemeClr val="accent1"/>
+          </a:lnRef>
+          <a:fillRef idx="3">
+            <a:schemeClr val="accent1"/>
+          </a:fillRef>
+          <a:effectRef idx="2">
+            <a:schemeClr val="accent1"/>
+          </a:effectRef>
+          <a:fontRef idx="minor">
+            <a:schemeClr val="lt1"/>
+          </a:fontRef>
+        </p:style>
+        <p:txBody>
+          <a:bodyPr rtlCol="0" anchor="ctr" lIns="0" rIns="0" tIns="0" bIns="0"/>
+          <a:lstStyle/>
+          <a:p>
+            <a:pPr algn="ctr"/>
+            <a:r>
+              <a:rPr sz="1400" b="1">
+                <a:solidFill>
+                  <a:srgbClr val="FFFFFF"/>
+                </a:solidFill>
+                <a:latin typeface="Yu Gothic"/>
+              </a:rPr>
+              <a:t>1</a:t>
+            </a:r>
+          </a:p>
+        </p:txBody>
+      </p:sp>
+      <p:sp>
+        <p:nvSpPr>
+          <p:cNvPr id="7" name="TextBox 6"/>
+          <p:cNvSpPr txBox="1"/>
+          <p:nvPr/>
+        </p:nvSpPr>
+        <p:spPr>
+          <a:xfrm>
+            <a:off x="1920240" y="1463040"/>
+            <a:ext cx="9326880" cy="1097280"/>
+          </a:xfrm>
+          <a:prstGeom prst="rect">
+            <a:avLst/>
+          </a:prstGeom>
+          <a:noFill/>
+        </p:spPr>
+        <p:txBody>
+          <a:bodyPr wrap="square" lIns="45720" rIns="45720" tIns="22860" bIns="22860" anchor="ctr">
+            <a:spAutoFit/>
+          </a:bodyPr>
+          <a:lstStyle/>
+          <a:p>
+            <a:pPr algn="l"/>
+            <a:r>
+              <a:rPr sz="2200" b="1">
+                <a:solidFill>
+                  <a:srgbClr val="333333"/>
+                </a:solidFill>
+                <a:latin typeface="Yu Gothic"/>
+              </a:rPr>
+              <a:t>すべてクリアすると、完了が 100% になる</a:t>
+            </a:r>
+          </a:p>
+        </p:txBody>
+      </p:sp>
+      <p:sp>
+        <p:nvSpPr>
+          <p:cNvPr id="8" name="TextBox 7"/>
+          <p:cNvSpPr txBox="1"/>
+          <p:nvPr/>
+        </p:nvSpPr>
+        <p:spPr>
+          <a:xfrm>
+            <a:off x="5669280" y="2514600"/>
+            <a:ext cx="914400" cy="411480"/>
+          </a:xfrm>
+          <a:prstGeom prst="rect">
+            <a:avLst/>
+          </a:prstGeom>
+          <a:noFill/>
+        </p:spPr>
+        <p:txBody>
+          <a:bodyPr wrap="square" lIns="45720" rIns="45720" tIns="22860" bIns="22860" anchor="t">
+            <a:spAutoFit/>
+          </a:bodyPr>
+          <a:lstStyle/>
+          <a:p>
+            <a:pPr algn="ctr"/>
+            <a:r>
+              <a:rPr sz="1600" b="1">
+                <a:solidFill>
+                  <a:srgbClr val="666666"/>
+                </a:solidFill>
+                <a:latin typeface="Yu Gothic"/>
+              </a:rPr>
+              <a:t>▼</a:t>
+            </a:r>
+          </a:p>
+        </p:txBody>
+      </p:sp>
+      <p:sp>
+        <p:nvSpPr>
+          <p:cNvPr id="9" name="Rounded Rectangle 8"/>
+          <p:cNvSpPr/>
+          <p:nvPr/>
+        </p:nvSpPr>
+        <p:spPr>
+          <a:xfrm>
+            <a:off x="731520" y="2880360"/>
+            <a:ext cx="10698480" cy="1097280"/>
+          </a:xfrm>
+          <a:prstGeom prst="roundRect">
+            <a:avLst>
+              <a:gd name="adj" fmla="val 8000"/>
+            </a:avLst>
+          </a:prstGeom>
+          <a:solidFill>
+            <a:srgbClr val="FFFFFF"/>
+          </a:solidFill>
+          <a:ln w="25400">
+            <a:solidFill>
+              <a:srgbClr val="D32F2F"/>
+            </a:solidFill>
+          </a:ln>
+          <a:effectLst/>
+        </p:spPr>
+        <p:style>
+          <a:lnRef idx="1">
+            <a:schemeClr val="accent1"/>
+          </a:lnRef>
+          <a:fillRef idx="3">
+            <a:schemeClr val="accent1"/>
+          </a:fillRef>
+          <a:effectRef idx="2">
+            <a:schemeClr val="accent1"/>
+          </a:effectRef>
+          <a:fontRef idx="minor">
+            <a:schemeClr val="lt1"/>
+          </a:fontRef>
+        </p:style>
+        <p:txBody>
+          <a:bodyPr rtlCol="0" anchor="ctr"/>
+          <a:lstStyle/>
+          <a:p>
+            <a:pPr algn="ctr"/>
+          </a:p>
+        </p:txBody>
+      </p:sp>
+      <p:sp>
+        <p:nvSpPr>
+          <p:cNvPr id="10" name="Oval 9"/>
+          <p:cNvSpPr/>
+          <p:nvPr/>
+        </p:nvSpPr>
+        <p:spPr>
+          <a:xfrm>
+            <a:off x="1051560" y="3108960"/>
+            <a:ext cx="640080" cy="640080"/>
+          </a:xfrm>
+          <a:prstGeom prst="ellipse">
+            <a:avLst/>
+          </a:prstGeom>
+          <a:solidFill>
+            <a:srgbClr val="D32F2F"/>
+          </a:solidFill>
+          <a:ln w="19050">
+            <a:solidFill>
+              <a:srgbClr val="FFFFFF"/>
+            </a:solidFill>
+          </a:ln>
+          <a:effectLst/>
+        </p:spPr>
+        <p:style>
+          <a:lnRef idx="1">
+            <a:schemeClr val="accent1"/>
+          </a:lnRef>
+          <a:fillRef idx="3">
+            <a:schemeClr val="accent1"/>
+          </a:fillRef>
+          <a:effectRef idx="2">
+            <a:schemeClr val="accent1"/>
+          </a:effectRef>
+          <a:fontRef idx="minor">
+            <a:schemeClr val="lt1"/>
+          </a:fontRef>
+        </p:style>
+        <p:txBody>
+          <a:bodyPr rtlCol="0" anchor="ctr" lIns="0" rIns="0" tIns="0" bIns="0"/>
+          <a:lstStyle/>
+          <a:p>
+            <a:pPr algn="ctr"/>
+            <a:r>
+              <a:rPr sz="1400" b="1">
+                <a:solidFill>
+                  <a:srgbClr val="FFFFFF"/>
+                </a:solidFill>
+                <a:latin typeface="Yu Gothic"/>
+              </a:rPr>
+              <a:t>2</a:t>
+            </a:r>
+          </a:p>
+        </p:txBody>
+      </p:sp>
+      <p:sp>
+        <p:nvSpPr>
+          <p:cNvPr id="11" name="TextBox 10"/>
+          <p:cNvSpPr txBox="1"/>
+          <p:nvPr/>
+        </p:nvSpPr>
+        <p:spPr>
+          <a:xfrm>
+            <a:off x="1920240" y="2880360"/>
+            <a:ext cx="9326880" cy="1097280"/>
+          </a:xfrm>
+          <a:prstGeom prst="rect">
+            <a:avLst/>
+          </a:prstGeom>
+          <a:noFill/>
+        </p:spPr>
+        <p:txBody>
+          <a:bodyPr wrap="square" lIns="45720" rIns="45720" tIns="22860" bIns="22860" anchor="ctr">
+            <a:spAutoFit/>
+          </a:bodyPr>
+          <a:lstStyle/>
+          <a:p>
+            <a:pPr algn="l"/>
+            <a:r>
+              <a:rPr sz="2200" b="1">
+                <a:solidFill>
+                  <a:srgbClr val="333333"/>
+                </a:solidFill>
+                <a:latin typeface="Yu Gothic"/>
+              </a:rPr>
+              <a:t>100% になったら、登録チームに報告</a:t>
+            </a:r>
+          </a:p>
+        </p:txBody>
+      </p:sp>
+      <p:sp>
+        <p:nvSpPr>
+          <p:cNvPr id="12" name="TextBox 11"/>
+          <p:cNvSpPr txBox="1"/>
+          <p:nvPr/>
+        </p:nvSpPr>
+        <p:spPr>
+          <a:xfrm>
+            <a:off x="5669280" y="3931920"/>
+            <a:ext cx="914400" cy="411480"/>
+          </a:xfrm>
+          <a:prstGeom prst="rect">
+            <a:avLst/>
+          </a:prstGeom>
+          <a:noFill/>
+        </p:spPr>
+        <p:txBody>
+          <a:bodyPr wrap="square" lIns="45720" rIns="45720" tIns="22860" bIns="22860" anchor="t">
+            <a:spAutoFit/>
+          </a:bodyPr>
+          <a:lstStyle/>
+          <a:p>
+            <a:pPr algn="ctr"/>
+            <a:r>
+              <a:rPr sz="1600" b="1">
+                <a:solidFill>
+                  <a:srgbClr val="666666"/>
+                </a:solidFill>
+                <a:latin typeface="Yu Gothic"/>
+              </a:rPr>
+              <a:t>▼</a:t>
+            </a:r>
+          </a:p>
+        </p:txBody>
+      </p:sp>
+      <p:sp>
+        <p:nvSpPr>
+          <p:cNvPr id="13" name="Rounded Rectangle 12"/>
+          <p:cNvSpPr/>
+          <p:nvPr/>
+        </p:nvSpPr>
+        <p:spPr>
+          <a:xfrm>
+            <a:off x="731520" y="4297680"/>
+            <a:ext cx="10698480" cy="1097280"/>
+          </a:xfrm>
+          <a:prstGeom prst="roundRect">
+            <a:avLst>
+              <a:gd name="adj" fmla="val 8000"/>
+            </a:avLst>
+          </a:prstGeom>
+          <a:solidFill>
+            <a:srgbClr val="FFFFFF"/>
+          </a:solidFill>
+          <a:ln w="25400">
+            <a:solidFill>
+              <a:srgbClr val="126EC9"/>
+            </a:solidFill>
+          </a:ln>
+          <a:effectLst/>
+        </p:spPr>
+        <p:style>
+          <a:lnRef idx="1">
+            <a:schemeClr val="accent1"/>
+          </a:lnRef>
+          <a:fillRef idx="3">
+            <a:schemeClr val="accent1"/>
+          </a:fillRef>
+          <a:effectRef idx="2">
+            <a:schemeClr val="accent1"/>
+          </a:effectRef>
+          <a:fontRef idx="minor">
+            <a:schemeClr val="lt1"/>
+          </a:fontRef>
+        </p:style>
+        <p:txBody>
+          <a:bodyPr rtlCol="0" anchor="ctr"/>
+          <a:lstStyle/>
+          <a:p>
+            <a:pPr algn="ctr"/>
+          </a:p>
+        </p:txBody>
+      </p:sp>
+      <p:sp>
+        <p:nvSpPr>
+          <p:cNvPr id="14" name="Oval 13"/>
+          <p:cNvSpPr/>
+          <p:nvPr/>
+        </p:nvSpPr>
+        <p:spPr>
+          <a:xfrm>
+            <a:off x="1051560" y="4526280"/>
+            <a:ext cx="640080" cy="640080"/>
+          </a:xfrm>
+          <a:prstGeom prst="ellipse">
+            <a:avLst/>
+          </a:prstGeom>
+          <a:solidFill>
+            <a:srgbClr val="126EC9"/>
+          </a:solidFill>
+          <a:ln w="19050">
+            <a:solidFill>
+              <a:srgbClr val="FFFFFF"/>
+            </a:solidFill>
+          </a:ln>
+          <a:effectLst/>
+        </p:spPr>
+        <p:style>
+          <a:lnRef idx="1">
+            <a:schemeClr val="accent1"/>
+          </a:lnRef>
+          <a:fillRef idx="3">
+            <a:schemeClr val="accent1"/>
+          </a:fillRef>
+          <a:effectRef idx="2">
+            <a:schemeClr val="accent1"/>
+          </a:effectRef>
+          <a:fontRef idx="minor">
+            <a:schemeClr val="lt1"/>
+          </a:fontRef>
+        </p:style>
+        <p:txBody>
+          <a:bodyPr rtlCol="0" anchor="ctr" lIns="0" rIns="0" tIns="0" bIns="0"/>
+          <a:lstStyle/>
+          <a:p>
+            <a:pPr algn="ctr"/>
+            <a:r>
+              <a:rPr sz="1400" b="1">
+                <a:solidFill>
+                  <a:srgbClr val="FFFFFF"/>
+                </a:solidFill>
+                <a:latin typeface="Yu Gothic"/>
+              </a:rPr>
+              <a:t>3</a:t>
+            </a:r>
+          </a:p>
+        </p:txBody>
+      </p:sp>
+      <p:sp>
+        <p:nvSpPr>
+          <p:cNvPr id="15" name="TextBox 14"/>
+          <p:cNvSpPr txBox="1"/>
+          <p:nvPr/>
+        </p:nvSpPr>
+        <p:spPr>
+          <a:xfrm>
+            <a:off x="1920240" y="4297680"/>
+            <a:ext cx="9326880" cy="1097280"/>
+          </a:xfrm>
+          <a:prstGeom prst="rect">
+            <a:avLst/>
+          </a:prstGeom>
+          <a:noFill/>
+        </p:spPr>
+        <p:txBody>
+          <a:bodyPr wrap="square" lIns="45720" rIns="45720" tIns="22860" bIns="22860" anchor="ctr">
+            <a:spAutoFit/>
+          </a:bodyPr>
+          <a:lstStyle/>
+          <a:p>
+            <a:pPr algn="l"/>
+            <a:r>
+              <a:rPr sz="2200" b="1">
+                <a:solidFill>
+                  <a:srgbClr val="333333"/>
+                </a:solidFill>
+                <a:latin typeface="Yu Gothic"/>
+              </a:rPr>
+              <a:t>登録チームから、完了のお知らせが届く</a:t>
             </a:r>
           </a:p>
         </p:txBody>

--- a/out/登録の流れ_書類準備まで.pptx
+++ b/out/登録の流れ_書類準備まで.pptx
@@ -41,6 +41,8 @@
     <p:sldId id="286" r:id="rId40"/>
     <p:sldId id="287" r:id="rId41"/>
     <p:sldId id="288" r:id="rId42"/>
+    <p:sldId id="289" r:id="rId43"/>
+    <p:sldId id="290" r:id="rId44"/>
   </p:sldIdLst>
   <p:sldSz cx="12192000" cy="6858000"/>
   <p:notesSz cx="6858000" cy="9144000"/>
@@ -10698,7 +10700,7 @@
                 </a:solidFill>
                 <a:latin typeface="Yu Gothic"/>
               </a:rPr>
-              <a:t>途中まで</a:t>
+              <a:t>作成済</a:t>
             </a:r>
           </a:p>
         </p:txBody>
@@ -23855,7 +23857,951 @@
                 </a:solidFill>
                 <a:latin typeface="Yu Gothic"/>
               </a:rPr>
-              <a:t>すべてクリアしたら100%</a:t>
+              <a:t>すべて「完了」になる（5/5）</a:t>
+            </a:r>
+          </a:p>
+        </p:txBody>
+      </p:sp>
+      <p:pic>
+        <p:nvPicPr>
+          <p:cNvPr id="5" name="Picture 4" descr="d18.jpg"/>
+          <p:cNvPicPr>
+            <a:picLocks noChangeAspect="1"/>
+          </p:cNvPicPr>
+          <p:nvPr/>
+        </p:nvPicPr>
+        <p:blipFill>
+          <a:blip r:embed="rId2"/>
+          <a:stretch>
+            <a:fillRect/>
+          </a:stretch>
+        </p:blipFill>
+        <p:spPr>
+          <a:xfrm>
+            <a:off x="914400" y="1325880"/>
+            <a:ext cx="2281509" cy="4937760"/>
+          </a:xfrm>
+          <a:prstGeom prst="rect">
+            <a:avLst/>
+          </a:prstGeom>
+          <a:ln w="12700">
+            <a:solidFill>
+              <a:srgbClr val="BBBBBB"/>
+            </a:solidFill>
+          </a:ln>
+        </p:spPr>
+      </p:pic>
+      <p:sp>
+        <p:nvSpPr>
+          <p:cNvPr id="6" name="Rounded Rectangle 5"/>
+          <p:cNvSpPr/>
+          <p:nvPr/>
+        </p:nvSpPr>
+        <p:spPr>
+          <a:xfrm>
+            <a:off x="2650453" y="2689948"/>
+            <a:ext cx="454403" cy="233968"/>
+          </a:xfrm>
+          <a:prstGeom prst="roundRect">
+            <a:avLst>
+              <a:gd name="adj" fmla="val 12000"/>
+            </a:avLst>
+          </a:prstGeom>
+          <a:noFill/>
+          <a:ln w="38100">
+            <a:solidFill>
+              <a:srgbClr val="4CAF6A"/>
+            </a:solidFill>
+          </a:ln>
+          <a:effectLst/>
+        </p:spPr>
+        <p:style>
+          <a:lnRef idx="1">
+            <a:schemeClr val="accent1"/>
+          </a:lnRef>
+          <a:fillRef idx="3">
+            <a:schemeClr val="accent1"/>
+          </a:fillRef>
+          <a:effectRef idx="2">
+            <a:schemeClr val="accent1"/>
+          </a:effectRef>
+          <a:fontRef idx="minor">
+            <a:schemeClr val="lt1"/>
+          </a:fontRef>
+        </p:style>
+        <p:txBody>
+          <a:bodyPr rtlCol="0" anchor="ctr"/>
+          <a:lstStyle/>
+          <a:p>
+            <a:pPr algn="ctr"/>
+          </a:p>
+        </p:txBody>
+      </p:sp>
+      <p:cxnSp>
+        <p:nvCxnSpPr>
+          <p:cNvPr id="7" name="Connector 6"/>
+          <p:cNvCxnSpPr/>
+          <p:nvPr/>
+        </p:nvCxnSpPr>
+        <p:spPr>
+          <a:xfrm>
+            <a:off x="3104857" y="2806932"/>
+            <a:ext cx="2335823" cy="0"/>
+          </a:xfrm>
+          <a:prstGeom prst="line">
+            <a:avLst/>
+          </a:prstGeom>
+          <a:ln w="22225">
+            <a:solidFill>
+              <a:srgbClr val="4CAF6A"/>
+            </a:solidFill>
+          </a:ln>
+        </p:spPr>
+        <p:style>
+          <a:lnRef idx="2">
+            <a:schemeClr val="accent1"/>
+          </a:lnRef>
+          <a:fillRef idx="0">
+            <a:schemeClr val="accent1"/>
+          </a:fillRef>
+          <a:effectRef idx="1">
+            <a:schemeClr val="accent1"/>
+          </a:effectRef>
+          <a:fontRef idx="minor">
+            <a:schemeClr val="tx1"/>
+          </a:fontRef>
+        </p:style>
+      </p:cxnSp>
+      <p:sp>
+        <p:nvSpPr>
+          <p:cNvPr id="8" name="Oval 7"/>
+          <p:cNvSpPr/>
+          <p:nvPr/>
+        </p:nvSpPr>
+        <p:spPr>
+          <a:xfrm>
+            <a:off x="5477256" y="2614908"/>
+            <a:ext cx="384048" cy="384048"/>
+          </a:xfrm>
+          <a:prstGeom prst="ellipse">
+            <a:avLst/>
+          </a:prstGeom>
+          <a:solidFill>
+            <a:srgbClr val="4CAF6A"/>
+          </a:solidFill>
+          <a:ln w="19050">
+            <a:solidFill>
+              <a:srgbClr val="FFFFFF"/>
+            </a:solidFill>
+          </a:ln>
+          <a:effectLst/>
+        </p:spPr>
+        <p:style>
+          <a:lnRef idx="1">
+            <a:schemeClr val="accent1"/>
+          </a:lnRef>
+          <a:fillRef idx="3">
+            <a:schemeClr val="accent1"/>
+          </a:fillRef>
+          <a:effectRef idx="2">
+            <a:schemeClr val="accent1"/>
+          </a:effectRef>
+          <a:fontRef idx="minor">
+            <a:schemeClr val="lt1"/>
+          </a:fontRef>
+        </p:style>
+        <p:txBody>
+          <a:bodyPr rtlCol="0" anchor="ctr" lIns="0" rIns="0" tIns="0" bIns="0"/>
+          <a:lstStyle/>
+          <a:p>
+            <a:pPr algn="ctr"/>
+            <a:r>
+              <a:rPr sz="1400" b="1">
+                <a:solidFill>
+                  <a:srgbClr val="FFFFFF"/>
+                </a:solidFill>
+                <a:latin typeface="Yu Gothic"/>
+              </a:rPr>
+              <a:t>1</a:t>
+            </a:r>
+          </a:p>
+        </p:txBody>
+      </p:sp>
+      <p:sp>
+        <p:nvSpPr>
+          <p:cNvPr id="9" name="TextBox 8"/>
+          <p:cNvSpPr txBox="1"/>
+          <p:nvPr/>
+        </p:nvSpPr>
+        <p:spPr>
+          <a:xfrm>
+            <a:off x="6035040" y="2532612"/>
+            <a:ext cx="5943600" cy="411480"/>
+          </a:xfrm>
+          <a:prstGeom prst="rect">
+            <a:avLst/>
+          </a:prstGeom>
+          <a:noFill/>
+        </p:spPr>
+        <p:txBody>
+          <a:bodyPr wrap="square" lIns="45720" rIns="45720" tIns="22860" bIns="22860" anchor="ctr">
+            <a:spAutoFit/>
+          </a:bodyPr>
+          <a:lstStyle/>
+          <a:p>
+            <a:pPr algn="l"/>
+            <a:r>
+              <a:rPr sz="2000" b="1">
+                <a:solidFill>
+                  <a:srgbClr val="333333"/>
+                </a:solidFill>
+                <a:latin typeface="Yu Gothic"/>
+              </a:rPr>
+              <a:t>5/5</a:t>
+            </a:r>
+          </a:p>
+        </p:txBody>
+      </p:sp>
+      <p:sp>
+        <p:nvSpPr>
+          <p:cNvPr id="10" name="TextBox 9"/>
+          <p:cNvSpPr txBox="1"/>
+          <p:nvPr/>
+        </p:nvSpPr>
+        <p:spPr>
+          <a:xfrm>
+            <a:off x="6035040" y="2916660"/>
+            <a:ext cx="5943600" cy="365760"/>
+          </a:xfrm>
+          <a:prstGeom prst="rect">
+            <a:avLst/>
+          </a:prstGeom>
+          <a:noFill/>
+        </p:spPr>
+        <p:txBody>
+          <a:bodyPr wrap="square" lIns="45720" rIns="45720" tIns="22860" bIns="22860" anchor="t">
+            <a:spAutoFit/>
+          </a:bodyPr>
+          <a:lstStyle/>
+          <a:p>
+            <a:pPr algn="l"/>
+            <a:r>
+              <a:rPr sz="1400" b="0">
+                <a:solidFill>
+                  <a:srgbClr val="666666"/>
+                </a:solidFill>
+                <a:latin typeface="Yu Gothic"/>
+              </a:rPr>
+              <a:t>すべてクリアすると 5/5 になる</a:t>
+            </a:r>
+          </a:p>
+        </p:txBody>
+      </p:sp>
+      <p:sp>
+        <p:nvSpPr>
+          <p:cNvPr id="11" name="Rounded Rectangle 10"/>
+          <p:cNvSpPr/>
+          <p:nvPr/>
+        </p:nvSpPr>
+        <p:spPr>
+          <a:xfrm>
+            <a:off x="2727606" y="3654354"/>
+            <a:ext cx="335919" cy="2066339"/>
+          </a:xfrm>
+          <a:prstGeom prst="roundRect">
+            <a:avLst>
+              <a:gd name="adj" fmla="val 12000"/>
+            </a:avLst>
+          </a:prstGeom>
+          <a:noFill/>
+          <a:ln w="38100">
+            <a:solidFill>
+              <a:srgbClr val="4CAF6A"/>
+            </a:solidFill>
+          </a:ln>
+          <a:effectLst/>
+        </p:spPr>
+        <p:style>
+          <a:lnRef idx="1">
+            <a:schemeClr val="accent1"/>
+          </a:lnRef>
+          <a:fillRef idx="3">
+            <a:schemeClr val="accent1"/>
+          </a:fillRef>
+          <a:effectRef idx="2">
+            <a:schemeClr val="accent1"/>
+          </a:effectRef>
+          <a:fontRef idx="minor">
+            <a:schemeClr val="lt1"/>
+          </a:fontRef>
+        </p:style>
+        <p:txBody>
+          <a:bodyPr rtlCol="0" anchor="ctr"/>
+          <a:lstStyle/>
+          <a:p>
+            <a:pPr algn="ctr"/>
+          </a:p>
+        </p:txBody>
+      </p:sp>
+      <p:cxnSp>
+        <p:nvCxnSpPr>
+          <p:cNvPr id="12" name="Connector 11"/>
+          <p:cNvCxnSpPr/>
+          <p:nvPr/>
+        </p:nvCxnSpPr>
+        <p:spPr>
+          <a:xfrm>
+            <a:off x="3063525" y="4687524"/>
+            <a:ext cx="2377155" cy="0"/>
+          </a:xfrm>
+          <a:prstGeom prst="line">
+            <a:avLst/>
+          </a:prstGeom>
+          <a:ln w="22225">
+            <a:solidFill>
+              <a:srgbClr val="4CAF6A"/>
+            </a:solidFill>
+          </a:ln>
+        </p:spPr>
+        <p:style>
+          <a:lnRef idx="2">
+            <a:schemeClr val="accent1"/>
+          </a:lnRef>
+          <a:fillRef idx="0">
+            <a:schemeClr val="accent1"/>
+          </a:fillRef>
+          <a:effectRef idx="1">
+            <a:schemeClr val="accent1"/>
+          </a:effectRef>
+          <a:fontRef idx="minor">
+            <a:schemeClr val="tx1"/>
+          </a:fontRef>
+        </p:style>
+      </p:cxnSp>
+      <p:sp>
+        <p:nvSpPr>
+          <p:cNvPr id="13" name="Oval 12"/>
+          <p:cNvSpPr/>
+          <p:nvPr/>
+        </p:nvSpPr>
+        <p:spPr>
+          <a:xfrm>
+            <a:off x="5477256" y="4495500"/>
+            <a:ext cx="384048" cy="384048"/>
+          </a:xfrm>
+          <a:prstGeom prst="ellipse">
+            <a:avLst/>
+          </a:prstGeom>
+          <a:solidFill>
+            <a:srgbClr val="4CAF6A"/>
+          </a:solidFill>
+          <a:ln w="19050">
+            <a:solidFill>
+              <a:srgbClr val="FFFFFF"/>
+            </a:solidFill>
+          </a:ln>
+          <a:effectLst/>
+        </p:spPr>
+        <p:style>
+          <a:lnRef idx="1">
+            <a:schemeClr val="accent1"/>
+          </a:lnRef>
+          <a:fillRef idx="3">
+            <a:schemeClr val="accent1"/>
+          </a:fillRef>
+          <a:effectRef idx="2">
+            <a:schemeClr val="accent1"/>
+          </a:effectRef>
+          <a:fontRef idx="minor">
+            <a:schemeClr val="lt1"/>
+          </a:fontRef>
+        </p:style>
+        <p:txBody>
+          <a:bodyPr rtlCol="0" anchor="ctr" lIns="0" rIns="0" tIns="0" bIns="0"/>
+          <a:lstStyle/>
+          <a:p>
+            <a:pPr algn="ctr"/>
+            <a:r>
+              <a:rPr sz="1400" b="1">
+                <a:solidFill>
+                  <a:srgbClr val="FFFFFF"/>
+                </a:solidFill>
+                <a:latin typeface="Yu Gothic"/>
+              </a:rPr>
+              <a:t>2</a:t>
+            </a:r>
+          </a:p>
+        </p:txBody>
+      </p:sp>
+      <p:sp>
+        <p:nvSpPr>
+          <p:cNvPr id="14" name="TextBox 13"/>
+          <p:cNvSpPr txBox="1"/>
+          <p:nvPr/>
+        </p:nvSpPr>
+        <p:spPr>
+          <a:xfrm>
+            <a:off x="6035040" y="4413204"/>
+            <a:ext cx="5943600" cy="411480"/>
+          </a:xfrm>
+          <a:prstGeom prst="rect">
+            <a:avLst/>
+          </a:prstGeom>
+          <a:noFill/>
+        </p:spPr>
+        <p:txBody>
+          <a:bodyPr wrap="square" lIns="45720" rIns="45720" tIns="22860" bIns="22860" anchor="ctr">
+            <a:spAutoFit/>
+          </a:bodyPr>
+          <a:lstStyle/>
+          <a:p>
+            <a:pPr algn="l"/>
+            <a:r>
+              <a:rPr sz="2000" b="1">
+                <a:solidFill>
+                  <a:srgbClr val="333333"/>
+                </a:solidFill>
+                <a:latin typeface="Yu Gothic"/>
+              </a:rPr>
+              <a:t>4つとも「完了」</a:t>
+            </a:r>
+          </a:p>
+        </p:txBody>
+      </p:sp>
+      <p:sp>
+        <p:nvSpPr>
+          <p:cNvPr id="15" name="TextBox 14"/>
+          <p:cNvSpPr txBox="1"/>
+          <p:nvPr/>
+        </p:nvSpPr>
+        <p:spPr>
+          <a:xfrm>
+            <a:off x="6035040" y="4797252"/>
+            <a:ext cx="5943600" cy="365760"/>
+          </a:xfrm>
+          <a:prstGeom prst="rect">
+            <a:avLst/>
+          </a:prstGeom>
+          <a:noFill/>
+        </p:spPr>
+        <p:txBody>
+          <a:bodyPr wrap="square" lIns="45720" rIns="45720" tIns="22860" bIns="22860" anchor="t">
+            <a:spAutoFit/>
+          </a:bodyPr>
+          <a:lstStyle/>
+          <a:p>
+            <a:pPr algn="l"/>
+            <a:r>
+              <a:rPr sz="1400" b="0">
+                <a:solidFill>
+                  <a:srgbClr val="666666"/>
+                </a:solidFill>
+                <a:latin typeface="Yu Gothic"/>
+              </a:rPr>
+              <a:t>4つのガイダンスがすべて完了</a:t>
+            </a:r>
+          </a:p>
+        </p:txBody>
+      </p:sp>
+    </p:spTree>
+  </p:cSld>
+  <p:clrMapOvr>
+    <a:masterClrMapping/>
+  </p:clrMapOvr>
+</p:sld>
+</file>
+
+<file path=ppt/slides/slide34.xml><?xml version="1.0" encoding="utf-8"?>
+<p:sld xmlns:a="http://schemas.openxmlformats.org/drawingml/2006/main" xmlns:p="http://schemas.openxmlformats.org/presentationml/2006/main" xmlns:r="http://schemas.openxmlformats.org/officeDocument/2006/relationships">
+  <p:cSld>
+    <p:spTree>
+      <p:nvGrpSpPr>
+        <p:cNvPr id="1" name=""/>
+        <p:cNvGrpSpPr/>
+        <p:nvPr/>
+      </p:nvGrpSpPr>
+      <p:grpSpPr/>
+      <p:sp>
+        <p:nvSpPr>
+          <p:cNvPr id="2" name="Rounded Rectangle 1"/>
+          <p:cNvSpPr/>
+          <p:nvPr/>
+        </p:nvSpPr>
+        <p:spPr>
+          <a:xfrm>
+            <a:off x="411480" y="777240"/>
+            <a:ext cx="502920" cy="384048"/>
+          </a:xfrm>
+          <a:prstGeom prst="roundRect">
+            <a:avLst>
+              <a:gd name="adj" fmla="val 8000"/>
+            </a:avLst>
+          </a:prstGeom>
+          <a:solidFill>
+            <a:srgbClr val="4FB6BE"/>
+          </a:solidFill>
+          <a:ln>
+            <a:noFill/>
+          </a:ln>
+          <a:effectLst/>
+        </p:spPr>
+        <p:style>
+          <a:lnRef idx="1">
+            <a:schemeClr val="accent1"/>
+          </a:lnRef>
+          <a:fillRef idx="3">
+            <a:schemeClr val="accent1"/>
+          </a:fillRef>
+          <a:effectRef idx="2">
+            <a:schemeClr val="accent1"/>
+          </a:effectRef>
+          <a:fontRef idx="minor">
+            <a:schemeClr val="lt1"/>
+          </a:fontRef>
+        </p:style>
+        <p:txBody>
+          <a:bodyPr rtlCol="0" anchor="ctr"/>
+          <a:lstStyle/>
+          <a:p>
+            <a:pPr algn="ctr"/>
+          </a:p>
+        </p:txBody>
+      </p:sp>
+      <p:sp>
+        <p:nvSpPr>
+          <p:cNvPr id="3" name="TextBox 2"/>
+          <p:cNvSpPr txBox="1"/>
+          <p:nvPr/>
+        </p:nvSpPr>
+        <p:spPr>
+          <a:xfrm>
+            <a:off x="411480" y="777240"/>
+            <a:ext cx="502920" cy="384048"/>
+          </a:xfrm>
+          <a:prstGeom prst="rect">
+            <a:avLst/>
+          </a:prstGeom>
+          <a:noFill/>
+        </p:spPr>
+        <p:txBody>
+          <a:bodyPr wrap="square" lIns="45720" rIns="45720" tIns="22860" bIns="22860" anchor="ctr">
+            <a:spAutoFit/>
+          </a:bodyPr>
+          <a:lstStyle/>
+          <a:p>
+            <a:pPr algn="ctr"/>
+            <a:r>
+              <a:rPr sz="1200" b="1">
+                <a:solidFill>
+                  <a:srgbClr val="FFFFFF"/>
+                </a:solidFill>
+                <a:latin typeface="Yu Gothic"/>
+              </a:rPr>
+              <a:t>④-8</a:t>
+            </a:r>
+          </a:p>
+        </p:txBody>
+      </p:sp>
+      <p:sp>
+        <p:nvSpPr>
+          <p:cNvPr id="4" name="TextBox 3"/>
+          <p:cNvSpPr txBox="1"/>
+          <p:nvPr/>
+        </p:nvSpPr>
+        <p:spPr>
+          <a:xfrm>
+            <a:off x="1078992" y="777240"/>
+            <a:ext cx="10607040" cy="384048"/>
+          </a:xfrm>
+          <a:prstGeom prst="rect">
+            <a:avLst/>
+          </a:prstGeom>
+          <a:noFill/>
+        </p:spPr>
+        <p:txBody>
+          <a:bodyPr wrap="square" lIns="45720" rIns="45720" tIns="22860" bIns="22860" anchor="ctr">
+            <a:spAutoFit/>
+          </a:bodyPr>
+          <a:lstStyle/>
+          <a:p>
+            <a:pPr algn="l"/>
+            <a:r>
+              <a:rPr sz="2000" b="1">
+                <a:solidFill>
+                  <a:srgbClr val="333333"/>
+                </a:solidFill>
+                <a:latin typeface="Yu Gothic"/>
+              </a:rPr>
+              <a:t>ホームで「100%」を確認</a:t>
+            </a:r>
+          </a:p>
+        </p:txBody>
+      </p:sp>
+      <p:pic>
+        <p:nvPicPr>
+          <p:cNvPr id="5" name="Picture 4" descr="d17.jpg"/>
+          <p:cNvPicPr>
+            <a:picLocks noChangeAspect="1"/>
+          </p:cNvPicPr>
+          <p:nvPr/>
+        </p:nvPicPr>
+        <p:blipFill>
+          <a:blip r:embed="rId2"/>
+          <a:stretch>
+            <a:fillRect/>
+          </a:stretch>
+        </p:blipFill>
+        <p:spPr>
+          <a:xfrm>
+            <a:off x="914400" y="1325880"/>
+            <a:ext cx="2281509" cy="4937760"/>
+          </a:xfrm>
+          <a:prstGeom prst="rect">
+            <a:avLst/>
+          </a:prstGeom>
+          <a:ln w="12700">
+            <a:solidFill>
+              <a:srgbClr val="BBBBBB"/>
+            </a:solidFill>
+          </a:ln>
+        </p:spPr>
+      </p:pic>
+      <p:sp>
+        <p:nvSpPr>
+          <p:cNvPr id="6" name="Rounded Rectangle 5"/>
+          <p:cNvSpPr/>
+          <p:nvPr/>
+        </p:nvSpPr>
+        <p:spPr>
+          <a:xfrm>
+            <a:off x="997185" y="2174679"/>
+            <a:ext cx="542578" cy="661062"/>
+          </a:xfrm>
+          <a:prstGeom prst="roundRect">
+            <a:avLst>
+              <a:gd name="adj" fmla="val 12000"/>
+            </a:avLst>
+          </a:prstGeom>
+          <a:noFill/>
+          <a:ln w="38100">
+            <a:solidFill>
+              <a:srgbClr val="4CAF6A"/>
+            </a:solidFill>
+          </a:ln>
+          <a:effectLst/>
+        </p:spPr>
+        <p:style>
+          <a:lnRef idx="1">
+            <a:schemeClr val="accent1"/>
+          </a:lnRef>
+          <a:fillRef idx="3">
+            <a:schemeClr val="accent1"/>
+          </a:fillRef>
+          <a:effectRef idx="2">
+            <a:schemeClr val="accent1"/>
+          </a:effectRef>
+          <a:fontRef idx="minor">
+            <a:schemeClr val="lt1"/>
+          </a:fontRef>
+        </p:style>
+        <p:txBody>
+          <a:bodyPr rtlCol="0" anchor="ctr"/>
+          <a:lstStyle/>
+          <a:p>
+            <a:pPr algn="ctr"/>
+          </a:p>
+        </p:txBody>
+      </p:sp>
+      <p:cxnSp>
+        <p:nvCxnSpPr>
+          <p:cNvPr id="7" name="Connector 6"/>
+          <p:cNvCxnSpPr/>
+          <p:nvPr/>
+        </p:nvCxnSpPr>
+        <p:spPr>
+          <a:xfrm>
+            <a:off x="1539763" y="2505211"/>
+            <a:ext cx="3900917" cy="0"/>
+          </a:xfrm>
+          <a:prstGeom prst="line">
+            <a:avLst/>
+          </a:prstGeom>
+          <a:ln w="22225">
+            <a:solidFill>
+              <a:srgbClr val="4CAF6A"/>
+            </a:solidFill>
+          </a:ln>
+        </p:spPr>
+        <p:style>
+          <a:lnRef idx="2">
+            <a:schemeClr val="accent1"/>
+          </a:lnRef>
+          <a:fillRef idx="0">
+            <a:schemeClr val="accent1"/>
+          </a:fillRef>
+          <a:effectRef idx="1">
+            <a:schemeClr val="accent1"/>
+          </a:effectRef>
+          <a:fontRef idx="minor">
+            <a:schemeClr val="tx1"/>
+          </a:fontRef>
+        </p:style>
+      </p:cxnSp>
+      <p:sp>
+        <p:nvSpPr>
+          <p:cNvPr id="8" name="Oval 7"/>
+          <p:cNvSpPr/>
+          <p:nvPr/>
+        </p:nvSpPr>
+        <p:spPr>
+          <a:xfrm>
+            <a:off x="5477256" y="2313187"/>
+            <a:ext cx="384048" cy="384048"/>
+          </a:xfrm>
+          <a:prstGeom prst="ellipse">
+            <a:avLst/>
+          </a:prstGeom>
+          <a:solidFill>
+            <a:srgbClr val="4CAF6A"/>
+          </a:solidFill>
+          <a:ln w="19050">
+            <a:solidFill>
+              <a:srgbClr val="FFFFFF"/>
+            </a:solidFill>
+          </a:ln>
+          <a:effectLst/>
+        </p:spPr>
+        <p:style>
+          <a:lnRef idx="1">
+            <a:schemeClr val="accent1"/>
+          </a:lnRef>
+          <a:fillRef idx="3">
+            <a:schemeClr val="accent1"/>
+          </a:fillRef>
+          <a:effectRef idx="2">
+            <a:schemeClr val="accent1"/>
+          </a:effectRef>
+          <a:fontRef idx="minor">
+            <a:schemeClr val="lt1"/>
+          </a:fontRef>
+        </p:style>
+        <p:txBody>
+          <a:bodyPr rtlCol="0" anchor="ctr" lIns="0" rIns="0" tIns="0" bIns="0"/>
+          <a:lstStyle/>
+          <a:p>
+            <a:pPr algn="ctr"/>
+            <a:r>
+              <a:rPr sz="1400" b="1">
+                <a:solidFill>
+                  <a:srgbClr val="FFFFFF"/>
+                </a:solidFill>
+                <a:latin typeface="Yu Gothic"/>
+              </a:rPr>
+              <a:t>1</a:t>
+            </a:r>
+          </a:p>
+        </p:txBody>
+      </p:sp>
+      <p:sp>
+        <p:nvSpPr>
+          <p:cNvPr id="9" name="TextBox 8"/>
+          <p:cNvSpPr txBox="1"/>
+          <p:nvPr/>
+        </p:nvSpPr>
+        <p:spPr>
+          <a:xfrm>
+            <a:off x="6035040" y="2230891"/>
+            <a:ext cx="5943600" cy="411480"/>
+          </a:xfrm>
+          <a:prstGeom prst="rect">
+            <a:avLst/>
+          </a:prstGeom>
+          <a:noFill/>
+        </p:spPr>
+        <p:txBody>
+          <a:bodyPr wrap="square" lIns="45720" rIns="45720" tIns="22860" bIns="22860" anchor="ctr">
+            <a:spAutoFit/>
+          </a:bodyPr>
+          <a:lstStyle/>
+          <a:p>
+            <a:pPr algn="l"/>
+            <a:r>
+              <a:rPr sz="2000" b="1">
+                <a:solidFill>
+                  <a:srgbClr val="333333"/>
+                </a:solidFill>
+                <a:latin typeface="Yu Gothic"/>
+              </a:rPr>
+              <a:t>完了 100%</a:t>
+            </a:r>
+          </a:p>
+        </p:txBody>
+      </p:sp>
+      <p:sp>
+        <p:nvSpPr>
+          <p:cNvPr id="10" name="TextBox 9"/>
+          <p:cNvSpPr txBox="1"/>
+          <p:nvPr/>
+        </p:nvSpPr>
+        <p:spPr>
+          <a:xfrm>
+            <a:off x="6035040" y="2614939"/>
+            <a:ext cx="5943600" cy="365760"/>
+          </a:xfrm>
+          <a:prstGeom prst="rect">
+            <a:avLst/>
+          </a:prstGeom>
+          <a:noFill/>
+        </p:spPr>
+        <p:txBody>
+          <a:bodyPr wrap="square" lIns="45720" rIns="45720" tIns="22860" bIns="22860" anchor="t">
+            <a:spAutoFit/>
+          </a:bodyPr>
+          <a:lstStyle/>
+          <a:p>
+            <a:pPr algn="l"/>
+            <a:r>
+              <a:rPr sz="1400" b="0">
+                <a:solidFill>
+                  <a:srgbClr val="666666"/>
+                </a:solidFill>
+                <a:latin typeface="Yu Gothic"/>
+              </a:rPr>
+              <a:t>すべてクリアすると、100% になる</a:t>
+            </a:r>
+          </a:p>
+        </p:txBody>
+      </p:sp>
+    </p:spTree>
+  </p:cSld>
+  <p:clrMapOvr>
+    <a:masterClrMapping/>
+  </p:clrMapOvr>
+</p:sld>
+</file>
+
+<file path=ppt/slides/slide35.xml><?xml version="1.0" encoding="utf-8"?>
+<p:sld xmlns:a="http://schemas.openxmlformats.org/drawingml/2006/main" xmlns:p="http://schemas.openxmlformats.org/presentationml/2006/main" xmlns:r="http://schemas.openxmlformats.org/officeDocument/2006/relationships">
+  <p:cSld>
+    <p:spTree>
+      <p:nvGrpSpPr>
+        <p:cNvPr id="1" name=""/>
+        <p:cNvGrpSpPr/>
+        <p:nvPr/>
+      </p:nvGrpSpPr>
+      <p:grpSpPr/>
+      <p:sp>
+        <p:nvSpPr>
+          <p:cNvPr id="2" name="Rounded Rectangle 1"/>
+          <p:cNvSpPr/>
+          <p:nvPr/>
+        </p:nvSpPr>
+        <p:spPr>
+          <a:xfrm>
+            <a:off x="411480" y="777240"/>
+            <a:ext cx="502920" cy="384048"/>
+          </a:xfrm>
+          <a:prstGeom prst="roundRect">
+            <a:avLst>
+              <a:gd name="adj" fmla="val 8000"/>
+            </a:avLst>
+          </a:prstGeom>
+          <a:solidFill>
+            <a:srgbClr val="4FB6BE"/>
+          </a:solidFill>
+          <a:ln>
+            <a:noFill/>
+          </a:ln>
+          <a:effectLst/>
+        </p:spPr>
+        <p:style>
+          <a:lnRef idx="1">
+            <a:schemeClr val="accent1"/>
+          </a:lnRef>
+          <a:fillRef idx="3">
+            <a:schemeClr val="accent1"/>
+          </a:fillRef>
+          <a:effectRef idx="2">
+            <a:schemeClr val="accent1"/>
+          </a:effectRef>
+          <a:fontRef idx="minor">
+            <a:schemeClr val="lt1"/>
+          </a:fontRef>
+        </p:style>
+        <p:txBody>
+          <a:bodyPr rtlCol="0" anchor="ctr"/>
+          <a:lstStyle/>
+          <a:p>
+            <a:pPr algn="ctr"/>
+          </a:p>
+        </p:txBody>
+      </p:sp>
+      <p:sp>
+        <p:nvSpPr>
+          <p:cNvPr id="3" name="TextBox 2"/>
+          <p:cNvSpPr txBox="1"/>
+          <p:nvPr/>
+        </p:nvSpPr>
+        <p:spPr>
+          <a:xfrm>
+            <a:off x="411480" y="777240"/>
+            <a:ext cx="502920" cy="384048"/>
+          </a:xfrm>
+          <a:prstGeom prst="rect">
+            <a:avLst/>
+          </a:prstGeom>
+          <a:noFill/>
+        </p:spPr>
+        <p:txBody>
+          <a:bodyPr wrap="square" lIns="45720" rIns="45720" tIns="22860" bIns="22860" anchor="ctr">
+            <a:spAutoFit/>
+          </a:bodyPr>
+          <a:lstStyle/>
+          <a:p>
+            <a:pPr algn="ctr"/>
+            <a:r>
+              <a:rPr sz="1200" b="1">
+                <a:solidFill>
+                  <a:srgbClr val="FFFFFF"/>
+                </a:solidFill>
+                <a:latin typeface="Yu Gothic"/>
+              </a:rPr>
+              <a:t>④-9</a:t>
+            </a:r>
+          </a:p>
+        </p:txBody>
+      </p:sp>
+      <p:sp>
+        <p:nvSpPr>
+          <p:cNvPr id="4" name="TextBox 3"/>
+          <p:cNvSpPr txBox="1"/>
+          <p:nvPr/>
+        </p:nvSpPr>
+        <p:spPr>
+          <a:xfrm>
+            <a:off x="1078992" y="777240"/>
+            <a:ext cx="10607040" cy="384048"/>
+          </a:xfrm>
+          <a:prstGeom prst="rect">
+            <a:avLst/>
+          </a:prstGeom>
+          <a:noFill/>
+        </p:spPr>
+        <p:txBody>
+          <a:bodyPr wrap="square" lIns="45720" rIns="45720" tIns="22860" bIns="22860" anchor="ctr">
+            <a:spAutoFit/>
+          </a:bodyPr>
+          <a:lstStyle/>
+          <a:p>
+            <a:pPr algn="l"/>
+            <a:r>
+              <a:rPr sz="2000" b="1">
+                <a:solidFill>
+                  <a:srgbClr val="333333"/>
+                </a:solidFill>
+                <a:latin typeface="Yu Gothic"/>
+              </a:rPr>
+              <a:t>100%になったら登録チームに報告</a:t>
             </a:r>
           </a:p>
         </p:txBody>
@@ -23993,7 +24939,7 @@
                 </a:solidFill>
                 <a:latin typeface="Yu Gothic"/>
               </a:rPr>
-              <a:t>すべてクリアすると、完了が 100% になる</a:t>
+              <a:t>ホームで、完了が 100% になっているか確認</a:t>
             </a:r>
           </a:p>
         </p:txBody>

--- a/out/登録の流れ_書類準備まで.pptx
+++ b/out/登録の流れ_書類準備まで.pptx
@@ -13,6 +13,12 @@
     <p:sldId id="291" r:id="rId44"/>
     <p:sldId id="258" r:id="rId7"/>
     <p:sldId id="259" r:id="rId8"/>
+    <p:sldId id="295" r:id="rId48"/>
+    <p:sldId id="296" r:id="rId49"/>
+    <p:sldId id="297" r:id="rId50"/>
+    <p:sldId id="298" r:id="rId51"/>
+    <p:sldId id="299" r:id="rId52"/>
+    <p:sldId id="300" r:id="rId53"/>
     <p:sldId id="292" r:id="rId45"/>
     <p:sldId id="260" r:id="rId9"/>
     <p:sldId id="261" r:id="rId10"/>
@@ -22773,6 +22779,1092 @@
 </p:sld>
 </file>
 
+<file path=ppt/slides/slide39.xml><?xml version="1.0" encoding="utf-8"?>
+<p:sld xmlns:a="http://schemas.openxmlformats.org/drawingml/2006/main" xmlns:p="http://schemas.openxmlformats.org/presentationml/2006/main" xmlns:r="http://schemas.openxmlformats.org/officeDocument/2006/relationships">
+  <p:cSld>
+    <p:spTree>
+      <p:nvGrpSpPr>
+        <p:cNvPr id="1" name=""/>
+        <p:cNvGrpSpPr/>
+        <p:nvPr/>
+      </p:nvGrpSpPr>
+      <p:grpSpPr/>
+      <p:sp>
+        <p:nvSpPr>
+          <p:cNvPr id="2" name="Rounded Rectangle 1"/>
+          <p:cNvSpPr/>
+          <p:nvPr/>
+        </p:nvSpPr>
+        <p:spPr>
+          <a:xfrm>
+            <a:off x="411480" y="777240"/>
+            <a:ext cx="502920" cy="384048"/>
+          </a:xfrm>
+          <a:prstGeom prst="roundRect">
+            <a:avLst>
+              <a:gd name="adj" fmla="val 8000"/>
+            </a:avLst>
+          </a:prstGeom>
+          <a:solidFill>
+            <a:srgbClr val="4FB6BE"/>
+          </a:solidFill>
+          <a:ln>
+            <a:noFill/>
+          </a:ln>
+          <a:effectLst/>
+        </p:spPr>
+        <p:style>
+          <a:lnRef idx="1">
+            <a:schemeClr val="accent1"/>
+          </a:lnRef>
+          <a:fillRef idx="3">
+            <a:schemeClr val="accent1"/>
+          </a:fillRef>
+          <a:effectRef idx="2">
+            <a:schemeClr val="accent1"/>
+          </a:effectRef>
+          <a:fontRef idx="minor">
+            <a:schemeClr val="lt1"/>
+          </a:fontRef>
+        </p:style>
+        <p:txBody>
+          <a:bodyPr rtlCol="0" anchor="ctr"/>
+          <a:lstStyle/>
+          <a:p>
+            <a:pPr algn="ctr"/>
+          </a:p>
+        </p:txBody>
+      </p:sp>
+      <p:sp>
+        <p:nvSpPr>
+          <p:cNvPr id="3" name="TextBox 2"/>
+          <p:cNvSpPr txBox="1"/>
+          <p:nvPr/>
+        </p:nvSpPr>
+        <p:spPr>
+          <a:xfrm>
+            <a:off x="411480" y="777240"/>
+            <a:ext cx="502920" cy="384048"/>
+          </a:xfrm>
+          <a:prstGeom prst="rect">
+            <a:avLst/>
+          </a:prstGeom>
+          <a:noFill/>
+        </p:spPr>
+        <p:txBody>
+          <a:bodyPr wrap="square" lIns="45720" rIns="45720" anchor="ctr">
+            <a:spAutoFit/>
+          </a:bodyPr>
+          <a:lstStyle/>
+          <a:p>
+            <a:pPr algn="ctr"/>
+            <a:r>
+              <a:rPr sz="1200" b="1">
+                <a:solidFill>
+                  <a:srgbClr val="FFFFFF"/>
+                </a:solidFill>
+                <a:latin typeface="Yu Gothic"/>
+              </a:rPr>
+              <a:t>①</a:t>
+            </a:r>
+          </a:p>
+        </p:txBody>
+      </p:sp>
+      <p:sp>
+        <p:nvSpPr>
+          <p:cNvPr id="4" name="TextBox 3"/>
+          <p:cNvSpPr txBox="1"/>
+          <p:nvPr/>
+        </p:nvSpPr>
+        <p:spPr>
+          <a:xfrm>
+            <a:off x="1078992" y="777240"/>
+            <a:ext cx="10607040" cy="384048"/>
+          </a:xfrm>
+          <a:prstGeom prst="rect">
+            <a:avLst/>
+          </a:prstGeom>
+          <a:noFill/>
+        </p:spPr>
+        <p:txBody>
+          <a:bodyPr wrap="square" lIns="45720" rIns="45720" anchor="ctr">
+            <a:spAutoFit/>
+          </a:bodyPr>
+          <a:lstStyle/>
+          <a:p>
+            <a:pPr algn="l"/>
+            <a:r>
+              <a:rPr sz="2000" b="1">
+                <a:solidFill>
+                  <a:srgbClr val="333333"/>
+                </a:solidFill>
+                <a:latin typeface="Yu Gothic"/>
+              </a:rPr>
+              <a:t>車両書類の確認ポイント</a:t>
+            </a:r>
+          </a:p>
+        </p:txBody>
+      </p:sp>
+      <p:sp>
+        <p:nvSpPr>
+          <p:cNvPr id="5" name="Rounded Rectangle 4"/>
+          <p:cNvSpPr/>
+          <p:nvPr/>
+        </p:nvSpPr>
+        <p:spPr>
+          <a:xfrm>
+            <a:off x="411480" y="1325880"/>
+            <a:ext cx="3639312" cy="3931920"/>
+          </a:xfrm>
+          <a:prstGeom prst="roundRect">
+            <a:avLst>
+              <a:gd name="adj" fmla="val 8000"/>
+            </a:avLst>
+          </a:prstGeom>
+          <a:solidFill>
+            <a:srgbClr val="E3F4F6"/>
+          </a:solidFill>
+          <a:ln w="19050">
+            <a:solidFill>
+              <a:srgbClr val="4FB6BE"/>
+            </a:solidFill>
+          </a:ln>
+          <a:effectLst/>
+        </p:spPr>
+        <p:style>
+          <a:lnRef idx="1">
+            <a:schemeClr val="accent1"/>
+          </a:lnRef>
+          <a:fillRef idx="3">
+            <a:schemeClr val="accent1"/>
+          </a:fillRef>
+          <a:effectRef idx="2">
+            <a:schemeClr val="accent1"/>
+          </a:effectRef>
+          <a:fontRef idx="minor">
+            <a:schemeClr val="lt1"/>
+          </a:fontRef>
+        </p:style>
+        <p:txBody>
+          <a:bodyPr rtlCol="0" anchor="ctr"/>
+          <a:lstStyle/>
+          <a:p>
+            <a:pPr algn="ctr"/>
+          </a:p>
+        </p:txBody>
+      </p:sp>
+      <p:sp>
+        <p:nvSpPr>
+          <p:cNvPr id="6" name="Rounded Rectangle 5"/>
+          <p:cNvSpPr/>
+          <p:nvPr/>
+        </p:nvSpPr>
+        <p:spPr>
+          <a:xfrm>
+            <a:off x="411480" y="1325880"/>
+            <a:ext cx="3639312" cy="502920"/>
+          </a:xfrm>
+          <a:prstGeom prst="roundRect">
+            <a:avLst>
+              <a:gd name="adj" fmla="val 8000"/>
+            </a:avLst>
+          </a:prstGeom>
+          <a:solidFill>
+            <a:srgbClr val="4FB6BE"/>
+          </a:solidFill>
+          <a:ln>
+            <a:noFill/>
+          </a:ln>
+          <a:effectLst/>
+        </p:spPr>
+        <p:style>
+          <a:lnRef idx="1">
+            <a:schemeClr val="accent1"/>
+          </a:lnRef>
+          <a:fillRef idx="3">
+            <a:schemeClr val="accent1"/>
+          </a:fillRef>
+          <a:effectRef idx="2">
+            <a:schemeClr val="accent1"/>
+          </a:effectRef>
+          <a:fontRef idx="minor">
+            <a:schemeClr val="lt1"/>
+          </a:fontRef>
+        </p:style>
+        <p:txBody>
+          <a:bodyPr rtlCol="0" anchor="ctr"/>
+          <a:lstStyle/>
+          <a:p>
+            <a:pPr algn="ctr"/>
+          </a:p>
+        </p:txBody>
+      </p:sp>
+      <p:sp>
+        <p:nvSpPr>
+          <p:cNvPr id="7" name="Rectangle 6"/>
+          <p:cNvSpPr/>
+          <p:nvPr/>
+        </p:nvSpPr>
+        <p:spPr>
+          <a:xfrm>
+            <a:off x="411480" y="1554480"/>
+            <a:ext cx="3639312" cy="274320"/>
+          </a:xfrm>
+          <a:prstGeom prst="rect">
+            <a:avLst/>
+          </a:prstGeom>
+          <a:solidFill>
+            <a:srgbClr val="4FB6BE"/>
+          </a:solidFill>
+          <a:ln>
+            <a:noFill/>
+          </a:ln>
+          <a:effectLst/>
+        </p:spPr>
+        <p:style>
+          <a:lnRef idx="1">
+            <a:schemeClr val="accent1"/>
+          </a:lnRef>
+          <a:fillRef idx="3">
+            <a:schemeClr val="accent1"/>
+          </a:fillRef>
+          <a:effectRef idx="2">
+            <a:schemeClr val="accent1"/>
+          </a:effectRef>
+          <a:fontRef idx="minor">
+            <a:schemeClr val="lt1"/>
+          </a:fontRef>
+        </p:style>
+        <p:txBody>
+          <a:bodyPr rtlCol="0" anchor="ctr"/>
+          <a:lstStyle/>
+          <a:p>
+            <a:pPr algn="ctr"/>
+          </a:p>
+        </p:txBody>
+      </p:sp>
+      <p:sp>
+        <p:nvSpPr>
+          <p:cNvPr id="8" name="TextBox 7"/>
+          <p:cNvSpPr txBox="1"/>
+          <p:nvPr/>
+        </p:nvSpPr>
+        <p:spPr>
+          <a:xfrm>
+            <a:off x="411480" y="1325880"/>
+            <a:ext cx="3639312" cy="502920"/>
+          </a:xfrm>
+          <a:prstGeom prst="rect">
+            <a:avLst/>
+          </a:prstGeom>
+          <a:noFill/>
+        </p:spPr>
+        <p:txBody>
+          <a:bodyPr wrap="square" lIns="45720" rIns="45720" anchor="ctr">
+            <a:spAutoFit/>
+          </a:bodyPr>
+          <a:lstStyle/>
+          <a:p>
+            <a:pPr algn="ctr"/>
+            <a:r>
+              <a:rPr sz="1600" b="1">
+                <a:solidFill>
+                  <a:srgbClr val="FFFFFF"/>
+                </a:solidFill>
+                <a:latin typeface="Yu Gothic"/>
+              </a:rPr>
+              <a:t>車検証</a:t>
+            </a:r>
+          </a:p>
+        </p:txBody>
+      </p:sp>
+      <p:sp>
+        <p:nvSpPr>
+          <p:cNvPr id="9" name="TextBox 8"/>
+          <p:cNvSpPr txBox="1"/>
+          <p:nvPr/>
+        </p:nvSpPr>
+        <p:spPr>
+          <a:xfrm>
+            <a:off x="548640" y="1965960"/>
+            <a:ext cx="3383280" cy="640080"/>
+          </a:xfrm>
+          <a:prstGeom prst="rect">
+            <a:avLst/>
+          </a:prstGeom>
+          <a:noFill/>
+        </p:spPr>
+        <p:txBody>
+          <a:bodyPr wrap="square" lIns="45720" rIns="45720" anchor="ctr">
+            <a:spAutoFit/>
+          </a:bodyPr>
+          <a:lstStyle/>
+          <a:p>
+            <a:pPr algn="l"/>
+            <a:r>
+              <a:rPr sz="1500" b="1">
+                <a:solidFill>
+                  <a:srgbClr val="333333"/>
+                </a:solidFill>
+                <a:latin typeface="Yu Gothic"/>
+              </a:rPr>
+              <a:t>✓ 使用者がご本人（持込の方）</a:t>
+            </a:r>
+          </a:p>
+        </p:txBody>
+      </p:sp>
+      <p:sp>
+        <p:nvSpPr>
+          <p:cNvPr id="10" name="TextBox 9"/>
+          <p:cNvSpPr txBox="1"/>
+          <p:nvPr/>
+        </p:nvSpPr>
+        <p:spPr>
+          <a:xfrm>
+            <a:off x="548640" y="2697480"/>
+            <a:ext cx="3383280" cy="640080"/>
+          </a:xfrm>
+          <a:prstGeom prst="rect">
+            <a:avLst/>
+          </a:prstGeom>
+          <a:noFill/>
+        </p:spPr>
+        <p:txBody>
+          <a:bodyPr wrap="square" lIns="45720" rIns="45720" anchor="ctr">
+            <a:spAutoFit/>
+          </a:bodyPr>
+          <a:lstStyle/>
+          <a:p>
+            <a:pPr algn="l"/>
+            <a:r>
+              <a:rPr sz="1500" b="1">
+                <a:solidFill>
+                  <a:srgbClr val="333333"/>
+                </a:solidFill>
+                <a:latin typeface="Yu Gothic"/>
+              </a:rPr>
+              <a:t>✓ 事業用になっている</a:t>
+            </a:r>
+          </a:p>
+        </p:txBody>
+      </p:sp>
+      <p:sp>
+        <p:nvSpPr>
+          <p:cNvPr id="11" name="TextBox 10"/>
+          <p:cNvSpPr txBox="1"/>
+          <p:nvPr/>
+        </p:nvSpPr>
+        <p:spPr>
+          <a:xfrm>
+            <a:off x="548640" y="3429000"/>
+            <a:ext cx="3383280" cy="640080"/>
+          </a:xfrm>
+          <a:prstGeom prst="rect">
+            <a:avLst/>
+          </a:prstGeom>
+          <a:noFill/>
+        </p:spPr>
+        <p:txBody>
+          <a:bodyPr wrap="square" lIns="45720" rIns="45720" anchor="ctr">
+            <a:spAutoFit/>
+          </a:bodyPr>
+          <a:lstStyle/>
+          <a:p>
+            <a:pPr algn="l"/>
+            <a:r>
+              <a:rPr sz="1500" b="1">
+                <a:solidFill>
+                  <a:srgbClr val="333333"/>
+                </a:solidFill>
+                <a:latin typeface="Yu Gothic"/>
+              </a:rPr>
+              <a:t>✓ 最大積載量が 350 になっている</a:t>
+            </a:r>
+          </a:p>
+        </p:txBody>
+      </p:sp>
+      <p:sp>
+        <p:nvSpPr>
+          <p:cNvPr id="12" name="TextBox 11"/>
+          <p:cNvSpPr txBox="1"/>
+          <p:nvPr/>
+        </p:nvSpPr>
+        <p:spPr>
+          <a:xfrm>
+            <a:off x="548640" y="4160520"/>
+            <a:ext cx="3383280" cy="640080"/>
+          </a:xfrm>
+          <a:prstGeom prst="rect">
+            <a:avLst/>
+          </a:prstGeom>
+          <a:noFill/>
+        </p:spPr>
+        <p:txBody>
+          <a:bodyPr wrap="square" lIns="45720" rIns="45720" anchor="ctr">
+            <a:spAutoFit/>
+          </a:bodyPr>
+          <a:lstStyle/>
+          <a:p>
+            <a:pPr algn="l"/>
+            <a:r>
+              <a:rPr sz="1500" b="1">
+                <a:solidFill>
+                  <a:srgbClr val="333333"/>
+                </a:solidFill>
+                <a:latin typeface="Yu Gothic"/>
+              </a:rPr>
+              <a:t>✓ 有効期限が切れていない</a:t>
+            </a:r>
+          </a:p>
+        </p:txBody>
+      </p:sp>
+      <p:sp>
+        <p:nvSpPr>
+          <p:cNvPr id="13" name="Rounded Rectangle 12"/>
+          <p:cNvSpPr/>
+          <p:nvPr/>
+        </p:nvSpPr>
+        <p:spPr>
+          <a:xfrm>
+            <a:off x="4233672" y="1325880"/>
+            <a:ext cx="3639312" cy="3931920"/>
+          </a:xfrm>
+          <a:prstGeom prst="roundRect">
+            <a:avLst>
+              <a:gd name="adj" fmla="val 8000"/>
+            </a:avLst>
+          </a:prstGeom>
+          <a:solidFill>
+            <a:srgbClr val="E8F1FB"/>
+          </a:solidFill>
+          <a:ln w="19050">
+            <a:solidFill>
+              <a:srgbClr val="126EC9"/>
+            </a:solidFill>
+          </a:ln>
+          <a:effectLst/>
+        </p:spPr>
+        <p:style>
+          <a:lnRef idx="1">
+            <a:schemeClr val="accent1"/>
+          </a:lnRef>
+          <a:fillRef idx="3">
+            <a:schemeClr val="accent1"/>
+          </a:fillRef>
+          <a:effectRef idx="2">
+            <a:schemeClr val="accent1"/>
+          </a:effectRef>
+          <a:fontRef idx="minor">
+            <a:schemeClr val="lt1"/>
+          </a:fontRef>
+        </p:style>
+        <p:txBody>
+          <a:bodyPr rtlCol="0" anchor="ctr"/>
+          <a:lstStyle/>
+          <a:p>
+            <a:pPr algn="ctr"/>
+          </a:p>
+        </p:txBody>
+      </p:sp>
+      <p:sp>
+        <p:nvSpPr>
+          <p:cNvPr id="14" name="Rounded Rectangle 13"/>
+          <p:cNvSpPr/>
+          <p:nvPr/>
+        </p:nvSpPr>
+        <p:spPr>
+          <a:xfrm>
+            <a:off x="4233672" y="1325880"/>
+            <a:ext cx="3639312" cy="502920"/>
+          </a:xfrm>
+          <a:prstGeom prst="roundRect">
+            <a:avLst>
+              <a:gd name="adj" fmla="val 8000"/>
+            </a:avLst>
+          </a:prstGeom>
+          <a:solidFill>
+            <a:srgbClr val="126EC9"/>
+          </a:solidFill>
+          <a:ln>
+            <a:noFill/>
+          </a:ln>
+          <a:effectLst/>
+        </p:spPr>
+        <p:style>
+          <a:lnRef idx="1">
+            <a:schemeClr val="accent1"/>
+          </a:lnRef>
+          <a:fillRef idx="3">
+            <a:schemeClr val="accent1"/>
+          </a:fillRef>
+          <a:effectRef idx="2">
+            <a:schemeClr val="accent1"/>
+          </a:effectRef>
+          <a:fontRef idx="minor">
+            <a:schemeClr val="lt1"/>
+          </a:fontRef>
+        </p:style>
+        <p:txBody>
+          <a:bodyPr rtlCol="0" anchor="ctr"/>
+          <a:lstStyle/>
+          <a:p>
+            <a:pPr algn="ctr"/>
+          </a:p>
+        </p:txBody>
+      </p:sp>
+      <p:sp>
+        <p:nvSpPr>
+          <p:cNvPr id="15" name="Rectangle 14"/>
+          <p:cNvSpPr/>
+          <p:nvPr/>
+        </p:nvSpPr>
+        <p:spPr>
+          <a:xfrm>
+            <a:off x="4233672" y="1554480"/>
+            <a:ext cx="3639312" cy="274320"/>
+          </a:xfrm>
+          <a:prstGeom prst="rect">
+            <a:avLst/>
+          </a:prstGeom>
+          <a:solidFill>
+            <a:srgbClr val="126EC9"/>
+          </a:solidFill>
+          <a:ln>
+            <a:noFill/>
+          </a:ln>
+          <a:effectLst/>
+        </p:spPr>
+        <p:style>
+          <a:lnRef idx="1">
+            <a:schemeClr val="accent1"/>
+          </a:lnRef>
+          <a:fillRef idx="3">
+            <a:schemeClr val="accent1"/>
+          </a:fillRef>
+          <a:effectRef idx="2">
+            <a:schemeClr val="accent1"/>
+          </a:effectRef>
+          <a:fontRef idx="minor">
+            <a:schemeClr val="lt1"/>
+          </a:fontRef>
+        </p:style>
+        <p:txBody>
+          <a:bodyPr rtlCol="0" anchor="ctr"/>
+          <a:lstStyle/>
+          <a:p>
+            <a:pPr algn="ctr"/>
+          </a:p>
+        </p:txBody>
+      </p:sp>
+      <p:sp>
+        <p:nvSpPr>
+          <p:cNvPr id="16" name="TextBox 15"/>
+          <p:cNvSpPr txBox="1"/>
+          <p:nvPr/>
+        </p:nvSpPr>
+        <p:spPr>
+          <a:xfrm>
+            <a:off x="4233672" y="1325880"/>
+            <a:ext cx="3639312" cy="502920"/>
+          </a:xfrm>
+          <a:prstGeom prst="rect">
+            <a:avLst/>
+          </a:prstGeom>
+          <a:noFill/>
+        </p:spPr>
+        <p:txBody>
+          <a:bodyPr wrap="square" lIns="45720" rIns="45720" anchor="ctr">
+            <a:spAutoFit/>
+          </a:bodyPr>
+          <a:lstStyle/>
+          <a:p>
+            <a:pPr algn="ctr"/>
+            <a:r>
+              <a:rPr sz="1600" b="1">
+                <a:solidFill>
+                  <a:srgbClr val="FFFFFF"/>
+                </a:solidFill>
+                <a:latin typeface="Yu Gothic"/>
+              </a:rPr>
+              <a:t>自賠責保険</a:t>
+            </a:r>
+          </a:p>
+        </p:txBody>
+      </p:sp>
+      <p:sp>
+        <p:nvSpPr>
+          <p:cNvPr id="17" name="TextBox 16"/>
+          <p:cNvSpPr txBox="1"/>
+          <p:nvPr/>
+        </p:nvSpPr>
+        <p:spPr>
+          <a:xfrm>
+            <a:off x="4370832" y="1965960"/>
+            <a:ext cx="3383280" cy="640080"/>
+          </a:xfrm>
+          <a:prstGeom prst="rect">
+            <a:avLst/>
+          </a:prstGeom>
+          <a:noFill/>
+        </p:spPr>
+        <p:txBody>
+          <a:bodyPr wrap="square" lIns="45720" rIns="45720" anchor="ctr">
+            <a:spAutoFit/>
+          </a:bodyPr>
+          <a:lstStyle/>
+          <a:p>
+            <a:pPr algn="l"/>
+            <a:r>
+              <a:rPr sz="1500" b="1">
+                <a:solidFill>
+                  <a:srgbClr val="333333"/>
+                </a:solidFill>
+                <a:latin typeface="Yu Gothic"/>
+              </a:rPr>
+              <a:t>✓ 有効期限が切れていない</a:t>
+            </a:r>
+          </a:p>
+        </p:txBody>
+      </p:sp>
+      <p:sp>
+        <p:nvSpPr>
+          <p:cNvPr id="18" name="TextBox 17"/>
+          <p:cNvSpPr txBox="1"/>
+          <p:nvPr/>
+        </p:nvSpPr>
+        <p:spPr>
+          <a:xfrm>
+            <a:off x="4370832" y="2697480"/>
+            <a:ext cx="3383280" cy="640080"/>
+          </a:xfrm>
+          <a:prstGeom prst="rect">
+            <a:avLst/>
+          </a:prstGeom>
+          <a:noFill/>
+        </p:spPr>
+        <p:txBody>
+          <a:bodyPr wrap="square" lIns="45720" rIns="45720" anchor="ctr">
+            <a:spAutoFit/>
+          </a:bodyPr>
+          <a:lstStyle/>
+          <a:p>
+            <a:pPr algn="l"/>
+            <a:r>
+              <a:rPr sz="1500" b="1">
+                <a:solidFill>
+                  <a:srgbClr val="333333"/>
+                </a:solidFill>
+                <a:latin typeface="Yu Gothic"/>
+              </a:rPr>
+              <a:t>✓ 車台番号が車検証と一致</a:t>
+            </a:r>
+          </a:p>
+        </p:txBody>
+      </p:sp>
+      <p:sp>
+        <p:nvSpPr>
+          <p:cNvPr id="19" name="Rounded Rectangle 18"/>
+          <p:cNvSpPr/>
+          <p:nvPr/>
+        </p:nvSpPr>
+        <p:spPr>
+          <a:xfrm>
+            <a:off x="8055863" y="1325880"/>
+            <a:ext cx="3639312" cy="3931920"/>
+          </a:xfrm>
+          <a:prstGeom prst="roundRect">
+            <a:avLst>
+              <a:gd name="adj" fmla="val 8000"/>
+            </a:avLst>
+          </a:prstGeom>
+          <a:solidFill>
+            <a:srgbClr val="FDECF3"/>
+          </a:solidFill>
+          <a:ln w="19050">
+            <a:solidFill>
+              <a:srgbClr val="E12A82"/>
+            </a:solidFill>
+          </a:ln>
+          <a:effectLst/>
+        </p:spPr>
+        <p:style>
+          <a:lnRef idx="1">
+            <a:schemeClr val="accent1"/>
+          </a:lnRef>
+          <a:fillRef idx="3">
+            <a:schemeClr val="accent1"/>
+          </a:fillRef>
+          <a:effectRef idx="2">
+            <a:schemeClr val="accent1"/>
+          </a:effectRef>
+          <a:fontRef idx="minor">
+            <a:schemeClr val="lt1"/>
+          </a:fontRef>
+        </p:style>
+        <p:txBody>
+          <a:bodyPr rtlCol="0" anchor="ctr"/>
+          <a:lstStyle/>
+          <a:p>
+            <a:pPr algn="ctr"/>
+          </a:p>
+        </p:txBody>
+      </p:sp>
+      <p:sp>
+        <p:nvSpPr>
+          <p:cNvPr id="20" name="Rounded Rectangle 19"/>
+          <p:cNvSpPr/>
+          <p:nvPr/>
+        </p:nvSpPr>
+        <p:spPr>
+          <a:xfrm>
+            <a:off x="8055863" y="1325880"/>
+            <a:ext cx="3639312" cy="502920"/>
+          </a:xfrm>
+          <a:prstGeom prst="roundRect">
+            <a:avLst>
+              <a:gd name="adj" fmla="val 8000"/>
+            </a:avLst>
+          </a:prstGeom>
+          <a:solidFill>
+            <a:srgbClr val="E12A82"/>
+          </a:solidFill>
+          <a:ln>
+            <a:noFill/>
+          </a:ln>
+          <a:effectLst/>
+        </p:spPr>
+        <p:style>
+          <a:lnRef idx="1">
+            <a:schemeClr val="accent1"/>
+          </a:lnRef>
+          <a:fillRef idx="3">
+            <a:schemeClr val="accent1"/>
+          </a:fillRef>
+          <a:effectRef idx="2">
+            <a:schemeClr val="accent1"/>
+          </a:effectRef>
+          <a:fontRef idx="minor">
+            <a:schemeClr val="lt1"/>
+          </a:fontRef>
+        </p:style>
+        <p:txBody>
+          <a:bodyPr rtlCol="0" anchor="ctr"/>
+          <a:lstStyle/>
+          <a:p>
+            <a:pPr algn="ctr"/>
+          </a:p>
+        </p:txBody>
+      </p:sp>
+      <p:sp>
+        <p:nvSpPr>
+          <p:cNvPr id="21" name="Rectangle 20"/>
+          <p:cNvSpPr/>
+          <p:nvPr/>
+        </p:nvSpPr>
+        <p:spPr>
+          <a:xfrm>
+            <a:off x="8055863" y="1554480"/>
+            <a:ext cx="3639312" cy="274320"/>
+          </a:xfrm>
+          <a:prstGeom prst="rect">
+            <a:avLst/>
+          </a:prstGeom>
+          <a:solidFill>
+            <a:srgbClr val="E12A82"/>
+          </a:solidFill>
+          <a:ln>
+            <a:noFill/>
+          </a:ln>
+          <a:effectLst/>
+        </p:spPr>
+        <p:style>
+          <a:lnRef idx="1">
+            <a:schemeClr val="accent1"/>
+          </a:lnRef>
+          <a:fillRef idx="3">
+            <a:schemeClr val="accent1"/>
+          </a:fillRef>
+          <a:effectRef idx="2">
+            <a:schemeClr val="accent1"/>
+          </a:effectRef>
+          <a:fontRef idx="minor">
+            <a:schemeClr val="lt1"/>
+          </a:fontRef>
+        </p:style>
+        <p:txBody>
+          <a:bodyPr rtlCol="0" anchor="ctr"/>
+          <a:lstStyle/>
+          <a:p>
+            <a:pPr algn="ctr"/>
+          </a:p>
+        </p:txBody>
+      </p:sp>
+      <p:sp>
+        <p:nvSpPr>
+          <p:cNvPr id="22" name="TextBox 21"/>
+          <p:cNvSpPr txBox="1"/>
+          <p:nvPr/>
+        </p:nvSpPr>
+        <p:spPr>
+          <a:xfrm>
+            <a:off x="8055863" y="1325880"/>
+            <a:ext cx="3639312" cy="502920"/>
+          </a:xfrm>
+          <a:prstGeom prst="rect">
+            <a:avLst/>
+          </a:prstGeom>
+          <a:noFill/>
+        </p:spPr>
+        <p:txBody>
+          <a:bodyPr wrap="square" lIns="45720" rIns="45720" anchor="ctr">
+            <a:spAutoFit/>
+          </a:bodyPr>
+          <a:lstStyle/>
+          <a:p>
+            <a:pPr algn="ctr"/>
+            <a:r>
+              <a:rPr sz="1600" b="1">
+                <a:solidFill>
+                  <a:srgbClr val="FFFFFF"/>
+                </a:solidFill>
+                <a:latin typeface="Yu Gothic"/>
+              </a:rPr>
+              <a:t>任意保険</a:t>
+            </a:r>
+          </a:p>
+        </p:txBody>
+      </p:sp>
+      <p:sp>
+        <p:nvSpPr>
+          <p:cNvPr id="23" name="TextBox 22"/>
+          <p:cNvSpPr txBox="1"/>
+          <p:nvPr/>
+        </p:nvSpPr>
+        <p:spPr>
+          <a:xfrm>
+            <a:off x="8193023" y="1965960"/>
+            <a:ext cx="3383280" cy="640080"/>
+          </a:xfrm>
+          <a:prstGeom prst="rect">
+            <a:avLst/>
+          </a:prstGeom>
+          <a:noFill/>
+        </p:spPr>
+        <p:txBody>
+          <a:bodyPr wrap="square" lIns="45720" rIns="45720" anchor="ctr">
+            <a:spAutoFit/>
+          </a:bodyPr>
+          <a:lstStyle/>
+          <a:p>
+            <a:pPr algn="l"/>
+            <a:r>
+              <a:rPr sz="1500" b="1">
+                <a:solidFill>
+                  <a:srgbClr val="333333"/>
+                </a:solidFill>
+                <a:latin typeface="Yu Gothic"/>
+              </a:rPr>
+              <a:t>✓ 有効期限が切れていない</a:t>
+            </a:r>
+          </a:p>
+        </p:txBody>
+      </p:sp>
+      <p:sp>
+        <p:nvSpPr>
+          <p:cNvPr id="24" name="TextBox 23"/>
+          <p:cNvSpPr txBox="1"/>
+          <p:nvPr/>
+        </p:nvSpPr>
+        <p:spPr>
+          <a:xfrm>
+            <a:off x="8193023" y="2697480"/>
+            <a:ext cx="3383280" cy="640080"/>
+          </a:xfrm>
+          <a:prstGeom prst="rect">
+            <a:avLst/>
+          </a:prstGeom>
+          <a:noFill/>
+        </p:spPr>
+        <p:txBody>
+          <a:bodyPr wrap="square" lIns="45720" rIns="45720" anchor="ctr">
+            <a:spAutoFit/>
+          </a:bodyPr>
+          <a:lstStyle/>
+          <a:p>
+            <a:pPr algn="l"/>
+            <a:r>
+              <a:rPr sz="1500" b="1">
+                <a:solidFill>
+                  <a:srgbClr val="333333"/>
+                </a:solidFill>
+                <a:latin typeface="Yu Gothic"/>
+              </a:rPr>
+              <a:t>✓ 車台番号が車検証と一致</a:t>
+            </a:r>
+          </a:p>
+        </p:txBody>
+      </p:sp>
+      <p:sp>
+        <p:nvSpPr>
+          <p:cNvPr id="25" name="TextBox 24"/>
+          <p:cNvSpPr txBox="1"/>
+          <p:nvPr/>
+        </p:nvSpPr>
+        <p:spPr>
+          <a:xfrm>
+            <a:off x="8193023" y="3429000"/>
+            <a:ext cx="3383280" cy="640080"/>
+          </a:xfrm>
+          <a:prstGeom prst="rect">
+            <a:avLst/>
+          </a:prstGeom>
+          <a:noFill/>
+        </p:spPr>
+        <p:txBody>
+          <a:bodyPr wrap="square" lIns="45720" rIns="45720" anchor="ctr">
+            <a:spAutoFit/>
+          </a:bodyPr>
+          <a:lstStyle/>
+          <a:p>
+            <a:pPr algn="l"/>
+            <a:r>
+              <a:rPr sz="1500" b="1">
+                <a:solidFill>
+                  <a:srgbClr val="333333"/>
+                </a:solidFill>
+                <a:latin typeface="Yu Gothic"/>
+              </a:rPr>
+              <a:t>✓ 対人・対物が無制限</a:t>
+            </a:r>
+          </a:p>
+        </p:txBody>
+      </p:sp>
+      <p:sp>
+        <p:nvSpPr>
+          <p:cNvPr id="26" name="TextBox 25"/>
+          <p:cNvSpPr txBox="1"/>
+          <p:nvPr/>
+        </p:nvSpPr>
+        <p:spPr>
+          <a:xfrm>
+            <a:off x="8193023" y="4160520"/>
+            <a:ext cx="3383280" cy="640080"/>
+          </a:xfrm>
+          <a:prstGeom prst="rect">
+            <a:avLst/>
+          </a:prstGeom>
+          <a:noFill/>
+        </p:spPr>
+        <p:txBody>
+          <a:bodyPr wrap="square" lIns="45720" rIns="45720" anchor="ctr">
+            <a:spAutoFit/>
+          </a:bodyPr>
+          <a:lstStyle/>
+          <a:p>
+            <a:pPr algn="l"/>
+            <a:r>
+              <a:rPr sz="1500" b="1">
+                <a:solidFill>
+                  <a:srgbClr val="333333"/>
+                </a:solidFill>
+                <a:latin typeface="Yu Gothic"/>
+              </a:rPr>
+              <a:t>✓ 人身傷害が 3,000万円以上</a:t>
+            </a:r>
+          </a:p>
+        </p:txBody>
+      </p:sp>
+      <p:sp>
+        <p:nvSpPr>
+          <p:cNvPr id="27" name="Rounded Rectangle 26"/>
+          <p:cNvSpPr/>
+          <p:nvPr/>
+        </p:nvSpPr>
+        <p:spPr>
+          <a:xfrm>
+            <a:off x="411480" y="5440680"/>
+            <a:ext cx="11338560" cy="685800"/>
+          </a:xfrm>
+          <a:prstGeom prst="roundRect">
+            <a:avLst>
+              <a:gd name="adj" fmla="val 8000"/>
+            </a:avLst>
+          </a:prstGeom>
+          <a:solidFill>
+            <a:srgbClr val="FFF6E0"/>
+          </a:solidFill>
+          <a:ln w="19050">
+            <a:solidFill>
+              <a:srgbClr val="F29A3C"/>
+            </a:solidFill>
+          </a:ln>
+          <a:effectLst/>
+        </p:spPr>
+        <p:style>
+          <a:lnRef idx="1">
+            <a:schemeClr val="accent1"/>
+          </a:lnRef>
+          <a:fillRef idx="3">
+            <a:schemeClr val="accent1"/>
+          </a:fillRef>
+          <a:effectRef idx="2">
+            <a:schemeClr val="accent1"/>
+          </a:effectRef>
+          <a:fontRef idx="minor">
+            <a:schemeClr val="lt1"/>
+          </a:fontRef>
+        </p:style>
+        <p:txBody>
+          <a:bodyPr rtlCol="0" anchor="ctr"/>
+          <a:lstStyle/>
+          <a:p>
+            <a:pPr algn="ctr"/>
+          </a:p>
+        </p:txBody>
+      </p:sp>
+      <p:sp>
+        <p:nvSpPr>
+          <p:cNvPr id="28" name="TextBox 27"/>
+          <p:cNvSpPr txBox="1"/>
+          <p:nvPr/>
+        </p:nvSpPr>
+        <p:spPr>
+          <a:xfrm>
+            <a:off x="594360" y="5440680"/>
+            <a:ext cx="10972800" cy="685800"/>
+          </a:xfrm>
+          <a:prstGeom prst="rect">
+            <a:avLst/>
+          </a:prstGeom>
+          <a:noFill/>
+        </p:spPr>
+        <p:txBody>
+          <a:bodyPr wrap="square" lIns="45720" rIns="45720" anchor="ctr">
+            <a:spAutoFit/>
+          </a:bodyPr>
+          <a:lstStyle/>
+          <a:p>
+            <a:pPr algn="l"/>
+            <a:r>
+              <a:rPr sz="1600" b="1">
+                <a:solidFill>
+                  <a:srgbClr val="333333"/>
+                </a:solidFill>
+                <a:latin typeface="Yu Gothic"/>
+              </a:rPr>
+              <a:t>車台番号は、車検証・自賠責保険・任意保険の3つがすべて同じ</a:t>
+            </a:r>
+          </a:p>
+        </p:txBody>
+      </p:sp>
+    </p:spTree>
+  </p:cSld>
+  <p:clrMapOvr>
+    <a:masterClrMapping/>
+  </p:clrMapOvr>
+</p:sld>
+</file>
+
 <file path=ppt/slides/slide4.xml><?xml version="1.0" encoding="utf-8"?>
 <p:sld xmlns:a="http://schemas.openxmlformats.org/drawingml/2006/main" xmlns:r="http://schemas.openxmlformats.org/officeDocument/2006/relationships" xmlns:p="http://schemas.openxmlformats.org/presentationml/2006/main">
   <p:cSld>
@@ -26127,6 +27219,4051 @@
                 <a:latin typeface="Yu Gothic"/>
               </a:rPr>
               <a:t>マイナンバーカードやパスポートでも可</a:t>
+            </a:r>
+          </a:p>
+        </p:txBody>
+      </p:sp>
+    </p:spTree>
+  </p:cSld>
+  <p:clrMapOvr>
+    <a:masterClrMapping/>
+  </p:clrMapOvr>
+</p:sld>
+</file>
+
+<file path=ppt/slides/slide40.xml><?xml version="1.0" encoding="utf-8"?>
+<p:sld xmlns:a="http://schemas.openxmlformats.org/drawingml/2006/main" xmlns:p="http://schemas.openxmlformats.org/presentationml/2006/main" xmlns:r="http://schemas.openxmlformats.org/officeDocument/2006/relationships">
+  <p:cSld>
+    <p:spTree>
+      <p:nvGrpSpPr>
+        <p:cNvPr id="1" name=""/>
+        <p:cNvGrpSpPr/>
+        <p:nvPr/>
+      </p:nvGrpSpPr>
+      <p:grpSpPr/>
+      <p:sp>
+        <p:nvSpPr>
+          <p:cNvPr id="2" name="Rounded Rectangle 1"/>
+          <p:cNvSpPr/>
+          <p:nvPr/>
+        </p:nvSpPr>
+        <p:spPr>
+          <a:xfrm>
+            <a:off x="411480" y="777240"/>
+            <a:ext cx="502920" cy="384048"/>
+          </a:xfrm>
+          <a:prstGeom prst="roundRect">
+            <a:avLst>
+              <a:gd name="adj" fmla="val 8000"/>
+            </a:avLst>
+          </a:prstGeom>
+          <a:solidFill>
+            <a:srgbClr val="4FB6BE"/>
+          </a:solidFill>
+          <a:ln>
+            <a:noFill/>
+          </a:ln>
+          <a:effectLst/>
+        </p:spPr>
+        <p:style>
+          <a:lnRef idx="1">
+            <a:schemeClr val="accent1"/>
+          </a:lnRef>
+          <a:fillRef idx="3">
+            <a:schemeClr val="accent1"/>
+          </a:fillRef>
+          <a:effectRef idx="2">
+            <a:schemeClr val="accent1"/>
+          </a:effectRef>
+          <a:fontRef idx="minor">
+            <a:schemeClr val="lt1"/>
+          </a:fontRef>
+        </p:style>
+        <p:txBody>
+          <a:bodyPr rtlCol="0" anchor="ctr"/>
+          <a:lstStyle/>
+          <a:p>
+            <a:pPr algn="ctr"/>
+          </a:p>
+        </p:txBody>
+      </p:sp>
+      <p:sp>
+        <p:nvSpPr>
+          <p:cNvPr id="3" name="TextBox 2"/>
+          <p:cNvSpPr txBox="1"/>
+          <p:nvPr/>
+        </p:nvSpPr>
+        <p:spPr>
+          <a:xfrm>
+            <a:off x="411480" y="777240"/>
+            <a:ext cx="502920" cy="384048"/>
+          </a:xfrm>
+          <a:prstGeom prst="rect">
+            <a:avLst/>
+          </a:prstGeom>
+          <a:noFill/>
+        </p:spPr>
+        <p:txBody>
+          <a:bodyPr wrap="square" lIns="45720" rIns="45720" anchor="ctr">
+            <a:spAutoFit/>
+          </a:bodyPr>
+          <a:lstStyle/>
+          <a:p>
+            <a:pPr algn="ctr"/>
+            <a:r>
+              <a:rPr sz="1200" b="1">
+                <a:solidFill>
+                  <a:srgbClr val="FFFFFF"/>
+                </a:solidFill>
+                <a:latin typeface="Yu Gothic"/>
+              </a:rPr>
+              <a:t>①</a:t>
+            </a:r>
+          </a:p>
+        </p:txBody>
+      </p:sp>
+      <p:sp>
+        <p:nvSpPr>
+          <p:cNvPr id="4" name="TextBox 3"/>
+          <p:cNvSpPr txBox="1"/>
+          <p:nvPr/>
+        </p:nvSpPr>
+        <p:spPr>
+          <a:xfrm>
+            <a:off x="1078992" y="777240"/>
+            <a:ext cx="10607040" cy="384048"/>
+          </a:xfrm>
+          <a:prstGeom prst="rect">
+            <a:avLst/>
+          </a:prstGeom>
+          <a:noFill/>
+        </p:spPr>
+        <p:txBody>
+          <a:bodyPr wrap="square" lIns="45720" rIns="45720" anchor="ctr">
+            <a:spAutoFit/>
+          </a:bodyPr>
+          <a:lstStyle/>
+          <a:p>
+            <a:pPr algn="l"/>
+            <a:r>
+              <a:rPr sz="2000" b="1">
+                <a:solidFill>
+                  <a:srgbClr val="333333"/>
+                </a:solidFill>
+                <a:latin typeface="Yu Gothic"/>
+              </a:rPr>
+              <a:t>車検証（自動車検査証記録事項）</a:t>
+            </a:r>
+          </a:p>
+        </p:txBody>
+      </p:sp>
+      <p:pic>
+        <p:nvPicPr>
+          <p:cNvPr id="5" name="Picture 4" descr="m_c2.png"/>
+          <p:cNvPicPr>
+            <a:picLocks noChangeAspect="1"/>
+          </p:cNvPicPr>
+          <p:nvPr/>
+        </p:nvPicPr>
+        <p:blipFill>
+          <a:blip r:embed="rId2"/>
+          <a:stretch>
+            <a:fillRect/>
+          </a:stretch>
+        </p:blipFill>
+        <p:spPr>
+          <a:xfrm>
+            <a:off x="914400" y="1325880"/>
+            <a:ext cx="3491572" cy="4937760"/>
+          </a:xfrm>
+          <a:prstGeom prst="rect">
+            <a:avLst/>
+          </a:prstGeom>
+          <a:ln w="12700">
+            <a:solidFill>
+              <a:srgbClr val="BBBBBB"/>
+            </a:solidFill>
+          </a:ln>
+        </p:spPr>
+      </p:pic>
+      <p:sp>
+        <p:nvSpPr>
+          <p:cNvPr id="6" name="Rounded Rectangle 5"/>
+          <p:cNvSpPr/>
+          <p:nvPr/>
+        </p:nvSpPr>
+        <p:spPr>
+          <a:xfrm>
+            <a:off x="1044651" y="1875120"/>
+            <a:ext cx="1519072" cy="253095"/>
+          </a:xfrm>
+          <a:prstGeom prst="roundRect">
+            <a:avLst>
+              <a:gd name="adj" fmla="val 12000"/>
+            </a:avLst>
+          </a:prstGeom>
+          <a:noFill/>
+          <a:ln w="38100">
+            <a:solidFill>
+              <a:srgbClr val="D32F2F"/>
+            </a:solidFill>
+          </a:ln>
+          <a:effectLst/>
+        </p:spPr>
+        <p:style>
+          <a:lnRef idx="1">
+            <a:schemeClr val="accent1"/>
+          </a:lnRef>
+          <a:fillRef idx="3">
+            <a:schemeClr val="accent1"/>
+          </a:fillRef>
+          <a:effectRef idx="2">
+            <a:schemeClr val="accent1"/>
+          </a:effectRef>
+          <a:fontRef idx="minor">
+            <a:schemeClr val="lt1"/>
+          </a:fontRef>
+        </p:style>
+        <p:txBody>
+          <a:bodyPr rtlCol="0" anchor="ctr"/>
+          <a:lstStyle/>
+          <a:p>
+            <a:pPr algn="ctr"/>
+          </a:p>
+        </p:txBody>
+      </p:sp>
+      <p:cxnSp>
+        <p:nvCxnSpPr>
+          <p:cNvPr id="7" name="Connector 6"/>
+          <p:cNvCxnSpPr/>
+          <p:nvPr/>
+        </p:nvCxnSpPr>
+        <p:spPr>
+          <a:xfrm flipV="1">
+            <a:off x="2563723" y="1783080"/>
+            <a:ext cx="2876957" cy="218588"/>
+          </a:xfrm>
+          <a:prstGeom prst="line">
+            <a:avLst/>
+          </a:prstGeom>
+          <a:ln w="22225">
+            <a:solidFill>
+              <a:srgbClr val="D32F2F"/>
+            </a:solidFill>
+          </a:ln>
+        </p:spPr>
+        <p:style>
+          <a:lnRef idx="2">
+            <a:schemeClr val="accent1"/>
+          </a:lnRef>
+          <a:fillRef idx="0">
+            <a:schemeClr val="accent1"/>
+          </a:fillRef>
+          <a:effectRef idx="1">
+            <a:schemeClr val="accent1"/>
+          </a:effectRef>
+          <a:fontRef idx="minor">
+            <a:schemeClr val="tx1"/>
+          </a:fontRef>
+        </p:style>
+      </p:cxnSp>
+      <p:sp>
+        <p:nvSpPr>
+          <p:cNvPr id="8" name="Oval 7"/>
+          <p:cNvSpPr/>
+          <p:nvPr/>
+        </p:nvSpPr>
+        <p:spPr>
+          <a:xfrm>
+            <a:off x="5477256" y="1591056"/>
+            <a:ext cx="384048" cy="384048"/>
+          </a:xfrm>
+          <a:prstGeom prst="ellipse">
+            <a:avLst/>
+          </a:prstGeom>
+          <a:solidFill>
+            <a:srgbClr val="D32F2F"/>
+          </a:solidFill>
+          <a:ln w="19050">
+            <a:solidFill>
+              <a:srgbClr val="FFFFFF"/>
+            </a:solidFill>
+          </a:ln>
+          <a:effectLst/>
+        </p:spPr>
+        <p:style>
+          <a:lnRef idx="1">
+            <a:schemeClr val="accent1"/>
+          </a:lnRef>
+          <a:fillRef idx="3">
+            <a:schemeClr val="accent1"/>
+          </a:fillRef>
+          <a:effectRef idx="2">
+            <a:schemeClr val="accent1"/>
+          </a:effectRef>
+          <a:fontRef idx="minor">
+            <a:schemeClr val="lt1"/>
+          </a:fontRef>
+        </p:style>
+        <p:txBody>
+          <a:bodyPr rtlCol="0" anchor="ctr" lIns="0" rIns="0" tIns="0" bIns="0"/>
+          <a:lstStyle/>
+          <a:p>
+            <a:pPr algn="ctr"/>
+            <a:r>
+              <a:rPr sz="1400" b="1">
+                <a:solidFill>
+                  <a:srgbClr val="FFFFFF"/>
+                </a:solidFill>
+                <a:latin typeface="Yu Gothic"/>
+              </a:rPr>
+              <a:t>1</a:t>
+            </a:r>
+          </a:p>
+        </p:txBody>
+      </p:sp>
+      <p:sp>
+        <p:nvSpPr>
+          <p:cNvPr id="9" name="TextBox 8"/>
+          <p:cNvSpPr txBox="1"/>
+          <p:nvPr/>
+        </p:nvSpPr>
+        <p:spPr>
+          <a:xfrm>
+            <a:off x="6035040" y="1508760"/>
+            <a:ext cx="4754880" cy="411480"/>
+          </a:xfrm>
+          <a:prstGeom prst="rect">
+            <a:avLst/>
+          </a:prstGeom>
+          <a:noFill/>
+        </p:spPr>
+        <p:txBody>
+          <a:bodyPr wrap="square" lIns="45720" rIns="45720" anchor="ctr">
+            <a:spAutoFit/>
+          </a:bodyPr>
+          <a:lstStyle/>
+          <a:p>
+            <a:pPr algn="l"/>
+            <a:r>
+              <a:rPr sz="2000" b="1">
+                <a:solidFill>
+                  <a:srgbClr val="333333"/>
+                </a:solidFill>
+                <a:latin typeface="Yu Gothic"/>
+              </a:rPr>
+              <a:t>車台番号</a:t>
+            </a:r>
+          </a:p>
+        </p:txBody>
+      </p:sp>
+      <p:sp>
+        <p:nvSpPr>
+          <p:cNvPr id="10" name="TextBox 9"/>
+          <p:cNvSpPr txBox="1"/>
+          <p:nvPr/>
+        </p:nvSpPr>
+        <p:spPr>
+          <a:xfrm>
+            <a:off x="6035040" y="1892807"/>
+            <a:ext cx="4754880" cy="365760"/>
+          </a:xfrm>
+          <a:prstGeom prst="rect">
+            <a:avLst/>
+          </a:prstGeom>
+          <a:noFill/>
+        </p:spPr>
+        <p:txBody>
+          <a:bodyPr wrap="square" lIns="45720" rIns="45720" anchor="t">
+            <a:spAutoFit/>
+          </a:bodyPr>
+          <a:lstStyle/>
+          <a:p>
+            <a:pPr algn="l"/>
+            <a:r>
+              <a:rPr sz="1400" b="0">
+                <a:solidFill>
+                  <a:srgbClr val="666666"/>
+                </a:solidFill>
+                <a:latin typeface="Yu Gothic"/>
+              </a:rPr>
+              <a:t>任意保険・自賠責と同じ番号</a:t>
+            </a:r>
+          </a:p>
+        </p:txBody>
+      </p:sp>
+      <p:sp>
+        <p:nvSpPr>
+          <p:cNvPr id="11" name="Rounded Rectangle 10"/>
+          <p:cNvSpPr/>
+          <p:nvPr/>
+        </p:nvSpPr>
+        <p:spPr>
+          <a:xfrm>
+            <a:off x="2995427" y="2073351"/>
+            <a:ext cx="1257767" cy="217053"/>
+          </a:xfrm>
+          <a:prstGeom prst="roundRect">
+            <a:avLst>
+              <a:gd name="adj" fmla="val 12000"/>
+            </a:avLst>
+          </a:prstGeom>
+          <a:noFill/>
+          <a:ln w="38100">
+            <a:solidFill>
+              <a:srgbClr val="D32F2F"/>
+            </a:solidFill>
+          </a:ln>
+          <a:effectLst/>
+        </p:spPr>
+        <p:style>
+          <a:lnRef idx="1">
+            <a:schemeClr val="accent1"/>
+          </a:lnRef>
+          <a:fillRef idx="3">
+            <a:schemeClr val="accent1"/>
+          </a:fillRef>
+          <a:effectRef idx="2">
+            <a:schemeClr val="accent1"/>
+          </a:effectRef>
+          <a:fontRef idx="minor">
+            <a:schemeClr val="lt1"/>
+          </a:fontRef>
+        </p:style>
+        <p:txBody>
+          <a:bodyPr rtlCol="0" anchor="ctr"/>
+          <a:lstStyle/>
+          <a:p>
+            <a:pPr algn="ctr"/>
+          </a:p>
+        </p:txBody>
+      </p:sp>
+      <p:cxnSp>
+        <p:nvCxnSpPr>
+          <p:cNvPr id="12" name="Connector 11"/>
+          <p:cNvCxnSpPr/>
+          <p:nvPr/>
+        </p:nvCxnSpPr>
+        <p:spPr>
+          <a:xfrm>
+            <a:off x="4253194" y="2181878"/>
+            <a:ext cx="1187486" cy="378442"/>
+          </a:xfrm>
+          <a:prstGeom prst="line">
+            <a:avLst/>
+          </a:prstGeom>
+          <a:ln w="22225">
+            <a:solidFill>
+              <a:srgbClr val="D32F2F"/>
+            </a:solidFill>
+          </a:ln>
+        </p:spPr>
+        <p:style>
+          <a:lnRef idx="2">
+            <a:schemeClr val="accent1"/>
+          </a:lnRef>
+          <a:fillRef idx="0">
+            <a:schemeClr val="accent1"/>
+          </a:fillRef>
+          <a:effectRef idx="1">
+            <a:schemeClr val="accent1"/>
+          </a:effectRef>
+          <a:fontRef idx="minor">
+            <a:schemeClr val="tx1"/>
+          </a:fontRef>
+        </p:style>
+      </p:cxnSp>
+      <p:sp>
+        <p:nvSpPr>
+          <p:cNvPr id="13" name="Oval 12"/>
+          <p:cNvSpPr/>
+          <p:nvPr/>
+        </p:nvSpPr>
+        <p:spPr>
+          <a:xfrm>
+            <a:off x="5477256" y="2368296"/>
+            <a:ext cx="384048" cy="384048"/>
+          </a:xfrm>
+          <a:prstGeom prst="ellipse">
+            <a:avLst/>
+          </a:prstGeom>
+          <a:solidFill>
+            <a:srgbClr val="D32F2F"/>
+          </a:solidFill>
+          <a:ln w="19050">
+            <a:solidFill>
+              <a:srgbClr val="FFFFFF"/>
+            </a:solidFill>
+          </a:ln>
+          <a:effectLst/>
+        </p:spPr>
+        <p:style>
+          <a:lnRef idx="1">
+            <a:schemeClr val="accent1"/>
+          </a:lnRef>
+          <a:fillRef idx="3">
+            <a:schemeClr val="accent1"/>
+          </a:fillRef>
+          <a:effectRef idx="2">
+            <a:schemeClr val="accent1"/>
+          </a:effectRef>
+          <a:fontRef idx="minor">
+            <a:schemeClr val="lt1"/>
+          </a:fontRef>
+        </p:style>
+        <p:txBody>
+          <a:bodyPr rtlCol="0" anchor="ctr" lIns="0" rIns="0" tIns="0" bIns="0"/>
+          <a:lstStyle/>
+          <a:p>
+            <a:pPr algn="ctr"/>
+            <a:r>
+              <a:rPr sz="1400" b="1">
+                <a:solidFill>
+                  <a:srgbClr val="FFFFFF"/>
+                </a:solidFill>
+                <a:latin typeface="Yu Gothic"/>
+              </a:rPr>
+              <a:t>2</a:t>
+            </a:r>
+          </a:p>
+        </p:txBody>
+      </p:sp>
+      <p:sp>
+        <p:nvSpPr>
+          <p:cNvPr id="14" name="TextBox 13"/>
+          <p:cNvSpPr txBox="1"/>
+          <p:nvPr/>
+        </p:nvSpPr>
+        <p:spPr>
+          <a:xfrm>
+            <a:off x="6035040" y="2286000"/>
+            <a:ext cx="4754880" cy="411480"/>
+          </a:xfrm>
+          <a:prstGeom prst="rect">
+            <a:avLst/>
+          </a:prstGeom>
+          <a:noFill/>
+        </p:spPr>
+        <p:txBody>
+          <a:bodyPr wrap="square" lIns="45720" rIns="45720" anchor="ctr">
+            <a:spAutoFit/>
+          </a:bodyPr>
+          <a:lstStyle/>
+          <a:p>
+            <a:pPr algn="l"/>
+            <a:r>
+              <a:rPr sz="2000" b="1">
+                <a:solidFill>
+                  <a:srgbClr val="333333"/>
+                </a:solidFill>
+                <a:latin typeface="Yu Gothic"/>
+              </a:rPr>
+              <a:t>有効期間の満了する日</a:t>
+            </a:r>
+          </a:p>
+        </p:txBody>
+      </p:sp>
+      <p:sp>
+        <p:nvSpPr>
+          <p:cNvPr id="15" name="TextBox 14"/>
+          <p:cNvSpPr txBox="1"/>
+          <p:nvPr/>
+        </p:nvSpPr>
+        <p:spPr>
+          <a:xfrm>
+            <a:off x="6035040" y="2670048"/>
+            <a:ext cx="4754880" cy="365760"/>
+          </a:xfrm>
+          <a:prstGeom prst="rect">
+            <a:avLst/>
+          </a:prstGeom>
+          <a:noFill/>
+        </p:spPr>
+        <p:txBody>
+          <a:bodyPr wrap="square" lIns="45720" rIns="45720" anchor="t">
+            <a:spAutoFit/>
+          </a:bodyPr>
+          <a:lstStyle/>
+          <a:p>
+            <a:pPr algn="l"/>
+            <a:r>
+              <a:rPr sz="1400" b="0">
+                <a:solidFill>
+                  <a:srgbClr val="666666"/>
+                </a:solidFill>
+                <a:latin typeface="Yu Gothic"/>
+              </a:rPr>
+              <a:t>期限が切れていない</a:t>
+            </a:r>
+          </a:p>
+        </p:txBody>
+      </p:sp>
+      <p:sp>
+        <p:nvSpPr>
+          <p:cNvPr id="16" name="Rounded Rectangle 15"/>
+          <p:cNvSpPr/>
+          <p:nvPr/>
+        </p:nvSpPr>
+        <p:spPr>
+          <a:xfrm>
+            <a:off x="1044651" y="2307625"/>
+            <a:ext cx="3217553" cy="406273"/>
+          </a:xfrm>
+          <a:prstGeom prst="roundRect">
+            <a:avLst>
+              <a:gd name="adj" fmla="val 12000"/>
+            </a:avLst>
+          </a:prstGeom>
+          <a:noFill/>
+          <a:ln w="38100">
+            <a:solidFill>
+              <a:srgbClr val="D32F2F"/>
+            </a:solidFill>
+          </a:ln>
+          <a:effectLst/>
+        </p:spPr>
+        <p:style>
+          <a:lnRef idx="1">
+            <a:schemeClr val="accent1"/>
+          </a:lnRef>
+          <a:fillRef idx="3">
+            <a:schemeClr val="accent1"/>
+          </a:fillRef>
+          <a:effectRef idx="2">
+            <a:schemeClr val="accent1"/>
+          </a:effectRef>
+          <a:fontRef idx="minor">
+            <a:schemeClr val="lt1"/>
+          </a:fontRef>
+        </p:style>
+        <p:txBody>
+          <a:bodyPr rtlCol="0" anchor="ctr"/>
+          <a:lstStyle/>
+          <a:p>
+            <a:pPr algn="ctr"/>
+          </a:p>
+        </p:txBody>
+      </p:sp>
+      <p:cxnSp>
+        <p:nvCxnSpPr>
+          <p:cNvPr id="17" name="Connector 16"/>
+          <p:cNvCxnSpPr/>
+          <p:nvPr/>
+        </p:nvCxnSpPr>
+        <p:spPr>
+          <a:xfrm>
+            <a:off x="4262205" y="2510762"/>
+            <a:ext cx="1178475" cy="826798"/>
+          </a:xfrm>
+          <a:prstGeom prst="line">
+            <a:avLst/>
+          </a:prstGeom>
+          <a:ln w="22225">
+            <a:solidFill>
+              <a:srgbClr val="D32F2F"/>
+            </a:solidFill>
+          </a:ln>
+        </p:spPr>
+        <p:style>
+          <a:lnRef idx="2">
+            <a:schemeClr val="accent1"/>
+          </a:lnRef>
+          <a:fillRef idx="0">
+            <a:schemeClr val="accent1"/>
+          </a:fillRef>
+          <a:effectRef idx="1">
+            <a:schemeClr val="accent1"/>
+          </a:effectRef>
+          <a:fontRef idx="minor">
+            <a:schemeClr val="tx1"/>
+          </a:fontRef>
+        </p:style>
+      </p:cxnSp>
+      <p:sp>
+        <p:nvSpPr>
+          <p:cNvPr id="18" name="Oval 17"/>
+          <p:cNvSpPr/>
+          <p:nvPr/>
+        </p:nvSpPr>
+        <p:spPr>
+          <a:xfrm>
+            <a:off x="5477256" y="3145536"/>
+            <a:ext cx="384048" cy="384048"/>
+          </a:xfrm>
+          <a:prstGeom prst="ellipse">
+            <a:avLst/>
+          </a:prstGeom>
+          <a:solidFill>
+            <a:srgbClr val="D32F2F"/>
+          </a:solidFill>
+          <a:ln w="19050">
+            <a:solidFill>
+              <a:srgbClr val="FFFFFF"/>
+            </a:solidFill>
+          </a:ln>
+          <a:effectLst/>
+        </p:spPr>
+        <p:style>
+          <a:lnRef idx="1">
+            <a:schemeClr val="accent1"/>
+          </a:lnRef>
+          <a:fillRef idx="3">
+            <a:schemeClr val="accent1"/>
+          </a:fillRef>
+          <a:effectRef idx="2">
+            <a:schemeClr val="accent1"/>
+          </a:effectRef>
+          <a:fontRef idx="minor">
+            <a:schemeClr val="lt1"/>
+          </a:fontRef>
+        </p:style>
+        <p:txBody>
+          <a:bodyPr rtlCol="0" anchor="ctr" lIns="0" rIns="0" tIns="0" bIns="0"/>
+          <a:lstStyle/>
+          <a:p>
+            <a:pPr algn="ctr"/>
+            <a:r>
+              <a:rPr sz="1400" b="1">
+                <a:solidFill>
+                  <a:srgbClr val="FFFFFF"/>
+                </a:solidFill>
+                <a:latin typeface="Yu Gothic"/>
+              </a:rPr>
+              <a:t>3</a:t>
+            </a:r>
+          </a:p>
+        </p:txBody>
+      </p:sp>
+      <p:sp>
+        <p:nvSpPr>
+          <p:cNvPr id="19" name="TextBox 18"/>
+          <p:cNvSpPr txBox="1"/>
+          <p:nvPr/>
+        </p:nvSpPr>
+        <p:spPr>
+          <a:xfrm>
+            <a:off x="6035040" y="3063240"/>
+            <a:ext cx="4754880" cy="411480"/>
+          </a:xfrm>
+          <a:prstGeom prst="rect">
+            <a:avLst/>
+          </a:prstGeom>
+          <a:noFill/>
+        </p:spPr>
+        <p:txBody>
+          <a:bodyPr wrap="square" lIns="45720" rIns="45720" anchor="ctr">
+            <a:spAutoFit/>
+          </a:bodyPr>
+          <a:lstStyle/>
+          <a:p>
+            <a:pPr algn="l"/>
+            <a:r>
+              <a:rPr sz="2000" b="1">
+                <a:solidFill>
+                  <a:srgbClr val="333333"/>
+                </a:solidFill>
+                <a:latin typeface="Yu Gothic"/>
+              </a:rPr>
+              <a:t>使用者</a:t>
+            </a:r>
+          </a:p>
+        </p:txBody>
+      </p:sp>
+      <p:sp>
+        <p:nvSpPr>
+          <p:cNvPr id="20" name="TextBox 19"/>
+          <p:cNvSpPr txBox="1"/>
+          <p:nvPr/>
+        </p:nvSpPr>
+        <p:spPr>
+          <a:xfrm>
+            <a:off x="6035040" y="3447288"/>
+            <a:ext cx="4754880" cy="365760"/>
+          </a:xfrm>
+          <a:prstGeom prst="rect">
+            <a:avLst/>
+          </a:prstGeom>
+          <a:noFill/>
+        </p:spPr>
+        <p:txBody>
+          <a:bodyPr wrap="square" lIns="45720" rIns="45720" anchor="t">
+            <a:spAutoFit/>
+          </a:bodyPr>
+          <a:lstStyle/>
+          <a:p>
+            <a:pPr algn="l"/>
+            <a:r>
+              <a:rPr sz="1400" b="0">
+                <a:solidFill>
+                  <a:srgbClr val="666666"/>
+                </a:solidFill>
+                <a:latin typeface="Yu Gothic"/>
+              </a:rPr>
+              <a:t>持込の方は、ご本人</a:t>
+            </a:r>
+          </a:p>
+        </p:txBody>
+      </p:sp>
+      <p:sp>
+        <p:nvSpPr>
+          <p:cNvPr id="21" name="Rounded Rectangle 20"/>
+          <p:cNvSpPr/>
+          <p:nvPr/>
+        </p:nvSpPr>
+        <p:spPr>
+          <a:xfrm>
+            <a:off x="2621491" y="3551075"/>
+            <a:ext cx="1640713" cy="235074"/>
+          </a:xfrm>
+          <a:prstGeom prst="roundRect">
+            <a:avLst>
+              <a:gd name="adj" fmla="val 12000"/>
+            </a:avLst>
+          </a:prstGeom>
+          <a:noFill/>
+          <a:ln w="38100">
+            <a:solidFill>
+              <a:srgbClr val="D32F2F"/>
+            </a:solidFill>
+          </a:ln>
+          <a:effectLst/>
+        </p:spPr>
+        <p:style>
+          <a:lnRef idx="1">
+            <a:schemeClr val="accent1"/>
+          </a:lnRef>
+          <a:fillRef idx="3">
+            <a:schemeClr val="accent1"/>
+          </a:fillRef>
+          <a:effectRef idx="2">
+            <a:schemeClr val="accent1"/>
+          </a:effectRef>
+          <a:fontRef idx="minor">
+            <a:schemeClr val="lt1"/>
+          </a:fontRef>
+        </p:style>
+        <p:txBody>
+          <a:bodyPr rtlCol="0" anchor="ctr"/>
+          <a:lstStyle/>
+          <a:p>
+            <a:pPr algn="ctr"/>
+          </a:p>
+        </p:txBody>
+      </p:sp>
+      <p:cxnSp>
+        <p:nvCxnSpPr>
+          <p:cNvPr id="22" name="Connector 21"/>
+          <p:cNvCxnSpPr/>
+          <p:nvPr/>
+        </p:nvCxnSpPr>
+        <p:spPr>
+          <a:xfrm>
+            <a:off x="4262205" y="3668612"/>
+            <a:ext cx="1178475" cy="446188"/>
+          </a:xfrm>
+          <a:prstGeom prst="line">
+            <a:avLst/>
+          </a:prstGeom>
+          <a:ln w="22225">
+            <a:solidFill>
+              <a:srgbClr val="D32F2F"/>
+            </a:solidFill>
+          </a:ln>
+        </p:spPr>
+        <p:style>
+          <a:lnRef idx="2">
+            <a:schemeClr val="accent1"/>
+          </a:lnRef>
+          <a:fillRef idx="0">
+            <a:schemeClr val="accent1"/>
+          </a:fillRef>
+          <a:effectRef idx="1">
+            <a:schemeClr val="accent1"/>
+          </a:effectRef>
+          <a:fontRef idx="minor">
+            <a:schemeClr val="tx1"/>
+          </a:fontRef>
+        </p:style>
+      </p:cxnSp>
+      <p:sp>
+        <p:nvSpPr>
+          <p:cNvPr id="23" name="Oval 22"/>
+          <p:cNvSpPr/>
+          <p:nvPr/>
+        </p:nvSpPr>
+        <p:spPr>
+          <a:xfrm>
+            <a:off x="5477256" y="3922776"/>
+            <a:ext cx="384048" cy="384048"/>
+          </a:xfrm>
+          <a:prstGeom prst="ellipse">
+            <a:avLst/>
+          </a:prstGeom>
+          <a:solidFill>
+            <a:srgbClr val="D32F2F"/>
+          </a:solidFill>
+          <a:ln w="19050">
+            <a:solidFill>
+              <a:srgbClr val="FFFFFF"/>
+            </a:solidFill>
+          </a:ln>
+          <a:effectLst/>
+        </p:spPr>
+        <p:style>
+          <a:lnRef idx="1">
+            <a:schemeClr val="accent1"/>
+          </a:lnRef>
+          <a:fillRef idx="3">
+            <a:schemeClr val="accent1"/>
+          </a:fillRef>
+          <a:effectRef idx="2">
+            <a:schemeClr val="accent1"/>
+          </a:effectRef>
+          <a:fontRef idx="minor">
+            <a:schemeClr val="lt1"/>
+          </a:fontRef>
+        </p:style>
+        <p:txBody>
+          <a:bodyPr rtlCol="0" anchor="ctr" lIns="0" rIns="0" tIns="0" bIns="0"/>
+          <a:lstStyle/>
+          <a:p>
+            <a:pPr algn="ctr"/>
+            <a:r>
+              <a:rPr sz="1400" b="1">
+                <a:solidFill>
+                  <a:srgbClr val="FFFFFF"/>
+                </a:solidFill>
+                <a:latin typeface="Yu Gothic"/>
+              </a:rPr>
+              <a:t>4</a:t>
+            </a:r>
+          </a:p>
+        </p:txBody>
+      </p:sp>
+      <p:sp>
+        <p:nvSpPr>
+          <p:cNvPr id="24" name="TextBox 23"/>
+          <p:cNvSpPr txBox="1"/>
+          <p:nvPr/>
+        </p:nvSpPr>
+        <p:spPr>
+          <a:xfrm>
+            <a:off x="6035040" y="3840480"/>
+            <a:ext cx="4754880" cy="411480"/>
+          </a:xfrm>
+          <a:prstGeom prst="rect">
+            <a:avLst/>
+          </a:prstGeom>
+          <a:noFill/>
+        </p:spPr>
+        <p:txBody>
+          <a:bodyPr wrap="square" lIns="45720" rIns="45720" anchor="ctr">
+            <a:spAutoFit/>
+          </a:bodyPr>
+          <a:lstStyle/>
+          <a:p>
+            <a:pPr algn="l"/>
+            <a:r>
+              <a:rPr sz="2000" b="1">
+                <a:solidFill>
+                  <a:srgbClr val="333333"/>
+                </a:solidFill>
+                <a:latin typeface="Yu Gothic"/>
+              </a:rPr>
+              <a:t>事業用</a:t>
+            </a:r>
+          </a:p>
+        </p:txBody>
+      </p:sp>
+      <p:sp>
+        <p:nvSpPr>
+          <p:cNvPr id="25" name="TextBox 24"/>
+          <p:cNvSpPr txBox="1"/>
+          <p:nvPr/>
+        </p:nvSpPr>
+        <p:spPr>
+          <a:xfrm>
+            <a:off x="6035040" y="4224528"/>
+            <a:ext cx="4754880" cy="365760"/>
+          </a:xfrm>
+          <a:prstGeom prst="rect">
+            <a:avLst/>
+          </a:prstGeom>
+          <a:noFill/>
+        </p:spPr>
+        <p:txBody>
+          <a:bodyPr wrap="square" lIns="45720" rIns="45720" anchor="t">
+            <a:spAutoFit/>
+          </a:bodyPr>
+          <a:lstStyle/>
+          <a:p>
+            <a:pPr algn="l"/>
+            <a:r>
+              <a:rPr sz="1400" b="0">
+                <a:solidFill>
+                  <a:srgbClr val="666666"/>
+                </a:solidFill>
+                <a:latin typeface="Yu Gothic"/>
+              </a:rPr>
+              <a:t>事業用になっている</a:t>
+            </a:r>
+          </a:p>
+        </p:txBody>
+      </p:sp>
+      <p:sp>
+        <p:nvSpPr>
+          <p:cNvPr id="26" name="Rounded Rectangle 25"/>
+          <p:cNvSpPr/>
+          <p:nvPr/>
+        </p:nvSpPr>
+        <p:spPr>
+          <a:xfrm>
+            <a:off x="3355848" y="3744801"/>
+            <a:ext cx="906357" cy="230568"/>
+          </a:xfrm>
+          <a:prstGeom prst="roundRect">
+            <a:avLst>
+              <a:gd name="adj" fmla="val 12000"/>
+            </a:avLst>
+          </a:prstGeom>
+          <a:noFill/>
+          <a:ln w="38100">
+            <a:solidFill>
+              <a:srgbClr val="D32F2F"/>
+            </a:solidFill>
+          </a:ln>
+          <a:effectLst/>
+        </p:spPr>
+        <p:style>
+          <a:lnRef idx="1">
+            <a:schemeClr val="accent1"/>
+          </a:lnRef>
+          <a:fillRef idx="3">
+            <a:schemeClr val="accent1"/>
+          </a:fillRef>
+          <a:effectRef idx="2">
+            <a:schemeClr val="accent1"/>
+          </a:effectRef>
+          <a:fontRef idx="minor">
+            <a:schemeClr val="lt1"/>
+          </a:fontRef>
+        </p:style>
+        <p:txBody>
+          <a:bodyPr rtlCol="0" anchor="ctr"/>
+          <a:lstStyle/>
+          <a:p>
+            <a:pPr algn="ctr"/>
+          </a:p>
+        </p:txBody>
+      </p:sp>
+      <p:cxnSp>
+        <p:nvCxnSpPr>
+          <p:cNvPr id="27" name="Connector 26"/>
+          <p:cNvCxnSpPr/>
+          <p:nvPr/>
+        </p:nvCxnSpPr>
+        <p:spPr>
+          <a:xfrm>
+            <a:off x="4262205" y="3860086"/>
+            <a:ext cx="1178475" cy="1031954"/>
+          </a:xfrm>
+          <a:prstGeom prst="line">
+            <a:avLst/>
+          </a:prstGeom>
+          <a:ln w="22225">
+            <a:solidFill>
+              <a:srgbClr val="D32F2F"/>
+            </a:solidFill>
+          </a:ln>
+        </p:spPr>
+        <p:style>
+          <a:lnRef idx="2">
+            <a:schemeClr val="accent1"/>
+          </a:lnRef>
+          <a:fillRef idx="0">
+            <a:schemeClr val="accent1"/>
+          </a:fillRef>
+          <a:effectRef idx="1">
+            <a:schemeClr val="accent1"/>
+          </a:effectRef>
+          <a:fontRef idx="minor">
+            <a:schemeClr val="tx1"/>
+          </a:fontRef>
+        </p:style>
+      </p:cxnSp>
+      <p:sp>
+        <p:nvSpPr>
+          <p:cNvPr id="28" name="Oval 27"/>
+          <p:cNvSpPr/>
+          <p:nvPr/>
+        </p:nvSpPr>
+        <p:spPr>
+          <a:xfrm>
+            <a:off x="5477256" y="4700016"/>
+            <a:ext cx="384048" cy="384048"/>
+          </a:xfrm>
+          <a:prstGeom prst="ellipse">
+            <a:avLst/>
+          </a:prstGeom>
+          <a:solidFill>
+            <a:srgbClr val="D32F2F"/>
+          </a:solidFill>
+          <a:ln w="19050">
+            <a:solidFill>
+              <a:srgbClr val="FFFFFF"/>
+            </a:solidFill>
+          </a:ln>
+          <a:effectLst/>
+        </p:spPr>
+        <p:style>
+          <a:lnRef idx="1">
+            <a:schemeClr val="accent1"/>
+          </a:lnRef>
+          <a:fillRef idx="3">
+            <a:schemeClr val="accent1"/>
+          </a:fillRef>
+          <a:effectRef idx="2">
+            <a:schemeClr val="accent1"/>
+          </a:effectRef>
+          <a:fontRef idx="minor">
+            <a:schemeClr val="lt1"/>
+          </a:fontRef>
+        </p:style>
+        <p:txBody>
+          <a:bodyPr rtlCol="0" anchor="ctr" lIns="0" rIns="0" tIns="0" bIns="0"/>
+          <a:lstStyle/>
+          <a:p>
+            <a:pPr algn="ctr"/>
+            <a:r>
+              <a:rPr sz="1400" b="1">
+                <a:solidFill>
+                  <a:srgbClr val="FFFFFF"/>
+                </a:solidFill>
+                <a:latin typeface="Yu Gothic"/>
+              </a:rPr>
+              <a:t>5</a:t>
+            </a:r>
+          </a:p>
+        </p:txBody>
+      </p:sp>
+      <p:sp>
+        <p:nvSpPr>
+          <p:cNvPr id="29" name="TextBox 28"/>
+          <p:cNvSpPr txBox="1"/>
+          <p:nvPr/>
+        </p:nvSpPr>
+        <p:spPr>
+          <a:xfrm>
+            <a:off x="6035040" y="4617720"/>
+            <a:ext cx="4754880" cy="411480"/>
+          </a:xfrm>
+          <a:prstGeom prst="rect">
+            <a:avLst/>
+          </a:prstGeom>
+          <a:noFill/>
+        </p:spPr>
+        <p:txBody>
+          <a:bodyPr wrap="square" lIns="45720" rIns="45720" anchor="ctr">
+            <a:spAutoFit/>
+          </a:bodyPr>
+          <a:lstStyle/>
+          <a:p>
+            <a:pPr algn="l"/>
+            <a:r>
+              <a:rPr sz="2000" b="1">
+                <a:solidFill>
+                  <a:srgbClr val="333333"/>
+                </a:solidFill>
+                <a:latin typeface="Yu Gothic"/>
+              </a:rPr>
+              <a:t>最大積載量</a:t>
+            </a:r>
+          </a:p>
+        </p:txBody>
+      </p:sp>
+      <p:sp>
+        <p:nvSpPr>
+          <p:cNvPr id="30" name="TextBox 29"/>
+          <p:cNvSpPr txBox="1"/>
+          <p:nvPr/>
+        </p:nvSpPr>
+        <p:spPr>
+          <a:xfrm>
+            <a:off x="6035040" y="5001768"/>
+            <a:ext cx="4754880" cy="365760"/>
+          </a:xfrm>
+          <a:prstGeom prst="rect">
+            <a:avLst/>
+          </a:prstGeom>
+          <a:noFill/>
+        </p:spPr>
+        <p:txBody>
+          <a:bodyPr wrap="square" lIns="45720" rIns="45720" anchor="t">
+            <a:spAutoFit/>
+          </a:bodyPr>
+          <a:lstStyle/>
+          <a:p>
+            <a:pPr algn="l"/>
+            <a:r>
+              <a:rPr sz="1400" b="0">
+                <a:solidFill>
+                  <a:srgbClr val="666666"/>
+                </a:solidFill>
+                <a:latin typeface="Yu Gothic"/>
+              </a:rPr>
+              <a:t>350 になっている</a:t>
+            </a:r>
+          </a:p>
+        </p:txBody>
+      </p:sp>
+      <p:sp>
+        <p:nvSpPr>
+          <p:cNvPr id="31" name="TextBox 30"/>
+          <p:cNvSpPr txBox="1"/>
+          <p:nvPr/>
+        </p:nvSpPr>
+        <p:spPr>
+          <a:xfrm>
+            <a:off x="5669280" y="5989320"/>
+            <a:ext cx="5303520" cy="320040"/>
+          </a:xfrm>
+          <a:prstGeom prst="rect">
+            <a:avLst/>
+          </a:prstGeom>
+          <a:noFill/>
+        </p:spPr>
+        <p:txBody>
+          <a:bodyPr wrap="square" lIns="45720" rIns="45720" anchor="t">
+            <a:spAutoFit/>
+          </a:bodyPr>
+          <a:lstStyle/>
+          <a:p>
+            <a:pPr algn="l"/>
+            <a:r>
+              <a:rPr sz="1100" b="0">
+                <a:solidFill>
+                  <a:srgbClr val="666666"/>
+                </a:solidFill>
+                <a:latin typeface="Yu Gothic"/>
+              </a:rPr>
+              <a:t>※ 住所・氏名などの個人情報は、見本では塗りつぶしています</a:t>
+            </a:r>
+          </a:p>
+        </p:txBody>
+      </p:sp>
+    </p:spTree>
+  </p:cSld>
+  <p:clrMapOvr>
+    <a:masterClrMapping/>
+  </p:clrMapOvr>
+</p:sld>
+</file>
+
+<file path=ppt/slides/slide41.xml><?xml version="1.0" encoding="utf-8"?>
+<p:sld xmlns:a="http://schemas.openxmlformats.org/drawingml/2006/main" xmlns:p="http://schemas.openxmlformats.org/presentationml/2006/main" xmlns:r="http://schemas.openxmlformats.org/officeDocument/2006/relationships">
+  <p:cSld>
+    <p:spTree>
+      <p:nvGrpSpPr>
+        <p:cNvPr id="1" name=""/>
+        <p:cNvGrpSpPr/>
+        <p:nvPr/>
+      </p:nvGrpSpPr>
+      <p:grpSpPr/>
+      <p:sp>
+        <p:nvSpPr>
+          <p:cNvPr id="2" name="Rounded Rectangle 1"/>
+          <p:cNvSpPr/>
+          <p:nvPr/>
+        </p:nvSpPr>
+        <p:spPr>
+          <a:xfrm>
+            <a:off x="411480" y="777240"/>
+            <a:ext cx="502920" cy="384048"/>
+          </a:xfrm>
+          <a:prstGeom prst="roundRect">
+            <a:avLst>
+              <a:gd name="adj" fmla="val 8000"/>
+            </a:avLst>
+          </a:prstGeom>
+          <a:solidFill>
+            <a:srgbClr val="4FB6BE"/>
+          </a:solidFill>
+          <a:ln>
+            <a:noFill/>
+          </a:ln>
+          <a:effectLst/>
+        </p:spPr>
+        <p:style>
+          <a:lnRef idx="1">
+            <a:schemeClr val="accent1"/>
+          </a:lnRef>
+          <a:fillRef idx="3">
+            <a:schemeClr val="accent1"/>
+          </a:fillRef>
+          <a:effectRef idx="2">
+            <a:schemeClr val="accent1"/>
+          </a:effectRef>
+          <a:fontRef idx="minor">
+            <a:schemeClr val="lt1"/>
+          </a:fontRef>
+        </p:style>
+        <p:txBody>
+          <a:bodyPr rtlCol="0" anchor="ctr"/>
+          <a:lstStyle/>
+          <a:p>
+            <a:pPr algn="ctr"/>
+          </a:p>
+        </p:txBody>
+      </p:sp>
+      <p:sp>
+        <p:nvSpPr>
+          <p:cNvPr id="3" name="TextBox 2"/>
+          <p:cNvSpPr txBox="1"/>
+          <p:nvPr/>
+        </p:nvSpPr>
+        <p:spPr>
+          <a:xfrm>
+            <a:off x="411480" y="777240"/>
+            <a:ext cx="502920" cy="384048"/>
+          </a:xfrm>
+          <a:prstGeom prst="rect">
+            <a:avLst/>
+          </a:prstGeom>
+          <a:noFill/>
+        </p:spPr>
+        <p:txBody>
+          <a:bodyPr wrap="square" lIns="45720" rIns="45720" anchor="ctr">
+            <a:spAutoFit/>
+          </a:bodyPr>
+          <a:lstStyle/>
+          <a:p>
+            <a:pPr algn="ctr"/>
+            <a:r>
+              <a:rPr sz="1200" b="1">
+                <a:solidFill>
+                  <a:srgbClr val="FFFFFF"/>
+                </a:solidFill>
+                <a:latin typeface="Yu Gothic"/>
+              </a:rPr>
+              <a:t>①</a:t>
+            </a:r>
+          </a:p>
+        </p:txBody>
+      </p:sp>
+      <p:sp>
+        <p:nvSpPr>
+          <p:cNvPr id="4" name="TextBox 3"/>
+          <p:cNvSpPr txBox="1"/>
+          <p:nvPr/>
+        </p:nvSpPr>
+        <p:spPr>
+          <a:xfrm>
+            <a:off x="1078992" y="777240"/>
+            <a:ext cx="10607040" cy="384048"/>
+          </a:xfrm>
+          <a:prstGeom prst="rect">
+            <a:avLst/>
+          </a:prstGeom>
+          <a:noFill/>
+        </p:spPr>
+        <p:txBody>
+          <a:bodyPr wrap="square" lIns="45720" rIns="45720" anchor="ctr">
+            <a:spAutoFit/>
+          </a:bodyPr>
+          <a:lstStyle/>
+          <a:p>
+            <a:pPr algn="l"/>
+            <a:r>
+              <a:rPr sz="2000" b="1">
+                <a:solidFill>
+                  <a:srgbClr val="333333"/>
+                </a:solidFill>
+                <a:latin typeface="Yu Gothic"/>
+              </a:rPr>
+              <a:t>車検証（自動車検査証）</a:t>
+            </a:r>
+          </a:p>
+        </p:txBody>
+      </p:sp>
+      <p:pic>
+        <p:nvPicPr>
+          <p:cNvPr id="5" name="Picture 4" descr="m_c1.png"/>
+          <p:cNvPicPr>
+            <a:picLocks noChangeAspect="1"/>
+          </p:cNvPicPr>
+          <p:nvPr/>
+        </p:nvPicPr>
+        <p:blipFill>
+          <a:blip r:embed="rId2"/>
+          <a:stretch>
+            <a:fillRect/>
+          </a:stretch>
+        </p:blipFill>
+        <p:spPr>
+          <a:xfrm>
+            <a:off x="640080" y="1371600"/>
+            <a:ext cx="5954403" cy="4206240"/>
+          </a:xfrm>
+          <a:prstGeom prst="rect">
+            <a:avLst/>
+          </a:prstGeom>
+          <a:ln w="12700">
+            <a:solidFill>
+              <a:srgbClr val="BBBBBB"/>
+            </a:solidFill>
+          </a:ln>
+        </p:spPr>
+      </p:pic>
+      <p:sp>
+        <p:nvSpPr>
+          <p:cNvPr id="6" name="Rounded Rectangle 5"/>
+          <p:cNvSpPr/>
+          <p:nvPr/>
+        </p:nvSpPr>
+        <p:spPr>
+          <a:xfrm>
+            <a:off x="3913747" y="1965342"/>
+            <a:ext cx="658290" cy="338829"/>
+          </a:xfrm>
+          <a:prstGeom prst="roundRect">
+            <a:avLst>
+              <a:gd name="adj" fmla="val 12000"/>
+            </a:avLst>
+          </a:prstGeom>
+          <a:noFill/>
+          <a:ln w="38100">
+            <a:solidFill>
+              <a:srgbClr val="D32F2F"/>
+            </a:solidFill>
+          </a:ln>
+          <a:effectLst/>
+        </p:spPr>
+        <p:style>
+          <a:lnRef idx="1">
+            <a:schemeClr val="accent1"/>
+          </a:lnRef>
+          <a:fillRef idx="3">
+            <a:schemeClr val="accent1"/>
+          </a:fillRef>
+          <a:effectRef idx="2">
+            <a:schemeClr val="accent1"/>
+          </a:effectRef>
+          <a:fontRef idx="minor">
+            <a:schemeClr val="lt1"/>
+          </a:fontRef>
+        </p:style>
+        <p:txBody>
+          <a:bodyPr rtlCol="0" anchor="ctr"/>
+          <a:lstStyle/>
+          <a:p>
+            <a:pPr algn="ctr"/>
+          </a:p>
+        </p:txBody>
+      </p:sp>
+      <p:cxnSp>
+        <p:nvCxnSpPr>
+          <p:cNvPr id="7" name="Connector 6"/>
+          <p:cNvCxnSpPr/>
+          <p:nvPr/>
+        </p:nvCxnSpPr>
+        <p:spPr>
+          <a:xfrm flipV="1">
+            <a:off x="4572038" y="1804171"/>
+            <a:ext cx="2468842" cy="330586"/>
+          </a:xfrm>
+          <a:prstGeom prst="line">
+            <a:avLst/>
+          </a:prstGeom>
+          <a:ln w="22225">
+            <a:solidFill>
+              <a:srgbClr val="D32F2F"/>
+            </a:solidFill>
+          </a:ln>
+        </p:spPr>
+        <p:style>
+          <a:lnRef idx="2">
+            <a:schemeClr val="accent1"/>
+          </a:lnRef>
+          <a:fillRef idx="0">
+            <a:schemeClr val="accent1"/>
+          </a:fillRef>
+          <a:effectRef idx="1">
+            <a:schemeClr val="accent1"/>
+          </a:effectRef>
+          <a:fontRef idx="minor">
+            <a:schemeClr val="tx1"/>
+          </a:fontRef>
+        </p:style>
+      </p:cxnSp>
+      <p:sp>
+        <p:nvSpPr>
+          <p:cNvPr id="8" name="Oval 7"/>
+          <p:cNvSpPr/>
+          <p:nvPr/>
+        </p:nvSpPr>
+        <p:spPr>
+          <a:xfrm>
+            <a:off x="7077456" y="1612147"/>
+            <a:ext cx="384048" cy="384048"/>
+          </a:xfrm>
+          <a:prstGeom prst="ellipse">
+            <a:avLst/>
+          </a:prstGeom>
+          <a:solidFill>
+            <a:srgbClr val="D32F2F"/>
+          </a:solidFill>
+          <a:ln w="19050">
+            <a:solidFill>
+              <a:srgbClr val="FFFFFF"/>
+            </a:solidFill>
+          </a:ln>
+          <a:effectLst/>
+        </p:spPr>
+        <p:style>
+          <a:lnRef idx="1">
+            <a:schemeClr val="accent1"/>
+          </a:lnRef>
+          <a:fillRef idx="3">
+            <a:schemeClr val="accent1"/>
+          </a:fillRef>
+          <a:effectRef idx="2">
+            <a:schemeClr val="accent1"/>
+          </a:effectRef>
+          <a:fontRef idx="minor">
+            <a:schemeClr val="lt1"/>
+          </a:fontRef>
+        </p:style>
+        <p:txBody>
+          <a:bodyPr rtlCol="0" anchor="ctr" lIns="0" rIns="0" tIns="0" bIns="0"/>
+          <a:lstStyle/>
+          <a:p>
+            <a:pPr algn="ctr"/>
+            <a:r>
+              <a:rPr sz="1400" b="1">
+                <a:solidFill>
+                  <a:srgbClr val="FFFFFF"/>
+                </a:solidFill>
+                <a:latin typeface="Yu Gothic"/>
+              </a:rPr>
+              <a:t>1</a:t>
+            </a:r>
+          </a:p>
+        </p:txBody>
+      </p:sp>
+      <p:sp>
+        <p:nvSpPr>
+          <p:cNvPr id="9" name="TextBox 8"/>
+          <p:cNvSpPr txBox="1"/>
+          <p:nvPr/>
+        </p:nvSpPr>
+        <p:spPr>
+          <a:xfrm>
+            <a:off x="7635240" y="1529851"/>
+            <a:ext cx="4754880" cy="411480"/>
+          </a:xfrm>
+          <a:prstGeom prst="rect">
+            <a:avLst/>
+          </a:prstGeom>
+          <a:noFill/>
+        </p:spPr>
+        <p:txBody>
+          <a:bodyPr wrap="square" lIns="45720" rIns="45720" anchor="ctr">
+            <a:spAutoFit/>
+          </a:bodyPr>
+          <a:lstStyle/>
+          <a:p>
+            <a:pPr algn="l"/>
+            <a:r>
+              <a:rPr sz="2000" b="1">
+                <a:solidFill>
+                  <a:srgbClr val="333333"/>
+                </a:solidFill>
+                <a:latin typeface="Yu Gothic"/>
+              </a:rPr>
+              <a:t>事業用</a:t>
+            </a:r>
+          </a:p>
+        </p:txBody>
+      </p:sp>
+      <p:sp>
+        <p:nvSpPr>
+          <p:cNvPr id="10" name="TextBox 9"/>
+          <p:cNvSpPr txBox="1"/>
+          <p:nvPr/>
+        </p:nvSpPr>
+        <p:spPr>
+          <a:xfrm>
+            <a:off x="7635240" y="1913899"/>
+            <a:ext cx="4754880" cy="365760"/>
+          </a:xfrm>
+          <a:prstGeom prst="rect">
+            <a:avLst/>
+          </a:prstGeom>
+          <a:noFill/>
+        </p:spPr>
+        <p:txBody>
+          <a:bodyPr wrap="square" lIns="45720" rIns="45720" anchor="t">
+            <a:spAutoFit/>
+          </a:bodyPr>
+          <a:lstStyle/>
+          <a:p>
+            <a:pPr algn="l"/>
+            <a:r>
+              <a:rPr sz="1400" b="0">
+                <a:solidFill>
+                  <a:srgbClr val="666666"/>
+                </a:solidFill>
+                <a:latin typeface="Yu Gothic"/>
+              </a:rPr>
+              <a:t>事業用になっている</a:t>
+            </a:r>
+          </a:p>
+        </p:txBody>
+      </p:sp>
+      <p:sp>
+        <p:nvSpPr>
+          <p:cNvPr id="11" name="Rounded Rectangle 10"/>
+          <p:cNvSpPr/>
+          <p:nvPr/>
+        </p:nvSpPr>
+        <p:spPr>
+          <a:xfrm>
+            <a:off x="861117" y="2409038"/>
+            <a:ext cx="1101987" cy="303333"/>
+          </a:xfrm>
+          <a:prstGeom prst="roundRect">
+            <a:avLst>
+              <a:gd name="adj" fmla="val 12000"/>
+            </a:avLst>
+          </a:prstGeom>
+          <a:noFill/>
+          <a:ln w="38100">
+            <a:solidFill>
+              <a:srgbClr val="D32F2F"/>
+            </a:solidFill>
+          </a:ln>
+          <a:effectLst/>
+        </p:spPr>
+        <p:style>
+          <a:lnRef idx="1">
+            <a:schemeClr val="accent1"/>
+          </a:lnRef>
+          <a:fillRef idx="3">
+            <a:schemeClr val="accent1"/>
+          </a:fillRef>
+          <a:effectRef idx="2">
+            <a:schemeClr val="accent1"/>
+          </a:effectRef>
+          <a:fontRef idx="minor">
+            <a:schemeClr val="lt1"/>
+          </a:fontRef>
+        </p:style>
+        <p:txBody>
+          <a:bodyPr rtlCol="0" anchor="ctr"/>
+          <a:lstStyle/>
+          <a:p>
+            <a:pPr algn="ctr"/>
+          </a:p>
+        </p:txBody>
+      </p:sp>
+      <p:cxnSp>
+        <p:nvCxnSpPr>
+          <p:cNvPr id="12" name="Connector 11"/>
+          <p:cNvCxnSpPr/>
+          <p:nvPr/>
+        </p:nvCxnSpPr>
+        <p:spPr>
+          <a:xfrm>
+            <a:off x="1963104" y="2560705"/>
+            <a:ext cx="5077776" cy="20706"/>
+          </a:xfrm>
+          <a:prstGeom prst="line">
+            <a:avLst/>
+          </a:prstGeom>
+          <a:ln w="22225">
+            <a:solidFill>
+              <a:srgbClr val="D32F2F"/>
+            </a:solidFill>
+          </a:ln>
+        </p:spPr>
+        <p:style>
+          <a:lnRef idx="2">
+            <a:schemeClr val="accent1"/>
+          </a:lnRef>
+          <a:fillRef idx="0">
+            <a:schemeClr val="accent1"/>
+          </a:fillRef>
+          <a:effectRef idx="1">
+            <a:schemeClr val="accent1"/>
+          </a:effectRef>
+          <a:fontRef idx="minor">
+            <a:schemeClr val="tx1"/>
+          </a:fontRef>
+        </p:style>
+      </p:cxnSp>
+      <p:sp>
+        <p:nvSpPr>
+          <p:cNvPr id="13" name="Oval 12"/>
+          <p:cNvSpPr/>
+          <p:nvPr/>
+        </p:nvSpPr>
+        <p:spPr>
+          <a:xfrm>
+            <a:off x="7077456" y="2389387"/>
+            <a:ext cx="384048" cy="384048"/>
+          </a:xfrm>
+          <a:prstGeom prst="ellipse">
+            <a:avLst/>
+          </a:prstGeom>
+          <a:solidFill>
+            <a:srgbClr val="D32F2F"/>
+          </a:solidFill>
+          <a:ln w="19050">
+            <a:solidFill>
+              <a:srgbClr val="FFFFFF"/>
+            </a:solidFill>
+          </a:ln>
+          <a:effectLst/>
+        </p:spPr>
+        <p:style>
+          <a:lnRef idx="1">
+            <a:schemeClr val="accent1"/>
+          </a:lnRef>
+          <a:fillRef idx="3">
+            <a:schemeClr val="accent1"/>
+          </a:fillRef>
+          <a:effectRef idx="2">
+            <a:schemeClr val="accent1"/>
+          </a:effectRef>
+          <a:fontRef idx="minor">
+            <a:schemeClr val="lt1"/>
+          </a:fontRef>
+        </p:style>
+        <p:txBody>
+          <a:bodyPr rtlCol="0" anchor="ctr" lIns="0" rIns="0" tIns="0" bIns="0"/>
+          <a:lstStyle/>
+          <a:p>
+            <a:pPr algn="ctr"/>
+            <a:r>
+              <a:rPr sz="1400" b="1">
+                <a:solidFill>
+                  <a:srgbClr val="FFFFFF"/>
+                </a:solidFill>
+                <a:latin typeface="Yu Gothic"/>
+              </a:rPr>
+              <a:t>2</a:t>
+            </a:r>
+          </a:p>
+        </p:txBody>
+      </p:sp>
+      <p:sp>
+        <p:nvSpPr>
+          <p:cNvPr id="14" name="TextBox 13"/>
+          <p:cNvSpPr txBox="1"/>
+          <p:nvPr/>
+        </p:nvSpPr>
+        <p:spPr>
+          <a:xfrm>
+            <a:off x="7635240" y="2307091"/>
+            <a:ext cx="4754880" cy="411480"/>
+          </a:xfrm>
+          <a:prstGeom prst="rect">
+            <a:avLst/>
+          </a:prstGeom>
+          <a:noFill/>
+        </p:spPr>
+        <p:txBody>
+          <a:bodyPr wrap="square" lIns="45720" rIns="45720" anchor="ctr">
+            <a:spAutoFit/>
+          </a:bodyPr>
+          <a:lstStyle/>
+          <a:p>
+            <a:pPr algn="l"/>
+            <a:r>
+              <a:rPr sz="2000" b="1">
+                <a:solidFill>
+                  <a:srgbClr val="333333"/>
+                </a:solidFill>
+                <a:latin typeface="Yu Gothic"/>
+              </a:rPr>
+              <a:t>車台番号</a:t>
+            </a:r>
+          </a:p>
+        </p:txBody>
+      </p:sp>
+      <p:sp>
+        <p:nvSpPr>
+          <p:cNvPr id="15" name="TextBox 14"/>
+          <p:cNvSpPr txBox="1"/>
+          <p:nvPr/>
+        </p:nvSpPr>
+        <p:spPr>
+          <a:xfrm>
+            <a:off x="7635240" y="2691139"/>
+            <a:ext cx="4754880" cy="365760"/>
+          </a:xfrm>
+          <a:prstGeom prst="rect">
+            <a:avLst/>
+          </a:prstGeom>
+          <a:noFill/>
+        </p:spPr>
+        <p:txBody>
+          <a:bodyPr wrap="square" lIns="45720" rIns="45720" anchor="t">
+            <a:spAutoFit/>
+          </a:bodyPr>
+          <a:lstStyle/>
+          <a:p>
+            <a:pPr algn="l"/>
+            <a:r>
+              <a:rPr sz="1400" b="0">
+                <a:solidFill>
+                  <a:srgbClr val="666666"/>
+                </a:solidFill>
+                <a:latin typeface="Yu Gothic"/>
+              </a:rPr>
+              <a:t>任意保険・自賠責と同じ番号</a:t>
+            </a:r>
+          </a:p>
+        </p:txBody>
+      </p:sp>
+      <p:sp>
+        <p:nvSpPr>
+          <p:cNvPr id="16" name="Rounded Rectangle 15"/>
+          <p:cNvSpPr/>
+          <p:nvPr/>
+        </p:nvSpPr>
+        <p:spPr>
+          <a:xfrm>
+            <a:off x="1677518" y="2834987"/>
+            <a:ext cx="897886" cy="427568"/>
+          </a:xfrm>
+          <a:prstGeom prst="roundRect">
+            <a:avLst>
+              <a:gd name="adj" fmla="val 12000"/>
+            </a:avLst>
+          </a:prstGeom>
+          <a:noFill/>
+          <a:ln w="38100">
+            <a:solidFill>
+              <a:srgbClr val="D32F2F"/>
+            </a:solidFill>
+          </a:ln>
+          <a:effectLst/>
+        </p:spPr>
+        <p:style>
+          <a:lnRef idx="1">
+            <a:schemeClr val="accent1"/>
+          </a:lnRef>
+          <a:fillRef idx="3">
+            <a:schemeClr val="accent1"/>
+          </a:fillRef>
+          <a:effectRef idx="2">
+            <a:schemeClr val="accent1"/>
+          </a:effectRef>
+          <a:fontRef idx="minor">
+            <a:schemeClr val="lt1"/>
+          </a:fontRef>
+        </p:style>
+        <p:txBody>
+          <a:bodyPr rtlCol="0" anchor="ctr"/>
+          <a:lstStyle/>
+          <a:p>
+            <a:pPr algn="ctr"/>
+          </a:p>
+        </p:txBody>
+      </p:sp>
+      <p:cxnSp>
+        <p:nvCxnSpPr>
+          <p:cNvPr id="17" name="Connector 16"/>
+          <p:cNvCxnSpPr/>
+          <p:nvPr/>
+        </p:nvCxnSpPr>
+        <p:spPr>
+          <a:xfrm>
+            <a:off x="2575405" y="3048771"/>
+            <a:ext cx="4465475" cy="309880"/>
+          </a:xfrm>
+          <a:prstGeom prst="line">
+            <a:avLst/>
+          </a:prstGeom>
+          <a:ln w="22225">
+            <a:solidFill>
+              <a:srgbClr val="D32F2F"/>
+            </a:solidFill>
+          </a:ln>
+        </p:spPr>
+        <p:style>
+          <a:lnRef idx="2">
+            <a:schemeClr val="accent1"/>
+          </a:lnRef>
+          <a:fillRef idx="0">
+            <a:schemeClr val="accent1"/>
+          </a:fillRef>
+          <a:effectRef idx="1">
+            <a:schemeClr val="accent1"/>
+          </a:effectRef>
+          <a:fontRef idx="minor">
+            <a:schemeClr val="tx1"/>
+          </a:fontRef>
+        </p:style>
+      </p:cxnSp>
+      <p:sp>
+        <p:nvSpPr>
+          <p:cNvPr id="18" name="Oval 17"/>
+          <p:cNvSpPr/>
+          <p:nvPr/>
+        </p:nvSpPr>
+        <p:spPr>
+          <a:xfrm>
+            <a:off x="7077456" y="3166627"/>
+            <a:ext cx="384048" cy="384048"/>
+          </a:xfrm>
+          <a:prstGeom prst="ellipse">
+            <a:avLst/>
+          </a:prstGeom>
+          <a:solidFill>
+            <a:srgbClr val="D32F2F"/>
+          </a:solidFill>
+          <a:ln w="19050">
+            <a:solidFill>
+              <a:srgbClr val="FFFFFF"/>
+            </a:solidFill>
+          </a:ln>
+          <a:effectLst/>
+        </p:spPr>
+        <p:style>
+          <a:lnRef idx="1">
+            <a:schemeClr val="accent1"/>
+          </a:lnRef>
+          <a:fillRef idx="3">
+            <a:schemeClr val="accent1"/>
+          </a:fillRef>
+          <a:effectRef idx="2">
+            <a:schemeClr val="accent1"/>
+          </a:effectRef>
+          <a:fontRef idx="minor">
+            <a:schemeClr val="lt1"/>
+          </a:fontRef>
+        </p:style>
+        <p:txBody>
+          <a:bodyPr rtlCol="0" anchor="ctr" lIns="0" rIns="0" tIns="0" bIns="0"/>
+          <a:lstStyle/>
+          <a:p>
+            <a:pPr algn="ctr"/>
+            <a:r>
+              <a:rPr sz="1400" b="1">
+                <a:solidFill>
+                  <a:srgbClr val="FFFFFF"/>
+                </a:solidFill>
+                <a:latin typeface="Yu Gothic"/>
+              </a:rPr>
+              <a:t>3</a:t>
+            </a:r>
+          </a:p>
+        </p:txBody>
+      </p:sp>
+      <p:sp>
+        <p:nvSpPr>
+          <p:cNvPr id="19" name="TextBox 18"/>
+          <p:cNvSpPr txBox="1"/>
+          <p:nvPr/>
+        </p:nvSpPr>
+        <p:spPr>
+          <a:xfrm>
+            <a:off x="7635240" y="3084331"/>
+            <a:ext cx="4754880" cy="411480"/>
+          </a:xfrm>
+          <a:prstGeom prst="rect">
+            <a:avLst/>
+          </a:prstGeom>
+          <a:noFill/>
+        </p:spPr>
+        <p:txBody>
+          <a:bodyPr wrap="square" lIns="45720" rIns="45720" anchor="ctr">
+            <a:spAutoFit/>
+          </a:bodyPr>
+          <a:lstStyle/>
+          <a:p>
+            <a:pPr algn="l"/>
+            <a:r>
+              <a:rPr sz="2000" b="1">
+                <a:solidFill>
+                  <a:srgbClr val="333333"/>
+                </a:solidFill>
+                <a:latin typeface="Yu Gothic"/>
+              </a:rPr>
+              <a:t>最大積載量</a:t>
+            </a:r>
+          </a:p>
+        </p:txBody>
+      </p:sp>
+      <p:sp>
+        <p:nvSpPr>
+          <p:cNvPr id="20" name="TextBox 19"/>
+          <p:cNvSpPr txBox="1"/>
+          <p:nvPr/>
+        </p:nvSpPr>
+        <p:spPr>
+          <a:xfrm>
+            <a:off x="7635240" y="3468379"/>
+            <a:ext cx="4754880" cy="365760"/>
+          </a:xfrm>
+          <a:prstGeom prst="rect">
+            <a:avLst/>
+          </a:prstGeom>
+          <a:noFill/>
+        </p:spPr>
+        <p:txBody>
+          <a:bodyPr wrap="square" lIns="45720" rIns="45720" anchor="t">
+            <a:spAutoFit/>
+          </a:bodyPr>
+          <a:lstStyle/>
+          <a:p>
+            <a:pPr algn="l"/>
+            <a:r>
+              <a:rPr sz="1400" b="0">
+                <a:solidFill>
+                  <a:srgbClr val="666666"/>
+                </a:solidFill>
+                <a:latin typeface="Yu Gothic"/>
+              </a:rPr>
+              <a:t>350 になっている</a:t>
+            </a:r>
+          </a:p>
+        </p:txBody>
+      </p:sp>
+      <p:sp>
+        <p:nvSpPr>
+          <p:cNvPr id="21" name="TextBox 20"/>
+          <p:cNvSpPr txBox="1"/>
+          <p:nvPr/>
+        </p:nvSpPr>
+        <p:spPr>
+          <a:xfrm>
+            <a:off x="7223760" y="5989320"/>
+            <a:ext cx="5303520" cy="320040"/>
+          </a:xfrm>
+          <a:prstGeom prst="rect">
+            <a:avLst/>
+          </a:prstGeom>
+          <a:noFill/>
+        </p:spPr>
+        <p:txBody>
+          <a:bodyPr wrap="square" lIns="45720" rIns="45720" anchor="t">
+            <a:spAutoFit/>
+          </a:bodyPr>
+          <a:lstStyle/>
+          <a:p>
+            <a:pPr algn="l"/>
+            <a:r>
+              <a:rPr sz="1100" b="0">
+                <a:solidFill>
+                  <a:srgbClr val="666666"/>
+                </a:solidFill>
+                <a:latin typeface="Yu Gothic"/>
+              </a:rPr>
+              <a:t>※ 住所・氏名などの個人情報は、見本では塗りつぶしています</a:t>
+            </a:r>
+          </a:p>
+        </p:txBody>
+      </p:sp>
+    </p:spTree>
+  </p:cSld>
+  <p:clrMapOvr>
+    <a:masterClrMapping/>
+  </p:clrMapOvr>
+</p:sld>
+</file>
+
+<file path=ppt/slides/slide42.xml><?xml version="1.0" encoding="utf-8"?>
+<p:sld xmlns:a="http://schemas.openxmlformats.org/drawingml/2006/main" xmlns:p="http://schemas.openxmlformats.org/presentationml/2006/main" xmlns:r="http://schemas.openxmlformats.org/officeDocument/2006/relationships">
+  <p:cSld>
+    <p:spTree>
+      <p:nvGrpSpPr>
+        <p:cNvPr id="1" name=""/>
+        <p:cNvGrpSpPr/>
+        <p:nvPr/>
+      </p:nvGrpSpPr>
+      <p:grpSpPr/>
+      <p:sp>
+        <p:nvSpPr>
+          <p:cNvPr id="2" name="Rounded Rectangle 1"/>
+          <p:cNvSpPr/>
+          <p:nvPr/>
+        </p:nvSpPr>
+        <p:spPr>
+          <a:xfrm>
+            <a:off x="411480" y="777240"/>
+            <a:ext cx="502920" cy="384048"/>
+          </a:xfrm>
+          <a:prstGeom prst="roundRect">
+            <a:avLst>
+              <a:gd name="adj" fmla="val 8000"/>
+            </a:avLst>
+          </a:prstGeom>
+          <a:solidFill>
+            <a:srgbClr val="4FB6BE"/>
+          </a:solidFill>
+          <a:ln>
+            <a:noFill/>
+          </a:ln>
+          <a:effectLst/>
+        </p:spPr>
+        <p:style>
+          <a:lnRef idx="1">
+            <a:schemeClr val="accent1"/>
+          </a:lnRef>
+          <a:fillRef idx="3">
+            <a:schemeClr val="accent1"/>
+          </a:fillRef>
+          <a:effectRef idx="2">
+            <a:schemeClr val="accent1"/>
+          </a:effectRef>
+          <a:fontRef idx="minor">
+            <a:schemeClr val="lt1"/>
+          </a:fontRef>
+        </p:style>
+        <p:txBody>
+          <a:bodyPr rtlCol="0" anchor="ctr"/>
+          <a:lstStyle/>
+          <a:p>
+            <a:pPr algn="ctr"/>
+          </a:p>
+        </p:txBody>
+      </p:sp>
+      <p:sp>
+        <p:nvSpPr>
+          <p:cNvPr id="3" name="TextBox 2"/>
+          <p:cNvSpPr txBox="1"/>
+          <p:nvPr/>
+        </p:nvSpPr>
+        <p:spPr>
+          <a:xfrm>
+            <a:off x="411480" y="777240"/>
+            <a:ext cx="502920" cy="384048"/>
+          </a:xfrm>
+          <a:prstGeom prst="rect">
+            <a:avLst/>
+          </a:prstGeom>
+          <a:noFill/>
+        </p:spPr>
+        <p:txBody>
+          <a:bodyPr wrap="square" lIns="45720" rIns="45720" anchor="ctr">
+            <a:spAutoFit/>
+          </a:bodyPr>
+          <a:lstStyle/>
+          <a:p>
+            <a:pPr algn="ctr"/>
+            <a:r>
+              <a:rPr sz="1200" b="1">
+                <a:solidFill>
+                  <a:srgbClr val="FFFFFF"/>
+                </a:solidFill>
+                <a:latin typeface="Yu Gothic"/>
+              </a:rPr>
+              <a:t>①</a:t>
+            </a:r>
+          </a:p>
+        </p:txBody>
+      </p:sp>
+      <p:sp>
+        <p:nvSpPr>
+          <p:cNvPr id="4" name="TextBox 3"/>
+          <p:cNvSpPr txBox="1"/>
+          <p:nvPr/>
+        </p:nvSpPr>
+        <p:spPr>
+          <a:xfrm>
+            <a:off x="1078992" y="777240"/>
+            <a:ext cx="10607040" cy="384048"/>
+          </a:xfrm>
+          <a:prstGeom prst="rect">
+            <a:avLst/>
+          </a:prstGeom>
+          <a:noFill/>
+        </p:spPr>
+        <p:txBody>
+          <a:bodyPr wrap="square" lIns="45720" rIns="45720" anchor="ctr">
+            <a:spAutoFit/>
+          </a:bodyPr>
+          <a:lstStyle/>
+          <a:p>
+            <a:pPr algn="l"/>
+            <a:r>
+              <a:rPr sz="2000" b="1">
+                <a:solidFill>
+                  <a:srgbClr val="333333"/>
+                </a:solidFill>
+                <a:latin typeface="Yu Gothic"/>
+              </a:rPr>
+              <a:t>自賠責保険</a:t>
+            </a:r>
+          </a:p>
+        </p:txBody>
+      </p:sp>
+      <p:pic>
+        <p:nvPicPr>
+          <p:cNvPr id="5" name="Picture 4" descr="m_b1.png"/>
+          <p:cNvPicPr>
+            <a:picLocks noChangeAspect="1"/>
+          </p:cNvPicPr>
+          <p:nvPr/>
+        </p:nvPicPr>
+        <p:blipFill>
+          <a:blip r:embed="rId2"/>
+          <a:stretch>
+            <a:fillRect/>
+          </a:stretch>
+        </p:blipFill>
+        <p:spPr>
+          <a:xfrm>
+            <a:off x="914400" y="1325880"/>
+            <a:ext cx="3491474" cy="4937760"/>
+          </a:xfrm>
+          <a:prstGeom prst="rect">
+            <a:avLst/>
+          </a:prstGeom>
+          <a:ln w="12700">
+            <a:solidFill>
+              <a:srgbClr val="BBBBBB"/>
+            </a:solidFill>
+          </a:ln>
+        </p:spPr>
+      </p:pic>
+      <p:sp>
+        <p:nvSpPr>
+          <p:cNvPr id="6" name="Rounded Rectangle 5"/>
+          <p:cNvSpPr/>
+          <p:nvPr/>
+        </p:nvSpPr>
+        <p:spPr>
+          <a:xfrm>
+            <a:off x="1715237" y="2916759"/>
+            <a:ext cx="1456550" cy="284230"/>
+          </a:xfrm>
+          <a:prstGeom prst="roundRect">
+            <a:avLst>
+              <a:gd name="adj" fmla="val 12000"/>
+            </a:avLst>
+          </a:prstGeom>
+          <a:noFill/>
+          <a:ln w="38100">
+            <a:solidFill>
+              <a:srgbClr val="D32F2F"/>
+            </a:solidFill>
+          </a:ln>
+          <a:effectLst/>
+        </p:spPr>
+        <p:style>
+          <a:lnRef idx="1">
+            <a:schemeClr val="accent1"/>
+          </a:lnRef>
+          <a:fillRef idx="3">
+            <a:schemeClr val="accent1"/>
+          </a:fillRef>
+          <a:effectRef idx="2">
+            <a:schemeClr val="accent1"/>
+          </a:effectRef>
+          <a:fontRef idx="minor">
+            <a:schemeClr val="lt1"/>
+          </a:fontRef>
+        </p:style>
+        <p:txBody>
+          <a:bodyPr rtlCol="0" anchor="ctr"/>
+          <a:lstStyle/>
+          <a:p>
+            <a:pPr algn="ctr"/>
+          </a:p>
+        </p:txBody>
+      </p:sp>
+      <p:cxnSp>
+        <p:nvCxnSpPr>
+          <p:cNvPr id="7" name="Connector 6"/>
+          <p:cNvCxnSpPr/>
+          <p:nvPr/>
+        </p:nvCxnSpPr>
+        <p:spPr>
+          <a:xfrm flipV="1">
+            <a:off x="3171788" y="2835908"/>
+            <a:ext cx="2268892" cy="222966"/>
+          </a:xfrm>
+          <a:prstGeom prst="line">
+            <a:avLst/>
+          </a:prstGeom>
+          <a:ln w="22225">
+            <a:solidFill>
+              <a:srgbClr val="D32F2F"/>
+            </a:solidFill>
+          </a:ln>
+        </p:spPr>
+        <p:style>
+          <a:lnRef idx="2">
+            <a:schemeClr val="accent1"/>
+          </a:lnRef>
+          <a:fillRef idx="0">
+            <a:schemeClr val="accent1"/>
+          </a:fillRef>
+          <a:effectRef idx="1">
+            <a:schemeClr val="accent1"/>
+          </a:effectRef>
+          <a:fontRef idx="minor">
+            <a:schemeClr val="tx1"/>
+          </a:fontRef>
+        </p:style>
+      </p:cxnSp>
+      <p:sp>
+        <p:nvSpPr>
+          <p:cNvPr id="8" name="Oval 7"/>
+          <p:cNvSpPr/>
+          <p:nvPr/>
+        </p:nvSpPr>
+        <p:spPr>
+          <a:xfrm>
+            <a:off x="5477256" y="2643884"/>
+            <a:ext cx="384048" cy="384048"/>
+          </a:xfrm>
+          <a:prstGeom prst="ellipse">
+            <a:avLst/>
+          </a:prstGeom>
+          <a:solidFill>
+            <a:srgbClr val="D32F2F"/>
+          </a:solidFill>
+          <a:ln w="19050">
+            <a:solidFill>
+              <a:srgbClr val="FFFFFF"/>
+            </a:solidFill>
+          </a:ln>
+          <a:effectLst/>
+        </p:spPr>
+        <p:style>
+          <a:lnRef idx="1">
+            <a:schemeClr val="accent1"/>
+          </a:lnRef>
+          <a:fillRef idx="3">
+            <a:schemeClr val="accent1"/>
+          </a:fillRef>
+          <a:effectRef idx="2">
+            <a:schemeClr val="accent1"/>
+          </a:effectRef>
+          <a:fontRef idx="minor">
+            <a:schemeClr val="lt1"/>
+          </a:fontRef>
+        </p:style>
+        <p:txBody>
+          <a:bodyPr rtlCol="0" anchor="ctr" lIns="0" rIns="0" tIns="0" bIns="0"/>
+          <a:lstStyle/>
+          <a:p>
+            <a:pPr algn="ctr"/>
+            <a:r>
+              <a:rPr sz="1400" b="1">
+                <a:solidFill>
+                  <a:srgbClr val="FFFFFF"/>
+                </a:solidFill>
+                <a:latin typeface="Yu Gothic"/>
+              </a:rPr>
+              <a:t>1</a:t>
+            </a:r>
+          </a:p>
+        </p:txBody>
+      </p:sp>
+      <p:sp>
+        <p:nvSpPr>
+          <p:cNvPr id="9" name="TextBox 8"/>
+          <p:cNvSpPr txBox="1"/>
+          <p:nvPr/>
+        </p:nvSpPr>
+        <p:spPr>
+          <a:xfrm>
+            <a:off x="6035040" y="2561588"/>
+            <a:ext cx="4754880" cy="411480"/>
+          </a:xfrm>
+          <a:prstGeom prst="rect">
+            <a:avLst/>
+          </a:prstGeom>
+          <a:noFill/>
+        </p:spPr>
+        <p:txBody>
+          <a:bodyPr wrap="square" lIns="45720" rIns="45720" anchor="ctr">
+            <a:spAutoFit/>
+          </a:bodyPr>
+          <a:lstStyle/>
+          <a:p>
+            <a:pPr algn="l"/>
+            <a:r>
+              <a:rPr sz="2000" b="1">
+                <a:solidFill>
+                  <a:srgbClr val="333333"/>
+                </a:solidFill>
+                <a:latin typeface="Yu Gothic"/>
+              </a:rPr>
+              <a:t>車台番号</a:t>
+            </a:r>
+          </a:p>
+        </p:txBody>
+      </p:sp>
+      <p:sp>
+        <p:nvSpPr>
+          <p:cNvPr id="10" name="TextBox 9"/>
+          <p:cNvSpPr txBox="1"/>
+          <p:nvPr/>
+        </p:nvSpPr>
+        <p:spPr>
+          <a:xfrm>
+            <a:off x="6035040" y="2945636"/>
+            <a:ext cx="4754880" cy="365760"/>
+          </a:xfrm>
+          <a:prstGeom prst="rect">
+            <a:avLst/>
+          </a:prstGeom>
+          <a:noFill/>
+        </p:spPr>
+        <p:txBody>
+          <a:bodyPr wrap="square" lIns="45720" rIns="45720" anchor="t">
+            <a:spAutoFit/>
+          </a:bodyPr>
+          <a:lstStyle/>
+          <a:p>
+            <a:pPr algn="l"/>
+            <a:r>
+              <a:rPr sz="1400" b="0">
+                <a:solidFill>
+                  <a:srgbClr val="666666"/>
+                </a:solidFill>
+                <a:latin typeface="Yu Gothic"/>
+              </a:rPr>
+              <a:t>車検証と同じ番号</a:t>
+            </a:r>
+          </a:p>
+        </p:txBody>
+      </p:sp>
+      <p:sp>
+        <p:nvSpPr>
+          <p:cNvPr id="11" name="Rounded Rectangle 10"/>
+          <p:cNvSpPr/>
+          <p:nvPr/>
+        </p:nvSpPr>
+        <p:spPr>
+          <a:xfrm>
+            <a:off x="1715237" y="3197096"/>
+            <a:ext cx="1469293" cy="386171"/>
+          </a:xfrm>
+          <a:prstGeom prst="roundRect">
+            <a:avLst>
+              <a:gd name="adj" fmla="val 12000"/>
+            </a:avLst>
+          </a:prstGeom>
+          <a:noFill/>
+          <a:ln w="38100">
+            <a:solidFill>
+              <a:srgbClr val="D32F2F"/>
+            </a:solidFill>
+          </a:ln>
+          <a:effectLst/>
+        </p:spPr>
+        <p:style>
+          <a:lnRef idx="1">
+            <a:schemeClr val="accent1"/>
+          </a:lnRef>
+          <a:fillRef idx="3">
+            <a:schemeClr val="accent1"/>
+          </a:fillRef>
+          <a:effectRef idx="2">
+            <a:schemeClr val="accent1"/>
+          </a:effectRef>
+          <a:fontRef idx="minor">
+            <a:schemeClr val="lt1"/>
+          </a:fontRef>
+        </p:style>
+        <p:txBody>
+          <a:bodyPr rtlCol="0" anchor="ctr"/>
+          <a:lstStyle/>
+          <a:p>
+            <a:pPr algn="ctr"/>
+          </a:p>
+        </p:txBody>
+      </p:sp>
+      <p:cxnSp>
+        <p:nvCxnSpPr>
+          <p:cNvPr id="12" name="Connector 11"/>
+          <p:cNvCxnSpPr/>
+          <p:nvPr/>
+        </p:nvCxnSpPr>
+        <p:spPr>
+          <a:xfrm>
+            <a:off x="3184530" y="3390182"/>
+            <a:ext cx="2256150" cy="222966"/>
+          </a:xfrm>
+          <a:prstGeom prst="line">
+            <a:avLst/>
+          </a:prstGeom>
+          <a:ln w="22225">
+            <a:solidFill>
+              <a:srgbClr val="D32F2F"/>
+            </a:solidFill>
+          </a:ln>
+        </p:spPr>
+        <p:style>
+          <a:lnRef idx="2">
+            <a:schemeClr val="accent1"/>
+          </a:lnRef>
+          <a:fillRef idx="0">
+            <a:schemeClr val="accent1"/>
+          </a:fillRef>
+          <a:effectRef idx="1">
+            <a:schemeClr val="accent1"/>
+          </a:effectRef>
+          <a:fontRef idx="minor">
+            <a:schemeClr val="tx1"/>
+          </a:fontRef>
+        </p:style>
+      </p:cxnSp>
+      <p:sp>
+        <p:nvSpPr>
+          <p:cNvPr id="13" name="Oval 12"/>
+          <p:cNvSpPr/>
+          <p:nvPr/>
+        </p:nvSpPr>
+        <p:spPr>
+          <a:xfrm>
+            <a:off x="5477256" y="3421124"/>
+            <a:ext cx="384048" cy="384048"/>
+          </a:xfrm>
+          <a:prstGeom prst="ellipse">
+            <a:avLst/>
+          </a:prstGeom>
+          <a:solidFill>
+            <a:srgbClr val="D32F2F"/>
+          </a:solidFill>
+          <a:ln w="19050">
+            <a:solidFill>
+              <a:srgbClr val="FFFFFF"/>
+            </a:solidFill>
+          </a:ln>
+          <a:effectLst/>
+        </p:spPr>
+        <p:style>
+          <a:lnRef idx="1">
+            <a:schemeClr val="accent1"/>
+          </a:lnRef>
+          <a:fillRef idx="3">
+            <a:schemeClr val="accent1"/>
+          </a:fillRef>
+          <a:effectRef idx="2">
+            <a:schemeClr val="accent1"/>
+          </a:effectRef>
+          <a:fontRef idx="minor">
+            <a:schemeClr val="lt1"/>
+          </a:fontRef>
+        </p:style>
+        <p:txBody>
+          <a:bodyPr rtlCol="0" anchor="ctr" lIns="0" rIns="0" tIns="0" bIns="0"/>
+          <a:lstStyle/>
+          <a:p>
+            <a:pPr algn="ctr"/>
+            <a:r>
+              <a:rPr sz="1400" b="1">
+                <a:solidFill>
+                  <a:srgbClr val="FFFFFF"/>
+                </a:solidFill>
+                <a:latin typeface="Yu Gothic"/>
+              </a:rPr>
+              <a:t>2</a:t>
+            </a:r>
+          </a:p>
+        </p:txBody>
+      </p:sp>
+      <p:sp>
+        <p:nvSpPr>
+          <p:cNvPr id="14" name="TextBox 13"/>
+          <p:cNvSpPr txBox="1"/>
+          <p:nvPr/>
+        </p:nvSpPr>
+        <p:spPr>
+          <a:xfrm>
+            <a:off x="6035040" y="3338828"/>
+            <a:ext cx="4754880" cy="411480"/>
+          </a:xfrm>
+          <a:prstGeom prst="rect">
+            <a:avLst/>
+          </a:prstGeom>
+          <a:noFill/>
+        </p:spPr>
+        <p:txBody>
+          <a:bodyPr wrap="square" lIns="45720" rIns="45720" anchor="ctr">
+            <a:spAutoFit/>
+          </a:bodyPr>
+          <a:lstStyle/>
+          <a:p>
+            <a:pPr algn="l"/>
+            <a:r>
+              <a:rPr sz="2000" b="1">
+                <a:solidFill>
+                  <a:srgbClr val="333333"/>
+                </a:solidFill>
+                <a:latin typeface="Yu Gothic"/>
+              </a:rPr>
+              <a:t>保険期間</a:t>
+            </a:r>
+          </a:p>
+        </p:txBody>
+      </p:sp>
+      <p:sp>
+        <p:nvSpPr>
+          <p:cNvPr id="15" name="TextBox 14"/>
+          <p:cNvSpPr txBox="1"/>
+          <p:nvPr/>
+        </p:nvSpPr>
+        <p:spPr>
+          <a:xfrm>
+            <a:off x="6035040" y="3722876"/>
+            <a:ext cx="4754880" cy="365760"/>
+          </a:xfrm>
+          <a:prstGeom prst="rect">
+            <a:avLst/>
+          </a:prstGeom>
+          <a:noFill/>
+        </p:spPr>
+        <p:txBody>
+          <a:bodyPr wrap="square" lIns="45720" rIns="45720" anchor="t">
+            <a:spAutoFit/>
+          </a:bodyPr>
+          <a:lstStyle/>
+          <a:p>
+            <a:pPr algn="l"/>
+            <a:r>
+              <a:rPr sz="1400" b="0">
+                <a:solidFill>
+                  <a:srgbClr val="666666"/>
+                </a:solidFill>
+                <a:latin typeface="Yu Gothic"/>
+              </a:rPr>
+              <a:t>期限が切れていない</a:t>
+            </a:r>
+          </a:p>
+        </p:txBody>
+      </p:sp>
+      <p:sp>
+        <p:nvSpPr>
+          <p:cNvPr id="16" name="TextBox 15"/>
+          <p:cNvSpPr txBox="1"/>
+          <p:nvPr/>
+        </p:nvSpPr>
+        <p:spPr>
+          <a:xfrm>
+            <a:off x="5669280" y="5989320"/>
+            <a:ext cx="5303520" cy="320040"/>
+          </a:xfrm>
+          <a:prstGeom prst="rect">
+            <a:avLst/>
+          </a:prstGeom>
+          <a:noFill/>
+        </p:spPr>
+        <p:txBody>
+          <a:bodyPr wrap="square" lIns="45720" rIns="45720" anchor="t">
+            <a:spAutoFit/>
+          </a:bodyPr>
+          <a:lstStyle/>
+          <a:p>
+            <a:pPr algn="l"/>
+            <a:r>
+              <a:rPr sz="1100" b="0">
+                <a:solidFill>
+                  <a:srgbClr val="666666"/>
+                </a:solidFill>
+                <a:latin typeface="Yu Gothic"/>
+              </a:rPr>
+              <a:t>※ 住所・氏名などの個人情報は、見本では塗りつぶしています</a:t>
+            </a:r>
+          </a:p>
+        </p:txBody>
+      </p:sp>
+    </p:spTree>
+  </p:cSld>
+  <p:clrMapOvr>
+    <a:masterClrMapping/>
+  </p:clrMapOvr>
+</p:sld>
+</file>
+
+<file path=ppt/slides/slide43.xml><?xml version="1.0" encoding="utf-8"?>
+<p:sld xmlns:a="http://schemas.openxmlformats.org/drawingml/2006/main" xmlns:p="http://schemas.openxmlformats.org/presentationml/2006/main" xmlns:r="http://schemas.openxmlformats.org/officeDocument/2006/relationships">
+  <p:cSld>
+    <p:spTree>
+      <p:nvGrpSpPr>
+        <p:cNvPr id="1" name=""/>
+        <p:cNvGrpSpPr/>
+        <p:nvPr/>
+      </p:nvGrpSpPr>
+      <p:grpSpPr/>
+      <p:sp>
+        <p:nvSpPr>
+          <p:cNvPr id="2" name="Rounded Rectangle 1"/>
+          <p:cNvSpPr/>
+          <p:nvPr/>
+        </p:nvSpPr>
+        <p:spPr>
+          <a:xfrm>
+            <a:off x="411480" y="777240"/>
+            <a:ext cx="502920" cy="384048"/>
+          </a:xfrm>
+          <a:prstGeom prst="roundRect">
+            <a:avLst>
+              <a:gd name="adj" fmla="val 8000"/>
+            </a:avLst>
+          </a:prstGeom>
+          <a:solidFill>
+            <a:srgbClr val="4FB6BE"/>
+          </a:solidFill>
+          <a:ln>
+            <a:noFill/>
+          </a:ln>
+          <a:effectLst/>
+        </p:spPr>
+        <p:style>
+          <a:lnRef idx="1">
+            <a:schemeClr val="accent1"/>
+          </a:lnRef>
+          <a:fillRef idx="3">
+            <a:schemeClr val="accent1"/>
+          </a:fillRef>
+          <a:effectRef idx="2">
+            <a:schemeClr val="accent1"/>
+          </a:effectRef>
+          <a:fontRef idx="minor">
+            <a:schemeClr val="lt1"/>
+          </a:fontRef>
+        </p:style>
+        <p:txBody>
+          <a:bodyPr rtlCol="0" anchor="ctr"/>
+          <a:lstStyle/>
+          <a:p>
+            <a:pPr algn="ctr"/>
+          </a:p>
+        </p:txBody>
+      </p:sp>
+      <p:sp>
+        <p:nvSpPr>
+          <p:cNvPr id="3" name="TextBox 2"/>
+          <p:cNvSpPr txBox="1"/>
+          <p:nvPr/>
+        </p:nvSpPr>
+        <p:spPr>
+          <a:xfrm>
+            <a:off x="411480" y="777240"/>
+            <a:ext cx="502920" cy="384048"/>
+          </a:xfrm>
+          <a:prstGeom prst="rect">
+            <a:avLst/>
+          </a:prstGeom>
+          <a:noFill/>
+        </p:spPr>
+        <p:txBody>
+          <a:bodyPr wrap="square" lIns="45720" rIns="45720" anchor="ctr">
+            <a:spAutoFit/>
+          </a:bodyPr>
+          <a:lstStyle/>
+          <a:p>
+            <a:pPr algn="ctr"/>
+            <a:r>
+              <a:rPr sz="1200" b="1">
+                <a:solidFill>
+                  <a:srgbClr val="FFFFFF"/>
+                </a:solidFill>
+                <a:latin typeface="Yu Gothic"/>
+              </a:rPr>
+              <a:t>①</a:t>
+            </a:r>
+          </a:p>
+        </p:txBody>
+      </p:sp>
+      <p:sp>
+        <p:nvSpPr>
+          <p:cNvPr id="4" name="TextBox 3"/>
+          <p:cNvSpPr txBox="1"/>
+          <p:nvPr/>
+        </p:nvSpPr>
+        <p:spPr>
+          <a:xfrm>
+            <a:off x="1078992" y="777240"/>
+            <a:ext cx="10607040" cy="384048"/>
+          </a:xfrm>
+          <a:prstGeom prst="rect">
+            <a:avLst/>
+          </a:prstGeom>
+          <a:noFill/>
+        </p:spPr>
+        <p:txBody>
+          <a:bodyPr wrap="square" lIns="45720" rIns="45720" anchor="ctr">
+            <a:spAutoFit/>
+          </a:bodyPr>
+          <a:lstStyle/>
+          <a:p>
+            <a:pPr algn="l"/>
+            <a:r>
+              <a:rPr sz="2000" b="1">
+                <a:solidFill>
+                  <a:srgbClr val="333333"/>
+                </a:solidFill>
+                <a:latin typeface="Yu Gothic"/>
+              </a:rPr>
+              <a:t>任意保険（ご契約内容 1ページ目）</a:t>
+            </a:r>
+          </a:p>
+        </p:txBody>
+      </p:sp>
+      <p:pic>
+        <p:nvPicPr>
+          <p:cNvPr id="5" name="Picture 4" descr="m_a1.png"/>
+          <p:cNvPicPr>
+            <a:picLocks noChangeAspect="1"/>
+          </p:cNvPicPr>
+          <p:nvPr/>
+        </p:nvPicPr>
+        <p:blipFill>
+          <a:blip r:embed="rId2"/>
+          <a:stretch>
+            <a:fillRect/>
+          </a:stretch>
+        </p:blipFill>
+        <p:spPr>
+          <a:xfrm>
+            <a:off x="548640" y="1371600"/>
+            <a:ext cx="5779922" cy="4480560"/>
+          </a:xfrm>
+          <a:prstGeom prst="rect">
+            <a:avLst/>
+          </a:prstGeom>
+          <a:ln w="12700">
+            <a:solidFill>
+              <a:srgbClr val="BBBBBB"/>
+            </a:solidFill>
+          </a:ln>
+        </p:spPr>
+      </p:pic>
+      <p:sp>
+        <p:nvSpPr>
+          <p:cNvPr id="6" name="Rounded Rectangle 5"/>
+          <p:cNvSpPr/>
+          <p:nvPr/>
+        </p:nvSpPr>
+        <p:spPr>
+          <a:xfrm>
+            <a:off x="1775764" y="4017568"/>
+            <a:ext cx="2444496" cy="383438"/>
+          </a:xfrm>
+          <a:prstGeom prst="roundRect">
+            <a:avLst>
+              <a:gd name="adj" fmla="val 12000"/>
+            </a:avLst>
+          </a:prstGeom>
+          <a:noFill/>
+          <a:ln w="38100">
+            <a:solidFill>
+              <a:srgbClr val="D32F2F"/>
+            </a:solidFill>
+          </a:ln>
+          <a:effectLst/>
+        </p:spPr>
+        <p:style>
+          <a:lnRef idx="1">
+            <a:schemeClr val="accent1"/>
+          </a:lnRef>
+          <a:fillRef idx="3">
+            <a:schemeClr val="accent1"/>
+          </a:fillRef>
+          <a:effectRef idx="2">
+            <a:schemeClr val="accent1"/>
+          </a:effectRef>
+          <a:fontRef idx="minor">
+            <a:schemeClr val="lt1"/>
+          </a:fontRef>
+        </p:style>
+        <p:txBody>
+          <a:bodyPr rtlCol="0" anchor="ctr"/>
+          <a:lstStyle/>
+          <a:p>
+            <a:pPr algn="ctr"/>
+          </a:p>
+        </p:txBody>
+      </p:sp>
+      <p:cxnSp>
+        <p:nvCxnSpPr>
+          <p:cNvPr id="7" name="Connector 6"/>
+          <p:cNvCxnSpPr/>
+          <p:nvPr/>
+        </p:nvCxnSpPr>
+        <p:spPr>
+          <a:xfrm>
+            <a:off x="4220260" y="4209288"/>
+            <a:ext cx="2820620" cy="96774"/>
+          </a:xfrm>
+          <a:prstGeom prst="line">
+            <a:avLst/>
+          </a:prstGeom>
+          <a:ln w="22225">
+            <a:solidFill>
+              <a:srgbClr val="D32F2F"/>
+            </a:solidFill>
+          </a:ln>
+        </p:spPr>
+        <p:style>
+          <a:lnRef idx="2">
+            <a:schemeClr val="accent1"/>
+          </a:lnRef>
+          <a:fillRef idx="0">
+            <a:schemeClr val="accent1"/>
+          </a:fillRef>
+          <a:effectRef idx="1">
+            <a:schemeClr val="accent1"/>
+          </a:effectRef>
+          <a:fontRef idx="minor">
+            <a:schemeClr val="tx1"/>
+          </a:fontRef>
+        </p:style>
+      </p:cxnSp>
+      <p:sp>
+        <p:nvSpPr>
+          <p:cNvPr id="8" name="Oval 7"/>
+          <p:cNvSpPr/>
+          <p:nvPr/>
+        </p:nvSpPr>
+        <p:spPr>
+          <a:xfrm>
+            <a:off x="7077456" y="4114038"/>
+            <a:ext cx="384048" cy="384048"/>
+          </a:xfrm>
+          <a:prstGeom prst="ellipse">
+            <a:avLst/>
+          </a:prstGeom>
+          <a:solidFill>
+            <a:srgbClr val="D32F2F"/>
+          </a:solidFill>
+          <a:ln w="19050">
+            <a:solidFill>
+              <a:srgbClr val="FFFFFF"/>
+            </a:solidFill>
+          </a:ln>
+          <a:effectLst/>
+        </p:spPr>
+        <p:style>
+          <a:lnRef idx="1">
+            <a:schemeClr val="accent1"/>
+          </a:lnRef>
+          <a:fillRef idx="3">
+            <a:schemeClr val="accent1"/>
+          </a:fillRef>
+          <a:effectRef idx="2">
+            <a:schemeClr val="accent1"/>
+          </a:effectRef>
+          <a:fontRef idx="minor">
+            <a:schemeClr val="lt1"/>
+          </a:fontRef>
+        </p:style>
+        <p:txBody>
+          <a:bodyPr rtlCol="0" anchor="ctr" lIns="0" rIns="0" tIns="0" bIns="0"/>
+          <a:lstStyle/>
+          <a:p>
+            <a:pPr algn="ctr"/>
+            <a:r>
+              <a:rPr sz="1400" b="1">
+                <a:solidFill>
+                  <a:srgbClr val="FFFFFF"/>
+                </a:solidFill>
+                <a:latin typeface="Yu Gothic"/>
+              </a:rPr>
+              <a:t>1</a:t>
+            </a:r>
+          </a:p>
+        </p:txBody>
+      </p:sp>
+      <p:sp>
+        <p:nvSpPr>
+          <p:cNvPr id="9" name="TextBox 8"/>
+          <p:cNvSpPr txBox="1"/>
+          <p:nvPr/>
+        </p:nvSpPr>
+        <p:spPr>
+          <a:xfrm>
+            <a:off x="7635240" y="4031742"/>
+            <a:ext cx="4754880" cy="411480"/>
+          </a:xfrm>
+          <a:prstGeom prst="rect">
+            <a:avLst/>
+          </a:prstGeom>
+          <a:noFill/>
+        </p:spPr>
+        <p:txBody>
+          <a:bodyPr wrap="square" lIns="45720" rIns="45720" anchor="ctr">
+            <a:spAutoFit/>
+          </a:bodyPr>
+          <a:lstStyle/>
+          <a:p>
+            <a:pPr algn="l"/>
+            <a:r>
+              <a:rPr sz="2000" b="1">
+                <a:solidFill>
+                  <a:srgbClr val="333333"/>
+                </a:solidFill>
+                <a:latin typeface="Yu Gothic"/>
+              </a:rPr>
+              <a:t>保険期間</a:t>
+            </a:r>
+          </a:p>
+        </p:txBody>
+      </p:sp>
+      <p:sp>
+        <p:nvSpPr>
+          <p:cNvPr id="10" name="TextBox 9"/>
+          <p:cNvSpPr txBox="1"/>
+          <p:nvPr/>
+        </p:nvSpPr>
+        <p:spPr>
+          <a:xfrm>
+            <a:off x="7635240" y="4415790"/>
+            <a:ext cx="4754880" cy="365760"/>
+          </a:xfrm>
+          <a:prstGeom prst="rect">
+            <a:avLst/>
+          </a:prstGeom>
+          <a:noFill/>
+        </p:spPr>
+        <p:txBody>
+          <a:bodyPr wrap="square" lIns="45720" rIns="45720" anchor="t">
+            <a:spAutoFit/>
+          </a:bodyPr>
+          <a:lstStyle/>
+          <a:p>
+            <a:pPr algn="l"/>
+            <a:r>
+              <a:rPr sz="1400" b="0">
+                <a:solidFill>
+                  <a:srgbClr val="666666"/>
+                </a:solidFill>
+                <a:latin typeface="Yu Gothic"/>
+              </a:rPr>
+              <a:t>期限が切れていない</a:t>
+            </a:r>
+          </a:p>
+        </p:txBody>
+      </p:sp>
+      <p:sp>
+        <p:nvSpPr>
+          <p:cNvPr id="11" name="Rounded Rectangle 10"/>
+          <p:cNvSpPr/>
+          <p:nvPr/>
+        </p:nvSpPr>
+        <p:spPr>
+          <a:xfrm>
+            <a:off x="3418636" y="5063032"/>
+            <a:ext cx="1936699" cy="234086"/>
+          </a:xfrm>
+          <a:prstGeom prst="roundRect">
+            <a:avLst>
+              <a:gd name="adj" fmla="val 12000"/>
+            </a:avLst>
+          </a:prstGeom>
+          <a:noFill/>
+          <a:ln w="38100">
+            <a:solidFill>
+              <a:srgbClr val="D32F2F"/>
+            </a:solidFill>
+          </a:ln>
+          <a:effectLst/>
+        </p:spPr>
+        <p:style>
+          <a:lnRef idx="1">
+            <a:schemeClr val="accent1"/>
+          </a:lnRef>
+          <a:fillRef idx="3">
+            <a:schemeClr val="accent1"/>
+          </a:fillRef>
+          <a:effectRef idx="2">
+            <a:schemeClr val="accent1"/>
+          </a:effectRef>
+          <a:fontRef idx="minor">
+            <a:schemeClr val="lt1"/>
+          </a:fontRef>
+        </p:style>
+        <p:txBody>
+          <a:bodyPr rtlCol="0" anchor="ctr"/>
+          <a:lstStyle/>
+          <a:p>
+            <a:pPr algn="ctr"/>
+          </a:p>
+        </p:txBody>
+      </p:sp>
+      <p:cxnSp>
+        <p:nvCxnSpPr>
+          <p:cNvPr id="12" name="Connector 11"/>
+          <p:cNvCxnSpPr/>
+          <p:nvPr/>
+        </p:nvCxnSpPr>
+        <p:spPr>
+          <a:xfrm flipV="1">
+            <a:off x="5355336" y="5083302"/>
+            <a:ext cx="1685544" cy="96774"/>
+          </a:xfrm>
+          <a:prstGeom prst="line">
+            <a:avLst/>
+          </a:prstGeom>
+          <a:ln w="22225">
+            <a:solidFill>
+              <a:srgbClr val="D32F2F"/>
+            </a:solidFill>
+          </a:ln>
+        </p:spPr>
+        <p:style>
+          <a:lnRef idx="2">
+            <a:schemeClr val="accent1"/>
+          </a:lnRef>
+          <a:fillRef idx="0">
+            <a:schemeClr val="accent1"/>
+          </a:fillRef>
+          <a:effectRef idx="1">
+            <a:schemeClr val="accent1"/>
+          </a:effectRef>
+          <a:fontRef idx="minor">
+            <a:schemeClr val="tx1"/>
+          </a:fontRef>
+        </p:style>
+      </p:cxnSp>
+      <p:sp>
+        <p:nvSpPr>
+          <p:cNvPr id="13" name="Oval 12"/>
+          <p:cNvSpPr/>
+          <p:nvPr/>
+        </p:nvSpPr>
+        <p:spPr>
+          <a:xfrm>
+            <a:off x="7077456" y="4891278"/>
+            <a:ext cx="384048" cy="384048"/>
+          </a:xfrm>
+          <a:prstGeom prst="ellipse">
+            <a:avLst/>
+          </a:prstGeom>
+          <a:solidFill>
+            <a:srgbClr val="D32F2F"/>
+          </a:solidFill>
+          <a:ln w="19050">
+            <a:solidFill>
+              <a:srgbClr val="FFFFFF"/>
+            </a:solidFill>
+          </a:ln>
+          <a:effectLst/>
+        </p:spPr>
+        <p:style>
+          <a:lnRef idx="1">
+            <a:schemeClr val="accent1"/>
+          </a:lnRef>
+          <a:fillRef idx="3">
+            <a:schemeClr val="accent1"/>
+          </a:fillRef>
+          <a:effectRef idx="2">
+            <a:schemeClr val="accent1"/>
+          </a:effectRef>
+          <a:fontRef idx="minor">
+            <a:schemeClr val="lt1"/>
+          </a:fontRef>
+        </p:style>
+        <p:txBody>
+          <a:bodyPr rtlCol="0" anchor="ctr" lIns="0" rIns="0" tIns="0" bIns="0"/>
+          <a:lstStyle/>
+          <a:p>
+            <a:pPr algn="ctr"/>
+            <a:r>
+              <a:rPr sz="1400" b="1">
+                <a:solidFill>
+                  <a:srgbClr val="FFFFFF"/>
+                </a:solidFill>
+                <a:latin typeface="Yu Gothic"/>
+              </a:rPr>
+              <a:t>2</a:t>
+            </a:r>
+          </a:p>
+        </p:txBody>
+      </p:sp>
+      <p:sp>
+        <p:nvSpPr>
+          <p:cNvPr id="14" name="TextBox 13"/>
+          <p:cNvSpPr txBox="1"/>
+          <p:nvPr/>
+        </p:nvSpPr>
+        <p:spPr>
+          <a:xfrm>
+            <a:off x="7635240" y="4808982"/>
+            <a:ext cx="4754880" cy="411480"/>
+          </a:xfrm>
+          <a:prstGeom prst="rect">
+            <a:avLst/>
+          </a:prstGeom>
+          <a:noFill/>
+        </p:spPr>
+        <p:txBody>
+          <a:bodyPr wrap="square" lIns="45720" rIns="45720" anchor="ctr">
+            <a:spAutoFit/>
+          </a:bodyPr>
+          <a:lstStyle/>
+          <a:p>
+            <a:pPr algn="l"/>
+            <a:r>
+              <a:rPr sz="2000" b="1">
+                <a:solidFill>
+                  <a:srgbClr val="333333"/>
+                </a:solidFill>
+                <a:latin typeface="Yu Gothic"/>
+              </a:rPr>
+              <a:t>車台番号</a:t>
+            </a:r>
+          </a:p>
+        </p:txBody>
+      </p:sp>
+      <p:sp>
+        <p:nvSpPr>
+          <p:cNvPr id="15" name="TextBox 14"/>
+          <p:cNvSpPr txBox="1"/>
+          <p:nvPr/>
+        </p:nvSpPr>
+        <p:spPr>
+          <a:xfrm>
+            <a:off x="7635240" y="5193030"/>
+            <a:ext cx="4754880" cy="365760"/>
+          </a:xfrm>
+          <a:prstGeom prst="rect">
+            <a:avLst/>
+          </a:prstGeom>
+          <a:noFill/>
+        </p:spPr>
+        <p:txBody>
+          <a:bodyPr wrap="square" lIns="45720" rIns="45720" anchor="t">
+            <a:spAutoFit/>
+          </a:bodyPr>
+          <a:lstStyle/>
+          <a:p>
+            <a:pPr algn="l"/>
+            <a:r>
+              <a:rPr sz="1400" b="0">
+                <a:solidFill>
+                  <a:srgbClr val="666666"/>
+                </a:solidFill>
+                <a:latin typeface="Yu Gothic"/>
+              </a:rPr>
+              <a:t>車検証・自賠責と同じ番号</a:t>
+            </a:r>
+          </a:p>
+        </p:txBody>
+      </p:sp>
+      <p:sp>
+        <p:nvSpPr>
+          <p:cNvPr id="16" name="TextBox 15"/>
+          <p:cNvSpPr txBox="1"/>
+          <p:nvPr/>
+        </p:nvSpPr>
+        <p:spPr>
+          <a:xfrm>
+            <a:off x="7223760" y="5989320"/>
+            <a:ext cx="5303520" cy="320040"/>
+          </a:xfrm>
+          <a:prstGeom prst="rect">
+            <a:avLst/>
+          </a:prstGeom>
+          <a:noFill/>
+        </p:spPr>
+        <p:txBody>
+          <a:bodyPr wrap="square" lIns="45720" rIns="45720" anchor="t">
+            <a:spAutoFit/>
+          </a:bodyPr>
+          <a:lstStyle/>
+          <a:p>
+            <a:pPr algn="l"/>
+            <a:r>
+              <a:rPr sz="1100" b="0">
+                <a:solidFill>
+                  <a:srgbClr val="666666"/>
+                </a:solidFill>
+                <a:latin typeface="Yu Gothic"/>
+              </a:rPr>
+              <a:t>※ 住所・氏名などの個人情報は、見本では塗りつぶしています</a:t>
+            </a:r>
+          </a:p>
+        </p:txBody>
+      </p:sp>
+    </p:spTree>
+  </p:cSld>
+  <p:clrMapOvr>
+    <a:masterClrMapping/>
+  </p:clrMapOvr>
+</p:sld>
+</file>
+
+<file path=ppt/slides/slide44.xml><?xml version="1.0" encoding="utf-8"?>
+<p:sld xmlns:a="http://schemas.openxmlformats.org/drawingml/2006/main" xmlns:p="http://schemas.openxmlformats.org/presentationml/2006/main" xmlns:r="http://schemas.openxmlformats.org/officeDocument/2006/relationships">
+  <p:cSld>
+    <p:spTree>
+      <p:nvGrpSpPr>
+        <p:cNvPr id="1" name=""/>
+        <p:cNvGrpSpPr/>
+        <p:nvPr/>
+      </p:nvGrpSpPr>
+      <p:grpSpPr/>
+      <p:sp>
+        <p:nvSpPr>
+          <p:cNvPr id="2" name="Rounded Rectangle 1"/>
+          <p:cNvSpPr/>
+          <p:nvPr/>
+        </p:nvSpPr>
+        <p:spPr>
+          <a:xfrm>
+            <a:off x="411480" y="777240"/>
+            <a:ext cx="502920" cy="384048"/>
+          </a:xfrm>
+          <a:prstGeom prst="roundRect">
+            <a:avLst>
+              <a:gd name="adj" fmla="val 8000"/>
+            </a:avLst>
+          </a:prstGeom>
+          <a:solidFill>
+            <a:srgbClr val="4FB6BE"/>
+          </a:solidFill>
+          <a:ln>
+            <a:noFill/>
+          </a:ln>
+          <a:effectLst/>
+        </p:spPr>
+        <p:style>
+          <a:lnRef idx="1">
+            <a:schemeClr val="accent1"/>
+          </a:lnRef>
+          <a:fillRef idx="3">
+            <a:schemeClr val="accent1"/>
+          </a:fillRef>
+          <a:effectRef idx="2">
+            <a:schemeClr val="accent1"/>
+          </a:effectRef>
+          <a:fontRef idx="minor">
+            <a:schemeClr val="lt1"/>
+          </a:fontRef>
+        </p:style>
+        <p:txBody>
+          <a:bodyPr rtlCol="0" anchor="ctr"/>
+          <a:lstStyle/>
+          <a:p>
+            <a:pPr algn="ctr"/>
+          </a:p>
+        </p:txBody>
+      </p:sp>
+      <p:sp>
+        <p:nvSpPr>
+          <p:cNvPr id="3" name="TextBox 2"/>
+          <p:cNvSpPr txBox="1"/>
+          <p:nvPr/>
+        </p:nvSpPr>
+        <p:spPr>
+          <a:xfrm>
+            <a:off x="411480" y="777240"/>
+            <a:ext cx="502920" cy="384048"/>
+          </a:xfrm>
+          <a:prstGeom prst="rect">
+            <a:avLst/>
+          </a:prstGeom>
+          <a:noFill/>
+        </p:spPr>
+        <p:txBody>
+          <a:bodyPr wrap="square" lIns="45720" rIns="45720" anchor="ctr">
+            <a:spAutoFit/>
+          </a:bodyPr>
+          <a:lstStyle/>
+          <a:p>
+            <a:pPr algn="ctr"/>
+            <a:r>
+              <a:rPr sz="1200" b="1">
+                <a:solidFill>
+                  <a:srgbClr val="FFFFFF"/>
+                </a:solidFill>
+                <a:latin typeface="Yu Gothic"/>
+              </a:rPr>
+              <a:t>①</a:t>
+            </a:r>
+          </a:p>
+        </p:txBody>
+      </p:sp>
+      <p:sp>
+        <p:nvSpPr>
+          <p:cNvPr id="4" name="TextBox 3"/>
+          <p:cNvSpPr txBox="1"/>
+          <p:nvPr/>
+        </p:nvSpPr>
+        <p:spPr>
+          <a:xfrm>
+            <a:off x="1078992" y="777240"/>
+            <a:ext cx="10607040" cy="384048"/>
+          </a:xfrm>
+          <a:prstGeom prst="rect">
+            <a:avLst/>
+          </a:prstGeom>
+          <a:noFill/>
+        </p:spPr>
+        <p:txBody>
+          <a:bodyPr wrap="square" lIns="45720" rIns="45720" anchor="ctr">
+            <a:spAutoFit/>
+          </a:bodyPr>
+          <a:lstStyle/>
+          <a:p>
+            <a:pPr algn="l"/>
+            <a:r>
+              <a:rPr sz="2000" b="1">
+                <a:solidFill>
+                  <a:srgbClr val="333333"/>
+                </a:solidFill>
+                <a:latin typeface="Yu Gothic"/>
+              </a:rPr>
+              <a:t>任意保険（ご契約内容 2ページ目）</a:t>
+            </a:r>
+          </a:p>
+        </p:txBody>
+      </p:sp>
+      <p:pic>
+        <p:nvPicPr>
+          <p:cNvPr id="5" name="Picture 4" descr="m_a2.png"/>
+          <p:cNvPicPr>
+            <a:picLocks noChangeAspect="1"/>
+          </p:cNvPicPr>
+          <p:nvPr/>
+        </p:nvPicPr>
+        <p:blipFill>
+          <a:blip r:embed="rId2"/>
+          <a:stretch>
+            <a:fillRect/>
+          </a:stretch>
+        </p:blipFill>
+        <p:spPr>
+          <a:xfrm>
+            <a:off x="548640" y="1371600"/>
+            <a:ext cx="6233355" cy="4389120"/>
+          </a:xfrm>
+          <a:prstGeom prst="rect">
+            <a:avLst/>
+          </a:prstGeom>
+          <a:ln w="12700">
+            <a:solidFill>
+              <a:srgbClr val="BBBBBB"/>
+            </a:solidFill>
+          </a:ln>
+        </p:spPr>
+      </p:pic>
+      <p:sp>
+        <p:nvSpPr>
+          <p:cNvPr id="6" name="Rounded Rectangle 5"/>
+          <p:cNvSpPr/>
+          <p:nvPr/>
+        </p:nvSpPr>
+        <p:spPr>
+          <a:xfrm>
+            <a:off x="2735901" y="2310579"/>
+            <a:ext cx="2229290" cy="377001"/>
+          </a:xfrm>
+          <a:prstGeom prst="roundRect">
+            <a:avLst>
+              <a:gd name="adj" fmla="val 12000"/>
+            </a:avLst>
+          </a:prstGeom>
+          <a:noFill/>
+          <a:ln w="38100">
+            <a:solidFill>
+              <a:srgbClr val="D32F2F"/>
+            </a:solidFill>
+          </a:ln>
+          <a:effectLst/>
+        </p:spPr>
+        <p:style>
+          <a:lnRef idx="1">
+            <a:schemeClr val="accent1"/>
+          </a:lnRef>
+          <a:fillRef idx="3">
+            <a:schemeClr val="accent1"/>
+          </a:fillRef>
+          <a:effectRef idx="2">
+            <a:schemeClr val="accent1"/>
+          </a:effectRef>
+          <a:fontRef idx="minor">
+            <a:schemeClr val="lt1"/>
+          </a:fontRef>
+        </p:style>
+        <p:txBody>
+          <a:bodyPr rtlCol="0" anchor="ctr"/>
+          <a:lstStyle/>
+          <a:p>
+            <a:pPr algn="ctr"/>
+          </a:p>
+        </p:txBody>
+      </p:sp>
+      <p:cxnSp>
+        <p:nvCxnSpPr>
+          <p:cNvPr id="7" name="Connector 6"/>
+          <p:cNvCxnSpPr/>
+          <p:nvPr/>
+        </p:nvCxnSpPr>
+        <p:spPr>
+          <a:xfrm flipV="1">
+            <a:off x="4965192" y="2089613"/>
+            <a:ext cx="2075688" cy="409467"/>
+          </a:xfrm>
+          <a:prstGeom prst="line">
+            <a:avLst/>
+          </a:prstGeom>
+          <a:ln w="22225">
+            <a:solidFill>
+              <a:srgbClr val="D32F2F"/>
+            </a:solidFill>
+          </a:ln>
+        </p:spPr>
+        <p:style>
+          <a:lnRef idx="2">
+            <a:schemeClr val="accent1"/>
+          </a:lnRef>
+          <a:fillRef idx="0">
+            <a:schemeClr val="accent1"/>
+          </a:fillRef>
+          <a:effectRef idx="1">
+            <a:schemeClr val="accent1"/>
+          </a:effectRef>
+          <a:fontRef idx="minor">
+            <a:schemeClr val="tx1"/>
+          </a:fontRef>
+        </p:style>
+      </p:cxnSp>
+      <p:sp>
+        <p:nvSpPr>
+          <p:cNvPr id="8" name="Oval 7"/>
+          <p:cNvSpPr/>
+          <p:nvPr/>
+        </p:nvSpPr>
+        <p:spPr>
+          <a:xfrm>
+            <a:off x="7077456" y="1897589"/>
+            <a:ext cx="384048" cy="384048"/>
+          </a:xfrm>
+          <a:prstGeom prst="ellipse">
+            <a:avLst/>
+          </a:prstGeom>
+          <a:solidFill>
+            <a:srgbClr val="D32F2F"/>
+          </a:solidFill>
+          <a:ln w="19050">
+            <a:solidFill>
+              <a:srgbClr val="FFFFFF"/>
+            </a:solidFill>
+          </a:ln>
+          <a:effectLst/>
+        </p:spPr>
+        <p:style>
+          <a:lnRef idx="1">
+            <a:schemeClr val="accent1"/>
+          </a:lnRef>
+          <a:fillRef idx="3">
+            <a:schemeClr val="accent1"/>
+          </a:fillRef>
+          <a:effectRef idx="2">
+            <a:schemeClr val="accent1"/>
+          </a:effectRef>
+          <a:fontRef idx="minor">
+            <a:schemeClr val="lt1"/>
+          </a:fontRef>
+        </p:style>
+        <p:txBody>
+          <a:bodyPr rtlCol="0" anchor="ctr" lIns="0" rIns="0" tIns="0" bIns="0"/>
+          <a:lstStyle/>
+          <a:p>
+            <a:pPr algn="ctr"/>
+            <a:r>
+              <a:rPr sz="1400" b="1">
+                <a:solidFill>
+                  <a:srgbClr val="FFFFFF"/>
+                </a:solidFill>
+                <a:latin typeface="Yu Gothic"/>
+              </a:rPr>
+              <a:t>1</a:t>
+            </a:r>
+          </a:p>
+        </p:txBody>
+      </p:sp>
+      <p:sp>
+        <p:nvSpPr>
+          <p:cNvPr id="9" name="TextBox 8"/>
+          <p:cNvSpPr txBox="1"/>
+          <p:nvPr/>
+        </p:nvSpPr>
+        <p:spPr>
+          <a:xfrm>
+            <a:off x="7635240" y="1815293"/>
+            <a:ext cx="4754880" cy="411480"/>
+          </a:xfrm>
+          <a:prstGeom prst="rect">
+            <a:avLst/>
+          </a:prstGeom>
+          <a:noFill/>
+        </p:spPr>
+        <p:txBody>
+          <a:bodyPr wrap="square" lIns="45720" rIns="45720" anchor="ctr">
+            <a:spAutoFit/>
+          </a:bodyPr>
+          <a:lstStyle/>
+          <a:p>
+            <a:pPr algn="l"/>
+            <a:r>
+              <a:rPr sz="2000" b="1">
+                <a:solidFill>
+                  <a:srgbClr val="333333"/>
+                </a:solidFill>
+                <a:latin typeface="Yu Gothic"/>
+              </a:rPr>
+              <a:t>対人賠償</a:t>
+            </a:r>
+          </a:p>
+        </p:txBody>
+      </p:sp>
+      <p:sp>
+        <p:nvSpPr>
+          <p:cNvPr id="10" name="TextBox 9"/>
+          <p:cNvSpPr txBox="1"/>
+          <p:nvPr/>
+        </p:nvSpPr>
+        <p:spPr>
+          <a:xfrm>
+            <a:off x="7635240" y="2199341"/>
+            <a:ext cx="4754880" cy="365760"/>
+          </a:xfrm>
+          <a:prstGeom prst="rect">
+            <a:avLst/>
+          </a:prstGeom>
+          <a:noFill/>
+        </p:spPr>
+        <p:txBody>
+          <a:bodyPr wrap="square" lIns="45720" rIns="45720" anchor="t">
+            <a:spAutoFit/>
+          </a:bodyPr>
+          <a:lstStyle/>
+          <a:p>
+            <a:pPr algn="l"/>
+            <a:r>
+              <a:rPr sz="1400" b="0">
+                <a:solidFill>
+                  <a:srgbClr val="666666"/>
+                </a:solidFill>
+                <a:latin typeface="Yu Gothic"/>
+              </a:rPr>
+              <a:t>無制限</a:t>
+            </a:r>
+          </a:p>
+        </p:txBody>
+      </p:sp>
+      <p:sp>
+        <p:nvSpPr>
+          <p:cNvPr id="11" name="Rounded Rectangle 10"/>
+          <p:cNvSpPr/>
+          <p:nvPr/>
+        </p:nvSpPr>
+        <p:spPr>
+          <a:xfrm>
+            <a:off x="2735901" y="2648823"/>
+            <a:ext cx="2229290" cy="409214"/>
+          </a:xfrm>
+          <a:prstGeom prst="roundRect">
+            <a:avLst>
+              <a:gd name="adj" fmla="val 12000"/>
+            </a:avLst>
+          </a:prstGeom>
+          <a:noFill/>
+          <a:ln w="38100">
+            <a:solidFill>
+              <a:srgbClr val="D32F2F"/>
+            </a:solidFill>
+          </a:ln>
+          <a:effectLst/>
+        </p:spPr>
+        <p:style>
+          <a:lnRef idx="1">
+            <a:schemeClr val="accent1"/>
+          </a:lnRef>
+          <a:fillRef idx="3">
+            <a:schemeClr val="accent1"/>
+          </a:fillRef>
+          <a:effectRef idx="2">
+            <a:schemeClr val="accent1"/>
+          </a:effectRef>
+          <a:fontRef idx="minor">
+            <a:schemeClr val="lt1"/>
+          </a:fontRef>
+        </p:style>
+        <p:txBody>
+          <a:bodyPr rtlCol="0" anchor="ctr"/>
+          <a:lstStyle/>
+          <a:p>
+            <a:pPr algn="ctr"/>
+          </a:p>
+        </p:txBody>
+      </p:sp>
+      <p:cxnSp>
+        <p:nvCxnSpPr>
+          <p:cNvPr id="12" name="Connector 11"/>
+          <p:cNvCxnSpPr/>
+          <p:nvPr/>
+        </p:nvCxnSpPr>
+        <p:spPr>
+          <a:xfrm>
+            <a:off x="4965192" y="2853431"/>
+            <a:ext cx="2075688" cy="13422"/>
+          </a:xfrm>
+          <a:prstGeom prst="line">
+            <a:avLst/>
+          </a:prstGeom>
+          <a:ln w="22225">
+            <a:solidFill>
+              <a:srgbClr val="D32F2F"/>
+            </a:solidFill>
+          </a:ln>
+        </p:spPr>
+        <p:style>
+          <a:lnRef idx="2">
+            <a:schemeClr val="accent1"/>
+          </a:lnRef>
+          <a:fillRef idx="0">
+            <a:schemeClr val="accent1"/>
+          </a:fillRef>
+          <a:effectRef idx="1">
+            <a:schemeClr val="accent1"/>
+          </a:effectRef>
+          <a:fontRef idx="minor">
+            <a:schemeClr val="tx1"/>
+          </a:fontRef>
+        </p:style>
+      </p:cxnSp>
+      <p:sp>
+        <p:nvSpPr>
+          <p:cNvPr id="13" name="Oval 12"/>
+          <p:cNvSpPr/>
+          <p:nvPr/>
+        </p:nvSpPr>
+        <p:spPr>
+          <a:xfrm>
+            <a:off x="7077456" y="2674829"/>
+            <a:ext cx="384048" cy="384048"/>
+          </a:xfrm>
+          <a:prstGeom prst="ellipse">
+            <a:avLst/>
+          </a:prstGeom>
+          <a:solidFill>
+            <a:srgbClr val="D32F2F"/>
+          </a:solidFill>
+          <a:ln w="19050">
+            <a:solidFill>
+              <a:srgbClr val="FFFFFF"/>
+            </a:solidFill>
+          </a:ln>
+          <a:effectLst/>
+        </p:spPr>
+        <p:style>
+          <a:lnRef idx="1">
+            <a:schemeClr val="accent1"/>
+          </a:lnRef>
+          <a:fillRef idx="3">
+            <a:schemeClr val="accent1"/>
+          </a:fillRef>
+          <a:effectRef idx="2">
+            <a:schemeClr val="accent1"/>
+          </a:effectRef>
+          <a:fontRef idx="minor">
+            <a:schemeClr val="lt1"/>
+          </a:fontRef>
+        </p:style>
+        <p:txBody>
+          <a:bodyPr rtlCol="0" anchor="ctr" lIns="0" rIns="0" tIns="0" bIns="0"/>
+          <a:lstStyle/>
+          <a:p>
+            <a:pPr algn="ctr"/>
+            <a:r>
+              <a:rPr sz="1400" b="1">
+                <a:solidFill>
+                  <a:srgbClr val="FFFFFF"/>
+                </a:solidFill>
+                <a:latin typeface="Yu Gothic"/>
+              </a:rPr>
+              <a:t>2</a:t>
+            </a:r>
+          </a:p>
+        </p:txBody>
+      </p:sp>
+      <p:sp>
+        <p:nvSpPr>
+          <p:cNvPr id="14" name="TextBox 13"/>
+          <p:cNvSpPr txBox="1"/>
+          <p:nvPr/>
+        </p:nvSpPr>
+        <p:spPr>
+          <a:xfrm>
+            <a:off x="7635240" y="2592533"/>
+            <a:ext cx="4754880" cy="411480"/>
+          </a:xfrm>
+          <a:prstGeom prst="rect">
+            <a:avLst/>
+          </a:prstGeom>
+          <a:noFill/>
+        </p:spPr>
+        <p:txBody>
+          <a:bodyPr wrap="square" lIns="45720" rIns="45720" anchor="ctr">
+            <a:spAutoFit/>
+          </a:bodyPr>
+          <a:lstStyle/>
+          <a:p>
+            <a:pPr algn="l"/>
+            <a:r>
+              <a:rPr sz="2000" b="1">
+                <a:solidFill>
+                  <a:srgbClr val="333333"/>
+                </a:solidFill>
+                <a:latin typeface="Yu Gothic"/>
+              </a:rPr>
+              <a:t>対物賠償</a:t>
+            </a:r>
+          </a:p>
+        </p:txBody>
+      </p:sp>
+      <p:sp>
+        <p:nvSpPr>
+          <p:cNvPr id="15" name="TextBox 14"/>
+          <p:cNvSpPr txBox="1"/>
+          <p:nvPr/>
+        </p:nvSpPr>
+        <p:spPr>
+          <a:xfrm>
+            <a:off x="7635240" y="2976581"/>
+            <a:ext cx="4754880" cy="365760"/>
+          </a:xfrm>
+          <a:prstGeom prst="rect">
+            <a:avLst/>
+          </a:prstGeom>
+          <a:noFill/>
+        </p:spPr>
+        <p:txBody>
+          <a:bodyPr wrap="square" lIns="45720" rIns="45720" anchor="t">
+            <a:spAutoFit/>
+          </a:bodyPr>
+          <a:lstStyle/>
+          <a:p>
+            <a:pPr algn="l"/>
+            <a:r>
+              <a:rPr sz="1400" b="0">
+                <a:solidFill>
+                  <a:srgbClr val="666666"/>
+                </a:solidFill>
+                <a:latin typeface="Yu Gothic"/>
+              </a:rPr>
+              <a:t>無制限</a:t>
+            </a:r>
+          </a:p>
+        </p:txBody>
+      </p:sp>
+      <p:sp>
+        <p:nvSpPr>
+          <p:cNvPr id="16" name="Rounded Rectangle 15"/>
+          <p:cNvSpPr/>
+          <p:nvPr/>
+        </p:nvSpPr>
+        <p:spPr>
+          <a:xfrm>
+            <a:off x="2735901" y="3035388"/>
+            <a:ext cx="2229290" cy="425321"/>
+          </a:xfrm>
+          <a:prstGeom prst="roundRect">
+            <a:avLst>
+              <a:gd name="adj" fmla="val 12000"/>
+            </a:avLst>
+          </a:prstGeom>
+          <a:noFill/>
+          <a:ln w="38100">
+            <a:solidFill>
+              <a:srgbClr val="D32F2F"/>
+            </a:solidFill>
+          </a:ln>
+          <a:effectLst/>
+        </p:spPr>
+        <p:style>
+          <a:lnRef idx="1">
+            <a:schemeClr val="accent1"/>
+          </a:lnRef>
+          <a:fillRef idx="3">
+            <a:schemeClr val="accent1"/>
+          </a:fillRef>
+          <a:effectRef idx="2">
+            <a:schemeClr val="accent1"/>
+          </a:effectRef>
+          <a:fontRef idx="minor">
+            <a:schemeClr val="lt1"/>
+          </a:fontRef>
+        </p:style>
+        <p:txBody>
+          <a:bodyPr rtlCol="0" anchor="ctr"/>
+          <a:lstStyle/>
+          <a:p>
+            <a:pPr algn="ctr"/>
+          </a:p>
+        </p:txBody>
+      </p:sp>
+      <p:cxnSp>
+        <p:nvCxnSpPr>
+          <p:cNvPr id="17" name="Connector 16"/>
+          <p:cNvCxnSpPr/>
+          <p:nvPr/>
+        </p:nvCxnSpPr>
+        <p:spPr>
+          <a:xfrm>
+            <a:off x="4965192" y="3248049"/>
+            <a:ext cx="2075688" cy="396044"/>
+          </a:xfrm>
+          <a:prstGeom prst="line">
+            <a:avLst/>
+          </a:prstGeom>
+          <a:ln w="22225">
+            <a:solidFill>
+              <a:srgbClr val="D32F2F"/>
+            </a:solidFill>
+          </a:ln>
+        </p:spPr>
+        <p:style>
+          <a:lnRef idx="2">
+            <a:schemeClr val="accent1"/>
+          </a:lnRef>
+          <a:fillRef idx="0">
+            <a:schemeClr val="accent1"/>
+          </a:fillRef>
+          <a:effectRef idx="1">
+            <a:schemeClr val="accent1"/>
+          </a:effectRef>
+          <a:fontRef idx="minor">
+            <a:schemeClr val="tx1"/>
+          </a:fontRef>
+        </p:style>
+      </p:cxnSp>
+      <p:sp>
+        <p:nvSpPr>
+          <p:cNvPr id="18" name="Oval 17"/>
+          <p:cNvSpPr/>
+          <p:nvPr/>
+        </p:nvSpPr>
+        <p:spPr>
+          <a:xfrm>
+            <a:off x="7077456" y="3452069"/>
+            <a:ext cx="384048" cy="384048"/>
+          </a:xfrm>
+          <a:prstGeom prst="ellipse">
+            <a:avLst/>
+          </a:prstGeom>
+          <a:solidFill>
+            <a:srgbClr val="D32F2F"/>
+          </a:solidFill>
+          <a:ln w="19050">
+            <a:solidFill>
+              <a:srgbClr val="FFFFFF"/>
+            </a:solidFill>
+          </a:ln>
+          <a:effectLst/>
+        </p:spPr>
+        <p:style>
+          <a:lnRef idx="1">
+            <a:schemeClr val="accent1"/>
+          </a:lnRef>
+          <a:fillRef idx="3">
+            <a:schemeClr val="accent1"/>
+          </a:fillRef>
+          <a:effectRef idx="2">
+            <a:schemeClr val="accent1"/>
+          </a:effectRef>
+          <a:fontRef idx="minor">
+            <a:schemeClr val="lt1"/>
+          </a:fontRef>
+        </p:style>
+        <p:txBody>
+          <a:bodyPr rtlCol="0" anchor="ctr" lIns="0" rIns="0" tIns="0" bIns="0"/>
+          <a:lstStyle/>
+          <a:p>
+            <a:pPr algn="ctr"/>
+            <a:r>
+              <a:rPr sz="1400" b="1">
+                <a:solidFill>
+                  <a:srgbClr val="FFFFFF"/>
+                </a:solidFill>
+                <a:latin typeface="Yu Gothic"/>
+              </a:rPr>
+              <a:t>3</a:t>
+            </a:r>
+          </a:p>
+        </p:txBody>
+      </p:sp>
+      <p:sp>
+        <p:nvSpPr>
+          <p:cNvPr id="19" name="TextBox 18"/>
+          <p:cNvSpPr txBox="1"/>
+          <p:nvPr/>
+        </p:nvSpPr>
+        <p:spPr>
+          <a:xfrm>
+            <a:off x="7635240" y="3369773"/>
+            <a:ext cx="4754880" cy="411480"/>
+          </a:xfrm>
+          <a:prstGeom prst="rect">
+            <a:avLst/>
+          </a:prstGeom>
+          <a:noFill/>
+        </p:spPr>
+        <p:txBody>
+          <a:bodyPr wrap="square" lIns="45720" rIns="45720" anchor="ctr">
+            <a:spAutoFit/>
+          </a:bodyPr>
+          <a:lstStyle/>
+          <a:p>
+            <a:pPr algn="l"/>
+            <a:r>
+              <a:rPr sz="2000" b="1">
+                <a:solidFill>
+                  <a:srgbClr val="333333"/>
+                </a:solidFill>
+                <a:latin typeface="Yu Gothic"/>
+              </a:rPr>
+              <a:t>人身傷害</a:t>
+            </a:r>
+          </a:p>
+        </p:txBody>
+      </p:sp>
+      <p:sp>
+        <p:nvSpPr>
+          <p:cNvPr id="20" name="TextBox 19"/>
+          <p:cNvSpPr txBox="1"/>
+          <p:nvPr/>
+        </p:nvSpPr>
+        <p:spPr>
+          <a:xfrm>
+            <a:off x="7635240" y="3753821"/>
+            <a:ext cx="4754880" cy="365760"/>
+          </a:xfrm>
+          <a:prstGeom prst="rect">
+            <a:avLst/>
+          </a:prstGeom>
+          <a:noFill/>
+        </p:spPr>
+        <p:txBody>
+          <a:bodyPr wrap="square" lIns="45720" rIns="45720" anchor="t">
+            <a:spAutoFit/>
+          </a:bodyPr>
+          <a:lstStyle/>
+          <a:p>
+            <a:pPr algn="l"/>
+            <a:r>
+              <a:rPr sz="1400" b="0">
+                <a:solidFill>
+                  <a:srgbClr val="666666"/>
+                </a:solidFill>
+                <a:latin typeface="Yu Gothic"/>
+              </a:rPr>
+              <a:t>3,000万円以上</a:t>
             </a:r>
           </a:p>
         </p:txBody>

--- a/out/登録の流れ_書類準備まで.pptx
+++ b/out/登録の流れ_書類準備まで.pptx
@@ -13654,7 +13654,7 @@
                 </a:solidFill>
                 <a:latin typeface="Yu Gothic"/>
               </a:rPr>
-              <a:t>西暦で入力（yyyy/mm/dd）</a:t>
+              <a:t>必ず記入した日を入力（yyyy/mm/dd）</a:t>
             </a:r>
           </a:p>
         </p:txBody>
@@ -14206,6 +14206,75 @@
                 <a:latin typeface="Yu Gothic"/>
               </a:rPr>
               <a:t>電話番号</a:t>
+            </a:r>
+          </a:p>
+        </p:txBody>
+      </p:sp>
+      <p:sp>
+        <p:nvSpPr>
+          <p:cNvPr id="24" name="Rounded Rectangle 23"/>
+          <p:cNvSpPr/>
+          <p:nvPr/>
+        </p:nvSpPr>
+        <p:spPr>
+          <a:xfrm>
+            <a:off x="5394960" y="4892040"/>
+            <a:ext cx="6355080" cy="914400"/>
+          </a:xfrm>
+          <a:prstGeom prst="roundRect">
+            <a:avLst>
+              <a:gd name="adj" fmla="val 10000"/>
+            </a:avLst>
+          </a:prstGeom>
+          <a:solidFill>
+            <a:srgbClr val="FDECEC"/>
+          </a:solidFill>
+          <a:ln w="25400">
+            <a:solidFill>
+              <a:srgbClr val="D32F2F"/>
+            </a:solidFill>
+          </a:ln>
+          <a:effectLst/>
+        </p:spPr>
+        <p:style>
+          <a:lnRef idx="1">
+            <a:schemeClr val="accent1"/>
+          </a:lnRef>
+          <a:fillRef idx="3">
+            <a:schemeClr val="accent1"/>
+          </a:fillRef>
+          <a:effectRef idx="2">
+            <a:schemeClr val="accent1"/>
+          </a:effectRef>
+          <a:fontRef idx="minor">
+            <a:schemeClr val="lt1"/>
+          </a:fontRef>
+        </p:style>
+        <p:txBody>
+          <a:bodyPr rtlCol="0" anchor="ctr" wrap="square" lIns="137160"/>
+          <a:lstStyle/>
+          <a:p>
+            <a:pPr algn="l"/>
+            <a:r>
+              <a:rPr sz="1700" b="1">
+                <a:solidFill>
+                  <a:srgbClr val="333333"/>
+                </a:solidFill>
+                <a:latin typeface="Yu Gothic"/>
+              </a:rPr>
+              <a:t>⚠ 契約日に誕生日などを入れない</a:t>
+            </a:r>
+          </a:p>
+          <a:p>
+            <a:pPr algn="l"/>
+            <a:r>
+              <a:rPr sz="1700" b="1">
+                <a:solidFill>
+                  <a:srgbClr val="333333"/>
+                </a:solidFill>
+                <a:latin typeface="Yu Gothic"/>
+              </a:rPr>
+              <a:t>必ず「記入した日」を入力する</a:t>
             </a:r>
           </a:p>
         </p:txBody>
@@ -15169,7 +15238,7 @@
                 </a:solidFill>
                 <a:latin typeface="Yu Gothic"/>
               </a:rPr>
-              <a:t>西暦で入力（yyyy/mm/dd）</a:t>
+              <a:t>必ず記入した日を入力（yyyy/mm/dd）</a:t>
             </a:r>
           </a:p>
         </p:txBody>
